--- a/downloads/presentations/modules/epi-300.pptx
+++ b/downloads/presentations/modules/epi-300.pptx
@@ -614,7 +614,8 @@
             <a:r>
               <a:rPr lang="en-US" dirty="0"/>
               <a:t>Topic Deep Dive
-Equity considerations should be explicit. Some communities may be less likely to seek care, be tested, respond to interviews, speak English, have stable contact information, or appear in digital datasets. AI-supported prioritization must not systematically deprioritize people or communities because the data available about them are incomplete.</a:t>
+Equity considerations should be explicit. Some communities may be less likely to seek care, be tested, respond to interviews, speak English, have stable contact information, or appear in digital datasets. AI-supported prioritization must not systematically deprioritize people or communities because the data available about them are incomplete.
+Application guidance: Connect the concept to public health purpose, responsible use, required safeguards, documentation, and the next action a department should take.</a:t>
             </a:r>
             <a:endParaRPr lang="en-US" dirty="0"/>
           </a:p>
@@ -705,7 +706,8 @@
               <a:t>Risks, Failure Modes, and Guardrails
 Risks and failure modes include the following:
 AI summaries omitting uncertainty or unsupported details.
-False outbreak signals creating unnecessary response or public concern.</a:t>
+False outbreak signals creating unnecessary response or public concern.
+Application guidance: Identify what could go wrong, who could be affected, what safeguards are needed, and what evidence should be reviewed before use expands.</a:t>
             </a:r>
             <a:endParaRPr lang="en-US" dirty="0"/>
           </a:p>
@@ -796,7 +798,8 @@
               <a:t>Risks, Failure Modes, and Guardrails
 Missed signals because some communities are underrepresented in data.
 Automated prioritization replacing epidemiologic judgment.
-Sensitive investigation information being used in unapproved tools.</a:t>
+Sensitive investigation information being used in unapproved tools.
+Application guidance: Identify what could go wrong, who could be affected, what safeguards are needed, and what evidence should be reviewed before use expands.</a:t>
             </a:r>
             <a:endParaRPr lang="en-US" dirty="0"/>
           </a:p>
@@ -887,7 +890,8 @@
               <a:t>Risks, Failure Modes, and Guardrails
 Recommended guardrails include the following:
 Require source traceability for summaries and extracted information.
-Use AI outputs as prompts for review, not automatic conclusions.</a:t>
+Use AI outputs as prompts for review, not automatic conclusions.
+Application guidance: Identify what could go wrong, who could be affected, what safeguards are needed, and what evidence should be reviewed before use expands.</a:t>
             </a:r>
             <a:endParaRPr lang="en-US" dirty="0"/>
           </a:p>
@@ -978,7 +982,8 @@
               <a:t>Risks, Failure Modes, and Guardrails
 Document uncertainty, missing data, and preliminary status.
 Apply equity review to prioritization and signal detection workflows.
-Define escalation to epidemiology leadership for unusual, high-risk, or public-facing outputs.</a:t>
+Define escalation to epidemiology leadership for unusual, high-risk, or public-facing outputs.
+Application guidance: Identify what could go wrong, who could be affected, what safeguards are needed, and what evidence should be reviewed before use expands.</a:t>
             </a:r>
             <a:endParaRPr lang="en-US" dirty="0"/>
           </a:p>
@@ -1069,7 +1074,8 @@
               <a:t>Reflection Questions
 Where does this topic appear in your agency, program, or workflow?
 Which staff roles would need to understand or apply this concept before AI use is approved?
-What could go wrong if this topic is not addressed before implementation?</a:t>
+What could go wrong if this topic is not addressed before implementation?
+Application guidance: Connect the concept to public health purpose, responsible use, required safeguards, documentation, and the next action a department should take.</a:t>
             </a:r>
             <a:endParaRPr lang="en-US" dirty="0"/>
           </a:p>
@@ -1159,7 +1165,8 @@
               <a:rPr lang="en-US" dirty="0"/>
               <a:t>Reflection Questions
 What evidence would governance, leadership, or operations staff need before moving forward?
-Which policy, data, equity, privacy, security, or workflow questions remain unresolved?</a:t>
+Which policy, data, equity, privacy, security, or workflow questions remain unresolved?
+Application guidance: Connect the concept to public health purpose, responsible use, required safeguards, documentation, and the next action a department should take.</a:t>
             </a:r>
             <a:endParaRPr lang="en-US" dirty="0"/>
           </a:p>
@@ -1248,7 +1255,8 @@
             <a:r>
               <a:rPr lang="en-US" dirty="0"/>
               <a:t>Practical Exercise
-Create an AI-supported case investigation or outbreak response workflow review. Include the supported task, data sources, AI output, source traceability, human review point, uncertainty documentation, equity risks, escalation triggers, and monitoring indicators.</a:t>
+Create an AI-supported case investigation or outbreak response workflow review. Include the supported task, data sources, AI output, source traceability, human review point, uncertainty documentation, equity risks, escalation triggers, and monitoring indicators.
+Application guidance: Use the assignment to test whether you can explain the concept, apply it to a realistic public health situation, and identify what would need review before the work moves forward.</a:t>
             </a:r>
             <a:endParaRPr lang="en-US" dirty="0"/>
           </a:p>
@@ -1339,7 +1347,8 @@
               <a:t>Expected Artifact or Evidence
 Case investigation or outbreak response workflow review
 Source traceability checklist
-Uncertainty and missing data documentation</a:t>
+Uncertainty and missing data documentation
+Application guidance: Connect the concept to public health purpose, responsible use, required safeguards, documentation, and the next action a department should take.</a:t>
             </a:r>
             <a:endParaRPr lang="en-US" dirty="0"/>
           </a:p>
@@ -1429,7 +1438,8 @@
               <a:rPr lang="en-US" dirty="0"/>
               <a:t>Expected Artifact or Evidence
 Equity and escalation review
-Monitoring indicators</a:t>
+Monitoring indicators
+Application guidance: Connect the concept to public health purpose, responsible use, required safeguards, documentation, and the next action a department should take.</a:t>
             </a:r>
             <a:endParaRPr lang="en-US" dirty="0"/>
           </a:p>
@@ -1614,7 +1624,8 @@
 Source traceability checklist
 Uncertainty and missing data documentation
 Equity and escalation review
-Monitoring indicators</a:t>
+Monitoring indicators
+Application guidance: Use the assignment to test whether you can explain the concept, apply it to a realistic public health situation, and identify what would need review before the work moves forward.</a:t>
             </a:r>
             <a:endParaRPr lang="en-US" dirty="0"/>
           </a:p>
@@ -1707,7 +1718,8 @@
 2. What is an outbreak signal?
 3. Why is uncertainty documentation important during response?
 4. Which guardrail is appropriate for AI-extracted exposures?
-5. What is strong completion evidence?</a:t>
+5. What is strong completion evidence?
+Application guidance: Use the assignment to test whether you can explain the concept, apply it to a realistic public health situation, and identify what would need review before the work moves forward.</a:t>
             </a:r>
             <a:endParaRPr lang="en-US" dirty="0"/>
           </a:p>
@@ -1800,7 +1812,8 @@
 NIST Generative AI Profile: https://www.nist.gov/publications/artificial-intelligence-risk-management-framework-generative-artificial-intelligence
 CDC Public Health Data Strategy and Data Modernization resources: https://www.cdc.gov/public-health-data-strategy/php/about/index.html
 OWASP guidance for LLM application security
-Agency policies for privacy, cybersecurity, records, procurement, accessibility, and public communications</a:t>
+Agency policies for privacy, cybersecurity, records, procurement, accessibility, and public communications
+Application guidance: Connect the concept to public health purpose, responsible use, required safeguards, documentation, and the next action a department should take.</a:t>
             </a:r>
             <a:endParaRPr lang="en-US" dirty="0"/>
           </a:p>
@@ -1889,7 +1902,8 @@
             <a:r>
               <a:rPr lang="en-US" dirty="0"/>
               <a:t>References and Resources
-Relevant public health program SOPs, data governance documentation, and implementation plans</a:t>
+Relevant public health program SOPs, data governance documentation, and implementation plans
+Application guidance: Connect the concept to public health purpose, responsible use, required safeguards, documentation, and the next action a department should take.</a:t>
             </a:r>
             <a:endParaRPr lang="en-US" dirty="0"/>
           </a:p>
@@ -2168,7 +2182,8 @@
 Distinguish between AI-supported triage, summarization, extraction, signal detection, and decision-making.
 Assess data quality, timeliness, source traceability, and equity risks in AI-supported response workflows.
 Define human review, escalation, and documentation expectations for AI outputs.
-Create an AI-supported case investigation or outbreak response workflow review.</a:t>
+Create an AI-supported case investigation or outbreak response workflow review.
+Application guidance: Use the assignment to test whether you can explain the concept, apply it to a realistic public health situation, and identify what would need review before the work moves forward.</a:t>
             </a:r>
             <a:endParaRPr lang="en-US" dirty="0"/>
           </a:p>
@@ -2259,7 +2274,8 @@
               <a:t>Module Overview
 Case investigation and outbreak response are high-pressure public health workflows that depend on timely information, structured judgment, coordination, documentation, and community trust. AI may support these workflows by summarizing case records, extracting exposures, identifying missing information, prioritizing review, detecting clusters, drafting situation updates, or organizing response tasks. At the same time, errors can affect real people, public health action, and public confidence.
 This module teaches epidemiologists, informaticians, and response teams how to evaluate and use AI-supported tools in case investigation and outbreak response. The focus is on support, not replacement. AI can help staff work faster and more consistently, but public health judgment, legal authority, and human accountability remain central.
-Responsible use requires careful attention to data quality, source traceability, sensitivity, uncertainty, equity, escalation, and documentation. AI should help investigators see relevant information more clearly, not hide assumptions or convert uncertain signals into unsupported conclusions.</a:t>
+Responsible use requires careful attention to data quality, source traceability, sensitivity, uncertainty, equity, escalation, and documentation. AI should help investigators see relevant information more clearly, not hide assumptions or convert uncertain signals into unsupported conclusions.
+Application guidance: Connect the concept to public health purpose, responsible use, required safeguards, documentation, and the next action a department should take.</a:t>
             </a:r>
             <a:endParaRPr lang="en-US" dirty="0"/>
           </a:p>
@@ -2348,7 +2364,8 @@
             <a:r>
               <a:rPr lang="en-US" dirty="0"/>
               <a:t>Jurisdiction and Agency Policy Note
-This national-level module is intended for training and planning purposes. It does not replace legal, privacy, procurement, civil rights, records, or agency policy review. Learners should confirm applicable requirements in their own jurisdiction and organization before implementing AI-supported workflows.</a:t>
+This national-level module is intended for training and planning purposes. It does not replace legal, privacy, procurement, civil rights, records, or agency policy review. Learners should confirm applicable requirements in their own jurisdiction and organization before implementing AI-supported workflows.
+Application guidance: Translate this concept into clear decision rights, review steps, documentation expectations, and escalation paths before an AI-supported workflow is approved.</a:t>
             </a:r>
             <a:endParaRPr lang="en-US" dirty="0"/>
           </a:p>
@@ -2437,7 +2454,8 @@
             <a:r>
               <a:rPr lang="en-US" dirty="0"/>
               <a:t>Public Health Example
-During a foodborne illness investigation, AI is used to summarize interview notes and extract possible exposures. Investigators compare the extracted exposures to original notes, review uncertain or conflicting information, and document final interpretations. The tool helps reduce manual review time, but it does not determine the outbreak source or issue public recommendations without epidemiologist review.</a:t>
+During a foodborne illness investigation, AI is used to summarize interview notes and extract possible exposures. Investigators compare the extracted exposures to original notes, review uncertain or conflicting information, and document final interpretations. The tool helps reduce manual review time, but it does not determine the outbreak source or issue public recommendations without epidemiologist review.
+Application guidance: Connect the concept to public health purpose, responsible use, required safeguards, documentation, and the next action a department should take.</a:t>
             </a:r>
             <a:endParaRPr lang="en-US" dirty="0"/>
           </a:p>
@@ -2528,7 +2546,8 @@
               <a:t>Topic Deep Dive
 AI can support case investigation by reducing the burden of reviewing large volumes of information. Natural language processing and generative AI may help summarize case notes, identify missing fields, extract dates and exposures, or draft follow-up questions. These tasks are appropriate only when outputs are traceable to source material and investigators can correct errors before the information is used.
 Outbreak response may involve signal detection, anomaly review, geospatial patterns, laboratory results, syndromic surveillance, community reports, and partner communications. AI can help identify patterns or organize information, but it can also generate false signals or miss subtle context. A signal should trigger epidemiologic review, not automatic public health action.
-Data quality is especially important during response. Early outbreak data are often incomplete, changing, biased toward reported cases, and uneven across communities. AI tools may overstate certainty if they do not represent missingness and uncertainty clearly. Response teams should document what data are preliminary, what assumptions are being made, and what additional investigation is needed.</a:t>
+Data quality is especially important during response. Early outbreak data are often incomplete, changing, biased toward reported cases, and uneven across communities. AI tools may overstate certainty if they do not represent missingness and uncertainty clearly. Response teams should document what data are preliminary, what assumptions are being made, and what additional investigation is needed.
+Application guidance: Connect the concept to public health purpose, responsible use, required safeguards, documentation, and the next action a department should take.</a:t>
             </a:r>
             <a:endParaRPr lang="en-US" dirty="0"/>
           </a:p>
@@ -3299,8 +3318,8 @@
         </p:nvSpPr>
         <p:spPr>
           <a:xfrm>
-            <a:off x="9966960" y="6537960"/>
-            <a:ext cx="1645920" cy="201168"/>
+            <a:off x="9646920" y="6537960"/>
+            <a:ext cx="1965960" cy="201168"/>
           </a:xfrm>
           <a:prstGeom prst="rect">
             <a:avLst/>
@@ -3324,7 +3343,7 @@
                 <a:ea typeface="Aptos" pitchFamily="34" charset="-122"/>
                 <a:cs typeface="Aptos" pitchFamily="34" charset="-120"/>
               </a:rPr>
-              <a:t>Â© Paula Soper</a:t>
+              <a:t>Copyright Paula Soper</a:t>
             </a:r>
             <a:endParaRPr lang="en-US" sz="800" dirty="0"/>
           </a:p>
@@ -3419,7 +3438,7 @@
         <p:spPr>
           <a:xfrm>
             <a:off x="868680" y="1508760"/>
-            <a:ext cx="6537960" cy="4160520"/>
+            <a:ext cx="6309360" cy="4160520"/>
           </a:xfrm>
           <a:prstGeom prst="rect">
             <a:avLst/>
@@ -3484,12 +3503,12 @@
         </p:nvSpPr>
         <p:spPr>
           <a:xfrm>
-            <a:off x="7909560" y="1417320"/>
-            <a:ext cx="3154680" cy="1828800"/>
+            <a:off x="7635240" y="1325880"/>
+            <a:ext cx="3474720" cy="1325880"/>
           </a:xfrm>
           <a:prstGeom prst="roundRect">
             <a:avLst>
-              <a:gd name="adj" fmla="val 6000"/>
+              <a:gd name="adj" fmla="val 8276"/>
             </a:avLst>
           </a:prstGeom>
           <a:solidFill>
@@ -3511,8 +3530,8 @@
         </p:nvSpPr>
         <p:spPr>
           <a:xfrm>
-            <a:off x="8074152" y="1563624"/>
-            <a:ext cx="2825496" cy="256032"/>
+            <a:off x="7799832" y="1472184"/>
+            <a:ext cx="3145536" cy="256032"/>
           </a:xfrm>
           <a:prstGeom prst="rect">
             <a:avLst/>
@@ -3536,7 +3555,7 @@
                 <a:ea typeface="Aptos" pitchFamily="34" charset="-122"/>
                 <a:cs typeface="Aptos" pitchFamily="34" charset="-120"/>
               </a:rPr>
-              <a:t>Key idea</a:t>
+              <a:t>Core concept</a:t>
             </a:r>
             <a:endParaRPr lang="en-US" sz="1300" dirty="0"/>
           </a:p>
@@ -3550,8 +3569,8 @@
         </p:nvSpPr>
         <p:spPr>
           <a:xfrm>
-            <a:off x="8074152" y="1920240"/>
-            <a:ext cx="2825496" cy="1188720"/>
+            <a:off x="7799832" y="1828800"/>
+            <a:ext cx="3145536" cy="685800"/>
           </a:xfrm>
           <a:prstGeom prst="rect">
             <a:avLst/>
@@ -3591,12 +3610,153 @@
         </p:nvSpPr>
         <p:spPr>
           <a:xfrm>
-            <a:off x="7909560" y="3520440"/>
-            <a:ext cx="3154680" cy="1737360"/>
+            <a:off x="7635240" y="2788920"/>
+            <a:ext cx="3474720" cy="1536192"/>
           </a:xfrm>
           <a:prstGeom prst="roundRect">
             <a:avLst>
-              <a:gd name="adj" fmla="val 6316"/>
+              <a:gd name="adj" fmla="val 7143"/>
+            </a:avLst>
+          </a:prstGeom>
+          <a:solidFill>
+            <a:srgbClr val="FFFFFF">
+              <a:alpha val="88000"/>
+            </a:srgbClr>
+          </a:solidFill>
+          <a:ln w="12700">
+            <a:solidFill>
+              <a:srgbClr val="D6E8F2"/>
+            </a:solidFill>
+            <a:prstDash val="solid"/>
+          </a:ln>
+        </p:spPr>
+      </p:sp>
+      <p:sp>
+        <p:nvSpPr>
+          <p:cNvPr id="14" name="Shape 12"/>
+          <p:cNvSpPr/>
+          <p:nvPr/>
+        </p:nvSpPr>
+        <p:spPr>
+          <a:xfrm>
+            <a:off x="8074152" y="3291840"/>
+            <a:ext cx="2596896" cy="749808"/>
+          </a:xfrm>
+          <a:prstGeom prst="rect">
+            <a:avLst/>
+          </a:prstGeom>
+          <a:solidFill>
+            <a:srgbClr val="EAF6F8"/>
+          </a:solidFill>
+          <a:ln w="12700">
+            <a:solidFill>
+              <a:srgbClr val="8ABBD8"/>
+            </a:solidFill>
+            <a:prstDash val="solid"/>
+          </a:ln>
+        </p:spPr>
+      </p:sp>
+      <p:sp>
+        <p:nvSpPr>
+          <p:cNvPr id="15" name="Shape 13"/>
+          <p:cNvSpPr/>
+          <p:nvPr/>
+        </p:nvSpPr>
+        <p:spPr>
+          <a:xfrm>
+            <a:off x="8202168" y="3721608"/>
+            <a:ext cx="2340864" cy="0"/>
+          </a:xfrm>
+          <a:prstGeom prst="line">
+            <a:avLst/>
+          </a:prstGeom>
+          <a:noFill/>
+          <a:ln w="19050">
+            <a:solidFill>
+              <a:srgbClr val="0068B7"/>
+            </a:solidFill>
+            <a:prstDash val="solid"/>
+          </a:ln>
+        </p:spPr>
+      </p:sp>
+      <p:sp>
+        <p:nvSpPr>
+          <p:cNvPr id="16" name="Shape 14"/>
+          <p:cNvSpPr/>
+          <p:nvPr/>
+        </p:nvSpPr>
+        <p:spPr>
+          <a:xfrm>
+            <a:off x="9198864" y="4206240"/>
+            <a:ext cx="347472" cy="347472"/>
+          </a:xfrm>
+          <a:prstGeom prst="ellipse">
+            <a:avLst/>
+          </a:prstGeom>
+          <a:solidFill>
+            <a:srgbClr val="2F8A28"/>
+          </a:solidFill>
+          <a:ln w="12700">
+            <a:solidFill>
+              <a:srgbClr val="2F8A28"/>
+            </a:solidFill>
+            <a:prstDash val="solid"/>
+          </a:ln>
+        </p:spPr>
+      </p:sp>
+      <p:sp>
+        <p:nvSpPr>
+          <p:cNvPr id="17" name="Text 15"/>
+          <p:cNvSpPr/>
+          <p:nvPr/>
+        </p:nvSpPr>
+        <p:spPr>
+          <a:xfrm>
+            <a:off x="7909560" y="3977640"/>
+            <a:ext cx="2926080" cy="182880"/>
+          </a:xfrm>
+          <a:prstGeom prst="rect">
+            <a:avLst/>
+          </a:prstGeom>
+          <a:noFill/>
+          <a:ln/>
+        </p:spPr>
+        <p:txBody>
+          <a:bodyPr wrap="square" lIns="0" tIns="0" rIns="0" bIns="0" rtlCol="0" anchor="ctr"/>
+          <a:lstStyle/>
+          <a:p>
+            <a:pPr algn="ctr" indent="0" marL="0">
+              <a:buNone/>
+            </a:pPr>
+            <a:r>
+              <a:rPr lang="en-US" sz="1000" dirty="0">
+                <a:solidFill>
+                  <a:srgbClr val="003A63"/>
+                </a:solidFill>
+                <a:latin typeface="Aptos" pitchFamily="34" charset="0"/>
+                <a:ea typeface="Aptos" pitchFamily="34" charset="-122"/>
+                <a:cs typeface="Aptos" pitchFamily="34" charset="-120"/>
+              </a:rPr>
+              <a:t>Concept to action</a:t>
+            </a:r>
+            <a:endParaRPr lang="en-US" sz="1000" dirty="0"/>
+          </a:p>
+        </p:txBody>
+      </p:sp>
+      <p:sp>
+        <p:nvSpPr>
+          <p:cNvPr id="18" name="Shape 16"/>
+          <p:cNvSpPr/>
+          <p:nvPr/>
+        </p:nvSpPr>
+        <p:spPr>
+          <a:xfrm>
+            <a:off x="7635240" y="4498848"/>
+            <a:ext cx="3474720" cy="1143000"/>
+          </a:xfrm>
+          <a:prstGeom prst="roundRect">
+            <a:avLst>
+              <a:gd name="adj" fmla="val 9600"/>
             </a:avLst>
           </a:prstGeom>
           <a:solidFill>
@@ -3612,14 +3772,14 @@
       </p:sp>
       <p:sp>
         <p:nvSpPr>
-          <p:cNvPr id="14" name="Text 12"/>
-          <p:cNvSpPr/>
-          <p:nvPr/>
-        </p:nvSpPr>
-        <p:spPr>
-          <a:xfrm>
-            <a:off x="8074152" y="3666744"/>
-            <a:ext cx="2825496" cy="256032"/>
+          <p:cNvPr id="19" name="Text 17"/>
+          <p:cNvSpPr/>
+          <p:nvPr/>
+        </p:nvSpPr>
+        <p:spPr>
+          <a:xfrm>
+            <a:off x="7799832" y="4645152"/>
+            <a:ext cx="3145536" cy="256032"/>
           </a:xfrm>
           <a:prstGeom prst="rect">
             <a:avLst/>
@@ -3643,7 +3803,7 @@
                 <a:ea typeface="Aptos" pitchFamily="34" charset="-122"/>
                 <a:cs typeface="Aptos" pitchFamily="34" charset="-120"/>
               </a:rPr>
-              <a:t>Use this for</a:t>
+              <a:t>Apply it</a:t>
             </a:r>
             <a:endParaRPr lang="en-US" sz="1300" dirty="0"/>
           </a:p>
@@ -3651,14 +3811,14 @@
       </p:sp>
       <p:sp>
         <p:nvSpPr>
-          <p:cNvPr id="15" name="Text 13"/>
-          <p:cNvSpPr/>
-          <p:nvPr/>
-        </p:nvSpPr>
-        <p:spPr>
-          <a:xfrm>
-            <a:off x="8074152" y="4023360"/>
-            <a:ext cx="2825496" cy="1097280"/>
+          <p:cNvPr id="20" name="Text 18"/>
+          <p:cNvSpPr/>
+          <p:nvPr/>
+        </p:nvSpPr>
+        <p:spPr>
+          <a:xfrm>
+            <a:off x="7799832" y="5001768"/>
+            <a:ext cx="3145536" cy="502920"/>
           </a:xfrm>
           <a:prstGeom prst="rect">
             <a:avLst/>
@@ -3684,7 +3844,7 @@
                 <a:ea typeface="Aptos" pitchFamily="34" charset="-122"/>
                 <a:cs typeface="Aptos" pitchFamily="34" charset="-120"/>
               </a:rPr>
-              <a:t>Connect the concept to public health decisions, safeguards, documentation, or implementation work.</a:t>
+              <a:t>Connect the concept to public health purpose, responsible use, required safeguards, documentation, and the next action a department should take.</a:t>
             </a:r>
             <a:endParaRPr lang="en-US" sz="1550" dirty="0"/>
           </a:p>
@@ -3858,8 +4018,8 @@
         </p:nvSpPr>
         <p:spPr>
           <a:xfrm>
-            <a:off x="9966960" y="6537960"/>
-            <a:ext cx="1645920" cy="201168"/>
+            <a:off x="9646920" y="6537960"/>
+            <a:ext cx="1965960" cy="201168"/>
           </a:xfrm>
           <a:prstGeom prst="rect">
             <a:avLst/>
@@ -3883,7 +4043,7 @@
                 <a:ea typeface="Aptos" pitchFamily="34" charset="-122"/>
                 <a:cs typeface="Aptos" pitchFamily="34" charset="-120"/>
               </a:rPr>
-              <a:t>Â© Paula Soper</a:t>
+              <a:t>Copyright Paula Soper</a:t>
             </a:r>
             <a:endParaRPr lang="en-US" sz="800" dirty="0"/>
           </a:p>
@@ -3930,77 +4090,13 @@
       </p:sp>
       <p:sp>
         <p:nvSpPr>
-          <p:cNvPr id="8" name="Shape 6"/>
+          <p:cNvPr id="8" name="Text 6"/>
           <p:cNvSpPr/>
           <p:nvPr/>
         </p:nvSpPr>
         <p:spPr>
           <a:xfrm>
             <a:off x="640080" y="658368"/>
-            <a:ext cx="420624" cy="420624"/>
-          </a:xfrm>
-          <a:prstGeom prst="ellipse">
-            <a:avLst/>
-          </a:prstGeom>
-          <a:solidFill>
-            <a:srgbClr val="0068B7"/>
-          </a:solidFill>
-          <a:ln w="12700">
-            <a:solidFill>
-              <a:srgbClr val="0068B7"/>
-            </a:solidFill>
-            <a:prstDash val="solid"/>
-          </a:ln>
-        </p:spPr>
-      </p:sp>
-      <p:sp>
-        <p:nvSpPr>
-          <p:cNvPr id="9" name="Text 7"/>
-          <p:cNvSpPr/>
-          <p:nvPr/>
-        </p:nvSpPr>
-        <p:spPr>
-          <a:xfrm>
-            <a:off x="640080" y="731520"/>
-            <a:ext cx="420624" cy="164592"/>
-          </a:xfrm>
-          <a:prstGeom prst="rect">
-            <a:avLst/>
-          </a:prstGeom>
-          <a:noFill/>
-          <a:ln/>
-        </p:spPr>
-        <p:txBody>
-          <a:bodyPr wrap="square" lIns="0" tIns="0" rIns="0" bIns="0" rtlCol="0" anchor="ctr"/>
-          <a:lstStyle/>
-          <a:p>
-            <a:pPr algn="ctr" indent="0" marL="0">
-              <a:buNone/>
-            </a:pPr>
-            <a:r>
-              <a:rPr lang="en-US" sz="1100" b="1" dirty="0">
-                <a:solidFill>
-                  <a:srgbClr val="FFFFFF"/>
-                </a:solidFill>
-                <a:latin typeface="Aptos" pitchFamily="34" charset="0"/>
-                <a:ea typeface="Aptos" pitchFamily="34" charset="-122"/>
-                <a:cs typeface="Aptos" pitchFamily="34" charset="-120"/>
-              </a:rPr>
-              <a:t>6</a:t>
-            </a:r>
-            <a:endParaRPr lang="en-US" sz="1100" dirty="0"/>
-          </a:p>
-        </p:txBody>
-      </p:sp>
-      <p:sp>
-        <p:nvSpPr>
-          <p:cNvPr id="10" name="Text 8"/>
-          <p:cNvSpPr/>
-          <p:nvPr/>
-        </p:nvSpPr>
-        <p:spPr>
-          <a:xfrm>
-            <a:off x="640080" y="621792"/>
             <a:ext cx="10881360" cy="713232"/>
           </a:xfrm>
           <a:prstGeom prst="rect">
@@ -4035,14 +4131,14 @@
       </p:sp>
       <p:sp>
         <p:nvSpPr>
-          <p:cNvPr id="11" name="Text 9"/>
+          <p:cNvPr id="9" name="Text 7"/>
           <p:cNvSpPr/>
           <p:nvPr/>
         </p:nvSpPr>
         <p:spPr>
           <a:xfrm>
             <a:off x="868680" y="1508760"/>
-            <a:ext cx="6537960" cy="4160520"/>
+            <a:ext cx="6309360" cy="4160520"/>
           </a:xfrm>
           <a:prstGeom prst="rect">
             <a:avLst/>
@@ -4101,18 +4197,18 @@
       </p:sp>
       <p:sp>
         <p:nvSpPr>
-          <p:cNvPr id="12" name="Shape 10"/>
-          <p:cNvSpPr/>
-          <p:nvPr/>
-        </p:nvSpPr>
-        <p:spPr>
-          <a:xfrm>
-            <a:off x="7909560" y="1417320"/>
-            <a:ext cx="3154680" cy="1828800"/>
+          <p:cNvPr id="10" name="Shape 8"/>
+          <p:cNvSpPr/>
+          <p:nvPr/>
+        </p:nvSpPr>
+        <p:spPr>
+          <a:xfrm>
+            <a:off x="7635240" y="1325880"/>
+            <a:ext cx="3474720" cy="1325880"/>
           </a:xfrm>
           <a:prstGeom prst="roundRect">
             <a:avLst>
-              <a:gd name="adj" fmla="val 6000"/>
+              <a:gd name="adj" fmla="val 8276"/>
             </a:avLst>
           </a:prstGeom>
           <a:solidFill>
@@ -4128,14 +4224,14 @@
       </p:sp>
       <p:sp>
         <p:nvSpPr>
-          <p:cNvPr id="13" name="Text 11"/>
-          <p:cNvSpPr/>
-          <p:nvPr/>
-        </p:nvSpPr>
-        <p:spPr>
-          <a:xfrm>
-            <a:off x="8074152" y="1563624"/>
-            <a:ext cx="2825496" cy="256032"/>
+          <p:cNvPr id="11" name="Text 9"/>
+          <p:cNvSpPr/>
+          <p:nvPr/>
+        </p:nvSpPr>
+        <p:spPr>
+          <a:xfrm>
+            <a:off x="7799832" y="1472184"/>
+            <a:ext cx="3145536" cy="256032"/>
           </a:xfrm>
           <a:prstGeom prst="rect">
             <a:avLst/>
@@ -4159,7 +4255,7 @@
                 <a:ea typeface="Aptos" pitchFamily="34" charset="-122"/>
                 <a:cs typeface="Aptos" pitchFamily="34" charset="-120"/>
               </a:rPr>
-              <a:t>Key idea</a:t>
+              <a:t>Risk check</a:t>
             </a:r>
             <a:endParaRPr lang="en-US" sz="1300" dirty="0"/>
           </a:p>
@@ -4167,14 +4263,14 @@
       </p:sp>
       <p:sp>
         <p:nvSpPr>
-          <p:cNvPr id="14" name="Text 12"/>
-          <p:cNvSpPr/>
-          <p:nvPr/>
-        </p:nvSpPr>
-        <p:spPr>
-          <a:xfrm>
-            <a:off x="8074152" y="1920240"/>
-            <a:ext cx="2825496" cy="1188720"/>
+          <p:cNvPr id="12" name="Text 10"/>
+          <p:cNvSpPr/>
+          <p:nvPr/>
+        </p:nvSpPr>
+        <p:spPr>
+          <a:xfrm>
+            <a:off x="7799832" y="1828800"/>
+            <a:ext cx="3145536" cy="685800"/>
           </a:xfrm>
           <a:prstGeom prst="rect">
             <a:avLst/>
@@ -4208,18 +4304,171 @@
       </p:sp>
       <p:sp>
         <p:nvSpPr>
-          <p:cNvPr id="15" name="Shape 13"/>
-          <p:cNvSpPr/>
-          <p:nvPr/>
-        </p:nvSpPr>
-        <p:spPr>
-          <a:xfrm>
-            <a:off x="7909560" y="3520440"/>
-            <a:ext cx="3154680" cy="1737360"/>
+          <p:cNvPr id="13" name="Shape 11"/>
+          <p:cNvSpPr/>
+          <p:nvPr/>
+        </p:nvSpPr>
+        <p:spPr>
+          <a:xfrm>
+            <a:off x="7635240" y="2788920"/>
+            <a:ext cx="3474720" cy="1536192"/>
           </a:xfrm>
           <a:prstGeom prst="roundRect">
             <a:avLst>
-              <a:gd name="adj" fmla="val 6316"/>
+              <a:gd name="adj" fmla="val 7143"/>
+            </a:avLst>
+          </a:prstGeom>
+          <a:solidFill>
+            <a:srgbClr val="FFFFFF">
+              <a:alpha val="88000"/>
+            </a:srgbClr>
+          </a:solidFill>
+          <a:ln w="12700">
+            <a:solidFill>
+              <a:srgbClr val="D6E8F2"/>
+            </a:solidFill>
+            <a:prstDash val="solid"/>
+          </a:ln>
+        </p:spPr>
+      </p:sp>
+      <p:sp>
+        <p:nvSpPr>
+          <p:cNvPr id="14" name="Shape 12"/>
+          <p:cNvSpPr/>
+          <p:nvPr/>
+        </p:nvSpPr>
+        <p:spPr>
+          <a:xfrm>
+            <a:off x="8046720" y="3108960"/>
+            <a:ext cx="2651760" cy="896112"/>
+          </a:xfrm>
+          <a:prstGeom prst="arc">
+            <a:avLst/>
+          </a:prstGeom>
+          <a:noFill/>
+          <a:ln w="25400">
+            <a:solidFill>
+              <a:srgbClr val="0068B7"/>
+            </a:solidFill>
+            <a:prstDash val="solid"/>
+          </a:ln>
+        </p:spPr>
+      </p:sp>
+      <p:sp>
+        <p:nvSpPr>
+          <p:cNvPr id="15" name="Text 13"/>
+          <p:cNvSpPr/>
+          <p:nvPr/>
+        </p:nvSpPr>
+        <p:spPr>
+          <a:xfrm>
+            <a:off x="7909560" y="3099816"/>
+            <a:ext cx="2926080" cy="256032"/>
+          </a:xfrm>
+          <a:prstGeom prst="rect">
+            <a:avLst/>
+          </a:prstGeom>
+          <a:noFill/>
+          <a:ln/>
+        </p:spPr>
+        <p:txBody>
+          <a:bodyPr wrap="square" lIns="0" tIns="0" rIns="0" bIns="0" rtlCol="0" anchor="ctr"/>
+          <a:lstStyle/>
+          <a:p>
+            <a:pPr algn="ctr" indent="0" marL="0">
+              <a:buNone/>
+            </a:pPr>
+            <a:r>
+              <a:rPr lang="en-US" sz="1500" b="1" dirty="0">
+                <a:solidFill>
+                  <a:srgbClr val="003A63"/>
+                </a:solidFill>
+                <a:latin typeface="Aptos" pitchFamily="34" charset="0"/>
+                <a:ea typeface="Aptos" pitchFamily="34" charset="-122"/>
+                <a:cs typeface="Aptos" pitchFamily="34" charset="-120"/>
+              </a:rPr>
+              <a:t>Risk</a:t>
+            </a:r>
+            <a:endParaRPr lang="en-US" sz="1500" dirty="0"/>
+          </a:p>
+        </p:txBody>
+      </p:sp>
+      <p:sp>
+        <p:nvSpPr>
+          <p:cNvPr id="16" name="Shape 14"/>
+          <p:cNvSpPr/>
+          <p:nvPr/>
+        </p:nvSpPr>
+        <p:spPr>
+          <a:xfrm>
+            <a:off x="8366760" y="3639312"/>
+            <a:ext cx="2011680" cy="0"/>
+          </a:xfrm>
+          <a:prstGeom prst="line">
+            <a:avLst/>
+          </a:prstGeom>
+          <a:noFill/>
+          <a:ln w="63500">
+            <a:solidFill>
+              <a:srgbClr val="2F8A28"/>
+            </a:solidFill>
+            <a:prstDash val="solid"/>
+          </a:ln>
+        </p:spPr>
+      </p:sp>
+      <p:sp>
+        <p:nvSpPr>
+          <p:cNvPr id="17" name="Text 15"/>
+          <p:cNvSpPr/>
+          <p:nvPr/>
+        </p:nvSpPr>
+        <p:spPr>
+          <a:xfrm>
+            <a:off x="7909560" y="3849624"/>
+            <a:ext cx="2926080" cy="164592"/>
+          </a:xfrm>
+          <a:prstGeom prst="rect">
+            <a:avLst/>
+          </a:prstGeom>
+          <a:noFill/>
+          <a:ln/>
+        </p:spPr>
+        <p:txBody>
+          <a:bodyPr wrap="square" lIns="0" tIns="0" rIns="0" bIns="0" rtlCol="0" anchor="ctr"/>
+          <a:lstStyle/>
+          <a:p>
+            <a:pPr algn="ctr" indent="0" marL="0">
+              <a:buNone/>
+            </a:pPr>
+            <a:r>
+              <a:rPr lang="en-US" sz="900" dirty="0">
+                <a:solidFill>
+                  <a:srgbClr val="003A63"/>
+                </a:solidFill>
+                <a:latin typeface="Aptos" pitchFamily="34" charset="0"/>
+                <a:ea typeface="Aptos" pitchFamily="34" charset="-122"/>
+                <a:cs typeface="Aptos" pitchFamily="34" charset="-120"/>
+              </a:rPr>
+              <a:t>Human review</a:t>
+            </a:r>
+            <a:endParaRPr lang="en-US" sz="900" dirty="0"/>
+          </a:p>
+        </p:txBody>
+      </p:sp>
+      <p:sp>
+        <p:nvSpPr>
+          <p:cNvPr id="18" name="Shape 16"/>
+          <p:cNvSpPr/>
+          <p:nvPr/>
+        </p:nvSpPr>
+        <p:spPr>
+          <a:xfrm>
+            <a:off x="7635240" y="4498848"/>
+            <a:ext cx="3474720" cy="1143000"/>
+          </a:xfrm>
+          <a:prstGeom prst="roundRect">
+            <a:avLst>
+              <a:gd name="adj" fmla="val 9600"/>
             </a:avLst>
           </a:prstGeom>
           <a:solidFill>
@@ -4235,14 +4484,14 @@
       </p:sp>
       <p:sp>
         <p:nvSpPr>
-          <p:cNvPr id="16" name="Text 14"/>
-          <p:cNvSpPr/>
-          <p:nvPr/>
-        </p:nvSpPr>
-        <p:spPr>
-          <a:xfrm>
-            <a:off x="8074152" y="3666744"/>
-            <a:ext cx="2825496" cy="256032"/>
+          <p:cNvPr id="19" name="Text 17"/>
+          <p:cNvSpPr/>
+          <p:nvPr/>
+        </p:nvSpPr>
+        <p:spPr>
+          <a:xfrm>
+            <a:off x="7799832" y="4645152"/>
+            <a:ext cx="3145536" cy="256032"/>
           </a:xfrm>
           <a:prstGeom prst="rect">
             <a:avLst/>
@@ -4266,7 +4515,7 @@
                 <a:ea typeface="Aptos" pitchFamily="34" charset="-122"/>
                 <a:cs typeface="Aptos" pitchFamily="34" charset="-120"/>
               </a:rPr>
-              <a:t>Use this for</a:t>
+              <a:t>Safeguard to plan</a:t>
             </a:r>
             <a:endParaRPr lang="en-US" sz="1300" dirty="0"/>
           </a:p>
@@ -4274,14 +4523,14 @@
       </p:sp>
       <p:sp>
         <p:nvSpPr>
-          <p:cNvPr id="17" name="Text 15"/>
-          <p:cNvSpPr/>
-          <p:nvPr/>
-        </p:nvSpPr>
-        <p:spPr>
-          <a:xfrm>
-            <a:off x="8074152" y="4023360"/>
-            <a:ext cx="2825496" cy="1097280"/>
+          <p:cNvPr id="20" name="Text 18"/>
+          <p:cNvSpPr/>
+          <p:nvPr/>
+        </p:nvSpPr>
+        <p:spPr>
+          <a:xfrm>
+            <a:off x="7799832" y="5001768"/>
+            <a:ext cx="3145536" cy="502920"/>
           </a:xfrm>
           <a:prstGeom prst="rect">
             <a:avLst/>
@@ -4307,7 +4556,7 @@
                 <a:ea typeface="Aptos" pitchFamily="34" charset="-122"/>
                 <a:cs typeface="Aptos" pitchFamily="34" charset="-120"/>
               </a:rPr>
-              <a:t>Connect the concept to public health decisions, safeguards, documentation, or implementation work.</a:t>
+              <a:t>Identify what could go wrong, who could be affected, what safeguards are needed, and what evidence should be reviewed before use expands.</a:t>
             </a:r>
             <a:endParaRPr lang="en-US" sz="1550" dirty="0"/>
           </a:p>
@@ -4481,8 +4730,8 @@
         </p:nvSpPr>
         <p:spPr>
           <a:xfrm>
-            <a:off x="9966960" y="6537960"/>
-            <a:ext cx="1645920" cy="201168"/>
+            <a:off x="9646920" y="6537960"/>
+            <a:ext cx="1965960" cy="201168"/>
           </a:xfrm>
           <a:prstGeom prst="rect">
             <a:avLst/>
@@ -4506,7 +4755,7 @@
                 <a:ea typeface="Aptos" pitchFamily="34" charset="-122"/>
                 <a:cs typeface="Aptos" pitchFamily="34" charset="-120"/>
               </a:rPr>
-              <a:t>Â© Paula Soper</a:t>
+              <a:t>Copyright Paula Soper</a:t>
             </a:r>
             <a:endParaRPr lang="en-US" sz="800" dirty="0"/>
           </a:p>
@@ -4601,7 +4850,7 @@
         <p:spPr>
           <a:xfrm>
             <a:off x="868680" y="1508760"/>
-            <a:ext cx="6537960" cy="4160520"/>
+            <a:ext cx="6309360" cy="4160520"/>
           </a:xfrm>
           <a:prstGeom prst="rect">
             <a:avLst/>
@@ -4666,12 +4915,12 @@
         </p:nvSpPr>
         <p:spPr>
           <a:xfrm>
-            <a:off x="7909560" y="1417320"/>
-            <a:ext cx="3154680" cy="1828800"/>
+            <a:off x="7635240" y="1325880"/>
+            <a:ext cx="3474720" cy="1325880"/>
           </a:xfrm>
           <a:prstGeom prst="roundRect">
             <a:avLst>
-              <a:gd name="adj" fmla="val 6000"/>
+              <a:gd name="adj" fmla="val 8276"/>
             </a:avLst>
           </a:prstGeom>
           <a:solidFill>
@@ -4693,8 +4942,8 @@
         </p:nvSpPr>
         <p:spPr>
           <a:xfrm>
-            <a:off x="8074152" y="1563624"/>
-            <a:ext cx="2825496" cy="256032"/>
+            <a:off x="7799832" y="1472184"/>
+            <a:ext cx="3145536" cy="256032"/>
           </a:xfrm>
           <a:prstGeom prst="rect">
             <a:avLst/>
@@ -4718,7 +4967,7 @@
                 <a:ea typeface="Aptos" pitchFamily="34" charset="-122"/>
                 <a:cs typeface="Aptos" pitchFamily="34" charset="-120"/>
               </a:rPr>
-              <a:t>Key idea</a:t>
+              <a:t>Risk check</a:t>
             </a:r>
             <a:endParaRPr lang="en-US" sz="1300" dirty="0"/>
           </a:p>
@@ -4732,8 +4981,8 @@
         </p:nvSpPr>
         <p:spPr>
           <a:xfrm>
-            <a:off x="8074152" y="1920240"/>
-            <a:ext cx="2825496" cy="1188720"/>
+            <a:off x="7799832" y="1828800"/>
+            <a:ext cx="3145536" cy="685800"/>
           </a:xfrm>
           <a:prstGeom prst="rect">
             <a:avLst/>
@@ -4773,12 +5022,165 @@
         </p:nvSpPr>
         <p:spPr>
           <a:xfrm>
-            <a:off x="7909560" y="3520440"/>
-            <a:ext cx="3154680" cy="1737360"/>
+            <a:off x="7635240" y="2788920"/>
+            <a:ext cx="3474720" cy="1536192"/>
           </a:xfrm>
           <a:prstGeom prst="roundRect">
             <a:avLst>
-              <a:gd name="adj" fmla="val 6316"/>
+              <a:gd name="adj" fmla="val 7143"/>
+            </a:avLst>
+          </a:prstGeom>
+          <a:solidFill>
+            <a:srgbClr val="FFFFFF">
+              <a:alpha val="88000"/>
+            </a:srgbClr>
+          </a:solidFill>
+          <a:ln w="12700">
+            <a:solidFill>
+              <a:srgbClr val="D6E8F2"/>
+            </a:solidFill>
+            <a:prstDash val="solid"/>
+          </a:ln>
+        </p:spPr>
+      </p:sp>
+      <p:sp>
+        <p:nvSpPr>
+          <p:cNvPr id="14" name="Shape 12"/>
+          <p:cNvSpPr/>
+          <p:nvPr/>
+        </p:nvSpPr>
+        <p:spPr>
+          <a:xfrm>
+            <a:off x="8046720" y="3108960"/>
+            <a:ext cx="2651760" cy="896112"/>
+          </a:xfrm>
+          <a:prstGeom prst="arc">
+            <a:avLst/>
+          </a:prstGeom>
+          <a:noFill/>
+          <a:ln w="25400">
+            <a:solidFill>
+              <a:srgbClr val="0068B7"/>
+            </a:solidFill>
+            <a:prstDash val="solid"/>
+          </a:ln>
+        </p:spPr>
+      </p:sp>
+      <p:sp>
+        <p:nvSpPr>
+          <p:cNvPr id="15" name="Text 13"/>
+          <p:cNvSpPr/>
+          <p:nvPr/>
+        </p:nvSpPr>
+        <p:spPr>
+          <a:xfrm>
+            <a:off x="7909560" y="3099816"/>
+            <a:ext cx="2926080" cy="256032"/>
+          </a:xfrm>
+          <a:prstGeom prst="rect">
+            <a:avLst/>
+          </a:prstGeom>
+          <a:noFill/>
+          <a:ln/>
+        </p:spPr>
+        <p:txBody>
+          <a:bodyPr wrap="square" lIns="0" tIns="0" rIns="0" bIns="0" rtlCol="0" anchor="ctr"/>
+          <a:lstStyle/>
+          <a:p>
+            <a:pPr algn="ctr" indent="0" marL="0">
+              <a:buNone/>
+            </a:pPr>
+            <a:r>
+              <a:rPr lang="en-US" sz="1500" b="1" dirty="0">
+                <a:solidFill>
+                  <a:srgbClr val="003A63"/>
+                </a:solidFill>
+                <a:latin typeface="Aptos" pitchFamily="34" charset="0"/>
+                <a:ea typeface="Aptos" pitchFamily="34" charset="-122"/>
+                <a:cs typeface="Aptos" pitchFamily="34" charset="-120"/>
+              </a:rPr>
+              <a:t>Risk</a:t>
+            </a:r>
+            <a:endParaRPr lang="en-US" sz="1500" dirty="0"/>
+          </a:p>
+        </p:txBody>
+      </p:sp>
+      <p:sp>
+        <p:nvSpPr>
+          <p:cNvPr id="16" name="Shape 14"/>
+          <p:cNvSpPr/>
+          <p:nvPr/>
+        </p:nvSpPr>
+        <p:spPr>
+          <a:xfrm>
+            <a:off x="8366760" y="3639312"/>
+            <a:ext cx="2011680" cy="0"/>
+          </a:xfrm>
+          <a:prstGeom prst="line">
+            <a:avLst/>
+          </a:prstGeom>
+          <a:noFill/>
+          <a:ln w="63500">
+            <a:solidFill>
+              <a:srgbClr val="2F8A28"/>
+            </a:solidFill>
+            <a:prstDash val="solid"/>
+          </a:ln>
+        </p:spPr>
+      </p:sp>
+      <p:sp>
+        <p:nvSpPr>
+          <p:cNvPr id="17" name="Text 15"/>
+          <p:cNvSpPr/>
+          <p:nvPr/>
+        </p:nvSpPr>
+        <p:spPr>
+          <a:xfrm>
+            <a:off x="7909560" y="3849624"/>
+            <a:ext cx="2926080" cy="164592"/>
+          </a:xfrm>
+          <a:prstGeom prst="rect">
+            <a:avLst/>
+          </a:prstGeom>
+          <a:noFill/>
+          <a:ln/>
+        </p:spPr>
+        <p:txBody>
+          <a:bodyPr wrap="square" lIns="0" tIns="0" rIns="0" bIns="0" rtlCol="0" anchor="ctr"/>
+          <a:lstStyle/>
+          <a:p>
+            <a:pPr algn="ctr" indent="0" marL="0">
+              <a:buNone/>
+            </a:pPr>
+            <a:r>
+              <a:rPr lang="en-US" sz="900" dirty="0">
+                <a:solidFill>
+                  <a:srgbClr val="003A63"/>
+                </a:solidFill>
+                <a:latin typeface="Aptos" pitchFamily="34" charset="0"/>
+                <a:ea typeface="Aptos" pitchFamily="34" charset="-122"/>
+                <a:cs typeface="Aptos" pitchFamily="34" charset="-120"/>
+              </a:rPr>
+              <a:t>Human review</a:t>
+            </a:r>
+            <a:endParaRPr lang="en-US" sz="900" dirty="0"/>
+          </a:p>
+        </p:txBody>
+      </p:sp>
+      <p:sp>
+        <p:nvSpPr>
+          <p:cNvPr id="18" name="Shape 16"/>
+          <p:cNvSpPr/>
+          <p:nvPr/>
+        </p:nvSpPr>
+        <p:spPr>
+          <a:xfrm>
+            <a:off x="7635240" y="4498848"/>
+            <a:ext cx="3474720" cy="1143000"/>
+          </a:xfrm>
+          <a:prstGeom prst="roundRect">
+            <a:avLst>
+              <a:gd name="adj" fmla="val 9600"/>
             </a:avLst>
           </a:prstGeom>
           <a:solidFill>
@@ -4794,14 +5196,14 @@
       </p:sp>
       <p:sp>
         <p:nvSpPr>
-          <p:cNvPr id="14" name="Text 12"/>
-          <p:cNvSpPr/>
-          <p:nvPr/>
-        </p:nvSpPr>
-        <p:spPr>
-          <a:xfrm>
-            <a:off x="8074152" y="3666744"/>
-            <a:ext cx="2825496" cy="256032"/>
+          <p:cNvPr id="19" name="Text 17"/>
+          <p:cNvSpPr/>
+          <p:nvPr/>
+        </p:nvSpPr>
+        <p:spPr>
+          <a:xfrm>
+            <a:off x="7799832" y="4645152"/>
+            <a:ext cx="3145536" cy="256032"/>
           </a:xfrm>
           <a:prstGeom prst="rect">
             <a:avLst/>
@@ -4825,7 +5227,7 @@
                 <a:ea typeface="Aptos" pitchFamily="34" charset="-122"/>
                 <a:cs typeface="Aptos" pitchFamily="34" charset="-120"/>
               </a:rPr>
-              <a:t>Use this for</a:t>
+              <a:t>Safeguard to plan</a:t>
             </a:r>
             <a:endParaRPr lang="en-US" sz="1300" dirty="0"/>
           </a:p>
@@ -4833,14 +5235,14 @@
       </p:sp>
       <p:sp>
         <p:nvSpPr>
-          <p:cNvPr id="15" name="Text 13"/>
-          <p:cNvSpPr/>
-          <p:nvPr/>
-        </p:nvSpPr>
-        <p:spPr>
-          <a:xfrm>
-            <a:off x="8074152" y="4023360"/>
-            <a:ext cx="2825496" cy="1097280"/>
+          <p:cNvPr id="20" name="Text 18"/>
+          <p:cNvSpPr/>
+          <p:nvPr/>
+        </p:nvSpPr>
+        <p:spPr>
+          <a:xfrm>
+            <a:off x="7799832" y="5001768"/>
+            <a:ext cx="3145536" cy="502920"/>
           </a:xfrm>
           <a:prstGeom prst="rect">
             <a:avLst/>
@@ -4866,7 +5268,7 @@
                 <a:ea typeface="Aptos" pitchFamily="34" charset="-122"/>
                 <a:cs typeface="Aptos" pitchFamily="34" charset="-120"/>
               </a:rPr>
-              <a:t>Connect the concept to public health decisions, safeguards, documentation, or implementation work.</a:t>
+              <a:t>Identify what could go wrong, who could be affected, what safeguards are needed, and what evidence should be reviewed before use expands.</a:t>
             </a:r>
             <a:endParaRPr lang="en-US" sz="1550" dirty="0"/>
           </a:p>
@@ -5040,8 +5442,8 @@
         </p:nvSpPr>
         <p:spPr>
           <a:xfrm>
-            <a:off x="9966960" y="6537960"/>
-            <a:ext cx="1645920" cy="201168"/>
+            <a:off x="9646920" y="6537960"/>
+            <a:ext cx="1965960" cy="201168"/>
           </a:xfrm>
           <a:prstGeom prst="rect">
             <a:avLst/>
@@ -5065,7 +5467,7 @@
                 <a:ea typeface="Aptos" pitchFamily="34" charset="-122"/>
                 <a:cs typeface="Aptos" pitchFamily="34" charset="-120"/>
               </a:rPr>
-              <a:t>Â© Paula Soper</a:t>
+              <a:t>Copyright Paula Soper</a:t>
             </a:r>
             <a:endParaRPr lang="en-US" sz="800" dirty="0"/>
           </a:p>
@@ -5160,7 +5562,7 @@
         <p:spPr>
           <a:xfrm>
             <a:off x="868680" y="1508760"/>
-            <a:ext cx="6537960" cy="4160520"/>
+            <a:ext cx="6309360" cy="4160520"/>
           </a:xfrm>
           <a:prstGeom prst="rect">
             <a:avLst/>
@@ -5225,12 +5627,12 @@
         </p:nvSpPr>
         <p:spPr>
           <a:xfrm>
-            <a:off x="7909560" y="1417320"/>
-            <a:ext cx="3154680" cy="1828800"/>
+            <a:off x="7635240" y="1325880"/>
+            <a:ext cx="3474720" cy="1325880"/>
           </a:xfrm>
           <a:prstGeom prst="roundRect">
             <a:avLst>
-              <a:gd name="adj" fmla="val 6000"/>
+              <a:gd name="adj" fmla="val 8276"/>
             </a:avLst>
           </a:prstGeom>
           <a:solidFill>
@@ -5252,8 +5654,8 @@
         </p:nvSpPr>
         <p:spPr>
           <a:xfrm>
-            <a:off x="8074152" y="1563624"/>
-            <a:ext cx="2825496" cy="256032"/>
+            <a:off x="7799832" y="1472184"/>
+            <a:ext cx="3145536" cy="256032"/>
           </a:xfrm>
           <a:prstGeom prst="rect">
             <a:avLst/>
@@ -5277,7 +5679,7 @@
                 <a:ea typeface="Aptos" pitchFamily="34" charset="-122"/>
                 <a:cs typeface="Aptos" pitchFamily="34" charset="-120"/>
               </a:rPr>
-              <a:t>Key idea</a:t>
+              <a:t>Risk check</a:t>
             </a:r>
             <a:endParaRPr lang="en-US" sz="1300" dirty="0"/>
           </a:p>
@@ -5291,8 +5693,8 @@
         </p:nvSpPr>
         <p:spPr>
           <a:xfrm>
-            <a:off x="8074152" y="1920240"/>
-            <a:ext cx="2825496" cy="1188720"/>
+            <a:off x="7799832" y="1828800"/>
+            <a:ext cx="3145536" cy="685800"/>
           </a:xfrm>
           <a:prstGeom prst="rect">
             <a:avLst/>
@@ -5332,12 +5734,165 @@
         </p:nvSpPr>
         <p:spPr>
           <a:xfrm>
-            <a:off x="7909560" y="3520440"/>
-            <a:ext cx="3154680" cy="1737360"/>
+            <a:off x="7635240" y="2788920"/>
+            <a:ext cx="3474720" cy="1536192"/>
           </a:xfrm>
           <a:prstGeom prst="roundRect">
             <a:avLst>
-              <a:gd name="adj" fmla="val 6316"/>
+              <a:gd name="adj" fmla="val 7143"/>
+            </a:avLst>
+          </a:prstGeom>
+          <a:solidFill>
+            <a:srgbClr val="FFFFFF">
+              <a:alpha val="88000"/>
+            </a:srgbClr>
+          </a:solidFill>
+          <a:ln w="12700">
+            <a:solidFill>
+              <a:srgbClr val="D6E8F2"/>
+            </a:solidFill>
+            <a:prstDash val="solid"/>
+          </a:ln>
+        </p:spPr>
+      </p:sp>
+      <p:sp>
+        <p:nvSpPr>
+          <p:cNvPr id="14" name="Shape 12"/>
+          <p:cNvSpPr/>
+          <p:nvPr/>
+        </p:nvSpPr>
+        <p:spPr>
+          <a:xfrm>
+            <a:off x="8046720" y="3108960"/>
+            <a:ext cx="2651760" cy="896112"/>
+          </a:xfrm>
+          <a:prstGeom prst="arc">
+            <a:avLst/>
+          </a:prstGeom>
+          <a:noFill/>
+          <a:ln w="25400">
+            <a:solidFill>
+              <a:srgbClr val="0068B7"/>
+            </a:solidFill>
+            <a:prstDash val="solid"/>
+          </a:ln>
+        </p:spPr>
+      </p:sp>
+      <p:sp>
+        <p:nvSpPr>
+          <p:cNvPr id="15" name="Text 13"/>
+          <p:cNvSpPr/>
+          <p:nvPr/>
+        </p:nvSpPr>
+        <p:spPr>
+          <a:xfrm>
+            <a:off x="7909560" y="3099816"/>
+            <a:ext cx="2926080" cy="256032"/>
+          </a:xfrm>
+          <a:prstGeom prst="rect">
+            <a:avLst/>
+          </a:prstGeom>
+          <a:noFill/>
+          <a:ln/>
+        </p:spPr>
+        <p:txBody>
+          <a:bodyPr wrap="square" lIns="0" tIns="0" rIns="0" bIns="0" rtlCol="0" anchor="ctr"/>
+          <a:lstStyle/>
+          <a:p>
+            <a:pPr algn="ctr" indent="0" marL="0">
+              <a:buNone/>
+            </a:pPr>
+            <a:r>
+              <a:rPr lang="en-US" sz="1500" b="1" dirty="0">
+                <a:solidFill>
+                  <a:srgbClr val="003A63"/>
+                </a:solidFill>
+                <a:latin typeface="Aptos" pitchFamily="34" charset="0"/>
+                <a:ea typeface="Aptos" pitchFamily="34" charset="-122"/>
+                <a:cs typeface="Aptos" pitchFamily="34" charset="-120"/>
+              </a:rPr>
+              <a:t>Risk</a:t>
+            </a:r>
+            <a:endParaRPr lang="en-US" sz="1500" dirty="0"/>
+          </a:p>
+        </p:txBody>
+      </p:sp>
+      <p:sp>
+        <p:nvSpPr>
+          <p:cNvPr id="16" name="Shape 14"/>
+          <p:cNvSpPr/>
+          <p:nvPr/>
+        </p:nvSpPr>
+        <p:spPr>
+          <a:xfrm>
+            <a:off x="8366760" y="3639312"/>
+            <a:ext cx="2011680" cy="0"/>
+          </a:xfrm>
+          <a:prstGeom prst="line">
+            <a:avLst/>
+          </a:prstGeom>
+          <a:noFill/>
+          <a:ln w="63500">
+            <a:solidFill>
+              <a:srgbClr val="2F8A28"/>
+            </a:solidFill>
+            <a:prstDash val="solid"/>
+          </a:ln>
+        </p:spPr>
+      </p:sp>
+      <p:sp>
+        <p:nvSpPr>
+          <p:cNvPr id="17" name="Text 15"/>
+          <p:cNvSpPr/>
+          <p:nvPr/>
+        </p:nvSpPr>
+        <p:spPr>
+          <a:xfrm>
+            <a:off x="7909560" y="3849624"/>
+            <a:ext cx="2926080" cy="164592"/>
+          </a:xfrm>
+          <a:prstGeom prst="rect">
+            <a:avLst/>
+          </a:prstGeom>
+          <a:noFill/>
+          <a:ln/>
+        </p:spPr>
+        <p:txBody>
+          <a:bodyPr wrap="square" lIns="0" tIns="0" rIns="0" bIns="0" rtlCol="0" anchor="ctr"/>
+          <a:lstStyle/>
+          <a:p>
+            <a:pPr algn="ctr" indent="0" marL="0">
+              <a:buNone/>
+            </a:pPr>
+            <a:r>
+              <a:rPr lang="en-US" sz="900" dirty="0">
+                <a:solidFill>
+                  <a:srgbClr val="003A63"/>
+                </a:solidFill>
+                <a:latin typeface="Aptos" pitchFamily="34" charset="0"/>
+                <a:ea typeface="Aptos" pitchFamily="34" charset="-122"/>
+                <a:cs typeface="Aptos" pitchFamily="34" charset="-120"/>
+              </a:rPr>
+              <a:t>Human review</a:t>
+            </a:r>
+            <a:endParaRPr lang="en-US" sz="900" dirty="0"/>
+          </a:p>
+        </p:txBody>
+      </p:sp>
+      <p:sp>
+        <p:nvSpPr>
+          <p:cNvPr id="18" name="Shape 16"/>
+          <p:cNvSpPr/>
+          <p:nvPr/>
+        </p:nvSpPr>
+        <p:spPr>
+          <a:xfrm>
+            <a:off x="7635240" y="4498848"/>
+            <a:ext cx="3474720" cy="1143000"/>
+          </a:xfrm>
+          <a:prstGeom prst="roundRect">
+            <a:avLst>
+              <a:gd name="adj" fmla="val 9600"/>
             </a:avLst>
           </a:prstGeom>
           <a:solidFill>
@@ -5353,14 +5908,14 @@
       </p:sp>
       <p:sp>
         <p:nvSpPr>
-          <p:cNvPr id="14" name="Text 12"/>
-          <p:cNvSpPr/>
-          <p:nvPr/>
-        </p:nvSpPr>
-        <p:spPr>
-          <a:xfrm>
-            <a:off x="8074152" y="3666744"/>
-            <a:ext cx="2825496" cy="256032"/>
+          <p:cNvPr id="19" name="Text 17"/>
+          <p:cNvSpPr/>
+          <p:nvPr/>
+        </p:nvSpPr>
+        <p:spPr>
+          <a:xfrm>
+            <a:off x="7799832" y="4645152"/>
+            <a:ext cx="3145536" cy="256032"/>
           </a:xfrm>
           <a:prstGeom prst="rect">
             <a:avLst/>
@@ -5384,7 +5939,7 @@
                 <a:ea typeface="Aptos" pitchFamily="34" charset="-122"/>
                 <a:cs typeface="Aptos" pitchFamily="34" charset="-120"/>
               </a:rPr>
-              <a:t>Use this for</a:t>
+              <a:t>Safeguard to plan</a:t>
             </a:r>
             <a:endParaRPr lang="en-US" sz="1300" dirty="0"/>
           </a:p>
@@ -5392,14 +5947,14 @@
       </p:sp>
       <p:sp>
         <p:nvSpPr>
-          <p:cNvPr id="15" name="Text 13"/>
-          <p:cNvSpPr/>
-          <p:nvPr/>
-        </p:nvSpPr>
-        <p:spPr>
-          <a:xfrm>
-            <a:off x="8074152" y="4023360"/>
-            <a:ext cx="2825496" cy="1097280"/>
+          <p:cNvPr id="20" name="Text 18"/>
+          <p:cNvSpPr/>
+          <p:nvPr/>
+        </p:nvSpPr>
+        <p:spPr>
+          <a:xfrm>
+            <a:off x="7799832" y="5001768"/>
+            <a:ext cx="3145536" cy="502920"/>
           </a:xfrm>
           <a:prstGeom prst="rect">
             <a:avLst/>
@@ -5425,7 +5980,7 @@
                 <a:ea typeface="Aptos" pitchFamily="34" charset="-122"/>
                 <a:cs typeface="Aptos" pitchFamily="34" charset="-120"/>
               </a:rPr>
-              <a:t>Connect the concept to public health decisions, safeguards, documentation, or implementation work.</a:t>
+              <a:t>Identify what could go wrong, who could be affected, what safeguards are needed, and what evidence should be reviewed before use expands.</a:t>
             </a:r>
             <a:endParaRPr lang="en-US" sz="1550" dirty="0"/>
           </a:p>
@@ -5599,8 +6154,8 @@
         </p:nvSpPr>
         <p:spPr>
           <a:xfrm>
-            <a:off x="9966960" y="6537960"/>
-            <a:ext cx="1645920" cy="201168"/>
+            <a:off x="9646920" y="6537960"/>
+            <a:ext cx="1965960" cy="201168"/>
           </a:xfrm>
           <a:prstGeom prst="rect">
             <a:avLst/>
@@ -5624,7 +6179,7 @@
                 <a:ea typeface="Aptos" pitchFamily="34" charset="-122"/>
                 <a:cs typeface="Aptos" pitchFamily="34" charset="-120"/>
               </a:rPr>
-              <a:t>Â© Paula Soper</a:t>
+              <a:t>Copyright Paula Soper</a:t>
             </a:r>
             <a:endParaRPr lang="en-US" sz="800" dirty="0"/>
           </a:p>
@@ -5719,7 +6274,7 @@
         <p:spPr>
           <a:xfrm>
             <a:off x="868680" y="1508760"/>
-            <a:ext cx="6537960" cy="4160520"/>
+            <a:ext cx="6309360" cy="4160520"/>
           </a:xfrm>
           <a:prstGeom prst="rect">
             <a:avLst/>
@@ -5784,12 +6339,12 @@
         </p:nvSpPr>
         <p:spPr>
           <a:xfrm>
-            <a:off x="7909560" y="1417320"/>
-            <a:ext cx="3154680" cy="1828800"/>
+            <a:off x="7635240" y="1325880"/>
+            <a:ext cx="3474720" cy="1325880"/>
           </a:xfrm>
           <a:prstGeom prst="roundRect">
             <a:avLst>
-              <a:gd name="adj" fmla="val 6000"/>
+              <a:gd name="adj" fmla="val 8276"/>
             </a:avLst>
           </a:prstGeom>
           <a:solidFill>
@@ -5811,8 +6366,8 @@
         </p:nvSpPr>
         <p:spPr>
           <a:xfrm>
-            <a:off x="8074152" y="1563624"/>
-            <a:ext cx="2825496" cy="256032"/>
+            <a:off x="7799832" y="1472184"/>
+            <a:ext cx="3145536" cy="256032"/>
           </a:xfrm>
           <a:prstGeom prst="rect">
             <a:avLst/>
@@ -5836,7 +6391,7 @@
                 <a:ea typeface="Aptos" pitchFamily="34" charset="-122"/>
                 <a:cs typeface="Aptos" pitchFamily="34" charset="-120"/>
               </a:rPr>
-              <a:t>Key idea</a:t>
+              <a:t>Risk check</a:t>
             </a:r>
             <a:endParaRPr lang="en-US" sz="1300" dirty="0"/>
           </a:p>
@@ -5850,8 +6405,8 @@
         </p:nvSpPr>
         <p:spPr>
           <a:xfrm>
-            <a:off x="8074152" y="1920240"/>
-            <a:ext cx="2825496" cy="1188720"/>
+            <a:off x="7799832" y="1828800"/>
+            <a:ext cx="3145536" cy="685800"/>
           </a:xfrm>
           <a:prstGeom prst="rect">
             <a:avLst/>
@@ -5891,12 +6446,165 @@
         </p:nvSpPr>
         <p:spPr>
           <a:xfrm>
-            <a:off x="7909560" y="3520440"/>
-            <a:ext cx="3154680" cy="1737360"/>
+            <a:off x="7635240" y="2788920"/>
+            <a:ext cx="3474720" cy="1536192"/>
           </a:xfrm>
           <a:prstGeom prst="roundRect">
             <a:avLst>
-              <a:gd name="adj" fmla="val 6316"/>
+              <a:gd name="adj" fmla="val 7143"/>
+            </a:avLst>
+          </a:prstGeom>
+          <a:solidFill>
+            <a:srgbClr val="FFFFFF">
+              <a:alpha val="88000"/>
+            </a:srgbClr>
+          </a:solidFill>
+          <a:ln w="12700">
+            <a:solidFill>
+              <a:srgbClr val="D6E8F2"/>
+            </a:solidFill>
+            <a:prstDash val="solid"/>
+          </a:ln>
+        </p:spPr>
+      </p:sp>
+      <p:sp>
+        <p:nvSpPr>
+          <p:cNvPr id="14" name="Shape 12"/>
+          <p:cNvSpPr/>
+          <p:nvPr/>
+        </p:nvSpPr>
+        <p:spPr>
+          <a:xfrm>
+            <a:off x="8046720" y="3108960"/>
+            <a:ext cx="2651760" cy="896112"/>
+          </a:xfrm>
+          <a:prstGeom prst="arc">
+            <a:avLst/>
+          </a:prstGeom>
+          <a:noFill/>
+          <a:ln w="25400">
+            <a:solidFill>
+              <a:srgbClr val="0068B7"/>
+            </a:solidFill>
+            <a:prstDash val="solid"/>
+          </a:ln>
+        </p:spPr>
+      </p:sp>
+      <p:sp>
+        <p:nvSpPr>
+          <p:cNvPr id="15" name="Text 13"/>
+          <p:cNvSpPr/>
+          <p:nvPr/>
+        </p:nvSpPr>
+        <p:spPr>
+          <a:xfrm>
+            <a:off x="7909560" y="3099816"/>
+            <a:ext cx="2926080" cy="256032"/>
+          </a:xfrm>
+          <a:prstGeom prst="rect">
+            <a:avLst/>
+          </a:prstGeom>
+          <a:noFill/>
+          <a:ln/>
+        </p:spPr>
+        <p:txBody>
+          <a:bodyPr wrap="square" lIns="0" tIns="0" rIns="0" bIns="0" rtlCol="0" anchor="ctr"/>
+          <a:lstStyle/>
+          <a:p>
+            <a:pPr algn="ctr" indent="0" marL="0">
+              <a:buNone/>
+            </a:pPr>
+            <a:r>
+              <a:rPr lang="en-US" sz="1500" b="1" dirty="0">
+                <a:solidFill>
+                  <a:srgbClr val="003A63"/>
+                </a:solidFill>
+                <a:latin typeface="Aptos" pitchFamily="34" charset="0"/>
+                <a:ea typeface="Aptos" pitchFamily="34" charset="-122"/>
+                <a:cs typeface="Aptos" pitchFamily="34" charset="-120"/>
+              </a:rPr>
+              <a:t>Risk</a:t>
+            </a:r>
+            <a:endParaRPr lang="en-US" sz="1500" dirty="0"/>
+          </a:p>
+        </p:txBody>
+      </p:sp>
+      <p:sp>
+        <p:nvSpPr>
+          <p:cNvPr id="16" name="Shape 14"/>
+          <p:cNvSpPr/>
+          <p:nvPr/>
+        </p:nvSpPr>
+        <p:spPr>
+          <a:xfrm>
+            <a:off x="8366760" y="3639312"/>
+            <a:ext cx="2011680" cy="0"/>
+          </a:xfrm>
+          <a:prstGeom prst="line">
+            <a:avLst/>
+          </a:prstGeom>
+          <a:noFill/>
+          <a:ln w="63500">
+            <a:solidFill>
+              <a:srgbClr val="2F8A28"/>
+            </a:solidFill>
+            <a:prstDash val="solid"/>
+          </a:ln>
+        </p:spPr>
+      </p:sp>
+      <p:sp>
+        <p:nvSpPr>
+          <p:cNvPr id="17" name="Text 15"/>
+          <p:cNvSpPr/>
+          <p:nvPr/>
+        </p:nvSpPr>
+        <p:spPr>
+          <a:xfrm>
+            <a:off x="7909560" y="3849624"/>
+            <a:ext cx="2926080" cy="164592"/>
+          </a:xfrm>
+          <a:prstGeom prst="rect">
+            <a:avLst/>
+          </a:prstGeom>
+          <a:noFill/>
+          <a:ln/>
+        </p:spPr>
+        <p:txBody>
+          <a:bodyPr wrap="square" lIns="0" tIns="0" rIns="0" bIns="0" rtlCol="0" anchor="ctr"/>
+          <a:lstStyle/>
+          <a:p>
+            <a:pPr algn="ctr" indent="0" marL="0">
+              <a:buNone/>
+            </a:pPr>
+            <a:r>
+              <a:rPr lang="en-US" sz="900" dirty="0">
+                <a:solidFill>
+                  <a:srgbClr val="003A63"/>
+                </a:solidFill>
+                <a:latin typeface="Aptos" pitchFamily="34" charset="0"/>
+                <a:ea typeface="Aptos" pitchFamily="34" charset="-122"/>
+                <a:cs typeface="Aptos" pitchFamily="34" charset="-120"/>
+              </a:rPr>
+              <a:t>Human review</a:t>
+            </a:r>
+            <a:endParaRPr lang="en-US" sz="900" dirty="0"/>
+          </a:p>
+        </p:txBody>
+      </p:sp>
+      <p:sp>
+        <p:nvSpPr>
+          <p:cNvPr id="18" name="Shape 16"/>
+          <p:cNvSpPr/>
+          <p:nvPr/>
+        </p:nvSpPr>
+        <p:spPr>
+          <a:xfrm>
+            <a:off x="7635240" y="4498848"/>
+            <a:ext cx="3474720" cy="1143000"/>
+          </a:xfrm>
+          <a:prstGeom prst="roundRect">
+            <a:avLst>
+              <a:gd name="adj" fmla="val 9600"/>
             </a:avLst>
           </a:prstGeom>
           <a:solidFill>
@@ -5912,14 +6620,14 @@
       </p:sp>
       <p:sp>
         <p:nvSpPr>
-          <p:cNvPr id="14" name="Text 12"/>
-          <p:cNvSpPr/>
-          <p:nvPr/>
-        </p:nvSpPr>
-        <p:spPr>
-          <a:xfrm>
-            <a:off x="8074152" y="3666744"/>
-            <a:ext cx="2825496" cy="256032"/>
+          <p:cNvPr id="19" name="Text 17"/>
+          <p:cNvSpPr/>
+          <p:nvPr/>
+        </p:nvSpPr>
+        <p:spPr>
+          <a:xfrm>
+            <a:off x="7799832" y="4645152"/>
+            <a:ext cx="3145536" cy="256032"/>
           </a:xfrm>
           <a:prstGeom prst="rect">
             <a:avLst/>
@@ -5943,7 +6651,7 @@
                 <a:ea typeface="Aptos" pitchFamily="34" charset="-122"/>
                 <a:cs typeface="Aptos" pitchFamily="34" charset="-120"/>
               </a:rPr>
-              <a:t>Use this for</a:t>
+              <a:t>Safeguard to plan</a:t>
             </a:r>
             <a:endParaRPr lang="en-US" sz="1300" dirty="0"/>
           </a:p>
@@ -5951,14 +6659,14 @@
       </p:sp>
       <p:sp>
         <p:nvSpPr>
-          <p:cNvPr id="15" name="Text 13"/>
-          <p:cNvSpPr/>
-          <p:nvPr/>
-        </p:nvSpPr>
-        <p:spPr>
-          <a:xfrm>
-            <a:off x="8074152" y="4023360"/>
-            <a:ext cx="2825496" cy="1097280"/>
+          <p:cNvPr id="20" name="Text 18"/>
+          <p:cNvSpPr/>
+          <p:nvPr/>
+        </p:nvSpPr>
+        <p:spPr>
+          <a:xfrm>
+            <a:off x="7799832" y="5001768"/>
+            <a:ext cx="3145536" cy="502920"/>
           </a:xfrm>
           <a:prstGeom prst="rect">
             <a:avLst/>
@@ -5984,7 +6692,7 @@
                 <a:ea typeface="Aptos" pitchFamily="34" charset="-122"/>
                 <a:cs typeface="Aptos" pitchFamily="34" charset="-120"/>
               </a:rPr>
-              <a:t>Connect the concept to public health decisions, safeguards, documentation, or implementation work.</a:t>
+              <a:t>Identify what could go wrong, who could be affected, what safeguards are needed, and what evidence should be reviewed before use expands.</a:t>
             </a:r>
             <a:endParaRPr lang="en-US" sz="1550" dirty="0"/>
           </a:p>
@@ -6158,8 +6866,8 @@
         </p:nvSpPr>
         <p:spPr>
           <a:xfrm>
-            <a:off x="9966960" y="6537960"/>
-            <a:ext cx="1645920" cy="201168"/>
+            <a:off x="9646920" y="6537960"/>
+            <a:ext cx="1965960" cy="201168"/>
           </a:xfrm>
           <a:prstGeom prst="rect">
             <a:avLst/>
@@ -6183,7 +6891,7 @@
                 <a:ea typeface="Aptos" pitchFamily="34" charset="-122"/>
                 <a:cs typeface="Aptos" pitchFamily="34" charset="-120"/>
               </a:rPr>
-              <a:t>Â© Paula Soper</a:t>
+              <a:t>Copyright Paula Soper</a:t>
             </a:r>
             <a:endParaRPr lang="en-US" sz="800" dirty="0"/>
           </a:p>
@@ -6230,77 +6938,13 @@
       </p:sp>
       <p:sp>
         <p:nvSpPr>
-          <p:cNvPr id="8" name="Shape 6"/>
+          <p:cNvPr id="8" name="Text 6"/>
           <p:cNvSpPr/>
           <p:nvPr/>
         </p:nvSpPr>
         <p:spPr>
           <a:xfrm>
             <a:off x="640080" y="658368"/>
-            <a:ext cx="420624" cy="420624"/>
-          </a:xfrm>
-          <a:prstGeom prst="ellipse">
-            <a:avLst/>
-          </a:prstGeom>
-          <a:solidFill>
-            <a:srgbClr val="0068B7"/>
-          </a:solidFill>
-          <a:ln w="12700">
-            <a:solidFill>
-              <a:srgbClr val="0068B7"/>
-            </a:solidFill>
-            <a:prstDash val="solid"/>
-          </a:ln>
-        </p:spPr>
-      </p:sp>
-      <p:sp>
-        <p:nvSpPr>
-          <p:cNvPr id="9" name="Text 7"/>
-          <p:cNvSpPr/>
-          <p:nvPr/>
-        </p:nvSpPr>
-        <p:spPr>
-          <a:xfrm>
-            <a:off x="640080" y="731520"/>
-            <a:ext cx="420624" cy="164592"/>
-          </a:xfrm>
-          <a:prstGeom prst="rect">
-            <a:avLst/>
-          </a:prstGeom>
-          <a:noFill/>
-          <a:ln/>
-        </p:spPr>
-        <p:txBody>
-          <a:bodyPr wrap="square" lIns="0" tIns="0" rIns="0" bIns="0" rtlCol="0" anchor="ctr"/>
-          <a:lstStyle/>
-          <a:p>
-            <a:pPr algn="ctr" indent="0" marL="0">
-              <a:buNone/>
-            </a:pPr>
-            <a:r>
-              <a:rPr lang="en-US" sz="1100" b="1" dirty="0">
-                <a:solidFill>
-                  <a:srgbClr val="FFFFFF"/>
-                </a:solidFill>
-                <a:latin typeface="Aptos" pitchFamily="34" charset="0"/>
-                <a:ea typeface="Aptos" pitchFamily="34" charset="-122"/>
-                <a:cs typeface="Aptos" pitchFamily="34" charset="-120"/>
-              </a:rPr>
-              <a:t>7</a:t>
-            </a:r>
-            <a:endParaRPr lang="en-US" sz="1100" dirty="0"/>
-          </a:p>
-        </p:txBody>
-      </p:sp>
-      <p:sp>
-        <p:nvSpPr>
-          <p:cNvPr id="10" name="Text 8"/>
-          <p:cNvSpPr/>
-          <p:nvPr/>
-        </p:nvSpPr>
-        <p:spPr>
-          <a:xfrm>
-            <a:off x="640080" y="621792"/>
             <a:ext cx="10881360" cy="713232"/>
           </a:xfrm>
           <a:prstGeom prst="rect">
@@ -6335,14 +6979,14 @@
       </p:sp>
       <p:sp>
         <p:nvSpPr>
-          <p:cNvPr id="11" name="Text 9"/>
+          <p:cNvPr id="9" name="Text 7"/>
           <p:cNvSpPr/>
           <p:nvPr/>
         </p:nvSpPr>
         <p:spPr>
           <a:xfrm>
             <a:off x="868680" y="1508760"/>
-            <a:ext cx="6537960" cy="4160520"/>
+            <a:ext cx="6309360" cy="4160520"/>
           </a:xfrm>
           <a:prstGeom prst="rect">
             <a:avLst/>
@@ -6401,18 +7045,18 @@
       </p:sp>
       <p:sp>
         <p:nvSpPr>
-          <p:cNvPr id="12" name="Shape 10"/>
-          <p:cNvSpPr/>
-          <p:nvPr/>
-        </p:nvSpPr>
-        <p:spPr>
-          <a:xfrm>
-            <a:off x="7909560" y="1417320"/>
-            <a:ext cx="3154680" cy="1828800"/>
+          <p:cNvPr id="10" name="Shape 8"/>
+          <p:cNvSpPr/>
+          <p:nvPr/>
+        </p:nvSpPr>
+        <p:spPr>
+          <a:xfrm>
+            <a:off x="7635240" y="1325880"/>
+            <a:ext cx="3474720" cy="1325880"/>
           </a:xfrm>
           <a:prstGeom prst="roundRect">
             <a:avLst>
-              <a:gd name="adj" fmla="val 6000"/>
+              <a:gd name="adj" fmla="val 8276"/>
             </a:avLst>
           </a:prstGeom>
           <a:solidFill>
@@ -6428,14 +7072,14 @@
       </p:sp>
       <p:sp>
         <p:nvSpPr>
-          <p:cNvPr id="13" name="Text 11"/>
-          <p:cNvSpPr/>
-          <p:nvPr/>
-        </p:nvSpPr>
-        <p:spPr>
-          <a:xfrm>
-            <a:off x="8074152" y="1563624"/>
-            <a:ext cx="2825496" cy="256032"/>
+          <p:cNvPr id="11" name="Text 9"/>
+          <p:cNvSpPr/>
+          <p:nvPr/>
+        </p:nvSpPr>
+        <p:spPr>
+          <a:xfrm>
+            <a:off x="7799832" y="1472184"/>
+            <a:ext cx="3145536" cy="256032"/>
           </a:xfrm>
           <a:prstGeom prst="rect">
             <a:avLst/>
@@ -6459,7 +7103,7 @@
                 <a:ea typeface="Aptos" pitchFamily="34" charset="-122"/>
                 <a:cs typeface="Aptos" pitchFamily="34" charset="-120"/>
               </a:rPr>
-              <a:t>Key idea</a:t>
+              <a:t>Core concept</a:t>
             </a:r>
             <a:endParaRPr lang="en-US" sz="1300" dirty="0"/>
           </a:p>
@@ -6467,14 +7111,14 @@
       </p:sp>
       <p:sp>
         <p:nvSpPr>
-          <p:cNvPr id="14" name="Text 12"/>
-          <p:cNvSpPr/>
-          <p:nvPr/>
-        </p:nvSpPr>
-        <p:spPr>
-          <a:xfrm>
-            <a:off x="8074152" y="1920240"/>
-            <a:ext cx="2825496" cy="1188720"/>
+          <p:cNvPr id="12" name="Text 10"/>
+          <p:cNvSpPr/>
+          <p:nvPr/>
+        </p:nvSpPr>
+        <p:spPr>
+          <a:xfrm>
+            <a:off x="7799832" y="1828800"/>
+            <a:ext cx="3145536" cy="685800"/>
           </a:xfrm>
           <a:prstGeom prst="rect">
             <a:avLst/>
@@ -6508,18 +7152,159 @@
       </p:sp>
       <p:sp>
         <p:nvSpPr>
-          <p:cNvPr id="15" name="Shape 13"/>
-          <p:cNvSpPr/>
-          <p:nvPr/>
-        </p:nvSpPr>
-        <p:spPr>
-          <a:xfrm>
-            <a:off x="7909560" y="3520440"/>
-            <a:ext cx="3154680" cy="1737360"/>
+          <p:cNvPr id="13" name="Shape 11"/>
+          <p:cNvSpPr/>
+          <p:nvPr/>
+        </p:nvSpPr>
+        <p:spPr>
+          <a:xfrm>
+            <a:off x="7635240" y="2788920"/>
+            <a:ext cx="3474720" cy="1536192"/>
           </a:xfrm>
           <a:prstGeom prst="roundRect">
             <a:avLst>
-              <a:gd name="adj" fmla="val 6316"/>
+              <a:gd name="adj" fmla="val 7143"/>
+            </a:avLst>
+          </a:prstGeom>
+          <a:solidFill>
+            <a:srgbClr val="FFFFFF">
+              <a:alpha val="88000"/>
+            </a:srgbClr>
+          </a:solidFill>
+          <a:ln w="12700">
+            <a:solidFill>
+              <a:srgbClr val="D6E8F2"/>
+            </a:solidFill>
+            <a:prstDash val="solid"/>
+          </a:ln>
+        </p:spPr>
+      </p:sp>
+      <p:sp>
+        <p:nvSpPr>
+          <p:cNvPr id="14" name="Shape 12"/>
+          <p:cNvSpPr/>
+          <p:nvPr/>
+        </p:nvSpPr>
+        <p:spPr>
+          <a:xfrm>
+            <a:off x="8074152" y="3291840"/>
+            <a:ext cx="2596896" cy="749808"/>
+          </a:xfrm>
+          <a:prstGeom prst="rect">
+            <a:avLst/>
+          </a:prstGeom>
+          <a:solidFill>
+            <a:srgbClr val="EAF6F8"/>
+          </a:solidFill>
+          <a:ln w="12700">
+            <a:solidFill>
+              <a:srgbClr val="8ABBD8"/>
+            </a:solidFill>
+            <a:prstDash val="solid"/>
+          </a:ln>
+        </p:spPr>
+      </p:sp>
+      <p:sp>
+        <p:nvSpPr>
+          <p:cNvPr id="15" name="Shape 13"/>
+          <p:cNvSpPr/>
+          <p:nvPr/>
+        </p:nvSpPr>
+        <p:spPr>
+          <a:xfrm>
+            <a:off x="8202168" y="3721608"/>
+            <a:ext cx="2340864" cy="0"/>
+          </a:xfrm>
+          <a:prstGeom prst="line">
+            <a:avLst/>
+          </a:prstGeom>
+          <a:noFill/>
+          <a:ln w="19050">
+            <a:solidFill>
+              <a:srgbClr val="0068B7"/>
+            </a:solidFill>
+            <a:prstDash val="solid"/>
+          </a:ln>
+        </p:spPr>
+      </p:sp>
+      <p:sp>
+        <p:nvSpPr>
+          <p:cNvPr id="16" name="Shape 14"/>
+          <p:cNvSpPr/>
+          <p:nvPr/>
+        </p:nvSpPr>
+        <p:spPr>
+          <a:xfrm>
+            <a:off x="9198864" y="4206240"/>
+            <a:ext cx="347472" cy="347472"/>
+          </a:xfrm>
+          <a:prstGeom prst="ellipse">
+            <a:avLst/>
+          </a:prstGeom>
+          <a:solidFill>
+            <a:srgbClr val="2F8A28"/>
+          </a:solidFill>
+          <a:ln w="12700">
+            <a:solidFill>
+              <a:srgbClr val="2F8A28"/>
+            </a:solidFill>
+            <a:prstDash val="solid"/>
+          </a:ln>
+        </p:spPr>
+      </p:sp>
+      <p:sp>
+        <p:nvSpPr>
+          <p:cNvPr id="17" name="Text 15"/>
+          <p:cNvSpPr/>
+          <p:nvPr/>
+        </p:nvSpPr>
+        <p:spPr>
+          <a:xfrm>
+            <a:off x="7909560" y="3977640"/>
+            <a:ext cx="2926080" cy="182880"/>
+          </a:xfrm>
+          <a:prstGeom prst="rect">
+            <a:avLst/>
+          </a:prstGeom>
+          <a:noFill/>
+          <a:ln/>
+        </p:spPr>
+        <p:txBody>
+          <a:bodyPr wrap="square" lIns="0" tIns="0" rIns="0" bIns="0" rtlCol="0" anchor="ctr"/>
+          <a:lstStyle/>
+          <a:p>
+            <a:pPr algn="ctr" indent="0" marL="0">
+              <a:buNone/>
+            </a:pPr>
+            <a:r>
+              <a:rPr lang="en-US" sz="1000" dirty="0">
+                <a:solidFill>
+                  <a:srgbClr val="003A63"/>
+                </a:solidFill>
+                <a:latin typeface="Aptos" pitchFamily="34" charset="0"/>
+                <a:ea typeface="Aptos" pitchFamily="34" charset="-122"/>
+                <a:cs typeface="Aptos" pitchFamily="34" charset="-120"/>
+              </a:rPr>
+              <a:t>Concept to action</a:t>
+            </a:r>
+            <a:endParaRPr lang="en-US" sz="1000" dirty="0"/>
+          </a:p>
+        </p:txBody>
+      </p:sp>
+      <p:sp>
+        <p:nvSpPr>
+          <p:cNvPr id="18" name="Shape 16"/>
+          <p:cNvSpPr/>
+          <p:nvPr/>
+        </p:nvSpPr>
+        <p:spPr>
+          <a:xfrm>
+            <a:off x="7635240" y="4498848"/>
+            <a:ext cx="3474720" cy="1143000"/>
+          </a:xfrm>
+          <a:prstGeom prst="roundRect">
+            <a:avLst>
+              <a:gd name="adj" fmla="val 9600"/>
             </a:avLst>
           </a:prstGeom>
           <a:solidFill>
@@ -6535,14 +7320,14 @@
       </p:sp>
       <p:sp>
         <p:nvSpPr>
-          <p:cNvPr id="16" name="Text 14"/>
-          <p:cNvSpPr/>
-          <p:nvPr/>
-        </p:nvSpPr>
-        <p:spPr>
-          <a:xfrm>
-            <a:off x="8074152" y="3666744"/>
-            <a:ext cx="2825496" cy="256032"/>
+          <p:cNvPr id="19" name="Text 17"/>
+          <p:cNvSpPr/>
+          <p:nvPr/>
+        </p:nvSpPr>
+        <p:spPr>
+          <a:xfrm>
+            <a:off x="7799832" y="4645152"/>
+            <a:ext cx="3145536" cy="256032"/>
           </a:xfrm>
           <a:prstGeom prst="rect">
             <a:avLst/>
@@ -6566,7 +7351,7 @@
                 <a:ea typeface="Aptos" pitchFamily="34" charset="-122"/>
                 <a:cs typeface="Aptos" pitchFamily="34" charset="-120"/>
               </a:rPr>
-              <a:t>Use this for</a:t>
+              <a:t>Apply it</a:t>
             </a:r>
             <a:endParaRPr lang="en-US" sz="1300" dirty="0"/>
           </a:p>
@@ -6574,14 +7359,14 @@
       </p:sp>
       <p:sp>
         <p:nvSpPr>
-          <p:cNvPr id="17" name="Text 15"/>
-          <p:cNvSpPr/>
-          <p:nvPr/>
-        </p:nvSpPr>
-        <p:spPr>
-          <a:xfrm>
-            <a:off x="8074152" y="4023360"/>
-            <a:ext cx="2825496" cy="1097280"/>
+          <p:cNvPr id="20" name="Text 18"/>
+          <p:cNvSpPr/>
+          <p:nvPr/>
+        </p:nvSpPr>
+        <p:spPr>
+          <a:xfrm>
+            <a:off x="7799832" y="5001768"/>
+            <a:ext cx="3145536" cy="502920"/>
           </a:xfrm>
           <a:prstGeom prst="rect">
             <a:avLst/>
@@ -6607,7 +7392,7 @@
                 <a:ea typeface="Aptos" pitchFamily="34" charset="-122"/>
                 <a:cs typeface="Aptos" pitchFamily="34" charset="-120"/>
               </a:rPr>
-              <a:t>Connect the concept to public health decisions, safeguards, documentation, or implementation work.</a:t>
+              <a:t>Connect the concept to public health purpose, responsible use, required safeguards, documentation, and the next action a department should take.</a:t>
             </a:r>
             <a:endParaRPr lang="en-US" sz="1550" dirty="0"/>
           </a:p>
@@ -6781,8 +7566,8 @@
         </p:nvSpPr>
         <p:spPr>
           <a:xfrm>
-            <a:off x="9966960" y="6537960"/>
-            <a:ext cx="1645920" cy="201168"/>
+            <a:off x="9646920" y="6537960"/>
+            <a:ext cx="1965960" cy="201168"/>
           </a:xfrm>
           <a:prstGeom prst="rect">
             <a:avLst/>
@@ -6806,7 +7591,7 @@
                 <a:ea typeface="Aptos" pitchFamily="34" charset="-122"/>
                 <a:cs typeface="Aptos" pitchFamily="34" charset="-120"/>
               </a:rPr>
-              <a:t>Â© Paula Soper</a:t>
+              <a:t>Copyright Paula Soper</a:t>
             </a:r>
             <a:endParaRPr lang="en-US" sz="800" dirty="0"/>
           </a:p>
@@ -6901,7 +7686,7 @@
         <p:spPr>
           <a:xfrm>
             <a:off x="868680" y="1508760"/>
-            <a:ext cx="6537960" cy="4160520"/>
+            <a:ext cx="6309360" cy="4160520"/>
           </a:xfrm>
           <a:prstGeom prst="rect">
             <a:avLst/>
@@ -6952,12 +7737,12 @@
         </p:nvSpPr>
         <p:spPr>
           <a:xfrm>
-            <a:off x="7909560" y="1417320"/>
-            <a:ext cx="3154680" cy="1828800"/>
+            <a:off x="7635240" y="1325880"/>
+            <a:ext cx="3474720" cy="1325880"/>
           </a:xfrm>
           <a:prstGeom prst="roundRect">
             <a:avLst>
-              <a:gd name="adj" fmla="val 6000"/>
+              <a:gd name="adj" fmla="val 8276"/>
             </a:avLst>
           </a:prstGeom>
           <a:solidFill>
@@ -6979,8 +7764,8 @@
         </p:nvSpPr>
         <p:spPr>
           <a:xfrm>
-            <a:off x="8074152" y="1563624"/>
-            <a:ext cx="2825496" cy="256032"/>
+            <a:off x="7799832" y="1472184"/>
+            <a:ext cx="3145536" cy="256032"/>
           </a:xfrm>
           <a:prstGeom prst="rect">
             <a:avLst/>
@@ -7004,7 +7789,7 @@
                 <a:ea typeface="Aptos" pitchFamily="34" charset="-122"/>
                 <a:cs typeface="Aptos" pitchFamily="34" charset="-120"/>
               </a:rPr>
-              <a:t>Key idea</a:t>
+              <a:t>Core concept</a:t>
             </a:r>
             <a:endParaRPr lang="en-US" sz="1300" dirty="0"/>
           </a:p>
@@ -7018,8 +7803,8 @@
         </p:nvSpPr>
         <p:spPr>
           <a:xfrm>
-            <a:off x="8074152" y="1920240"/>
-            <a:ext cx="2825496" cy="1188720"/>
+            <a:off x="7799832" y="1828800"/>
+            <a:ext cx="3145536" cy="685800"/>
           </a:xfrm>
           <a:prstGeom prst="rect">
             <a:avLst/>
@@ -7059,12 +7844,153 @@
         </p:nvSpPr>
         <p:spPr>
           <a:xfrm>
-            <a:off x="7909560" y="3520440"/>
-            <a:ext cx="3154680" cy="1737360"/>
+            <a:off x="7635240" y="2788920"/>
+            <a:ext cx="3474720" cy="1536192"/>
           </a:xfrm>
           <a:prstGeom prst="roundRect">
             <a:avLst>
-              <a:gd name="adj" fmla="val 6316"/>
+              <a:gd name="adj" fmla="val 7143"/>
+            </a:avLst>
+          </a:prstGeom>
+          <a:solidFill>
+            <a:srgbClr val="FFFFFF">
+              <a:alpha val="88000"/>
+            </a:srgbClr>
+          </a:solidFill>
+          <a:ln w="12700">
+            <a:solidFill>
+              <a:srgbClr val="D6E8F2"/>
+            </a:solidFill>
+            <a:prstDash val="solid"/>
+          </a:ln>
+        </p:spPr>
+      </p:sp>
+      <p:sp>
+        <p:nvSpPr>
+          <p:cNvPr id="14" name="Shape 12"/>
+          <p:cNvSpPr/>
+          <p:nvPr/>
+        </p:nvSpPr>
+        <p:spPr>
+          <a:xfrm>
+            <a:off x="8074152" y="3291840"/>
+            <a:ext cx="2596896" cy="749808"/>
+          </a:xfrm>
+          <a:prstGeom prst="rect">
+            <a:avLst/>
+          </a:prstGeom>
+          <a:solidFill>
+            <a:srgbClr val="EAF6F8"/>
+          </a:solidFill>
+          <a:ln w="12700">
+            <a:solidFill>
+              <a:srgbClr val="8ABBD8"/>
+            </a:solidFill>
+            <a:prstDash val="solid"/>
+          </a:ln>
+        </p:spPr>
+      </p:sp>
+      <p:sp>
+        <p:nvSpPr>
+          <p:cNvPr id="15" name="Shape 13"/>
+          <p:cNvSpPr/>
+          <p:nvPr/>
+        </p:nvSpPr>
+        <p:spPr>
+          <a:xfrm>
+            <a:off x="8202168" y="3721608"/>
+            <a:ext cx="2340864" cy="0"/>
+          </a:xfrm>
+          <a:prstGeom prst="line">
+            <a:avLst/>
+          </a:prstGeom>
+          <a:noFill/>
+          <a:ln w="19050">
+            <a:solidFill>
+              <a:srgbClr val="0068B7"/>
+            </a:solidFill>
+            <a:prstDash val="solid"/>
+          </a:ln>
+        </p:spPr>
+      </p:sp>
+      <p:sp>
+        <p:nvSpPr>
+          <p:cNvPr id="16" name="Shape 14"/>
+          <p:cNvSpPr/>
+          <p:nvPr/>
+        </p:nvSpPr>
+        <p:spPr>
+          <a:xfrm>
+            <a:off x="9198864" y="4206240"/>
+            <a:ext cx="347472" cy="347472"/>
+          </a:xfrm>
+          <a:prstGeom prst="ellipse">
+            <a:avLst/>
+          </a:prstGeom>
+          <a:solidFill>
+            <a:srgbClr val="2F8A28"/>
+          </a:solidFill>
+          <a:ln w="12700">
+            <a:solidFill>
+              <a:srgbClr val="2F8A28"/>
+            </a:solidFill>
+            <a:prstDash val="solid"/>
+          </a:ln>
+        </p:spPr>
+      </p:sp>
+      <p:sp>
+        <p:nvSpPr>
+          <p:cNvPr id="17" name="Text 15"/>
+          <p:cNvSpPr/>
+          <p:nvPr/>
+        </p:nvSpPr>
+        <p:spPr>
+          <a:xfrm>
+            <a:off x="7909560" y="3977640"/>
+            <a:ext cx="2926080" cy="182880"/>
+          </a:xfrm>
+          <a:prstGeom prst="rect">
+            <a:avLst/>
+          </a:prstGeom>
+          <a:noFill/>
+          <a:ln/>
+        </p:spPr>
+        <p:txBody>
+          <a:bodyPr wrap="square" lIns="0" tIns="0" rIns="0" bIns="0" rtlCol="0" anchor="ctr"/>
+          <a:lstStyle/>
+          <a:p>
+            <a:pPr algn="ctr" indent="0" marL="0">
+              <a:buNone/>
+            </a:pPr>
+            <a:r>
+              <a:rPr lang="en-US" sz="1000" dirty="0">
+                <a:solidFill>
+                  <a:srgbClr val="003A63"/>
+                </a:solidFill>
+                <a:latin typeface="Aptos" pitchFamily="34" charset="0"/>
+                <a:ea typeface="Aptos" pitchFamily="34" charset="-122"/>
+                <a:cs typeface="Aptos" pitchFamily="34" charset="-120"/>
+              </a:rPr>
+              <a:t>Concept to action</a:t>
+            </a:r>
+            <a:endParaRPr lang="en-US" sz="1000" dirty="0"/>
+          </a:p>
+        </p:txBody>
+      </p:sp>
+      <p:sp>
+        <p:nvSpPr>
+          <p:cNvPr id="18" name="Shape 16"/>
+          <p:cNvSpPr/>
+          <p:nvPr/>
+        </p:nvSpPr>
+        <p:spPr>
+          <a:xfrm>
+            <a:off x="7635240" y="4498848"/>
+            <a:ext cx="3474720" cy="1143000"/>
+          </a:xfrm>
+          <a:prstGeom prst="roundRect">
+            <a:avLst>
+              <a:gd name="adj" fmla="val 9600"/>
             </a:avLst>
           </a:prstGeom>
           <a:solidFill>
@@ -7080,14 +8006,14 @@
       </p:sp>
       <p:sp>
         <p:nvSpPr>
-          <p:cNvPr id="14" name="Text 12"/>
-          <p:cNvSpPr/>
-          <p:nvPr/>
-        </p:nvSpPr>
-        <p:spPr>
-          <a:xfrm>
-            <a:off x="8074152" y="3666744"/>
-            <a:ext cx="2825496" cy="256032"/>
+          <p:cNvPr id="19" name="Text 17"/>
+          <p:cNvSpPr/>
+          <p:nvPr/>
+        </p:nvSpPr>
+        <p:spPr>
+          <a:xfrm>
+            <a:off x="7799832" y="4645152"/>
+            <a:ext cx="3145536" cy="256032"/>
           </a:xfrm>
           <a:prstGeom prst="rect">
             <a:avLst/>
@@ -7111,7 +8037,7 @@
                 <a:ea typeface="Aptos" pitchFamily="34" charset="-122"/>
                 <a:cs typeface="Aptos" pitchFamily="34" charset="-120"/>
               </a:rPr>
-              <a:t>Use this for</a:t>
+              <a:t>Apply it</a:t>
             </a:r>
             <a:endParaRPr lang="en-US" sz="1300" dirty="0"/>
           </a:p>
@@ -7119,14 +8045,14 @@
       </p:sp>
       <p:sp>
         <p:nvSpPr>
-          <p:cNvPr id="15" name="Text 13"/>
-          <p:cNvSpPr/>
-          <p:nvPr/>
-        </p:nvSpPr>
-        <p:spPr>
-          <a:xfrm>
-            <a:off x="8074152" y="4023360"/>
-            <a:ext cx="2825496" cy="1097280"/>
+          <p:cNvPr id="20" name="Text 18"/>
+          <p:cNvSpPr/>
+          <p:nvPr/>
+        </p:nvSpPr>
+        <p:spPr>
+          <a:xfrm>
+            <a:off x="7799832" y="5001768"/>
+            <a:ext cx="3145536" cy="502920"/>
           </a:xfrm>
           <a:prstGeom prst="rect">
             <a:avLst/>
@@ -7152,7 +8078,7 @@
                 <a:ea typeface="Aptos" pitchFamily="34" charset="-122"/>
                 <a:cs typeface="Aptos" pitchFamily="34" charset="-120"/>
               </a:rPr>
-              <a:t>Connect the concept to public health decisions, safeguards, documentation, or implementation work.</a:t>
+              <a:t>Connect the concept to public health purpose, responsible use, required safeguards, documentation, and the next action a department should take.</a:t>
             </a:r>
             <a:endParaRPr lang="en-US" sz="1550" dirty="0"/>
           </a:p>
@@ -7326,8 +8252,8 @@
         </p:nvSpPr>
         <p:spPr>
           <a:xfrm>
-            <a:off x="9966960" y="6537960"/>
-            <a:ext cx="1645920" cy="201168"/>
+            <a:off x="9646920" y="6537960"/>
+            <a:ext cx="1965960" cy="201168"/>
           </a:xfrm>
           <a:prstGeom prst="rect">
             <a:avLst/>
@@ -7351,7 +8277,7 @@
                 <a:ea typeface="Aptos" pitchFamily="34" charset="-122"/>
                 <a:cs typeface="Aptos" pitchFamily="34" charset="-120"/>
               </a:rPr>
-              <a:t>Â© Paula Soper</a:t>
+              <a:t>Copyright Paula Soper</a:t>
             </a:r>
             <a:endParaRPr lang="en-US" sz="800" dirty="0"/>
           </a:p>
@@ -7398,77 +8324,13 @@
       </p:sp>
       <p:sp>
         <p:nvSpPr>
-          <p:cNvPr id="8" name="Shape 6"/>
+          <p:cNvPr id="8" name="Text 6"/>
           <p:cNvSpPr/>
           <p:nvPr/>
         </p:nvSpPr>
         <p:spPr>
           <a:xfrm>
             <a:off x="640080" y="658368"/>
-            <a:ext cx="420624" cy="420624"/>
-          </a:xfrm>
-          <a:prstGeom prst="ellipse">
-            <a:avLst/>
-          </a:prstGeom>
-          <a:solidFill>
-            <a:srgbClr val="0068B7"/>
-          </a:solidFill>
-          <a:ln w="12700">
-            <a:solidFill>
-              <a:srgbClr val="0068B7"/>
-            </a:solidFill>
-            <a:prstDash val="solid"/>
-          </a:ln>
-        </p:spPr>
-      </p:sp>
-      <p:sp>
-        <p:nvSpPr>
-          <p:cNvPr id="9" name="Text 7"/>
-          <p:cNvSpPr/>
-          <p:nvPr/>
-        </p:nvSpPr>
-        <p:spPr>
-          <a:xfrm>
-            <a:off x="640080" y="731520"/>
-            <a:ext cx="420624" cy="164592"/>
-          </a:xfrm>
-          <a:prstGeom prst="rect">
-            <a:avLst/>
-          </a:prstGeom>
-          <a:noFill/>
-          <a:ln/>
-        </p:spPr>
-        <p:txBody>
-          <a:bodyPr wrap="square" lIns="0" tIns="0" rIns="0" bIns="0" rtlCol="0" anchor="ctr"/>
-          <a:lstStyle/>
-          <a:p>
-            <a:pPr algn="ctr" indent="0" marL="0">
-              <a:buNone/>
-            </a:pPr>
-            <a:r>
-              <a:rPr lang="en-US" sz="1100" b="1" dirty="0">
-                <a:solidFill>
-                  <a:srgbClr val="FFFFFF"/>
-                </a:solidFill>
-                <a:latin typeface="Aptos" pitchFamily="34" charset="0"/>
-                <a:ea typeface="Aptos" pitchFamily="34" charset="-122"/>
-                <a:cs typeface="Aptos" pitchFamily="34" charset="-120"/>
-              </a:rPr>
-              <a:t>8</a:t>
-            </a:r>
-            <a:endParaRPr lang="en-US" sz="1100" dirty="0"/>
-          </a:p>
-        </p:txBody>
-      </p:sp>
-      <p:sp>
-        <p:nvSpPr>
-          <p:cNvPr id="10" name="Text 8"/>
-          <p:cNvSpPr/>
-          <p:nvPr/>
-        </p:nvSpPr>
-        <p:spPr>
-          <a:xfrm>
-            <a:off x="640080" y="621792"/>
             <a:ext cx="10881360" cy="713232"/>
           </a:xfrm>
           <a:prstGeom prst="rect">
@@ -7503,14 +8365,14 @@
       </p:sp>
       <p:sp>
         <p:nvSpPr>
-          <p:cNvPr id="11" name="Text 9"/>
+          <p:cNvPr id="9" name="Text 7"/>
           <p:cNvSpPr/>
           <p:nvPr/>
         </p:nvSpPr>
         <p:spPr>
           <a:xfrm>
             <a:off x="868680" y="1508760"/>
-            <a:ext cx="6537960" cy="4160520"/>
+            <a:ext cx="6309360" cy="4160520"/>
           </a:xfrm>
           <a:prstGeom prst="rect">
             <a:avLst/>
@@ -7555,18 +8417,18 @@
       </p:sp>
       <p:sp>
         <p:nvSpPr>
-          <p:cNvPr id="12" name="Shape 10"/>
-          <p:cNvSpPr/>
-          <p:nvPr/>
-        </p:nvSpPr>
-        <p:spPr>
-          <a:xfrm>
-            <a:off x="7909560" y="1417320"/>
-            <a:ext cx="3154680" cy="1828800"/>
+          <p:cNvPr id="10" name="Shape 8"/>
+          <p:cNvSpPr/>
+          <p:nvPr/>
+        </p:nvSpPr>
+        <p:spPr>
+          <a:xfrm>
+            <a:off x="7635240" y="1325880"/>
+            <a:ext cx="3474720" cy="1325880"/>
           </a:xfrm>
           <a:prstGeom prst="roundRect">
             <a:avLst>
-              <a:gd name="adj" fmla="val 6000"/>
+              <a:gd name="adj" fmla="val 8276"/>
             </a:avLst>
           </a:prstGeom>
           <a:solidFill>
@@ -7582,14 +8444,14 @@
       </p:sp>
       <p:sp>
         <p:nvSpPr>
-          <p:cNvPr id="13" name="Text 11"/>
-          <p:cNvSpPr/>
-          <p:nvPr/>
-        </p:nvSpPr>
-        <p:spPr>
-          <a:xfrm>
-            <a:off x="8074152" y="1563624"/>
-            <a:ext cx="2825496" cy="256032"/>
+          <p:cNvPr id="11" name="Text 9"/>
+          <p:cNvSpPr/>
+          <p:nvPr/>
+        </p:nvSpPr>
+        <p:spPr>
+          <a:xfrm>
+            <a:off x="7799832" y="1472184"/>
+            <a:ext cx="3145536" cy="256032"/>
           </a:xfrm>
           <a:prstGeom prst="rect">
             <a:avLst/>
@@ -7613,7 +8475,7 @@
                 <a:ea typeface="Aptos" pitchFamily="34" charset="-122"/>
                 <a:cs typeface="Aptos" pitchFamily="34" charset="-120"/>
               </a:rPr>
-              <a:t>Key idea</a:t>
+              <a:t>Practice focus</a:t>
             </a:r>
             <a:endParaRPr lang="en-US" sz="1300" dirty="0"/>
           </a:p>
@@ -7621,14 +8483,14 @@
       </p:sp>
       <p:sp>
         <p:nvSpPr>
-          <p:cNvPr id="14" name="Text 12"/>
-          <p:cNvSpPr/>
-          <p:nvPr/>
-        </p:nvSpPr>
-        <p:spPr>
-          <a:xfrm>
-            <a:off x="8074152" y="1920240"/>
-            <a:ext cx="2825496" cy="1188720"/>
+          <p:cNvPr id="12" name="Text 10"/>
+          <p:cNvSpPr/>
+          <p:nvPr/>
+        </p:nvSpPr>
+        <p:spPr>
+          <a:xfrm>
+            <a:off x="7799832" y="1828800"/>
+            <a:ext cx="3145536" cy="685800"/>
           </a:xfrm>
           <a:prstGeom prst="rect">
             <a:avLst/>
@@ -7662,18 +8524,159 @@
       </p:sp>
       <p:sp>
         <p:nvSpPr>
-          <p:cNvPr id="15" name="Shape 13"/>
-          <p:cNvSpPr/>
-          <p:nvPr/>
-        </p:nvSpPr>
-        <p:spPr>
-          <a:xfrm>
-            <a:off x="7909560" y="3520440"/>
-            <a:ext cx="3154680" cy="1737360"/>
+          <p:cNvPr id="13" name="Shape 11"/>
+          <p:cNvSpPr/>
+          <p:nvPr/>
+        </p:nvSpPr>
+        <p:spPr>
+          <a:xfrm>
+            <a:off x="7635240" y="2788920"/>
+            <a:ext cx="3474720" cy="1536192"/>
           </a:xfrm>
           <a:prstGeom prst="roundRect">
             <a:avLst>
-              <a:gd name="adj" fmla="val 6316"/>
+              <a:gd name="adj" fmla="val 7143"/>
+            </a:avLst>
+          </a:prstGeom>
+          <a:solidFill>
+            <a:srgbClr val="FFFFFF">
+              <a:alpha val="88000"/>
+            </a:srgbClr>
+          </a:solidFill>
+          <a:ln w="12700">
+            <a:solidFill>
+              <a:srgbClr val="D6E8F2"/>
+            </a:solidFill>
+            <a:prstDash val="solid"/>
+          </a:ln>
+        </p:spPr>
+      </p:sp>
+      <p:sp>
+        <p:nvSpPr>
+          <p:cNvPr id="14" name="Shape 12"/>
+          <p:cNvSpPr/>
+          <p:nvPr/>
+        </p:nvSpPr>
+        <p:spPr>
+          <a:xfrm>
+            <a:off x="8074152" y="3291840"/>
+            <a:ext cx="2596896" cy="749808"/>
+          </a:xfrm>
+          <a:prstGeom prst="rect">
+            <a:avLst/>
+          </a:prstGeom>
+          <a:solidFill>
+            <a:srgbClr val="EAF6F8"/>
+          </a:solidFill>
+          <a:ln w="12700">
+            <a:solidFill>
+              <a:srgbClr val="8ABBD8"/>
+            </a:solidFill>
+            <a:prstDash val="solid"/>
+          </a:ln>
+        </p:spPr>
+      </p:sp>
+      <p:sp>
+        <p:nvSpPr>
+          <p:cNvPr id="15" name="Shape 13"/>
+          <p:cNvSpPr/>
+          <p:nvPr/>
+        </p:nvSpPr>
+        <p:spPr>
+          <a:xfrm>
+            <a:off x="8202168" y="3721608"/>
+            <a:ext cx="2340864" cy="0"/>
+          </a:xfrm>
+          <a:prstGeom prst="line">
+            <a:avLst/>
+          </a:prstGeom>
+          <a:noFill/>
+          <a:ln w="19050">
+            <a:solidFill>
+              <a:srgbClr val="0068B7"/>
+            </a:solidFill>
+            <a:prstDash val="solid"/>
+          </a:ln>
+        </p:spPr>
+      </p:sp>
+      <p:sp>
+        <p:nvSpPr>
+          <p:cNvPr id="16" name="Shape 14"/>
+          <p:cNvSpPr/>
+          <p:nvPr/>
+        </p:nvSpPr>
+        <p:spPr>
+          <a:xfrm>
+            <a:off x="9198864" y="4206240"/>
+            <a:ext cx="347472" cy="347472"/>
+          </a:xfrm>
+          <a:prstGeom prst="ellipse">
+            <a:avLst/>
+          </a:prstGeom>
+          <a:solidFill>
+            <a:srgbClr val="2F8A28"/>
+          </a:solidFill>
+          <a:ln w="12700">
+            <a:solidFill>
+              <a:srgbClr val="2F8A28"/>
+            </a:solidFill>
+            <a:prstDash val="solid"/>
+          </a:ln>
+        </p:spPr>
+      </p:sp>
+      <p:sp>
+        <p:nvSpPr>
+          <p:cNvPr id="17" name="Text 15"/>
+          <p:cNvSpPr/>
+          <p:nvPr/>
+        </p:nvSpPr>
+        <p:spPr>
+          <a:xfrm>
+            <a:off x="7909560" y="3977640"/>
+            <a:ext cx="2926080" cy="182880"/>
+          </a:xfrm>
+          <a:prstGeom prst="rect">
+            <a:avLst/>
+          </a:prstGeom>
+          <a:noFill/>
+          <a:ln/>
+        </p:spPr>
+        <p:txBody>
+          <a:bodyPr wrap="square" lIns="0" tIns="0" rIns="0" bIns="0" rtlCol="0" anchor="ctr"/>
+          <a:lstStyle/>
+          <a:p>
+            <a:pPr algn="ctr" indent="0" marL="0">
+              <a:buNone/>
+            </a:pPr>
+            <a:r>
+              <a:rPr lang="en-US" sz="1000" dirty="0">
+                <a:solidFill>
+                  <a:srgbClr val="003A63"/>
+                </a:solidFill>
+                <a:latin typeface="Aptos" pitchFamily="34" charset="0"/>
+                <a:ea typeface="Aptos" pitchFamily="34" charset="-122"/>
+                <a:cs typeface="Aptos" pitchFamily="34" charset="-120"/>
+              </a:rPr>
+              <a:t>Concept to action</a:t>
+            </a:r>
+            <a:endParaRPr lang="en-US" sz="1000" dirty="0"/>
+          </a:p>
+        </p:txBody>
+      </p:sp>
+      <p:sp>
+        <p:nvSpPr>
+          <p:cNvPr id="18" name="Shape 16"/>
+          <p:cNvSpPr/>
+          <p:nvPr/>
+        </p:nvSpPr>
+        <p:spPr>
+          <a:xfrm>
+            <a:off x="7635240" y="4498848"/>
+            <a:ext cx="3474720" cy="1143000"/>
+          </a:xfrm>
+          <a:prstGeom prst="roundRect">
+            <a:avLst>
+              <a:gd name="adj" fmla="val 9600"/>
             </a:avLst>
           </a:prstGeom>
           <a:solidFill>
@@ -7689,14 +8692,14 @@
       </p:sp>
       <p:sp>
         <p:nvSpPr>
-          <p:cNvPr id="16" name="Text 14"/>
-          <p:cNvSpPr/>
-          <p:nvPr/>
-        </p:nvSpPr>
-        <p:spPr>
-          <a:xfrm>
-            <a:off x="8074152" y="3666744"/>
-            <a:ext cx="2825496" cy="256032"/>
+          <p:cNvPr id="19" name="Text 17"/>
+          <p:cNvSpPr/>
+          <p:nvPr/>
+        </p:nvSpPr>
+        <p:spPr>
+          <a:xfrm>
+            <a:off x="7799832" y="4645152"/>
+            <a:ext cx="3145536" cy="256032"/>
           </a:xfrm>
           <a:prstGeom prst="rect">
             <a:avLst/>
@@ -7720,7 +8723,7 @@
                 <a:ea typeface="Aptos" pitchFamily="34" charset="-122"/>
                 <a:cs typeface="Aptos" pitchFamily="34" charset="-120"/>
               </a:rPr>
-              <a:t>Use this for</a:t>
+              <a:t>What to produce</a:t>
             </a:r>
             <a:endParaRPr lang="en-US" sz="1300" dirty="0"/>
           </a:p>
@@ -7728,14 +8731,14 @@
       </p:sp>
       <p:sp>
         <p:nvSpPr>
-          <p:cNvPr id="17" name="Text 15"/>
-          <p:cNvSpPr/>
-          <p:nvPr/>
-        </p:nvSpPr>
-        <p:spPr>
-          <a:xfrm>
-            <a:off x="8074152" y="4023360"/>
-            <a:ext cx="2825496" cy="1097280"/>
+          <p:cNvPr id="20" name="Text 18"/>
+          <p:cNvSpPr/>
+          <p:nvPr/>
+        </p:nvSpPr>
+        <p:spPr>
+          <a:xfrm>
+            <a:off x="7799832" y="5001768"/>
+            <a:ext cx="3145536" cy="502920"/>
           </a:xfrm>
           <a:prstGeom prst="rect">
             <a:avLst/>
@@ -7761,7 +8764,7 @@
                 <a:ea typeface="Aptos" pitchFamily="34" charset="-122"/>
                 <a:cs typeface="Aptos" pitchFamily="34" charset="-120"/>
               </a:rPr>
-              <a:t>Connect the concept to public health decisions, safeguards, documentation, or implementation work.</a:t>
+              <a:t>Use the assignment to test whether you can explain the concept, apply it to a realistic public health situation, and identify what would need review before the work moves forward.</a:t>
             </a:r>
             <a:endParaRPr lang="en-US" sz="1550" dirty="0"/>
           </a:p>
@@ -7935,8 +8938,8 @@
         </p:nvSpPr>
         <p:spPr>
           <a:xfrm>
-            <a:off x="9966960" y="6537960"/>
-            <a:ext cx="1645920" cy="201168"/>
+            <a:off x="9646920" y="6537960"/>
+            <a:ext cx="1965960" cy="201168"/>
           </a:xfrm>
           <a:prstGeom prst="rect">
             <a:avLst/>
@@ -7960,7 +8963,7 @@
                 <a:ea typeface="Aptos" pitchFamily="34" charset="-122"/>
                 <a:cs typeface="Aptos" pitchFamily="34" charset="-120"/>
               </a:rPr>
-              <a:t>Â© Paula Soper</a:t>
+              <a:t>Copyright Paula Soper</a:t>
             </a:r>
             <a:endParaRPr lang="en-US" sz="800" dirty="0"/>
           </a:p>
@@ -8007,77 +9010,13 @@
       </p:sp>
       <p:sp>
         <p:nvSpPr>
-          <p:cNvPr id="8" name="Shape 6"/>
+          <p:cNvPr id="8" name="Text 6"/>
           <p:cNvSpPr/>
           <p:nvPr/>
         </p:nvSpPr>
         <p:spPr>
           <a:xfrm>
             <a:off x="640080" y="658368"/>
-            <a:ext cx="420624" cy="420624"/>
-          </a:xfrm>
-          <a:prstGeom prst="ellipse">
-            <a:avLst/>
-          </a:prstGeom>
-          <a:solidFill>
-            <a:srgbClr val="0068B7"/>
-          </a:solidFill>
-          <a:ln w="12700">
-            <a:solidFill>
-              <a:srgbClr val="0068B7"/>
-            </a:solidFill>
-            <a:prstDash val="solid"/>
-          </a:ln>
-        </p:spPr>
-      </p:sp>
-      <p:sp>
-        <p:nvSpPr>
-          <p:cNvPr id="9" name="Text 7"/>
-          <p:cNvSpPr/>
-          <p:nvPr/>
-        </p:nvSpPr>
-        <p:spPr>
-          <a:xfrm>
-            <a:off x="640080" y="731520"/>
-            <a:ext cx="420624" cy="164592"/>
-          </a:xfrm>
-          <a:prstGeom prst="rect">
-            <a:avLst/>
-          </a:prstGeom>
-          <a:noFill/>
-          <a:ln/>
-        </p:spPr>
-        <p:txBody>
-          <a:bodyPr wrap="square" lIns="0" tIns="0" rIns="0" bIns="0" rtlCol="0" anchor="ctr"/>
-          <a:lstStyle/>
-          <a:p>
-            <a:pPr algn="ctr" indent="0" marL="0">
-              <a:buNone/>
-            </a:pPr>
-            <a:r>
-              <a:rPr lang="en-US" sz="1100" b="1" dirty="0">
-                <a:solidFill>
-                  <a:srgbClr val="FFFFFF"/>
-                </a:solidFill>
-                <a:latin typeface="Aptos" pitchFamily="34" charset="0"/>
-                <a:ea typeface="Aptos" pitchFamily="34" charset="-122"/>
-                <a:cs typeface="Aptos" pitchFamily="34" charset="-120"/>
-              </a:rPr>
-              <a:t>9</a:t>
-            </a:r>
-            <a:endParaRPr lang="en-US" sz="1100" dirty="0"/>
-          </a:p>
-        </p:txBody>
-      </p:sp>
-      <p:sp>
-        <p:nvSpPr>
-          <p:cNvPr id="10" name="Text 8"/>
-          <p:cNvSpPr/>
-          <p:nvPr/>
-        </p:nvSpPr>
-        <p:spPr>
-          <a:xfrm>
-            <a:off x="640080" y="621792"/>
             <a:ext cx="10881360" cy="713232"/>
           </a:xfrm>
           <a:prstGeom prst="rect">
@@ -8112,14 +9051,14 @@
       </p:sp>
       <p:sp>
         <p:nvSpPr>
-          <p:cNvPr id="11" name="Text 9"/>
+          <p:cNvPr id="9" name="Text 7"/>
           <p:cNvSpPr/>
           <p:nvPr/>
         </p:nvSpPr>
         <p:spPr>
           <a:xfrm>
             <a:off x="868680" y="1508760"/>
-            <a:ext cx="6537960" cy="4160520"/>
+            <a:ext cx="6309360" cy="4160520"/>
           </a:xfrm>
           <a:prstGeom prst="rect">
             <a:avLst/>
@@ -8178,18 +9117,18 @@
       </p:sp>
       <p:sp>
         <p:nvSpPr>
-          <p:cNvPr id="12" name="Shape 10"/>
-          <p:cNvSpPr/>
-          <p:nvPr/>
-        </p:nvSpPr>
-        <p:spPr>
-          <a:xfrm>
-            <a:off x="7909560" y="1417320"/>
-            <a:ext cx="3154680" cy="1828800"/>
+          <p:cNvPr id="10" name="Shape 8"/>
+          <p:cNvSpPr/>
+          <p:nvPr/>
+        </p:nvSpPr>
+        <p:spPr>
+          <a:xfrm>
+            <a:off x="7635240" y="1325880"/>
+            <a:ext cx="3474720" cy="1325880"/>
           </a:xfrm>
           <a:prstGeom prst="roundRect">
             <a:avLst>
-              <a:gd name="adj" fmla="val 6000"/>
+              <a:gd name="adj" fmla="val 8276"/>
             </a:avLst>
           </a:prstGeom>
           <a:solidFill>
@@ -8205,14 +9144,14 @@
       </p:sp>
       <p:sp>
         <p:nvSpPr>
-          <p:cNvPr id="13" name="Text 11"/>
-          <p:cNvSpPr/>
-          <p:nvPr/>
-        </p:nvSpPr>
-        <p:spPr>
-          <a:xfrm>
-            <a:off x="8074152" y="1563624"/>
-            <a:ext cx="2825496" cy="256032"/>
+          <p:cNvPr id="11" name="Text 9"/>
+          <p:cNvSpPr/>
+          <p:nvPr/>
+        </p:nvSpPr>
+        <p:spPr>
+          <a:xfrm>
+            <a:off x="7799832" y="1472184"/>
+            <a:ext cx="3145536" cy="256032"/>
           </a:xfrm>
           <a:prstGeom prst="rect">
             <a:avLst/>
@@ -8236,7 +9175,7 @@
                 <a:ea typeface="Aptos" pitchFamily="34" charset="-122"/>
                 <a:cs typeface="Aptos" pitchFamily="34" charset="-120"/>
               </a:rPr>
-              <a:t>Key idea</a:t>
+              <a:t>Core concept</a:t>
             </a:r>
             <a:endParaRPr lang="en-US" sz="1300" dirty="0"/>
           </a:p>
@@ -8244,14 +9183,14 @@
       </p:sp>
       <p:sp>
         <p:nvSpPr>
-          <p:cNvPr id="14" name="Text 12"/>
-          <p:cNvSpPr/>
-          <p:nvPr/>
-        </p:nvSpPr>
-        <p:spPr>
-          <a:xfrm>
-            <a:off x="8074152" y="1920240"/>
-            <a:ext cx="2825496" cy="1188720"/>
+          <p:cNvPr id="12" name="Text 10"/>
+          <p:cNvSpPr/>
+          <p:nvPr/>
+        </p:nvSpPr>
+        <p:spPr>
+          <a:xfrm>
+            <a:off x="7799832" y="1828800"/>
+            <a:ext cx="3145536" cy="685800"/>
           </a:xfrm>
           <a:prstGeom prst="rect">
             <a:avLst/>
@@ -8285,18 +9224,159 @@
       </p:sp>
       <p:sp>
         <p:nvSpPr>
-          <p:cNvPr id="15" name="Shape 13"/>
-          <p:cNvSpPr/>
-          <p:nvPr/>
-        </p:nvSpPr>
-        <p:spPr>
-          <a:xfrm>
-            <a:off x="7909560" y="3520440"/>
-            <a:ext cx="3154680" cy="1737360"/>
+          <p:cNvPr id="13" name="Shape 11"/>
+          <p:cNvSpPr/>
+          <p:nvPr/>
+        </p:nvSpPr>
+        <p:spPr>
+          <a:xfrm>
+            <a:off x="7635240" y="2788920"/>
+            <a:ext cx="3474720" cy="1536192"/>
           </a:xfrm>
           <a:prstGeom prst="roundRect">
             <a:avLst>
-              <a:gd name="adj" fmla="val 6316"/>
+              <a:gd name="adj" fmla="val 7143"/>
+            </a:avLst>
+          </a:prstGeom>
+          <a:solidFill>
+            <a:srgbClr val="FFFFFF">
+              <a:alpha val="88000"/>
+            </a:srgbClr>
+          </a:solidFill>
+          <a:ln w="12700">
+            <a:solidFill>
+              <a:srgbClr val="D6E8F2"/>
+            </a:solidFill>
+            <a:prstDash val="solid"/>
+          </a:ln>
+        </p:spPr>
+      </p:sp>
+      <p:sp>
+        <p:nvSpPr>
+          <p:cNvPr id="14" name="Shape 12"/>
+          <p:cNvSpPr/>
+          <p:nvPr/>
+        </p:nvSpPr>
+        <p:spPr>
+          <a:xfrm>
+            <a:off x="8074152" y="3291840"/>
+            <a:ext cx="2596896" cy="749808"/>
+          </a:xfrm>
+          <a:prstGeom prst="rect">
+            <a:avLst/>
+          </a:prstGeom>
+          <a:solidFill>
+            <a:srgbClr val="EAF6F8"/>
+          </a:solidFill>
+          <a:ln w="12700">
+            <a:solidFill>
+              <a:srgbClr val="8ABBD8"/>
+            </a:solidFill>
+            <a:prstDash val="solid"/>
+          </a:ln>
+        </p:spPr>
+      </p:sp>
+      <p:sp>
+        <p:nvSpPr>
+          <p:cNvPr id="15" name="Shape 13"/>
+          <p:cNvSpPr/>
+          <p:nvPr/>
+        </p:nvSpPr>
+        <p:spPr>
+          <a:xfrm>
+            <a:off x="8202168" y="3721608"/>
+            <a:ext cx="2340864" cy="0"/>
+          </a:xfrm>
+          <a:prstGeom prst="line">
+            <a:avLst/>
+          </a:prstGeom>
+          <a:noFill/>
+          <a:ln w="19050">
+            <a:solidFill>
+              <a:srgbClr val="0068B7"/>
+            </a:solidFill>
+            <a:prstDash val="solid"/>
+          </a:ln>
+        </p:spPr>
+      </p:sp>
+      <p:sp>
+        <p:nvSpPr>
+          <p:cNvPr id="16" name="Shape 14"/>
+          <p:cNvSpPr/>
+          <p:nvPr/>
+        </p:nvSpPr>
+        <p:spPr>
+          <a:xfrm>
+            <a:off x="9198864" y="4206240"/>
+            <a:ext cx="347472" cy="347472"/>
+          </a:xfrm>
+          <a:prstGeom prst="ellipse">
+            <a:avLst/>
+          </a:prstGeom>
+          <a:solidFill>
+            <a:srgbClr val="2F8A28"/>
+          </a:solidFill>
+          <a:ln w="12700">
+            <a:solidFill>
+              <a:srgbClr val="2F8A28"/>
+            </a:solidFill>
+            <a:prstDash val="solid"/>
+          </a:ln>
+        </p:spPr>
+      </p:sp>
+      <p:sp>
+        <p:nvSpPr>
+          <p:cNvPr id="17" name="Text 15"/>
+          <p:cNvSpPr/>
+          <p:nvPr/>
+        </p:nvSpPr>
+        <p:spPr>
+          <a:xfrm>
+            <a:off x="7909560" y="3977640"/>
+            <a:ext cx="2926080" cy="182880"/>
+          </a:xfrm>
+          <a:prstGeom prst="rect">
+            <a:avLst/>
+          </a:prstGeom>
+          <a:noFill/>
+          <a:ln/>
+        </p:spPr>
+        <p:txBody>
+          <a:bodyPr wrap="square" lIns="0" tIns="0" rIns="0" bIns="0" rtlCol="0" anchor="ctr"/>
+          <a:lstStyle/>
+          <a:p>
+            <a:pPr algn="ctr" indent="0" marL="0">
+              <a:buNone/>
+            </a:pPr>
+            <a:r>
+              <a:rPr lang="en-US" sz="1000" dirty="0">
+                <a:solidFill>
+                  <a:srgbClr val="003A63"/>
+                </a:solidFill>
+                <a:latin typeface="Aptos" pitchFamily="34" charset="0"/>
+                <a:ea typeface="Aptos" pitchFamily="34" charset="-122"/>
+                <a:cs typeface="Aptos" pitchFamily="34" charset="-120"/>
+              </a:rPr>
+              <a:t>Concept to action</a:t>
+            </a:r>
+            <a:endParaRPr lang="en-US" sz="1000" dirty="0"/>
+          </a:p>
+        </p:txBody>
+      </p:sp>
+      <p:sp>
+        <p:nvSpPr>
+          <p:cNvPr id="18" name="Shape 16"/>
+          <p:cNvSpPr/>
+          <p:nvPr/>
+        </p:nvSpPr>
+        <p:spPr>
+          <a:xfrm>
+            <a:off x="7635240" y="4498848"/>
+            <a:ext cx="3474720" cy="1143000"/>
+          </a:xfrm>
+          <a:prstGeom prst="roundRect">
+            <a:avLst>
+              <a:gd name="adj" fmla="val 9600"/>
             </a:avLst>
           </a:prstGeom>
           <a:solidFill>
@@ -8312,14 +9392,14 @@
       </p:sp>
       <p:sp>
         <p:nvSpPr>
-          <p:cNvPr id="16" name="Text 14"/>
-          <p:cNvSpPr/>
-          <p:nvPr/>
-        </p:nvSpPr>
-        <p:spPr>
-          <a:xfrm>
-            <a:off x="8074152" y="3666744"/>
-            <a:ext cx="2825496" cy="256032"/>
+          <p:cNvPr id="19" name="Text 17"/>
+          <p:cNvSpPr/>
+          <p:nvPr/>
+        </p:nvSpPr>
+        <p:spPr>
+          <a:xfrm>
+            <a:off x="7799832" y="4645152"/>
+            <a:ext cx="3145536" cy="256032"/>
           </a:xfrm>
           <a:prstGeom prst="rect">
             <a:avLst/>
@@ -8343,7 +9423,7 @@
                 <a:ea typeface="Aptos" pitchFamily="34" charset="-122"/>
                 <a:cs typeface="Aptos" pitchFamily="34" charset="-120"/>
               </a:rPr>
-              <a:t>Use this for</a:t>
+              <a:t>Apply it</a:t>
             </a:r>
             <a:endParaRPr lang="en-US" sz="1300" dirty="0"/>
           </a:p>
@@ -8351,14 +9431,14 @@
       </p:sp>
       <p:sp>
         <p:nvSpPr>
-          <p:cNvPr id="17" name="Text 15"/>
-          <p:cNvSpPr/>
-          <p:nvPr/>
-        </p:nvSpPr>
-        <p:spPr>
-          <a:xfrm>
-            <a:off x="8074152" y="4023360"/>
-            <a:ext cx="2825496" cy="1097280"/>
+          <p:cNvPr id="20" name="Text 18"/>
+          <p:cNvSpPr/>
+          <p:nvPr/>
+        </p:nvSpPr>
+        <p:spPr>
+          <a:xfrm>
+            <a:off x="7799832" y="5001768"/>
+            <a:ext cx="3145536" cy="502920"/>
           </a:xfrm>
           <a:prstGeom prst="rect">
             <a:avLst/>
@@ -8384,7 +9464,7 @@
                 <a:ea typeface="Aptos" pitchFamily="34" charset="-122"/>
                 <a:cs typeface="Aptos" pitchFamily="34" charset="-120"/>
               </a:rPr>
-              <a:t>Connect the concept to public health decisions, safeguards, documentation, or implementation work.</a:t>
+              <a:t>Connect the concept to public health purpose, responsible use, required safeguards, documentation, and the next action a department should take.</a:t>
             </a:r>
             <a:endParaRPr lang="en-US" sz="1550" dirty="0"/>
           </a:p>
@@ -8558,8 +9638,8 @@
         </p:nvSpPr>
         <p:spPr>
           <a:xfrm>
-            <a:off x="9966960" y="6537960"/>
-            <a:ext cx="1645920" cy="201168"/>
+            <a:off x="9646920" y="6537960"/>
+            <a:ext cx="1965960" cy="201168"/>
           </a:xfrm>
           <a:prstGeom prst="rect">
             <a:avLst/>
@@ -8583,7 +9663,7 @@
                 <a:ea typeface="Aptos" pitchFamily="34" charset="-122"/>
                 <a:cs typeface="Aptos" pitchFamily="34" charset="-120"/>
               </a:rPr>
-              <a:t>Â© Paula Soper</a:t>
+              <a:t>Copyright Paula Soper</a:t>
             </a:r>
             <a:endParaRPr lang="en-US" sz="800" dirty="0"/>
           </a:p>
@@ -8678,7 +9758,7 @@
         <p:spPr>
           <a:xfrm>
             <a:off x="868680" y="1508760"/>
-            <a:ext cx="6537960" cy="4160520"/>
+            <a:ext cx="6309360" cy="4160520"/>
           </a:xfrm>
           <a:prstGeom prst="rect">
             <a:avLst/>
@@ -8729,12 +9809,12 @@
         </p:nvSpPr>
         <p:spPr>
           <a:xfrm>
-            <a:off x="7909560" y="1417320"/>
-            <a:ext cx="3154680" cy="1828800"/>
+            <a:off x="7635240" y="1325880"/>
+            <a:ext cx="3474720" cy="1325880"/>
           </a:xfrm>
           <a:prstGeom prst="roundRect">
             <a:avLst>
-              <a:gd name="adj" fmla="val 6000"/>
+              <a:gd name="adj" fmla="val 8276"/>
             </a:avLst>
           </a:prstGeom>
           <a:solidFill>
@@ -8756,8 +9836,8 @@
         </p:nvSpPr>
         <p:spPr>
           <a:xfrm>
-            <a:off x="8074152" y="1563624"/>
-            <a:ext cx="2825496" cy="256032"/>
+            <a:off x="7799832" y="1472184"/>
+            <a:ext cx="3145536" cy="256032"/>
           </a:xfrm>
           <a:prstGeom prst="rect">
             <a:avLst/>
@@ -8781,7 +9861,7 @@
                 <a:ea typeface="Aptos" pitchFamily="34" charset="-122"/>
                 <a:cs typeface="Aptos" pitchFamily="34" charset="-120"/>
               </a:rPr>
-              <a:t>Key idea</a:t>
+              <a:t>Core concept</a:t>
             </a:r>
             <a:endParaRPr lang="en-US" sz="1300" dirty="0"/>
           </a:p>
@@ -8795,8 +9875,8 @@
         </p:nvSpPr>
         <p:spPr>
           <a:xfrm>
-            <a:off x="8074152" y="1920240"/>
-            <a:ext cx="2825496" cy="1188720"/>
+            <a:off x="7799832" y="1828800"/>
+            <a:ext cx="3145536" cy="685800"/>
           </a:xfrm>
           <a:prstGeom prst="rect">
             <a:avLst/>
@@ -8836,12 +9916,153 @@
         </p:nvSpPr>
         <p:spPr>
           <a:xfrm>
-            <a:off x="7909560" y="3520440"/>
-            <a:ext cx="3154680" cy="1737360"/>
+            <a:off x="7635240" y="2788920"/>
+            <a:ext cx="3474720" cy="1536192"/>
           </a:xfrm>
           <a:prstGeom prst="roundRect">
             <a:avLst>
-              <a:gd name="adj" fmla="val 6316"/>
+              <a:gd name="adj" fmla="val 7143"/>
+            </a:avLst>
+          </a:prstGeom>
+          <a:solidFill>
+            <a:srgbClr val="FFFFFF">
+              <a:alpha val="88000"/>
+            </a:srgbClr>
+          </a:solidFill>
+          <a:ln w="12700">
+            <a:solidFill>
+              <a:srgbClr val="D6E8F2"/>
+            </a:solidFill>
+            <a:prstDash val="solid"/>
+          </a:ln>
+        </p:spPr>
+      </p:sp>
+      <p:sp>
+        <p:nvSpPr>
+          <p:cNvPr id="14" name="Shape 12"/>
+          <p:cNvSpPr/>
+          <p:nvPr/>
+        </p:nvSpPr>
+        <p:spPr>
+          <a:xfrm>
+            <a:off x="8074152" y="3291840"/>
+            <a:ext cx="2596896" cy="749808"/>
+          </a:xfrm>
+          <a:prstGeom prst="rect">
+            <a:avLst/>
+          </a:prstGeom>
+          <a:solidFill>
+            <a:srgbClr val="EAF6F8"/>
+          </a:solidFill>
+          <a:ln w="12700">
+            <a:solidFill>
+              <a:srgbClr val="8ABBD8"/>
+            </a:solidFill>
+            <a:prstDash val="solid"/>
+          </a:ln>
+        </p:spPr>
+      </p:sp>
+      <p:sp>
+        <p:nvSpPr>
+          <p:cNvPr id="15" name="Shape 13"/>
+          <p:cNvSpPr/>
+          <p:nvPr/>
+        </p:nvSpPr>
+        <p:spPr>
+          <a:xfrm>
+            <a:off x="8202168" y="3721608"/>
+            <a:ext cx="2340864" cy="0"/>
+          </a:xfrm>
+          <a:prstGeom prst="line">
+            <a:avLst/>
+          </a:prstGeom>
+          <a:noFill/>
+          <a:ln w="19050">
+            <a:solidFill>
+              <a:srgbClr val="0068B7"/>
+            </a:solidFill>
+            <a:prstDash val="solid"/>
+          </a:ln>
+        </p:spPr>
+      </p:sp>
+      <p:sp>
+        <p:nvSpPr>
+          <p:cNvPr id="16" name="Shape 14"/>
+          <p:cNvSpPr/>
+          <p:nvPr/>
+        </p:nvSpPr>
+        <p:spPr>
+          <a:xfrm>
+            <a:off x="9198864" y="4206240"/>
+            <a:ext cx="347472" cy="347472"/>
+          </a:xfrm>
+          <a:prstGeom prst="ellipse">
+            <a:avLst/>
+          </a:prstGeom>
+          <a:solidFill>
+            <a:srgbClr val="2F8A28"/>
+          </a:solidFill>
+          <a:ln w="12700">
+            <a:solidFill>
+              <a:srgbClr val="2F8A28"/>
+            </a:solidFill>
+            <a:prstDash val="solid"/>
+          </a:ln>
+        </p:spPr>
+      </p:sp>
+      <p:sp>
+        <p:nvSpPr>
+          <p:cNvPr id="17" name="Text 15"/>
+          <p:cNvSpPr/>
+          <p:nvPr/>
+        </p:nvSpPr>
+        <p:spPr>
+          <a:xfrm>
+            <a:off x="7909560" y="3977640"/>
+            <a:ext cx="2926080" cy="182880"/>
+          </a:xfrm>
+          <a:prstGeom prst="rect">
+            <a:avLst/>
+          </a:prstGeom>
+          <a:noFill/>
+          <a:ln/>
+        </p:spPr>
+        <p:txBody>
+          <a:bodyPr wrap="square" lIns="0" tIns="0" rIns="0" bIns="0" rtlCol="0" anchor="ctr"/>
+          <a:lstStyle/>
+          <a:p>
+            <a:pPr algn="ctr" indent="0" marL="0">
+              <a:buNone/>
+            </a:pPr>
+            <a:r>
+              <a:rPr lang="en-US" sz="1000" dirty="0">
+                <a:solidFill>
+                  <a:srgbClr val="003A63"/>
+                </a:solidFill>
+                <a:latin typeface="Aptos" pitchFamily="34" charset="0"/>
+                <a:ea typeface="Aptos" pitchFamily="34" charset="-122"/>
+                <a:cs typeface="Aptos" pitchFamily="34" charset="-120"/>
+              </a:rPr>
+              <a:t>Concept to action</a:t>
+            </a:r>
+            <a:endParaRPr lang="en-US" sz="1000" dirty="0"/>
+          </a:p>
+        </p:txBody>
+      </p:sp>
+      <p:sp>
+        <p:nvSpPr>
+          <p:cNvPr id="18" name="Shape 16"/>
+          <p:cNvSpPr/>
+          <p:nvPr/>
+        </p:nvSpPr>
+        <p:spPr>
+          <a:xfrm>
+            <a:off x="7635240" y="4498848"/>
+            <a:ext cx="3474720" cy="1143000"/>
+          </a:xfrm>
+          <a:prstGeom prst="roundRect">
+            <a:avLst>
+              <a:gd name="adj" fmla="val 9600"/>
             </a:avLst>
           </a:prstGeom>
           <a:solidFill>
@@ -8857,14 +10078,14 @@
       </p:sp>
       <p:sp>
         <p:nvSpPr>
-          <p:cNvPr id="14" name="Text 12"/>
-          <p:cNvSpPr/>
-          <p:nvPr/>
-        </p:nvSpPr>
-        <p:spPr>
-          <a:xfrm>
-            <a:off x="8074152" y="3666744"/>
-            <a:ext cx="2825496" cy="256032"/>
+          <p:cNvPr id="19" name="Text 17"/>
+          <p:cNvSpPr/>
+          <p:nvPr/>
+        </p:nvSpPr>
+        <p:spPr>
+          <a:xfrm>
+            <a:off x="7799832" y="4645152"/>
+            <a:ext cx="3145536" cy="256032"/>
           </a:xfrm>
           <a:prstGeom prst="rect">
             <a:avLst/>
@@ -8888,7 +10109,7 @@
                 <a:ea typeface="Aptos" pitchFamily="34" charset="-122"/>
                 <a:cs typeface="Aptos" pitchFamily="34" charset="-120"/>
               </a:rPr>
-              <a:t>Use this for</a:t>
+              <a:t>Apply it</a:t>
             </a:r>
             <a:endParaRPr lang="en-US" sz="1300" dirty="0"/>
           </a:p>
@@ -8896,14 +10117,14 @@
       </p:sp>
       <p:sp>
         <p:nvSpPr>
-          <p:cNvPr id="15" name="Text 13"/>
-          <p:cNvSpPr/>
-          <p:nvPr/>
-        </p:nvSpPr>
-        <p:spPr>
-          <a:xfrm>
-            <a:off x="8074152" y="4023360"/>
-            <a:ext cx="2825496" cy="1097280"/>
+          <p:cNvPr id="20" name="Text 18"/>
+          <p:cNvSpPr/>
+          <p:nvPr/>
+        </p:nvSpPr>
+        <p:spPr>
+          <a:xfrm>
+            <a:off x="7799832" y="5001768"/>
+            <a:ext cx="3145536" cy="502920"/>
           </a:xfrm>
           <a:prstGeom prst="rect">
             <a:avLst/>
@@ -8929,7 +10150,7 @@
                 <a:ea typeface="Aptos" pitchFamily="34" charset="-122"/>
                 <a:cs typeface="Aptos" pitchFamily="34" charset="-120"/>
               </a:rPr>
-              <a:t>Connect the concept to public health decisions, safeguards, documentation, or implementation work.</a:t>
+              <a:t>Connect the concept to public health purpose, responsible use, required safeguards, documentation, and the next action a department should take.</a:t>
             </a:r>
             <a:endParaRPr lang="en-US" sz="1550" dirty="0"/>
           </a:p>
@@ -9103,8 +10324,8 @@
         </p:nvSpPr>
         <p:spPr>
           <a:xfrm>
-            <a:off x="9966960" y="6537960"/>
-            <a:ext cx="1645920" cy="201168"/>
+            <a:off x="9646920" y="6537960"/>
+            <a:ext cx="1965960" cy="201168"/>
           </a:xfrm>
           <a:prstGeom prst="rect">
             <a:avLst/>
@@ -9128,7 +10349,7 @@
                 <a:ea typeface="Aptos" pitchFamily="34" charset="-122"/>
                 <a:cs typeface="Aptos" pitchFamily="34" charset="-120"/>
               </a:rPr>
-              <a:t>Â© Paula Soper</a:t>
+              <a:t>Copyright Paula Soper</a:t>
             </a:r>
             <a:endParaRPr lang="en-US" sz="800" dirty="0"/>
           </a:p>
@@ -9491,46 +10712,7 @@
       </p:sp>
       <p:sp>
         <p:nvSpPr>
-          <p:cNvPr id="15" name="Text 13"/>
-          <p:cNvSpPr/>
-          <p:nvPr/>
-        </p:nvSpPr>
-        <p:spPr>
-          <a:xfrm>
-            <a:off x="8695944" y="3941064"/>
-            <a:ext cx="201168" cy="256032"/>
-          </a:xfrm>
-          <a:prstGeom prst="rect">
-            <a:avLst/>
-          </a:prstGeom>
-          <a:noFill/>
-          <a:ln/>
-        </p:spPr>
-        <p:txBody>
-          <a:bodyPr wrap="square" lIns="0" tIns="0" rIns="0" bIns="0" rtlCol="0" anchor="ctr"/>
-          <a:lstStyle/>
-          <a:p>
-            <a:pPr algn="ctr" indent="0" marL="0">
-              <a:buNone/>
-            </a:pPr>
-            <a:r>
-              <a:rPr lang="en-US" sz="1800" b="1" dirty="0">
-                <a:solidFill>
-                  <a:srgbClr val="0068B7"/>
-                </a:solidFill>
-                <a:latin typeface="Aptos" pitchFamily="34" charset="0"/>
-                <a:ea typeface="Aptos" pitchFamily="34" charset="-122"/>
-                <a:cs typeface="Aptos" pitchFamily="34" charset="-120"/>
-              </a:rPr>
-              <a:t>â†’</a:t>
-            </a:r>
-            <a:endParaRPr lang="en-US" sz="1800" dirty="0"/>
-          </a:p>
-        </p:txBody>
-      </p:sp>
-      <p:sp>
-        <p:nvSpPr>
-          <p:cNvPr id="16" name="Shape 14"/>
+          <p:cNvPr id="15" name="Shape 13"/>
           <p:cNvSpPr/>
           <p:nvPr/>
         </p:nvSpPr>
@@ -9557,7 +10739,7 @@
       </p:sp>
       <p:sp>
         <p:nvSpPr>
-          <p:cNvPr id="17" name="Text 15"/>
+          <p:cNvPr id="16" name="Text 14"/>
           <p:cNvSpPr/>
           <p:nvPr/>
         </p:nvSpPr>
@@ -9598,46 +10780,7 @@
       </p:sp>
       <p:sp>
         <p:nvSpPr>
-          <p:cNvPr id="18" name="Text 16"/>
-          <p:cNvSpPr/>
-          <p:nvPr/>
-        </p:nvSpPr>
-        <p:spPr>
-          <a:xfrm>
-            <a:off x="9985248" y="3941064"/>
-            <a:ext cx="201168" cy="256032"/>
-          </a:xfrm>
-          <a:prstGeom prst="rect">
-            <a:avLst/>
-          </a:prstGeom>
-          <a:noFill/>
-          <a:ln/>
-        </p:spPr>
-        <p:txBody>
-          <a:bodyPr wrap="square" lIns="0" tIns="0" rIns="0" bIns="0" rtlCol="0" anchor="ctr"/>
-          <a:lstStyle/>
-          <a:p>
-            <a:pPr algn="ctr" indent="0" marL="0">
-              <a:buNone/>
-            </a:pPr>
-            <a:r>
-              <a:rPr lang="en-US" sz="1800" b="1" dirty="0">
-                <a:solidFill>
-                  <a:srgbClr val="0068B7"/>
-                </a:solidFill>
-                <a:latin typeface="Aptos" pitchFamily="34" charset="0"/>
-                <a:ea typeface="Aptos" pitchFamily="34" charset="-122"/>
-                <a:cs typeface="Aptos" pitchFamily="34" charset="-120"/>
-              </a:rPr>
-              <a:t>â†’</a:t>
-            </a:r>
-            <a:endParaRPr lang="en-US" sz="1800" dirty="0"/>
-          </a:p>
-        </p:txBody>
-      </p:sp>
-      <p:sp>
-        <p:nvSpPr>
-          <p:cNvPr id="19" name="Shape 17"/>
+          <p:cNvPr id="17" name="Shape 15"/>
           <p:cNvSpPr/>
           <p:nvPr/>
         </p:nvSpPr>
@@ -9664,7 +10807,7 @@
       </p:sp>
       <p:sp>
         <p:nvSpPr>
-          <p:cNvPr id="20" name="Text 18"/>
+          <p:cNvPr id="18" name="Text 16"/>
           <p:cNvSpPr/>
           <p:nvPr/>
         </p:nvSpPr>
@@ -9871,8 +11014,8 @@
         </p:nvSpPr>
         <p:spPr>
           <a:xfrm>
-            <a:off x="9966960" y="6537960"/>
-            <a:ext cx="1645920" cy="201168"/>
+            <a:off x="9646920" y="6537960"/>
+            <a:ext cx="1965960" cy="201168"/>
           </a:xfrm>
           <a:prstGeom prst="rect">
             <a:avLst/>
@@ -9896,7 +11039,7 @@
                 <a:ea typeface="Aptos" pitchFamily="34" charset="-122"/>
                 <a:cs typeface="Aptos" pitchFamily="34" charset="-120"/>
               </a:rPr>
-              <a:t>Â© Paula Soper</a:t>
+              <a:t>Copyright Paula Soper</a:t>
             </a:r>
             <a:endParaRPr lang="en-US" sz="800" dirty="0"/>
           </a:p>
@@ -9943,77 +11086,13 @@
       </p:sp>
       <p:sp>
         <p:nvSpPr>
-          <p:cNvPr id="8" name="Shape 6"/>
+          <p:cNvPr id="8" name="Text 6"/>
           <p:cNvSpPr/>
           <p:nvPr/>
         </p:nvSpPr>
         <p:spPr>
           <a:xfrm>
             <a:off x="640080" y="658368"/>
-            <a:ext cx="420624" cy="420624"/>
-          </a:xfrm>
-          <a:prstGeom prst="ellipse">
-            <a:avLst/>
-          </a:prstGeom>
-          <a:solidFill>
-            <a:srgbClr val="0068B7"/>
-          </a:solidFill>
-          <a:ln w="12700">
-            <a:solidFill>
-              <a:srgbClr val="0068B7"/>
-            </a:solidFill>
-            <a:prstDash val="solid"/>
-          </a:ln>
-        </p:spPr>
-      </p:sp>
-      <p:sp>
-        <p:nvSpPr>
-          <p:cNvPr id="9" name="Text 7"/>
-          <p:cNvSpPr/>
-          <p:nvPr/>
-        </p:nvSpPr>
-        <p:spPr>
-          <a:xfrm>
-            <a:off x="640080" y="731520"/>
-            <a:ext cx="420624" cy="164592"/>
-          </a:xfrm>
-          <a:prstGeom prst="rect">
-            <a:avLst/>
-          </a:prstGeom>
-          <a:noFill/>
-          <a:ln/>
-        </p:spPr>
-        <p:txBody>
-          <a:bodyPr wrap="square" lIns="0" tIns="0" rIns="0" bIns="0" rtlCol="0" anchor="ctr"/>
-          <a:lstStyle/>
-          <a:p>
-            <a:pPr algn="ctr" indent="0" marL="0">
-              <a:buNone/>
-            </a:pPr>
-            <a:r>
-              <a:rPr lang="en-US" sz="1100" b="1" dirty="0">
-                <a:solidFill>
-                  <a:srgbClr val="FFFFFF"/>
-                </a:solidFill>
-                <a:latin typeface="Aptos" pitchFamily="34" charset="0"/>
-                <a:ea typeface="Aptos" pitchFamily="34" charset="-122"/>
-                <a:cs typeface="Aptos" pitchFamily="34" charset="-120"/>
-              </a:rPr>
-              <a:t>10</a:t>
-            </a:r>
-            <a:endParaRPr lang="en-US" sz="1100" dirty="0"/>
-          </a:p>
-        </p:txBody>
-      </p:sp>
-      <p:sp>
-        <p:nvSpPr>
-          <p:cNvPr id="10" name="Text 8"/>
-          <p:cNvSpPr/>
-          <p:nvPr/>
-        </p:nvSpPr>
-        <p:spPr>
-          <a:xfrm>
-            <a:off x="640080" y="621792"/>
             <a:ext cx="10881360" cy="713232"/>
           </a:xfrm>
           <a:prstGeom prst="rect">
@@ -10048,14 +11127,14 @@
       </p:sp>
       <p:sp>
         <p:nvSpPr>
-          <p:cNvPr id="11" name="Text 9"/>
+          <p:cNvPr id="9" name="Text 7"/>
           <p:cNvSpPr/>
           <p:nvPr/>
         </p:nvSpPr>
         <p:spPr>
           <a:xfrm>
             <a:off x="868680" y="1508760"/>
-            <a:ext cx="6537960" cy="4160520"/>
+            <a:ext cx="6309360" cy="4160520"/>
           </a:xfrm>
           <a:prstGeom prst="rect">
             <a:avLst/>
@@ -10114,18 +11193,18 @@
       </p:sp>
       <p:sp>
         <p:nvSpPr>
-          <p:cNvPr id="12" name="Shape 10"/>
-          <p:cNvSpPr/>
-          <p:nvPr/>
-        </p:nvSpPr>
-        <p:spPr>
-          <a:xfrm>
-            <a:off x="7909560" y="1417320"/>
-            <a:ext cx="3154680" cy="1828800"/>
+          <p:cNvPr id="10" name="Shape 8"/>
+          <p:cNvSpPr/>
+          <p:nvPr/>
+        </p:nvSpPr>
+        <p:spPr>
+          <a:xfrm>
+            <a:off x="7635240" y="1325880"/>
+            <a:ext cx="3474720" cy="1325880"/>
           </a:xfrm>
           <a:prstGeom prst="roundRect">
             <a:avLst>
-              <a:gd name="adj" fmla="val 6000"/>
+              <a:gd name="adj" fmla="val 8276"/>
             </a:avLst>
           </a:prstGeom>
           <a:solidFill>
@@ -10141,14 +11220,14 @@
       </p:sp>
       <p:sp>
         <p:nvSpPr>
-          <p:cNvPr id="13" name="Text 11"/>
-          <p:cNvSpPr/>
-          <p:nvPr/>
-        </p:nvSpPr>
-        <p:spPr>
-          <a:xfrm>
-            <a:off x="8074152" y="1563624"/>
-            <a:ext cx="2825496" cy="256032"/>
+          <p:cNvPr id="11" name="Text 9"/>
+          <p:cNvSpPr/>
+          <p:nvPr/>
+        </p:nvSpPr>
+        <p:spPr>
+          <a:xfrm>
+            <a:off x="7799832" y="1472184"/>
+            <a:ext cx="3145536" cy="256032"/>
           </a:xfrm>
           <a:prstGeom prst="rect">
             <a:avLst/>
@@ -10172,7 +11251,7 @@
                 <a:ea typeface="Aptos" pitchFamily="34" charset="-122"/>
                 <a:cs typeface="Aptos" pitchFamily="34" charset="-120"/>
               </a:rPr>
-              <a:t>Key idea</a:t>
+              <a:t>Practice focus</a:t>
             </a:r>
             <a:endParaRPr lang="en-US" sz="1300" dirty="0"/>
           </a:p>
@@ -10180,14 +11259,14 @@
       </p:sp>
       <p:sp>
         <p:nvSpPr>
-          <p:cNvPr id="14" name="Text 12"/>
-          <p:cNvSpPr/>
-          <p:nvPr/>
-        </p:nvSpPr>
-        <p:spPr>
-          <a:xfrm>
-            <a:off x="8074152" y="1920240"/>
-            <a:ext cx="2825496" cy="1188720"/>
+          <p:cNvPr id="12" name="Text 10"/>
+          <p:cNvSpPr/>
+          <p:nvPr/>
+        </p:nvSpPr>
+        <p:spPr>
+          <a:xfrm>
+            <a:off x="7799832" y="1828800"/>
+            <a:ext cx="3145536" cy="685800"/>
           </a:xfrm>
           <a:prstGeom prst="rect">
             <a:avLst/>
@@ -10221,18 +11300,159 @@
       </p:sp>
       <p:sp>
         <p:nvSpPr>
-          <p:cNvPr id="15" name="Shape 13"/>
-          <p:cNvSpPr/>
-          <p:nvPr/>
-        </p:nvSpPr>
-        <p:spPr>
-          <a:xfrm>
-            <a:off x="7909560" y="3520440"/>
-            <a:ext cx="3154680" cy="1737360"/>
+          <p:cNvPr id="13" name="Shape 11"/>
+          <p:cNvSpPr/>
+          <p:nvPr/>
+        </p:nvSpPr>
+        <p:spPr>
+          <a:xfrm>
+            <a:off x="7635240" y="2788920"/>
+            <a:ext cx="3474720" cy="1536192"/>
           </a:xfrm>
           <a:prstGeom prst="roundRect">
             <a:avLst>
-              <a:gd name="adj" fmla="val 6316"/>
+              <a:gd name="adj" fmla="val 7143"/>
+            </a:avLst>
+          </a:prstGeom>
+          <a:solidFill>
+            <a:srgbClr val="FFFFFF">
+              <a:alpha val="88000"/>
+            </a:srgbClr>
+          </a:solidFill>
+          <a:ln w="12700">
+            <a:solidFill>
+              <a:srgbClr val="D6E8F2"/>
+            </a:solidFill>
+            <a:prstDash val="solid"/>
+          </a:ln>
+        </p:spPr>
+      </p:sp>
+      <p:sp>
+        <p:nvSpPr>
+          <p:cNvPr id="14" name="Shape 12"/>
+          <p:cNvSpPr/>
+          <p:nvPr/>
+        </p:nvSpPr>
+        <p:spPr>
+          <a:xfrm>
+            <a:off x="8074152" y="3291840"/>
+            <a:ext cx="2596896" cy="749808"/>
+          </a:xfrm>
+          <a:prstGeom prst="rect">
+            <a:avLst/>
+          </a:prstGeom>
+          <a:solidFill>
+            <a:srgbClr val="EAF6F8"/>
+          </a:solidFill>
+          <a:ln w="12700">
+            <a:solidFill>
+              <a:srgbClr val="8ABBD8"/>
+            </a:solidFill>
+            <a:prstDash val="solid"/>
+          </a:ln>
+        </p:spPr>
+      </p:sp>
+      <p:sp>
+        <p:nvSpPr>
+          <p:cNvPr id="15" name="Shape 13"/>
+          <p:cNvSpPr/>
+          <p:nvPr/>
+        </p:nvSpPr>
+        <p:spPr>
+          <a:xfrm>
+            <a:off x="8202168" y="3721608"/>
+            <a:ext cx="2340864" cy="0"/>
+          </a:xfrm>
+          <a:prstGeom prst="line">
+            <a:avLst/>
+          </a:prstGeom>
+          <a:noFill/>
+          <a:ln w="19050">
+            <a:solidFill>
+              <a:srgbClr val="0068B7"/>
+            </a:solidFill>
+            <a:prstDash val="solid"/>
+          </a:ln>
+        </p:spPr>
+      </p:sp>
+      <p:sp>
+        <p:nvSpPr>
+          <p:cNvPr id="16" name="Shape 14"/>
+          <p:cNvSpPr/>
+          <p:nvPr/>
+        </p:nvSpPr>
+        <p:spPr>
+          <a:xfrm>
+            <a:off x="9198864" y="4206240"/>
+            <a:ext cx="347472" cy="347472"/>
+          </a:xfrm>
+          <a:prstGeom prst="ellipse">
+            <a:avLst/>
+          </a:prstGeom>
+          <a:solidFill>
+            <a:srgbClr val="2F8A28"/>
+          </a:solidFill>
+          <a:ln w="12700">
+            <a:solidFill>
+              <a:srgbClr val="2F8A28"/>
+            </a:solidFill>
+            <a:prstDash val="solid"/>
+          </a:ln>
+        </p:spPr>
+      </p:sp>
+      <p:sp>
+        <p:nvSpPr>
+          <p:cNvPr id="17" name="Text 15"/>
+          <p:cNvSpPr/>
+          <p:nvPr/>
+        </p:nvSpPr>
+        <p:spPr>
+          <a:xfrm>
+            <a:off x="7909560" y="3977640"/>
+            <a:ext cx="2926080" cy="182880"/>
+          </a:xfrm>
+          <a:prstGeom prst="rect">
+            <a:avLst/>
+          </a:prstGeom>
+          <a:noFill/>
+          <a:ln/>
+        </p:spPr>
+        <p:txBody>
+          <a:bodyPr wrap="square" lIns="0" tIns="0" rIns="0" bIns="0" rtlCol="0" anchor="ctr"/>
+          <a:lstStyle/>
+          <a:p>
+            <a:pPr algn="ctr" indent="0" marL="0">
+              <a:buNone/>
+            </a:pPr>
+            <a:r>
+              <a:rPr lang="en-US" sz="1000" dirty="0">
+                <a:solidFill>
+                  <a:srgbClr val="003A63"/>
+                </a:solidFill>
+                <a:latin typeface="Aptos" pitchFamily="34" charset="0"/>
+                <a:ea typeface="Aptos" pitchFamily="34" charset="-122"/>
+                <a:cs typeface="Aptos" pitchFamily="34" charset="-120"/>
+              </a:rPr>
+              <a:t>Concept to action</a:t>
+            </a:r>
+            <a:endParaRPr lang="en-US" sz="1000" dirty="0"/>
+          </a:p>
+        </p:txBody>
+      </p:sp>
+      <p:sp>
+        <p:nvSpPr>
+          <p:cNvPr id="18" name="Shape 16"/>
+          <p:cNvSpPr/>
+          <p:nvPr/>
+        </p:nvSpPr>
+        <p:spPr>
+          <a:xfrm>
+            <a:off x="7635240" y="4498848"/>
+            <a:ext cx="3474720" cy="1143000"/>
+          </a:xfrm>
+          <a:prstGeom prst="roundRect">
+            <a:avLst>
+              <a:gd name="adj" fmla="val 9600"/>
             </a:avLst>
           </a:prstGeom>
           <a:solidFill>
@@ -10248,14 +11468,14 @@
       </p:sp>
       <p:sp>
         <p:nvSpPr>
-          <p:cNvPr id="16" name="Text 14"/>
-          <p:cNvSpPr/>
-          <p:nvPr/>
-        </p:nvSpPr>
-        <p:spPr>
-          <a:xfrm>
-            <a:off x="8074152" y="3666744"/>
-            <a:ext cx="2825496" cy="256032"/>
+          <p:cNvPr id="19" name="Text 17"/>
+          <p:cNvSpPr/>
+          <p:nvPr/>
+        </p:nvSpPr>
+        <p:spPr>
+          <a:xfrm>
+            <a:off x="7799832" y="4645152"/>
+            <a:ext cx="3145536" cy="256032"/>
           </a:xfrm>
           <a:prstGeom prst="rect">
             <a:avLst/>
@@ -10279,7 +11499,7 @@
                 <a:ea typeface="Aptos" pitchFamily="34" charset="-122"/>
                 <a:cs typeface="Aptos" pitchFamily="34" charset="-120"/>
               </a:rPr>
-              <a:t>Use this for</a:t>
+              <a:t>What to produce</a:t>
             </a:r>
             <a:endParaRPr lang="en-US" sz="1300" dirty="0"/>
           </a:p>
@@ -10287,14 +11507,14 @@
       </p:sp>
       <p:sp>
         <p:nvSpPr>
-          <p:cNvPr id="17" name="Text 15"/>
-          <p:cNvSpPr/>
-          <p:nvPr/>
-        </p:nvSpPr>
-        <p:spPr>
-          <a:xfrm>
-            <a:off x="8074152" y="4023360"/>
-            <a:ext cx="2825496" cy="1097280"/>
+          <p:cNvPr id="20" name="Text 18"/>
+          <p:cNvSpPr/>
+          <p:nvPr/>
+        </p:nvSpPr>
+        <p:spPr>
+          <a:xfrm>
+            <a:off x="7799832" y="5001768"/>
+            <a:ext cx="3145536" cy="502920"/>
           </a:xfrm>
           <a:prstGeom prst="rect">
             <a:avLst/>
@@ -10320,7 +11540,7 @@
                 <a:ea typeface="Aptos" pitchFamily="34" charset="-122"/>
                 <a:cs typeface="Aptos" pitchFamily="34" charset="-120"/>
               </a:rPr>
-              <a:t>Connect the concept to public health decisions, safeguards, documentation, or implementation work.</a:t>
+              <a:t>Use the assignment to test whether you can explain the concept, apply it to a realistic public health situation, and identify what would need review before the work moves forward.</a:t>
             </a:r>
             <a:endParaRPr lang="en-US" sz="1550" dirty="0"/>
           </a:p>
@@ -10494,8 +11714,8 @@
         </p:nvSpPr>
         <p:spPr>
           <a:xfrm>
-            <a:off x="9966960" y="6537960"/>
-            <a:ext cx="1645920" cy="201168"/>
+            <a:off x="9646920" y="6537960"/>
+            <a:ext cx="1965960" cy="201168"/>
           </a:xfrm>
           <a:prstGeom prst="rect">
             <a:avLst/>
@@ -10519,7 +11739,7 @@
                 <a:ea typeface="Aptos" pitchFamily="34" charset="-122"/>
                 <a:cs typeface="Aptos" pitchFamily="34" charset="-120"/>
               </a:rPr>
-              <a:t>Â© Paula Soper</a:t>
+              <a:t>Copyright Paula Soper</a:t>
             </a:r>
             <a:endParaRPr lang="en-US" sz="800" dirty="0"/>
           </a:p>
@@ -10566,77 +11786,13 @@
       </p:sp>
       <p:sp>
         <p:nvSpPr>
-          <p:cNvPr id="8" name="Shape 6"/>
+          <p:cNvPr id="8" name="Text 6"/>
           <p:cNvSpPr/>
           <p:nvPr/>
         </p:nvSpPr>
         <p:spPr>
           <a:xfrm>
             <a:off x="640080" y="658368"/>
-            <a:ext cx="420624" cy="420624"/>
-          </a:xfrm>
-          <a:prstGeom prst="ellipse">
-            <a:avLst/>
-          </a:prstGeom>
-          <a:solidFill>
-            <a:srgbClr val="0068B7"/>
-          </a:solidFill>
-          <a:ln w="12700">
-            <a:solidFill>
-              <a:srgbClr val="0068B7"/>
-            </a:solidFill>
-            <a:prstDash val="solid"/>
-          </a:ln>
-        </p:spPr>
-      </p:sp>
-      <p:sp>
-        <p:nvSpPr>
-          <p:cNvPr id="9" name="Text 7"/>
-          <p:cNvSpPr/>
-          <p:nvPr/>
-        </p:nvSpPr>
-        <p:spPr>
-          <a:xfrm>
-            <a:off x="640080" y="731520"/>
-            <a:ext cx="420624" cy="164592"/>
-          </a:xfrm>
-          <a:prstGeom prst="rect">
-            <a:avLst/>
-          </a:prstGeom>
-          <a:noFill/>
-          <a:ln/>
-        </p:spPr>
-        <p:txBody>
-          <a:bodyPr wrap="square" lIns="0" tIns="0" rIns="0" bIns="0" rtlCol="0" anchor="ctr"/>
-          <a:lstStyle/>
-          <a:p>
-            <a:pPr algn="ctr" indent="0" marL="0">
-              <a:buNone/>
-            </a:pPr>
-            <a:r>
-              <a:rPr lang="en-US" sz="1100" b="1" dirty="0">
-                <a:solidFill>
-                  <a:srgbClr val="FFFFFF"/>
-                </a:solidFill>
-                <a:latin typeface="Aptos" pitchFamily="34" charset="0"/>
-                <a:ea typeface="Aptos" pitchFamily="34" charset="-122"/>
-                <a:cs typeface="Aptos" pitchFamily="34" charset="-120"/>
-              </a:rPr>
-              <a:t>11</a:t>
-            </a:r>
-            <a:endParaRPr lang="en-US" sz="1100" dirty="0"/>
-          </a:p>
-        </p:txBody>
-      </p:sp>
-      <p:sp>
-        <p:nvSpPr>
-          <p:cNvPr id="10" name="Text 8"/>
-          <p:cNvSpPr/>
-          <p:nvPr/>
-        </p:nvSpPr>
-        <p:spPr>
-          <a:xfrm>
-            <a:off x="640080" y="621792"/>
             <a:ext cx="10881360" cy="713232"/>
           </a:xfrm>
           <a:prstGeom prst="rect">
@@ -10671,14 +11827,14 @@
       </p:sp>
       <p:sp>
         <p:nvSpPr>
-          <p:cNvPr id="11" name="Text 9"/>
+          <p:cNvPr id="9" name="Text 7"/>
           <p:cNvSpPr/>
           <p:nvPr/>
         </p:nvSpPr>
         <p:spPr>
           <a:xfrm>
             <a:off x="868680" y="1508760"/>
-            <a:ext cx="6537960" cy="4160520"/>
+            <a:ext cx="6309360" cy="4160520"/>
           </a:xfrm>
           <a:prstGeom prst="rect">
             <a:avLst/>
@@ -10737,18 +11893,18 @@
       </p:sp>
       <p:sp>
         <p:nvSpPr>
-          <p:cNvPr id="12" name="Shape 10"/>
-          <p:cNvSpPr/>
-          <p:nvPr/>
-        </p:nvSpPr>
-        <p:spPr>
-          <a:xfrm>
-            <a:off x="7909560" y="1417320"/>
-            <a:ext cx="3154680" cy="1828800"/>
+          <p:cNvPr id="10" name="Shape 8"/>
+          <p:cNvSpPr/>
+          <p:nvPr/>
+        </p:nvSpPr>
+        <p:spPr>
+          <a:xfrm>
+            <a:off x="7635240" y="1325880"/>
+            <a:ext cx="3474720" cy="1325880"/>
           </a:xfrm>
           <a:prstGeom prst="roundRect">
             <a:avLst>
-              <a:gd name="adj" fmla="val 6000"/>
+              <a:gd name="adj" fmla="val 8276"/>
             </a:avLst>
           </a:prstGeom>
           <a:solidFill>
@@ -10764,14 +11920,14 @@
       </p:sp>
       <p:sp>
         <p:nvSpPr>
-          <p:cNvPr id="13" name="Text 11"/>
-          <p:cNvSpPr/>
-          <p:nvPr/>
-        </p:nvSpPr>
-        <p:spPr>
-          <a:xfrm>
-            <a:off x="8074152" y="1563624"/>
-            <a:ext cx="2825496" cy="256032"/>
+          <p:cNvPr id="11" name="Text 9"/>
+          <p:cNvSpPr/>
+          <p:nvPr/>
+        </p:nvSpPr>
+        <p:spPr>
+          <a:xfrm>
+            <a:off x="7799832" y="1472184"/>
+            <a:ext cx="3145536" cy="256032"/>
           </a:xfrm>
           <a:prstGeom prst="rect">
             <a:avLst/>
@@ -10795,7 +11951,7 @@
                 <a:ea typeface="Aptos" pitchFamily="34" charset="-122"/>
                 <a:cs typeface="Aptos" pitchFamily="34" charset="-120"/>
               </a:rPr>
-              <a:t>Key idea</a:t>
+              <a:t>Practice focus</a:t>
             </a:r>
             <a:endParaRPr lang="en-US" sz="1300" dirty="0"/>
           </a:p>
@@ -10803,14 +11959,14 @@
       </p:sp>
       <p:sp>
         <p:nvSpPr>
-          <p:cNvPr id="14" name="Text 12"/>
-          <p:cNvSpPr/>
-          <p:nvPr/>
-        </p:nvSpPr>
-        <p:spPr>
-          <a:xfrm>
-            <a:off x="8074152" y="1920240"/>
-            <a:ext cx="2825496" cy="1188720"/>
+          <p:cNvPr id="12" name="Text 10"/>
+          <p:cNvSpPr/>
+          <p:nvPr/>
+        </p:nvSpPr>
+        <p:spPr>
+          <a:xfrm>
+            <a:off x="7799832" y="1828800"/>
+            <a:ext cx="3145536" cy="685800"/>
           </a:xfrm>
           <a:prstGeom prst="rect">
             <a:avLst/>
@@ -10844,18 +12000,159 @@
       </p:sp>
       <p:sp>
         <p:nvSpPr>
-          <p:cNvPr id="15" name="Shape 13"/>
-          <p:cNvSpPr/>
-          <p:nvPr/>
-        </p:nvSpPr>
-        <p:spPr>
-          <a:xfrm>
-            <a:off x="7909560" y="3520440"/>
-            <a:ext cx="3154680" cy="1737360"/>
+          <p:cNvPr id="13" name="Shape 11"/>
+          <p:cNvSpPr/>
+          <p:nvPr/>
+        </p:nvSpPr>
+        <p:spPr>
+          <a:xfrm>
+            <a:off x="7635240" y="2788920"/>
+            <a:ext cx="3474720" cy="1536192"/>
           </a:xfrm>
           <a:prstGeom prst="roundRect">
             <a:avLst>
-              <a:gd name="adj" fmla="val 6316"/>
+              <a:gd name="adj" fmla="val 7143"/>
+            </a:avLst>
+          </a:prstGeom>
+          <a:solidFill>
+            <a:srgbClr val="FFFFFF">
+              <a:alpha val="88000"/>
+            </a:srgbClr>
+          </a:solidFill>
+          <a:ln w="12700">
+            <a:solidFill>
+              <a:srgbClr val="D6E8F2"/>
+            </a:solidFill>
+            <a:prstDash val="solid"/>
+          </a:ln>
+        </p:spPr>
+      </p:sp>
+      <p:sp>
+        <p:nvSpPr>
+          <p:cNvPr id="14" name="Shape 12"/>
+          <p:cNvSpPr/>
+          <p:nvPr/>
+        </p:nvSpPr>
+        <p:spPr>
+          <a:xfrm>
+            <a:off x="8074152" y="3291840"/>
+            <a:ext cx="2596896" cy="749808"/>
+          </a:xfrm>
+          <a:prstGeom prst="rect">
+            <a:avLst/>
+          </a:prstGeom>
+          <a:solidFill>
+            <a:srgbClr val="EAF6F8"/>
+          </a:solidFill>
+          <a:ln w="12700">
+            <a:solidFill>
+              <a:srgbClr val="8ABBD8"/>
+            </a:solidFill>
+            <a:prstDash val="solid"/>
+          </a:ln>
+        </p:spPr>
+      </p:sp>
+      <p:sp>
+        <p:nvSpPr>
+          <p:cNvPr id="15" name="Shape 13"/>
+          <p:cNvSpPr/>
+          <p:nvPr/>
+        </p:nvSpPr>
+        <p:spPr>
+          <a:xfrm>
+            <a:off x="8202168" y="3721608"/>
+            <a:ext cx="2340864" cy="0"/>
+          </a:xfrm>
+          <a:prstGeom prst="line">
+            <a:avLst/>
+          </a:prstGeom>
+          <a:noFill/>
+          <a:ln w="19050">
+            <a:solidFill>
+              <a:srgbClr val="0068B7"/>
+            </a:solidFill>
+            <a:prstDash val="solid"/>
+          </a:ln>
+        </p:spPr>
+      </p:sp>
+      <p:sp>
+        <p:nvSpPr>
+          <p:cNvPr id="16" name="Shape 14"/>
+          <p:cNvSpPr/>
+          <p:nvPr/>
+        </p:nvSpPr>
+        <p:spPr>
+          <a:xfrm>
+            <a:off x="9198864" y="4206240"/>
+            <a:ext cx="347472" cy="347472"/>
+          </a:xfrm>
+          <a:prstGeom prst="ellipse">
+            <a:avLst/>
+          </a:prstGeom>
+          <a:solidFill>
+            <a:srgbClr val="2F8A28"/>
+          </a:solidFill>
+          <a:ln w="12700">
+            <a:solidFill>
+              <a:srgbClr val="2F8A28"/>
+            </a:solidFill>
+            <a:prstDash val="solid"/>
+          </a:ln>
+        </p:spPr>
+      </p:sp>
+      <p:sp>
+        <p:nvSpPr>
+          <p:cNvPr id="17" name="Text 15"/>
+          <p:cNvSpPr/>
+          <p:nvPr/>
+        </p:nvSpPr>
+        <p:spPr>
+          <a:xfrm>
+            <a:off x="7909560" y="3977640"/>
+            <a:ext cx="2926080" cy="182880"/>
+          </a:xfrm>
+          <a:prstGeom prst="rect">
+            <a:avLst/>
+          </a:prstGeom>
+          <a:noFill/>
+          <a:ln/>
+        </p:spPr>
+        <p:txBody>
+          <a:bodyPr wrap="square" lIns="0" tIns="0" rIns="0" bIns="0" rtlCol="0" anchor="ctr"/>
+          <a:lstStyle/>
+          <a:p>
+            <a:pPr algn="ctr" indent="0" marL="0">
+              <a:buNone/>
+            </a:pPr>
+            <a:r>
+              <a:rPr lang="en-US" sz="1000" dirty="0">
+                <a:solidFill>
+                  <a:srgbClr val="003A63"/>
+                </a:solidFill>
+                <a:latin typeface="Aptos" pitchFamily="34" charset="0"/>
+                <a:ea typeface="Aptos" pitchFamily="34" charset="-122"/>
+                <a:cs typeface="Aptos" pitchFamily="34" charset="-120"/>
+              </a:rPr>
+              <a:t>Concept to action</a:t>
+            </a:r>
+            <a:endParaRPr lang="en-US" sz="1000" dirty="0"/>
+          </a:p>
+        </p:txBody>
+      </p:sp>
+      <p:sp>
+        <p:nvSpPr>
+          <p:cNvPr id="18" name="Shape 16"/>
+          <p:cNvSpPr/>
+          <p:nvPr/>
+        </p:nvSpPr>
+        <p:spPr>
+          <a:xfrm>
+            <a:off x="7635240" y="4498848"/>
+            <a:ext cx="3474720" cy="1143000"/>
+          </a:xfrm>
+          <a:prstGeom prst="roundRect">
+            <a:avLst>
+              <a:gd name="adj" fmla="val 9600"/>
             </a:avLst>
           </a:prstGeom>
           <a:solidFill>
@@ -10871,14 +12168,14 @@
       </p:sp>
       <p:sp>
         <p:nvSpPr>
-          <p:cNvPr id="16" name="Text 14"/>
-          <p:cNvSpPr/>
-          <p:nvPr/>
-        </p:nvSpPr>
-        <p:spPr>
-          <a:xfrm>
-            <a:off x="8074152" y="3666744"/>
-            <a:ext cx="2825496" cy="256032"/>
+          <p:cNvPr id="19" name="Text 17"/>
+          <p:cNvSpPr/>
+          <p:nvPr/>
+        </p:nvSpPr>
+        <p:spPr>
+          <a:xfrm>
+            <a:off x="7799832" y="4645152"/>
+            <a:ext cx="3145536" cy="256032"/>
           </a:xfrm>
           <a:prstGeom prst="rect">
             <a:avLst/>
@@ -10902,7 +12199,7 @@
                 <a:ea typeface="Aptos" pitchFamily="34" charset="-122"/>
                 <a:cs typeface="Aptos" pitchFamily="34" charset="-120"/>
               </a:rPr>
-              <a:t>Use this for</a:t>
+              <a:t>What to produce</a:t>
             </a:r>
             <a:endParaRPr lang="en-US" sz="1300" dirty="0"/>
           </a:p>
@@ -10910,14 +12207,14 @@
       </p:sp>
       <p:sp>
         <p:nvSpPr>
-          <p:cNvPr id="17" name="Text 15"/>
-          <p:cNvSpPr/>
-          <p:nvPr/>
-        </p:nvSpPr>
-        <p:spPr>
-          <a:xfrm>
-            <a:off x="8074152" y="4023360"/>
-            <a:ext cx="2825496" cy="1097280"/>
+          <p:cNvPr id="20" name="Text 18"/>
+          <p:cNvSpPr/>
+          <p:nvPr/>
+        </p:nvSpPr>
+        <p:spPr>
+          <a:xfrm>
+            <a:off x="7799832" y="5001768"/>
+            <a:ext cx="3145536" cy="502920"/>
           </a:xfrm>
           <a:prstGeom prst="rect">
             <a:avLst/>
@@ -10943,7 +12240,7 @@
                 <a:ea typeface="Aptos" pitchFamily="34" charset="-122"/>
                 <a:cs typeface="Aptos" pitchFamily="34" charset="-120"/>
               </a:rPr>
-              <a:t>Connect the concept to public health decisions, safeguards, documentation, or implementation work.</a:t>
+              <a:t>Use the assignment to test whether you can explain the concept, apply it to a realistic public health situation, and identify what would need review before the work moves forward.</a:t>
             </a:r>
             <a:endParaRPr lang="en-US" sz="1550" dirty="0"/>
           </a:p>
@@ -11117,8 +12414,8 @@
         </p:nvSpPr>
         <p:spPr>
           <a:xfrm>
-            <a:off x="9966960" y="6537960"/>
-            <a:ext cx="1645920" cy="201168"/>
+            <a:off x="9646920" y="6537960"/>
+            <a:ext cx="1965960" cy="201168"/>
           </a:xfrm>
           <a:prstGeom prst="rect">
             <a:avLst/>
@@ -11142,7 +12439,7 @@
                 <a:ea typeface="Aptos" pitchFamily="34" charset="-122"/>
                 <a:cs typeface="Aptos" pitchFamily="34" charset="-120"/>
               </a:rPr>
-              <a:t>Â© Paula Soper</a:t>
+              <a:t>Copyright Paula Soper</a:t>
             </a:r>
             <a:endParaRPr lang="en-US" sz="800" dirty="0"/>
           </a:p>
@@ -11189,77 +12486,13 @@
       </p:sp>
       <p:sp>
         <p:nvSpPr>
-          <p:cNvPr id="8" name="Shape 6"/>
+          <p:cNvPr id="8" name="Text 6"/>
           <p:cNvSpPr/>
           <p:nvPr/>
         </p:nvSpPr>
         <p:spPr>
           <a:xfrm>
             <a:off x="640080" y="658368"/>
-            <a:ext cx="420624" cy="420624"/>
-          </a:xfrm>
-          <a:prstGeom prst="ellipse">
-            <a:avLst/>
-          </a:prstGeom>
-          <a:solidFill>
-            <a:srgbClr val="0068B7"/>
-          </a:solidFill>
-          <a:ln w="12700">
-            <a:solidFill>
-              <a:srgbClr val="0068B7"/>
-            </a:solidFill>
-            <a:prstDash val="solid"/>
-          </a:ln>
-        </p:spPr>
-      </p:sp>
-      <p:sp>
-        <p:nvSpPr>
-          <p:cNvPr id="9" name="Text 7"/>
-          <p:cNvSpPr/>
-          <p:nvPr/>
-        </p:nvSpPr>
-        <p:spPr>
-          <a:xfrm>
-            <a:off x="640080" y="731520"/>
-            <a:ext cx="420624" cy="164592"/>
-          </a:xfrm>
-          <a:prstGeom prst="rect">
-            <a:avLst/>
-          </a:prstGeom>
-          <a:noFill/>
-          <a:ln/>
-        </p:spPr>
-        <p:txBody>
-          <a:bodyPr wrap="square" lIns="0" tIns="0" rIns="0" bIns="0" rtlCol="0" anchor="ctr"/>
-          <a:lstStyle/>
-          <a:p>
-            <a:pPr algn="ctr" indent="0" marL="0">
-              <a:buNone/>
-            </a:pPr>
-            <a:r>
-              <a:rPr lang="en-US" sz="1100" b="1" dirty="0">
-                <a:solidFill>
-                  <a:srgbClr val="FFFFFF"/>
-                </a:solidFill>
-                <a:latin typeface="Aptos" pitchFamily="34" charset="0"/>
-                <a:ea typeface="Aptos" pitchFamily="34" charset="-122"/>
-                <a:cs typeface="Aptos" pitchFamily="34" charset="-120"/>
-              </a:rPr>
-              <a:t>12</a:t>
-            </a:r>
-            <a:endParaRPr lang="en-US" sz="1100" dirty="0"/>
-          </a:p>
-        </p:txBody>
-      </p:sp>
-      <p:sp>
-        <p:nvSpPr>
-          <p:cNvPr id="10" name="Text 8"/>
-          <p:cNvSpPr/>
-          <p:nvPr/>
-        </p:nvSpPr>
-        <p:spPr>
-          <a:xfrm>
-            <a:off x="640080" y="621792"/>
             <a:ext cx="10881360" cy="713232"/>
           </a:xfrm>
           <a:prstGeom prst="rect">
@@ -11294,14 +12527,14 @@
       </p:sp>
       <p:sp>
         <p:nvSpPr>
-          <p:cNvPr id="11" name="Text 9"/>
+          <p:cNvPr id="9" name="Text 7"/>
           <p:cNvSpPr/>
           <p:nvPr/>
         </p:nvSpPr>
         <p:spPr>
           <a:xfrm>
             <a:off x="868680" y="1508760"/>
-            <a:ext cx="6537960" cy="4160520"/>
+            <a:ext cx="6309360" cy="4160520"/>
           </a:xfrm>
           <a:prstGeom prst="rect">
             <a:avLst/>
@@ -11360,18 +12593,18 @@
       </p:sp>
       <p:sp>
         <p:nvSpPr>
-          <p:cNvPr id="12" name="Shape 10"/>
-          <p:cNvSpPr/>
-          <p:nvPr/>
-        </p:nvSpPr>
-        <p:spPr>
-          <a:xfrm>
-            <a:off x="7909560" y="1417320"/>
-            <a:ext cx="3154680" cy="1828800"/>
+          <p:cNvPr id="10" name="Shape 8"/>
+          <p:cNvSpPr/>
+          <p:nvPr/>
+        </p:nvSpPr>
+        <p:spPr>
+          <a:xfrm>
+            <a:off x="7635240" y="1325880"/>
+            <a:ext cx="3474720" cy="1325880"/>
           </a:xfrm>
           <a:prstGeom prst="roundRect">
             <a:avLst>
-              <a:gd name="adj" fmla="val 6000"/>
+              <a:gd name="adj" fmla="val 8276"/>
             </a:avLst>
           </a:prstGeom>
           <a:solidFill>
@@ -11387,14 +12620,14 @@
       </p:sp>
       <p:sp>
         <p:nvSpPr>
-          <p:cNvPr id="13" name="Text 11"/>
-          <p:cNvSpPr/>
-          <p:nvPr/>
-        </p:nvSpPr>
-        <p:spPr>
-          <a:xfrm>
-            <a:off x="8074152" y="1563624"/>
-            <a:ext cx="2825496" cy="256032"/>
+          <p:cNvPr id="11" name="Text 9"/>
+          <p:cNvSpPr/>
+          <p:nvPr/>
+        </p:nvSpPr>
+        <p:spPr>
+          <a:xfrm>
+            <a:off x="7799832" y="1472184"/>
+            <a:ext cx="3145536" cy="256032"/>
           </a:xfrm>
           <a:prstGeom prst="rect">
             <a:avLst/>
@@ -11418,7 +12651,7 @@
                 <a:ea typeface="Aptos" pitchFamily="34" charset="-122"/>
                 <a:cs typeface="Aptos" pitchFamily="34" charset="-120"/>
               </a:rPr>
-              <a:t>Key idea</a:t>
+              <a:t>Core concept</a:t>
             </a:r>
             <a:endParaRPr lang="en-US" sz="1300" dirty="0"/>
           </a:p>
@@ -11426,14 +12659,14 @@
       </p:sp>
       <p:sp>
         <p:nvSpPr>
-          <p:cNvPr id="14" name="Text 12"/>
-          <p:cNvSpPr/>
-          <p:nvPr/>
-        </p:nvSpPr>
-        <p:spPr>
-          <a:xfrm>
-            <a:off x="8074152" y="1920240"/>
-            <a:ext cx="2825496" cy="1188720"/>
+          <p:cNvPr id="12" name="Text 10"/>
+          <p:cNvSpPr/>
+          <p:nvPr/>
+        </p:nvSpPr>
+        <p:spPr>
+          <a:xfrm>
+            <a:off x="7799832" y="1828800"/>
+            <a:ext cx="3145536" cy="685800"/>
           </a:xfrm>
           <a:prstGeom prst="rect">
             <a:avLst/>
@@ -11467,18 +12700,159 @@
       </p:sp>
       <p:sp>
         <p:nvSpPr>
-          <p:cNvPr id="15" name="Shape 13"/>
-          <p:cNvSpPr/>
-          <p:nvPr/>
-        </p:nvSpPr>
-        <p:spPr>
-          <a:xfrm>
-            <a:off x="7909560" y="3520440"/>
-            <a:ext cx="3154680" cy="1737360"/>
+          <p:cNvPr id="13" name="Shape 11"/>
+          <p:cNvSpPr/>
+          <p:nvPr/>
+        </p:nvSpPr>
+        <p:spPr>
+          <a:xfrm>
+            <a:off x="7635240" y="2788920"/>
+            <a:ext cx="3474720" cy="1536192"/>
           </a:xfrm>
           <a:prstGeom prst="roundRect">
             <a:avLst>
-              <a:gd name="adj" fmla="val 6316"/>
+              <a:gd name="adj" fmla="val 7143"/>
+            </a:avLst>
+          </a:prstGeom>
+          <a:solidFill>
+            <a:srgbClr val="FFFFFF">
+              <a:alpha val="88000"/>
+            </a:srgbClr>
+          </a:solidFill>
+          <a:ln w="12700">
+            <a:solidFill>
+              <a:srgbClr val="D6E8F2"/>
+            </a:solidFill>
+            <a:prstDash val="solid"/>
+          </a:ln>
+        </p:spPr>
+      </p:sp>
+      <p:sp>
+        <p:nvSpPr>
+          <p:cNvPr id="14" name="Shape 12"/>
+          <p:cNvSpPr/>
+          <p:nvPr/>
+        </p:nvSpPr>
+        <p:spPr>
+          <a:xfrm>
+            <a:off x="8074152" y="3291840"/>
+            <a:ext cx="2596896" cy="749808"/>
+          </a:xfrm>
+          <a:prstGeom prst="rect">
+            <a:avLst/>
+          </a:prstGeom>
+          <a:solidFill>
+            <a:srgbClr val="EAF6F8"/>
+          </a:solidFill>
+          <a:ln w="12700">
+            <a:solidFill>
+              <a:srgbClr val="8ABBD8"/>
+            </a:solidFill>
+            <a:prstDash val="solid"/>
+          </a:ln>
+        </p:spPr>
+      </p:sp>
+      <p:sp>
+        <p:nvSpPr>
+          <p:cNvPr id="15" name="Shape 13"/>
+          <p:cNvSpPr/>
+          <p:nvPr/>
+        </p:nvSpPr>
+        <p:spPr>
+          <a:xfrm>
+            <a:off x="8202168" y="3721608"/>
+            <a:ext cx="2340864" cy="0"/>
+          </a:xfrm>
+          <a:prstGeom prst="line">
+            <a:avLst/>
+          </a:prstGeom>
+          <a:noFill/>
+          <a:ln w="19050">
+            <a:solidFill>
+              <a:srgbClr val="0068B7"/>
+            </a:solidFill>
+            <a:prstDash val="solid"/>
+          </a:ln>
+        </p:spPr>
+      </p:sp>
+      <p:sp>
+        <p:nvSpPr>
+          <p:cNvPr id="16" name="Shape 14"/>
+          <p:cNvSpPr/>
+          <p:nvPr/>
+        </p:nvSpPr>
+        <p:spPr>
+          <a:xfrm>
+            <a:off x="9198864" y="4206240"/>
+            <a:ext cx="347472" cy="347472"/>
+          </a:xfrm>
+          <a:prstGeom prst="ellipse">
+            <a:avLst/>
+          </a:prstGeom>
+          <a:solidFill>
+            <a:srgbClr val="2F8A28"/>
+          </a:solidFill>
+          <a:ln w="12700">
+            <a:solidFill>
+              <a:srgbClr val="2F8A28"/>
+            </a:solidFill>
+            <a:prstDash val="solid"/>
+          </a:ln>
+        </p:spPr>
+      </p:sp>
+      <p:sp>
+        <p:nvSpPr>
+          <p:cNvPr id="17" name="Text 15"/>
+          <p:cNvSpPr/>
+          <p:nvPr/>
+        </p:nvSpPr>
+        <p:spPr>
+          <a:xfrm>
+            <a:off x="7909560" y="3977640"/>
+            <a:ext cx="2926080" cy="182880"/>
+          </a:xfrm>
+          <a:prstGeom prst="rect">
+            <a:avLst/>
+          </a:prstGeom>
+          <a:noFill/>
+          <a:ln/>
+        </p:spPr>
+        <p:txBody>
+          <a:bodyPr wrap="square" lIns="0" tIns="0" rIns="0" bIns="0" rtlCol="0" anchor="ctr"/>
+          <a:lstStyle/>
+          <a:p>
+            <a:pPr algn="ctr" indent="0" marL="0">
+              <a:buNone/>
+            </a:pPr>
+            <a:r>
+              <a:rPr lang="en-US" sz="1000" dirty="0">
+                <a:solidFill>
+                  <a:srgbClr val="003A63"/>
+                </a:solidFill>
+                <a:latin typeface="Aptos" pitchFamily="34" charset="0"/>
+                <a:ea typeface="Aptos" pitchFamily="34" charset="-122"/>
+                <a:cs typeface="Aptos" pitchFamily="34" charset="-120"/>
+              </a:rPr>
+              <a:t>Concept to action</a:t>
+            </a:r>
+            <a:endParaRPr lang="en-US" sz="1000" dirty="0"/>
+          </a:p>
+        </p:txBody>
+      </p:sp>
+      <p:sp>
+        <p:nvSpPr>
+          <p:cNvPr id="18" name="Shape 16"/>
+          <p:cNvSpPr/>
+          <p:nvPr/>
+        </p:nvSpPr>
+        <p:spPr>
+          <a:xfrm>
+            <a:off x="7635240" y="4498848"/>
+            <a:ext cx="3474720" cy="1143000"/>
+          </a:xfrm>
+          <a:prstGeom prst="roundRect">
+            <a:avLst>
+              <a:gd name="adj" fmla="val 9600"/>
             </a:avLst>
           </a:prstGeom>
           <a:solidFill>
@@ -11494,14 +12868,14 @@
       </p:sp>
       <p:sp>
         <p:nvSpPr>
-          <p:cNvPr id="16" name="Text 14"/>
-          <p:cNvSpPr/>
-          <p:nvPr/>
-        </p:nvSpPr>
-        <p:spPr>
-          <a:xfrm>
-            <a:off x="8074152" y="3666744"/>
-            <a:ext cx="2825496" cy="256032"/>
+          <p:cNvPr id="19" name="Text 17"/>
+          <p:cNvSpPr/>
+          <p:nvPr/>
+        </p:nvSpPr>
+        <p:spPr>
+          <a:xfrm>
+            <a:off x="7799832" y="4645152"/>
+            <a:ext cx="3145536" cy="256032"/>
           </a:xfrm>
           <a:prstGeom prst="rect">
             <a:avLst/>
@@ -11525,7 +12899,7 @@
                 <a:ea typeface="Aptos" pitchFamily="34" charset="-122"/>
                 <a:cs typeface="Aptos" pitchFamily="34" charset="-120"/>
               </a:rPr>
-              <a:t>Use this for</a:t>
+              <a:t>Apply it</a:t>
             </a:r>
             <a:endParaRPr lang="en-US" sz="1300" dirty="0"/>
           </a:p>
@@ -11533,14 +12907,14 @@
       </p:sp>
       <p:sp>
         <p:nvSpPr>
-          <p:cNvPr id="17" name="Text 15"/>
-          <p:cNvSpPr/>
-          <p:nvPr/>
-        </p:nvSpPr>
-        <p:spPr>
-          <a:xfrm>
-            <a:off x="8074152" y="4023360"/>
-            <a:ext cx="2825496" cy="1097280"/>
+          <p:cNvPr id="20" name="Text 18"/>
+          <p:cNvSpPr/>
+          <p:nvPr/>
+        </p:nvSpPr>
+        <p:spPr>
+          <a:xfrm>
+            <a:off x="7799832" y="5001768"/>
+            <a:ext cx="3145536" cy="502920"/>
           </a:xfrm>
           <a:prstGeom prst="rect">
             <a:avLst/>
@@ -11566,7 +12940,7 @@
                 <a:ea typeface="Aptos" pitchFamily="34" charset="-122"/>
                 <a:cs typeface="Aptos" pitchFamily="34" charset="-120"/>
               </a:rPr>
-              <a:t>Connect the concept to public health decisions, safeguards, documentation, or implementation work.</a:t>
+              <a:t>Connect the concept to public health purpose, responsible use, required safeguards, documentation, and the next action a department should take.</a:t>
             </a:r>
             <a:endParaRPr lang="en-US" sz="1550" dirty="0"/>
           </a:p>
@@ -11740,8 +13114,8 @@
         </p:nvSpPr>
         <p:spPr>
           <a:xfrm>
-            <a:off x="9966960" y="6537960"/>
-            <a:ext cx="1645920" cy="201168"/>
+            <a:off x="9646920" y="6537960"/>
+            <a:ext cx="1965960" cy="201168"/>
           </a:xfrm>
           <a:prstGeom prst="rect">
             <a:avLst/>
@@ -11765,7 +13139,7 @@
                 <a:ea typeface="Aptos" pitchFamily="34" charset="-122"/>
                 <a:cs typeface="Aptos" pitchFamily="34" charset="-120"/>
               </a:rPr>
-              <a:t>Â© Paula Soper</a:t>
+              <a:t>Copyright Paula Soper</a:t>
             </a:r>
             <a:endParaRPr lang="en-US" sz="800" dirty="0"/>
           </a:p>
@@ -11860,7 +13234,7 @@
         <p:spPr>
           <a:xfrm>
             <a:off x="868680" y="1508760"/>
-            <a:ext cx="6537960" cy="4160520"/>
+            <a:ext cx="6309360" cy="4160520"/>
           </a:xfrm>
           <a:prstGeom prst="rect">
             <a:avLst/>
@@ -11897,12 +13271,12 @@
         </p:nvSpPr>
         <p:spPr>
           <a:xfrm>
-            <a:off x="7909560" y="1417320"/>
-            <a:ext cx="3154680" cy="1828800"/>
+            <a:off x="7635240" y="1325880"/>
+            <a:ext cx="3474720" cy="1325880"/>
           </a:xfrm>
           <a:prstGeom prst="roundRect">
             <a:avLst>
-              <a:gd name="adj" fmla="val 6000"/>
+              <a:gd name="adj" fmla="val 8276"/>
             </a:avLst>
           </a:prstGeom>
           <a:solidFill>
@@ -11924,8 +13298,8 @@
         </p:nvSpPr>
         <p:spPr>
           <a:xfrm>
-            <a:off x="8074152" y="1563624"/>
-            <a:ext cx="2825496" cy="256032"/>
+            <a:off x="7799832" y="1472184"/>
+            <a:ext cx="3145536" cy="256032"/>
           </a:xfrm>
           <a:prstGeom prst="rect">
             <a:avLst/>
@@ -11949,7 +13323,7 @@
                 <a:ea typeface="Aptos" pitchFamily="34" charset="-122"/>
                 <a:cs typeface="Aptos" pitchFamily="34" charset="-120"/>
               </a:rPr>
-              <a:t>Key idea</a:t>
+              <a:t>Core concept</a:t>
             </a:r>
             <a:endParaRPr lang="en-US" sz="1300" dirty="0"/>
           </a:p>
@@ -11963,8 +13337,8 @@
         </p:nvSpPr>
         <p:spPr>
           <a:xfrm>
-            <a:off x="8074152" y="1920240"/>
-            <a:ext cx="2825496" cy="1188720"/>
+            <a:off x="7799832" y="1828800"/>
+            <a:ext cx="3145536" cy="685800"/>
           </a:xfrm>
           <a:prstGeom prst="rect">
             <a:avLst/>
@@ -12004,12 +13378,153 @@
         </p:nvSpPr>
         <p:spPr>
           <a:xfrm>
-            <a:off x="7909560" y="3520440"/>
-            <a:ext cx="3154680" cy="1737360"/>
+            <a:off x="7635240" y="2788920"/>
+            <a:ext cx="3474720" cy="1536192"/>
           </a:xfrm>
           <a:prstGeom prst="roundRect">
             <a:avLst>
-              <a:gd name="adj" fmla="val 6316"/>
+              <a:gd name="adj" fmla="val 7143"/>
+            </a:avLst>
+          </a:prstGeom>
+          <a:solidFill>
+            <a:srgbClr val="FFFFFF">
+              <a:alpha val="88000"/>
+            </a:srgbClr>
+          </a:solidFill>
+          <a:ln w="12700">
+            <a:solidFill>
+              <a:srgbClr val="D6E8F2"/>
+            </a:solidFill>
+            <a:prstDash val="solid"/>
+          </a:ln>
+        </p:spPr>
+      </p:sp>
+      <p:sp>
+        <p:nvSpPr>
+          <p:cNvPr id="14" name="Shape 12"/>
+          <p:cNvSpPr/>
+          <p:nvPr/>
+        </p:nvSpPr>
+        <p:spPr>
+          <a:xfrm>
+            <a:off x="8074152" y="3291840"/>
+            <a:ext cx="2596896" cy="749808"/>
+          </a:xfrm>
+          <a:prstGeom prst="rect">
+            <a:avLst/>
+          </a:prstGeom>
+          <a:solidFill>
+            <a:srgbClr val="EAF6F8"/>
+          </a:solidFill>
+          <a:ln w="12700">
+            <a:solidFill>
+              <a:srgbClr val="8ABBD8"/>
+            </a:solidFill>
+            <a:prstDash val="solid"/>
+          </a:ln>
+        </p:spPr>
+      </p:sp>
+      <p:sp>
+        <p:nvSpPr>
+          <p:cNvPr id="15" name="Shape 13"/>
+          <p:cNvSpPr/>
+          <p:nvPr/>
+        </p:nvSpPr>
+        <p:spPr>
+          <a:xfrm>
+            <a:off x="8202168" y="3721608"/>
+            <a:ext cx="2340864" cy="0"/>
+          </a:xfrm>
+          <a:prstGeom prst="line">
+            <a:avLst/>
+          </a:prstGeom>
+          <a:noFill/>
+          <a:ln w="19050">
+            <a:solidFill>
+              <a:srgbClr val="0068B7"/>
+            </a:solidFill>
+            <a:prstDash val="solid"/>
+          </a:ln>
+        </p:spPr>
+      </p:sp>
+      <p:sp>
+        <p:nvSpPr>
+          <p:cNvPr id="16" name="Shape 14"/>
+          <p:cNvSpPr/>
+          <p:nvPr/>
+        </p:nvSpPr>
+        <p:spPr>
+          <a:xfrm>
+            <a:off x="9198864" y="4206240"/>
+            <a:ext cx="347472" cy="347472"/>
+          </a:xfrm>
+          <a:prstGeom prst="ellipse">
+            <a:avLst/>
+          </a:prstGeom>
+          <a:solidFill>
+            <a:srgbClr val="2F8A28"/>
+          </a:solidFill>
+          <a:ln w="12700">
+            <a:solidFill>
+              <a:srgbClr val="2F8A28"/>
+            </a:solidFill>
+            <a:prstDash val="solid"/>
+          </a:ln>
+        </p:spPr>
+      </p:sp>
+      <p:sp>
+        <p:nvSpPr>
+          <p:cNvPr id="17" name="Text 15"/>
+          <p:cNvSpPr/>
+          <p:nvPr/>
+        </p:nvSpPr>
+        <p:spPr>
+          <a:xfrm>
+            <a:off x="7909560" y="3977640"/>
+            <a:ext cx="2926080" cy="182880"/>
+          </a:xfrm>
+          <a:prstGeom prst="rect">
+            <a:avLst/>
+          </a:prstGeom>
+          <a:noFill/>
+          <a:ln/>
+        </p:spPr>
+        <p:txBody>
+          <a:bodyPr wrap="square" lIns="0" tIns="0" rIns="0" bIns="0" rtlCol="0" anchor="ctr"/>
+          <a:lstStyle/>
+          <a:p>
+            <a:pPr algn="ctr" indent="0" marL="0">
+              <a:buNone/>
+            </a:pPr>
+            <a:r>
+              <a:rPr lang="en-US" sz="1000" dirty="0">
+                <a:solidFill>
+                  <a:srgbClr val="003A63"/>
+                </a:solidFill>
+                <a:latin typeface="Aptos" pitchFamily="34" charset="0"/>
+                <a:ea typeface="Aptos" pitchFamily="34" charset="-122"/>
+                <a:cs typeface="Aptos" pitchFamily="34" charset="-120"/>
+              </a:rPr>
+              <a:t>Concept to action</a:t>
+            </a:r>
+            <a:endParaRPr lang="en-US" sz="1000" dirty="0"/>
+          </a:p>
+        </p:txBody>
+      </p:sp>
+      <p:sp>
+        <p:nvSpPr>
+          <p:cNvPr id="18" name="Shape 16"/>
+          <p:cNvSpPr/>
+          <p:nvPr/>
+        </p:nvSpPr>
+        <p:spPr>
+          <a:xfrm>
+            <a:off x="7635240" y="4498848"/>
+            <a:ext cx="3474720" cy="1143000"/>
+          </a:xfrm>
+          <a:prstGeom prst="roundRect">
+            <a:avLst>
+              <a:gd name="adj" fmla="val 9600"/>
             </a:avLst>
           </a:prstGeom>
           <a:solidFill>
@@ -12025,14 +13540,14 @@
       </p:sp>
       <p:sp>
         <p:nvSpPr>
-          <p:cNvPr id="14" name="Text 12"/>
-          <p:cNvSpPr/>
-          <p:nvPr/>
-        </p:nvSpPr>
-        <p:spPr>
-          <a:xfrm>
-            <a:off x="8074152" y="3666744"/>
-            <a:ext cx="2825496" cy="256032"/>
+          <p:cNvPr id="19" name="Text 17"/>
+          <p:cNvSpPr/>
+          <p:nvPr/>
+        </p:nvSpPr>
+        <p:spPr>
+          <a:xfrm>
+            <a:off x="7799832" y="4645152"/>
+            <a:ext cx="3145536" cy="256032"/>
           </a:xfrm>
           <a:prstGeom prst="rect">
             <a:avLst/>
@@ -12056,7 +13571,7 @@
                 <a:ea typeface="Aptos" pitchFamily="34" charset="-122"/>
                 <a:cs typeface="Aptos" pitchFamily="34" charset="-120"/>
               </a:rPr>
-              <a:t>Use this for</a:t>
+              <a:t>Apply it</a:t>
             </a:r>
             <a:endParaRPr lang="en-US" sz="1300" dirty="0"/>
           </a:p>
@@ -12064,14 +13579,14 @@
       </p:sp>
       <p:sp>
         <p:nvSpPr>
-          <p:cNvPr id="15" name="Text 13"/>
-          <p:cNvSpPr/>
-          <p:nvPr/>
-        </p:nvSpPr>
-        <p:spPr>
-          <a:xfrm>
-            <a:off x="8074152" y="4023360"/>
-            <a:ext cx="2825496" cy="1097280"/>
+          <p:cNvPr id="20" name="Text 18"/>
+          <p:cNvSpPr/>
+          <p:nvPr/>
+        </p:nvSpPr>
+        <p:spPr>
+          <a:xfrm>
+            <a:off x="7799832" y="5001768"/>
+            <a:ext cx="3145536" cy="502920"/>
           </a:xfrm>
           <a:prstGeom prst="rect">
             <a:avLst/>
@@ -12097,7 +13612,7 @@
                 <a:ea typeface="Aptos" pitchFamily="34" charset="-122"/>
                 <a:cs typeface="Aptos" pitchFamily="34" charset="-120"/>
               </a:rPr>
-              <a:t>Connect the concept to public health decisions, safeguards, documentation, or implementation work.</a:t>
+              <a:t>Connect the concept to public health purpose, responsible use, required safeguards, documentation, and the next action a department should take.</a:t>
             </a:r>
             <a:endParaRPr lang="en-US" sz="1550" dirty="0"/>
           </a:p>
@@ -12271,8 +13786,8 @@
         </p:nvSpPr>
         <p:spPr>
           <a:xfrm>
-            <a:off x="9966960" y="6537960"/>
-            <a:ext cx="1645920" cy="201168"/>
+            <a:off x="9646920" y="6537960"/>
+            <a:ext cx="1965960" cy="201168"/>
           </a:xfrm>
           <a:prstGeom prst="rect">
             <a:avLst/>
@@ -12296,7 +13811,7 @@
                 <a:ea typeface="Aptos" pitchFamily="34" charset="-122"/>
                 <a:cs typeface="Aptos" pitchFamily="34" charset="-120"/>
               </a:rPr>
-              <a:t>Â© Paula Soper</a:t>
+              <a:t>Copyright Paula Soper</a:t>
             </a:r>
             <a:endParaRPr lang="en-US" sz="800" dirty="0"/>
           </a:p>
@@ -12639,46 +14154,7 @@
       </p:sp>
       <p:sp>
         <p:nvSpPr>
-          <p:cNvPr id="15" name="Text 13"/>
-          <p:cNvSpPr/>
-          <p:nvPr/>
-        </p:nvSpPr>
-        <p:spPr>
-          <a:xfrm>
-            <a:off x="8817864" y="4187952"/>
-            <a:ext cx="201168" cy="256032"/>
-          </a:xfrm>
-          <a:prstGeom prst="rect">
-            <a:avLst/>
-          </a:prstGeom>
-          <a:noFill/>
-          <a:ln/>
-        </p:spPr>
-        <p:txBody>
-          <a:bodyPr wrap="square" lIns="0" tIns="0" rIns="0" bIns="0" rtlCol="0" anchor="ctr"/>
-          <a:lstStyle/>
-          <a:p>
-            <a:pPr algn="ctr" indent="0" marL="0">
-              <a:buNone/>
-            </a:pPr>
-            <a:r>
-              <a:rPr lang="en-US" sz="1800" b="1" dirty="0">
-                <a:solidFill>
-                  <a:srgbClr val="0068B7"/>
-                </a:solidFill>
-                <a:latin typeface="Aptos" pitchFamily="34" charset="0"/>
-                <a:ea typeface="Aptos" pitchFamily="34" charset="-122"/>
-                <a:cs typeface="Aptos" pitchFamily="34" charset="-120"/>
-              </a:rPr>
-              <a:t>â†’</a:t>
-            </a:r>
-            <a:endParaRPr lang="en-US" sz="1800" dirty="0"/>
-          </a:p>
-        </p:txBody>
-      </p:sp>
-      <p:sp>
-        <p:nvSpPr>
-          <p:cNvPr id="16" name="Shape 14"/>
+          <p:cNvPr id="15" name="Shape 13"/>
           <p:cNvSpPr/>
           <p:nvPr/>
         </p:nvSpPr>
@@ -12705,7 +14181,7 @@
       </p:sp>
       <p:sp>
         <p:nvSpPr>
-          <p:cNvPr id="17" name="Text 15"/>
+          <p:cNvPr id="16" name="Text 14"/>
           <p:cNvSpPr/>
           <p:nvPr/>
         </p:nvSpPr>
@@ -12746,46 +14222,7 @@
       </p:sp>
       <p:sp>
         <p:nvSpPr>
-          <p:cNvPr id="18" name="Text 16"/>
-          <p:cNvSpPr/>
-          <p:nvPr/>
-        </p:nvSpPr>
-        <p:spPr>
-          <a:xfrm>
-            <a:off x="10046208" y="4187952"/>
-            <a:ext cx="201168" cy="256032"/>
-          </a:xfrm>
-          <a:prstGeom prst="rect">
-            <a:avLst/>
-          </a:prstGeom>
-          <a:noFill/>
-          <a:ln/>
-        </p:spPr>
-        <p:txBody>
-          <a:bodyPr wrap="square" lIns="0" tIns="0" rIns="0" bIns="0" rtlCol="0" anchor="ctr"/>
-          <a:lstStyle/>
-          <a:p>
-            <a:pPr algn="ctr" indent="0" marL="0">
-              <a:buNone/>
-            </a:pPr>
-            <a:r>
-              <a:rPr lang="en-US" sz="1800" b="1" dirty="0">
-                <a:solidFill>
-                  <a:srgbClr val="0068B7"/>
-                </a:solidFill>
-                <a:latin typeface="Aptos" pitchFamily="34" charset="0"/>
-                <a:ea typeface="Aptos" pitchFamily="34" charset="-122"/>
-                <a:cs typeface="Aptos" pitchFamily="34" charset="-120"/>
-              </a:rPr>
-              <a:t>â†’</a:t>
-            </a:r>
-            <a:endParaRPr lang="en-US" sz="1800" dirty="0"/>
-          </a:p>
-        </p:txBody>
-      </p:sp>
-      <p:sp>
-        <p:nvSpPr>
-          <p:cNvPr id="19" name="Shape 17"/>
+          <p:cNvPr id="17" name="Shape 15"/>
           <p:cNvSpPr/>
           <p:nvPr/>
         </p:nvSpPr>
@@ -12812,7 +14249,7 @@
       </p:sp>
       <p:sp>
         <p:nvSpPr>
-          <p:cNvPr id="20" name="Text 18"/>
+          <p:cNvPr id="18" name="Text 16"/>
           <p:cNvSpPr/>
           <p:nvPr/>
         </p:nvSpPr>
@@ -13019,8 +14456,8 @@
         </p:nvSpPr>
         <p:spPr>
           <a:xfrm>
-            <a:off x="9966960" y="6537960"/>
-            <a:ext cx="1645920" cy="201168"/>
+            <a:off x="9646920" y="6537960"/>
+            <a:ext cx="1965960" cy="201168"/>
           </a:xfrm>
           <a:prstGeom prst="rect">
             <a:avLst/>
@@ -13044,7 +14481,7 @@
                 <a:ea typeface="Aptos" pitchFamily="34" charset="-122"/>
                 <a:cs typeface="Aptos" pitchFamily="34" charset="-120"/>
               </a:rPr>
-              <a:t>Â© Paula Soper</a:t>
+              <a:t>Copyright Paula Soper</a:t>
             </a:r>
             <a:endParaRPr lang="en-US" sz="800" dirty="0"/>
           </a:p>
@@ -13387,46 +14824,7 @@
       </p:sp>
       <p:sp>
         <p:nvSpPr>
-          <p:cNvPr id="15" name="Text 13"/>
-          <p:cNvSpPr/>
-          <p:nvPr/>
-        </p:nvSpPr>
-        <p:spPr>
-          <a:xfrm>
-            <a:off x="8817864" y="4187952"/>
-            <a:ext cx="201168" cy="256032"/>
-          </a:xfrm>
-          <a:prstGeom prst="rect">
-            <a:avLst/>
-          </a:prstGeom>
-          <a:noFill/>
-          <a:ln/>
-        </p:spPr>
-        <p:txBody>
-          <a:bodyPr wrap="square" lIns="0" tIns="0" rIns="0" bIns="0" rtlCol="0" anchor="ctr"/>
-          <a:lstStyle/>
-          <a:p>
-            <a:pPr algn="ctr" indent="0" marL="0">
-              <a:buNone/>
-            </a:pPr>
-            <a:r>
-              <a:rPr lang="en-US" sz="1800" b="1" dirty="0">
-                <a:solidFill>
-                  <a:srgbClr val="0068B7"/>
-                </a:solidFill>
-                <a:latin typeface="Aptos" pitchFamily="34" charset="0"/>
-                <a:ea typeface="Aptos" pitchFamily="34" charset="-122"/>
-                <a:cs typeface="Aptos" pitchFamily="34" charset="-120"/>
-              </a:rPr>
-              <a:t>â†’</a:t>
-            </a:r>
-            <a:endParaRPr lang="en-US" sz="1800" dirty="0"/>
-          </a:p>
-        </p:txBody>
-      </p:sp>
-      <p:sp>
-        <p:nvSpPr>
-          <p:cNvPr id="16" name="Shape 14"/>
+          <p:cNvPr id="15" name="Shape 13"/>
           <p:cNvSpPr/>
           <p:nvPr/>
         </p:nvSpPr>
@@ -13453,7 +14851,7 @@
       </p:sp>
       <p:sp>
         <p:nvSpPr>
-          <p:cNvPr id="17" name="Text 15"/>
+          <p:cNvPr id="16" name="Text 14"/>
           <p:cNvSpPr/>
           <p:nvPr/>
         </p:nvSpPr>
@@ -13494,46 +14892,7 @@
       </p:sp>
       <p:sp>
         <p:nvSpPr>
-          <p:cNvPr id="18" name="Text 16"/>
-          <p:cNvSpPr/>
-          <p:nvPr/>
-        </p:nvSpPr>
-        <p:spPr>
-          <a:xfrm>
-            <a:off x="10046208" y="4187952"/>
-            <a:ext cx="201168" cy="256032"/>
-          </a:xfrm>
-          <a:prstGeom prst="rect">
-            <a:avLst/>
-          </a:prstGeom>
-          <a:noFill/>
-          <a:ln/>
-        </p:spPr>
-        <p:txBody>
-          <a:bodyPr wrap="square" lIns="0" tIns="0" rIns="0" bIns="0" rtlCol="0" anchor="ctr"/>
-          <a:lstStyle/>
-          <a:p>
-            <a:pPr algn="ctr" indent="0" marL="0">
-              <a:buNone/>
-            </a:pPr>
-            <a:r>
-              <a:rPr lang="en-US" sz="1800" b="1" dirty="0">
-                <a:solidFill>
-                  <a:srgbClr val="0068B7"/>
-                </a:solidFill>
-                <a:latin typeface="Aptos" pitchFamily="34" charset="0"/>
-                <a:ea typeface="Aptos" pitchFamily="34" charset="-122"/>
-                <a:cs typeface="Aptos" pitchFamily="34" charset="-120"/>
-              </a:rPr>
-              <a:t>â†’</a:t>
-            </a:r>
-            <a:endParaRPr lang="en-US" sz="1800" dirty="0"/>
-          </a:p>
-        </p:txBody>
-      </p:sp>
-      <p:sp>
-        <p:nvSpPr>
-          <p:cNvPr id="19" name="Shape 17"/>
+          <p:cNvPr id="17" name="Shape 15"/>
           <p:cNvSpPr/>
           <p:nvPr/>
         </p:nvSpPr>
@@ -13560,7 +14919,7 @@
       </p:sp>
       <p:sp>
         <p:nvSpPr>
-          <p:cNvPr id="20" name="Text 18"/>
+          <p:cNvPr id="18" name="Text 16"/>
           <p:cNvSpPr/>
           <p:nvPr/>
         </p:nvSpPr>
@@ -13767,8 +15126,8 @@
         </p:nvSpPr>
         <p:spPr>
           <a:xfrm>
-            <a:off x="9966960" y="6537960"/>
-            <a:ext cx="1645920" cy="201168"/>
+            <a:off x="9646920" y="6537960"/>
+            <a:ext cx="1965960" cy="201168"/>
           </a:xfrm>
           <a:prstGeom prst="rect">
             <a:avLst/>
@@ -13792,7 +15151,7 @@
                 <a:ea typeface="Aptos" pitchFamily="34" charset="-122"/>
                 <a:cs typeface="Aptos" pitchFamily="34" charset="-120"/>
               </a:rPr>
-              <a:t>Â© Paula Soper</a:t>
+              <a:t>Copyright Paula Soper</a:t>
             </a:r>
             <a:endParaRPr lang="en-US" sz="800" dirty="0"/>
           </a:p>
@@ -13839,77 +15198,13 @@
       </p:sp>
       <p:sp>
         <p:nvSpPr>
-          <p:cNvPr id="8" name="Shape 6"/>
+          <p:cNvPr id="8" name="Text 6"/>
           <p:cNvSpPr/>
           <p:nvPr/>
         </p:nvSpPr>
         <p:spPr>
           <a:xfrm>
             <a:off x="640080" y="658368"/>
-            <a:ext cx="420624" cy="420624"/>
-          </a:xfrm>
-          <a:prstGeom prst="ellipse">
-            <a:avLst/>
-          </a:prstGeom>
-          <a:solidFill>
-            <a:srgbClr val="0068B7"/>
-          </a:solidFill>
-          <a:ln w="12700">
-            <a:solidFill>
-              <a:srgbClr val="0068B7"/>
-            </a:solidFill>
-            <a:prstDash val="solid"/>
-          </a:ln>
-        </p:spPr>
-      </p:sp>
-      <p:sp>
-        <p:nvSpPr>
-          <p:cNvPr id="9" name="Text 7"/>
-          <p:cNvSpPr/>
-          <p:nvPr/>
-        </p:nvSpPr>
-        <p:spPr>
-          <a:xfrm>
-            <a:off x="640080" y="731520"/>
-            <a:ext cx="420624" cy="164592"/>
-          </a:xfrm>
-          <a:prstGeom prst="rect">
-            <a:avLst/>
-          </a:prstGeom>
-          <a:noFill/>
-          <a:ln/>
-        </p:spPr>
-        <p:txBody>
-          <a:bodyPr wrap="square" lIns="0" tIns="0" rIns="0" bIns="0" rtlCol="0" anchor="ctr"/>
-          <a:lstStyle/>
-          <a:p>
-            <a:pPr algn="ctr" indent="0" marL="0">
-              <a:buNone/>
-            </a:pPr>
-            <a:r>
-              <a:rPr lang="en-US" sz="1100" b="1" dirty="0">
-                <a:solidFill>
-                  <a:srgbClr val="FFFFFF"/>
-                </a:solidFill>
-                <a:latin typeface="Aptos" pitchFamily="34" charset="0"/>
-                <a:ea typeface="Aptos" pitchFamily="34" charset="-122"/>
-                <a:cs typeface="Aptos" pitchFamily="34" charset="-120"/>
-              </a:rPr>
-              <a:t>1</a:t>
-            </a:r>
-            <a:endParaRPr lang="en-US" sz="1100" dirty="0"/>
-          </a:p>
-        </p:txBody>
-      </p:sp>
-      <p:sp>
-        <p:nvSpPr>
-          <p:cNvPr id="10" name="Text 8"/>
-          <p:cNvSpPr/>
-          <p:nvPr/>
-        </p:nvSpPr>
-        <p:spPr>
-          <a:xfrm>
-            <a:off x="640080" y="621792"/>
             <a:ext cx="10881360" cy="713232"/>
           </a:xfrm>
           <a:prstGeom prst="rect">
@@ -13944,14 +15239,14 @@
       </p:sp>
       <p:sp>
         <p:nvSpPr>
-          <p:cNvPr id="11" name="Text 9"/>
+          <p:cNvPr id="9" name="Text 7"/>
           <p:cNvSpPr/>
           <p:nvPr/>
         </p:nvSpPr>
         <p:spPr>
           <a:xfrm>
             <a:off x="868680" y="1508760"/>
-            <a:ext cx="6537960" cy="4160520"/>
+            <a:ext cx="6309360" cy="4160520"/>
           </a:xfrm>
           <a:prstGeom prst="rect">
             <a:avLst/>
@@ -14010,18 +15305,18 @@
       </p:sp>
       <p:sp>
         <p:nvSpPr>
-          <p:cNvPr id="12" name="Shape 10"/>
-          <p:cNvSpPr/>
-          <p:nvPr/>
-        </p:nvSpPr>
-        <p:spPr>
-          <a:xfrm>
-            <a:off x="7909560" y="1417320"/>
-            <a:ext cx="3154680" cy="1828800"/>
+          <p:cNvPr id="10" name="Shape 8"/>
+          <p:cNvSpPr/>
+          <p:nvPr/>
+        </p:nvSpPr>
+        <p:spPr>
+          <a:xfrm>
+            <a:off x="7635240" y="1325880"/>
+            <a:ext cx="3474720" cy="1325880"/>
           </a:xfrm>
           <a:prstGeom prst="roundRect">
             <a:avLst>
-              <a:gd name="adj" fmla="val 6000"/>
+              <a:gd name="adj" fmla="val 8276"/>
             </a:avLst>
           </a:prstGeom>
           <a:solidFill>
@@ -14037,14 +15332,14 @@
       </p:sp>
       <p:sp>
         <p:nvSpPr>
-          <p:cNvPr id="13" name="Text 11"/>
-          <p:cNvSpPr/>
-          <p:nvPr/>
-        </p:nvSpPr>
-        <p:spPr>
-          <a:xfrm>
-            <a:off x="8074152" y="1563624"/>
-            <a:ext cx="2825496" cy="256032"/>
+          <p:cNvPr id="11" name="Text 9"/>
+          <p:cNvSpPr/>
+          <p:nvPr/>
+        </p:nvSpPr>
+        <p:spPr>
+          <a:xfrm>
+            <a:off x="7799832" y="1472184"/>
+            <a:ext cx="3145536" cy="256032"/>
           </a:xfrm>
           <a:prstGeom prst="rect">
             <a:avLst/>
@@ -14068,7 +15363,7 @@
                 <a:ea typeface="Aptos" pitchFamily="34" charset="-122"/>
                 <a:cs typeface="Aptos" pitchFamily="34" charset="-120"/>
               </a:rPr>
-              <a:t>Key idea</a:t>
+              <a:t>Practice focus</a:t>
             </a:r>
             <a:endParaRPr lang="en-US" sz="1300" dirty="0"/>
           </a:p>
@@ -14076,14 +15371,14 @@
       </p:sp>
       <p:sp>
         <p:nvSpPr>
-          <p:cNvPr id="14" name="Text 12"/>
-          <p:cNvSpPr/>
-          <p:nvPr/>
-        </p:nvSpPr>
-        <p:spPr>
-          <a:xfrm>
-            <a:off x="8074152" y="1920240"/>
-            <a:ext cx="2825496" cy="1188720"/>
+          <p:cNvPr id="12" name="Text 10"/>
+          <p:cNvSpPr/>
+          <p:nvPr/>
+        </p:nvSpPr>
+        <p:spPr>
+          <a:xfrm>
+            <a:off x="7799832" y="1828800"/>
+            <a:ext cx="3145536" cy="685800"/>
           </a:xfrm>
           <a:prstGeom prst="rect">
             <a:avLst/>
@@ -14117,18 +15412,159 @@
       </p:sp>
       <p:sp>
         <p:nvSpPr>
-          <p:cNvPr id="15" name="Shape 13"/>
-          <p:cNvSpPr/>
-          <p:nvPr/>
-        </p:nvSpPr>
-        <p:spPr>
-          <a:xfrm>
-            <a:off x="7909560" y="3520440"/>
-            <a:ext cx="3154680" cy="1737360"/>
+          <p:cNvPr id="13" name="Shape 11"/>
+          <p:cNvSpPr/>
+          <p:nvPr/>
+        </p:nvSpPr>
+        <p:spPr>
+          <a:xfrm>
+            <a:off x="7635240" y="2788920"/>
+            <a:ext cx="3474720" cy="1536192"/>
           </a:xfrm>
           <a:prstGeom prst="roundRect">
             <a:avLst>
-              <a:gd name="adj" fmla="val 6316"/>
+              <a:gd name="adj" fmla="val 7143"/>
+            </a:avLst>
+          </a:prstGeom>
+          <a:solidFill>
+            <a:srgbClr val="FFFFFF">
+              <a:alpha val="88000"/>
+            </a:srgbClr>
+          </a:solidFill>
+          <a:ln w="12700">
+            <a:solidFill>
+              <a:srgbClr val="D6E8F2"/>
+            </a:solidFill>
+            <a:prstDash val="solid"/>
+          </a:ln>
+        </p:spPr>
+      </p:sp>
+      <p:sp>
+        <p:nvSpPr>
+          <p:cNvPr id="14" name="Shape 12"/>
+          <p:cNvSpPr/>
+          <p:nvPr/>
+        </p:nvSpPr>
+        <p:spPr>
+          <a:xfrm>
+            <a:off x="8074152" y="3291840"/>
+            <a:ext cx="2596896" cy="749808"/>
+          </a:xfrm>
+          <a:prstGeom prst="rect">
+            <a:avLst/>
+          </a:prstGeom>
+          <a:solidFill>
+            <a:srgbClr val="EAF6F8"/>
+          </a:solidFill>
+          <a:ln w="12700">
+            <a:solidFill>
+              <a:srgbClr val="8ABBD8"/>
+            </a:solidFill>
+            <a:prstDash val="solid"/>
+          </a:ln>
+        </p:spPr>
+      </p:sp>
+      <p:sp>
+        <p:nvSpPr>
+          <p:cNvPr id="15" name="Shape 13"/>
+          <p:cNvSpPr/>
+          <p:nvPr/>
+        </p:nvSpPr>
+        <p:spPr>
+          <a:xfrm>
+            <a:off x="8202168" y="3721608"/>
+            <a:ext cx="2340864" cy="0"/>
+          </a:xfrm>
+          <a:prstGeom prst="line">
+            <a:avLst/>
+          </a:prstGeom>
+          <a:noFill/>
+          <a:ln w="19050">
+            <a:solidFill>
+              <a:srgbClr val="0068B7"/>
+            </a:solidFill>
+            <a:prstDash val="solid"/>
+          </a:ln>
+        </p:spPr>
+      </p:sp>
+      <p:sp>
+        <p:nvSpPr>
+          <p:cNvPr id="16" name="Shape 14"/>
+          <p:cNvSpPr/>
+          <p:nvPr/>
+        </p:nvSpPr>
+        <p:spPr>
+          <a:xfrm>
+            <a:off x="9198864" y="4206240"/>
+            <a:ext cx="347472" cy="347472"/>
+          </a:xfrm>
+          <a:prstGeom prst="ellipse">
+            <a:avLst/>
+          </a:prstGeom>
+          <a:solidFill>
+            <a:srgbClr val="2F8A28"/>
+          </a:solidFill>
+          <a:ln w="12700">
+            <a:solidFill>
+              <a:srgbClr val="2F8A28"/>
+            </a:solidFill>
+            <a:prstDash val="solid"/>
+          </a:ln>
+        </p:spPr>
+      </p:sp>
+      <p:sp>
+        <p:nvSpPr>
+          <p:cNvPr id="17" name="Text 15"/>
+          <p:cNvSpPr/>
+          <p:nvPr/>
+        </p:nvSpPr>
+        <p:spPr>
+          <a:xfrm>
+            <a:off x="7909560" y="3977640"/>
+            <a:ext cx="2926080" cy="182880"/>
+          </a:xfrm>
+          <a:prstGeom prst="rect">
+            <a:avLst/>
+          </a:prstGeom>
+          <a:noFill/>
+          <a:ln/>
+        </p:spPr>
+        <p:txBody>
+          <a:bodyPr wrap="square" lIns="0" tIns="0" rIns="0" bIns="0" rtlCol="0" anchor="ctr"/>
+          <a:lstStyle/>
+          <a:p>
+            <a:pPr algn="ctr" indent="0" marL="0">
+              <a:buNone/>
+            </a:pPr>
+            <a:r>
+              <a:rPr lang="en-US" sz="1000" dirty="0">
+                <a:solidFill>
+                  <a:srgbClr val="003A63"/>
+                </a:solidFill>
+                <a:latin typeface="Aptos" pitchFamily="34" charset="0"/>
+                <a:ea typeface="Aptos" pitchFamily="34" charset="-122"/>
+                <a:cs typeface="Aptos" pitchFamily="34" charset="-120"/>
+              </a:rPr>
+              <a:t>Concept to action</a:t>
+            </a:r>
+            <a:endParaRPr lang="en-US" sz="1000" dirty="0"/>
+          </a:p>
+        </p:txBody>
+      </p:sp>
+      <p:sp>
+        <p:nvSpPr>
+          <p:cNvPr id="18" name="Shape 16"/>
+          <p:cNvSpPr/>
+          <p:nvPr/>
+        </p:nvSpPr>
+        <p:spPr>
+          <a:xfrm>
+            <a:off x="7635240" y="4498848"/>
+            <a:ext cx="3474720" cy="1143000"/>
+          </a:xfrm>
+          <a:prstGeom prst="roundRect">
+            <a:avLst>
+              <a:gd name="adj" fmla="val 9600"/>
             </a:avLst>
           </a:prstGeom>
           <a:solidFill>
@@ -14144,14 +15580,14 @@
       </p:sp>
       <p:sp>
         <p:nvSpPr>
-          <p:cNvPr id="16" name="Text 14"/>
-          <p:cNvSpPr/>
-          <p:nvPr/>
-        </p:nvSpPr>
-        <p:spPr>
-          <a:xfrm>
-            <a:off x="8074152" y="3666744"/>
-            <a:ext cx="2825496" cy="256032"/>
+          <p:cNvPr id="19" name="Text 17"/>
+          <p:cNvSpPr/>
+          <p:nvPr/>
+        </p:nvSpPr>
+        <p:spPr>
+          <a:xfrm>
+            <a:off x="7799832" y="4645152"/>
+            <a:ext cx="3145536" cy="256032"/>
           </a:xfrm>
           <a:prstGeom prst="rect">
             <a:avLst/>
@@ -14175,7 +15611,7 @@
                 <a:ea typeface="Aptos" pitchFamily="34" charset="-122"/>
                 <a:cs typeface="Aptos" pitchFamily="34" charset="-120"/>
               </a:rPr>
-              <a:t>Use this for</a:t>
+              <a:t>What to produce</a:t>
             </a:r>
             <a:endParaRPr lang="en-US" sz="1300" dirty="0"/>
           </a:p>
@@ -14183,14 +15619,14 @@
       </p:sp>
       <p:sp>
         <p:nvSpPr>
-          <p:cNvPr id="17" name="Text 15"/>
-          <p:cNvSpPr/>
-          <p:nvPr/>
-        </p:nvSpPr>
-        <p:spPr>
-          <a:xfrm>
-            <a:off x="8074152" y="4023360"/>
-            <a:ext cx="2825496" cy="1097280"/>
+          <p:cNvPr id="20" name="Text 18"/>
+          <p:cNvSpPr/>
+          <p:nvPr/>
+        </p:nvSpPr>
+        <p:spPr>
+          <a:xfrm>
+            <a:off x="7799832" y="5001768"/>
+            <a:ext cx="3145536" cy="502920"/>
           </a:xfrm>
           <a:prstGeom prst="rect">
             <a:avLst/>
@@ -14216,7 +15652,7 @@
                 <a:ea typeface="Aptos" pitchFamily="34" charset="-122"/>
                 <a:cs typeface="Aptos" pitchFamily="34" charset="-120"/>
               </a:rPr>
-              <a:t>Connect the concept to public health decisions, safeguards, documentation, or implementation work.</a:t>
+              <a:t>Use the assignment to test whether you can explain the concept, apply it to a realistic public health situation, and identify what would need review before the work moves forward.</a:t>
             </a:r>
             <a:endParaRPr lang="en-US" sz="1550" dirty="0"/>
           </a:p>
@@ -14390,8 +15826,8 @@
         </p:nvSpPr>
         <p:spPr>
           <a:xfrm>
-            <a:off x="9966960" y="6537960"/>
-            <a:ext cx="1645920" cy="201168"/>
+            <a:off x="9646920" y="6537960"/>
+            <a:ext cx="1965960" cy="201168"/>
           </a:xfrm>
           <a:prstGeom prst="rect">
             <a:avLst/>
@@ -14415,7 +15851,7 @@
                 <a:ea typeface="Aptos" pitchFamily="34" charset="-122"/>
                 <a:cs typeface="Aptos" pitchFamily="34" charset="-120"/>
               </a:rPr>
-              <a:t>Â© Paula Soper</a:t>
+              <a:t>Copyright Paula Soper</a:t>
             </a:r>
             <a:endParaRPr lang="en-US" sz="800" dirty="0"/>
           </a:p>
@@ -14462,77 +15898,13 @@
       </p:sp>
       <p:sp>
         <p:nvSpPr>
-          <p:cNvPr id="8" name="Shape 6"/>
+          <p:cNvPr id="8" name="Text 6"/>
           <p:cNvSpPr/>
           <p:nvPr/>
         </p:nvSpPr>
         <p:spPr>
           <a:xfrm>
             <a:off x="640080" y="658368"/>
-            <a:ext cx="420624" cy="420624"/>
-          </a:xfrm>
-          <a:prstGeom prst="ellipse">
-            <a:avLst/>
-          </a:prstGeom>
-          <a:solidFill>
-            <a:srgbClr val="0068B7"/>
-          </a:solidFill>
-          <a:ln w="12700">
-            <a:solidFill>
-              <a:srgbClr val="0068B7"/>
-            </a:solidFill>
-            <a:prstDash val="solid"/>
-          </a:ln>
-        </p:spPr>
-      </p:sp>
-      <p:sp>
-        <p:nvSpPr>
-          <p:cNvPr id="9" name="Text 7"/>
-          <p:cNvSpPr/>
-          <p:nvPr/>
-        </p:nvSpPr>
-        <p:spPr>
-          <a:xfrm>
-            <a:off x="640080" y="731520"/>
-            <a:ext cx="420624" cy="164592"/>
-          </a:xfrm>
-          <a:prstGeom prst="rect">
-            <a:avLst/>
-          </a:prstGeom>
-          <a:noFill/>
-          <a:ln/>
-        </p:spPr>
-        <p:txBody>
-          <a:bodyPr wrap="square" lIns="0" tIns="0" rIns="0" bIns="0" rtlCol="0" anchor="ctr"/>
-          <a:lstStyle/>
-          <a:p>
-            <a:pPr algn="ctr" indent="0" marL="0">
-              <a:buNone/>
-            </a:pPr>
-            <a:r>
-              <a:rPr lang="en-US" sz="1100" b="1" dirty="0">
-                <a:solidFill>
-                  <a:srgbClr val="FFFFFF"/>
-                </a:solidFill>
-                <a:latin typeface="Aptos" pitchFamily="34" charset="0"/>
-                <a:ea typeface="Aptos" pitchFamily="34" charset="-122"/>
-                <a:cs typeface="Aptos" pitchFamily="34" charset="-120"/>
-              </a:rPr>
-              <a:t>2</a:t>
-            </a:r>
-            <a:endParaRPr lang="en-US" sz="1100" dirty="0"/>
-          </a:p>
-        </p:txBody>
-      </p:sp>
-      <p:sp>
-        <p:nvSpPr>
-          <p:cNvPr id="10" name="Text 8"/>
-          <p:cNvSpPr/>
-          <p:nvPr/>
-        </p:nvSpPr>
-        <p:spPr>
-          <a:xfrm>
-            <a:off x="640080" y="621792"/>
             <a:ext cx="10881360" cy="713232"/>
           </a:xfrm>
           <a:prstGeom prst="rect">
@@ -14567,14 +15939,14 @@
       </p:sp>
       <p:sp>
         <p:nvSpPr>
-          <p:cNvPr id="11" name="Text 9"/>
+          <p:cNvPr id="9" name="Text 7"/>
           <p:cNvSpPr/>
           <p:nvPr/>
         </p:nvSpPr>
         <p:spPr>
           <a:xfrm>
             <a:off x="868680" y="1508760"/>
-            <a:ext cx="6537960" cy="4160520"/>
+            <a:ext cx="6309360" cy="4160520"/>
           </a:xfrm>
           <a:prstGeom prst="rect">
             <a:avLst/>
@@ -14633,18 +16005,18 @@
       </p:sp>
       <p:sp>
         <p:nvSpPr>
-          <p:cNvPr id="12" name="Shape 10"/>
-          <p:cNvSpPr/>
-          <p:nvPr/>
-        </p:nvSpPr>
-        <p:spPr>
-          <a:xfrm>
-            <a:off x="7909560" y="1417320"/>
-            <a:ext cx="3154680" cy="1828800"/>
+          <p:cNvPr id="10" name="Shape 8"/>
+          <p:cNvSpPr/>
+          <p:nvPr/>
+        </p:nvSpPr>
+        <p:spPr>
+          <a:xfrm>
+            <a:off x="7635240" y="1325880"/>
+            <a:ext cx="3474720" cy="1325880"/>
           </a:xfrm>
           <a:prstGeom prst="roundRect">
             <a:avLst>
-              <a:gd name="adj" fmla="val 6000"/>
+              <a:gd name="adj" fmla="val 8276"/>
             </a:avLst>
           </a:prstGeom>
           <a:solidFill>
@@ -14660,14 +16032,14 @@
       </p:sp>
       <p:sp>
         <p:nvSpPr>
-          <p:cNvPr id="13" name="Text 11"/>
-          <p:cNvSpPr/>
-          <p:nvPr/>
-        </p:nvSpPr>
-        <p:spPr>
-          <a:xfrm>
-            <a:off x="8074152" y="1563624"/>
-            <a:ext cx="2825496" cy="256032"/>
+          <p:cNvPr id="11" name="Text 9"/>
+          <p:cNvSpPr/>
+          <p:nvPr/>
+        </p:nvSpPr>
+        <p:spPr>
+          <a:xfrm>
+            <a:off x="7799832" y="1472184"/>
+            <a:ext cx="3145536" cy="256032"/>
           </a:xfrm>
           <a:prstGeom prst="rect">
             <a:avLst/>
@@ -14691,7 +16063,7 @@
                 <a:ea typeface="Aptos" pitchFamily="34" charset="-122"/>
                 <a:cs typeface="Aptos" pitchFamily="34" charset="-120"/>
               </a:rPr>
-              <a:t>Key idea</a:t>
+              <a:t>Core concept</a:t>
             </a:r>
             <a:endParaRPr lang="en-US" sz="1300" dirty="0"/>
           </a:p>
@@ -14699,14 +16071,14 @@
       </p:sp>
       <p:sp>
         <p:nvSpPr>
-          <p:cNvPr id="14" name="Text 12"/>
-          <p:cNvSpPr/>
-          <p:nvPr/>
-        </p:nvSpPr>
-        <p:spPr>
-          <a:xfrm>
-            <a:off x="8074152" y="1920240"/>
-            <a:ext cx="2825496" cy="1188720"/>
+          <p:cNvPr id="12" name="Text 10"/>
+          <p:cNvSpPr/>
+          <p:nvPr/>
+        </p:nvSpPr>
+        <p:spPr>
+          <a:xfrm>
+            <a:off x="7799832" y="1828800"/>
+            <a:ext cx="3145536" cy="685800"/>
           </a:xfrm>
           <a:prstGeom prst="rect">
             <a:avLst/>
@@ -14740,18 +16112,159 @@
       </p:sp>
       <p:sp>
         <p:nvSpPr>
-          <p:cNvPr id="15" name="Shape 13"/>
-          <p:cNvSpPr/>
-          <p:nvPr/>
-        </p:nvSpPr>
-        <p:spPr>
-          <a:xfrm>
-            <a:off x="7909560" y="3520440"/>
-            <a:ext cx="3154680" cy="1737360"/>
+          <p:cNvPr id="13" name="Shape 11"/>
+          <p:cNvSpPr/>
+          <p:nvPr/>
+        </p:nvSpPr>
+        <p:spPr>
+          <a:xfrm>
+            <a:off x="7635240" y="2788920"/>
+            <a:ext cx="3474720" cy="1536192"/>
           </a:xfrm>
           <a:prstGeom prst="roundRect">
             <a:avLst>
-              <a:gd name="adj" fmla="val 6316"/>
+              <a:gd name="adj" fmla="val 7143"/>
+            </a:avLst>
+          </a:prstGeom>
+          <a:solidFill>
+            <a:srgbClr val="FFFFFF">
+              <a:alpha val="88000"/>
+            </a:srgbClr>
+          </a:solidFill>
+          <a:ln w="12700">
+            <a:solidFill>
+              <a:srgbClr val="D6E8F2"/>
+            </a:solidFill>
+            <a:prstDash val="solid"/>
+          </a:ln>
+        </p:spPr>
+      </p:sp>
+      <p:sp>
+        <p:nvSpPr>
+          <p:cNvPr id="14" name="Shape 12"/>
+          <p:cNvSpPr/>
+          <p:nvPr/>
+        </p:nvSpPr>
+        <p:spPr>
+          <a:xfrm>
+            <a:off x="8074152" y="3291840"/>
+            <a:ext cx="2596896" cy="749808"/>
+          </a:xfrm>
+          <a:prstGeom prst="rect">
+            <a:avLst/>
+          </a:prstGeom>
+          <a:solidFill>
+            <a:srgbClr val="EAF6F8"/>
+          </a:solidFill>
+          <a:ln w="12700">
+            <a:solidFill>
+              <a:srgbClr val="8ABBD8"/>
+            </a:solidFill>
+            <a:prstDash val="solid"/>
+          </a:ln>
+        </p:spPr>
+      </p:sp>
+      <p:sp>
+        <p:nvSpPr>
+          <p:cNvPr id="15" name="Shape 13"/>
+          <p:cNvSpPr/>
+          <p:nvPr/>
+        </p:nvSpPr>
+        <p:spPr>
+          <a:xfrm>
+            <a:off x="8202168" y="3721608"/>
+            <a:ext cx="2340864" cy="0"/>
+          </a:xfrm>
+          <a:prstGeom prst="line">
+            <a:avLst/>
+          </a:prstGeom>
+          <a:noFill/>
+          <a:ln w="19050">
+            <a:solidFill>
+              <a:srgbClr val="0068B7"/>
+            </a:solidFill>
+            <a:prstDash val="solid"/>
+          </a:ln>
+        </p:spPr>
+      </p:sp>
+      <p:sp>
+        <p:nvSpPr>
+          <p:cNvPr id="16" name="Shape 14"/>
+          <p:cNvSpPr/>
+          <p:nvPr/>
+        </p:nvSpPr>
+        <p:spPr>
+          <a:xfrm>
+            <a:off x="9198864" y="4206240"/>
+            <a:ext cx="347472" cy="347472"/>
+          </a:xfrm>
+          <a:prstGeom prst="ellipse">
+            <a:avLst/>
+          </a:prstGeom>
+          <a:solidFill>
+            <a:srgbClr val="2F8A28"/>
+          </a:solidFill>
+          <a:ln w="12700">
+            <a:solidFill>
+              <a:srgbClr val="2F8A28"/>
+            </a:solidFill>
+            <a:prstDash val="solid"/>
+          </a:ln>
+        </p:spPr>
+      </p:sp>
+      <p:sp>
+        <p:nvSpPr>
+          <p:cNvPr id="17" name="Text 15"/>
+          <p:cNvSpPr/>
+          <p:nvPr/>
+        </p:nvSpPr>
+        <p:spPr>
+          <a:xfrm>
+            <a:off x="7909560" y="3977640"/>
+            <a:ext cx="2926080" cy="182880"/>
+          </a:xfrm>
+          <a:prstGeom prst="rect">
+            <a:avLst/>
+          </a:prstGeom>
+          <a:noFill/>
+          <a:ln/>
+        </p:spPr>
+        <p:txBody>
+          <a:bodyPr wrap="square" lIns="0" tIns="0" rIns="0" bIns="0" rtlCol="0" anchor="ctr"/>
+          <a:lstStyle/>
+          <a:p>
+            <a:pPr algn="ctr" indent="0" marL="0">
+              <a:buNone/>
+            </a:pPr>
+            <a:r>
+              <a:rPr lang="en-US" sz="1000" dirty="0">
+                <a:solidFill>
+                  <a:srgbClr val="003A63"/>
+                </a:solidFill>
+                <a:latin typeface="Aptos" pitchFamily="34" charset="0"/>
+                <a:ea typeface="Aptos" pitchFamily="34" charset="-122"/>
+                <a:cs typeface="Aptos" pitchFamily="34" charset="-120"/>
+              </a:rPr>
+              <a:t>Concept to action</a:t>
+            </a:r>
+            <a:endParaRPr lang="en-US" sz="1000" dirty="0"/>
+          </a:p>
+        </p:txBody>
+      </p:sp>
+      <p:sp>
+        <p:nvSpPr>
+          <p:cNvPr id="18" name="Shape 16"/>
+          <p:cNvSpPr/>
+          <p:nvPr/>
+        </p:nvSpPr>
+        <p:spPr>
+          <a:xfrm>
+            <a:off x="7635240" y="4498848"/>
+            <a:ext cx="3474720" cy="1143000"/>
+          </a:xfrm>
+          <a:prstGeom prst="roundRect">
+            <a:avLst>
+              <a:gd name="adj" fmla="val 9600"/>
             </a:avLst>
           </a:prstGeom>
           <a:solidFill>
@@ -14767,14 +16280,14 @@
       </p:sp>
       <p:sp>
         <p:nvSpPr>
-          <p:cNvPr id="16" name="Text 14"/>
-          <p:cNvSpPr/>
-          <p:nvPr/>
-        </p:nvSpPr>
-        <p:spPr>
-          <a:xfrm>
-            <a:off x="8074152" y="3666744"/>
-            <a:ext cx="2825496" cy="256032"/>
+          <p:cNvPr id="19" name="Text 17"/>
+          <p:cNvSpPr/>
+          <p:nvPr/>
+        </p:nvSpPr>
+        <p:spPr>
+          <a:xfrm>
+            <a:off x="7799832" y="4645152"/>
+            <a:ext cx="3145536" cy="256032"/>
           </a:xfrm>
           <a:prstGeom prst="rect">
             <a:avLst/>
@@ -14798,7 +16311,7 @@
                 <a:ea typeface="Aptos" pitchFamily="34" charset="-122"/>
                 <a:cs typeface="Aptos" pitchFamily="34" charset="-120"/>
               </a:rPr>
-              <a:t>Use this for</a:t>
+              <a:t>Apply it</a:t>
             </a:r>
             <a:endParaRPr lang="en-US" sz="1300" dirty="0"/>
           </a:p>
@@ -14806,14 +16319,14 @@
       </p:sp>
       <p:sp>
         <p:nvSpPr>
-          <p:cNvPr id="17" name="Text 15"/>
-          <p:cNvSpPr/>
-          <p:nvPr/>
-        </p:nvSpPr>
-        <p:spPr>
-          <a:xfrm>
-            <a:off x="8074152" y="4023360"/>
-            <a:ext cx="2825496" cy="1097280"/>
+          <p:cNvPr id="20" name="Text 18"/>
+          <p:cNvSpPr/>
+          <p:nvPr/>
+        </p:nvSpPr>
+        <p:spPr>
+          <a:xfrm>
+            <a:off x="7799832" y="5001768"/>
+            <a:ext cx="3145536" cy="502920"/>
           </a:xfrm>
           <a:prstGeom prst="rect">
             <a:avLst/>
@@ -14839,7 +16352,7 @@
                 <a:ea typeface="Aptos" pitchFamily="34" charset="-122"/>
                 <a:cs typeface="Aptos" pitchFamily="34" charset="-120"/>
               </a:rPr>
-              <a:t>Connect the concept to public health decisions, safeguards, documentation, or implementation work.</a:t>
+              <a:t>Connect the concept to public health purpose, responsible use, required safeguards, documentation, and the next action a department should take.</a:t>
             </a:r>
             <a:endParaRPr lang="en-US" sz="1550" dirty="0"/>
           </a:p>
@@ -15013,8 +16526,8 @@
         </p:nvSpPr>
         <p:spPr>
           <a:xfrm>
-            <a:off x="9966960" y="6537960"/>
-            <a:ext cx="1645920" cy="201168"/>
+            <a:off x="9646920" y="6537960"/>
+            <a:ext cx="1965960" cy="201168"/>
           </a:xfrm>
           <a:prstGeom prst="rect">
             <a:avLst/>
@@ -15038,7 +16551,7 @@
                 <a:ea typeface="Aptos" pitchFamily="34" charset="-122"/>
                 <a:cs typeface="Aptos" pitchFamily="34" charset="-120"/>
               </a:rPr>
-              <a:t>Â© Paula Soper</a:t>
+              <a:t>Copyright Paula Soper</a:t>
             </a:r>
             <a:endParaRPr lang="en-US" sz="800" dirty="0"/>
           </a:p>
@@ -15085,14 +16598,257 @@
       </p:sp>
       <p:sp>
         <p:nvSpPr>
-          <p:cNvPr id="8" name="Shape 6"/>
+          <p:cNvPr id="8" name="Text 6"/>
           <p:cNvSpPr/>
           <p:nvPr/>
         </p:nvSpPr>
         <p:spPr>
           <a:xfrm>
             <a:off x="640080" y="658368"/>
-            <a:ext cx="420624" cy="420624"/>
+            <a:ext cx="10881360" cy="713232"/>
+          </a:xfrm>
+          <a:prstGeom prst="rect">
+            <a:avLst/>
+          </a:prstGeom>
+          <a:noFill/>
+          <a:ln/>
+        </p:spPr>
+        <p:txBody>
+          <a:bodyPr wrap="square" lIns="0" tIns="0" rIns="0" bIns="0" rtlCol="0" anchor="ctr">
+            <a:normAutofit/>
+          </a:bodyPr>
+          <a:lstStyle/>
+          <a:p>
+            <a:pPr indent="0" marL="0">
+              <a:buNone/>
+            </a:pPr>
+            <a:r>
+              <a:rPr lang="en-US" sz="3400" b="1" dirty="0">
+                <a:solidFill>
+                  <a:srgbClr val="003A63"/>
+                </a:solidFill>
+                <a:latin typeface="Aptos Display" pitchFamily="34" charset="0"/>
+                <a:ea typeface="Aptos Display" pitchFamily="34" charset="-122"/>
+                <a:cs typeface="Aptos Display" pitchFamily="34" charset="-120"/>
+              </a:rPr>
+              <a:t>Jurisdiction and Agency Policy Note</a:t>
+            </a:r>
+            <a:endParaRPr lang="en-US" sz="3400" dirty="0"/>
+          </a:p>
+        </p:txBody>
+      </p:sp>
+      <p:sp>
+        <p:nvSpPr>
+          <p:cNvPr id="9" name="Text 7"/>
+          <p:cNvSpPr/>
+          <p:nvPr/>
+        </p:nvSpPr>
+        <p:spPr>
+          <a:xfrm>
+            <a:off x="868680" y="1508760"/>
+            <a:ext cx="6309360" cy="4160520"/>
+          </a:xfrm>
+          <a:prstGeom prst="rect">
+            <a:avLst/>
+          </a:prstGeom>
+          <a:noFill/>
+          <a:ln/>
+        </p:spPr>
+        <p:txBody>
+          <a:bodyPr wrap="square" lIns="635" tIns="635" rIns="635" bIns="635" rtlCol="0" anchor="t">
+            <a:normAutofit/>
+          </a:bodyPr>
+          <a:lstStyle/>
+          <a:p>
+            <a:r>
+              <a:rPr lang="en-US" sz="2100" dirty="0">
+                <a:solidFill>
+                  <a:srgbClr val="17364A"/>
+                </a:solidFill>
+                <a:latin typeface="Aptos" pitchFamily="34" charset="0"/>
+                <a:ea typeface="Aptos" pitchFamily="34" charset="-122"/>
+                <a:cs typeface="Aptos" pitchFamily="34" charset="-120"/>
+              </a:rPr>
+              <a:t>This national-level module is intended for training and planning purposes.</a:t>
+            </a:r>
+            <a:endParaRPr lang="en-US" sz="2100" dirty="0"/>
+          </a:p>
+          <a:p>
+            <a:r>
+              <a:rPr lang="en-US" sz="2100" dirty="0">
+                <a:solidFill>
+                  <a:srgbClr val="17364A"/>
+                </a:solidFill>
+                <a:latin typeface="Aptos" pitchFamily="34" charset="0"/>
+                <a:ea typeface="Aptos" pitchFamily="34" charset="-122"/>
+                <a:cs typeface="Aptos" pitchFamily="34" charset="-120"/>
+              </a:rPr>
+              <a:t>It does not replace legal, privacy, procurement, civil rights, records, or agency policy review.</a:t>
+            </a:r>
+            <a:endParaRPr lang="en-US" sz="2100" dirty="0"/>
+          </a:p>
+          <a:p>
+            <a:r>
+              <a:rPr lang="en-US" sz="2100" dirty="0">
+                <a:solidFill>
+                  <a:srgbClr val="17364A"/>
+                </a:solidFill>
+                <a:latin typeface="Aptos" pitchFamily="34" charset="0"/>
+                <a:ea typeface="Aptos" pitchFamily="34" charset="-122"/>
+                <a:cs typeface="Aptos" pitchFamily="34" charset="-120"/>
+              </a:rPr>
+              <a:t>Learners should confirm applicable requirements in their own jurisdiction and organization before.</a:t>
+            </a:r>
+            <a:endParaRPr lang="en-US" sz="2100" dirty="0"/>
+          </a:p>
+        </p:txBody>
+      </p:sp>
+      <p:sp>
+        <p:nvSpPr>
+          <p:cNvPr id="10" name="Shape 8"/>
+          <p:cNvSpPr/>
+          <p:nvPr/>
+        </p:nvSpPr>
+        <p:spPr>
+          <a:xfrm>
+            <a:off x="7635240" y="1325880"/>
+            <a:ext cx="3474720" cy="1325880"/>
+          </a:xfrm>
+          <a:prstGeom prst="roundRect">
+            <a:avLst>
+              <a:gd name="adj" fmla="val 8276"/>
+            </a:avLst>
+          </a:prstGeom>
+          <a:solidFill>
+            <a:srgbClr val="EEF8ED"/>
+          </a:solidFill>
+          <a:ln w="12700">
+            <a:solidFill>
+              <a:srgbClr val="B9D7E6"/>
+            </a:solidFill>
+            <a:prstDash val="solid"/>
+          </a:ln>
+        </p:spPr>
+      </p:sp>
+      <p:sp>
+        <p:nvSpPr>
+          <p:cNvPr id="11" name="Text 9"/>
+          <p:cNvSpPr/>
+          <p:nvPr/>
+        </p:nvSpPr>
+        <p:spPr>
+          <a:xfrm>
+            <a:off x="7799832" y="1472184"/>
+            <a:ext cx="3145536" cy="256032"/>
+          </a:xfrm>
+          <a:prstGeom prst="rect">
+            <a:avLst/>
+          </a:prstGeom>
+          <a:noFill/>
+          <a:ln/>
+        </p:spPr>
+        <p:txBody>
+          <a:bodyPr wrap="square" lIns="0" tIns="0" rIns="0" bIns="0" rtlCol="0" anchor="ctr"/>
+          <a:lstStyle/>
+          <a:p>
+            <a:pPr indent="0" marL="0">
+              <a:buNone/>
+            </a:pPr>
+            <a:r>
+              <a:rPr lang="en-US" sz="1300" b="1" dirty="0">
+                <a:solidFill>
+                  <a:srgbClr val="0068B7"/>
+                </a:solidFill>
+                <a:latin typeface="Aptos" pitchFamily="34" charset="0"/>
+                <a:ea typeface="Aptos" pitchFamily="34" charset="-122"/>
+                <a:cs typeface="Aptos" pitchFamily="34" charset="-120"/>
+              </a:rPr>
+              <a:t>Governance lens</a:t>
+            </a:r>
+            <a:endParaRPr lang="en-US" sz="1300" dirty="0"/>
+          </a:p>
+        </p:txBody>
+      </p:sp>
+      <p:sp>
+        <p:nvSpPr>
+          <p:cNvPr id="12" name="Text 10"/>
+          <p:cNvSpPr/>
+          <p:nvPr/>
+        </p:nvSpPr>
+        <p:spPr>
+          <a:xfrm>
+            <a:off x="7799832" y="1828800"/>
+            <a:ext cx="3145536" cy="685800"/>
+          </a:xfrm>
+          <a:prstGeom prst="rect">
+            <a:avLst/>
+          </a:prstGeom>
+          <a:noFill/>
+          <a:ln/>
+        </p:spPr>
+        <p:txBody>
+          <a:bodyPr wrap="square" lIns="0" tIns="0" rIns="0" bIns="0" rtlCol="0" anchor="t">
+            <a:normAutofit/>
+          </a:bodyPr>
+          <a:lstStyle/>
+          <a:p>
+            <a:pPr indent="0" marL="0">
+              <a:buNone/>
+            </a:pPr>
+            <a:r>
+              <a:rPr lang="en-US" sz="1550" dirty="0">
+                <a:solidFill>
+                  <a:srgbClr val="17364A"/>
+                </a:solidFill>
+                <a:latin typeface="Aptos" pitchFamily="34" charset="0"/>
+                <a:ea typeface="Aptos" pitchFamily="34" charset="-122"/>
+                <a:cs typeface="Aptos" pitchFamily="34" charset="-120"/>
+              </a:rPr>
+              <a:t>This national-level module is intended for training and planning purposes.</a:t>
+            </a:r>
+            <a:endParaRPr lang="en-US" sz="1550" dirty="0"/>
+          </a:p>
+        </p:txBody>
+      </p:sp>
+      <p:sp>
+        <p:nvSpPr>
+          <p:cNvPr id="13" name="Shape 11"/>
+          <p:cNvSpPr/>
+          <p:nvPr/>
+        </p:nvSpPr>
+        <p:spPr>
+          <a:xfrm>
+            <a:off x="7635240" y="2788920"/>
+            <a:ext cx="3474720" cy="1536192"/>
+          </a:xfrm>
+          <a:prstGeom prst="roundRect">
+            <a:avLst>
+              <a:gd name="adj" fmla="val 7143"/>
+            </a:avLst>
+          </a:prstGeom>
+          <a:solidFill>
+            <a:srgbClr val="FFFFFF">
+              <a:alpha val="88000"/>
+            </a:srgbClr>
+          </a:solidFill>
+          <a:ln w="12700">
+            <a:solidFill>
+              <a:srgbClr val="D6E8F2"/>
+            </a:solidFill>
+            <a:prstDash val="solid"/>
+          </a:ln>
+        </p:spPr>
+      </p:sp>
+      <p:sp>
+        <p:nvSpPr>
+          <p:cNvPr id="14" name="Shape 12"/>
+          <p:cNvSpPr/>
+          <p:nvPr/>
+        </p:nvSpPr>
+        <p:spPr>
+          <a:xfrm>
+            <a:off x="7891272" y="3108960"/>
+            <a:ext cx="566928" cy="566928"/>
           </a:xfrm>
           <a:prstGeom prst="ellipse">
             <a:avLst/>
@@ -15110,172 +16866,24 @@
       </p:sp>
       <p:sp>
         <p:nvSpPr>
-          <p:cNvPr id="9" name="Text 7"/>
-          <p:cNvSpPr/>
-          <p:nvPr/>
-        </p:nvSpPr>
-        <p:spPr>
-          <a:xfrm>
-            <a:off x="640080" y="731520"/>
-            <a:ext cx="420624" cy="164592"/>
-          </a:xfrm>
-          <a:prstGeom prst="rect">
-            <a:avLst/>
-          </a:prstGeom>
-          <a:noFill/>
-          <a:ln/>
-        </p:spPr>
-        <p:txBody>
-          <a:bodyPr wrap="square" lIns="0" tIns="0" rIns="0" bIns="0" rtlCol="0" anchor="ctr"/>
-          <a:lstStyle/>
-          <a:p>
-            <a:pPr algn="ctr" indent="0" marL="0">
-              <a:buNone/>
-            </a:pPr>
-            <a:r>
-              <a:rPr lang="en-US" sz="1100" b="1" dirty="0">
-                <a:solidFill>
-                  <a:srgbClr val="FFFFFF"/>
-                </a:solidFill>
-                <a:latin typeface="Aptos" pitchFamily="34" charset="0"/>
-                <a:ea typeface="Aptos" pitchFamily="34" charset="-122"/>
-                <a:cs typeface="Aptos" pitchFamily="34" charset="-120"/>
-              </a:rPr>
-              <a:t>3</a:t>
-            </a:r>
-            <a:endParaRPr lang="en-US" sz="1100" dirty="0"/>
-          </a:p>
-        </p:txBody>
-      </p:sp>
-      <p:sp>
-        <p:nvSpPr>
-          <p:cNvPr id="10" name="Text 8"/>
-          <p:cNvSpPr/>
-          <p:nvPr/>
-        </p:nvSpPr>
-        <p:spPr>
-          <a:xfrm>
-            <a:off x="640080" y="621792"/>
-            <a:ext cx="10881360" cy="713232"/>
-          </a:xfrm>
-          <a:prstGeom prst="rect">
-            <a:avLst/>
-          </a:prstGeom>
-          <a:noFill/>
-          <a:ln/>
-        </p:spPr>
-        <p:txBody>
-          <a:bodyPr wrap="square" lIns="0" tIns="0" rIns="0" bIns="0" rtlCol="0" anchor="ctr">
-            <a:normAutofit/>
-          </a:bodyPr>
-          <a:lstStyle/>
-          <a:p>
-            <a:pPr indent="0" marL="0">
-              <a:buNone/>
-            </a:pPr>
-            <a:r>
-              <a:rPr lang="en-US" sz="3400" b="1" dirty="0">
-                <a:solidFill>
-                  <a:srgbClr val="003A63"/>
-                </a:solidFill>
-                <a:latin typeface="Aptos Display" pitchFamily="34" charset="0"/>
-                <a:ea typeface="Aptos Display" pitchFamily="34" charset="-122"/>
-                <a:cs typeface="Aptos Display" pitchFamily="34" charset="-120"/>
-              </a:rPr>
-              <a:t>Jurisdiction and Agency Policy Note</a:t>
-            </a:r>
-            <a:endParaRPr lang="en-US" sz="3400" dirty="0"/>
-          </a:p>
-        </p:txBody>
-      </p:sp>
-      <p:sp>
-        <p:nvSpPr>
-          <p:cNvPr id="11" name="Text 9"/>
-          <p:cNvSpPr/>
-          <p:nvPr/>
-        </p:nvSpPr>
-        <p:spPr>
-          <a:xfrm>
-            <a:off x="868680" y="1508760"/>
-            <a:ext cx="6537960" cy="4160520"/>
-          </a:xfrm>
-          <a:prstGeom prst="rect">
-            <a:avLst/>
-          </a:prstGeom>
-          <a:noFill/>
-          <a:ln/>
-        </p:spPr>
-        <p:txBody>
-          <a:bodyPr wrap="square" lIns="635" tIns="635" rIns="635" bIns="635" rtlCol="0" anchor="t">
-            <a:normAutofit/>
-          </a:bodyPr>
-          <a:lstStyle/>
-          <a:p>
-            <a:r>
-              <a:rPr lang="en-US" sz="2100" dirty="0">
-                <a:solidFill>
-                  <a:srgbClr val="17364A"/>
-                </a:solidFill>
-                <a:latin typeface="Aptos" pitchFamily="34" charset="0"/>
-                <a:ea typeface="Aptos" pitchFamily="34" charset="-122"/>
-                <a:cs typeface="Aptos" pitchFamily="34" charset="-120"/>
-              </a:rPr>
-              <a:t>This national-level module is intended for training and planning purposes.</a:t>
-            </a:r>
-            <a:endParaRPr lang="en-US" sz="2100" dirty="0"/>
-          </a:p>
-          <a:p>
-            <a:r>
-              <a:rPr lang="en-US" sz="2100" dirty="0">
-                <a:solidFill>
-                  <a:srgbClr val="17364A"/>
-                </a:solidFill>
-                <a:latin typeface="Aptos" pitchFamily="34" charset="0"/>
-                <a:ea typeface="Aptos" pitchFamily="34" charset="-122"/>
-                <a:cs typeface="Aptos" pitchFamily="34" charset="-120"/>
-              </a:rPr>
-              <a:t>It does not replace legal, privacy, procurement, civil rights, records, or agency policy review.</a:t>
-            </a:r>
-            <a:endParaRPr lang="en-US" sz="2100" dirty="0"/>
-          </a:p>
-          <a:p>
-            <a:r>
-              <a:rPr lang="en-US" sz="2100" dirty="0">
-                <a:solidFill>
-                  <a:srgbClr val="17364A"/>
-                </a:solidFill>
-                <a:latin typeface="Aptos" pitchFamily="34" charset="0"/>
-                <a:ea typeface="Aptos" pitchFamily="34" charset="-122"/>
-                <a:cs typeface="Aptos" pitchFamily="34" charset="-120"/>
-              </a:rPr>
-              <a:t>Learners should confirm applicable requirements in their own jurisdiction and organization before.</a:t>
-            </a:r>
-            <a:endParaRPr lang="en-US" sz="2100" dirty="0"/>
-          </a:p>
-        </p:txBody>
-      </p:sp>
-      <p:sp>
-        <p:nvSpPr>
-          <p:cNvPr id="12" name="Shape 10"/>
-          <p:cNvSpPr/>
-          <p:nvPr/>
-        </p:nvSpPr>
-        <p:spPr>
-          <a:xfrm>
-            <a:off x="7909560" y="1417320"/>
-            <a:ext cx="3154680" cy="1828800"/>
-          </a:xfrm>
-          <a:prstGeom prst="roundRect">
-            <a:avLst>
-              <a:gd name="adj" fmla="val 6000"/>
-            </a:avLst>
+          <p:cNvPr id="15" name="Shape 13"/>
+          <p:cNvSpPr/>
+          <p:nvPr/>
+        </p:nvSpPr>
+        <p:spPr>
+          <a:xfrm>
+            <a:off x="10287000" y="3108960"/>
+            <a:ext cx="566928" cy="566928"/>
+          </a:xfrm>
+          <a:prstGeom prst="ellipse">
+            <a:avLst/>
           </a:prstGeom>
           <a:solidFill>
-            <a:srgbClr val="EEF8ED"/>
+            <a:srgbClr val="2F8A28"/>
           </a:solidFill>
           <a:ln w="12700">
             <a:solidFill>
-              <a:srgbClr val="B9D7E6"/>
+              <a:srgbClr val="2F8A28"/>
             </a:solidFill>
             <a:prstDash val="solid"/>
           </a:ln>
@@ -15283,14 +16891,108 @@
       </p:sp>
       <p:sp>
         <p:nvSpPr>
-          <p:cNvPr id="13" name="Text 11"/>
-          <p:cNvSpPr/>
-          <p:nvPr/>
-        </p:nvSpPr>
-        <p:spPr>
-          <a:xfrm>
-            <a:off x="8074152" y="1563624"/>
-            <a:ext cx="2825496" cy="256032"/>
+          <p:cNvPr id="16" name="Shape 14"/>
+          <p:cNvSpPr/>
+          <p:nvPr/>
+        </p:nvSpPr>
+        <p:spPr>
+          <a:xfrm>
+            <a:off x="9089136" y="3456432"/>
+            <a:ext cx="566928" cy="566928"/>
+          </a:xfrm>
+          <a:prstGeom prst="ellipse">
+            <a:avLst/>
+          </a:prstGeom>
+          <a:solidFill>
+            <a:srgbClr val="6A4CA3"/>
+          </a:solidFill>
+          <a:ln w="12700">
+            <a:solidFill>
+              <a:srgbClr val="6A4CA3"/>
+            </a:solidFill>
+            <a:prstDash val="solid"/>
+          </a:ln>
+        </p:spPr>
+      </p:sp>
+      <p:sp>
+        <p:nvSpPr>
+          <p:cNvPr id="17" name="Shape 15"/>
+          <p:cNvSpPr/>
+          <p:nvPr/>
+        </p:nvSpPr>
+        <p:spPr>
+          <a:xfrm>
+            <a:off x="8385048" y="3419856"/>
+            <a:ext cx="1975104" cy="0"/>
+          </a:xfrm>
+          <a:prstGeom prst="line">
+            <a:avLst/>
+          </a:prstGeom>
+          <a:noFill/>
+          <a:ln w="25400">
+            <a:solidFill>
+              <a:srgbClr val="8ABBD8"/>
+            </a:solidFill>
+            <a:prstDash val="solid"/>
+          </a:ln>
+        </p:spPr>
+      </p:sp>
+      <p:sp>
+        <p:nvSpPr>
+          <p:cNvPr id="18" name="Shape 16"/>
+          <p:cNvSpPr/>
+          <p:nvPr/>
+        </p:nvSpPr>
+        <p:spPr>
+          <a:xfrm>
+            <a:off x="8202168" y="3630168"/>
+            <a:ext cx="1170432" cy="118872"/>
+          </a:xfrm>
+          <a:prstGeom prst="line">
+            <a:avLst/>
+          </a:prstGeom>
+          <a:noFill/>
+          <a:ln w="25400">
+            <a:solidFill>
+              <a:srgbClr val="8ABBD8"/>
+            </a:solidFill>
+            <a:prstDash val="solid"/>
+          </a:ln>
+        </p:spPr>
+      </p:sp>
+      <p:sp>
+        <p:nvSpPr>
+          <p:cNvPr id="19" name="Shape 17"/>
+          <p:cNvSpPr/>
+          <p:nvPr/>
+        </p:nvSpPr>
+        <p:spPr>
+          <a:xfrm>
+            <a:off x="10543032" y="3630168"/>
+            <a:ext cx="-1170432" cy="118872"/>
+          </a:xfrm>
+          <a:prstGeom prst="line">
+            <a:avLst/>
+          </a:prstGeom>
+          <a:noFill/>
+          <a:ln w="25400">
+            <a:solidFill>
+              <a:srgbClr val="8ABBD8"/>
+            </a:solidFill>
+            <a:prstDash val="solid"/>
+          </a:ln>
+        </p:spPr>
+      </p:sp>
+      <p:sp>
+        <p:nvSpPr>
+          <p:cNvPr id="20" name="Text 18"/>
+          <p:cNvSpPr/>
+          <p:nvPr/>
+        </p:nvSpPr>
+        <p:spPr>
+          <a:xfrm>
+            <a:off x="7863840" y="4069080"/>
+            <a:ext cx="3017520" cy="164592"/>
           </a:xfrm>
           <a:prstGeom prst="rect">
             <a:avLst/>
@@ -15302,79 +17004,38 @@
           <a:bodyPr wrap="square" lIns="0" tIns="0" rIns="0" bIns="0" rtlCol="0" anchor="ctr"/>
           <a:lstStyle/>
           <a:p>
-            <a:pPr indent="0" marL="0">
-              <a:buNone/>
-            </a:pPr>
-            <a:r>
-              <a:rPr lang="en-US" sz="1300" b="1" dirty="0">
-                <a:solidFill>
-                  <a:srgbClr val="0068B7"/>
-                </a:solidFill>
-                <a:latin typeface="Aptos" pitchFamily="34" charset="0"/>
-                <a:ea typeface="Aptos" pitchFamily="34" charset="-122"/>
-                <a:cs typeface="Aptos" pitchFamily="34" charset="-120"/>
-              </a:rPr>
-              <a:t>Key idea</a:t>
-            </a:r>
-            <a:endParaRPr lang="en-US" sz="1300" dirty="0"/>
-          </a:p>
-        </p:txBody>
-      </p:sp>
-      <p:sp>
-        <p:nvSpPr>
-          <p:cNvPr id="14" name="Text 12"/>
-          <p:cNvSpPr/>
-          <p:nvPr/>
-        </p:nvSpPr>
-        <p:spPr>
-          <a:xfrm>
-            <a:off x="8074152" y="1920240"/>
-            <a:ext cx="2825496" cy="1188720"/>
-          </a:xfrm>
-          <a:prstGeom prst="rect">
-            <a:avLst/>
-          </a:prstGeom>
-          <a:noFill/>
-          <a:ln/>
-        </p:spPr>
-        <p:txBody>
-          <a:bodyPr wrap="square" lIns="0" tIns="0" rIns="0" bIns="0" rtlCol="0" anchor="t">
-            <a:normAutofit/>
-          </a:bodyPr>
-          <a:lstStyle/>
-          <a:p>
-            <a:pPr indent="0" marL="0">
-              <a:buNone/>
-            </a:pPr>
-            <a:r>
-              <a:rPr lang="en-US" sz="1550" dirty="0">
-                <a:solidFill>
-                  <a:srgbClr val="17364A"/>
-                </a:solidFill>
-                <a:latin typeface="Aptos" pitchFamily="34" charset="0"/>
-                <a:ea typeface="Aptos" pitchFamily="34" charset="-122"/>
-                <a:cs typeface="Aptos" pitchFamily="34" charset="-120"/>
-              </a:rPr>
-              <a:t>This national-level module is intended for training and planning purposes.</a:t>
-            </a:r>
-            <a:endParaRPr lang="en-US" sz="1550" dirty="0"/>
-          </a:p>
-        </p:txBody>
-      </p:sp>
-      <p:sp>
-        <p:nvSpPr>
-          <p:cNvPr id="15" name="Shape 13"/>
-          <p:cNvSpPr/>
-          <p:nvPr/>
-        </p:nvSpPr>
-        <p:spPr>
-          <a:xfrm>
-            <a:off x="7909560" y="3520440"/>
-            <a:ext cx="3154680" cy="1737360"/>
+            <a:pPr algn="ctr" indent="0" marL="0">
+              <a:buNone/>
+            </a:pPr>
+            <a:r>
+              <a:rPr lang="en-US" sz="900" b="1" dirty="0">
+                <a:solidFill>
+                  <a:srgbClr val="003A63"/>
+                </a:solidFill>
+                <a:latin typeface="Aptos" pitchFamily="34" charset="0"/>
+                <a:ea typeface="Aptos" pitchFamily="34" charset="-122"/>
+                <a:cs typeface="Aptos" pitchFamily="34" charset="-120"/>
+              </a:rPr>
+              <a:t>Decision rights</a:t>
+            </a:r>
+            <a:endParaRPr lang="en-US" sz="900" dirty="0"/>
+          </a:p>
+        </p:txBody>
+      </p:sp>
+      <p:sp>
+        <p:nvSpPr>
+          <p:cNvPr id="21" name="Shape 19"/>
+          <p:cNvSpPr/>
+          <p:nvPr/>
+        </p:nvSpPr>
+        <p:spPr>
+          <a:xfrm>
+            <a:off x="7635240" y="4498848"/>
+            <a:ext cx="3474720" cy="1143000"/>
           </a:xfrm>
           <a:prstGeom prst="roundRect">
             <a:avLst>
-              <a:gd name="adj" fmla="val 6316"/>
+              <a:gd name="adj" fmla="val 9600"/>
             </a:avLst>
           </a:prstGeom>
           <a:solidFill>
@@ -15390,14 +17051,14 @@
       </p:sp>
       <p:sp>
         <p:nvSpPr>
-          <p:cNvPr id="16" name="Text 14"/>
-          <p:cNvSpPr/>
-          <p:nvPr/>
-        </p:nvSpPr>
-        <p:spPr>
-          <a:xfrm>
-            <a:off x="8074152" y="3666744"/>
-            <a:ext cx="2825496" cy="256032"/>
+          <p:cNvPr id="22" name="Text 20"/>
+          <p:cNvSpPr/>
+          <p:nvPr/>
+        </p:nvSpPr>
+        <p:spPr>
+          <a:xfrm>
+            <a:off x="7799832" y="4645152"/>
+            <a:ext cx="3145536" cy="256032"/>
           </a:xfrm>
           <a:prstGeom prst="rect">
             <a:avLst/>
@@ -15421,7 +17082,7 @@
                 <a:ea typeface="Aptos" pitchFamily="34" charset="-122"/>
                 <a:cs typeface="Aptos" pitchFamily="34" charset="-120"/>
               </a:rPr>
-              <a:t>Use this for</a:t>
+              <a:t>What to document</a:t>
             </a:r>
             <a:endParaRPr lang="en-US" sz="1300" dirty="0"/>
           </a:p>
@@ -15429,14 +17090,14 @@
       </p:sp>
       <p:sp>
         <p:nvSpPr>
-          <p:cNvPr id="17" name="Text 15"/>
-          <p:cNvSpPr/>
-          <p:nvPr/>
-        </p:nvSpPr>
-        <p:spPr>
-          <a:xfrm>
-            <a:off x="8074152" y="4023360"/>
-            <a:ext cx="2825496" cy="1097280"/>
+          <p:cNvPr id="23" name="Text 21"/>
+          <p:cNvSpPr/>
+          <p:nvPr/>
+        </p:nvSpPr>
+        <p:spPr>
+          <a:xfrm>
+            <a:off x="7799832" y="5001768"/>
+            <a:ext cx="3145536" cy="502920"/>
           </a:xfrm>
           <a:prstGeom prst="rect">
             <a:avLst/>
@@ -15462,7 +17123,7 @@
                 <a:ea typeface="Aptos" pitchFamily="34" charset="-122"/>
                 <a:cs typeface="Aptos" pitchFamily="34" charset="-120"/>
               </a:rPr>
-              <a:t>Connect the concept to public health decisions, safeguards, documentation, or implementation work.</a:t>
+              <a:t>Translate this concept into clear decision rights, review steps, documentation expectations, and escalation paths before an AI-supported workflow is approved.</a:t>
             </a:r>
             <a:endParaRPr lang="en-US" sz="1550" dirty="0"/>
           </a:p>
@@ -15636,8 +17297,8 @@
         </p:nvSpPr>
         <p:spPr>
           <a:xfrm>
-            <a:off x="9966960" y="6537960"/>
-            <a:ext cx="1645920" cy="201168"/>
+            <a:off x="9646920" y="6537960"/>
+            <a:ext cx="1965960" cy="201168"/>
           </a:xfrm>
           <a:prstGeom prst="rect">
             <a:avLst/>
@@ -15661,7 +17322,7 @@
                 <a:ea typeface="Aptos" pitchFamily="34" charset="-122"/>
                 <a:cs typeface="Aptos" pitchFamily="34" charset="-120"/>
               </a:rPr>
-              <a:t>Â© Paula Soper</a:t>
+              <a:t>Copyright Paula Soper</a:t>
             </a:r>
             <a:endParaRPr lang="en-US" sz="800" dirty="0"/>
           </a:p>
@@ -15708,77 +17369,13 @@
       </p:sp>
       <p:sp>
         <p:nvSpPr>
-          <p:cNvPr id="8" name="Shape 6"/>
+          <p:cNvPr id="8" name="Text 6"/>
           <p:cNvSpPr/>
           <p:nvPr/>
         </p:nvSpPr>
         <p:spPr>
           <a:xfrm>
             <a:off x="640080" y="658368"/>
-            <a:ext cx="420624" cy="420624"/>
-          </a:xfrm>
-          <a:prstGeom prst="ellipse">
-            <a:avLst/>
-          </a:prstGeom>
-          <a:solidFill>
-            <a:srgbClr val="0068B7"/>
-          </a:solidFill>
-          <a:ln w="12700">
-            <a:solidFill>
-              <a:srgbClr val="0068B7"/>
-            </a:solidFill>
-            <a:prstDash val="solid"/>
-          </a:ln>
-        </p:spPr>
-      </p:sp>
-      <p:sp>
-        <p:nvSpPr>
-          <p:cNvPr id="9" name="Text 7"/>
-          <p:cNvSpPr/>
-          <p:nvPr/>
-        </p:nvSpPr>
-        <p:spPr>
-          <a:xfrm>
-            <a:off x="640080" y="731520"/>
-            <a:ext cx="420624" cy="164592"/>
-          </a:xfrm>
-          <a:prstGeom prst="rect">
-            <a:avLst/>
-          </a:prstGeom>
-          <a:noFill/>
-          <a:ln/>
-        </p:spPr>
-        <p:txBody>
-          <a:bodyPr wrap="square" lIns="0" tIns="0" rIns="0" bIns="0" rtlCol="0" anchor="ctr"/>
-          <a:lstStyle/>
-          <a:p>
-            <a:pPr algn="ctr" indent="0" marL="0">
-              <a:buNone/>
-            </a:pPr>
-            <a:r>
-              <a:rPr lang="en-US" sz="1100" b="1" dirty="0">
-                <a:solidFill>
-                  <a:srgbClr val="FFFFFF"/>
-                </a:solidFill>
-                <a:latin typeface="Aptos" pitchFamily="34" charset="0"/>
-                <a:ea typeface="Aptos" pitchFamily="34" charset="-122"/>
-                <a:cs typeface="Aptos" pitchFamily="34" charset="-120"/>
-              </a:rPr>
-              <a:t>4</a:t>
-            </a:r>
-            <a:endParaRPr lang="en-US" sz="1100" dirty="0"/>
-          </a:p>
-        </p:txBody>
-      </p:sp>
-      <p:sp>
-        <p:nvSpPr>
-          <p:cNvPr id="10" name="Text 8"/>
-          <p:cNvSpPr/>
-          <p:nvPr/>
-        </p:nvSpPr>
-        <p:spPr>
-          <a:xfrm>
-            <a:off x="640080" y="621792"/>
             <a:ext cx="10881360" cy="713232"/>
           </a:xfrm>
           <a:prstGeom prst="rect">
@@ -15813,14 +17410,14 @@
       </p:sp>
       <p:sp>
         <p:nvSpPr>
-          <p:cNvPr id="11" name="Text 9"/>
+          <p:cNvPr id="9" name="Text 7"/>
           <p:cNvSpPr/>
           <p:nvPr/>
         </p:nvSpPr>
         <p:spPr>
           <a:xfrm>
             <a:off x="868680" y="1508760"/>
-            <a:ext cx="6537960" cy="4160520"/>
+            <a:ext cx="6309360" cy="4160520"/>
           </a:xfrm>
           <a:prstGeom prst="rect">
             <a:avLst/>
@@ -15879,18 +17476,18 @@
       </p:sp>
       <p:sp>
         <p:nvSpPr>
-          <p:cNvPr id="12" name="Shape 10"/>
-          <p:cNvSpPr/>
-          <p:nvPr/>
-        </p:nvSpPr>
-        <p:spPr>
-          <a:xfrm>
-            <a:off x="7909560" y="1417320"/>
-            <a:ext cx="3154680" cy="1828800"/>
+          <p:cNvPr id="10" name="Shape 8"/>
+          <p:cNvSpPr/>
+          <p:nvPr/>
+        </p:nvSpPr>
+        <p:spPr>
+          <a:xfrm>
+            <a:off x="7635240" y="1325880"/>
+            <a:ext cx="3474720" cy="1325880"/>
           </a:xfrm>
           <a:prstGeom prst="roundRect">
             <a:avLst>
-              <a:gd name="adj" fmla="val 6000"/>
+              <a:gd name="adj" fmla="val 8276"/>
             </a:avLst>
           </a:prstGeom>
           <a:solidFill>
@@ -15906,14 +17503,14 @@
       </p:sp>
       <p:sp>
         <p:nvSpPr>
-          <p:cNvPr id="13" name="Text 11"/>
-          <p:cNvSpPr/>
-          <p:nvPr/>
-        </p:nvSpPr>
-        <p:spPr>
-          <a:xfrm>
-            <a:off x="8074152" y="1563624"/>
-            <a:ext cx="2825496" cy="256032"/>
+          <p:cNvPr id="11" name="Text 9"/>
+          <p:cNvSpPr/>
+          <p:nvPr/>
+        </p:nvSpPr>
+        <p:spPr>
+          <a:xfrm>
+            <a:off x="7799832" y="1472184"/>
+            <a:ext cx="3145536" cy="256032"/>
           </a:xfrm>
           <a:prstGeom prst="rect">
             <a:avLst/>
@@ -15937,7 +17534,7 @@
                 <a:ea typeface="Aptos" pitchFamily="34" charset="-122"/>
                 <a:cs typeface="Aptos" pitchFamily="34" charset="-120"/>
               </a:rPr>
-              <a:t>Key idea</a:t>
+              <a:t>Core concept</a:t>
             </a:r>
             <a:endParaRPr lang="en-US" sz="1300" dirty="0"/>
           </a:p>
@@ -15945,14 +17542,14 @@
       </p:sp>
       <p:sp>
         <p:nvSpPr>
-          <p:cNvPr id="14" name="Text 12"/>
-          <p:cNvSpPr/>
-          <p:nvPr/>
-        </p:nvSpPr>
-        <p:spPr>
-          <a:xfrm>
-            <a:off x="8074152" y="1920240"/>
-            <a:ext cx="2825496" cy="1188720"/>
+          <p:cNvPr id="12" name="Text 10"/>
+          <p:cNvSpPr/>
+          <p:nvPr/>
+        </p:nvSpPr>
+        <p:spPr>
+          <a:xfrm>
+            <a:off x="7799832" y="1828800"/>
+            <a:ext cx="3145536" cy="685800"/>
           </a:xfrm>
           <a:prstGeom prst="rect">
             <a:avLst/>
@@ -15986,18 +17583,159 @@
       </p:sp>
       <p:sp>
         <p:nvSpPr>
-          <p:cNvPr id="15" name="Shape 13"/>
-          <p:cNvSpPr/>
-          <p:nvPr/>
-        </p:nvSpPr>
-        <p:spPr>
-          <a:xfrm>
-            <a:off x="7909560" y="3520440"/>
-            <a:ext cx="3154680" cy="1737360"/>
+          <p:cNvPr id="13" name="Shape 11"/>
+          <p:cNvSpPr/>
+          <p:nvPr/>
+        </p:nvSpPr>
+        <p:spPr>
+          <a:xfrm>
+            <a:off x="7635240" y="2788920"/>
+            <a:ext cx="3474720" cy="1536192"/>
           </a:xfrm>
           <a:prstGeom prst="roundRect">
             <a:avLst>
-              <a:gd name="adj" fmla="val 6316"/>
+              <a:gd name="adj" fmla="val 7143"/>
+            </a:avLst>
+          </a:prstGeom>
+          <a:solidFill>
+            <a:srgbClr val="FFFFFF">
+              <a:alpha val="88000"/>
+            </a:srgbClr>
+          </a:solidFill>
+          <a:ln w="12700">
+            <a:solidFill>
+              <a:srgbClr val="D6E8F2"/>
+            </a:solidFill>
+            <a:prstDash val="solid"/>
+          </a:ln>
+        </p:spPr>
+      </p:sp>
+      <p:sp>
+        <p:nvSpPr>
+          <p:cNvPr id="14" name="Shape 12"/>
+          <p:cNvSpPr/>
+          <p:nvPr/>
+        </p:nvSpPr>
+        <p:spPr>
+          <a:xfrm>
+            <a:off x="8074152" y="3291840"/>
+            <a:ext cx="2596896" cy="749808"/>
+          </a:xfrm>
+          <a:prstGeom prst="rect">
+            <a:avLst/>
+          </a:prstGeom>
+          <a:solidFill>
+            <a:srgbClr val="EAF6F8"/>
+          </a:solidFill>
+          <a:ln w="12700">
+            <a:solidFill>
+              <a:srgbClr val="8ABBD8"/>
+            </a:solidFill>
+            <a:prstDash val="solid"/>
+          </a:ln>
+        </p:spPr>
+      </p:sp>
+      <p:sp>
+        <p:nvSpPr>
+          <p:cNvPr id="15" name="Shape 13"/>
+          <p:cNvSpPr/>
+          <p:nvPr/>
+        </p:nvSpPr>
+        <p:spPr>
+          <a:xfrm>
+            <a:off x="8202168" y="3721608"/>
+            <a:ext cx="2340864" cy="0"/>
+          </a:xfrm>
+          <a:prstGeom prst="line">
+            <a:avLst/>
+          </a:prstGeom>
+          <a:noFill/>
+          <a:ln w="19050">
+            <a:solidFill>
+              <a:srgbClr val="0068B7"/>
+            </a:solidFill>
+            <a:prstDash val="solid"/>
+          </a:ln>
+        </p:spPr>
+      </p:sp>
+      <p:sp>
+        <p:nvSpPr>
+          <p:cNvPr id="16" name="Shape 14"/>
+          <p:cNvSpPr/>
+          <p:nvPr/>
+        </p:nvSpPr>
+        <p:spPr>
+          <a:xfrm>
+            <a:off x="9198864" y="4206240"/>
+            <a:ext cx="347472" cy="347472"/>
+          </a:xfrm>
+          <a:prstGeom prst="ellipse">
+            <a:avLst/>
+          </a:prstGeom>
+          <a:solidFill>
+            <a:srgbClr val="2F8A28"/>
+          </a:solidFill>
+          <a:ln w="12700">
+            <a:solidFill>
+              <a:srgbClr val="2F8A28"/>
+            </a:solidFill>
+            <a:prstDash val="solid"/>
+          </a:ln>
+        </p:spPr>
+      </p:sp>
+      <p:sp>
+        <p:nvSpPr>
+          <p:cNvPr id="17" name="Text 15"/>
+          <p:cNvSpPr/>
+          <p:nvPr/>
+        </p:nvSpPr>
+        <p:spPr>
+          <a:xfrm>
+            <a:off x="7909560" y="3977640"/>
+            <a:ext cx="2926080" cy="182880"/>
+          </a:xfrm>
+          <a:prstGeom prst="rect">
+            <a:avLst/>
+          </a:prstGeom>
+          <a:noFill/>
+          <a:ln/>
+        </p:spPr>
+        <p:txBody>
+          <a:bodyPr wrap="square" lIns="0" tIns="0" rIns="0" bIns="0" rtlCol="0" anchor="ctr"/>
+          <a:lstStyle/>
+          <a:p>
+            <a:pPr algn="ctr" indent="0" marL="0">
+              <a:buNone/>
+            </a:pPr>
+            <a:r>
+              <a:rPr lang="en-US" sz="1000" dirty="0">
+                <a:solidFill>
+                  <a:srgbClr val="003A63"/>
+                </a:solidFill>
+                <a:latin typeface="Aptos" pitchFamily="34" charset="0"/>
+                <a:ea typeface="Aptos" pitchFamily="34" charset="-122"/>
+                <a:cs typeface="Aptos" pitchFamily="34" charset="-120"/>
+              </a:rPr>
+              <a:t>Concept to action</a:t>
+            </a:r>
+            <a:endParaRPr lang="en-US" sz="1000" dirty="0"/>
+          </a:p>
+        </p:txBody>
+      </p:sp>
+      <p:sp>
+        <p:nvSpPr>
+          <p:cNvPr id="18" name="Shape 16"/>
+          <p:cNvSpPr/>
+          <p:nvPr/>
+        </p:nvSpPr>
+        <p:spPr>
+          <a:xfrm>
+            <a:off x="7635240" y="4498848"/>
+            <a:ext cx="3474720" cy="1143000"/>
+          </a:xfrm>
+          <a:prstGeom prst="roundRect">
+            <a:avLst>
+              <a:gd name="adj" fmla="val 9600"/>
             </a:avLst>
           </a:prstGeom>
           <a:solidFill>
@@ -16013,14 +17751,14 @@
       </p:sp>
       <p:sp>
         <p:nvSpPr>
-          <p:cNvPr id="16" name="Text 14"/>
-          <p:cNvSpPr/>
-          <p:nvPr/>
-        </p:nvSpPr>
-        <p:spPr>
-          <a:xfrm>
-            <a:off x="8074152" y="3666744"/>
-            <a:ext cx="2825496" cy="256032"/>
+          <p:cNvPr id="19" name="Text 17"/>
+          <p:cNvSpPr/>
+          <p:nvPr/>
+        </p:nvSpPr>
+        <p:spPr>
+          <a:xfrm>
+            <a:off x="7799832" y="4645152"/>
+            <a:ext cx="3145536" cy="256032"/>
           </a:xfrm>
           <a:prstGeom prst="rect">
             <a:avLst/>
@@ -16044,7 +17782,7 @@
                 <a:ea typeface="Aptos" pitchFamily="34" charset="-122"/>
                 <a:cs typeface="Aptos" pitchFamily="34" charset="-120"/>
               </a:rPr>
-              <a:t>Use this for</a:t>
+              <a:t>Apply it</a:t>
             </a:r>
             <a:endParaRPr lang="en-US" sz="1300" dirty="0"/>
           </a:p>
@@ -16052,14 +17790,14 @@
       </p:sp>
       <p:sp>
         <p:nvSpPr>
-          <p:cNvPr id="17" name="Text 15"/>
-          <p:cNvSpPr/>
-          <p:nvPr/>
-        </p:nvSpPr>
-        <p:spPr>
-          <a:xfrm>
-            <a:off x="8074152" y="4023360"/>
-            <a:ext cx="2825496" cy="1097280"/>
+          <p:cNvPr id="20" name="Text 18"/>
+          <p:cNvSpPr/>
+          <p:nvPr/>
+        </p:nvSpPr>
+        <p:spPr>
+          <a:xfrm>
+            <a:off x="7799832" y="5001768"/>
+            <a:ext cx="3145536" cy="502920"/>
           </a:xfrm>
           <a:prstGeom prst="rect">
             <a:avLst/>
@@ -16085,7 +17823,7 @@
                 <a:ea typeface="Aptos" pitchFamily="34" charset="-122"/>
                 <a:cs typeface="Aptos" pitchFamily="34" charset="-120"/>
               </a:rPr>
-              <a:t>Connect the concept to public health decisions, safeguards, documentation, or implementation work.</a:t>
+              <a:t>Connect the concept to public health purpose, responsible use, required safeguards, documentation, and the next action a department should take.</a:t>
             </a:r>
             <a:endParaRPr lang="en-US" sz="1550" dirty="0"/>
           </a:p>
@@ -16259,8 +17997,8 @@
         </p:nvSpPr>
         <p:spPr>
           <a:xfrm>
-            <a:off x="9966960" y="6537960"/>
-            <a:ext cx="1645920" cy="201168"/>
+            <a:off x="9646920" y="6537960"/>
+            <a:ext cx="1965960" cy="201168"/>
           </a:xfrm>
           <a:prstGeom prst="rect">
             <a:avLst/>
@@ -16284,7 +18022,7 @@
                 <a:ea typeface="Aptos" pitchFamily="34" charset="-122"/>
                 <a:cs typeface="Aptos" pitchFamily="34" charset="-120"/>
               </a:rPr>
-              <a:t>Â© Paula Soper</a:t>
+              <a:t>Copyright Paula Soper</a:t>
             </a:r>
             <a:endParaRPr lang="en-US" sz="800" dirty="0"/>
           </a:p>
@@ -16331,77 +18069,13 @@
       </p:sp>
       <p:sp>
         <p:nvSpPr>
-          <p:cNvPr id="8" name="Shape 6"/>
+          <p:cNvPr id="8" name="Text 6"/>
           <p:cNvSpPr/>
           <p:nvPr/>
         </p:nvSpPr>
         <p:spPr>
           <a:xfrm>
             <a:off x="640080" y="658368"/>
-            <a:ext cx="420624" cy="420624"/>
-          </a:xfrm>
-          <a:prstGeom prst="ellipse">
-            <a:avLst/>
-          </a:prstGeom>
-          <a:solidFill>
-            <a:srgbClr val="0068B7"/>
-          </a:solidFill>
-          <a:ln w="12700">
-            <a:solidFill>
-              <a:srgbClr val="0068B7"/>
-            </a:solidFill>
-            <a:prstDash val="solid"/>
-          </a:ln>
-        </p:spPr>
-      </p:sp>
-      <p:sp>
-        <p:nvSpPr>
-          <p:cNvPr id="9" name="Text 7"/>
-          <p:cNvSpPr/>
-          <p:nvPr/>
-        </p:nvSpPr>
-        <p:spPr>
-          <a:xfrm>
-            <a:off x="640080" y="731520"/>
-            <a:ext cx="420624" cy="164592"/>
-          </a:xfrm>
-          <a:prstGeom prst="rect">
-            <a:avLst/>
-          </a:prstGeom>
-          <a:noFill/>
-          <a:ln/>
-        </p:spPr>
-        <p:txBody>
-          <a:bodyPr wrap="square" lIns="0" tIns="0" rIns="0" bIns="0" rtlCol="0" anchor="ctr"/>
-          <a:lstStyle/>
-          <a:p>
-            <a:pPr algn="ctr" indent="0" marL="0">
-              <a:buNone/>
-            </a:pPr>
-            <a:r>
-              <a:rPr lang="en-US" sz="1100" b="1" dirty="0">
-                <a:solidFill>
-                  <a:srgbClr val="FFFFFF"/>
-                </a:solidFill>
-                <a:latin typeface="Aptos" pitchFamily="34" charset="0"/>
-                <a:ea typeface="Aptos" pitchFamily="34" charset="-122"/>
-                <a:cs typeface="Aptos" pitchFamily="34" charset="-120"/>
-              </a:rPr>
-              <a:t>5</a:t>
-            </a:r>
-            <a:endParaRPr lang="en-US" sz="1100" dirty="0"/>
-          </a:p>
-        </p:txBody>
-      </p:sp>
-      <p:sp>
-        <p:nvSpPr>
-          <p:cNvPr id="10" name="Text 8"/>
-          <p:cNvSpPr/>
-          <p:nvPr/>
-        </p:nvSpPr>
-        <p:spPr>
-          <a:xfrm>
-            <a:off x="640080" y="621792"/>
             <a:ext cx="10881360" cy="713232"/>
           </a:xfrm>
           <a:prstGeom prst="rect">
@@ -16436,14 +18110,14 @@
       </p:sp>
       <p:sp>
         <p:nvSpPr>
-          <p:cNvPr id="11" name="Text 9"/>
+          <p:cNvPr id="9" name="Text 7"/>
           <p:cNvSpPr/>
           <p:nvPr/>
         </p:nvSpPr>
         <p:spPr>
           <a:xfrm>
             <a:off x="868680" y="1508760"/>
-            <a:ext cx="6537960" cy="4160520"/>
+            <a:ext cx="6309360" cy="4160520"/>
           </a:xfrm>
           <a:prstGeom prst="rect">
             <a:avLst/>
@@ -16502,18 +18176,18 @@
       </p:sp>
       <p:sp>
         <p:nvSpPr>
-          <p:cNvPr id="12" name="Shape 10"/>
-          <p:cNvSpPr/>
-          <p:nvPr/>
-        </p:nvSpPr>
-        <p:spPr>
-          <a:xfrm>
-            <a:off x="7909560" y="1417320"/>
-            <a:ext cx="3154680" cy="1828800"/>
+          <p:cNvPr id="10" name="Shape 8"/>
+          <p:cNvSpPr/>
+          <p:nvPr/>
+        </p:nvSpPr>
+        <p:spPr>
+          <a:xfrm>
+            <a:off x="7635240" y="1325880"/>
+            <a:ext cx="3474720" cy="1325880"/>
           </a:xfrm>
           <a:prstGeom prst="roundRect">
             <a:avLst>
-              <a:gd name="adj" fmla="val 6000"/>
+              <a:gd name="adj" fmla="val 8276"/>
             </a:avLst>
           </a:prstGeom>
           <a:solidFill>
@@ -16529,14 +18203,14 @@
       </p:sp>
       <p:sp>
         <p:nvSpPr>
-          <p:cNvPr id="13" name="Text 11"/>
-          <p:cNvSpPr/>
-          <p:nvPr/>
-        </p:nvSpPr>
-        <p:spPr>
-          <a:xfrm>
-            <a:off x="8074152" y="1563624"/>
-            <a:ext cx="2825496" cy="256032"/>
+          <p:cNvPr id="11" name="Text 9"/>
+          <p:cNvSpPr/>
+          <p:nvPr/>
+        </p:nvSpPr>
+        <p:spPr>
+          <a:xfrm>
+            <a:off x="7799832" y="1472184"/>
+            <a:ext cx="3145536" cy="256032"/>
           </a:xfrm>
           <a:prstGeom prst="rect">
             <a:avLst/>
@@ -16560,7 +18234,7 @@
                 <a:ea typeface="Aptos" pitchFamily="34" charset="-122"/>
                 <a:cs typeface="Aptos" pitchFamily="34" charset="-120"/>
               </a:rPr>
-              <a:t>Key idea</a:t>
+              <a:t>Core concept</a:t>
             </a:r>
             <a:endParaRPr lang="en-US" sz="1300" dirty="0"/>
           </a:p>
@@ -16568,14 +18242,14 @@
       </p:sp>
       <p:sp>
         <p:nvSpPr>
-          <p:cNvPr id="14" name="Text 12"/>
-          <p:cNvSpPr/>
-          <p:nvPr/>
-        </p:nvSpPr>
-        <p:spPr>
-          <a:xfrm>
-            <a:off x="8074152" y="1920240"/>
-            <a:ext cx="2825496" cy="1188720"/>
+          <p:cNvPr id="12" name="Text 10"/>
+          <p:cNvSpPr/>
+          <p:nvPr/>
+        </p:nvSpPr>
+        <p:spPr>
+          <a:xfrm>
+            <a:off x="7799832" y="1828800"/>
+            <a:ext cx="3145536" cy="685800"/>
           </a:xfrm>
           <a:prstGeom prst="rect">
             <a:avLst/>
@@ -16609,18 +18283,159 @@
       </p:sp>
       <p:sp>
         <p:nvSpPr>
-          <p:cNvPr id="15" name="Shape 13"/>
-          <p:cNvSpPr/>
-          <p:nvPr/>
-        </p:nvSpPr>
-        <p:spPr>
-          <a:xfrm>
-            <a:off x="7909560" y="3520440"/>
-            <a:ext cx="3154680" cy="1737360"/>
+          <p:cNvPr id="13" name="Shape 11"/>
+          <p:cNvSpPr/>
+          <p:nvPr/>
+        </p:nvSpPr>
+        <p:spPr>
+          <a:xfrm>
+            <a:off x="7635240" y="2788920"/>
+            <a:ext cx="3474720" cy="1536192"/>
           </a:xfrm>
           <a:prstGeom prst="roundRect">
             <a:avLst>
-              <a:gd name="adj" fmla="val 6316"/>
+              <a:gd name="adj" fmla="val 7143"/>
+            </a:avLst>
+          </a:prstGeom>
+          <a:solidFill>
+            <a:srgbClr val="FFFFFF">
+              <a:alpha val="88000"/>
+            </a:srgbClr>
+          </a:solidFill>
+          <a:ln w="12700">
+            <a:solidFill>
+              <a:srgbClr val="D6E8F2"/>
+            </a:solidFill>
+            <a:prstDash val="solid"/>
+          </a:ln>
+        </p:spPr>
+      </p:sp>
+      <p:sp>
+        <p:nvSpPr>
+          <p:cNvPr id="14" name="Shape 12"/>
+          <p:cNvSpPr/>
+          <p:nvPr/>
+        </p:nvSpPr>
+        <p:spPr>
+          <a:xfrm>
+            <a:off x="8074152" y="3291840"/>
+            <a:ext cx="2596896" cy="749808"/>
+          </a:xfrm>
+          <a:prstGeom prst="rect">
+            <a:avLst/>
+          </a:prstGeom>
+          <a:solidFill>
+            <a:srgbClr val="EAF6F8"/>
+          </a:solidFill>
+          <a:ln w="12700">
+            <a:solidFill>
+              <a:srgbClr val="8ABBD8"/>
+            </a:solidFill>
+            <a:prstDash val="solid"/>
+          </a:ln>
+        </p:spPr>
+      </p:sp>
+      <p:sp>
+        <p:nvSpPr>
+          <p:cNvPr id="15" name="Shape 13"/>
+          <p:cNvSpPr/>
+          <p:nvPr/>
+        </p:nvSpPr>
+        <p:spPr>
+          <a:xfrm>
+            <a:off x="8202168" y="3721608"/>
+            <a:ext cx="2340864" cy="0"/>
+          </a:xfrm>
+          <a:prstGeom prst="line">
+            <a:avLst/>
+          </a:prstGeom>
+          <a:noFill/>
+          <a:ln w="19050">
+            <a:solidFill>
+              <a:srgbClr val="0068B7"/>
+            </a:solidFill>
+            <a:prstDash val="solid"/>
+          </a:ln>
+        </p:spPr>
+      </p:sp>
+      <p:sp>
+        <p:nvSpPr>
+          <p:cNvPr id="16" name="Shape 14"/>
+          <p:cNvSpPr/>
+          <p:nvPr/>
+        </p:nvSpPr>
+        <p:spPr>
+          <a:xfrm>
+            <a:off x="9198864" y="4206240"/>
+            <a:ext cx="347472" cy="347472"/>
+          </a:xfrm>
+          <a:prstGeom prst="ellipse">
+            <a:avLst/>
+          </a:prstGeom>
+          <a:solidFill>
+            <a:srgbClr val="2F8A28"/>
+          </a:solidFill>
+          <a:ln w="12700">
+            <a:solidFill>
+              <a:srgbClr val="2F8A28"/>
+            </a:solidFill>
+            <a:prstDash val="solid"/>
+          </a:ln>
+        </p:spPr>
+      </p:sp>
+      <p:sp>
+        <p:nvSpPr>
+          <p:cNvPr id="17" name="Text 15"/>
+          <p:cNvSpPr/>
+          <p:nvPr/>
+        </p:nvSpPr>
+        <p:spPr>
+          <a:xfrm>
+            <a:off x="7909560" y="3977640"/>
+            <a:ext cx="2926080" cy="182880"/>
+          </a:xfrm>
+          <a:prstGeom prst="rect">
+            <a:avLst/>
+          </a:prstGeom>
+          <a:noFill/>
+          <a:ln/>
+        </p:spPr>
+        <p:txBody>
+          <a:bodyPr wrap="square" lIns="0" tIns="0" rIns="0" bIns="0" rtlCol="0" anchor="ctr"/>
+          <a:lstStyle/>
+          <a:p>
+            <a:pPr algn="ctr" indent="0" marL="0">
+              <a:buNone/>
+            </a:pPr>
+            <a:r>
+              <a:rPr lang="en-US" sz="1000" dirty="0">
+                <a:solidFill>
+                  <a:srgbClr val="003A63"/>
+                </a:solidFill>
+                <a:latin typeface="Aptos" pitchFamily="34" charset="0"/>
+                <a:ea typeface="Aptos" pitchFamily="34" charset="-122"/>
+                <a:cs typeface="Aptos" pitchFamily="34" charset="-120"/>
+              </a:rPr>
+              <a:t>Concept to action</a:t>
+            </a:r>
+            <a:endParaRPr lang="en-US" sz="1000" dirty="0"/>
+          </a:p>
+        </p:txBody>
+      </p:sp>
+      <p:sp>
+        <p:nvSpPr>
+          <p:cNvPr id="18" name="Shape 16"/>
+          <p:cNvSpPr/>
+          <p:nvPr/>
+        </p:nvSpPr>
+        <p:spPr>
+          <a:xfrm>
+            <a:off x="7635240" y="4498848"/>
+            <a:ext cx="3474720" cy="1143000"/>
+          </a:xfrm>
+          <a:prstGeom prst="roundRect">
+            <a:avLst>
+              <a:gd name="adj" fmla="val 9600"/>
             </a:avLst>
           </a:prstGeom>
           <a:solidFill>
@@ -16636,14 +18451,14 @@
       </p:sp>
       <p:sp>
         <p:nvSpPr>
-          <p:cNvPr id="16" name="Text 14"/>
-          <p:cNvSpPr/>
-          <p:nvPr/>
-        </p:nvSpPr>
-        <p:spPr>
-          <a:xfrm>
-            <a:off x="8074152" y="3666744"/>
-            <a:ext cx="2825496" cy="256032"/>
+          <p:cNvPr id="19" name="Text 17"/>
+          <p:cNvSpPr/>
+          <p:nvPr/>
+        </p:nvSpPr>
+        <p:spPr>
+          <a:xfrm>
+            <a:off x="7799832" y="4645152"/>
+            <a:ext cx="3145536" cy="256032"/>
           </a:xfrm>
           <a:prstGeom prst="rect">
             <a:avLst/>
@@ -16667,7 +18482,7 @@
                 <a:ea typeface="Aptos" pitchFamily="34" charset="-122"/>
                 <a:cs typeface="Aptos" pitchFamily="34" charset="-120"/>
               </a:rPr>
-              <a:t>Use this for</a:t>
+              <a:t>Apply it</a:t>
             </a:r>
             <a:endParaRPr lang="en-US" sz="1300" dirty="0"/>
           </a:p>
@@ -16675,14 +18490,14 @@
       </p:sp>
       <p:sp>
         <p:nvSpPr>
-          <p:cNvPr id="17" name="Text 15"/>
-          <p:cNvSpPr/>
-          <p:nvPr/>
-        </p:nvSpPr>
-        <p:spPr>
-          <a:xfrm>
-            <a:off x="8074152" y="4023360"/>
-            <a:ext cx="2825496" cy="1097280"/>
+          <p:cNvPr id="20" name="Text 18"/>
+          <p:cNvSpPr/>
+          <p:nvPr/>
+        </p:nvSpPr>
+        <p:spPr>
+          <a:xfrm>
+            <a:off x="7799832" y="5001768"/>
+            <a:ext cx="3145536" cy="502920"/>
           </a:xfrm>
           <a:prstGeom prst="rect">
             <a:avLst/>
@@ -16708,7 +18523,7 @@
                 <a:ea typeface="Aptos" pitchFamily="34" charset="-122"/>
                 <a:cs typeface="Aptos" pitchFamily="34" charset="-120"/>
               </a:rPr>
-              <a:t>Connect the concept to public health decisions, safeguards, documentation, or implementation work.</a:t>
+              <a:t>Connect the concept to public health purpose, responsible use, required safeguards, documentation, and the next action a department should take.</a:t>
             </a:r>
             <a:endParaRPr lang="en-US" sz="1550" dirty="0"/>
           </a:p>

--- a/downloads/presentations/modules/epi-300.pptx
+++ b/downloads/presentations/modules/epi-300.pptx
@@ -3619,13 +3619,11 @@
             </a:avLst>
           </a:prstGeom>
           <a:solidFill>
-            <a:srgbClr val="FFFFFF">
-              <a:alpha val="88000"/>
-            </a:srgbClr>
+            <a:srgbClr val="FFFFFF"/>
           </a:solidFill>
           <a:ln w="12700">
             <a:solidFill>
-              <a:srgbClr val="D6E8F2"/>
+              <a:srgbClr val="B9D7E6"/>
             </a:solidFill>
             <a:prstDash val="solid"/>
           </a:ln>
@@ -3633,119 +3631,98 @@
       </p:sp>
       <p:sp>
         <p:nvSpPr>
-          <p:cNvPr id="14" name="Shape 12"/>
-          <p:cNvSpPr/>
-          <p:nvPr/>
-        </p:nvSpPr>
-        <p:spPr>
-          <a:xfrm>
-            <a:off x="8074152" y="3291840"/>
-            <a:ext cx="2596896" cy="749808"/>
-          </a:xfrm>
-          <a:prstGeom prst="rect">
-            <a:avLst/>
-          </a:prstGeom>
-          <a:solidFill>
-            <a:srgbClr val="EAF6F8"/>
-          </a:solidFill>
-          <a:ln w="12700">
-            <a:solidFill>
-              <a:srgbClr val="8ABBD8"/>
-            </a:solidFill>
-            <a:prstDash val="solid"/>
-          </a:ln>
-        </p:spPr>
-      </p:sp>
-      <p:sp>
-        <p:nvSpPr>
-          <p:cNvPr id="15" name="Shape 13"/>
-          <p:cNvSpPr/>
-          <p:nvPr/>
-        </p:nvSpPr>
-        <p:spPr>
-          <a:xfrm>
-            <a:off x="8202168" y="3721608"/>
-            <a:ext cx="2340864" cy="0"/>
-          </a:xfrm>
-          <a:prstGeom prst="line">
-            <a:avLst/>
-          </a:prstGeom>
-          <a:noFill/>
-          <a:ln w="19050">
-            <a:solidFill>
-              <a:srgbClr val="0068B7"/>
-            </a:solidFill>
-            <a:prstDash val="solid"/>
-          </a:ln>
-        </p:spPr>
+          <p:cNvPr id="14" name="Text 12"/>
+          <p:cNvSpPr/>
+          <p:nvPr/>
+        </p:nvSpPr>
+        <p:spPr>
+          <a:xfrm>
+            <a:off x="7799832" y="2935224"/>
+            <a:ext cx="3145536" cy="256032"/>
+          </a:xfrm>
+          <a:prstGeom prst="rect">
+            <a:avLst/>
+          </a:prstGeom>
+          <a:noFill/>
+          <a:ln/>
+        </p:spPr>
+        <p:txBody>
+          <a:bodyPr wrap="square" lIns="0" tIns="0" rIns="0" bIns="0" rtlCol="0" anchor="ctr"/>
+          <a:lstStyle/>
+          <a:p>
+            <a:pPr indent="0" marL="0">
+              <a:buNone/>
+            </a:pPr>
+            <a:r>
+              <a:rPr lang="en-US" sz="1300" b="1" dirty="0">
+                <a:solidFill>
+                  <a:srgbClr val="0068B7"/>
+                </a:solidFill>
+                <a:latin typeface="Aptos" pitchFamily="34" charset="0"/>
+                <a:ea typeface="Aptos" pitchFamily="34" charset="-122"/>
+                <a:cs typeface="Aptos" pitchFamily="34" charset="-120"/>
+              </a:rPr>
+              <a:t>Concept checkpoints</a:t>
+            </a:r>
+            <a:endParaRPr lang="en-US" sz="1300" dirty="0"/>
+          </a:p>
+        </p:txBody>
+      </p:sp>
+      <p:sp>
+        <p:nvSpPr>
+          <p:cNvPr id="15" name="Text 13"/>
+          <p:cNvSpPr/>
+          <p:nvPr/>
+        </p:nvSpPr>
+        <p:spPr>
+          <a:xfrm>
+            <a:off x="7818120" y="3300984"/>
+            <a:ext cx="3090672" cy="877824"/>
+          </a:xfrm>
+          <a:prstGeom prst="rect">
+            <a:avLst/>
+          </a:prstGeom>
+          <a:noFill/>
+          <a:ln/>
+        </p:spPr>
+        <p:txBody>
+          <a:bodyPr wrap="square" lIns="254" tIns="254" rIns="254" bIns="254" rtlCol="0" anchor="t">
+            <a:normAutofit/>
+          </a:bodyPr>
+          <a:lstStyle/>
+          <a:p>
+            <a:r>
+              <a:rPr lang="en-US" sz="1380" dirty="0">
+                <a:solidFill>
+                  <a:srgbClr val="17364A"/>
+                </a:solidFill>
+                <a:latin typeface="Aptos" pitchFamily="34" charset="0"/>
+                <a:ea typeface="Aptos" pitchFamily="34" charset="-122"/>
+                <a:cs typeface="Aptos" pitchFamily="34" charset="-120"/>
+              </a:rPr>
+              <a:t>Some communities may be less likely to seek care, be tested, respond to interviews, speak.</a:t>
+            </a:r>
+            <a:endParaRPr lang="en-US" sz="1380" dirty="0"/>
+          </a:p>
+          <a:p>
+            <a:r>
+              <a:rPr lang="en-US" sz="1380" dirty="0">
+                <a:solidFill>
+                  <a:srgbClr val="17364A"/>
+                </a:solidFill>
+                <a:latin typeface="Aptos" pitchFamily="34" charset="0"/>
+                <a:ea typeface="Aptos" pitchFamily="34" charset="-122"/>
+                <a:cs typeface="Aptos" pitchFamily="34" charset="-120"/>
+              </a:rPr>
+              <a:t>AI-supported prioritization must not systematically deprioritize people or communities.</a:t>
+            </a:r>
+            <a:endParaRPr lang="en-US" sz="1380" dirty="0"/>
+          </a:p>
+        </p:txBody>
       </p:sp>
       <p:sp>
         <p:nvSpPr>
           <p:cNvPr id="16" name="Shape 14"/>
-          <p:cNvSpPr/>
-          <p:nvPr/>
-        </p:nvSpPr>
-        <p:spPr>
-          <a:xfrm>
-            <a:off x="9198864" y="4206240"/>
-            <a:ext cx="347472" cy="347472"/>
-          </a:xfrm>
-          <a:prstGeom prst="ellipse">
-            <a:avLst/>
-          </a:prstGeom>
-          <a:solidFill>
-            <a:srgbClr val="2F8A28"/>
-          </a:solidFill>
-          <a:ln w="12700">
-            <a:solidFill>
-              <a:srgbClr val="2F8A28"/>
-            </a:solidFill>
-            <a:prstDash val="solid"/>
-          </a:ln>
-        </p:spPr>
-      </p:sp>
-      <p:sp>
-        <p:nvSpPr>
-          <p:cNvPr id="17" name="Text 15"/>
-          <p:cNvSpPr/>
-          <p:nvPr/>
-        </p:nvSpPr>
-        <p:spPr>
-          <a:xfrm>
-            <a:off x="7909560" y="3977640"/>
-            <a:ext cx="2926080" cy="182880"/>
-          </a:xfrm>
-          <a:prstGeom prst="rect">
-            <a:avLst/>
-          </a:prstGeom>
-          <a:noFill/>
-          <a:ln/>
-        </p:spPr>
-        <p:txBody>
-          <a:bodyPr wrap="square" lIns="0" tIns="0" rIns="0" bIns="0" rtlCol="0" anchor="ctr"/>
-          <a:lstStyle/>
-          <a:p>
-            <a:pPr algn="ctr" indent="0" marL="0">
-              <a:buNone/>
-            </a:pPr>
-            <a:r>
-              <a:rPr lang="en-US" sz="1000" dirty="0">
-                <a:solidFill>
-                  <a:srgbClr val="003A63"/>
-                </a:solidFill>
-                <a:latin typeface="Aptos" pitchFamily="34" charset="0"/>
-                <a:ea typeface="Aptos" pitchFamily="34" charset="-122"/>
-                <a:cs typeface="Aptos" pitchFamily="34" charset="-120"/>
-              </a:rPr>
-              <a:t>Concept to action</a:t>
-            </a:r>
-            <a:endParaRPr lang="en-US" sz="1000" dirty="0"/>
-          </a:p>
-        </p:txBody>
-      </p:sp>
-      <p:sp>
-        <p:nvSpPr>
-          <p:cNvPr id="18" name="Shape 16"/>
           <p:cNvSpPr/>
           <p:nvPr/>
         </p:nvSpPr>
@@ -3772,7 +3749,7 @@
       </p:sp>
       <p:sp>
         <p:nvSpPr>
-          <p:cNvPr id="19" name="Text 17"/>
+          <p:cNvPr id="17" name="Text 15"/>
           <p:cNvSpPr/>
           <p:nvPr/>
         </p:nvSpPr>
@@ -3811,7 +3788,7 @@
       </p:sp>
       <p:sp>
         <p:nvSpPr>
-          <p:cNvPr id="20" name="Text 18"/>
+          <p:cNvPr id="18" name="Text 16"/>
           <p:cNvSpPr/>
           <p:nvPr/>
         </p:nvSpPr>
@@ -4319,13 +4296,11 @@
             </a:avLst>
           </a:prstGeom>
           <a:solidFill>
-            <a:srgbClr val="FFFFFF">
-              <a:alpha val="88000"/>
-            </a:srgbClr>
+            <a:srgbClr val="FFFFFF"/>
           </a:solidFill>
           <a:ln w="12700">
             <a:solidFill>
-              <a:srgbClr val="D6E8F2"/>
+              <a:srgbClr val="B9D7E6"/>
             </a:solidFill>
             <a:prstDash val="solid"/>
           </a:ln>
@@ -4333,26 +4308,42 @@
       </p:sp>
       <p:sp>
         <p:nvSpPr>
-          <p:cNvPr id="14" name="Shape 12"/>
-          <p:cNvSpPr/>
-          <p:nvPr/>
-        </p:nvSpPr>
-        <p:spPr>
-          <a:xfrm>
-            <a:off x="8046720" y="3108960"/>
-            <a:ext cx="2651760" cy="896112"/>
-          </a:xfrm>
-          <a:prstGeom prst="arc">
-            <a:avLst/>
-          </a:prstGeom>
-          <a:noFill/>
-          <a:ln w="25400">
-            <a:solidFill>
-              <a:srgbClr val="0068B7"/>
-            </a:solidFill>
-            <a:prstDash val="solid"/>
-          </a:ln>
-        </p:spPr>
+          <p:cNvPr id="14" name="Text 12"/>
+          <p:cNvSpPr/>
+          <p:nvPr/>
+        </p:nvSpPr>
+        <p:spPr>
+          <a:xfrm>
+            <a:off x="7799832" y="2935224"/>
+            <a:ext cx="3145536" cy="256032"/>
+          </a:xfrm>
+          <a:prstGeom prst="rect">
+            <a:avLst/>
+          </a:prstGeom>
+          <a:noFill/>
+          <a:ln/>
+        </p:spPr>
+        <p:txBody>
+          <a:bodyPr wrap="square" lIns="0" tIns="0" rIns="0" bIns="0" rtlCol="0" anchor="ctr"/>
+          <a:lstStyle/>
+          <a:p>
+            <a:pPr indent="0" marL="0">
+              <a:buNone/>
+            </a:pPr>
+            <a:r>
+              <a:rPr lang="en-US" sz="1300" b="1" dirty="0">
+                <a:solidFill>
+                  <a:srgbClr val="0068B7"/>
+                </a:solidFill>
+                <a:latin typeface="Aptos" pitchFamily="34" charset="0"/>
+                <a:ea typeface="Aptos" pitchFamily="34" charset="-122"/>
+                <a:cs typeface="Aptos" pitchFamily="34" charset="-120"/>
+              </a:rPr>
+              <a:t>Concept checkpoints</a:t>
+            </a:r>
+            <a:endParaRPr lang="en-US" sz="1300" dirty="0"/>
+          </a:p>
+        </p:txBody>
       </p:sp>
       <p:sp>
         <p:nvSpPr>
@@ -4362,102 +4353,67 @@
         </p:nvSpPr>
         <p:spPr>
           <a:xfrm>
-            <a:off x="7909560" y="3099816"/>
-            <a:ext cx="2926080" cy="256032"/>
-          </a:xfrm>
-          <a:prstGeom prst="rect">
-            <a:avLst/>
-          </a:prstGeom>
-          <a:noFill/>
-          <a:ln/>
-        </p:spPr>
-        <p:txBody>
-          <a:bodyPr wrap="square" lIns="0" tIns="0" rIns="0" bIns="0" rtlCol="0" anchor="ctr"/>
-          <a:lstStyle/>
-          <a:p>
-            <a:pPr algn="ctr" indent="0" marL="0">
-              <a:buNone/>
-            </a:pPr>
-            <a:r>
-              <a:rPr lang="en-US" sz="1500" b="1" dirty="0">
-                <a:solidFill>
-                  <a:srgbClr val="003A63"/>
-                </a:solidFill>
-                <a:latin typeface="Aptos" pitchFamily="34" charset="0"/>
-                <a:ea typeface="Aptos" pitchFamily="34" charset="-122"/>
-                <a:cs typeface="Aptos" pitchFamily="34" charset="-120"/>
-              </a:rPr>
-              <a:t>Risk</a:t>
-            </a:r>
-            <a:endParaRPr lang="en-US" sz="1500" dirty="0"/>
+            <a:off x="7818120" y="3300984"/>
+            <a:ext cx="3090672" cy="877824"/>
+          </a:xfrm>
+          <a:prstGeom prst="rect">
+            <a:avLst/>
+          </a:prstGeom>
+          <a:noFill/>
+          <a:ln/>
+        </p:spPr>
+        <p:txBody>
+          <a:bodyPr wrap="square" lIns="254" tIns="254" rIns="254" bIns="254" rtlCol="0" anchor="t">
+            <a:normAutofit/>
+          </a:bodyPr>
+          <a:lstStyle/>
+          <a:p>
+            <a:r>
+              <a:rPr lang="en-US" sz="1380" dirty="0">
+                <a:solidFill>
+                  <a:srgbClr val="17364A"/>
+                </a:solidFill>
+                <a:latin typeface="Aptos" pitchFamily="34" charset="0"/>
+                <a:ea typeface="Aptos" pitchFamily="34" charset="-122"/>
+                <a:cs typeface="Aptos" pitchFamily="34" charset="-120"/>
+              </a:rPr>
+              <a:t>Risks and failure modes include the following:</a:t>
+            </a:r>
+            <a:endParaRPr lang="en-US" sz="1380" dirty="0"/>
+          </a:p>
+          <a:p>
+            <a:r>
+              <a:rPr lang="en-US" sz="1380" dirty="0">
+                <a:solidFill>
+                  <a:srgbClr val="17364A"/>
+                </a:solidFill>
+                <a:latin typeface="Aptos" pitchFamily="34" charset="0"/>
+                <a:ea typeface="Aptos" pitchFamily="34" charset="-122"/>
+                <a:cs typeface="Aptos" pitchFamily="34" charset="-120"/>
+              </a:rPr>
+              <a:t>AI summaries omitting uncertainty or unsupported details.</a:t>
+            </a:r>
+            <a:endParaRPr lang="en-US" sz="1380" dirty="0"/>
+          </a:p>
+          <a:p>
+            <a:r>
+              <a:rPr lang="en-US" sz="1380" dirty="0">
+                <a:solidFill>
+                  <a:srgbClr val="17364A"/>
+                </a:solidFill>
+                <a:latin typeface="Aptos" pitchFamily="34" charset="0"/>
+                <a:ea typeface="Aptos" pitchFamily="34" charset="-122"/>
+                <a:cs typeface="Aptos" pitchFamily="34" charset="-120"/>
+              </a:rPr>
+              <a:t>False outbreak signals creating unnecessary response or public concern.</a:t>
+            </a:r>
+            <a:endParaRPr lang="en-US" sz="1380" dirty="0"/>
           </a:p>
         </p:txBody>
       </p:sp>
       <p:sp>
         <p:nvSpPr>
           <p:cNvPr id="16" name="Shape 14"/>
-          <p:cNvSpPr/>
-          <p:nvPr/>
-        </p:nvSpPr>
-        <p:spPr>
-          <a:xfrm>
-            <a:off x="8366760" y="3639312"/>
-            <a:ext cx="2011680" cy="0"/>
-          </a:xfrm>
-          <a:prstGeom prst="line">
-            <a:avLst/>
-          </a:prstGeom>
-          <a:noFill/>
-          <a:ln w="63500">
-            <a:solidFill>
-              <a:srgbClr val="2F8A28"/>
-            </a:solidFill>
-            <a:prstDash val="solid"/>
-          </a:ln>
-        </p:spPr>
-      </p:sp>
-      <p:sp>
-        <p:nvSpPr>
-          <p:cNvPr id="17" name="Text 15"/>
-          <p:cNvSpPr/>
-          <p:nvPr/>
-        </p:nvSpPr>
-        <p:spPr>
-          <a:xfrm>
-            <a:off x="7909560" y="3849624"/>
-            <a:ext cx="2926080" cy="164592"/>
-          </a:xfrm>
-          <a:prstGeom prst="rect">
-            <a:avLst/>
-          </a:prstGeom>
-          <a:noFill/>
-          <a:ln/>
-        </p:spPr>
-        <p:txBody>
-          <a:bodyPr wrap="square" lIns="0" tIns="0" rIns="0" bIns="0" rtlCol="0" anchor="ctr"/>
-          <a:lstStyle/>
-          <a:p>
-            <a:pPr algn="ctr" indent="0" marL="0">
-              <a:buNone/>
-            </a:pPr>
-            <a:r>
-              <a:rPr lang="en-US" sz="900" dirty="0">
-                <a:solidFill>
-                  <a:srgbClr val="003A63"/>
-                </a:solidFill>
-                <a:latin typeface="Aptos" pitchFamily="34" charset="0"/>
-                <a:ea typeface="Aptos" pitchFamily="34" charset="-122"/>
-                <a:cs typeface="Aptos" pitchFamily="34" charset="-120"/>
-              </a:rPr>
-              <a:t>Human review</a:t>
-            </a:r>
-            <a:endParaRPr lang="en-US" sz="900" dirty="0"/>
-          </a:p>
-        </p:txBody>
-      </p:sp>
-      <p:sp>
-        <p:nvSpPr>
-          <p:cNvPr id="18" name="Shape 16"/>
           <p:cNvSpPr/>
           <p:nvPr/>
         </p:nvSpPr>
@@ -4484,7 +4440,7 @@
       </p:sp>
       <p:sp>
         <p:nvSpPr>
-          <p:cNvPr id="19" name="Text 17"/>
+          <p:cNvPr id="17" name="Text 15"/>
           <p:cNvSpPr/>
           <p:nvPr/>
         </p:nvSpPr>
@@ -4523,7 +4479,7 @@
       </p:sp>
       <p:sp>
         <p:nvSpPr>
-          <p:cNvPr id="20" name="Text 18"/>
+          <p:cNvPr id="18" name="Text 16"/>
           <p:cNvSpPr/>
           <p:nvPr/>
         </p:nvSpPr>
@@ -5031,13 +4987,11 @@
             </a:avLst>
           </a:prstGeom>
           <a:solidFill>
-            <a:srgbClr val="FFFFFF">
-              <a:alpha val="88000"/>
-            </a:srgbClr>
+            <a:srgbClr val="FFFFFF"/>
           </a:solidFill>
           <a:ln w="12700">
             <a:solidFill>
-              <a:srgbClr val="D6E8F2"/>
+              <a:srgbClr val="B9D7E6"/>
             </a:solidFill>
             <a:prstDash val="solid"/>
           </a:ln>
@@ -5045,26 +4999,42 @@
       </p:sp>
       <p:sp>
         <p:nvSpPr>
-          <p:cNvPr id="14" name="Shape 12"/>
-          <p:cNvSpPr/>
-          <p:nvPr/>
-        </p:nvSpPr>
-        <p:spPr>
-          <a:xfrm>
-            <a:off x="8046720" y="3108960"/>
-            <a:ext cx="2651760" cy="896112"/>
-          </a:xfrm>
-          <a:prstGeom prst="arc">
-            <a:avLst/>
-          </a:prstGeom>
-          <a:noFill/>
-          <a:ln w="25400">
-            <a:solidFill>
-              <a:srgbClr val="0068B7"/>
-            </a:solidFill>
-            <a:prstDash val="solid"/>
-          </a:ln>
-        </p:spPr>
+          <p:cNvPr id="14" name="Text 12"/>
+          <p:cNvSpPr/>
+          <p:nvPr/>
+        </p:nvSpPr>
+        <p:spPr>
+          <a:xfrm>
+            <a:off x="7799832" y="2935224"/>
+            <a:ext cx="3145536" cy="256032"/>
+          </a:xfrm>
+          <a:prstGeom prst="rect">
+            <a:avLst/>
+          </a:prstGeom>
+          <a:noFill/>
+          <a:ln/>
+        </p:spPr>
+        <p:txBody>
+          <a:bodyPr wrap="square" lIns="0" tIns="0" rIns="0" bIns="0" rtlCol="0" anchor="ctr"/>
+          <a:lstStyle/>
+          <a:p>
+            <a:pPr indent="0" marL="0">
+              <a:buNone/>
+            </a:pPr>
+            <a:r>
+              <a:rPr lang="en-US" sz="1300" b="1" dirty="0">
+                <a:solidFill>
+                  <a:srgbClr val="0068B7"/>
+                </a:solidFill>
+                <a:latin typeface="Aptos" pitchFamily="34" charset="0"/>
+                <a:ea typeface="Aptos" pitchFamily="34" charset="-122"/>
+                <a:cs typeface="Aptos" pitchFamily="34" charset="-120"/>
+              </a:rPr>
+              <a:t>Concept checkpoints</a:t>
+            </a:r>
+            <a:endParaRPr lang="en-US" sz="1300" dirty="0"/>
+          </a:p>
+        </p:txBody>
       </p:sp>
       <p:sp>
         <p:nvSpPr>
@@ -5074,102 +5044,67 @@
         </p:nvSpPr>
         <p:spPr>
           <a:xfrm>
-            <a:off x="7909560" y="3099816"/>
-            <a:ext cx="2926080" cy="256032"/>
-          </a:xfrm>
-          <a:prstGeom prst="rect">
-            <a:avLst/>
-          </a:prstGeom>
-          <a:noFill/>
-          <a:ln/>
-        </p:spPr>
-        <p:txBody>
-          <a:bodyPr wrap="square" lIns="0" tIns="0" rIns="0" bIns="0" rtlCol="0" anchor="ctr"/>
-          <a:lstStyle/>
-          <a:p>
-            <a:pPr algn="ctr" indent="0" marL="0">
-              <a:buNone/>
-            </a:pPr>
-            <a:r>
-              <a:rPr lang="en-US" sz="1500" b="1" dirty="0">
-                <a:solidFill>
-                  <a:srgbClr val="003A63"/>
-                </a:solidFill>
-                <a:latin typeface="Aptos" pitchFamily="34" charset="0"/>
-                <a:ea typeface="Aptos" pitchFamily="34" charset="-122"/>
-                <a:cs typeface="Aptos" pitchFamily="34" charset="-120"/>
-              </a:rPr>
-              <a:t>Risk</a:t>
-            </a:r>
-            <a:endParaRPr lang="en-US" sz="1500" dirty="0"/>
+            <a:off x="7818120" y="3300984"/>
+            <a:ext cx="3090672" cy="877824"/>
+          </a:xfrm>
+          <a:prstGeom prst="rect">
+            <a:avLst/>
+          </a:prstGeom>
+          <a:noFill/>
+          <a:ln/>
+        </p:spPr>
+        <p:txBody>
+          <a:bodyPr wrap="square" lIns="254" tIns="254" rIns="254" bIns="254" rtlCol="0" anchor="t">
+            <a:normAutofit/>
+          </a:bodyPr>
+          <a:lstStyle/>
+          <a:p>
+            <a:r>
+              <a:rPr lang="en-US" sz="1380" dirty="0">
+                <a:solidFill>
+                  <a:srgbClr val="17364A"/>
+                </a:solidFill>
+                <a:latin typeface="Aptos" pitchFamily="34" charset="0"/>
+                <a:ea typeface="Aptos" pitchFamily="34" charset="-122"/>
+                <a:cs typeface="Aptos" pitchFamily="34" charset="-120"/>
+              </a:rPr>
+              <a:t>Missed signals because some communities are underrepresented in data.</a:t>
+            </a:r>
+            <a:endParaRPr lang="en-US" sz="1380" dirty="0"/>
+          </a:p>
+          <a:p>
+            <a:r>
+              <a:rPr lang="en-US" sz="1380" dirty="0">
+                <a:solidFill>
+                  <a:srgbClr val="17364A"/>
+                </a:solidFill>
+                <a:latin typeface="Aptos" pitchFamily="34" charset="0"/>
+                <a:ea typeface="Aptos" pitchFamily="34" charset="-122"/>
+                <a:cs typeface="Aptos" pitchFamily="34" charset="-120"/>
+              </a:rPr>
+              <a:t>Automated prioritization replacing epidemiologic judgment.</a:t>
+            </a:r>
+            <a:endParaRPr lang="en-US" sz="1380" dirty="0"/>
+          </a:p>
+          <a:p>
+            <a:r>
+              <a:rPr lang="en-US" sz="1380" dirty="0">
+                <a:solidFill>
+                  <a:srgbClr val="17364A"/>
+                </a:solidFill>
+                <a:latin typeface="Aptos" pitchFamily="34" charset="0"/>
+                <a:ea typeface="Aptos" pitchFamily="34" charset="-122"/>
+                <a:cs typeface="Aptos" pitchFamily="34" charset="-120"/>
+              </a:rPr>
+              <a:t>Sensitive investigation information being used in unapproved tools.</a:t>
+            </a:r>
+            <a:endParaRPr lang="en-US" sz="1380" dirty="0"/>
           </a:p>
         </p:txBody>
       </p:sp>
       <p:sp>
         <p:nvSpPr>
           <p:cNvPr id="16" name="Shape 14"/>
-          <p:cNvSpPr/>
-          <p:nvPr/>
-        </p:nvSpPr>
-        <p:spPr>
-          <a:xfrm>
-            <a:off x="8366760" y="3639312"/>
-            <a:ext cx="2011680" cy="0"/>
-          </a:xfrm>
-          <a:prstGeom prst="line">
-            <a:avLst/>
-          </a:prstGeom>
-          <a:noFill/>
-          <a:ln w="63500">
-            <a:solidFill>
-              <a:srgbClr val="2F8A28"/>
-            </a:solidFill>
-            <a:prstDash val="solid"/>
-          </a:ln>
-        </p:spPr>
-      </p:sp>
-      <p:sp>
-        <p:nvSpPr>
-          <p:cNvPr id="17" name="Text 15"/>
-          <p:cNvSpPr/>
-          <p:nvPr/>
-        </p:nvSpPr>
-        <p:spPr>
-          <a:xfrm>
-            <a:off x="7909560" y="3849624"/>
-            <a:ext cx="2926080" cy="164592"/>
-          </a:xfrm>
-          <a:prstGeom prst="rect">
-            <a:avLst/>
-          </a:prstGeom>
-          <a:noFill/>
-          <a:ln/>
-        </p:spPr>
-        <p:txBody>
-          <a:bodyPr wrap="square" lIns="0" tIns="0" rIns="0" bIns="0" rtlCol="0" anchor="ctr"/>
-          <a:lstStyle/>
-          <a:p>
-            <a:pPr algn="ctr" indent="0" marL="0">
-              <a:buNone/>
-            </a:pPr>
-            <a:r>
-              <a:rPr lang="en-US" sz="900" dirty="0">
-                <a:solidFill>
-                  <a:srgbClr val="003A63"/>
-                </a:solidFill>
-                <a:latin typeface="Aptos" pitchFamily="34" charset="0"/>
-                <a:ea typeface="Aptos" pitchFamily="34" charset="-122"/>
-                <a:cs typeface="Aptos" pitchFamily="34" charset="-120"/>
-              </a:rPr>
-              <a:t>Human review</a:t>
-            </a:r>
-            <a:endParaRPr lang="en-US" sz="900" dirty="0"/>
-          </a:p>
-        </p:txBody>
-      </p:sp>
-      <p:sp>
-        <p:nvSpPr>
-          <p:cNvPr id="18" name="Shape 16"/>
           <p:cNvSpPr/>
           <p:nvPr/>
         </p:nvSpPr>
@@ -5196,7 +5131,7 @@
       </p:sp>
       <p:sp>
         <p:nvSpPr>
-          <p:cNvPr id="19" name="Text 17"/>
+          <p:cNvPr id="17" name="Text 15"/>
           <p:cNvSpPr/>
           <p:nvPr/>
         </p:nvSpPr>
@@ -5235,7 +5170,7 @@
       </p:sp>
       <p:sp>
         <p:nvSpPr>
-          <p:cNvPr id="20" name="Text 18"/>
+          <p:cNvPr id="18" name="Text 16"/>
           <p:cNvSpPr/>
           <p:nvPr/>
         </p:nvSpPr>
@@ -5743,13 +5678,11 @@
             </a:avLst>
           </a:prstGeom>
           <a:solidFill>
-            <a:srgbClr val="FFFFFF">
-              <a:alpha val="88000"/>
-            </a:srgbClr>
+            <a:srgbClr val="FFFFFF"/>
           </a:solidFill>
           <a:ln w="12700">
             <a:solidFill>
-              <a:srgbClr val="D6E8F2"/>
+              <a:srgbClr val="B9D7E6"/>
             </a:solidFill>
             <a:prstDash val="solid"/>
           </a:ln>
@@ -5757,26 +5690,42 @@
       </p:sp>
       <p:sp>
         <p:nvSpPr>
-          <p:cNvPr id="14" name="Shape 12"/>
-          <p:cNvSpPr/>
-          <p:nvPr/>
-        </p:nvSpPr>
-        <p:spPr>
-          <a:xfrm>
-            <a:off x="8046720" y="3108960"/>
-            <a:ext cx="2651760" cy="896112"/>
-          </a:xfrm>
-          <a:prstGeom prst="arc">
-            <a:avLst/>
-          </a:prstGeom>
-          <a:noFill/>
-          <a:ln w="25400">
-            <a:solidFill>
-              <a:srgbClr val="0068B7"/>
-            </a:solidFill>
-            <a:prstDash val="solid"/>
-          </a:ln>
-        </p:spPr>
+          <p:cNvPr id="14" name="Text 12"/>
+          <p:cNvSpPr/>
+          <p:nvPr/>
+        </p:nvSpPr>
+        <p:spPr>
+          <a:xfrm>
+            <a:off x="7799832" y="2935224"/>
+            <a:ext cx="3145536" cy="256032"/>
+          </a:xfrm>
+          <a:prstGeom prst="rect">
+            <a:avLst/>
+          </a:prstGeom>
+          <a:noFill/>
+          <a:ln/>
+        </p:spPr>
+        <p:txBody>
+          <a:bodyPr wrap="square" lIns="0" tIns="0" rIns="0" bIns="0" rtlCol="0" anchor="ctr"/>
+          <a:lstStyle/>
+          <a:p>
+            <a:pPr indent="0" marL="0">
+              <a:buNone/>
+            </a:pPr>
+            <a:r>
+              <a:rPr lang="en-US" sz="1300" b="1" dirty="0">
+                <a:solidFill>
+                  <a:srgbClr val="0068B7"/>
+                </a:solidFill>
+                <a:latin typeface="Aptos" pitchFamily="34" charset="0"/>
+                <a:ea typeface="Aptos" pitchFamily="34" charset="-122"/>
+                <a:cs typeface="Aptos" pitchFamily="34" charset="-120"/>
+              </a:rPr>
+              <a:t>Concept checkpoints</a:t>
+            </a:r>
+            <a:endParaRPr lang="en-US" sz="1300" dirty="0"/>
+          </a:p>
+        </p:txBody>
       </p:sp>
       <p:sp>
         <p:nvSpPr>
@@ -5786,102 +5735,67 @@
         </p:nvSpPr>
         <p:spPr>
           <a:xfrm>
-            <a:off x="7909560" y="3099816"/>
-            <a:ext cx="2926080" cy="256032"/>
-          </a:xfrm>
-          <a:prstGeom prst="rect">
-            <a:avLst/>
-          </a:prstGeom>
-          <a:noFill/>
-          <a:ln/>
-        </p:spPr>
-        <p:txBody>
-          <a:bodyPr wrap="square" lIns="0" tIns="0" rIns="0" bIns="0" rtlCol="0" anchor="ctr"/>
-          <a:lstStyle/>
-          <a:p>
-            <a:pPr algn="ctr" indent="0" marL="0">
-              <a:buNone/>
-            </a:pPr>
-            <a:r>
-              <a:rPr lang="en-US" sz="1500" b="1" dirty="0">
-                <a:solidFill>
-                  <a:srgbClr val="003A63"/>
-                </a:solidFill>
-                <a:latin typeface="Aptos" pitchFamily="34" charset="0"/>
-                <a:ea typeface="Aptos" pitchFamily="34" charset="-122"/>
-                <a:cs typeface="Aptos" pitchFamily="34" charset="-120"/>
-              </a:rPr>
-              <a:t>Risk</a:t>
-            </a:r>
-            <a:endParaRPr lang="en-US" sz="1500" dirty="0"/>
+            <a:off x="7818120" y="3300984"/>
+            <a:ext cx="3090672" cy="877824"/>
+          </a:xfrm>
+          <a:prstGeom prst="rect">
+            <a:avLst/>
+          </a:prstGeom>
+          <a:noFill/>
+          <a:ln/>
+        </p:spPr>
+        <p:txBody>
+          <a:bodyPr wrap="square" lIns="254" tIns="254" rIns="254" bIns="254" rtlCol="0" anchor="t">
+            <a:normAutofit/>
+          </a:bodyPr>
+          <a:lstStyle/>
+          <a:p>
+            <a:r>
+              <a:rPr lang="en-US" sz="1380" dirty="0">
+                <a:solidFill>
+                  <a:srgbClr val="17364A"/>
+                </a:solidFill>
+                <a:latin typeface="Aptos" pitchFamily="34" charset="0"/>
+                <a:ea typeface="Aptos" pitchFamily="34" charset="-122"/>
+                <a:cs typeface="Aptos" pitchFamily="34" charset="-120"/>
+              </a:rPr>
+              <a:t>Recommended guardrails include the following:</a:t>
+            </a:r>
+            <a:endParaRPr lang="en-US" sz="1380" dirty="0"/>
+          </a:p>
+          <a:p>
+            <a:r>
+              <a:rPr lang="en-US" sz="1380" dirty="0">
+                <a:solidFill>
+                  <a:srgbClr val="17364A"/>
+                </a:solidFill>
+                <a:latin typeface="Aptos" pitchFamily="34" charset="0"/>
+                <a:ea typeface="Aptos" pitchFamily="34" charset="-122"/>
+                <a:cs typeface="Aptos" pitchFamily="34" charset="-120"/>
+              </a:rPr>
+              <a:t>Require source traceability for summaries and extracted information.</a:t>
+            </a:r>
+            <a:endParaRPr lang="en-US" sz="1380" dirty="0"/>
+          </a:p>
+          <a:p>
+            <a:r>
+              <a:rPr lang="en-US" sz="1380" dirty="0">
+                <a:solidFill>
+                  <a:srgbClr val="17364A"/>
+                </a:solidFill>
+                <a:latin typeface="Aptos" pitchFamily="34" charset="0"/>
+                <a:ea typeface="Aptos" pitchFamily="34" charset="-122"/>
+                <a:cs typeface="Aptos" pitchFamily="34" charset="-120"/>
+              </a:rPr>
+              <a:t>Use AI outputs as prompts for review, not automatic conclusions.</a:t>
+            </a:r>
+            <a:endParaRPr lang="en-US" sz="1380" dirty="0"/>
           </a:p>
         </p:txBody>
       </p:sp>
       <p:sp>
         <p:nvSpPr>
           <p:cNvPr id="16" name="Shape 14"/>
-          <p:cNvSpPr/>
-          <p:nvPr/>
-        </p:nvSpPr>
-        <p:spPr>
-          <a:xfrm>
-            <a:off x="8366760" y="3639312"/>
-            <a:ext cx="2011680" cy="0"/>
-          </a:xfrm>
-          <a:prstGeom prst="line">
-            <a:avLst/>
-          </a:prstGeom>
-          <a:noFill/>
-          <a:ln w="63500">
-            <a:solidFill>
-              <a:srgbClr val="2F8A28"/>
-            </a:solidFill>
-            <a:prstDash val="solid"/>
-          </a:ln>
-        </p:spPr>
-      </p:sp>
-      <p:sp>
-        <p:nvSpPr>
-          <p:cNvPr id="17" name="Text 15"/>
-          <p:cNvSpPr/>
-          <p:nvPr/>
-        </p:nvSpPr>
-        <p:spPr>
-          <a:xfrm>
-            <a:off x="7909560" y="3849624"/>
-            <a:ext cx="2926080" cy="164592"/>
-          </a:xfrm>
-          <a:prstGeom prst="rect">
-            <a:avLst/>
-          </a:prstGeom>
-          <a:noFill/>
-          <a:ln/>
-        </p:spPr>
-        <p:txBody>
-          <a:bodyPr wrap="square" lIns="0" tIns="0" rIns="0" bIns="0" rtlCol="0" anchor="ctr"/>
-          <a:lstStyle/>
-          <a:p>
-            <a:pPr algn="ctr" indent="0" marL="0">
-              <a:buNone/>
-            </a:pPr>
-            <a:r>
-              <a:rPr lang="en-US" sz="900" dirty="0">
-                <a:solidFill>
-                  <a:srgbClr val="003A63"/>
-                </a:solidFill>
-                <a:latin typeface="Aptos" pitchFamily="34" charset="0"/>
-                <a:ea typeface="Aptos" pitchFamily="34" charset="-122"/>
-                <a:cs typeface="Aptos" pitchFamily="34" charset="-120"/>
-              </a:rPr>
-              <a:t>Human review</a:t>
-            </a:r>
-            <a:endParaRPr lang="en-US" sz="900" dirty="0"/>
-          </a:p>
-        </p:txBody>
-      </p:sp>
-      <p:sp>
-        <p:nvSpPr>
-          <p:cNvPr id="18" name="Shape 16"/>
           <p:cNvSpPr/>
           <p:nvPr/>
         </p:nvSpPr>
@@ -5908,7 +5822,7 @@
       </p:sp>
       <p:sp>
         <p:nvSpPr>
-          <p:cNvPr id="19" name="Text 17"/>
+          <p:cNvPr id="17" name="Text 15"/>
           <p:cNvSpPr/>
           <p:nvPr/>
         </p:nvSpPr>
@@ -5947,7 +5861,7 @@
       </p:sp>
       <p:sp>
         <p:nvSpPr>
-          <p:cNvPr id="20" name="Text 18"/>
+          <p:cNvPr id="18" name="Text 16"/>
           <p:cNvSpPr/>
           <p:nvPr/>
         </p:nvSpPr>
@@ -6455,13 +6369,11 @@
             </a:avLst>
           </a:prstGeom>
           <a:solidFill>
-            <a:srgbClr val="FFFFFF">
-              <a:alpha val="88000"/>
-            </a:srgbClr>
+            <a:srgbClr val="FFFFFF"/>
           </a:solidFill>
           <a:ln w="12700">
             <a:solidFill>
-              <a:srgbClr val="D6E8F2"/>
+              <a:srgbClr val="B9D7E6"/>
             </a:solidFill>
             <a:prstDash val="solid"/>
           </a:ln>
@@ -6469,26 +6381,42 @@
       </p:sp>
       <p:sp>
         <p:nvSpPr>
-          <p:cNvPr id="14" name="Shape 12"/>
-          <p:cNvSpPr/>
-          <p:nvPr/>
-        </p:nvSpPr>
-        <p:spPr>
-          <a:xfrm>
-            <a:off x="8046720" y="3108960"/>
-            <a:ext cx="2651760" cy="896112"/>
-          </a:xfrm>
-          <a:prstGeom prst="arc">
-            <a:avLst/>
-          </a:prstGeom>
-          <a:noFill/>
-          <a:ln w="25400">
-            <a:solidFill>
-              <a:srgbClr val="0068B7"/>
-            </a:solidFill>
-            <a:prstDash val="solid"/>
-          </a:ln>
-        </p:spPr>
+          <p:cNvPr id="14" name="Text 12"/>
+          <p:cNvSpPr/>
+          <p:nvPr/>
+        </p:nvSpPr>
+        <p:spPr>
+          <a:xfrm>
+            <a:off x="7799832" y="2935224"/>
+            <a:ext cx="3145536" cy="256032"/>
+          </a:xfrm>
+          <a:prstGeom prst="rect">
+            <a:avLst/>
+          </a:prstGeom>
+          <a:noFill/>
+          <a:ln/>
+        </p:spPr>
+        <p:txBody>
+          <a:bodyPr wrap="square" lIns="0" tIns="0" rIns="0" bIns="0" rtlCol="0" anchor="ctr"/>
+          <a:lstStyle/>
+          <a:p>
+            <a:pPr indent="0" marL="0">
+              <a:buNone/>
+            </a:pPr>
+            <a:r>
+              <a:rPr lang="en-US" sz="1300" b="1" dirty="0">
+                <a:solidFill>
+                  <a:srgbClr val="0068B7"/>
+                </a:solidFill>
+                <a:latin typeface="Aptos" pitchFamily="34" charset="0"/>
+                <a:ea typeface="Aptos" pitchFamily="34" charset="-122"/>
+                <a:cs typeface="Aptos" pitchFamily="34" charset="-120"/>
+              </a:rPr>
+              <a:t>Concept checkpoints</a:t>
+            </a:r>
+            <a:endParaRPr lang="en-US" sz="1300" dirty="0"/>
+          </a:p>
+        </p:txBody>
       </p:sp>
       <p:sp>
         <p:nvSpPr>
@@ -6498,102 +6426,67 @@
         </p:nvSpPr>
         <p:spPr>
           <a:xfrm>
-            <a:off x="7909560" y="3099816"/>
-            <a:ext cx="2926080" cy="256032"/>
-          </a:xfrm>
-          <a:prstGeom prst="rect">
-            <a:avLst/>
-          </a:prstGeom>
-          <a:noFill/>
-          <a:ln/>
-        </p:spPr>
-        <p:txBody>
-          <a:bodyPr wrap="square" lIns="0" tIns="0" rIns="0" bIns="0" rtlCol="0" anchor="ctr"/>
-          <a:lstStyle/>
-          <a:p>
-            <a:pPr algn="ctr" indent="0" marL="0">
-              <a:buNone/>
-            </a:pPr>
-            <a:r>
-              <a:rPr lang="en-US" sz="1500" b="1" dirty="0">
-                <a:solidFill>
-                  <a:srgbClr val="003A63"/>
-                </a:solidFill>
-                <a:latin typeface="Aptos" pitchFamily="34" charset="0"/>
-                <a:ea typeface="Aptos" pitchFamily="34" charset="-122"/>
-                <a:cs typeface="Aptos" pitchFamily="34" charset="-120"/>
-              </a:rPr>
-              <a:t>Risk</a:t>
-            </a:r>
-            <a:endParaRPr lang="en-US" sz="1500" dirty="0"/>
+            <a:off x="7818120" y="3300984"/>
+            <a:ext cx="3090672" cy="877824"/>
+          </a:xfrm>
+          <a:prstGeom prst="rect">
+            <a:avLst/>
+          </a:prstGeom>
+          <a:noFill/>
+          <a:ln/>
+        </p:spPr>
+        <p:txBody>
+          <a:bodyPr wrap="square" lIns="254" tIns="254" rIns="254" bIns="254" rtlCol="0" anchor="t">
+            <a:normAutofit/>
+          </a:bodyPr>
+          <a:lstStyle/>
+          <a:p>
+            <a:r>
+              <a:rPr lang="en-US" sz="1380" dirty="0">
+                <a:solidFill>
+                  <a:srgbClr val="17364A"/>
+                </a:solidFill>
+                <a:latin typeface="Aptos" pitchFamily="34" charset="0"/>
+                <a:ea typeface="Aptos" pitchFamily="34" charset="-122"/>
+                <a:cs typeface="Aptos" pitchFamily="34" charset="-120"/>
+              </a:rPr>
+              <a:t>Document uncertainty, missing data, and preliminary status.</a:t>
+            </a:r>
+            <a:endParaRPr lang="en-US" sz="1380" dirty="0"/>
+          </a:p>
+          <a:p>
+            <a:r>
+              <a:rPr lang="en-US" sz="1380" dirty="0">
+                <a:solidFill>
+                  <a:srgbClr val="17364A"/>
+                </a:solidFill>
+                <a:latin typeface="Aptos" pitchFamily="34" charset="0"/>
+                <a:ea typeface="Aptos" pitchFamily="34" charset="-122"/>
+                <a:cs typeface="Aptos" pitchFamily="34" charset="-120"/>
+              </a:rPr>
+              <a:t>Apply equity review to prioritization and signal detection workflows.</a:t>
+            </a:r>
+            <a:endParaRPr lang="en-US" sz="1380" dirty="0"/>
+          </a:p>
+          <a:p>
+            <a:r>
+              <a:rPr lang="en-US" sz="1380" dirty="0">
+                <a:solidFill>
+                  <a:srgbClr val="17364A"/>
+                </a:solidFill>
+                <a:latin typeface="Aptos" pitchFamily="34" charset="0"/>
+                <a:ea typeface="Aptos" pitchFamily="34" charset="-122"/>
+                <a:cs typeface="Aptos" pitchFamily="34" charset="-120"/>
+              </a:rPr>
+              <a:t>Define escalation to epidemiology leadership for unusual, high-risk, or public-facing.</a:t>
+            </a:r>
+            <a:endParaRPr lang="en-US" sz="1380" dirty="0"/>
           </a:p>
         </p:txBody>
       </p:sp>
       <p:sp>
         <p:nvSpPr>
           <p:cNvPr id="16" name="Shape 14"/>
-          <p:cNvSpPr/>
-          <p:nvPr/>
-        </p:nvSpPr>
-        <p:spPr>
-          <a:xfrm>
-            <a:off x="8366760" y="3639312"/>
-            <a:ext cx="2011680" cy="0"/>
-          </a:xfrm>
-          <a:prstGeom prst="line">
-            <a:avLst/>
-          </a:prstGeom>
-          <a:noFill/>
-          <a:ln w="63500">
-            <a:solidFill>
-              <a:srgbClr val="2F8A28"/>
-            </a:solidFill>
-            <a:prstDash val="solid"/>
-          </a:ln>
-        </p:spPr>
-      </p:sp>
-      <p:sp>
-        <p:nvSpPr>
-          <p:cNvPr id="17" name="Text 15"/>
-          <p:cNvSpPr/>
-          <p:nvPr/>
-        </p:nvSpPr>
-        <p:spPr>
-          <a:xfrm>
-            <a:off x="7909560" y="3849624"/>
-            <a:ext cx="2926080" cy="164592"/>
-          </a:xfrm>
-          <a:prstGeom prst="rect">
-            <a:avLst/>
-          </a:prstGeom>
-          <a:noFill/>
-          <a:ln/>
-        </p:spPr>
-        <p:txBody>
-          <a:bodyPr wrap="square" lIns="0" tIns="0" rIns="0" bIns="0" rtlCol="0" anchor="ctr"/>
-          <a:lstStyle/>
-          <a:p>
-            <a:pPr algn="ctr" indent="0" marL="0">
-              <a:buNone/>
-            </a:pPr>
-            <a:r>
-              <a:rPr lang="en-US" sz="900" dirty="0">
-                <a:solidFill>
-                  <a:srgbClr val="003A63"/>
-                </a:solidFill>
-                <a:latin typeface="Aptos" pitchFamily="34" charset="0"/>
-                <a:ea typeface="Aptos" pitchFamily="34" charset="-122"/>
-                <a:cs typeface="Aptos" pitchFamily="34" charset="-120"/>
-              </a:rPr>
-              <a:t>Human review</a:t>
-            </a:r>
-            <a:endParaRPr lang="en-US" sz="900" dirty="0"/>
-          </a:p>
-        </p:txBody>
-      </p:sp>
-      <p:sp>
-        <p:nvSpPr>
-          <p:cNvPr id="18" name="Shape 16"/>
           <p:cNvSpPr/>
           <p:nvPr/>
         </p:nvSpPr>
@@ -6620,7 +6513,7 @@
       </p:sp>
       <p:sp>
         <p:nvSpPr>
-          <p:cNvPr id="19" name="Text 17"/>
+          <p:cNvPr id="17" name="Text 15"/>
           <p:cNvSpPr/>
           <p:nvPr/>
         </p:nvSpPr>
@@ -6659,7 +6552,7 @@
       </p:sp>
       <p:sp>
         <p:nvSpPr>
-          <p:cNvPr id="20" name="Text 18"/>
+          <p:cNvPr id="18" name="Text 16"/>
           <p:cNvSpPr/>
           <p:nvPr/>
         </p:nvSpPr>
@@ -7167,13 +7060,11 @@
             </a:avLst>
           </a:prstGeom>
           <a:solidFill>
-            <a:srgbClr val="FFFFFF">
-              <a:alpha val="88000"/>
-            </a:srgbClr>
+            <a:srgbClr val="FFFFFF"/>
           </a:solidFill>
           <a:ln w="12700">
             <a:solidFill>
-              <a:srgbClr val="D6E8F2"/>
+              <a:srgbClr val="B9D7E6"/>
             </a:solidFill>
             <a:prstDash val="solid"/>
           </a:ln>
@@ -7181,119 +7072,112 @@
       </p:sp>
       <p:sp>
         <p:nvSpPr>
-          <p:cNvPr id="14" name="Shape 12"/>
-          <p:cNvSpPr/>
-          <p:nvPr/>
-        </p:nvSpPr>
-        <p:spPr>
-          <a:xfrm>
-            <a:off x="8074152" y="3291840"/>
-            <a:ext cx="2596896" cy="749808"/>
-          </a:xfrm>
-          <a:prstGeom prst="rect">
-            <a:avLst/>
-          </a:prstGeom>
-          <a:solidFill>
-            <a:srgbClr val="EAF6F8"/>
-          </a:solidFill>
-          <a:ln w="12700">
-            <a:solidFill>
-              <a:srgbClr val="8ABBD8"/>
-            </a:solidFill>
-            <a:prstDash val="solid"/>
-          </a:ln>
-        </p:spPr>
-      </p:sp>
-      <p:sp>
-        <p:nvSpPr>
-          <p:cNvPr id="15" name="Shape 13"/>
-          <p:cNvSpPr/>
-          <p:nvPr/>
-        </p:nvSpPr>
-        <p:spPr>
-          <a:xfrm>
-            <a:off x="8202168" y="3721608"/>
-            <a:ext cx="2340864" cy="0"/>
-          </a:xfrm>
-          <a:prstGeom prst="line">
-            <a:avLst/>
-          </a:prstGeom>
-          <a:noFill/>
-          <a:ln w="19050">
-            <a:solidFill>
-              <a:srgbClr val="0068B7"/>
-            </a:solidFill>
-            <a:prstDash val="solid"/>
-          </a:ln>
-        </p:spPr>
+          <p:cNvPr id="14" name="Text 12"/>
+          <p:cNvSpPr/>
+          <p:nvPr/>
+        </p:nvSpPr>
+        <p:spPr>
+          <a:xfrm>
+            <a:off x="7799832" y="2935224"/>
+            <a:ext cx="3145536" cy="256032"/>
+          </a:xfrm>
+          <a:prstGeom prst="rect">
+            <a:avLst/>
+          </a:prstGeom>
+          <a:noFill/>
+          <a:ln/>
+        </p:spPr>
+        <p:txBody>
+          <a:bodyPr wrap="square" lIns="0" tIns="0" rIns="0" bIns="0" rtlCol="0" anchor="ctr"/>
+          <a:lstStyle/>
+          <a:p>
+            <a:pPr indent="0" marL="0">
+              <a:buNone/>
+            </a:pPr>
+            <a:r>
+              <a:rPr lang="en-US" sz="1300" b="1" dirty="0">
+                <a:solidFill>
+                  <a:srgbClr val="0068B7"/>
+                </a:solidFill>
+                <a:latin typeface="Aptos" pitchFamily="34" charset="0"/>
+                <a:ea typeface="Aptos" pitchFamily="34" charset="-122"/>
+                <a:cs typeface="Aptos" pitchFamily="34" charset="-120"/>
+              </a:rPr>
+              <a:t>Concept checkpoints</a:t>
+            </a:r>
+            <a:endParaRPr lang="en-US" sz="1300" dirty="0"/>
+          </a:p>
+        </p:txBody>
+      </p:sp>
+      <p:sp>
+        <p:nvSpPr>
+          <p:cNvPr id="15" name="Text 13"/>
+          <p:cNvSpPr/>
+          <p:nvPr/>
+        </p:nvSpPr>
+        <p:spPr>
+          <a:xfrm>
+            <a:off x="7818120" y="3300984"/>
+            <a:ext cx="3090672" cy="877824"/>
+          </a:xfrm>
+          <a:prstGeom prst="rect">
+            <a:avLst/>
+          </a:prstGeom>
+          <a:noFill/>
+          <a:ln/>
+        </p:spPr>
+        <p:txBody>
+          <a:bodyPr wrap="square" lIns="254" tIns="254" rIns="254" bIns="254" rtlCol="0" anchor="t">
+            <a:normAutofit/>
+          </a:bodyPr>
+          <a:lstStyle/>
+          <a:p>
+            <a:r>
+              <a:rPr lang="en-US" sz="1380" dirty="0">
+                <a:solidFill>
+                  <a:srgbClr val="17364A"/>
+                </a:solidFill>
+                <a:latin typeface="Aptos" pitchFamily="34" charset="0"/>
+                <a:ea typeface="Aptos" pitchFamily="34" charset="-122"/>
+                <a:cs typeface="Aptos" pitchFamily="34" charset="-120"/>
+              </a:rPr>
+              <a:t>Where does this topic appear in your agency, program, or workflow?</a:t>
+            </a:r>
+            <a:endParaRPr lang="en-US" sz="1380" dirty="0"/>
+          </a:p>
+          <a:p>
+            <a:r>
+              <a:rPr lang="en-US" sz="1380" dirty="0">
+                <a:solidFill>
+                  <a:srgbClr val="17364A"/>
+                </a:solidFill>
+                <a:latin typeface="Aptos" pitchFamily="34" charset="0"/>
+                <a:ea typeface="Aptos" pitchFamily="34" charset="-122"/>
+                <a:cs typeface="Aptos" pitchFamily="34" charset="-120"/>
+              </a:rPr>
+              <a:t>Which staff roles would need to understand or apply this concept before AI use is approved?</a:t>
+            </a:r>
+            <a:endParaRPr lang="en-US" sz="1380" dirty="0"/>
+          </a:p>
+          <a:p>
+            <a:r>
+              <a:rPr lang="en-US" sz="1380" dirty="0">
+                <a:solidFill>
+                  <a:srgbClr val="17364A"/>
+                </a:solidFill>
+                <a:latin typeface="Aptos" pitchFamily="34" charset="0"/>
+                <a:ea typeface="Aptos" pitchFamily="34" charset="-122"/>
+                <a:cs typeface="Aptos" pitchFamily="34" charset="-120"/>
+              </a:rPr>
+              <a:t>What could go wrong if this topic is not addressed before implementation?</a:t>
+            </a:r>
+            <a:endParaRPr lang="en-US" sz="1380" dirty="0"/>
+          </a:p>
+        </p:txBody>
       </p:sp>
       <p:sp>
         <p:nvSpPr>
           <p:cNvPr id="16" name="Shape 14"/>
-          <p:cNvSpPr/>
-          <p:nvPr/>
-        </p:nvSpPr>
-        <p:spPr>
-          <a:xfrm>
-            <a:off x="9198864" y="4206240"/>
-            <a:ext cx="347472" cy="347472"/>
-          </a:xfrm>
-          <a:prstGeom prst="ellipse">
-            <a:avLst/>
-          </a:prstGeom>
-          <a:solidFill>
-            <a:srgbClr val="2F8A28"/>
-          </a:solidFill>
-          <a:ln w="12700">
-            <a:solidFill>
-              <a:srgbClr val="2F8A28"/>
-            </a:solidFill>
-            <a:prstDash val="solid"/>
-          </a:ln>
-        </p:spPr>
-      </p:sp>
-      <p:sp>
-        <p:nvSpPr>
-          <p:cNvPr id="17" name="Text 15"/>
-          <p:cNvSpPr/>
-          <p:nvPr/>
-        </p:nvSpPr>
-        <p:spPr>
-          <a:xfrm>
-            <a:off x="7909560" y="3977640"/>
-            <a:ext cx="2926080" cy="182880"/>
-          </a:xfrm>
-          <a:prstGeom prst="rect">
-            <a:avLst/>
-          </a:prstGeom>
-          <a:noFill/>
-          <a:ln/>
-        </p:spPr>
-        <p:txBody>
-          <a:bodyPr wrap="square" lIns="0" tIns="0" rIns="0" bIns="0" rtlCol="0" anchor="ctr"/>
-          <a:lstStyle/>
-          <a:p>
-            <a:pPr algn="ctr" indent="0" marL="0">
-              <a:buNone/>
-            </a:pPr>
-            <a:r>
-              <a:rPr lang="en-US" sz="1000" dirty="0">
-                <a:solidFill>
-                  <a:srgbClr val="003A63"/>
-                </a:solidFill>
-                <a:latin typeface="Aptos" pitchFamily="34" charset="0"/>
-                <a:ea typeface="Aptos" pitchFamily="34" charset="-122"/>
-                <a:cs typeface="Aptos" pitchFamily="34" charset="-120"/>
-              </a:rPr>
-              <a:t>Concept to action</a:t>
-            </a:r>
-            <a:endParaRPr lang="en-US" sz="1000" dirty="0"/>
-          </a:p>
-        </p:txBody>
-      </p:sp>
-      <p:sp>
-        <p:nvSpPr>
-          <p:cNvPr id="18" name="Shape 16"/>
           <p:cNvSpPr/>
           <p:nvPr/>
         </p:nvSpPr>
@@ -7320,7 +7204,7 @@
       </p:sp>
       <p:sp>
         <p:nvSpPr>
-          <p:cNvPr id="19" name="Text 17"/>
+          <p:cNvPr id="17" name="Text 15"/>
           <p:cNvSpPr/>
           <p:nvPr/>
         </p:nvSpPr>
@@ -7359,7 +7243,7 @@
       </p:sp>
       <p:sp>
         <p:nvSpPr>
-          <p:cNvPr id="20" name="Text 18"/>
+          <p:cNvPr id="18" name="Text 16"/>
           <p:cNvSpPr/>
           <p:nvPr/>
         </p:nvSpPr>
@@ -7853,13 +7737,11 @@
             </a:avLst>
           </a:prstGeom>
           <a:solidFill>
-            <a:srgbClr val="FFFFFF">
-              <a:alpha val="88000"/>
-            </a:srgbClr>
+            <a:srgbClr val="FFFFFF"/>
           </a:solidFill>
           <a:ln w="12700">
             <a:solidFill>
-              <a:srgbClr val="D6E8F2"/>
+              <a:srgbClr val="B9D7E6"/>
             </a:solidFill>
             <a:prstDash val="solid"/>
           </a:ln>
@@ -7867,119 +7749,98 @@
       </p:sp>
       <p:sp>
         <p:nvSpPr>
-          <p:cNvPr id="14" name="Shape 12"/>
-          <p:cNvSpPr/>
-          <p:nvPr/>
-        </p:nvSpPr>
-        <p:spPr>
-          <a:xfrm>
-            <a:off x="8074152" y="3291840"/>
-            <a:ext cx="2596896" cy="749808"/>
-          </a:xfrm>
-          <a:prstGeom prst="rect">
-            <a:avLst/>
-          </a:prstGeom>
-          <a:solidFill>
-            <a:srgbClr val="EAF6F8"/>
-          </a:solidFill>
-          <a:ln w="12700">
-            <a:solidFill>
-              <a:srgbClr val="8ABBD8"/>
-            </a:solidFill>
-            <a:prstDash val="solid"/>
-          </a:ln>
-        </p:spPr>
-      </p:sp>
-      <p:sp>
-        <p:nvSpPr>
-          <p:cNvPr id="15" name="Shape 13"/>
-          <p:cNvSpPr/>
-          <p:nvPr/>
-        </p:nvSpPr>
-        <p:spPr>
-          <a:xfrm>
-            <a:off x="8202168" y="3721608"/>
-            <a:ext cx="2340864" cy="0"/>
-          </a:xfrm>
-          <a:prstGeom prst="line">
-            <a:avLst/>
-          </a:prstGeom>
-          <a:noFill/>
-          <a:ln w="19050">
-            <a:solidFill>
-              <a:srgbClr val="0068B7"/>
-            </a:solidFill>
-            <a:prstDash val="solid"/>
-          </a:ln>
-        </p:spPr>
+          <p:cNvPr id="14" name="Text 12"/>
+          <p:cNvSpPr/>
+          <p:nvPr/>
+        </p:nvSpPr>
+        <p:spPr>
+          <a:xfrm>
+            <a:off x="7799832" y="2935224"/>
+            <a:ext cx="3145536" cy="256032"/>
+          </a:xfrm>
+          <a:prstGeom prst="rect">
+            <a:avLst/>
+          </a:prstGeom>
+          <a:noFill/>
+          <a:ln/>
+        </p:spPr>
+        <p:txBody>
+          <a:bodyPr wrap="square" lIns="0" tIns="0" rIns="0" bIns="0" rtlCol="0" anchor="ctr"/>
+          <a:lstStyle/>
+          <a:p>
+            <a:pPr indent="0" marL="0">
+              <a:buNone/>
+            </a:pPr>
+            <a:r>
+              <a:rPr lang="en-US" sz="1300" b="1" dirty="0">
+                <a:solidFill>
+                  <a:srgbClr val="0068B7"/>
+                </a:solidFill>
+                <a:latin typeface="Aptos" pitchFamily="34" charset="0"/>
+                <a:ea typeface="Aptos" pitchFamily="34" charset="-122"/>
+                <a:cs typeface="Aptos" pitchFamily="34" charset="-120"/>
+              </a:rPr>
+              <a:t>Concept checkpoints</a:t>
+            </a:r>
+            <a:endParaRPr lang="en-US" sz="1300" dirty="0"/>
+          </a:p>
+        </p:txBody>
+      </p:sp>
+      <p:sp>
+        <p:nvSpPr>
+          <p:cNvPr id="15" name="Text 13"/>
+          <p:cNvSpPr/>
+          <p:nvPr/>
+        </p:nvSpPr>
+        <p:spPr>
+          <a:xfrm>
+            <a:off x="7818120" y="3300984"/>
+            <a:ext cx="3090672" cy="877824"/>
+          </a:xfrm>
+          <a:prstGeom prst="rect">
+            <a:avLst/>
+          </a:prstGeom>
+          <a:noFill/>
+          <a:ln/>
+        </p:spPr>
+        <p:txBody>
+          <a:bodyPr wrap="square" lIns="254" tIns="254" rIns="254" bIns="254" rtlCol="0" anchor="t">
+            <a:normAutofit/>
+          </a:bodyPr>
+          <a:lstStyle/>
+          <a:p>
+            <a:r>
+              <a:rPr lang="en-US" sz="1380" dirty="0">
+                <a:solidFill>
+                  <a:srgbClr val="17364A"/>
+                </a:solidFill>
+                <a:latin typeface="Aptos" pitchFamily="34" charset="0"/>
+                <a:ea typeface="Aptos" pitchFamily="34" charset="-122"/>
+                <a:cs typeface="Aptos" pitchFamily="34" charset="-120"/>
+              </a:rPr>
+              <a:t>What evidence would governance, leadership, or operations staff need before moving forward?</a:t>
+            </a:r>
+            <a:endParaRPr lang="en-US" sz="1380" dirty="0"/>
+          </a:p>
+          <a:p>
+            <a:r>
+              <a:rPr lang="en-US" sz="1380" dirty="0">
+                <a:solidFill>
+                  <a:srgbClr val="17364A"/>
+                </a:solidFill>
+                <a:latin typeface="Aptos" pitchFamily="34" charset="0"/>
+                <a:ea typeface="Aptos" pitchFamily="34" charset="-122"/>
+                <a:cs typeface="Aptos" pitchFamily="34" charset="-120"/>
+              </a:rPr>
+              <a:t>Which policy, data, equity, privacy, security, or workflow questions remain unresolved?</a:t>
+            </a:r>
+            <a:endParaRPr lang="en-US" sz="1380" dirty="0"/>
+          </a:p>
+        </p:txBody>
       </p:sp>
       <p:sp>
         <p:nvSpPr>
           <p:cNvPr id="16" name="Shape 14"/>
-          <p:cNvSpPr/>
-          <p:nvPr/>
-        </p:nvSpPr>
-        <p:spPr>
-          <a:xfrm>
-            <a:off x="9198864" y="4206240"/>
-            <a:ext cx="347472" cy="347472"/>
-          </a:xfrm>
-          <a:prstGeom prst="ellipse">
-            <a:avLst/>
-          </a:prstGeom>
-          <a:solidFill>
-            <a:srgbClr val="2F8A28"/>
-          </a:solidFill>
-          <a:ln w="12700">
-            <a:solidFill>
-              <a:srgbClr val="2F8A28"/>
-            </a:solidFill>
-            <a:prstDash val="solid"/>
-          </a:ln>
-        </p:spPr>
-      </p:sp>
-      <p:sp>
-        <p:nvSpPr>
-          <p:cNvPr id="17" name="Text 15"/>
-          <p:cNvSpPr/>
-          <p:nvPr/>
-        </p:nvSpPr>
-        <p:spPr>
-          <a:xfrm>
-            <a:off x="7909560" y="3977640"/>
-            <a:ext cx="2926080" cy="182880"/>
-          </a:xfrm>
-          <a:prstGeom prst="rect">
-            <a:avLst/>
-          </a:prstGeom>
-          <a:noFill/>
-          <a:ln/>
-        </p:spPr>
-        <p:txBody>
-          <a:bodyPr wrap="square" lIns="0" tIns="0" rIns="0" bIns="0" rtlCol="0" anchor="ctr"/>
-          <a:lstStyle/>
-          <a:p>
-            <a:pPr algn="ctr" indent="0" marL="0">
-              <a:buNone/>
-            </a:pPr>
-            <a:r>
-              <a:rPr lang="en-US" sz="1000" dirty="0">
-                <a:solidFill>
-                  <a:srgbClr val="003A63"/>
-                </a:solidFill>
-                <a:latin typeface="Aptos" pitchFamily="34" charset="0"/>
-                <a:ea typeface="Aptos" pitchFamily="34" charset="-122"/>
-                <a:cs typeface="Aptos" pitchFamily="34" charset="-120"/>
-              </a:rPr>
-              <a:t>Concept to action</a:t>
-            </a:r>
-            <a:endParaRPr lang="en-US" sz="1000" dirty="0"/>
-          </a:p>
-        </p:txBody>
-      </p:sp>
-      <p:sp>
-        <p:nvSpPr>
-          <p:cNvPr id="18" name="Shape 16"/>
           <p:cNvSpPr/>
           <p:nvPr/>
         </p:nvSpPr>
@@ -8006,7 +7867,7 @@
       </p:sp>
       <p:sp>
         <p:nvSpPr>
-          <p:cNvPr id="19" name="Text 17"/>
+          <p:cNvPr id="17" name="Text 15"/>
           <p:cNvSpPr/>
           <p:nvPr/>
         </p:nvSpPr>
@@ -8045,7 +7906,7 @@
       </p:sp>
       <p:sp>
         <p:nvSpPr>
-          <p:cNvPr id="20" name="Text 18"/>
+          <p:cNvPr id="18" name="Text 16"/>
           <p:cNvSpPr/>
           <p:nvPr/>
         </p:nvSpPr>
@@ -8539,13 +8400,11 @@
             </a:avLst>
           </a:prstGeom>
           <a:solidFill>
-            <a:srgbClr val="FFFFFF">
-              <a:alpha val="88000"/>
-            </a:srgbClr>
+            <a:srgbClr val="FFFFFF"/>
           </a:solidFill>
           <a:ln w="12700">
             <a:solidFill>
-              <a:srgbClr val="D6E8F2"/>
+              <a:srgbClr val="B9D7E6"/>
             </a:solidFill>
             <a:prstDash val="solid"/>
           </a:ln>
@@ -8553,119 +8412,98 @@
       </p:sp>
       <p:sp>
         <p:nvSpPr>
-          <p:cNvPr id="14" name="Shape 12"/>
-          <p:cNvSpPr/>
-          <p:nvPr/>
-        </p:nvSpPr>
-        <p:spPr>
-          <a:xfrm>
-            <a:off x="8074152" y="3291840"/>
-            <a:ext cx="2596896" cy="749808"/>
-          </a:xfrm>
-          <a:prstGeom prst="rect">
-            <a:avLst/>
-          </a:prstGeom>
-          <a:solidFill>
-            <a:srgbClr val="EAF6F8"/>
-          </a:solidFill>
-          <a:ln w="12700">
-            <a:solidFill>
-              <a:srgbClr val="8ABBD8"/>
-            </a:solidFill>
-            <a:prstDash val="solid"/>
-          </a:ln>
-        </p:spPr>
-      </p:sp>
-      <p:sp>
-        <p:nvSpPr>
-          <p:cNvPr id="15" name="Shape 13"/>
-          <p:cNvSpPr/>
-          <p:nvPr/>
-        </p:nvSpPr>
-        <p:spPr>
-          <a:xfrm>
-            <a:off x="8202168" y="3721608"/>
-            <a:ext cx="2340864" cy="0"/>
-          </a:xfrm>
-          <a:prstGeom prst="line">
-            <a:avLst/>
-          </a:prstGeom>
-          <a:noFill/>
-          <a:ln w="19050">
-            <a:solidFill>
-              <a:srgbClr val="0068B7"/>
-            </a:solidFill>
-            <a:prstDash val="solid"/>
-          </a:ln>
-        </p:spPr>
+          <p:cNvPr id="14" name="Text 12"/>
+          <p:cNvSpPr/>
+          <p:nvPr/>
+        </p:nvSpPr>
+        <p:spPr>
+          <a:xfrm>
+            <a:off x="7799832" y="2935224"/>
+            <a:ext cx="3145536" cy="256032"/>
+          </a:xfrm>
+          <a:prstGeom prst="rect">
+            <a:avLst/>
+          </a:prstGeom>
+          <a:noFill/>
+          <a:ln/>
+        </p:spPr>
+        <p:txBody>
+          <a:bodyPr wrap="square" lIns="0" tIns="0" rIns="0" bIns="0" rtlCol="0" anchor="ctr"/>
+          <a:lstStyle/>
+          <a:p>
+            <a:pPr indent="0" marL="0">
+              <a:buNone/>
+            </a:pPr>
+            <a:r>
+              <a:rPr lang="en-US" sz="1300" b="1" dirty="0">
+                <a:solidFill>
+                  <a:srgbClr val="0068B7"/>
+                </a:solidFill>
+                <a:latin typeface="Aptos" pitchFamily="34" charset="0"/>
+                <a:ea typeface="Aptos" pitchFamily="34" charset="-122"/>
+                <a:cs typeface="Aptos" pitchFamily="34" charset="-120"/>
+              </a:rPr>
+              <a:t>Concept checkpoints</a:t>
+            </a:r>
+            <a:endParaRPr lang="en-US" sz="1300" dirty="0"/>
+          </a:p>
+        </p:txBody>
+      </p:sp>
+      <p:sp>
+        <p:nvSpPr>
+          <p:cNvPr id="15" name="Text 13"/>
+          <p:cNvSpPr/>
+          <p:nvPr/>
+        </p:nvSpPr>
+        <p:spPr>
+          <a:xfrm>
+            <a:off x="7818120" y="3300984"/>
+            <a:ext cx="3090672" cy="877824"/>
+          </a:xfrm>
+          <a:prstGeom prst="rect">
+            <a:avLst/>
+          </a:prstGeom>
+          <a:noFill/>
+          <a:ln/>
+        </p:spPr>
+        <p:txBody>
+          <a:bodyPr wrap="square" lIns="254" tIns="254" rIns="254" bIns="254" rtlCol="0" anchor="t">
+            <a:normAutofit/>
+          </a:bodyPr>
+          <a:lstStyle/>
+          <a:p>
+            <a:r>
+              <a:rPr lang="en-US" sz="1380" dirty="0">
+                <a:solidFill>
+                  <a:srgbClr val="17364A"/>
+                </a:solidFill>
+                <a:latin typeface="Aptos" pitchFamily="34" charset="0"/>
+                <a:ea typeface="Aptos" pitchFamily="34" charset="-122"/>
+                <a:cs typeface="Aptos" pitchFamily="34" charset="-120"/>
+              </a:rPr>
+              <a:t>Create an AI-supported case investigation or outbreak response workflow review.</a:t>
+            </a:r>
+            <a:endParaRPr lang="en-US" sz="1380" dirty="0"/>
+          </a:p>
+          <a:p>
+            <a:r>
+              <a:rPr lang="en-US" sz="1380" dirty="0">
+                <a:solidFill>
+                  <a:srgbClr val="17364A"/>
+                </a:solidFill>
+                <a:latin typeface="Aptos" pitchFamily="34" charset="0"/>
+                <a:ea typeface="Aptos" pitchFamily="34" charset="-122"/>
+                <a:cs typeface="Aptos" pitchFamily="34" charset="-120"/>
+              </a:rPr>
+              <a:t>Include the supported task, data sources, AI output, source traceability, human review.</a:t>
+            </a:r>
+            <a:endParaRPr lang="en-US" sz="1380" dirty="0"/>
+          </a:p>
+        </p:txBody>
       </p:sp>
       <p:sp>
         <p:nvSpPr>
           <p:cNvPr id="16" name="Shape 14"/>
-          <p:cNvSpPr/>
-          <p:nvPr/>
-        </p:nvSpPr>
-        <p:spPr>
-          <a:xfrm>
-            <a:off x="9198864" y="4206240"/>
-            <a:ext cx="347472" cy="347472"/>
-          </a:xfrm>
-          <a:prstGeom prst="ellipse">
-            <a:avLst/>
-          </a:prstGeom>
-          <a:solidFill>
-            <a:srgbClr val="2F8A28"/>
-          </a:solidFill>
-          <a:ln w="12700">
-            <a:solidFill>
-              <a:srgbClr val="2F8A28"/>
-            </a:solidFill>
-            <a:prstDash val="solid"/>
-          </a:ln>
-        </p:spPr>
-      </p:sp>
-      <p:sp>
-        <p:nvSpPr>
-          <p:cNvPr id="17" name="Text 15"/>
-          <p:cNvSpPr/>
-          <p:nvPr/>
-        </p:nvSpPr>
-        <p:spPr>
-          <a:xfrm>
-            <a:off x="7909560" y="3977640"/>
-            <a:ext cx="2926080" cy="182880"/>
-          </a:xfrm>
-          <a:prstGeom prst="rect">
-            <a:avLst/>
-          </a:prstGeom>
-          <a:noFill/>
-          <a:ln/>
-        </p:spPr>
-        <p:txBody>
-          <a:bodyPr wrap="square" lIns="0" tIns="0" rIns="0" bIns="0" rtlCol="0" anchor="ctr"/>
-          <a:lstStyle/>
-          <a:p>
-            <a:pPr algn="ctr" indent="0" marL="0">
-              <a:buNone/>
-            </a:pPr>
-            <a:r>
-              <a:rPr lang="en-US" sz="1000" dirty="0">
-                <a:solidFill>
-                  <a:srgbClr val="003A63"/>
-                </a:solidFill>
-                <a:latin typeface="Aptos" pitchFamily="34" charset="0"/>
-                <a:ea typeface="Aptos" pitchFamily="34" charset="-122"/>
-                <a:cs typeface="Aptos" pitchFamily="34" charset="-120"/>
-              </a:rPr>
-              <a:t>Concept to action</a:t>
-            </a:r>
-            <a:endParaRPr lang="en-US" sz="1000" dirty="0"/>
-          </a:p>
-        </p:txBody>
-      </p:sp>
-      <p:sp>
-        <p:nvSpPr>
-          <p:cNvPr id="18" name="Shape 16"/>
           <p:cNvSpPr/>
           <p:nvPr/>
         </p:nvSpPr>
@@ -8692,7 +8530,7 @@
       </p:sp>
       <p:sp>
         <p:nvSpPr>
-          <p:cNvPr id="19" name="Text 17"/>
+          <p:cNvPr id="17" name="Text 15"/>
           <p:cNvSpPr/>
           <p:nvPr/>
         </p:nvSpPr>
@@ -8731,7 +8569,7 @@
       </p:sp>
       <p:sp>
         <p:nvSpPr>
-          <p:cNvPr id="20" name="Text 18"/>
+          <p:cNvPr id="18" name="Text 16"/>
           <p:cNvSpPr/>
           <p:nvPr/>
         </p:nvSpPr>
@@ -9239,13 +9077,11 @@
             </a:avLst>
           </a:prstGeom>
           <a:solidFill>
-            <a:srgbClr val="FFFFFF">
-              <a:alpha val="88000"/>
-            </a:srgbClr>
+            <a:srgbClr val="FFFFFF"/>
           </a:solidFill>
           <a:ln w="12700">
             <a:solidFill>
-              <a:srgbClr val="D6E8F2"/>
+              <a:srgbClr val="B9D7E6"/>
             </a:solidFill>
             <a:prstDash val="solid"/>
           </a:ln>
@@ -9253,119 +9089,112 @@
       </p:sp>
       <p:sp>
         <p:nvSpPr>
-          <p:cNvPr id="14" name="Shape 12"/>
-          <p:cNvSpPr/>
-          <p:nvPr/>
-        </p:nvSpPr>
-        <p:spPr>
-          <a:xfrm>
-            <a:off x="8074152" y="3291840"/>
-            <a:ext cx="2596896" cy="749808"/>
-          </a:xfrm>
-          <a:prstGeom prst="rect">
-            <a:avLst/>
-          </a:prstGeom>
-          <a:solidFill>
-            <a:srgbClr val="EAF6F8"/>
-          </a:solidFill>
-          <a:ln w="12700">
-            <a:solidFill>
-              <a:srgbClr val="8ABBD8"/>
-            </a:solidFill>
-            <a:prstDash val="solid"/>
-          </a:ln>
-        </p:spPr>
-      </p:sp>
-      <p:sp>
-        <p:nvSpPr>
-          <p:cNvPr id="15" name="Shape 13"/>
-          <p:cNvSpPr/>
-          <p:nvPr/>
-        </p:nvSpPr>
-        <p:spPr>
-          <a:xfrm>
-            <a:off x="8202168" y="3721608"/>
-            <a:ext cx="2340864" cy="0"/>
-          </a:xfrm>
-          <a:prstGeom prst="line">
-            <a:avLst/>
-          </a:prstGeom>
-          <a:noFill/>
-          <a:ln w="19050">
-            <a:solidFill>
-              <a:srgbClr val="0068B7"/>
-            </a:solidFill>
-            <a:prstDash val="solid"/>
-          </a:ln>
-        </p:spPr>
+          <p:cNvPr id="14" name="Text 12"/>
+          <p:cNvSpPr/>
+          <p:nvPr/>
+        </p:nvSpPr>
+        <p:spPr>
+          <a:xfrm>
+            <a:off x="7799832" y="2935224"/>
+            <a:ext cx="3145536" cy="256032"/>
+          </a:xfrm>
+          <a:prstGeom prst="rect">
+            <a:avLst/>
+          </a:prstGeom>
+          <a:noFill/>
+          <a:ln/>
+        </p:spPr>
+        <p:txBody>
+          <a:bodyPr wrap="square" lIns="0" tIns="0" rIns="0" bIns="0" rtlCol="0" anchor="ctr"/>
+          <a:lstStyle/>
+          <a:p>
+            <a:pPr indent="0" marL="0">
+              <a:buNone/>
+            </a:pPr>
+            <a:r>
+              <a:rPr lang="en-US" sz="1300" b="1" dirty="0">
+                <a:solidFill>
+                  <a:srgbClr val="0068B7"/>
+                </a:solidFill>
+                <a:latin typeface="Aptos" pitchFamily="34" charset="0"/>
+                <a:ea typeface="Aptos" pitchFamily="34" charset="-122"/>
+                <a:cs typeface="Aptos" pitchFamily="34" charset="-120"/>
+              </a:rPr>
+              <a:t>Concept checkpoints</a:t>
+            </a:r>
+            <a:endParaRPr lang="en-US" sz="1300" dirty="0"/>
+          </a:p>
+        </p:txBody>
+      </p:sp>
+      <p:sp>
+        <p:nvSpPr>
+          <p:cNvPr id="15" name="Text 13"/>
+          <p:cNvSpPr/>
+          <p:nvPr/>
+        </p:nvSpPr>
+        <p:spPr>
+          <a:xfrm>
+            <a:off x="7818120" y="3300984"/>
+            <a:ext cx="3090672" cy="877824"/>
+          </a:xfrm>
+          <a:prstGeom prst="rect">
+            <a:avLst/>
+          </a:prstGeom>
+          <a:noFill/>
+          <a:ln/>
+        </p:spPr>
+        <p:txBody>
+          <a:bodyPr wrap="square" lIns="254" tIns="254" rIns="254" bIns="254" rtlCol="0" anchor="t">
+            <a:normAutofit/>
+          </a:bodyPr>
+          <a:lstStyle/>
+          <a:p>
+            <a:r>
+              <a:rPr lang="en-US" sz="1380" dirty="0">
+                <a:solidFill>
+                  <a:srgbClr val="17364A"/>
+                </a:solidFill>
+                <a:latin typeface="Aptos" pitchFamily="34" charset="0"/>
+                <a:ea typeface="Aptos" pitchFamily="34" charset="-122"/>
+                <a:cs typeface="Aptos" pitchFamily="34" charset="-120"/>
+              </a:rPr>
+              <a:t>Case investigation or outbreak response workflow review</a:t>
+            </a:r>
+            <a:endParaRPr lang="en-US" sz="1380" dirty="0"/>
+          </a:p>
+          <a:p>
+            <a:r>
+              <a:rPr lang="en-US" sz="1380" dirty="0">
+                <a:solidFill>
+                  <a:srgbClr val="17364A"/>
+                </a:solidFill>
+                <a:latin typeface="Aptos" pitchFamily="34" charset="0"/>
+                <a:ea typeface="Aptos" pitchFamily="34" charset="-122"/>
+                <a:cs typeface="Aptos" pitchFamily="34" charset="-120"/>
+              </a:rPr>
+              <a:t>Source traceability checklist</a:t>
+            </a:r>
+            <a:endParaRPr lang="en-US" sz="1380" dirty="0"/>
+          </a:p>
+          <a:p>
+            <a:r>
+              <a:rPr lang="en-US" sz="1380" dirty="0">
+                <a:solidFill>
+                  <a:srgbClr val="17364A"/>
+                </a:solidFill>
+                <a:latin typeface="Aptos" pitchFamily="34" charset="0"/>
+                <a:ea typeface="Aptos" pitchFamily="34" charset="-122"/>
+                <a:cs typeface="Aptos" pitchFamily="34" charset="-120"/>
+              </a:rPr>
+              <a:t>Uncertainty and missing data documentation</a:t>
+            </a:r>
+            <a:endParaRPr lang="en-US" sz="1380" dirty="0"/>
+          </a:p>
+        </p:txBody>
       </p:sp>
       <p:sp>
         <p:nvSpPr>
           <p:cNvPr id="16" name="Shape 14"/>
-          <p:cNvSpPr/>
-          <p:nvPr/>
-        </p:nvSpPr>
-        <p:spPr>
-          <a:xfrm>
-            <a:off x="9198864" y="4206240"/>
-            <a:ext cx="347472" cy="347472"/>
-          </a:xfrm>
-          <a:prstGeom prst="ellipse">
-            <a:avLst/>
-          </a:prstGeom>
-          <a:solidFill>
-            <a:srgbClr val="2F8A28"/>
-          </a:solidFill>
-          <a:ln w="12700">
-            <a:solidFill>
-              <a:srgbClr val="2F8A28"/>
-            </a:solidFill>
-            <a:prstDash val="solid"/>
-          </a:ln>
-        </p:spPr>
-      </p:sp>
-      <p:sp>
-        <p:nvSpPr>
-          <p:cNvPr id="17" name="Text 15"/>
-          <p:cNvSpPr/>
-          <p:nvPr/>
-        </p:nvSpPr>
-        <p:spPr>
-          <a:xfrm>
-            <a:off x="7909560" y="3977640"/>
-            <a:ext cx="2926080" cy="182880"/>
-          </a:xfrm>
-          <a:prstGeom prst="rect">
-            <a:avLst/>
-          </a:prstGeom>
-          <a:noFill/>
-          <a:ln/>
-        </p:spPr>
-        <p:txBody>
-          <a:bodyPr wrap="square" lIns="0" tIns="0" rIns="0" bIns="0" rtlCol="0" anchor="ctr"/>
-          <a:lstStyle/>
-          <a:p>
-            <a:pPr algn="ctr" indent="0" marL="0">
-              <a:buNone/>
-            </a:pPr>
-            <a:r>
-              <a:rPr lang="en-US" sz="1000" dirty="0">
-                <a:solidFill>
-                  <a:srgbClr val="003A63"/>
-                </a:solidFill>
-                <a:latin typeface="Aptos" pitchFamily="34" charset="0"/>
-                <a:ea typeface="Aptos" pitchFamily="34" charset="-122"/>
-                <a:cs typeface="Aptos" pitchFamily="34" charset="-120"/>
-              </a:rPr>
-              <a:t>Concept to action</a:t>
-            </a:r>
-            <a:endParaRPr lang="en-US" sz="1000" dirty="0"/>
-          </a:p>
-        </p:txBody>
-      </p:sp>
-      <p:sp>
-        <p:nvSpPr>
-          <p:cNvPr id="18" name="Shape 16"/>
           <p:cNvSpPr/>
           <p:nvPr/>
         </p:nvSpPr>
@@ -9392,7 +9221,7 @@
       </p:sp>
       <p:sp>
         <p:nvSpPr>
-          <p:cNvPr id="19" name="Text 17"/>
+          <p:cNvPr id="17" name="Text 15"/>
           <p:cNvSpPr/>
           <p:nvPr/>
         </p:nvSpPr>
@@ -9431,7 +9260,7 @@
       </p:sp>
       <p:sp>
         <p:nvSpPr>
-          <p:cNvPr id="20" name="Text 18"/>
+          <p:cNvPr id="18" name="Text 16"/>
           <p:cNvSpPr/>
           <p:nvPr/>
         </p:nvSpPr>
@@ -9925,13 +9754,11 @@
             </a:avLst>
           </a:prstGeom>
           <a:solidFill>
-            <a:srgbClr val="FFFFFF">
-              <a:alpha val="88000"/>
-            </a:srgbClr>
+            <a:srgbClr val="FFFFFF"/>
           </a:solidFill>
           <a:ln w="12700">
             <a:solidFill>
-              <a:srgbClr val="D6E8F2"/>
+              <a:srgbClr val="B9D7E6"/>
             </a:solidFill>
             <a:prstDash val="solid"/>
           </a:ln>
@@ -9939,119 +9766,98 @@
       </p:sp>
       <p:sp>
         <p:nvSpPr>
-          <p:cNvPr id="14" name="Shape 12"/>
-          <p:cNvSpPr/>
-          <p:nvPr/>
-        </p:nvSpPr>
-        <p:spPr>
-          <a:xfrm>
-            <a:off x="8074152" y="3291840"/>
-            <a:ext cx="2596896" cy="749808"/>
-          </a:xfrm>
-          <a:prstGeom prst="rect">
-            <a:avLst/>
-          </a:prstGeom>
-          <a:solidFill>
-            <a:srgbClr val="EAF6F8"/>
-          </a:solidFill>
-          <a:ln w="12700">
-            <a:solidFill>
-              <a:srgbClr val="8ABBD8"/>
-            </a:solidFill>
-            <a:prstDash val="solid"/>
-          </a:ln>
-        </p:spPr>
-      </p:sp>
-      <p:sp>
-        <p:nvSpPr>
-          <p:cNvPr id="15" name="Shape 13"/>
-          <p:cNvSpPr/>
-          <p:nvPr/>
-        </p:nvSpPr>
-        <p:spPr>
-          <a:xfrm>
-            <a:off x="8202168" y="3721608"/>
-            <a:ext cx="2340864" cy="0"/>
-          </a:xfrm>
-          <a:prstGeom prst="line">
-            <a:avLst/>
-          </a:prstGeom>
-          <a:noFill/>
-          <a:ln w="19050">
-            <a:solidFill>
-              <a:srgbClr val="0068B7"/>
-            </a:solidFill>
-            <a:prstDash val="solid"/>
-          </a:ln>
-        </p:spPr>
+          <p:cNvPr id="14" name="Text 12"/>
+          <p:cNvSpPr/>
+          <p:nvPr/>
+        </p:nvSpPr>
+        <p:spPr>
+          <a:xfrm>
+            <a:off x="7799832" y="2935224"/>
+            <a:ext cx="3145536" cy="256032"/>
+          </a:xfrm>
+          <a:prstGeom prst="rect">
+            <a:avLst/>
+          </a:prstGeom>
+          <a:noFill/>
+          <a:ln/>
+        </p:spPr>
+        <p:txBody>
+          <a:bodyPr wrap="square" lIns="0" tIns="0" rIns="0" bIns="0" rtlCol="0" anchor="ctr"/>
+          <a:lstStyle/>
+          <a:p>
+            <a:pPr indent="0" marL="0">
+              <a:buNone/>
+            </a:pPr>
+            <a:r>
+              <a:rPr lang="en-US" sz="1300" b="1" dirty="0">
+                <a:solidFill>
+                  <a:srgbClr val="0068B7"/>
+                </a:solidFill>
+                <a:latin typeface="Aptos" pitchFamily="34" charset="0"/>
+                <a:ea typeface="Aptos" pitchFamily="34" charset="-122"/>
+                <a:cs typeface="Aptos" pitchFamily="34" charset="-120"/>
+              </a:rPr>
+              <a:t>Concept checkpoints</a:t>
+            </a:r>
+            <a:endParaRPr lang="en-US" sz="1300" dirty="0"/>
+          </a:p>
+        </p:txBody>
+      </p:sp>
+      <p:sp>
+        <p:nvSpPr>
+          <p:cNvPr id="15" name="Text 13"/>
+          <p:cNvSpPr/>
+          <p:nvPr/>
+        </p:nvSpPr>
+        <p:spPr>
+          <a:xfrm>
+            <a:off x="7818120" y="3300984"/>
+            <a:ext cx="3090672" cy="877824"/>
+          </a:xfrm>
+          <a:prstGeom prst="rect">
+            <a:avLst/>
+          </a:prstGeom>
+          <a:noFill/>
+          <a:ln/>
+        </p:spPr>
+        <p:txBody>
+          <a:bodyPr wrap="square" lIns="254" tIns="254" rIns="254" bIns="254" rtlCol="0" anchor="t">
+            <a:normAutofit/>
+          </a:bodyPr>
+          <a:lstStyle/>
+          <a:p>
+            <a:r>
+              <a:rPr lang="en-US" sz="1380" dirty="0">
+                <a:solidFill>
+                  <a:srgbClr val="17364A"/>
+                </a:solidFill>
+                <a:latin typeface="Aptos" pitchFamily="34" charset="0"/>
+                <a:ea typeface="Aptos" pitchFamily="34" charset="-122"/>
+                <a:cs typeface="Aptos" pitchFamily="34" charset="-120"/>
+              </a:rPr>
+              <a:t>Equity and escalation review</a:t>
+            </a:r>
+            <a:endParaRPr lang="en-US" sz="1380" dirty="0"/>
+          </a:p>
+          <a:p>
+            <a:r>
+              <a:rPr lang="en-US" sz="1380" dirty="0">
+                <a:solidFill>
+                  <a:srgbClr val="17364A"/>
+                </a:solidFill>
+                <a:latin typeface="Aptos" pitchFamily="34" charset="0"/>
+                <a:ea typeface="Aptos" pitchFamily="34" charset="-122"/>
+                <a:cs typeface="Aptos" pitchFamily="34" charset="-120"/>
+              </a:rPr>
+              <a:t>Monitoring indicators</a:t>
+            </a:r>
+            <a:endParaRPr lang="en-US" sz="1380" dirty="0"/>
+          </a:p>
+        </p:txBody>
       </p:sp>
       <p:sp>
         <p:nvSpPr>
           <p:cNvPr id="16" name="Shape 14"/>
-          <p:cNvSpPr/>
-          <p:nvPr/>
-        </p:nvSpPr>
-        <p:spPr>
-          <a:xfrm>
-            <a:off x="9198864" y="4206240"/>
-            <a:ext cx="347472" cy="347472"/>
-          </a:xfrm>
-          <a:prstGeom prst="ellipse">
-            <a:avLst/>
-          </a:prstGeom>
-          <a:solidFill>
-            <a:srgbClr val="2F8A28"/>
-          </a:solidFill>
-          <a:ln w="12700">
-            <a:solidFill>
-              <a:srgbClr val="2F8A28"/>
-            </a:solidFill>
-            <a:prstDash val="solid"/>
-          </a:ln>
-        </p:spPr>
-      </p:sp>
-      <p:sp>
-        <p:nvSpPr>
-          <p:cNvPr id="17" name="Text 15"/>
-          <p:cNvSpPr/>
-          <p:nvPr/>
-        </p:nvSpPr>
-        <p:spPr>
-          <a:xfrm>
-            <a:off x="7909560" y="3977640"/>
-            <a:ext cx="2926080" cy="182880"/>
-          </a:xfrm>
-          <a:prstGeom prst="rect">
-            <a:avLst/>
-          </a:prstGeom>
-          <a:noFill/>
-          <a:ln/>
-        </p:spPr>
-        <p:txBody>
-          <a:bodyPr wrap="square" lIns="0" tIns="0" rIns="0" bIns="0" rtlCol="0" anchor="ctr"/>
-          <a:lstStyle/>
-          <a:p>
-            <a:pPr algn="ctr" indent="0" marL="0">
-              <a:buNone/>
-            </a:pPr>
-            <a:r>
-              <a:rPr lang="en-US" sz="1000" dirty="0">
-                <a:solidFill>
-                  <a:srgbClr val="003A63"/>
-                </a:solidFill>
-                <a:latin typeface="Aptos" pitchFamily="34" charset="0"/>
-                <a:ea typeface="Aptos" pitchFamily="34" charset="-122"/>
-                <a:cs typeface="Aptos" pitchFamily="34" charset="-120"/>
-              </a:rPr>
-              <a:t>Concept to action</a:t>
-            </a:r>
-            <a:endParaRPr lang="en-US" sz="1000" dirty="0"/>
-          </a:p>
-        </p:txBody>
-      </p:sp>
-      <p:sp>
-        <p:nvSpPr>
-          <p:cNvPr id="18" name="Shape 16"/>
           <p:cNvSpPr/>
           <p:nvPr/>
         </p:nvSpPr>
@@ -10078,7 +9884,7 @@
       </p:sp>
       <p:sp>
         <p:nvSpPr>
-          <p:cNvPr id="19" name="Text 17"/>
+          <p:cNvPr id="17" name="Text 15"/>
           <p:cNvSpPr/>
           <p:nvPr/>
         </p:nvSpPr>
@@ -10117,7 +9923,7 @@
       </p:sp>
       <p:sp>
         <p:nvSpPr>
-          <p:cNvPr id="20" name="Text 18"/>
+          <p:cNvPr id="18" name="Text 16"/>
           <p:cNvSpPr/>
           <p:nvPr/>
         </p:nvSpPr>
@@ -10650,20 +10456,20 @@
         </p:nvSpPr>
         <p:spPr>
           <a:xfrm>
-            <a:off x="7635240" y="3730752"/>
-            <a:ext cx="1033272" cy="749808"/>
+            <a:off x="7909560" y="3675888"/>
+            <a:ext cx="3154680" cy="1691640"/>
           </a:xfrm>
           <a:prstGeom prst="roundRect">
             <a:avLst>
-              <a:gd name="adj" fmla="val 14634"/>
+              <a:gd name="adj" fmla="val 6486"/>
             </a:avLst>
           </a:prstGeom>
           <a:solidFill>
-            <a:srgbClr val="0068B7"/>
+            <a:srgbClr val="FFFFFF"/>
           </a:solidFill>
           <a:ln w="12700">
             <a:solidFill>
-              <a:srgbClr val="0068B7"/>
+              <a:srgbClr val="B9D7E6"/>
             </a:solidFill>
             <a:prstDash val="solid"/>
           </a:ln>
@@ -10677,172 +10483,100 @@
         </p:nvSpPr>
         <p:spPr>
           <a:xfrm>
-            <a:off x="7708392" y="3922776"/>
-            <a:ext cx="886968" cy="310896"/>
-          </a:xfrm>
-          <a:prstGeom prst="rect">
-            <a:avLst/>
-          </a:prstGeom>
-          <a:noFill/>
-          <a:ln/>
-        </p:spPr>
-        <p:txBody>
-          <a:bodyPr wrap="square" lIns="0" tIns="0" rIns="0" bIns="0" rtlCol="0" anchor="ctr">
+            <a:off x="8074152" y="3822192"/>
+            <a:ext cx="2825496" cy="256032"/>
+          </a:xfrm>
+          <a:prstGeom prst="rect">
+            <a:avLst/>
+          </a:prstGeom>
+          <a:noFill/>
+          <a:ln/>
+        </p:spPr>
+        <p:txBody>
+          <a:bodyPr wrap="square" lIns="0" tIns="0" rIns="0" bIns="0" rtlCol="0" anchor="ctr"/>
+          <a:lstStyle/>
+          <a:p>
+            <a:pPr indent="0" marL="0">
+              <a:buNone/>
+            </a:pPr>
+            <a:r>
+              <a:rPr lang="en-US" sz="1300" b="1" dirty="0">
+                <a:solidFill>
+                  <a:srgbClr val="0068B7"/>
+                </a:solidFill>
+                <a:latin typeface="Aptos" pitchFamily="34" charset="0"/>
+                <a:ea typeface="Aptos" pitchFamily="34" charset="-122"/>
+                <a:cs typeface="Aptos" pitchFamily="34" charset="-120"/>
+              </a:rPr>
+              <a:t>Learning sequence</a:t>
+            </a:r>
+            <a:endParaRPr lang="en-US" sz="1300" dirty="0"/>
+          </a:p>
+        </p:txBody>
+      </p:sp>
+      <p:sp>
+        <p:nvSpPr>
+          <p:cNvPr id="15" name="Text 13"/>
+          <p:cNvSpPr/>
+          <p:nvPr/>
+        </p:nvSpPr>
+        <p:spPr>
+          <a:xfrm>
+            <a:off x="8092440" y="4187952"/>
+            <a:ext cx="2770632" cy="1033272"/>
+          </a:xfrm>
+          <a:prstGeom prst="rect">
+            <a:avLst/>
+          </a:prstGeom>
+          <a:noFill/>
+          <a:ln/>
+        </p:spPr>
+        <p:txBody>
+          <a:bodyPr wrap="square" lIns="254" tIns="254" rIns="254" bIns="254" rtlCol="0" anchor="t">
             <a:normAutofit/>
           </a:bodyPr>
           <a:lstStyle/>
           <a:p>
-            <a:pPr algn="ctr" indent="0" marL="0">
-              <a:buNone/>
-            </a:pPr>
-            <a:r>
-              <a:rPr lang="en-US" sz="1500" b="1" dirty="0">
-                <a:solidFill>
-                  <a:srgbClr val="FFFFFF"/>
-                </a:solidFill>
-                <a:latin typeface="Aptos" pitchFamily="34" charset="0"/>
-                <a:ea typeface="Aptos" pitchFamily="34" charset="-122"/>
-                <a:cs typeface="Aptos" pitchFamily="34" charset="-120"/>
-              </a:rPr>
-              <a:t>Learn</a:t>
-            </a:r>
-            <a:endParaRPr lang="en-US" sz="1500" dirty="0"/>
-          </a:p>
-        </p:txBody>
-      </p:sp>
-      <p:sp>
-        <p:nvSpPr>
-          <p:cNvPr id="15" name="Shape 13"/>
-          <p:cNvSpPr/>
-          <p:nvPr/>
-        </p:nvSpPr>
-        <p:spPr>
-          <a:xfrm>
-            <a:off x="8924544" y="3730752"/>
-            <a:ext cx="1033272" cy="749808"/>
-          </a:xfrm>
-          <a:prstGeom prst="roundRect">
-            <a:avLst>
-              <a:gd name="adj" fmla="val 14634"/>
-            </a:avLst>
-          </a:prstGeom>
-          <a:solidFill>
-            <a:srgbClr val="2F8A28"/>
-          </a:solidFill>
-          <a:ln w="12700">
-            <a:solidFill>
-              <a:srgbClr val="2F8A28"/>
-            </a:solidFill>
-            <a:prstDash val="solid"/>
-          </a:ln>
-        </p:spPr>
-      </p:sp>
-      <p:sp>
-        <p:nvSpPr>
-          <p:cNvPr id="16" name="Text 14"/>
-          <p:cNvSpPr/>
-          <p:nvPr/>
-        </p:nvSpPr>
-        <p:spPr>
-          <a:xfrm>
-            <a:off x="8997696" y="3922776"/>
-            <a:ext cx="886968" cy="310896"/>
-          </a:xfrm>
-          <a:prstGeom prst="rect">
-            <a:avLst/>
-          </a:prstGeom>
-          <a:noFill/>
-          <a:ln/>
-        </p:spPr>
-        <p:txBody>
-          <a:bodyPr wrap="square" lIns="0" tIns="0" rIns="0" bIns="0" rtlCol="0" anchor="ctr">
-            <a:normAutofit/>
-          </a:bodyPr>
-          <a:lstStyle/>
-          <a:p>
-            <a:pPr algn="ctr" indent="0" marL="0">
-              <a:buNone/>
-            </a:pPr>
-            <a:r>
-              <a:rPr lang="en-US" sz="1500" b="1" dirty="0">
-                <a:solidFill>
-                  <a:srgbClr val="FFFFFF"/>
-                </a:solidFill>
-                <a:latin typeface="Aptos" pitchFamily="34" charset="0"/>
-                <a:ea typeface="Aptos" pitchFamily="34" charset="-122"/>
-                <a:cs typeface="Aptos" pitchFamily="34" charset="-120"/>
-              </a:rPr>
-              <a:t>Apply</a:t>
-            </a:r>
-            <a:endParaRPr lang="en-US" sz="1500" dirty="0"/>
-          </a:p>
-        </p:txBody>
-      </p:sp>
-      <p:sp>
-        <p:nvSpPr>
-          <p:cNvPr id="17" name="Shape 15"/>
-          <p:cNvSpPr/>
-          <p:nvPr/>
-        </p:nvSpPr>
-        <p:spPr>
-          <a:xfrm>
-            <a:off x="10213848" y="3730752"/>
-            <a:ext cx="1033272" cy="749808"/>
-          </a:xfrm>
-          <a:prstGeom prst="roundRect">
-            <a:avLst>
-              <a:gd name="adj" fmla="val 14634"/>
-            </a:avLst>
-          </a:prstGeom>
-          <a:solidFill>
-            <a:srgbClr val="6A4CA3"/>
-          </a:solidFill>
-          <a:ln w="12700">
-            <a:solidFill>
-              <a:srgbClr val="6A4CA3"/>
-            </a:solidFill>
-            <a:prstDash val="solid"/>
-          </a:ln>
-        </p:spPr>
-      </p:sp>
-      <p:sp>
-        <p:nvSpPr>
-          <p:cNvPr id="18" name="Text 16"/>
-          <p:cNvSpPr/>
-          <p:nvPr/>
-        </p:nvSpPr>
-        <p:spPr>
-          <a:xfrm>
-            <a:off x="10287000" y="3922776"/>
-            <a:ext cx="886968" cy="310896"/>
-          </a:xfrm>
-          <a:prstGeom prst="rect">
-            <a:avLst/>
-          </a:prstGeom>
-          <a:noFill/>
-          <a:ln/>
-        </p:spPr>
-        <p:txBody>
-          <a:bodyPr wrap="square" lIns="0" tIns="0" rIns="0" bIns="0" rtlCol="0" anchor="ctr">
-            <a:normAutofit/>
-          </a:bodyPr>
-          <a:lstStyle/>
-          <a:p>
-            <a:pPr algn="ctr" indent="0" marL="0">
-              <a:buNone/>
-            </a:pPr>
-            <a:r>
-              <a:rPr lang="en-US" sz="1500" b="1" dirty="0">
-                <a:solidFill>
-                  <a:srgbClr val="FFFFFF"/>
-                </a:solidFill>
-                <a:latin typeface="Aptos" pitchFamily="34" charset="0"/>
-                <a:ea typeface="Aptos" pitchFamily="34" charset="-122"/>
-                <a:cs typeface="Aptos" pitchFamily="34" charset="-120"/>
-              </a:rPr>
-              <a:t>Document</a:t>
-            </a:r>
-            <a:endParaRPr lang="en-US" sz="1500" dirty="0"/>
+            <a:r>
+              <a:rPr lang="en-US" sz="1380" dirty="0">
+                <a:solidFill>
+                  <a:srgbClr val="17364A"/>
+                </a:solidFill>
+                <a:latin typeface="Aptos" pitchFamily="34" charset="0"/>
+                <a:ea typeface="Aptos" pitchFamily="34" charset="-122"/>
+                <a:cs typeface="Aptos" pitchFamily="34" charset="-120"/>
+              </a:rPr>
+              <a:t>Read the module for shared vocabulary and context.</a:t>
+            </a:r>
+            <a:endParaRPr lang="en-US" sz="1380" dirty="0"/>
+          </a:p>
+          <a:p>
+            <a:r>
+              <a:rPr lang="en-US" sz="1380" dirty="0">
+                <a:solidFill>
+                  <a:srgbClr val="17364A"/>
+                </a:solidFill>
+                <a:latin typeface="Aptos" pitchFamily="34" charset="0"/>
+                <a:ea typeface="Aptos" pitchFamily="34" charset="-122"/>
+                <a:cs typeface="Aptos" pitchFamily="34" charset="-120"/>
+              </a:rPr>
+              <a:t>Complete the practical exercise to apply the concept.</a:t>
+            </a:r>
+            <a:endParaRPr lang="en-US" sz="1380" dirty="0"/>
+          </a:p>
+          <a:p>
+            <a:r>
+              <a:rPr lang="en-US" sz="1380" dirty="0">
+                <a:solidFill>
+                  <a:srgbClr val="17364A"/>
+                </a:solidFill>
+                <a:latin typeface="Aptos" pitchFamily="34" charset="0"/>
+                <a:ea typeface="Aptos" pitchFamily="34" charset="-122"/>
+                <a:cs typeface="Aptos" pitchFamily="34" charset="-120"/>
+              </a:rPr>
+              <a:t>Use the notes and references for deeper review.</a:t>
+            </a:r>
+            <a:endParaRPr lang="en-US" sz="1380" dirty="0"/>
           </a:p>
         </p:txBody>
       </p:sp>
@@ -11315,13 +11049,11 @@
             </a:avLst>
           </a:prstGeom>
           <a:solidFill>
-            <a:srgbClr val="FFFFFF">
-              <a:alpha val="88000"/>
-            </a:srgbClr>
+            <a:srgbClr val="FFFFFF"/>
           </a:solidFill>
           <a:ln w="12700">
             <a:solidFill>
-              <a:srgbClr val="D6E8F2"/>
+              <a:srgbClr val="B9D7E6"/>
             </a:solidFill>
             <a:prstDash val="solid"/>
           </a:ln>
@@ -11329,119 +11061,98 @@
       </p:sp>
       <p:sp>
         <p:nvSpPr>
-          <p:cNvPr id="14" name="Shape 12"/>
-          <p:cNvSpPr/>
-          <p:nvPr/>
-        </p:nvSpPr>
-        <p:spPr>
-          <a:xfrm>
-            <a:off x="8074152" y="3291840"/>
-            <a:ext cx="2596896" cy="749808"/>
-          </a:xfrm>
-          <a:prstGeom prst="rect">
-            <a:avLst/>
-          </a:prstGeom>
-          <a:solidFill>
-            <a:srgbClr val="EAF6F8"/>
-          </a:solidFill>
-          <a:ln w="12700">
-            <a:solidFill>
-              <a:srgbClr val="8ABBD8"/>
-            </a:solidFill>
-            <a:prstDash val="solid"/>
-          </a:ln>
-        </p:spPr>
-      </p:sp>
-      <p:sp>
-        <p:nvSpPr>
-          <p:cNvPr id="15" name="Shape 13"/>
-          <p:cNvSpPr/>
-          <p:nvPr/>
-        </p:nvSpPr>
-        <p:spPr>
-          <a:xfrm>
-            <a:off x="8202168" y="3721608"/>
-            <a:ext cx="2340864" cy="0"/>
-          </a:xfrm>
-          <a:prstGeom prst="line">
-            <a:avLst/>
-          </a:prstGeom>
-          <a:noFill/>
-          <a:ln w="19050">
-            <a:solidFill>
-              <a:srgbClr val="0068B7"/>
-            </a:solidFill>
-            <a:prstDash val="solid"/>
-          </a:ln>
-        </p:spPr>
+          <p:cNvPr id="14" name="Text 12"/>
+          <p:cNvSpPr/>
+          <p:nvPr/>
+        </p:nvSpPr>
+        <p:spPr>
+          <a:xfrm>
+            <a:off x="7799832" y="2935224"/>
+            <a:ext cx="3145536" cy="256032"/>
+          </a:xfrm>
+          <a:prstGeom prst="rect">
+            <a:avLst/>
+          </a:prstGeom>
+          <a:noFill/>
+          <a:ln/>
+        </p:spPr>
+        <p:txBody>
+          <a:bodyPr wrap="square" lIns="0" tIns="0" rIns="0" bIns="0" rtlCol="0" anchor="ctr"/>
+          <a:lstStyle/>
+          <a:p>
+            <a:pPr indent="0" marL="0">
+              <a:buNone/>
+            </a:pPr>
+            <a:r>
+              <a:rPr lang="en-US" sz="1300" b="1" dirty="0">
+                <a:solidFill>
+                  <a:srgbClr val="0068B7"/>
+                </a:solidFill>
+                <a:latin typeface="Aptos" pitchFamily="34" charset="0"/>
+                <a:ea typeface="Aptos" pitchFamily="34" charset="-122"/>
+                <a:cs typeface="Aptos" pitchFamily="34" charset="-120"/>
+              </a:rPr>
+              <a:t>Concept checkpoints</a:t>
+            </a:r>
+            <a:endParaRPr lang="en-US" sz="1300" dirty="0"/>
+          </a:p>
+        </p:txBody>
+      </p:sp>
+      <p:sp>
+        <p:nvSpPr>
+          <p:cNvPr id="15" name="Text 13"/>
+          <p:cNvSpPr/>
+          <p:nvPr/>
+        </p:nvSpPr>
+        <p:spPr>
+          <a:xfrm>
+            <a:off x="7818120" y="3300984"/>
+            <a:ext cx="3090672" cy="877824"/>
+          </a:xfrm>
+          <a:prstGeom prst="rect">
+            <a:avLst/>
+          </a:prstGeom>
+          <a:noFill/>
+          <a:ln/>
+        </p:spPr>
+        <p:txBody>
+          <a:bodyPr wrap="square" lIns="254" tIns="254" rIns="254" bIns="254" rtlCol="0" anchor="t">
+            <a:normAutofit/>
+          </a:bodyPr>
+          <a:lstStyle/>
+          <a:p>
+            <a:r>
+              <a:rPr lang="en-US" sz="1380" dirty="0">
+                <a:solidFill>
+                  <a:srgbClr val="17364A"/>
+                </a:solidFill>
+                <a:latin typeface="Aptos" pitchFamily="34" charset="0"/>
+                <a:ea typeface="Aptos" pitchFamily="34" charset="-122"/>
+                <a:cs typeface="Aptos" pitchFamily="34" charset="-120"/>
+              </a:rPr>
+              <a:t>Equity and escalation review</a:t>
+            </a:r>
+            <a:endParaRPr lang="en-US" sz="1380" dirty="0"/>
+          </a:p>
+          <a:p>
+            <a:r>
+              <a:rPr lang="en-US" sz="1380" dirty="0">
+                <a:solidFill>
+                  <a:srgbClr val="17364A"/>
+                </a:solidFill>
+                <a:latin typeface="Aptos" pitchFamily="34" charset="0"/>
+                <a:ea typeface="Aptos" pitchFamily="34" charset="-122"/>
+                <a:cs typeface="Aptos" pitchFamily="34" charset="-120"/>
+              </a:rPr>
+              <a:t>Monitoring indicators</a:t>
+            </a:r>
+            <a:endParaRPr lang="en-US" sz="1380" dirty="0"/>
+          </a:p>
+        </p:txBody>
       </p:sp>
       <p:sp>
         <p:nvSpPr>
           <p:cNvPr id="16" name="Shape 14"/>
-          <p:cNvSpPr/>
-          <p:nvPr/>
-        </p:nvSpPr>
-        <p:spPr>
-          <a:xfrm>
-            <a:off x="9198864" y="4206240"/>
-            <a:ext cx="347472" cy="347472"/>
-          </a:xfrm>
-          <a:prstGeom prst="ellipse">
-            <a:avLst/>
-          </a:prstGeom>
-          <a:solidFill>
-            <a:srgbClr val="2F8A28"/>
-          </a:solidFill>
-          <a:ln w="12700">
-            <a:solidFill>
-              <a:srgbClr val="2F8A28"/>
-            </a:solidFill>
-            <a:prstDash val="solid"/>
-          </a:ln>
-        </p:spPr>
-      </p:sp>
-      <p:sp>
-        <p:nvSpPr>
-          <p:cNvPr id="17" name="Text 15"/>
-          <p:cNvSpPr/>
-          <p:nvPr/>
-        </p:nvSpPr>
-        <p:spPr>
-          <a:xfrm>
-            <a:off x="7909560" y="3977640"/>
-            <a:ext cx="2926080" cy="182880"/>
-          </a:xfrm>
-          <a:prstGeom prst="rect">
-            <a:avLst/>
-          </a:prstGeom>
-          <a:noFill/>
-          <a:ln/>
-        </p:spPr>
-        <p:txBody>
-          <a:bodyPr wrap="square" lIns="0" tIns="0" rIns="0" bIns="0" rtlCol="0" anchor="ctr"/>
-          <a:lstStyle/>
-          <a:p>
-            <a:pPr algn="ctr" indent="0" marL="0">
-              <a:buNone/>
-            </a:pPr>
-            <a:r>
-              <a:rPr lang="en-US" sz="1000" dirty="0">
-                <a:solidFill>
-                  <a:srgbClr val="003A63"/>
-                </a:solidFill>
-                <a:latin typeface="Aptos" pitchFamily="34" charset="0"/>
-                <a:ea typeface="Aptos" pitchFamily="34" charset="-122"/>
-                <a:cs typeface="Aptos" pitchFamily="34" charset="-120"/>
-              </a:rPr>
-              <a:t>Concept to action</a:t>
-            </a:r>
-            <a:endParaRPr lang="en-US" sz="1000" dirty="0"/>
-          </a:p>
-        </p:txBody>
-      </p:sp>
-      <p:sp>
-        <p:nvSpPr>
-          <p:cNvPr id="18" name="Shape 16"/>
           <p:cNvSpPr/>
           <p:nvPr/>
         </p:nvSpPr>
@@ -11468,7 +11179,7 @@
       </p:sp>
       <p:sp>
         <p:nvSpPr>
-          <p:cNvPr id="19" name="Text 17"/>
+          <p:cNvPr id="17" name="Text 15"/>
           <p:cNvSpPr/>
           <p:nvPr/>
         </p:nvSpPr>
@@ -11507,7 +11218,7 @@
       </p:sp>
       <p:sp>
         <p:nvSpPr>
-          <p:cNvPr id="20" name="Text 18"/>
+          <p:cNvPr id="18" name="Text 16"/>
           <p:cNvSpPr/>
           <p:nvPr/>
         </p:nvSpPr>
@@ -12015,13 +11726,11 @@
             </a:avLst>
           </a:prstGeom>
           <a:solidFill>
-            <a:srgbClr val="FFFFFF">
-              <a:alpha val="88000"/>
-            </a:srgbClr>
+            <a:srgbClr val="FFFFFF"/>
           </a:solidFill>
           <a:ln w="12700">
             <a:solidFill>
-              <a:srgbClr val="D6E8F2"/>
+              <a:srgbClr val="B9D7E6"/>
             </a:solidFill>
             <a:prstDash val="solid"/>
           </a:ln>
@@ -12029,119 +11738,112 @@
       </p:sp>
       <p:sp>
         <p:nvSpPr>
-          <p:cNvPr id="14" name="Shape 12"/>
-          <p:cNvSpPr/>
-          <p:nvPr/>
-        </p:nvSpPr>
-        <p:spPr>
-          <a:xfrm>
-            <a:off x="8074152" y="3291840"/>
-            <a:ext cx="2596896" cy="749808"/>
-          </a:xfrm>
-          <a:prstGeom prst="rect">
-            <a:avLst/>
-          </a:prstGeom>
-          <a:solidFill>
-            <a:srgbClr val="EAF6F8"/>
-          </a:solidFill>
-          <a:ln w="12700">
-            <a:solidFill>
-              <a:srgbClr val="8ABBD8"/>
-            </a:solidFill>
-            <a:prstDash val="solid"/>
-          </a:ln>
-        </p:spPr>
-      </p:sp>
-      <p:sp>
-        <p:nvSpPr>
-          <p:cNvPr id="15" name="Shape 13"/>
-          <p:cNvSpPr/>
-          <p:nvPr/>
-        </p:nvSpPr>
-        <p:spPr>
-          <a:xfrm>
-            <a:off x="8202168" y="3721608"/>
-            <a:ext cx="2340864" cy="0"/>
-          </a:xfrm>
-          <a:prstGeom prst="line">
-            <a:avLst/>
-          </a:prstGeom>
-          <a:noFill/>
-          <a:ln w="19050">
-            <a:solidFill>
-              <a:srgbClr val="0068B7"/>
-            </a:solidFill>
-            <a:prstDash val="solid"/>
-          </a:ln>
-        </p:spPr>
+          <p:cNvPr id="14" name="Text 12"/>
+          <p:cNvSpPr/>
+          <p:nvPr/>
+        </p:nvSpPr>
+        <p:spPr>
+          <a:xfrm>
+            <a:off x="7799832" y="2935224"/>
+            <a:ext cx="3145536" cy="256032"/>
+          </a:xfrm>
+          <a:prstGeom prst="rect">
+            <a:avLst/>
+          </a:prstGeom>
+          <a:noFill/>
+          <a:ln/>
+        </p:spPr>
+        <p:txBody>
+          <a:bodyPr wrap="square" lIns="0" tIns="0" rIns="0" bIns="0" rtlCol="0" anchor="ctr"/>
+          <a:lstStyle/>
+          <a:p>
+            <a:pPr indent="0" marL="0">
+              <a:buNone/>
+            </a:pPr>
+            <a:r>
+              <a:rPr lang="en-US" sz="1300" b="1" dirty="0">
+                <a:solidFill>
+                  <a:srgbClr val="0068B7"/>
+                </a:solidFill>
+                <a:latin typeface="Aptos" pitchFamily="34" charset="0"/>
+                <a:ea typeface="Aptos" pitchFamily="34" charset="-122"/>
+                <a:cs typeface="Aptos" pitchFamily="34" charset="-120"/>
+              </a:rPr>
+              <a:t>Concept checkpoints</a:t>
+            </a:r>
+            <a:endParaRPr lang="en-US" sz="1300" dirty="0"/>
+          </a:p>
+        </p:txBody>
+      </p:sp>
+      <p:sp>
+        <p:nvSpPr>
+          <p:cNvPr id="15" name="Text 13"/>
+          <p:cNvSpPr/>
+          <p:nvPr/>
+        </p:nvSpPr>
+        <p:spPr>
+          <a:xfrm>
+            <a:off x="7818120" y="3300984"/>
+            <a:ext cx="3090672" cy="877824"/>
+          </a:xfrm>
+          <a:prstGeom prst="rect">
+            <a:avLst/>
+          </a:prstGeom>
+          <a:noFill/>
+          <a:ln/>
+        </p:spPr>
+        <p:txBody>
+          <a:bodyPr wrap="square" lIns="254" tIns="254" rIns="254" bIns="254" rtlCol="0" anchor="t">
+            <a:normAutofit/>
+          </a:bodyPr>
+          <a:lstStyle/>
+          <a:p>
+            <a:r>
+              <a:rPr lang="en-US" sz="1380" dirty="0">
+                <a:solidFill>
+                  <a:srgbClr val="17364A"/>
+                </a:solidFill>
+                <a:latin typeface="Aptos" pitchFamily="34" charset="0"/>
+                <a:ea typeface="Aptos" pitchFamily="34" charset="-122"/>
+                <a:cs typeface="Aptos" pitchFamily="34" charset="-120"/>
+              </a:rPr>
+              <a:t>1.</a:t>
+            </a:r>
+            <a:endParaRPr lang="en-US" sz="1380" dirty="0"/>
+          </a:p>
+          <a:p>
+            <a:r>
+              <a:rPr lang="en-US" sz="1380" dirty="0">
+                <a:solidFill>
+                  <a:srgbClr val="17364A"/>
+                </a:solidFill>
+                <a:latin typeface="Aptos" pitchFamily="34" charset="0"/>
+                <a:ea typeface="Aptos" pitchFamily="34" charset="-122"/>
+                <a:cs typeface="Aptos" pitchFamily="34" charset="-120"/>
+              </a:rPr>
+              <a:t>What should AI outputs do in case investigation?</a:t>
+            </a:r>
+            <a:endParaRPr lang="en-US" sz="1380" dirty="0"/>
+          </a:p>
+          <a:p>
+            <a:r>
+              <a:rPr lang="en-US" sz="1380" dirty="0">
+                <a:solidFill>
+                  <a:srgbClr val="17364A"/>
+                </a:solidFill>
+                <a:latin typeface="Aptos" pitchFamily="34" charset="0"/>
+                <a:ea typeface="Aptos" pitchFamily="34" charset="-122"/>
+                <a:cs typeface="Aptos" pitchFamily="34" charset="-120"/>
+              </a:rPr>
+              <a:t>2.</a:t>
+            </a:r>
+            <a:endParaRPr lang="en-US" sz="1380" dirty="0"/>
+          </a:p>
+        </p:txBody>
       </p:sp>
       <p:sp>
         <p:nvSpPr>
           <p:cNvPr id="16" name="Shape 14"/>
-          <p:cNvSpPr/>
-          <p:nvPr/>
-        </p:nvSpPr>
-        <p:spPr>
-          <a:xfrm>
-            <a:off x="9198864" y="4206240"/>
-            <a:ext cx="347472" cy="347472"/>
-          </a:xfrm>
-          <a:prstGeom prst="ellipse">
-            <a:avLst/>
-          </a:prstGeom>
-          <a:solidFill>
-            <a:srgbClr val="2F8A28"/>
-          </a:solidFill>
-          <a:ln w="12700">
-            <a:solidFill>
-              <a:srgbClr val="2F8A28"/>
-            </a:solidFill>
-            <a:prstDash val="solid"/>
-          </a:ln>
-        </p:spPr>
-      </p:sp>
-      <p:sp>
-        <p:nvSpPr>
-          <p:cNvPr id="17" name="Text 15"/>
-          <p:cNvSpPr/>
-          <p:nvPr/>
-        </p:nvSpPr>
-        <p:spPr>
-          <a:xfrm>
-            <a:off x="7909560" y="3977640"/>
-            <a:ext cx="2926080" cy="182880"/>
-          </a:xfrm>
-          <a:prstGeom prst="rect">
-            <a:avLst/>
-          </a:prstGeom>
-          <a:noFill/>
-          <a:ln/>
-        </p:spPr>
-        <p:txBody>
-          <a:bodyPr wrap="square" lIns="0" tIns="0" rIns="0" bIns="0" rtlCol="0" anchor="ctr"/>
-          <a:lstStyle/>
-          <a:p>
-            <a:pPr algn="ctr" indent="0" marL="0">
-              <a:buNone/>
-            </a:pPr>
-            <a:r>
-              <a:rPr lang="en-US" sz="1000" dirty="0">
-                <a:solidFill>
-                  <a:srgbClr val="003A63"/>
-                </a:solidFill>
-                <a:latin typeface="Aptos" pitchFamily="34" charset="0"/>
-                <a:ea typeface="Aptos" pitchFamily="34" charset="-122"/>
-                <a:cs typeface="Aptos" pitchFamily="34" charset="-120"/>
-              </a:rPr>
-              <a:t>Concept to action</a:t>
-            </a:r>
-            <a:endParaRPr lang="en-US" sz="1000" dirty="0"/>
-          </a:p>
-        </p:txBody>
-      </p:sp>
-      <p:sp>
-        <p:nvSpPr>
-          <p:cNvPr id="18" name="Shape 16"/>
           <p:cNvSpPr/>
           <p:nvPr/>
         </p:nvSpPr>
@@ -12168,7 +11870,7 @@
       </p:sp>
       <p:sp>
         <p:nvSpPr>
-          <p:cNvPr id="19" name="Text 17"/>
+          <p:cNvPr id="17" name="Text 15"/>
           <p:cNvSpPr/>
           <p:nvPr/>
         </p:nvSpPr>
@@ -12207,7 +11909,7 @@
       </p:sp>
       <p:sp>
         <p:nvSpPr>
-          <p:cNvPr id="20" name="Text 18"/>
+          <p:cNvPr id="18" name="Text 16"/>
           <p:cNvSpPr/>
           <p:nvPr/>
         </p:nvSpPr>
@@ -12715,13 +12417,11 @@
             </a:avLst>
           </a:prstGeom>
           <a:solidFill>
-            <a:srgbClr val="FFFFFF">
-              <a:alpha val="88000"/>
-            </a:srgbClr>
+            <a:srgbClr val="FFFFFF"/>
           </a:solidFill>
           <a:ln w="12700">
             <a:solidFill>
-              <a:srgbClr val="D6E8F2"/>
+              <a:srgbClr val="B9D7E6"/>
             </a:solidFill>
             <a:prstDash val="solid"/>
           </a:ln>
@@ -12729,119 +12429,112 @@
       </p:sp>
       <p:sp>
         <p:nvSpPr>
-          <p:cNvPr id="14" name="Shape 12"/>
-          <p:cNvSpPr/>
-          <p:nvPr/>
-        </p:nvSpPr>
-        <p:spPr>
-          <a:xfrm>
-            <a:off x="8074152" y="3291840"/>
-            <a:ext cx="2596896" cy="749808"/>
-          </a:xfrm>
-          <a:prstGeom prst="rect">
-            <a:avLst/>
-          </a:prstGeom>
-          <a:solidFill>
-            <a:srgbClr val="EAF6F8"/>
-          </a:solidFill>
-          <a:ln w="12700">
-            <a:solidFill>
-              <a:srgbClr val="8ABBD8"/>
-            </a:solidFill>
-            <a:prstDash val="solid"/>
-          </a:ln>
-        </p:spPr>
-      </p:sp>
-      <p:sp>
-        <p:nvSpPr>
-          <p:cNvPr id="15" name="Shape 13"/>
-          <p:cNvSpPr/>
-          <p:nvPr/>
-        </p:nvSpPr>
-        <p:spPr>
-          <a:xfrm>
-            <a:off x="8202168" y="3721608"/>
-            <a:ext cx="2340864" cy="0"/>
-          </a:xfrm>
-          <a:prstGeom prst="line">
-            <a:avLst/>
-          </a:prstGeom>
-          <a:noFill/>
-          <a:ln w="19050">
-            <a:solidFill>
-              <a:srgbClr val="0068B7"/>
-            </a:solidFill>
-            <a:prstDash val="solid"/>
-          </a:ln>
-        </p:spPr>
+          <p:cNvPr id="14" name="Text 12"/>
+          <p:cNvSpPr/>
+          <p:nvPr/>
+        </p:nvSpPr>
+        <p:spPr>
+          <a:xfrm>
+            <a:off x="7799832" y="2935224"/>
+            <a:ext cx="3145536" cy="256032"/>
+          </a:xfrm>
+          <a:prstGeom prst="rect">
+            <a:avLst/>
+          </a:prstGeom>
+          <a:noFill/>
+          <a:ln/>
+        </p:spPr>
+        <p:txBody>
+          <a:bodyPr wrap="square" lIns="0" tIns="0" rIns="0" bIns="0" rtlCol="0" anchor="ctr"/>
+          <a:lstStyle/>
+          <a:p>
+            <a:pPr indent="0" marL="0">
+              <a:buNone/>
+            </a:pPr>
+            <a:r>
+              <a:rPr lang="en-US" sz="1300" b="1" dirty="0">
+                <a:solidFill>
+                  <a:srgbClr val="0068B7"/>
+                </a:solidFill>
+                <a:latin typeface="Aptos" pitchFamily="34" charset="0"/>
+                <a:ea typeface="Aptos" pitchFamily="34" charset="-122"/>
+                <a:cs typeface="Aptos" pitchFamily="34" charset="-120"/>
+              </a:rPr>
+              <a:t>Concept checkpoints</a:t>
+            </a:r>
+            <a:endParaRPr lang="en-US" sz="1300" dirty="0"/>
+          </a:p>
+        </p:txBody>
+      </p:sp>
+      <p:sp>
+        <p:nvSpPr>
+          <p:cNvPr id="15" name="Text 13"/>
+          <p:cNvSpPr/>
+          <p:nvPr/>
+        </p:nvSpPr>
+        <p:spPr>
+          <a:xfrm>
+            <a:off x="7818120" y="3300984"/>
+            <a:ext cx="3090672" cy="877824"/>
+          </a:xfrm>
+          <a:prstGeom prst="rect">
+            <a:avLst/>
+          </a:prstGeom>
+          <a:noFill/>
+          <a:ln/>
+        </p:spPr>
+        <p:txBody>
+          <a:bodyPr wrap="square" lIns="254" tIns="254" rIns="254" bIns="254" rtlCol="0" anchor="t">
+            <a:normAutofit/>
+          </a:bodyPr>
+          <a:lstStyle/>
+          <a:p>
+            <a:r>
+              <a:rPr lang="en-US" sz="1380" dirty="0">
+                <a:solidFill>
+                  <a:srgbClr val="17364A"/>
+                </a:solidFill>
+                <a:latin typeface="Aptos" pitchFamily="34" charset="0"/>
+                <a:ea typeface="Aptos" pitchFamily="34" charset="-122"/>
+                <a:cs typeface="Aptos" pitchFamily="34" charset="-120"/>
+              </a:rPr>
+              <a:t>NIST Artificial Intelligence Risk Management Framework:.</a:t>
+            </a:r>
+            <a:endParaRPr lang="en-US" sz="1380" dirty="0"/>
+          </a:p>
+          <a:p>
+            <a:r>
+              <a:rPr lang="en-US" sz="1380" dirty="0">
+                <a:solidFill>
+                  <a:srgbClr val="17364A"/>
+                </a:solidFill>
+                <a:latin typeface="Aptos" pitchFamily="34" charset="0"/>
+                <a:ea typeface="Aptos" pitchFamily="34" charset="-122"/>
+                <a:cs typeface="Aptos" pitchFamily="34" charset="-120"/>
+              </a:rPr>
+              <a:t>OWASP guidance for LLM application security</a:t>
+            </a:r>
+            <a:endParaRPr lang="en-US" sz="1380" dirty="0"/>
+          </a:p>
+          <a:p>
+            <a:r>
+              <a:rPr lang="en-US" sz="1380" dirty="0">
+                <a:solidFill>
+                  <a:srgbClr val="17364A"/>
+                </a:solidFill>
+                <a:latin typeface="Aptos" pitchFamily="34" charset="0"/>
+                <a:ea typeface="Aptos" pitchFamily="34" charset="-122"/>
+                <a:cs typeface="Aptos" pitchFamily="34" charset="-120"/>
+              </a:rPr>
+              <a:t>Agency policies for privacy, cybersecurity, records, procurement, accessibility, and.</a:t>
+            </a:r>
+            <a:endParaRPr lang="en-US" sz="1380" dirty="0"/>
+          </a:p>
+        </p:txBody>
       </p:sp>
       <p:sp>
         <p:nvSpPr>
           <p:cNvPr id="16" name="Shape 14"/>
-          <p:cNvSpPr/>
-          <p:nvPr/>
-        </p:nvSpPr>
-        <p:spPr>
-          <a:xfrm>
-            <a:off x="9198864" y="4206240"/>
-            <a:ext cx="347472" cy="347472"/>
-          </a:xfrm>
-          <a:prstGeom prst="ellipse">
-            <a:avLst/>
-          </a:prstGeom>
-          <a:solidFill>
-            <a:srgbClr val="2F8A28"/>
-          </a:solidFill>
-          <a:ln w="12700">
-            <a:solidFill>
-              <a:srgbClr val="2F8A28"/>
-            </a:solidFill>
-            <a:prstDash val="solid"/>
-          </a:ln>
-        </p:spPr>
-      </p:sp>
-      <p:sp>
-        <p:nvSpPr>
-          <p:cNvPr id="17" name="Text 15"/>
-          <p:cNvSpPr/>
-          <p:nvPr/>
-        </p:nvSpPr>
-        <p:spPr>
-          <a:xfrm>
-            <a:off x="7909560" y="3977640"/>
-            <a:ext cx="2926080" cy="182880"/>
-          </a:xfrm>
-          <a:prstGeom prst="rect">
-            <a:avLst/>
-          </a:prstGeom>
-          <a:noFill/>
-          <a:ln/>
-        </p:spPr>
-        <p:txBody>
-          <a:bodyPr wrap="square" lIns="0" tIns="0" rIns="0" bIns="0" rtlCol="0" anchor="ctr"/>
-          <a:lstStyle/>
-          <a:p>
-            <a:pPr algn="ctr" indent="0" marL="0">
-              <a:buNone/>
-            </a:pPr>
-            <a:r>
-              <a:rPr lang="en-US" sz="1000" dirty="0">
-                <a:solidFill>
-                  <a:srgbClr val="003A63"/>
-                </a:solidFill>
-                <a:latin typeface="Aptos" pitchFamily="34" charset="0"/>
-                <a:ea typeface="Aptos" pitchFamily="34" charset="-122"/>
-                <a:cs typeface="Aptos" pitchFamily="34" charset="-120"/>
-              </a:rPr>
-              <a:t>Concept to action</a:t>
-            </a:r>
-            <a:endParaRPr lang="en-US" sz="1000" dirty="0"/>
-          </a:p>
-        </p:txBody>
-      </p:sp>
-      <p:sp>
-        <p:nvSpPr>
-          <p:cNvPr id="18" name="Shape 16"/>
           <p:cNvSpPr/>
           <p:nvPr/>
         </p:nvSpPr>
@@ -12868,7 +12561,7 @@
       </p:sp>
       <p:sp>
         <p:nvSpPr>
-          <p:cNvPr id="19" name="Text 17"/>
+          <p:cNvPr id="17" name="Text 15"/>
           <p:cNvSpPr/>
           <p:nvPr/>
         </p:nvSpPr>
@@ -12907,7 +12600,7 @@
       </p:sp>
       <p:sp>
         <p:nvSpPr>
-          <p:cNvPr id="20" name="Text 18"/>
+          <p:cNvPr id="18" name="Text 16"/>
           <p:cNvSpPr/>
           <p:nvPr/>
         </p:nvSpPr>
@@ -13387,13 +13080,11 @@
             </a:avLst>
           </a:prstGeom>
           <a:solidFill>
-            <a:srgbClr val="FFFFFF">
-              <a:alpha val="88000"/>
-            </a:srgbClr>
+            <a:srgbClr val="FFFFFF"/>
           </a:solidFill>
           <a:ln w="12700">
             <a:solidFill>
-              <a:srgbClr val="D6E8F2"/>
+              <a:srgbClr val="B9D7E6"/>
             </a:solidFill>
             <a:prstDash val="solid"/>
           </a:ln>
@@ -13401,119 +13092,84 @@
       </p:sp>
       <p:sp>
         <p:nvSpPr>
-          <p:cNvPr id="14" name="Shape 12"/>
-          <p:cNvSpPr/>
-          <p:nvPr/>
-        </p:nvSpPr>
-        <p:spPr>
-          <a:xfrm>
-            <a:off x="8074152" y="3291840"/>
-            <a:ext cx="2596896" cy="749808"/>
-          </a:xfrm>
-          <a:prstGeom prst="rect">
-            <a:avLst/>
-          </a:prstGeom>
-          <a:solidFill>
-            <a:srgbClr val="EAF6F8"/>
-          </a:solidFill>
-          <a:ln w="12700">
-            <a:solidFill>
-              <a:srgbClr val="8ABBD8"/>
-            </a:solidFill>
-            <a:prstDash val="solid"/>
-          </a:ln>
-        </p:spPr>
-      </p:sp>
-      <p:sp>
-        <p:nvSpPr>
-          <p:cNvPr id="15" name="Shape 13"/>
-          <p:cNvSpPr/>
-          <p:nvPr/>
-        </p:nvSpPr>
-        <p:spPr>
-          <a:xfrm>
-            <a:off x="8202168" y="3721608"/>
-            <a:ext cx="2340864" cy="0"/>
-          </a:xfrm>
-          <a:prstGeom prst="line">
-            <a:avLst/>
-          </a:prstGeom>
-          <a:noFill/>
-          <a:ln w="19050">
-            <a:solidFill>
-              <a:srgbClr val="0068B7"/>
-            </a:solidFill>
-            <a:prstDash val="solid"/>
-          </a:ln>
-        </p:spPr>
+          <p:cNvPr id="14" name="Text 12"/>
+          <p:cNvSpPr/>
+          <p:nvPr/>
+        </p:nvSpPr>
+        <p:spPr>
+          <a:xfrm>
+            <a:off x="7799832" y="2935224"/>
+            <a:ext cx="3145536" cy="256032"/>
+          </a:xfrm>
+          <a:prstGeom prst="rect">
+            <a:avLst/>
+          </a:prstGeom>
+          <a:noFill/>
+          <a:ln/>
+        </p:spPr>
+        <p:txBody>
+          <a:bodyPr wrap="square" lIns="0" tIns="0" rIns="0" bIns="0" rtlCol="0" anchor="ctr"/>
+          <a:lstStyle/>
+          <a:p>
+            <a:pPr indent="0" marL="0">
+              <a:buNone/>
+            </a:pPr>
+            <a:r>
+              <a:rPr lang="en-US" sz="1300" b="1" dirty="0">
+                <a:solidFill>
+                  <a:srgbClr val="0068B7"/>
+                </a:solidFill>
+                <a:latin typeface="Aptos" pitchFamily="34" charset="0"/>
+                <a:ea typeface="Aptos" pitchFamily="34" charset="-122"/>
+                <a:cs typeface="Aptos" pitchFamily="34" charset="-120"/>
+              </a:rPr>
+              <a:t>Concept checkpoints</a:t>
+            </a:r>
+            <a:endParaRPr lang="en-US" sz="1300" dirty="0"/>
+          </a:p>
+        </p:txBody>
+      </p:sp>
+      <p:sp>
+        <p:nvSpPr>
+          <p:cNvPr id="15" name="Text 13"/>
+          <p:cNvSpPr/>
+          <p:nvPr/>
+        </p:nvSpPr>
+        <p:spPr>
+          <a:xfrm>
+            <a:off x="7818120" y="3300984"/>
+            <a:ext cx="3090672" cy="877824"/>
+          </a:xfrm>
+          <a:prstGeom prst="rect">
+            <a:avLst/>
+          </a:prstGeom>
+          <a:noFill/>
+          <a:ln/>
+        </p:spPr>
+        <p:txBody>
+          <a:bodyPr wrap="square" lIns="254" tIns="254" rIns="254" bIns="254" rtlCol="0" anchor="t">
+            <a:normAutofit/>
+          </a:bodyPr>
+          <a:lstStyle/>
+          <a:p>
+            <a:r>
+              <a:rPr lang="en-US" sz="1380" dirty="0">
+                <a:solidFill>
+                  <a:srgbClr val="17364A"/>
+                </a:solidFill>
+                <a:latin typeface="Aptos" pitchFamily="34" charset="0"/>
+                <a:ea typeface="Aptos" pitchFamily="34" charset="-122"/>
+                <a:cs typeface="Aptos" pitchFamily="34" charset="-120"/>
+              </a:rPr>
+              <a:t>Relevant public health program SOPs, data governance documentation, and implementation plans</a:t>
+            </a:r>
+            <a:endParaRPr lang="en-US" sz="1380" dirty="0"/>
+          </a:p>
+        </p:txBody>
       </p:sp>
       <p:sp>
         <p:nvSpPr>
           <p:cNvPr id="16" name="Shape 14"/>
-          <p:cNvSpPr/>
-          <p:nvPr/>
-        </p:nvSpPr>
-        <p:spPr>
-          <a:xfrm>
-            <a:off x="9198864" y="4206240"/>
-            <a:ext cx="347472" cy="347472"/>
-          </a:xfrm>
-          <a:prstGeom prst="ellipse">
-            <a:avLst/>
-          </a:prstGeom>
-          <a:solidFill>
-            <a:srgbClr val="2F8A28"/>
-          </a:solidFill>
-          <a:ln w="12700">
-            <a:solidFill>
-              <a:srgbClr val="2F8A28"/>
-            </a:solidFill>
-            <a:prstDash val="solid"/>
-          </a:ln>
-        </p:spPr>
-      </p:sp>
-      <p:sp>
-        <p:nvSpPr>
-          <p:cNvPr id="17" name="Text 15"/>
-          <p:cNvSpPr/>
-          <p:nvPr/>
-        </p:nvSpPr>
-        <p:spPr>
-          <a:xfrm>
-            <a:off x="7909560" y="3977640"/>
-            <a:ext cx="2926080" cy="182880"/>
-          </a:xfrm>
-          <a:prstGeom prst="rect">
-            <a:avLst/>
-          </a:prstGeom>
-          <a:noFill/>
-          <a:ln/>
-        </p:spPr>
-        <p:txBody>
-          <a:bodyPr wrap="square" lIns="0" tIns="0" rIns="0" bIns="0" rtlCol="0" anchor="ctr"/>
-          <a:lstStyle/>
-          <a:p>
-            <a:pPr algn="ctr" indent="0" marL="0">
-              <a:buNone/>
-            </a:pPr>
-            <a:r>
-              <a:rPr lang="en-US" sz="1000" dirty="0">
-                <a:solidFill>
-                  <a:srgbClr val="003A63"/>
-                </a:solidFill>
-                <a:latin typeface="Aptos" pitchFamily="34" charset="0"/>
-                <a:ea typeface="Aptos" pitchFamily="34" charset="-122"/>
-                <a:cs typeface="Aptos" pitchFamily="34" charset="-120"/>
-              </a:rPr>
-              <a:t>Concept to action</a:t>
-            </a:r>
-            <a:endParaRPr lang="en-US" sz="1000" dirty="0"/>
-          </a:p>
-        </p:txBody>
-      </p:sp>
-      <p:sp>
-        <p:nvSpPr>
-          <p:cNvPr id="18" name="Shape 16"/>
           <p:cNvSpPr/>
           <p:nvPr/>
         </p:nvSpPr>
@@ -13540,7 +13196,7 @@
       </p:sp>
       <p:sp>
         <p:nvSpPr>
-          <p:cNvPr id="19" name="Text 17"/>
+          <p:cNvPr id="17" name="Text 15"/>
           <p:cNvSpPr/>
           <p:nvPr/>
         </p:nvSpPr>
@@ -13579,7 +13235,7 @@
       </p:sp>
       <p:sp>
         <p:nvSpPr>
-          <p:cNvPr id="20" name="Text 18"/>
+          <p:cNvPr id="18" name="Text 16"/>
           <p:cNvSpPr/>
           <p:nvPr/>
         </p:nvSpPr>
@@ -14092,20 +13748,20 @@
         </p:nvSpPr>
         <p:spPr>
           <a:xfrm>
-            <a:off x="7818120" y="3977640"/>
-            <a:ext cx="972312" cy="749808"/>
+            <a:off x="8046720" y="3794760"/>
+            <a:ext cx="3063240" cy="1600200"/>
           </a:xfrm>
           <a:prstGeom prst="roundRect">
             <a:avLst>
-              <a:gd name="adj" fmla="val 14634"/>
+              <a:gd name="adj" fmla="val 6857"/>
             </a:avLst>
           </a:prstGeom>
           <a:solidFill>
-            <a:srgbClr val="0068B7"/>
+            <a:srgbClr val="FFFFFF"/>
           </a:solidFill>
           <a:ln w="12700">
             <a:solidFill>
-              <a:srgbClr val="0068B7"/>
+              <a:srgbClr val="B9D7E6"/>
             </a:solidFill>
             <a:prstDash val="solid"/>
           </a:ln>
@@ -14119,172 +13775,100 @@
         </p:nvSpPr>
         <p:spPr>
           <a:xfrm>
-            <a:off x="7891272" y="4169664"/>
-            <a:ext cx="826008" cy="310896"/>
-          </a:xfrm>
-          <a:prstGeom prst="rect">
-            <a:avLst/>
-          </a:prstGeom>
-          <a:noFill/>
-          <a:ln/>
-        </p:spPr>
-        <p:txBody>
-          <a:bodyPr wrap="square" lIns="0" tIns="0" rIns="0" bIns="0" rtlCol="0" anchor="ctr">
+            <a:off x="8211312" y="3941064"/>
+            <a:ext cx="2734056" cy="256032"/>
+          </a:xfrm>
+          <a:prstGeom prst="rect">
+            <a:avLst/>
+          </a:prstGeom>
+          <a:noFill/>
+          <a:ln/>
+        </p:spPr>
+        <p:txBody>
+          <a:bodyPr wrap="square" lIns="0" tIns="0" rIns="0" bIns="0" rtlCol="0" anchor="ctr"/>
+          <a:lstStyle/>
+          <a:p>
+            <a:pPr indent="0" marL="0">
+              <a:buNone/>
+            </a:pPr>
+            <a:r>
+              <a:rPr lang="en-US" sz="1300" b="1" dirty="0">
+                <a:solidFill>
+                  <a:srgbClr val="0068B7"/>
+                </a:solidFill>
+                <a:latin typeface="Aptos" pitchFamily="34" charset="0"/>
+                <a:ea typeface="Aptos" pitchFamily="34" charset="-122"/>
+                <a:cs typeface="Aptos" pitchFamily="34" charset="-120"/>
+              </a:rPr>
+              <a:t>Use the play links to</a:t>
+            </a:r>
+            <a:endParaRPr lang="en-US" sz="1300" dirty="0"/>
+          </a:p>
+        </p:txBody>
+      </p:sp>
+      <p:sp>
+        <p:nvSpPr>
+          <p:cNvPr id="15" name="Text 13"/>
+          <p:cNvSpPr/>
+          <p:nvPr/>
+        </p:nvSpPr>
+        <p:spPr>
+          <a:xfrm>
+            <a:off x="8229600" y="4306824"/>
+            <a:ext cx="2679192" cy="941832"/>
+          </a:xfrm>
+          <a:prstGeom prst="rect">
+            <a:avLst/>
+          </a:prstGeom>
+          <a:noFill/>
+          <a:ln/>
+        </p:spPr>
+        <p:txBody>
+          <a:bodyPr wrap="square" lIns="254" tIns="254" rIns="254" bIns="254" rtlCol="0" anchor="t">
             <a:normAutofit/>
           </a:bodyPr>
           <a:lstStyle/>
           <a:p>
-            <a:pPr algn="ctr" indent="0" marL="0">
-              <a:buNone/>
-            </a:pPr>
-            <a:r>
-              <a:rPr lang="en-US" sz="1500" b="1" dirty="0">
-                <a:solidFill>
-                  <a:srgbClr val="FFFFFF"/>
-                </a:solidFill>
-                <a:latin typeface="Aptos" pitchFamily="34" charset="0"/>
-                <a:ea typeface="Aptos" pitchFamily="34" charset="-122"/>
-                <a:cs typeface="Aptos" pitchFamily="34" charset="-120"/>
-              </a:rPr>
-              <a:t>Lesson</a:t>
-            </a:r>
-            <a:endParaRPr lang="en-US" sz="1500" dirty="0"/>
-          </a:p>
-        </p:txBody>
-      </p:sp>
-      <p:sp>
-        <p:nvSpPr>
-          <p:cNvPr id="15" name="Shape 13"/>
-          <p:cNvSpPr/>
-          <p:nvPr/>
-        </p:nvSpPr>
-        <p:spPr>
-          <a:xfrm>
-            <a:off x="9046464" y="3977640"/>
-            <a:ext cx="972312" cy="749808"/>
-          </a:xfrm>
-          <a:prstGeom prst="roundRect">
-            <a:avLst>
-              <a:gd name="adj" fmla="val 14634"/>
-            </a:avLst>
-          </a:prstGeom>
-          <a:solidFill>
-            <a:srgbClr val="2F8A28"/>
-          </a:solidFill>
-          <a:ln w="12700">
-            <a:solidFill>
-              <a:srgbClr val="2F8A28"/>
-            </a:solidFill>
-            <a:prstDash val="solid"/>
-          </a:ln>
-        </p:spPr>
-      </p:sp>
-      <p:sp>
-        <p:nvSpPr>
-          <p:cNvPr id="16" name="Text 14"/>
-          <p:cNvSpPr/>
-          <p:nvPr/>
-        </p:nvSpPr>
-        <p:spPr>
-          <a:xfrm>
-            <a:off x="9119616" y="4169664"/>
-            <a:ext cx="826008" cy="310896"/>
-          </a:xfrm>
-          <a:prstGeom prst="rect">
-            <a:avLst/>
-          </a:prstGeom>
-          <a:noFill/>
-          <a:ln/>
-        </p:spPr>
-        <p:txBody>
-          <a:bodyPr wrap="square" lIns="0" tIns="0" rIns="0" bIns="0" rtlCol="0" anchor="ctr">
-            <a:normAutofit/>
-          </a:bodyPr>
-          <a:lstStyle/>
-          <a:p>
-            <a:pPr algn="ctr" indent="0" marL="0">
-              <a:buNone/>
-            </a:pPr>
-            <a:r>
-              <a:rPr lang="en-US" sz="1500" b="1" dirty="0">
-                <a:solidFill>
-                  <a:srgbClr val="FFFFFF"/>
-                </a:solidFill>
-                <a:latin typeface="Aptos" pitchFamily="34" charset="0"/>
-                <a:ea typeface="Aptos" pitchFamily="34" charset="-122"/>
-                <a:cs typeface="Aptos" pitchFamily="34" charset="-120"/>
-              </a:rPr>
-              <a:t>Plays</a:t>
-            </a:r>
-            <a:endParaRPr lang="en-US" sz="1500" dirty="0"/>
-          </a:p>
-        </p:txBody>
-      </p:sp>
-      <p:sp>
-        <p:nvSpPr>
-          <p:cNvPr id="17" name="Shape 15"/>
-          <p:cNvSpPr/>
-          <p:nvPr/>
-        </p:nvSpPr>
-        <p:spPr>
-          <a:xfrm>
-            <a:off x="10274808" y="3977640"/>
-            <a:ext cx="972312" cy="749808"/>
-          </a:xfrm>
-          <a:prstGeom prst="roundRect">
-            <a:avLst>
-              <a:gd name="adj" fmla="val 14634"/>
-            </a:avLst>
-          </a:prstGeom>
-          <a:solidFill>
-            <a:srgbClr val="6A4CA3"/>
-          </a:solidFill>
-          <a:ln w="12700">
-            <a:solidFill>
-              <a:srgbClr val="6A4CA3"/>
-            </a:solidFill>
-            <a:prstDash val="solid"/>
-          </a:ln>
-        </p:spPr>
-      </p:sp>
-      <p:sp>
-        <p:nvSpPr>
-          <p:cNvPr id="18" name="Text 16"/>
-          <p:cNvSpPr/>
-          <p:nvPr/>
-        </p:nvSpPr>
-        <p:spPr>
-          <a:xfrm>
-            <a:off x="10347960" y="4169664"/>
-            <a:ext cx="826008" cy="310896"/>
-          </a:xfrm>
-          <a:prstGeom prst="rect">
-            <a:avLst/>
-          </a:prstGeom>
-          <a:noFill/>
-          <a:ln/>
-        </p:spPr>
-        <p:txBody>
-          <a:bodyPr wrap="square" lIns="0" tIns="0" rIns="0" bIns="0" rtlCol="0" anchor="ctr">
-            <a:normAutofit/>
-          </a:bodyPr>
-          <a:lstStyle/>
-          <a:p>
-            <a:pPr algn="ctr" indent="0" marL="0">
-              <a:buNone/>
-            </a:pPr>
-            <a:r>
-              <a:rPr lang="en-US" sz="1500" b="1" dirty="0">
-                <a:solidFill>
-                  <a:srgbClr val="FFFFFF"/>
-                </a:solidFill>
-                <a:latin typeface="Aptos" pitchFamily="34" charset="0"/>
-                <a:ea typeface="Aptos" pitchFamily="34" charset="-122"/>
-                <a:cs typeface="Aptos" pitchFamily="34" charset="-120"/>
-              </a:rPr>
-              <a:t>Action</a:t>
-            </a:r>
-            <a:endParaRPr lang="en-US" sz="1500" dirty="0"/>
+            <a:r>
+              <a:rPr lang="en-US" sz="1380" dirty="0">
+                <a:solidFill>
+                  <a:srgbClr val="17364A"/>
+                </a:solidFill>
+                <a:latin typeface="Aptos" pitchFamily="34" charset="0"/>
+                <a:ea typeface="Aptos" pitchFamily="34" charset="-122"/>
+                <a:cs typeface="Aptos" pitchFamily="34" charset="-120"/>
+              </a:rPr>
+              <a:t>Locate the decision point in the playbook sequence.</a:t>
+            </a:r>
+            <a:endParaRPr lang="en-US" sz="1380" dirty="0"/>
+          </a:p>
+          <a:p>
+            <a:r>
+              <a:rPr lang="en-US" sz="1380" dirty="0">
+                <a:solidFill>
+                  <a:srgbClr val="17364A"/>
+                </a:solidFill>
+                <a:latin typeface="Aptos" pitchFamily="34" charset="0"/>
+                <a:ea typeface="Aptos" pitchFamily="34" charset="-122"/>
+                <a:cs typeface="Aptos" pitchFamily="34" charset="-120"/>
+              </a:rPr>
+              <a:t>Identify who should participate in the work.</a:t>
+            </a:r>
+            <a:endParaRPr lang="en-US" sz="1380" dirty="0"/>
+          </a:p>
+          <a:p>
+            <a:r>
+              <a:rPr lang="en-US" sz="1380" dirty="0">
+                <a:solidFill>
+                  <a:srgbClr val="17364A"/>
+                </a:solidFill>
+                <a:latin typeface="Aptos" pitchFamily="34" charset="0"/>
+                <a:ea typeface="Aptos" pitchFamily="34" charset="-122"/>
+                <a:cs typeface="Aptos" pitchFamily="34" charset="-120"/>
+              </a:rPr>
+              <a:t>Document the review, approval, or implementation step.</a:t>
+            </a:r>
+            <a:endParaRPr lang="en-US" sz="1380" dirty="0"/>
           </a:p>
         </p:txBody>
       </p:sp>
@@ -14762,20 +14346,20 @@
         </p:nvSpPr>
         <p:spPr>
           <a:xfrm>
-            <a:off x="7818120" y="3977640"/>
-            <a:ext cx="972312" cy="749808"/>
+            <a:off x="8046720" y="3794760"/>
+            <a:ext cx="3063240" cy="1600200"/>
           </a:xfrm>
           <a:prstGeom prst="roundRect">
             <a:avLst>
-              <a:gd name="adj" fmla="val 14634"/>
+              <a:gd name="adj" fmla="val 6857"/>
             </a:avLst>
           </a:prstGeom>
           <a:solidFill>
-            <a:srgbClr val="0068B7"/>
+            <a:srgbClr val="FFFFFF"/>
           </a:solidFill>
           <a:ln w="12700">
             <a:solidFill>
-              <a:srgbClr val="0068B7"/>
+              <a:srgbClr val="B9D7E6"/>
             </a:solidFill>
             <a:prstDash val="solid"/>
           </a:ln>
@@ -14789,172 +14373,100 @@
         </p:nvSpPr>
         <p:spPr>
           <a:xfrm>
-            <a:off x="7891272" y="4169664"/>
-            <a:ext cx="826008" cy="310896"/>
-          </a:xfrm>
-          <a:prstGeom prst="rect">
-            <a:avLst/>
-          </a:prstGeom>
-          <a:noFill/>
-          <a:ln/>
-        </p:spPr>
-        <p:txBody>
-          <a:bodyPr wrap="square" lIns="0" tIns="0" rIns="0" bIns="0" rtlCol="0" anchor="ctr">
+            <a:off x="8211312" y="3941064"/>
+            <a:ext cx="2734056" cy="256032"/>
+          </a:xfrm>
+          <a:prstGeom prst="rect">
+            <a:avLst/>
+          </a:prstGeom>
+          <a:noFill/>
+          <a:ln/>
+        </p:spPr>
+        <p:txBody>
+          <a:bodyPr wrap="square" lIns="0" tIns="0" rIns="0" bIns="0" rtlCol="0" anchor="ctr"/>
+          <a:lstStyle/>
+          <a:p>
+            <a:pPr indent="0" marL="0">
+              <a:buNone/>
+            </a:pPr>
+            <a:r>
+              <a:rPr lang="en-US" sz="1300" b="1" dirty="0">
+                <a:solidFill>
+                  <a:srgbClr val="0068B7"/>
+                </a:solidFill>
+                <a:latin typeface="Aptos" pitchFamily="34" charset="0"/>
+                <a:ea typeface="Aptos" pitchFamily="34" charset="-122"/>
+                <a:cs typeface="Aptos" pitchFamily="34" charset="-120"/>
+              </a:rPr>
+              <a:t>Tool selection cues</a:t>
+            </a:r>
+            <a:endParaRPr lang="en-US" sz="1300" dirty="0"/>
+          </a:p>
+        </p:txBody>
+      </p:sp>
+      <p:sp>
+        <p:nvSpPr>
+          <p:cNvPr id="15" name="Text 13"/>
+          <p:cNvSpPr/>
+          <p:nvPr/>
+        </p:nvSpPr>
+        <p:spPr>
+          <a:xfrm>
+            <a:off x="8229600" y="4306824"/>
+            <a:ext cx="2679192" cy="941832"/>
+          </a:xfrm>
+          <a:prstGeom prst="rect">
+            <a:avLst/>
+          </a:prstGeom>
+          <a:noFill/>
+          <a:ln/>
+        </p:spPr>
+        <p:txBody>
+          <a:bodyPr wrap="square" lIns="254" tIns="254" rIns="254" bIns="254" rtlCol="0" anchor="t">
             <a:normAutofit/>
           </a:bodyPr>
           <a:lstStyle/>
           <a:p>
-            <a:pPr algn="ctr" indent="0" marL="0">
-              <a:buNone/>
-            </a:pPr>
-            <a:r>
-              <a:rPr lang="en-US" sz="1500" b="1" dirty="0">
-                <a:solidFill>
-                  <a:srgbClr val="FFFFFF"/>
-                </a:solidFill>
-                <a:latin typeface="Aptos" pitchFamily="34" charset="0"/>
-                <a:ea typeface="Aptos" pitchFamily="34" charset="-122"/>
-                <a:cs typeface="Aptos" pitchFamily="34" charset="-120"/>
-              </a:rPr>
-              <a:t>Concept</a:t>
-            </a:r>
-            <a:endParaRPr lang="en-US" sz="1500" dirty="0"/>
-          </a:p>
-        </p:txBody>
-      </p:sp>
-      <p:sp>
-        <p:nvSpPr>
-          <p:cNvPr id="15" name="Shape 13"/>
-          <p:cNvSpPr/>
-          <p:nvPr/>
-        </p:nvSpPr>
-        <p:spPr>
-          <a:xfrm>
-            <a:off x="9046464" y="3977640"/>
-            <a:ext cx="972312" cy="749808"/>
-          </a:xfrm>
-          <a:prstGeom prst="roundRect">
-            <a:avLst>
-              <a:gd name="adj" fmla="val 14634"/>
-            </a:avLst>
-          </a:prstGeom>
-          <a:solidFill>
-            <a:srgbClr val="2F8A28"/>
-          </a:solidFill>
-          <a:ln w="12700">
-            <a:solidFill>
-              <a:srgbClr val="2F8A28"/>
-            </a:solidFill>
-            <a:prstDash val="solid"/>
-          </a:ln>
-        </p:spPr>
-      </p:sp>
-      <p:sp>
-        <p:nvSpPr>
-          <p:cNvPr id="16" name="Text 14"/>
-          <p:cNvSpPr/>
-          <p:nvPr/>
-        </p:nvSpPr>
-        <p:spPr>
-          <a:xfrm>
-            <a:off x="9119616" y="4169664"/>
-            <a:ext cx="826008" cy="310896"/>
-          </a:xfrm>
-          <a:prstGeom prst="rect">
-            <a:avLst/>
-          </a:prstGeom>
-          <a:noFill/>
-          <a:ln/>
-        </p:spPr>
-        <p:txBody>
-          <a:bodyPr wrap="square" lIns="0" tIns="0" rIns="0" bIns="0" rtlCol="0" anchor="ctr">
-            <a:normAutofit/>
-          </a:bodyPr>
-          <a:lstStyle/>
-          <a:p>
-            <a:pPr algn="ctr" indent="0" marL="0">
-              <a:buNone/>
-            </a:pPr>
-            <a:r>
-              <a:rPr lang="en-US" sz="1500" b="1" dirty="0">
-                <a:solidFill>
-                  <a:srgbClr val="FFFFFF"/>
-                </a:solidFill>
-                <a:latin typeface="Aptos" pitchFamily="34" charset="0"/>
-                <a:ea typeface="Aptos" pitchFamily="34" charset="-122"/>
-                <a:cs typeface="Aptos" pitchFamily="34" charset="-120"/>
-              </a:rPr>
-              <a:t>Tool</a:t>
-            </a:r>
-            <a:endParaRPr lang="en-US" sz="1500" dirty="0"/>
-          </a:p>
-        </p:txBody>
-      </p:sp>
-      <p:sp>
-        <p:nvSpPr>
-          <p:cNvPr id="17" name="Shape 15"/>
-          <p:cNvSpPr/>
-          <p:nvPr/>
-        </p:nvSpPr>
-        <p:spPr>
-          <a:xfrm>
-            <a:off x="10274808" y="3977640"/>
-            <a:ext cx="972312" cy="749808"/>
-          </a:xfrm>
-          <a:prstGeom prst="roundRect">
-            <a:avLst>
-              <a:gd name="adj" fmla="val 14634"/>
-            </a:avLst>
-          </a:prstGeom>
-          <a:solidFill>
-            <a:srgbClr val="D69A2D"/>
-          </a:solidFill>
-          <a:ln w="12700">
-            <a:solidFill>
-              <a:srgbClr val="D69A2D"/>
-            </a:solidFill>
-            <a:prstDash val="solid"/>
-          </a:ln>
-        </p:spPr>
-      </p:sp>
-      <p:sp>
-        <p:nvSpPr>
-          <p:cNvPr id="18" name="Text 16"/>
-          <p:cNvSpPr/>
-          <p:nvPr/>
-        </p:nvSpPr>
-        <p:spPr>
-          <a:xfrm>
-            <a:off x="10347960" y="4169664"/>
-            <a:ext cx="826008" cy="310896"/>
-          </a:xfrm>
-          <a:prstGeom prst="rect">
-            <a:avLst/>
-          </a:prstGeom>
-          <a:noFill/>
-          <a:ln/>
-        </p:spPr>
-        <p:txBody>
-          <a:bodyPr wrap="square" lIns="0" tIns="0" rIns="0" bIns="0" rtlCol="0" anchor="ctr">
-            <a:normAutofit/>
-          </a:bodyPr>
-          <a:lstStyle/>
-          <a:p>
-            <a:pPr algn="ctr" indent="0" marL="0">
-              <a:buNone/>
-            </a:pPr>
-            <a:r>
-              <a:rPr lang="en-US" sz="1500" b="1" dirty="0">
-                <a:solidFill>
-                  <a:srgbClr val="FFFFFF"/>
-                </a:solidFill>
-                <a:latin typeface="Aptos" pitchFamily="34" charset="0"/>
-                <a:ea typeface="Aptos" pitchFamily="34" charset="-122"/>
-                <a:cs typeface="Aptos" pitchFamily="34" charset="-120"/>
-              </a:rPr>
-              <a:t>Artifact</a:t>
-            </a:r>
-            <a:endParaRPr lang="en-US" sz="1500" dirty="0"/>
+            <a:r>
+              <a:rPr lang="en-US" sz="1380" dirty="0">
+                <a:solidFill>
+                  <a:srgbClr val="17364A"/>
+                </a:solidFill>
+                <a:latin typeface="Aptos" pitchFamily="34" charset="0"/>
+                <a:ea typeface="Aptos" pitchFamily="34" charset="-122"/>
+                <a:cs typeface="Aptos" pitchFamily="34" charset="-120"/>
+              </a:rPr>
+              <a:t>Use a tool when no comparable local process exists.</a:t>
+            </a:r>
+            <a:endParaRPr lang="en-US" sz="1380" dirty="0"/>
+          </a:p>
+          <a:p>
+            <a:r>
+              <a:rPr lang="en-US" sz="1380" dirty="0">
+                <a:solidFill>
+                  <a:srgbClr val="17364A"/>
+                </a:solidFill>
+                <a:latin typeface="Aptos" pitchFamily="34" charset="0"/>
+                <a:ea typeface="Aptos" pitchFamily="34" charset="-122"/>
+                <a:cs typeface="Aptos" pitchFamily="34" charset="-120"/>
+              </a:rPr>
+              <a:t>Adapt existing department templates when they already fit the purpose.</a:t>
+            </a:r>
+            <a:endParaRPr lang="en-US" sz="1380" dirty="0"/>
+          </a:p>
+          <a:p>
+            <a:r>
+              <a:rPr lang="en-US" sz="1380" dirty="0">
+                <a:solidFill>
+                  <a:srgbClr val="17364A"/>
+                </a:solidFill>
+                <a:latin typeface="Aptos" pitchFamily="34" charset="0"/>
+                <a:ea typeface="Aptos" pitchFamily="34" charset="-122"/>
+                <a:cs typeface="Aptos" pitchFamily="34" charset="-120"/>
+              </a:rPr>
+              <a:t>Save the completed artifact as evidence of the decision.</a:t>
+            </a:r>
+            <a:endParaRPr lang="en-US" sz="1380" dirty="0"/>
           </a:p>
         </p:txBody>
       </p:sp>
@@ -15427,13 +14939,11 @@
             </a:avLst>
           </a:prstGeom>
           <a:solidFill>
-            <a:srgbClr val="FFFFFF">
-              <a:alpha val="88000"/>
-            </a:srgbClr>
+            <a:srgbClr val="FFFFFF"/>
           </a:solidFill>
           <a:ln w="12700">
             <a:solidFill>
-              <a:srgbClr val="D6E8F2"/>
+              <a:srgbClr val="B9D7E6"/>
             </a:solidFill>
             <a:prstDash val="solid"/>
           </a:ln>
@@ -15441,119 +14951,112 @@
       </p:sp>
       <p:sp>
         <p:nvSpPr>
-          <p:cNvPr id="14" name="Shape 12"/>
-          <p:cNvSpPr/>
-          <p:nvPr/>
-        </p:nvSpPr>
-        <p:spPr>
-          <a:xfrm>
-            <a:off x="8074152" y="3291840"/>
-            <a:ext cx="2596896" cy="749808"/>
-          </a:xfrm>
-          <a:prstGeom prst="rect">
-            <a:avLst/>
-          </a:prstGeom>
-          <a:solidFill>
-            <a:srgbClr val="EAF6F8"/>
-          </a:solidFill>
-          <a:ln w="12700">
-            <a:solidFill>
-              <a:srgbClr val="8ABBD8"/>
-            </a:solidFill>
-            <a:prstDash val="solid"/>
-          </a:ln>
-        </p:spPr>
-      </p:sp>
-      <p:sp>
-        <p:nvSpPr>
-          <p:cNvPr id="15" name="Shape 13"/>
-          <p:cNvSpPr/>
-          <p:nvPr/>
-        </p:nvSpPr>
-        <p:spPr>
-          <a:xfrm>
-            <a:off x="8202168" y="3721608"/>
-            <a:ext cx="2340864" cy="0"/>
-          </a:xfrm>
-          <a:prstGeom prst="line">
-            <a:avLst/>
-          </a:prstGeom>
-          <a:noFill/>
-          <a:ln w="19050">
-            <a:solidFill>
-              <a:srgbClr val="0068B7"/>
-            </a:solidFill>
-            <a:prstDash val="solid"/>
-          </a:ln>
-        </p:spPr>
+          <p:cNvPr id="14" name="Text 12"/>
+          <p:cNvSpPr/>
+          <p:nvPr/>
+        </p:nvSpPr>
+        <p:spPr>
+          <a:xfrm>
+            <a:off x="7799832" y="2935224"/>
+            <a:ext cx="3145536" cy="256032"/>
+          </a:xfrm>
+          <a:prstGeom prst="rect">
+            <a:avLst/>
+          </a:prstGeom>
+          <a:noFill/>
+          <a:ln/>
+        </p:spPr>
+        <p:txBody>
+          <a:bodyPr wrap="square" lIns="0" tIns="0" rIns="0" bIns="0" rtlCol="0" anchor="ctr"/>
+          <a:lstStyle/>
+          <a:p>
+            <a:pPr indent="0" marL="0">
+              <a:buNone/>
+            </a:pPr>
+            <a:r>
+              <a:rPr lang="en-US" sz="1300" b="1" dirty="0">
+                <a:solidFill>
+                  <a:srgbClr val="0068B7"/>
+                </a:solidFill>
+                <a:latin typeface="Aptos" pitchFamily="34" charset="0"/>
+                <a:ea typeface="Aptos" pitchFamily="34" charset="-122"/>
+                <a:cs typeface="Aptos" pitchFamily="34" charset="-120"/>
+              </a:rPr>
+              <a:t>Concept checkpoints</a:t>
+            </a:r>
+            <a:endParaRPr lang="en-US" sz="1300" dirty="0"/>
+          </a:p>
+        </p:txBody>
+      </p:sp>
+      <p:sp>
+        <p:nvSpPr>
+          <p:cNvPr id="15" name="Text 13"/>
+          <p:cNvSpPr/>
+          <p:nvPr/>
+        </p:nvSpPr>
+        <p:spPr>
+          <a:xfrm>
+            <a:off x="7818120" y="3300984"/>
+            <a:ext cx="3090672" cy="877824"/>
+          </a:xfrm>
+          <a:prstGeom prst="rect">
+            <a:avLst/>
+          </a:prstGeom>
+          <a:noFill/>
+          <a:ln/>
+        </p:spPr>
+        <p:txBody>
+          <a:bodyPr wrap="square" lIns="254" tIns="254" rIns="254" bIns="254" rtlCol="0" anchor="t">
+            <a:normAutofit/>
+          </a:bodyPr>
+          <a:lstStyle/>
+          <a:p>
+            <a:r>
+              <a:rPr lang="en-US" sz="1380" dirty="0">
+                <a:solidFill>
+                  <a:srgbClr val="17364A"/>
+                </a:solidFill>
+                <a:latin typeface="Aptos" pitchFamily="34" charset="0"/>
+                <a:ea typeface="Aptos" pitchFamily="34" charset="-122"/>
+                <a:cs typeface="Aptos" pitchFamily="34" charset="-120"/>
+              </a:rPr>
+              <a:t>Distinguish between AI-supported triage, summarization, extraction, signal detection, and.</a:t>
+            </a:r>
+            <a:endParaRPr lang="en-US" sz="1380" dirty="0"/>
+          </a:p>
+          <a:p>
+            <a:r>
+              <a:rPr lang="en-US" sz="1380" dirty="0">
+                <a:solidFill>
+                  <a:srgbClr val="17364A"/>
+                </a:solidFill>
+                <a:latin typeface="Aptos" pitchFamily="34" charset="0"/>
+                <a:ea typeface="Aptos" pitchFamily="34" charset="-122"/>
+                <a:cs typeface="Aptos" pitchFamily="34" charset="-120"/>
+              </a:rPr>
+              <a:t>Assess data quality, timeliness, source traceability, and equity risks in AI-supported.</a:t>
+            </a:r>
+            <a:endParaRPr lang="en-US" sz="1380" dirty="0"/>
+          </a:p>
+          <a:p>
+            <a:r>
+              <a:rPr lang="en-US" sz="1380" dirty="0">
+                <a:solidFill>
+                  <a:srgbClr val="17364A"/>
+                </a:solidFill>
+                <a:latin typeface="Aptos" pitchFamily="34" charset="0"/>
+                <a:ea typeface="Aptos" pitchFamily="34" charset="-122"/>
+                <a:cs typeface="Aptos" pitchFamily="34" charset="-120"/>
+              </a:rPr>
+              <a:t>Define human review, escalation, and documentation expectations for AI outputs.</a:t>
+            </a:r>
+            <a:endParaRPr lang="en-US" sz="1380" dirty="0"/>
+          </a:p>
+        </p:txBody>
       </p:sp>
       <p:sp>
         <p:nvSpPr>
           <p:cNvPr id="16" name="Shape 14"/>
-          <p:cNvSpPr/>
-          <p:nvPr/>
-        </p:nvSpPr>
-        <p:spPr>
-          <a:xfrm>
-            <a:off x="9198864" y="4206240"/>
-            <a:ext cx="347472" cy="347472"/>
-          </a:xfrm>
-          <a:prstGeom prst="ellipse">
-            <a:avLst/>
-          </a:prstGeom>
-          <a:solidFill>
-            <a:srgbClr val="2F8A28"/>
-          </a:solidFill>
-          <a:ln w="12700">
-            <a:solidFill>
-              <a:srgbClr val="2F8A28"/>
-            </a:solidFill>
-            <a:prstDash val="solid"/>
-          </a:ln>
-        </p:spPr>
-      </p:sp>
-      <p:sp>
-        <p:nvSpPr>
-          <p:cNvPr id="17" name="Text 15"/>
-          <p:cNvSpPr/>
-          <p:nvPr/>
-        </p:nvSpPr>
-        <p:spPr>
-          <a:xfrm>
-            <a:off x="7909560" y="3977640"/>
-            <a:ext cx="2926080" cy="182880"/>
-          </a:xfrm>
-          <a:prstGeom prst="rect">
-            <a:avLst/>
-          </a:prstGeom>
-          <a:noFill/>
-          <a:ln/>
-        </p:spPr>
-        <p:txBody>
-          <a:bodyPr wrap="square" lIns="0" tIns="0" rIns="0" bIns="0" rtlCol="0" anchor="ctr"/>
-          <a:lstStyle/>
-          <a:p>
-            <a:pPr algn="ctr" indent="0" marL="0">
-              <a:buNone/>
-            </a:pPr>
-            <a:r>
-              <a:rPr lang="en-US" sz="1000" dirty="0">
-                <a:solidFill>
-                  <a:srgbClr val="003A63"/>
-                </a:solidFill>
-                <a:latin typeface="Aptos" pitchFamily="34" charset="0"/>
-                <a:ea typeface="Aptos" pitchFamily="34" charset="-122"/>
-                <a:cs typeface="Aptos" pitchFamily="34" charset="-120"/>
-              </a:rPr>
-              <a:t>Concept to action</a:t>
-            </a:r>
-            <a:endParaRPr lang="en-US" sz="1000" dirty="0"/>
-          </a:p>
-        </p:txBody>
-      </p:sp>
-      <p:sp>
-        <p:nvSpPr>
-          <p:cNvPr id="18" name="Shape 16"/>
           <p:cNvSpPr/>
           <p:nvPr/>
         </p:nvSpPr>
@@ -15580,7 +15083,7 @@
       </p:sp>
       <p:sp>
         <p:nvSpPr>
-          <p:cNvPr id="19" name="Text 17"/>
+          <p:cNvPr id="17" name="Text 15"/>
           <p:cNvSpPr/>
           <p:nvPr/>
         </p:nvSpPr>
@@ -15619,7 +15122,7 @@
       </p:sp>
       <p:sp>
         <p:nvSpPr>
-          <p:cNvPr id="20" name="Text 18"/>
+          <p:cNvPr id="18" name="Text 16"/>
           <p:cNvSpPr/>
           <p:nvPr/>
         </p:nvSpPr>
@@ -16127,13 +15630,11 @@
             </a:avLst>
           </a:prstGeom>
           <a:solidFill>
-            <a:srgbClr val="FFFFFF">
-              <a:alpha val="88000"/>
-            </a:srgbClr>
+            <a:srgbClr val="FFFFFF"/>
           </a:solidFill>
           <a:ln w="12700">
             <a:solidFill>
-              <a:srgbClr val="D6E8F2"/>
+              <a:srgbClr val="B9D7E6"/>
             </a:solidFill>
             <a:prstDash val="solid"/>
           </a:ln>
@@ -16141,119 +15642,112 @@
       </p:sp>
       <p:sp>
         <p:nvSpPr>
-          <p:cNvPr id="14" name="Shape 12"/>
-          <p:cNvSpPr/>
-          <p:nvPr/>
-        </p:nvSpPr>
-        <p:spPr>
-          <a:xfrm>
-            <a:off x="8074152" y="3291840"/>
-            <a:ext cx="2596896" cy="749808"/>
-          </a:xfrm>
-          <a:prstGeom prst="rect">
-            <a:avLst/>
-          </a:prstGeom>
-          <a:solidFill>
-            <a:srgbClr val="EAF6F8"/>
-          </a:solidFill>
-          <a:ln w="12700">
-            <a:solidFill>
-              <a:srgbClr val="8ABBD8"/>
-            </a:solidFill>
-            <a:prstDash val="solid"/>
-          </a:ln>
-        </p:spPr>
-      </p:sp>
-      <p:sp>
-        <p:nvSpPr>
-          <p:cNvPr id="15" name="Shape 13"/>
-          <p:cNvSpPr/>
-          <p:nvPr/>
-        </p:nvSpPr>
-        <p:spPr>
-          <a:xfrm>
-            <a:off x="8202168" y="3721608"/>
-            <a:ext cx="2340864" cy="0"/>
-          </a:xfrm>
-          <a:prstGeom prst="line">
-            <a:avLst/>
-          </a:prstGeom>
-          <a:noFill/>
-          <a:ln w="19050">
-            <a:solidFill>
-              <a:srgbClr val="0068B7"/>
-            </a:solidFill>
-            <a:prstDash val="solid"/>
-          </a:ln>
-        </p:spPr>
+          <p:cNvPr id="14" name="Text 12"/>
+          <p:cNvSpPr/>
+          <p:nvPr/>
+        </p:nvSpPr>
+        <p:spPr>
+          <a:xfrm>
+            <a:off x="7799832" y="2935224"/>
+            <a:ext cx="3145536" cy="256032"/>
+          </a:xfrm>
+          <a:prstGeom prst="rect">
+            <a:avLst/>
+          </a:prstGeom>
+          <a:noFill/>
+          <a:ln/>
+        </p:spPr>
+        <p:txBody>
+          <a:bodyPr wrap="square" lIns="0" tIns="0" rIns="0" bIns="0" rtlCol="0" anchor="ctr"/>
+          <a:lstStyle/>
+          <a:p>
+            <a:pPr indent="0" marL="0">
+              <a:buNone/>
+            </a:pPr>
+            <a:r>
+              <a:rPr lang="en-US" sz="1300" b="1" dirty="0">
+                <a:solidFill>
+                  <a:srgbClr val="0068B7"/>
+                </a:solidFill>
+                <a:latin typeface="Aptos" pitchFamily="34" charset="0"/>
+                <a:ea typeface="Aptos" pitchFamily="34" charset="-122"/>
+                <a:cs typeface="Aptos" pitchFamily="34" charset="-120"/>
+              </a:rPr>
+              <a:t>Concept checkpoints</a:t>
+            </a:r>
+            <a:endParaRPr lang="en-US" sz="1300" dirty="0"/>
+          </a:p>
+        </p:txBody>
+      </p:sp>
+      <p:sp>
+        <p:nvSpPr>
+          <p:cNvPr id="15" name="Text 13"/>
+          <p:cNvSpPr/>
+          <p:nvPr/>
+        </p:nvSpPr>
+        <p:spPr>
+          <a:xfrm>
+            <a:off x="7818120" y="3300984"/>
+            <a:ext cx="3090672" cy="877824"/>
+          </a:xfrm>
+          <a:prstGeom prst="rect">
+            <a:avLst/>
+          </a:prstGeom>
+          <a:noFill/>
+          <a:ln/>
+        </p:spPr>
+        <p:txBody>
+          <a:bodyPr wrap="square" lIns="254" tIns="254" rIns="254" bIns="254" rtlCol="0" anchor="t">
+            <a:normAutofit/>
+          </a:bodyPr>
+          <a:lstStyle/>
+          <a:p>
+            <a:r>
+              <a:rPr lang="en-US" sz="1380" dirty="0">
+                <a:solidFill>
+                  <a:srgbClr val="17364A"/>
+                </a:solidFill>
+                <a:latin typeface="Aptos" pitchFamily="34" charset="0"/>
+                <a:ea typeface="Aptos" pitchFamily="34" charset="-122"/>
+                <a:cs typeface="Aptos" pitchFamily="34" charset="-120"/>
+              </a:rPr>
+              <a:t>Case investigation and outbreak response are high-pressure public health workflows that.</a:t>
+            </a:r>
+            <a:endParaRPr lang="en-US" sz="1380" dirty="0"/>
+          </a:p>
+          <a:p>
+            <a:r>
+              <a:rPr lang="en-US" sz="1380" dirty="0">
+                <a:solidFill>
+                  <a:srgbClr val="17364A"/>
+                </a:solidFill>
+                <a:latin typeface="Aptos" pitchFamily="34" charset="0"/>
+                <a:ea typeface="Aptos" pitchFamily="34" charset="-122"/>
+                <a:cs typeface="Aptos" pitchFamily="34" charset="-120"/>
+              </a:rPr>
+              <a:t>AI may support these workflows by summarizing case records, extracting exposures,.</a:t>
+            </a:r>
+            <a:endParaRPr lang="en-US" sz="1380" dirty="0"/>
+          </a:p>
+          <a:p>
+            <a:r>
+              <a:rPr lang="en-US" sz="1380" dirty="0">
+                <a:solidFill>
+                  <a:srgbClr val="17364A"/>
+                </a:solidFill>
+                <a:latin typeface="Aptos" pitchFamily="34" charset="0"/>
+                <a:ea typeface="Aptos" pitchFamily="34" charset="-122"/>
+                <a:cs typeface="Aptos" pitchFamily="34" charset="-120"/>
+              </a:rPr>
+              <a:t>This module teaches epidemiologists, informaticians, and response teams how to evaluate.</a:t>
+            </a:r>
+            <a:endParaRPr lang="en-US" sz="1380" dirty="0"/>
+          </a:p>
+        </p:txBody>
       </p:sp>
       <p:sp>
         <p:nvSpPr>
           <p:cNvPr id="16" name="Shape 14"/>
-          <p:cNvSpPr/>
-          <p:nvPr/>
-        </p:nvSpPr>
-        <p:spPr>
-          <a:xfrm>
-            <a:off x="9198864" y="4206240"/>
-            <a:ext cx="347472" cy="347472"/>
-          </a:xfrm>
-          <a:prstGeom prst="ellipse">
-            <a:avLst/>
-          </a:prstGeom>
-          <a:solidFill>
-            <a:srgbClr val="2F8A28"/>
-          </a:solidFill>
-          <a:ln w="12700">
-            <a:solidFill>
-              <a:srgbClr val="2F8A28"/>
-            </a:solidFill>
-            <a:prstDash val="solid"/>
-          </a:ln>
-        </p:spPr>
-      </p:sp>
-      <p:sp>
-        <p:nvSpPr>
-          <p:cNvPr id="17" name="Text 15"/>
-          <p:cNvSpPr/>
-          <p:nvPr/>
-        </p:nvSpPr>
-        <p:spPr>
-          <a:xfrm>
-            <a:off x="7909560" y="3977640"/>
-            <a:ext cx="2926080" cy="182880"/>
-          </a:xfrm>
-          <a:prstGeom prst="rect">
-            <a:avLst/>
-          </a:prstGeom>
-          <a:noFill/>
-          <a:ln/>
-        </p:spPr>
-        <p:txBody>
-          <a:bodyPr wrap="square" lIns="0" tIns="0" rIns="0" bIns="0" rtlCol="0" anchor="ctr"/>
-          <a:lstStyle/>
-          <a:p>
-            <a:pPr algn="ctr" indent="0" marL="0">
-              <a:buNone/>
-            </a:pPr>
-            <a:r>
-              <a:rPr lang="en-US" sz="1000" dirty="0">
-                <a:solidFill>
-                  <a:srgbClr val="003A63"/>
-                </a:solidFill>
-                <a:latin typeface="Aptos" pitchFamily="34" charset="0"/>
-                <a:ea typeface="Aptos" pitchFamily="34" charset="-122"/>
-                <a:cs typeface="Aptos" pitchFamily="34" charset="-120"/>
-              </a:rPr>
-              <a:t>Concept to action</a:t>
-            </a:r>
-            <a:endParaRPr lang="en-US" sz="1000" dirty="0"/>
-          </a:p>
-        </p:txBody>
-      </p:sp>
-      <p:sp>
-        <p:nvSpPr>
-          <p:cNvPr id="18" name="Shape 16"/>
           <p:cNvSpPr/>
           <p:nvPr/>
         </p:nvSpPr>
@@ -16280,7 +15774,7 @@
       </p:sp>
       <p:sp>
         <p:nvSpPr>
-          <p:cNvPr id="19" name="Text 17"/>
+          <p:cNvPr id="17" name="Text 15"/>
           <p:cNvSpPr/>
           <p:nvPr/>
         </p:nvSpPr>
@@ -16319,7 +15813,7 @@
       </p:sp>
       <p:sp>
         <p:nvSpPr>
-          <p:cNvPr id="20" name="Text 18"/>
+          <p:cNvPr id="18" name="Text 16"/>
           <p:cNvSpPr/>
           <p:nvPr/>
         </p:nvSpPr>
@@ -16827,13 +16321,11 @@
             </a:avLst>
           </a:prstGeom>
           <a:solidFill>
-            <a:srgbClr val="FFFFFF">
-              <a:alpha val="88000"/>
-            </a:srgbClr>
+            <a:srgbClr val="FFFFFF"/>
           </a:solidFill>
           <a:ln w="12700">
             <a:solidFill>
-              <a:srgbClr val="D6E8F2"/>
+              <a:srgbClr val="B9D7E6"/>
             </a:solidFill>
             <a:prstDash val="solid"/>
           </a:ln>
@@ -16841,190 +16333,112 @@
       </p:sp>
       <p:sp>
         <p:nvSpPr>
-          <p:cNvPr id="14" name="Shape 12"/>
-          <p:cNvSpPr/>
-          <p:nvPr/>
-        </p:nvSpPr>
-        <p:spPr>
-          <a:xfrm>
-            <a:off x="7891272" y="3108960"/>
-            <a:ext cx="566928" cy="566928"/>
-          </a:xfrm>
-          <a:prstGeom prst="ellipse">
-            <a:avLst/>
-          </a:prstGeom>
-          <a:solidFill>
-            <a:srgbClr val="0068B7"/>
-          </a:solidFill>
-          <a:ln w="12700">
-            <a:solidFill>
-              <a:srgbClr val="0068B7"/>
-            </a:solidFill>
-            <a:prstDash val="solid"/>
-          </a:ln>
-        </p:spPr>
-      </p:sp>
-      <p:sp>
-        <p:nvSpPr>
-          <p:cNvPr id="15" name="Shape 13"/>
-          <p:cNvSpPr/>
-          <p:nvPr/>
-        </p:nvSpPr>
-        <p:spPr>
-          <a:xfrm>
-            <a:off x="10287000" y="3108960"/>
-            <a:ext cx="566928" cy="566928"/>
-          </a:xfrm>
-          <a:prstGeom prst="ellipse">
-            <a:avLst/>
-          </a:prstGeom>
-          <a:solidFill>
-            <a:srgbClr val="2F8A28"/>
-          </a:solidFill>
-          <a:ln w="12700">
-            <a:solidFill>
-              <a:srgbClr val="2F8A28"/>
-            </a:solidFill>
-            <a:prstDash val="solid"/>
-          </a:ln>
-        </p:spPr>
+          <p:cNvPr id="14" name="Text 12"/>
+          <p:cNvSpPr/>
+          <p:nvPr/>
+        </p:nvSpPr>
+        <p:spPr>
+          <a:xfrm>
+            <a:off x="7799832" y="2935224"/>
+            <a:ext cx="3145536" cy="256032"/>
+          </a:xfrm>
+          <a:prstGeom prst="rect">
+            <a:avLst/>
+          </a:prstGeom>
+          <a:noFill/>
+          <a:ln/>
+        </p:spPr>
+        <p:txBody>
+          <a:bodyPr wrap="square" lIns="0" tIns="0" rIns="0" bIns="0" rtlCol="0" anchor="ctr"/>
+          <a:lstStyle/>
+          <a:p>
+            <a:pPr indent="0" marL="0">
+              <a:buNone/>
+            </a:pPr>
+            <a:r>
+              <a:rPr lang="en-US" sz="1300" b="1" dirty="0">
+                <a:solidFill>
+                  <a:srgbClr val="0068B7"/>
+                </a:solidFill>
+                <a:latin typeface="Aptos" pitchFamily="34" charset="0"/>
+                <a:ea typeface="Aptos" pitchFamily="34" charset="-122"/>
+                <a:cs typeface="Aptos" pitchFamily="34" charset="-120"/>
+              </a:rPr>
+              <a:t>Concept checkpoints</a:t>
+            </a:r>
+            <a:endParaRPr lang="en-US" sz="1300" dirty="0"/>
+          </a:p>
+        </p:txBody>
+      </p:sp>
+      <p:sp>
+        <p:nvSpPr>
+          <p:cNvPr id="15" name="Text 13"/>
+          <p:cNvSpPr/>
+          <p:nvPr/>
+        </p:nvSpPr>
+        <p:spPr>
+          <a:xfrm>
+            <a:off x="7818120" y="3300984"/>
+            <a:ext cx="3090672" cy="877824"/>
+          </a:xfrm>
+          <a:prstGeom prst="rect">
+            <a:avLst/>
+          </a:prstGeom>
+          <a:noFill/>
+          <a:ln/>
+        </p:spPr>
+        <p:txBody>
+          <a:bodyPr wrap="square" lIns="254" tIns="254" rIns="254" bIns="254" rtlCol="0" anchor="t">
+            <a:normAutofit/>
+          </a:bodyPr>
+          <a:lstStyle/>
+          <a:p>
+            <a:r>
+              <a:rPr lang="en-US" sz="1380" dirty="0">
+                <a:solidFill>
+                  <a:srgbClr val="17364A"/>
+                </a:solidFill>
+                <a:latin typeface="Aptos" pitchFamily="34" charset="0"/>
+                <a:ea typeface="Aptos" pitchFamily="34" charset="-122"/>
+                <a:cs typeface="Aptos" pitchFamily="34" charset="-120"/>
+              </a:rPr>
+              <a:t>This national-level module is intended for training and planning purposes.</a:t>
+            </a:r>
+            <a:endParaRPr lang="en-US" sz="1380" dirty="0"/>
+          </a:p>
+          <a:p>
+            <a:r>
+              <a:rPr lang="en-US" sz="1380" dirty="0">
+                <a:solidFill>
+                  <a:srgbClr val="17364A"/>
+                </a:solidFill>
+                <a:latin typeface="Aptos" pitchFamily="34" charset="0"/>
+                <a:ea typeface="Aptos" pitchFamily="34" charset="-122"/>
+                <a:cs typeface="Aptos" pitchFamily="34" charset="-120"/>
+              </a:rPr>
+              <a:t>It does not replace legal, privacy, procurement, civil rights, records, or agency policy.</a:t>
+            </a:r>
+            <a:endParaRPr lang="en-US" sz="1380" dirty="0"/>
+          </a:p>
+          <a:p>
+            <a:r>
+              <a:rPr lang="en-US" sz="1380" dirty="0">
+                <a:solidFill>
+                  <a:srgbClr val="17364A"/>
+                </a:solidFill>
+                <a:latin typeface="Aptos" pitchFamily="34" charset="0"/>
+                <a:ea typeface="Aptos" pitchFamily="34" charset="-122"/>
+                <a:cs typeface="Aptos" pitchFamily="34" charset="-120"/>
+              </a:rPr>
+              <a:t>Learners should confirm applicable requirements in their own jurisdiction and organization.</a:t>
+            </a:r>
+            <a:endParaRPr lang="en-US" sz="1380" dirty="0"/>
+          </a:p>
+        </p:txBody>
       </p:sp>
       <p:sp>
         <p:nvSpPr>
           <p:cNvPr id="16" name="Shape 14"/>
-          <p:cNvSpPr/>
-          <p:nvPr/>
-        </p:nvSpPr>
-        <p:spPr>
-          <a:xfrm>
-            <a:off x="9089136" y="3456432"/>
-            <a:ext cx="566928" cy="566928"/>
-          </a:xfrm>
-          <a:prstGeom prst="ellipse">
-            <a:avLst/>
-          </a:prstGeom>
-          <a:solidFill>
-            <a:srgbClr val="6A4CA3"/>
-          </a:solidFill>
-          <a:ln w="12700">
-            <a:solidFill>
-              <a:srgbClr val="6A4CA3"/>
-            </a:solidFill>
-            <a:prstDash val="solid"/>
-          </a:ln>
-        </p:spPr>
-      </p:sp>
-      <p:sp>
-        <p:nvSpPr>
-          <p:cNvPr id="17" name="Shape 15"/>
-          <p:cNvSpPr/>
-          <p:nvPr/>
-        </p:nvSpPr>
-        <p:spPr>
-          <a:xfrm>
-            <a:off x="8385048" y="3419856"/>
-            <a:ext cx="1975104" cy="0"/>
-          </a:xfrm>
-          <a:prstGeom prst="line">
-            <a:avLst/>
-          </a:prstGeom>
-          <a:noFill/>
-          <a:ln w="25400">
-            <a:solidFill>
-              <a:srgbClr val="8ABBD8"/>
-            </a:solidFill>
-            <a:prstDash val="solid"/>
-          </a:ln>
-        </p:spPr>
-      </p:sp>
-      <p:sp>
-        <p:nvSpPr>
-          <p:cNvPr id="18" name="Shape 16"/>
-          <p:cNvSpPr/>
-          <p:nvPr/>
-        </p:nvSpPr>
-        <p:spPr>
-          <a:xfrm>
-            <a:off x="8202168" y="3630168"/>
-            <a:ext cx="1170432" cy="118872"/>
-          </a:xfrm>
-          <a:prstGeom prst="line">
-            <a:avLst/>
-          </a:prstGeom>
-          <a:noFill/>
-          <a:ln w="25400">
-            <a:solidFill>
-              <a:srgbClr val="8ABBD8"/>
-            </a:solidFill>
-            <a:prstDash val="solid"/>
-          </a:ln>
-        </p:spPr>
-      </p:sp>
-      <p:sp>
-        <p:nvSpPr>
-          <p:cNvPr id="19" name="Shape 17"/>
-          <p:cNvSpPr/>
-          <p:nvPr/>
-        </p:nvSpPr>
-        <p:spPr>
-          <a:xfrm>
-            <a:off x="10543032" y="3630168"/>
-            <a:ext cx="-1170432" cy="118872"/>
-          </a:xfrm>
-          <a:prstGeom prst="line">
-            <a:avLst/>
-          </a:prstGeom>
-          <a:noFill/>
-          <a:ln w="25400">
-            <a:solidFill>
-              <a:srgbClr val="8ABBD8"/>
-            </a:solidFill>
-            <a:prstDash val="solid"/>
-          </a:ln>
-        </p:spPr>
-      </p:sp>
-      <p:sp>
-        <p:nvSpPr>
-          <p:cNvPr id="20" name="Text 18"/>
-          <p:cNvSpPr/>
-          <p:nvPr/>
-        </p:nvSpPr>
-        <p:spPr>
-          <a:xfrm>
-            <a:off x="7863840" y="4069080"/>
-            <a:ext cx="3017520" cy="164592"/>
-          </a:xfrm>
-          <a:prstGeom prst="rect">
-            <a:avLst/>
-          </a:prstGeom>
-          <a:noFill/>
-          <a:ln/>
-        </p:spPr>
-        <p:txBody>
-          <a:bodyPr wrap="square" lIns="0" tIns="0" rIns="0" bIns="0" rtlCol="0" anchor="ctr"/>
-          <a:lstStyle/>
-          <a:p>
-            <a:pPr algn="ctr" indent="0" marL="0">
-              <a:buNone/>
-            </a:pPr>
-            <a:r>
-              <a:rPr lang="en-US" sz="900" b="1" dirty="0">
-                <a:solidFill>
-                  <a:srgbClr val="003A63"/>
-                </a:solidFill>
-                <a:latin typeface="Aptos" pitchFamily="34" charset="0"/>
-                <a:ea typeface="Aptos" pitchFamily="34" charset="-122"/>
-                <a:cs typeface="Aptos" pitchFamily="34" charset="-120"/>
-              </a:rPr>
-              <a:t>Decision rights</a:t>
-            </a:r>
-            <a:endParaRPr lang="en-US" sz="900" dirty="0"/>
-          </a:p>
-        </p:txBody>
-      </p:sp>
-      <p:sp>
-        <p:nvSpPr>
-          <p:cNvPr id="21" name="Shape 19"/>
           <p:cNvSpPr/>
           <p:nvPr/>
         </p:nvSpPr>
@@ -17051,7 +16465,7 @@
       </p:sp>
       <p:sp>
         <p:nvSpPr>
-          <p:cNvPr id="22" name="Text 20"/>
+          <p:cNvPr id="17" name="Text 15"/>
           <p:cNvSpPr/>
           <p:nvPr/>
         </p:nvSpPr>
@@ -17090,7 +16504,7 @@
       </p:sp>
       <p:sp>
         <p:nvSpPr>
-          <p:cNvPr id="23" name="Text 21"/>
+          <p:cNvPr id="18" name="Text 16"/>
           <p:cNvSpPr/>
           <p:nvPr/>
         </p:nvSpPr>
@@ -17598,13 +17012,11 @@
             </a:avLst>
           </a:prstGeom>
           <a:solidFill>
-            <a:srgbClr val="FFFFFF">
-              <a:alpha val="88000"/>
-            </a:srgbClr>
+            <a:srgbClr val="FFFFFF"/>
           </a:solidFill>
           <a:ln w="12700">
             <a:solidFill>
-              <a:srgbClr val="D6E8F2"/>
+              <a:srgbClr val="B9D7E6"/>
             </a:solidFill>
             <a:prstDash val="solid"/>
           </a:ln>
@@ -17612,119 +17024,112 @@
       </p:sp>
       <p:sp>
         <p:nvSpPr>
-          <p:cNvPr id="14" name="Shape 12"/>
-          <p:cNvSpPr/>
-          <p:nvPr/>
-        </p:nvSpPr>
-        <p:spPr>
-          <a:xfrm>
-            <a:off x="8074152" y="3291840"/>
-            <a:ext cx="2596896" cy="749808"/>
-          </a:xfrm>
-          <a:prstGeom prst="rect">
-            <a:avLst/>
-          </a:prstGeom>
-          <a:solidFill>
-            <a:srgbClr val="EAF6F8"/>
-          </a:solidFill>
-          <a:ln w="12700">
-            <a:solidFill>
-              <a:srgbClr val="8ABBD8"/>
-            </a:solidFill>
-            <a:prstDash val="solid"/>
-          </a:ln>
-        </p:spPr>
-      </p:sp>
-      <p:sp>
-        <p:nvSpPr>
-          <p:cNvPr id="15" name="Shape 13"/>
-          <p:cNvSpPr/>
-          <p:nvPr/>
-        </p:nvSpPr>
-        <p:spPr>
-          <a:xfrm>
-            <a:off x="8202168" y="3721608"/>
-            <a:ext cx="2340864" cy="0"/>
-          </a:xfrm>
-          <a:prstGeom prst="line">
-            <a:avLst/>
-          </a:prstGeom>
-          <a:noFill/>
-          <a:ln w="19050">
-            <a:solidFill>
-              <a:srgbClr val="0068B7"/>
-            </a:solidFill>
-            <a:prstDash val="solid"/>
-          </a:ln>
-        </p:spPr>
+          <p:cNvPr id="14" name="Text 12"/>
+          <p:cNvSpPr/>
+          <p:nvPr/>
+        </p:nvSpPr>
+        <p:spPr>
+          <a:xfrm>
+            <a:off x="7799832" y="2935224"/>
+            <a:ext cx="3145536" cy="256032"/>
+          </a:xfrm>
+          <a:prstGeom prst="rect">
+            <a:avLst/>
+          </a:prstGeom>
+          <a:noFill/>
+          <a:ln/>
+        </p:spPr>
+        <p:txBody>
+          <a:bodyPr wrap="square" lIns="0" tIns="0" rIns="0" bIns="0" rtlCol="0" anchor="ctr"/>
+          <a:lstStyle/>
+          <a:p>
+            <a:pPr indent="0" marL="0">
+              <a:buNone/>
+            </a:pPr>
+            <a:r>
+              <a:rPr lang="en-US" sz="1300" b="1" dirty="0">
+                <a:solidFill>
+                  <a:srgbClr val="0068B7"/>
+                </a:solidFill>
+                <a:latin typeface="Aptos" pitchFamily="34" charset="0"/>
+                <a:ea typeface="Aptos" pitchFamily="34" charset="-122"/>
+                <a:cs typeface="Aptos" pitchFamily="34" charset="-120"/>
+              </a:rPr>
+              <a:t>Concept checkpoints</a:t>
+            </a:r>
+            <a:endParaRPr lang="en-US" sz="1300" dirty="0"/>
+          </a:p>
+        </p:txBody>
+      </p:sp>
+      <p:sp>
+        <p:nvSpPr>
+          <p:cNvPr id="15" name="Text 13"/>
+          <p:cNvSpPr/>
+          <p:nvPr/>
+        </p:nvSpPr>
+        <p:spPr>
+          <a:xfrm>
+            <a:off x="7818120" y="3300984"/>
+            <a:ext cx="3090672" cy="877824"/>
+          </a:xfrm>
+          <a:prstGeom prst="rect">
+            <a:avLst/>
+          </a:prstGeom>
+          <a:noFill/>
+          <a:ln/>
+        </p:spPr>
+        <p:txBody>
+          <a:bodyPr wrap="square" lIns="254" tIns="254" rIns="254" bIns="254" rtlCol="0" anchor="t">
+            <a:normAutofit/>
+          </a:bodyPr>
+          <a:lstStyle/>
+          <a:p>
+            <a:r>
+              <a:rPr lang="en-US" sz="1380" dirty="0">
+                <a:solidFill>
+                  <a:srgbClr val="17364A"/>
+                </a:solidFill>
+                <a:latin typeface="Aptos" pitchFamily="34" charset="0"/>
+                <a:ea typeface="Aptos" pitchFamily="34" charset="-122"/>
+                <a:cs typeface="Aptos" pitchFamily="34" charset="-120"/>
+              </a:rPr>
+              <a:t>During a foodborne illness investigation, AI is used to summarize interview notes and.</a:t>
+            </a:r>
+            <a:endParaRPr lang="en-US" sz="1380" dirty="0"/>
+          </a:p>
+          <a:p>
+            <a:r>
+              <a:rPr lang="en-US" sz="1380" dirty="0">
+                <a:solidFill>
+                  <a:srgbClr val="17364A"/>
+                </a:solidFill>
+                <a:latin typeface="Aptos" pitchFamily="34" charset="0"/>
+                <a:ea typeface="Aptos" pitchFamily="34" charset="-122"/>
+                <a:cs typeface="Aptos" pitchFamily="34" charset="-120"/>
+              </a:rPr>
+              <a:t>Investigators compare the extracted exposures to original notes, review uncertain or.</a:t>
+            </a:r>
+            <a:endParaRPr lang="en-US" sz="1380" dirty="0"/>
+          </a:p>
+          <a:p>
+            <a:r>
+              <a:rPr lang="en-US" sz="1380" dirty="0">
+                <a:solidFill>
+                  <a:srgbClr val="17364A"/>
+                </a:solidFill>
+                <a:latin typeface="Aptos" pitchFamily="34" charset="0"/>
+                <a:ea typeface="Aptos" pitchFamily="34" charset="-122"/>
+                <a:cs typeface="Aptos" pitchFamily="34" charset="-120"/>
+              </a:rPr>
+              <a:t>The tool helps reduce manual review time, but it does not determine the outbreak source or.</a:t>
+            </a:r>
+            <a:endParaRPr lang="en-US" sz="1380" dirty="0"/>
+          </a:p>
+        </p:txBody>
       </p:sp>
       <p:sp>
         <p:nvSpPr>
           <p:cNvPr id="16" name="Shape 14"/>
-          <p:cNvSpPr/>
-          <p:nvPr/>
-        </p:nvSpPr>
-        <p:spPr>
-          <a:xfrm>
-            <a:off x="9198864" y="4206240"/>
-            <a:ext cx="347472" cy="347472"/>
-          </a:xfrm>
-          <a:prstGeom prst="ellipse">
-            <a:avLst/>
-          </a:prstGeom>
-          <a:solidFill>
-            <a:srgbClr val="2F8A28"/>
-          </a:solidFill>
-          <a:ln w="12700">
-            <a:solidFill>
-              <a:srgbClr val="2F8A28"/>
-            </a:solidFill>
-            <a:prstDash val="solid"/>
-          </a:ln>
-        </p:spPr>
-      </p:sp>
-      <p:sp>
-        <p:nvSpPr>
-          <p:cNvPr id="17" name="Text 15"/>
-          <p:cNvSpPr/>
-          <p:nvPr/>
-        </p:nvSpPr>
-        <p:spPr>
-          <a:xfrm>
-            <a:off x="7909560" y="3977640"/>
-            <a:ext cx="2926080" cy="182880"/>
-          </a:xfrm>
-          <a:prstGeom prst="rect">
-            <a:avLst/>
-          </a:prstGeom>
-          <a:noFill/>
-          <a:ln/>
-        </p:spPr>
-        <p:txBody>
-          <a:bodyPr wrap="square" lIns="0" tIns="0" rIns="0" bIns="0" rtlCol="0" anchor="ctr"/>
-          <a:lstStyle/>
-          <a:p>
-            <a:pPr algn="ctr" indent="0" marL="0">
-              <a:buNone/>
-            </a:pPr>
-            <a:r>
-              <a:rPr lang="en-US" sz="1000" dirty="0">
-                <a:solidFill>
-                  <a:srgbClr val="003A63"/>
-                </a:solidFill>
-                <a:latin typeface="Aptos" pitchFamily="34" charset="0"/>
-                <a:ea typeface="Aptos" pitchFamily="34" charset="-122"/>
-                <a:cs typeface="Aptos" pitchFamily="34" charset="-120"/>
-              </a:rPr>
-              <a:t>Concept to action</a:t>
-            </a:r>
-            <a:endParaRPr lang="en-US" sz="1000" dirty="0"/>
-          </a:p>
-        </p:txBody>
-      </p:sp>
-      <p:sp>
-        <p:nvSpPr>
-          <p:cNvPr id="18" name="Shape 16"/>
           <p:cNvSpPr/>
           <p:nvPr/>
         </p:nvSpPr>
@@ -17751,7 +17156,7 @@
       </p:sp>
       <p:sp>
         <p:nvSpPr>
-          <p:cNvPr id="19" name="Text 17"/>
+          <p:cNvPr id="17" name="Text 15"/>
           <p:cNvSpPr/>
           <p:nvPr/>
         </p:nvSpPr>
@@ -17790,7 +17195,7 @@
       </p:sp>
       <p:sp>
         <p:nvSpPr>
-          <p:cNvPr id="20" name="Text 18"/>
+          <p:cNvPr id="18" name="Text 16"/>
           <p:cNvSpPr/>
           <p:nvPr/>
         </p:nvSpPr>
@@ -18298,13 +17703,11 @@
             </a:avLst>
           </a:prstGeom>
           <a:solidFill>
-            <a:srgbClr val="FFFFFF">
-              <a:alpha val="88000"/>
-            </a:srgbClr>
+            <a:srgbClr val="FFFFFF"/>
           </a:solidFill>
           <a:ln w="12700">
             <a:solidFill>
-              <a:srgbClr val="D6E8F2"/>
+              <a:srgbClr val="B9D7E6"/>
             </a:solidFill>
             <a:prstDash val="solid"/>
           </a:ln>
@@ -18312,119 +17715,112 @@
       </p:sp>
       <p:sp>
         <p:nvSpPr>
-          <p:cNvPr id="14" name="Shape 12"/>
-          <p:cNvSpPr/>
-          <p:nvPr/>
-        </p:nvSpPr>
-        <p:spPr>
-          <a:xfrm>
-            <a:off x="8074152" y="3291840"/>
-            <a:ext cx="2596896" cy="749808"/>
-          </a:xfrm>
-          <a:prstGeom prst="rect">
-            <a:avLst/>
-          </a:prstGeom>
-          <a:solidFill>
-            <a:srgbClr val="EAF6F8"/>
-          </a:solidFill>
-          <a:ln w="12700">
-            <a:solidFill>
-              <a:srgbClr val="8ABBD8"/>
-            </a:solidFill>
-            <a:prstDash val="solid"/>
-          </a:ln>
-        </p:spPr>
-      </p:sp>
-      <p:sp>
-        <p:nvSpPr>
-          <p:cNvPr id="15" name="Shape 13"/>
-          <p:cNvSpPr/>
-          <p:nvPr/>
-        </p:nvSpPr>
-        <p:spPr>
-          <a:xfrm>
-            <a:off x="8202168" y="3721608"/>
-            <a:ext cx="2340864" cy="0"/>
-          </a:xfrm>
-          <a:prstGeom prst="line">
-            <a:avLst/>
-          </a:prstGeom>
-          <a:noFill/>
-          <a:ln w="19050">
-            <a:solidFill>
-              <a:srgbClr val="0068B7"/>
-            </a:solidFill>
-            <a:prstDash val="solid"/>
-          </a:ln>
-        </p:spPr>
+          <p:cNvPr id="14" name="Text 12"/>
+          <p:cNvSpPr/>
+          <p:nvPr/>
+        </p:nvSpPr>
+        <p:spPr>
+          <a:xfrm>
+            <a:off x="7799832" y="2935224"/>
+            <a:ext cx="3145536" cy="256032"/>
+          </a:xfrm>
+          <a:prstGeom prst="rect">
+            <a:avLst/>
+          </a:prstGeom>
+          <a:noFill/>
+          <a:ln/>
+        </p:spPr>
+        <p:txBody>
+          <a:bodyPr wrap="square" lIns="0" tIns="0" rIns="0" bIns="0" rtlCol="0" anchor="ctr"/>
+          <a:lstStyle/>
+          <a:p>
+            <a:pPr indent="0" marL="0">
+              <a:buNone/>
+            </a:pPr>
+            <a:r>
+              <a:rPr lang="en-US" sz="1300" b="1" dirty="0">
+                <a:solidFill>
+                  <a:srgbClr val="0068B7"/>
+                </a:solidFill>
+                <a:latin typeface="Aptos" pitchFamily="34" charset="0"/>
+                <a:ea typeface="Aptos" pitchFamily="34" charset="-122"/>
+                <a:cs typeface="Aptos" pitchFamily="34" charset="-120"/>
+              </a:rPr>
+              <a:t>Concept checkpoints</a:t>
+            </a:r>
+            <a:endParaRPr lang="en-US" sz="1300" dirty="0"/>
+          </a:p>
+        </p:txBody>
+      </p:sp>
+      <p:sp>
+        <p:nvSpPr>
+          <p:cNvPr id="15" name="Text 13"/>
+          <p:cNvSpPr/>
+          <p:nvPr/>
+        </p:nvSpPr>
+        <p:spPr>
+          <a:xfrm>
+            <a:off x="7818120" y="3300984"/>
+            <a:ext cx="3090672" cy="877824"/>
+          </a:xfrm>
+          <a:prstGeom prst="rect">
+            <a:avLst/>
+          </a:prstGeom>
+          <a:noFill/>
+          <a:ln/>
+        </p:spPr>
+        <p:txBody>
+          <a:bodyPr wrap="square" lIns="254" tIns="254" rIns="254" bIns="254" rtlCol="0" anchor="t">
+            <a:normAutofit/>
+          </a:bodyPr>
+          <a:lstStyle/>
+          <a:p>
+            <a:r>
+              <a:rPr lang="en-US" sz="1380" dirty="0">
+                <a:solidFill>
+                  <a:srgbClr val="17364A"/>
+                </a:solidFill>
+                <a:latin typeface="Aptos" pitchFamily="34" charset="0"/>
+                <a:ea typeface="Aptos" pitchFamily="34" charset="-122"/>
+                <a:cs typeface="Aptos" pitchFamily="34" charset="-120"/>
+              </a:rPr>
+              <a:t>Natural language processing and generative AI may help summarize case notes, identify.</a:t>
+            </a:r>
+            <a:endParaRPr lang="en-US" sz="1380" dirty="0"/>
+          </a:p>
+          <a:p>
+            <a:r>
+              <a:rPr lang="en-US" sz="1380" dirty="0">
+                <a:solidFill>
+                  <a:srgbClr val="17364A"/>
+                </a:solidFill>
+                <a:latin typeface="Aptos" pitchFamily="34" charset="0"/>
+                <a:ea typeface="Aptos" pitchFamily="34" charset="-122"/>
+                <a:cs typeface="Aptos" pitchFamily="34" charset="-120"/>
+              </a:rPr>
+              <a:t>These tasks are appropriate only when outputs are traceable to source material and.</a:t>
+            </a:r>
+            <a:endParaRPr lang="en-US" sz="1380" dirty="0"/>
+          </a:p>
+          <a:p>
+            <a:r>
+              <a:rPr lang="en-US" sz="1380" dirty="0">
+                <a:solidFill>
+                  <a:srgbClr val="17364A"/>
+                </a:solidFill>
+                <a:latin typeface="Aptos" pitchFamily="34" charset="0"/>
+                <a:ea typeface="Aptos" pitchFamily="34" charset="-122"/>
+                <a:cs typeface="Aptos" pitchFamily="34" charset="-120"/>
+              </a:rPr>
+              <a:t>Outbreak response may involve signal detection, anomaly review, geospatial patterns,.</a:t>
+            </a:r>
+            <a:endParaRPr lang="en-US" sz="1380" dirty="0"/>
+          </a:p>
+        </p:txBody>
       </p:sp>
       <p:sp>
         <p:nvSpPr>
           <p:cNvPr id="16" name="Shape 14"/>
-          <p:cNvSpPr/>
-          <p:nvPr/>
-        </p:nvSpPr>
-        <p:spPr>
-          <a:xfrm>
-            <a:off x="9198864" y="4206240"/>
-            <a:ext cx="347472" cy="347472"/>
-          </a:xfrm>
-          <a:prstGeom prst="ellipse">
-            <a:avLst/>
-          </a:prstGeom>
-          <a:solidFill>
-            <a:srgbClr val="2F8A28"/>
-          </a:solidFill>
-          <a:ln w="12700">
-            <a:solidFill>
-              <a:srgbClr val="2F8A28"/>
-            </a:solidFill>
-            <a:prstDash val="solid"/>
-          </a:ln>
-        </p:spPr>
-      </p:sp>
-      <p:sp>
-        <p:nvSpPr>
-          <p:cNvPr id="17" name="Text 15"/>
-          <p:cNvSpPr/>
-          <p:nvPr/>
-        </p:nvSpPr>
-        <p:spPr>
-          <a:xfrm>
-            <a:off x="7909560" y="3977640"/>
-            <a:ext cx="2926080" cy="182880"/>
-          </a:xfrm>
-          <a:prstGeom prst="rect">
-            <a:avLst/>
-          </a:prstGeom>
-          <a:noFill/>
-          <a:ln/>
-        </p:spPr>
-        <p:txBody>
-          <a:bodyPr wrap="square" lIns="0" tIns="0" rIns="0" bIns="0" rtlCol="0" anchor="ctr"/>
-          <a:lstStyle/>
-          <a:p>
-            <a:pPr algn="ctr" indent="0" marL="0">
-              <a:buNone/>
-            </a:pPr>
-            <a:r>
-              <a:rPr lang="en-US" sz="1000" dirty="0">
-                <a:solidFill>
-                  <a:srgbClr val="003A63"/>
-                </a:solidFill>
-                <a:latin typeface="Aptos" pitchFamily="34" charset="0"/>
-                <a:ea typeface="Aptos" pitchFamily="34" charset="-122"/>
-                <a:cs typeface="Aptos" pitchFamily="34" charset="-120"/>
-              </a:rPr>
-              <a:t>Concept to action</a:t>
-            </a:r>
-            <a:endParaRPr lang="en-US" sz="1000" dirty="0"/>
-          </a:p>
-        </p:txBody>
-      </p:sp>
-      <p:sp>
-        <p:nvSpPr>
-          <p:cNvPr id="18" name="Shape 16"/>
           <p:cNvSpPr/>
           <p:nvPr/>
         </p:nvSpPr>
@@ -18451,7 +17847,7 @@
       </p:sp>
       <p:sp>
         <p:nvSpPr>
-          <p:cNvPr id="19" name="Text 17"/>
+          <p:cNvPr id="17" name="Text 15"/>
           <p:cNvSpPr/>
           <p:nvPr/>
         </p:nvSpPr>
@@ -18490,7 +17886,7 @@
       </p:sp>
       <p:sp>
         <p:nvSpPr>
-          <p:cNvPr id="20" name="Text 18"/>
+          <p:cNvPr id="18" name="Text 16"/>
           <p:cNvSpPr/>
           <p:nvPr/>
         </p:nvSpPr>

--- a/downloads/presentations/modules/epi-300.pptx
+++ b/downloads/presentations/modules/epi-300.pptx
@@ -3447,49 +3447,58 @@
           <a:ln/>
         </p:spPr>
         <p:txBody>
-          <a:bodyPr wrap="square" lIns="635" tIns="635" rIns="635" bIns="635" rtlCol="0" anchor="t">
+          <a:bodyPr wrap="square" lIns="1016" tIns="1016" rIns="1016" bIns="1016" rtlCol="0" anchor="t">
             <a:normAutofit/>
           </a:bodyPr>
           <a:lstStyle/>
           <a:p>
+            <a:pPr indent="0" marL="0">
+              <a:buNone/>
+            </a:pPr>
             <a:r>
               <a:rPr lang="en-US" sz="2100" dirty="0">
                 <a:solidFill>
-                  <a:srgbClr val="17364A"/>
-                </a:solidFill>
-                <a:latin typeface="Aptos" pitchFamily="34" charset="0"/>
-                <a:ea typeface="Aptos" pitchFamily="34" charset="-122"/>
-                <a:cs typeface="Aptos" pitchFamily="34" charset="-120"/>
-              </a:rPr>
-              <a:t>Equity considerations should be explicit.</a:t>
+                  <a:srgbClr val="003A63"/>
+                </a:solidFill>
+                <a:latin typeface="Aptos" pitchFamily="34" charset="0"/>
+                <a:ea typeface="Aptos" pitchFamily="34" charset="-122"/>
+                <a:cs typeface="Aptos" pitchFamily="34" charset="-120"/>
+              </a:rPr>
+              <a:t>• Equity considerations should be explicit.</a:t>
             </a:r>
             <a:endParaRPr lang="en-US" sz="2100" dirty="0"/>
           </a:p>
           <a:p>
+            <a:pPr indent="0" marL="0">
+              <a:buNone/>
+            </a:pPr>
             <a:r>
               <a:rPr lang="en-US" sz="2100" dirty="0">
                 <a:solidFill>
-                  <a:srgbClr val="17364A"/>
-                </a:solidFill>
-                <a:latin typeface="Aptos" pitchFamily="34" charset="0"/>
-                <a:ea typeface="Aptos" pitchFamily="34" charset="-122"/>
-                <a:cs typeface="Aptos" pitchFamily="34" charset="-120"/>
-              </a:rPr>
-              <a:t>Some communities may be less likely to seek care, be tested, respond to interviews, speak English, have.</a:t>
+                  <a:srgbClr val="003A63"/>
+                </a:solidFill>
+                <a:latin typeface="Aptos" pitchFamily="34" charset="0"/>
+                <a:ea typeface="Aptos" pitchFamily="34" charset="-122"/>
+                <a:cs typeface="Aptos" pitchFamily="34" charset="-120"/>
+              </a:rPr>
+              <a:t>• Some communities may be less likely to seek care, be tested, respond to interviews, speak.</a:t>
             </a:r>
             <a:endParaRPr lang="en-US" sz="2100" dirty="0"/>
           </a:p>
           <a:p>
+            <a:pPr indent="0" marL="0">
+              <a:buNone/>
+            </a:pPr>
             <a:r>
               <a:rPr lang="en-US" sz="2100" dirty="0">
                 <a:solidFill>
-                  <a:srgbClr val="17364A"/>
-                </a:solidFill>
-                <a:latin typeface="Aptos" pitchFamily="34" charset="0"/>
-                <a:ea typeface="Aptos" pitchFamily="34" charset="-122"/>
-                <a:cs typeface="Aptos" pitchFamily="34" charset="-120"/>
-              </a:rPr>
-              <a:t>AI-supported prioritization must not systematically deprioritize people or communities because the data.</a:t>
+                  <a:srgbClr val="003A63"/>
+                </a:solidFill>
+                <a:latin typeface="Aptos" pitchFamily="34" charset="0"/>
+                <a:ea typeface="Aptos" pitchFamily="34" charset="-122"/>
+                <a:cs typeface="Aptos" pitchFamily="34" charset="-120"/>
+              </a:rPr>
+              <a:t>• AI-supported prioritization must not systematically deprioritize people or communities because.</a:t>
             </a:r>
             <a:endParaRPr lang="en-US" sz="2100" dirty="0"/>
           </a:p>
@@ -3569,17 +3578,17 @@
         </p:nvSpPr>
         <p:spPr>
           <a:xfrm>
-            <a:off x="7799832" y="1828800"/>
-            <a:ext cx="3145536" cy="685800"/>
-          </a:xfrm>
-          <a:prstGeom prst="rect">
-            <a:avLst/>
-          </a:prstGeom>
-          <a:noFill/>
-          <a:ln/>
-        </p:spPr>
-        <p:txBody>
-          <a:bodyPr wrap="square" lIns="0" tIns="0" rIns="0" bIns="0" rtlCol="0" anchor="t">
+            <a:off x="7799832" y="1801368"/>
+            <a:ext cx="3145536" cy="758952"/>
+          </a:xfrm>
+          <a:prstGeom prst="rect">
+            <a:avLst/>
+          </a:prstGeom>
+          <a:noFill/>
+          <a:ln/>
+        </p:spPr>
+        <p:txBody>
+          <a:bodyPr wrap="square" lIns="254" tIns="254" rIns="254" bIns="254" rtlCol="0" anchor="t">
             <a:normAutofit/>
           </a:bodyPr>
           <a:lstStyle/>
@@ -3588,7 +3597,7 @@
               <a:buNone/>
             </a:pPr>
             <a:r>
-              <a:rPr lang="en-US" sz="1550" dirty="0">
+              <a:rPr lang="en-US" sz="1320" dirty="0">
                 <a:solidFill>
                   <a:srgbClr val="17364A"/>
                 </a:solidFill>
@@ -3598,7 +3607,7 @@
               </a:rPr>
               <a:t>Equity considerations should be explicit.</a:t>
             </a:r>
-            <a:endParaRPr lang="en-US" sz="1550" dirty="0"/>
+            <a:endParaRPr lang="en-US" sz="1320" dirty="0"/>
           </a:p>
         </p:txBody>
       </p:sp>
@@ -3686,13 +3695,16 @@
           <a:ln/>
         </p:spPr>
         <p:txBody>
-          <a:bodyPr wrap="square" lIns="254" tIns="254" rIns="254" bIns="254" rtlCol="0" anchor="t">
+          <a:bodyPr wrap="square" lIns="508" tIns="508" rIns="508" bIns="508" rtlCol="0" anchor="t">
             <a:normAutofit/>
           </a:bodyPr>
           <a:lstStyle/>
           <a:p>
-            <a:r>
-              <a:rPr lang="en-US" sz="1380" dirty="0">
+            <a:pPr indent="0" marL="0">
+              <a:buNone/>
+            </a:pPr>
+            <a:r>
+              <a:rPr lang="en-US" sz="1220" dirty="0">
                 <a:solidFill>
                   <a:srgbClr val="17364A"/>
                 </a:solidFill>
@@ -3700,13 +3712,16 @@
                 <a:ea typeface="Aptos" pitchFamily="34" charset="-122"/>
                 <a:cs typeface="Aptos" pitchFamily="34" charset="-120"/>
               </a:rPr>
-              <a:t>Some communities may be less likely to seek care, be tested, respond to interviews, speak.</a:t>
-            </a:r>
-            <a:endParaRPr lang="en-US" sz="1380" dirty="0"/>
-          </a:p>
-          <a:p>
-            <a:r>
-              <a:rPr lang="en-US" sz="1380" dirty="0">
+              <a:t>Some communities may be less likely to seek care, be tested,.</a:t>
+            </a:r>
+            <a:endParaRPr lang="en-US" sz="1220" dirty="0"/>
+          </a:p>
+          <a:p>
+            <a:pPr indent="0" marL="0">
+              <a:buNone/>
+            </a:pPr>
+            <a:r>
+              <a:rPr lang="en-US" sz="1220" dirty="0">
                 <a:solidFill>
                   <a:srgbClr val="17364A"/>
                 </a:solidFill>
@@ -3714,9 +3729,9 @@
                 <a:ea typeface="Aptos" pitchFamily="34" charset="-122"/>
                 <a:cs typeface="Aptos" pitchFamily="34" charset="-120"/>
               </a:rPr>
-              <a:t>AI-supported prioritization must not systematically deprioritize people or communities.</a:t>
-            </a:r>
-            <a:endParaRPr lang="en-US" sz="1380" dirty="0"/>
+              <a:t>AI-supported prioritization must not systematically deprioritize.</a:t>
+            </a:r>
+            <a:endParaRPr lang="en-US" sz="1220" dirty="0"/>
           </a:p>
         </p:txBody>
       </p:sp>
@@ -3794,17 +3809,17 @@
         </p:nvSpPr>
         <p:spPr>
           <a:xfrm>
-            <a:off x="7799832" y="5001768"/>
-            <a:ext cx="3145536" cy="502920"/>
-          </a:xfrm>
-          <a:prstGeom prst="rect">
-            <a:avLst/>
-          </a:prstGeom>
-          <a:noFill/>
-          <a:ln/>
-        </p:spPr>
-        <p:txBody>
-          <a:bodyPr wrap="square" lIns="0" tIns="0" rIns="0" bIns="0" rtlCol="0" anchor="t">
+            <a:off x="7799832" y="4974336"/>
+            <a:ext cx="3145536" cy="576072"/>
+          </a:xfrm>
+          <a:prstGeom prst="rect">
+            <a:avLst/>
+          </a:prstGeom>
+          <a:noFill/>
+          <a:ln/>
+        </p:spPr>
+        <p:txBody>
+          <a:bodyPr wrap="square" lIns="254" tIns="254" rIns="254" bIns="254" rtlCol="0" anchor="t">
             <a:normAutofit/>
           </a:bodyPr>
           <a:lstStyle/>
@@ -3813,7 +3828,7 @@
               <a:buNone/>
             </a:pPr>
             <a:r>
-              <a:rPr lang="en-US" sz="1550" dirty="0">
+              <a:rPr lang="en-US" sz="1320" dirty="0">
                 <a:solidFill>
                   <a:srgbClr val="17364A"/>
                 </a:solidFill>
@@ -3821,9 +3836,9 @@
                 <a:ea typeface="Aptos" pitchFamily="34" charset="-122"/>
                 <a:cs typeface="Aptos" pitchFamily="34" charset="-120"/>
               </a:rPr>
-              <a:t>Connect the concept to public health purpose, responsible use, required safeguards, documentation, and the next action a department should take.</a:t>
-            </a:r>
-            <a:endParaRPr lang="en-US" sz="1550" dirty="0"/>
+              <a:t>Connect the concept to public health purpose, responsible use, required safeguards, documentation, and the next action a.</a:t>
+            </a:r>
+            <a:endParaRPr lang="en-US" sz="1320" dirty="0"/>
           </a:p>
         </p:txBody>
       </p:sp>
@@ -4124,49 +4139,58 @@
           <a:ln/>
         </p:spPr>
         <p:txBody>
-          <a:bodyPr wrap="square" lIns="635" tIns="635" rIns="635" bIns="635" rtlCol="0" anchor="t">
+          <a:bodyPr wrap="square" lIns="1016" tIns="1016" rIns="1016" bIns="1016" rtlCol="0" anchor="t">
             <a:normAutofit/>
           </a:bodyPr>
           <a:lstStyle/>
           <a:p>
+            <a:pPr indent="0" marL="0">
+              <a:buNone/>
+            </a:pPr>
             <a:r>
               <a:rPr lang="en-US" sz="2100" dirty="0">
                 <a:solidFill>
-                  <a:srgbClr val="17364A"/>
-                </a:solidFill>
-                <a:latin typeface="Aptos" pitchFamily="34" charset="0"/>
-                <a:ea typeface="Aptos" pitchFamily="34" charset="-122"/>
-                <a:cs typeface="Aptos" pitchFamily="34" charset="-120"/>
-              </a:rPr>
-              <a:t>Risks and failure modes include the following:</a:t>
+                  <a:srgbClr val="003A63"/>
+                </a:solidFill>
+                <a:latin typeface="Aptos" pitchFamily="34" charset="0"/>
+                <a:ea typeface="Aptos" pitchFamily="34" charset="-122"/>
+                <a:cs typeface="Aptos" pitchFamily="34" charset="-120"/>
+              </a:rPr>
+              <a:t>• Risks and failure modes include the following:</a:t>
             </a:r>
             <a:endParaRPr lang="en-US" sz="2100" dirty="0"/>
           </a:p>
           <a:p>
+            <a:pPr indent="0" marL="0">
+              <a:buNone/>
+            </a:pPr>
             <a:r>
               <a:rPr lang="en-US" sz="2100" dirty="0">
                 <a:solidFill>
-                  <a:srgbClr val="17364A"/>
-                </a:solidFill>
-                <a:latin typeface="Aptos" pitchFamily="34" charset="0"/>
-                <a:ea typeface="Aptos" pitchFamily="34" charset="-122"/>
-                <a:cs typeface="Aptos" pitchFamily="34" charset="-120"/>
-              </a:rPr>
-              <a:t>AI summaries omitting uncertainty or unsupported details.</a:t>
+                  <a:srgbClr val="003A63"/>
+                </a:solidFill>
+                <a:latin typeface="Aptos" pitchFamily="34" charset="0"/>
+                <a:ea typeface="Aptos" pitchFamily="34" charset="-122"/>
+                <a:cs typeface="Aptos" pitchFamily="34" charset="-120"/>
+              </a:rPr>
+              <a:t>• AI summaries omitting uncertainty or unsupported details.</a:t>
             </a:r>
             <a:endParaRPr lang="en-US" sz="2100" dirty="0"/>
           </a:p>
           <a:p>
+            <a:pPr indent="0" marL="0">
+              <a:buNone/>
+            </a:pPr>
             <a:r>
               <a:rPr lang="en-US" sz="2100" dirty="0">
                 <a:solidFill>
-                  <a:srgbClr val="17364A"/>
-                </a:solidFill>
-                <a:latin typeface="Aptos" pitchFamily="34" charset="0"/>
-                <a:ea typeface="Aptos" pitchFamily="34" charset="-122"/>
-                <a:cs typeface="Aptos" pitchFamily="34" charset="-120"/>
-              </a:rPr>
-              <a:t>False outbreak signals creating unnecessary response or public concern.</a:t>
+                  <a:srgbClr val="003A63"/>
+                </a:solidFill>
+                <a:latin typeface="Aptos" pitchFamily="34" charset="0"/>
+                <a:ea typeface="Aptos" pitchFamily="34" charset="-122"/>
+                <a:cs typeface="Aptos" pitchFamily="34" charset="-120"/>
+              </a:rPr>
+              <a:t>• False outbreak signals creating unnecessary response or public concern.</a:t>
             </a:r>
             <a:endParaRPr lang="en-US" sz="2100" dirty="0"/>
           </a:p>
@@ -4246,17 +4270,17 @@
         </p:nvSpPr>
         <p:spPr>
           <a:xfrm>
-            <a:off x="7799832" y="1828800"/>
-            <a:ext cx="3145536" cy="685800"/>
-          </a:xfrm>
-          <a:prstGeom prst="rect">
-            <a:avLst/>
-          </a:prstGeom>
-          <a:noFill/>
-          <a:ln/>
-        </p:spPr>
-        <p:txBody>
-          <a:bodyPr wrap="square" lIns="0" tIns="0" rIns="0" bIns="0" rtlCol="0" anchor="t">
+            <a:off x="7799832" y="1801368"/>
+            <a:ext cx="3145536" cy="758952"/>
+          </a:xfrm>
+          <a:prstGeom prst="rect">
+            <a:avLst/>
+          </a:prstGeom>
+          <a:noFill/>
+          <a:ln/>
+        </p:spPr>
+        <p:txBody>
+          <a:bodyPr wrap="square" lIns="254" tIns="254" rIns="254" bIns="254" rtlCol="0" anchor="t">
             <a:normAutofit/>
           </a:bodyPr>
           <a:lstStyle/>
@@ -4265,7 +4289,7 @@
               <a:buNone/>
             </a:pPr>
             <a:r>
-              <a:rPr lang="en-US" sz="1550" dirty="0">
+              <a:rPr lang="en-US" sz="1320" dirty="0">
                 <a:solidFill>
                   <a:srgbClr val="17364A"/>
                 </a:solidFill>
@@ -4275,7 +4299,7 @@
               </a:rPr>
               <a:t>Risks and failure modes include the following:</a:t>
             </a:r>
-            <a:endParaRPr lang="en-US" sz="1550" dirty="0"/>
+            <a:endParaRPr lang="en-US" sz="1320" dirty="0"/>
           </a:p>
         </p:txBody>
       </p:sp>
@@ -4363,13 +4387,16 @@
           <a:ln/>
         </p:spPr>
         <p:txBody>
-          <a:bodyPr wrap="square" lIns="254" tIns="254" rIns="254" bIns="254" rtlCol="0" anchor="t">
+          <a:bodyPr wrap="square" lIns="508" tIns="508" rIns="508" bIns="508" rtlCol="0" anchor="t">
             <a:normAutofit/>
           </a:bodyPr>
           <a:lstStyle/>
           <a:p>
-            <a:r>
-              <a:rPr lang="en-US" sz="1380" dirty="0">
+            <a:pPr indent="0" marL="0">
+              <a:buNone/>
+            </a:pPr>
+            <a:r>
+              <a:rPr lang="en-US" sz="1220" dirty="0">
                 <a:solidFill>
                   <a:srgbClr val="17364A"/>
                 </a:solidFill>
@@ -4379,11 +4406,14 @@
               </a:rPr>
               <a:t>Risks and failure modes include the following:</a:t>
             </a:r>
-            <a:endParaRPr lang="en-US" sz="1380" dirty="0"/>
-          </a:p>
-          <a:p>
-            <a:r>
-              <a:rPr lang="en-US" sz="1380" dirty="0">
+            <a:endParaRPr lang="en-US" sz="1220" dirty="0"/>
+          </a:p>
+          <a:p>
+            <a:pPr indent="0" marL="0">
+              <a:buNone/>
+            </a:pPr>
+            <a:r>
+              <a:rPr lang="en-US" sz="1220" dirty="0">
                 <a:solidFill>
                   <a:srgbClr val="17364A"/>
                 </a:solidFill>
@@ -4393,11 +4423,14 @@
               </a:rPr>
               <a:t>AI summaries omitting uncertainty or unsupported details.</a:t>
             </a:r>
-            <a:endParaRPr lang="en-US" sz="1380" dirty="0"/>
-          </a:p>
-          <a:p>
-            <a:r>
-              <a:rPr lang="en-US" sz="1380" dirty="0">
+            <a:endParaRPr lang="en-US" sz="1220" dirty="0"/>
+          </a:p>
+          <a:p>
+            <a:pPr indent="0" marL="0">
+              <a:buNone/>
+            </a:pPr>
+            <a:r>
+              <a:rPr lang="en-US" sz="1220" dirty="0">
                 <a:solidFill>
                   <a:srgbClr val="17364A"/>
                 </a:solidFill>
@@ -4405,9 +4438,9 @@
                 <a:ea typeface="Aptos" pitchFamily="34" charset="-122"/>
                 <a:cs typeface="Aptos" pitchFamily="34" charset="-120"/>
               </a:rPr>
-              <a:t>False outbreak signals creating unnecessary response or public concern.</a:t>
-            </a:r>
-            <a:endParaRPr lang="en-US" sz="1380" dirty="0"/>
+              <a:t>False outbreak signals creating unnecessary response or public.</a:t>
+            </a:r>
+            <a:endParaRPr lang="en-US" sz="1220" dirty="0"/>
           </a:p>
         </p:txBody>
       </p:sp>
@@ -4485,17 +4518,17 @@
         </p:nvSpPr>
         <p:spPr>
           <a:xfrm>
-            <a:off x="7799832" y="5001768"/>
-            <a:ext cx="3145536" cy="502920"/>
-          </a:xfrm>
-          <a:prstGeom prst="rect">
-            <a:avLst/>
-          </a:prstGeom>
-          <a:noFill/>
-          <a:ln/>
-        </p:spPr>
-        <p:txBody>
-          <a:bodyPr wrap="square" lIns="0" tIns="0" rIns="0" bIns="0" rtlCol="0" anchor="t">
+            <a:off x="7799832" y="4974336"/>
+            <a:ext cx="3145536" cy="576072"/>
+          </a:xfrm>
+          <a:prstGeom prst="rect">
+            <a:avLst/>
+          </a:prstGeom>
+          <a:noFill/>
+          <a:ln/>
+        </p:spPr>
+        <p:txBody>
+          <a:bodyPr wrap="square" lIns="254" tIns="254" rIns="254" bIns="254" rtlCol="0" anchor="t">
             <a:normAutofit/>
           </a:bodyPr>
           <a:lstStyle/>
@@ -4504,7 +4537,7 @@
               <a:buNone/>
             </a:pPr>
             <a:r>
-              <a:rPr lang="en-US" sz="1550" dirty="0">
+              <a:rPr lang="en-US" sz="1320" dirty="0">
                 <a:solidFill>
                   <a:srgbClr val="17364A"/>
                 </a:solidFill>
@@ -4512,9 +4545,9 @@
                 <a:ea typeface="Aptos" pitchFamily="34" charset="-122"/>
                 <a:cs typeface="Aptos" pitchFamily="34" charset="-120"/>
               </a:rPr>
-              <a:t>Identify what could go wrong, who could be affected, what safeguards are needed, and what evidence should be reviewed before use expands.</a:t>
-            </a:r>
-            <a:endParaRPr lang="en-US" sz="1550" dirty="0"/>
+              <a:t>Identify what could go wrong, who could be affected, what safeguards are needed, and what evidence should be reviewed.</a:t>
+            </a:r>
+            <a:endParaRPr lang="en-US" sz="1320" dirty="0"/>
           </a:p>
         </p:txBody>
       </p:sp>
@@ -4815,49 +4848,58 @@
           <a:ln/>
         </p:spPr>
         <p:txBody>
-          <a:bodyPr wrap="square" lIns="635" tIns="635" rIns="635" bIns="635" rtlCol="0" anchor="t">
+          <a:bodyPr wrap="square" lIns="1016" tIns="1016" rIns="1016" bIns="1016" rtlCol="0" anchor="t">
             <a:normAutofit/>
           </a:bodyPr>
           <a:lstStyle/>
           <a:p>
+            <a:pPr indent="0" marL="0">
+              <a:buNone/>
+            </a:pPr>
             <a:r>
               <a:rPr lang="en-US" sz="2100" dirty="0">
                 <a:solidFill>
-                  <a:srgbClr val="17364A"/>
-                </a:solidFill>
-                <a:latin typeface="Aptos" pitchFamily="34" charset="0"/>
-                <a:ea typeface="Aptos" pitchFamily="34" charset="-122"/>
-                <a:cs typeface="Aptos" pitchFamily="34" charset="-120"/>
-              </a:rPr>
-              <a:t>Missed signals because some communities are underrepresented in data.</a:t>
+                  <a:srgbClr val="003A63"/>
+                </a:solidFill>
+                <a:latin typeface="Aptos" pitchFamily="34" charset="0"/>
+                <a:ea typeface="Aptos" pitchFamily="34" charset="-122"/>
+                <a:cs typeface="Aptos" pitchFamily="34" charset="-120"/>
+              </a:rPr>
+              <a:t>• Missed signals because some communities are underrepresented in data.</a:t>
             </a:r>
             <a:endParaRPr lang="en-US" sz="2100" dirty="0"/>
           </a:p>
           <a:p>
+            <a:pPr indent="0" marL="0">
+              <a:buNone/>
+            </a:pPr>
             <a:r>
               <a:rPr lang="en-US" sz="2100" dirty="0">
                 <a:solidFill>
-                  <a:srgbClr val="17364A"/>
-                </a:solidFill>
-                <a:latin typeface="Aptos" pitchFamily="34" charset="0"/>
-                <a:ea typeface="Aptos" pitchFamily="34" charset="-122"/>
-                <a:cs typeface="Aptos" pitchFamily="34" charset="-120"/>
-              </a:rPr>
-              <a:t>Automated prioritization replacing epidemiologic judgment.</a:t>
+                  <a:srgbClr val="003A63"/>
+                </a:solidFill>
+                <a:latin typeface="Aptos" pitchFamily="34" charset="0"/>
+                <a:ea typeface="Aptos" pitchFamily="34" charset="-122"/>
+                <a:cs typeface="Aptos" pitchFamily="34" charset="-120"/>
+              </a:rPr>
+              <a:t>• Automated prioritization replacing epidemiologic judgment.</a:t>
             </a:r>
             <a:endParaRPr lang="en-US" sz="2100" dirty="0"/>
           </a:p>
           <a:p>
+            <a:pPr indent="0" marL="0">
+              <a:buNone/>
+            </a:pPr>
             <a:r>
               <a:rPr lang="en-US" sz="2100" dirty="0">
                 <a:solidFill>
-                  <a:srgbClr val="17364A"/>
-                </a:solidFill>
-                <a:latin typeface="Aptos" pitchFamily="34" charset="0"/>
-                <a:ea typeface="Aptos" pitchFamily="34" charset="-122"/>
-                <a:cs typeface="Aptos" pitchFamily="34" charset="-120"/>
-              </a:rPr>
-              <a:t>Sensitive investigation information being used in unapproved tools.</a:t>
+                  <a:srgbClr val="003A63"/>
+                </a:solidFill>
+                <a:latin typeface="Aptos" pitchFamily="34" charset="0"/>
+                <a:ea typeface="Aptos" pitchFamily="34" charset="-122"/>
+                <a:cs typeface="Aptos" pitchFamily="34" charset="-120"/>
+              </a:rPr>
+              <a:t>• Sensitive investigation information being used in unapproved tools.</a:t>
             </a:r>
             <a:endParaRPr lang="en-US" sz="2100" dirty="0"/>
           </a:p>
@@ -4937,17 +4979,17 @@
         </p:nvSpPr>
         <p:spPr>
           <a:xfrm>
-            <a:off x="7799832" y="1828800"/>
-            <a:ext cx="3145536" cy="685800"/>
-          </a:xfrm>
-          <a:prstGeom prst="rect">
-            <a:avLst/>
-          </a:prstGeom>
-          <a:noFill/>
-          <a:ln/>
-        </p:spPr>
-        <p:txBody>
-          <a:bodyPr wrap="square" lIns="0" tIns="0" rIns="0" bIns="0" rtlCol="0" anchor="t">
+            <a:off x="7799832" y="1801368"/>
+            <a:ext cx="3145536" cy="758952"/>
+          </a:xfrm>
+          <a:prstGeom prst="rect">
+            <a:avLst/>
+          </a:prstGeom>
+          <a:noFill/>
+          <a:ln/>
+        </p:spPr>
+        <p:txBody>
+          <a:bodyPr wrap="square" lIns="254" tIns="254" rIns="254" bIns="254" rtlCol="0" anchor="t">
             <a:normAutofit/>
           </a:bodyPr>
           <a:lstStyle/>
@@ -4956,7 +4998,7 @@
               <a:buNone/>
             </a:pPr>
             <a:r>
-              <a:rPr lang="en-US" sz="1550" dirty="0">
+              <a:rPr lang="en-US" sz="1320" dirty="0">
                 <a:solidFill>
                   <a:srgbClr val="17364A"/>
                 </a:solidFill>
@@ -4966,7 +5008,7 @@
               </a:rPr>
               <a:t>Missed signals because some communities are underrepresented in data.</a:t>
             </a:r>
-            <a:endParaRPr lang="en-US" sz="1550" dirty="0"/>
+            <a:endParaRPr lang="en-US" sz="1320" dirty="0"/>
           </a:p>
         </p:txBody>
       </p:sp>
@@ -5054,13 +5096,16 @@
           <a:ln/>
         </p:spPr>
         <p:txBody>
-          <a:bodyPr wrap="square" lIns="254" tIns="254" rIns="254" bIns="254" rtlCol="0" anchor="t">
+          <a:bodyPr wrap="square" lIns="508" tIns="508" rIns="508" bIns="508" rtlCol="0" anchor="t">
             <a:normAutofit/>
           </a:bodyPr>
           <a:lstStyle/>
           <a:p>
-            <a:r>
-              <a:rPr lang="en-US" sz="1380" dirty="0">
+            <a:pPr indent="0" marL="0">
+              <a:buNone/>
+            </a:pPr>
+            <a:r>
+              <a:rPr lang="en-US" sz="1220" dirty="0">
                 <a:solidFill>
                   <a:srgbClr val="17364A"/>
                 </a:solidFill>
@@ -5068,13 +5113,16 @@
                 <a:ea typeface="Aptos" pitchFamily="34" charset="-122"/>
                 <a:cs typeface="Aptos" pitchFamily="34" charset="-120"/>
               </a:rPr>
-              <a:t>Missed signals because some communities are underrepresented in data.</a:t>
-            </a:r>
-            <a:endParaRPr lang="en-US" sz="1380" dirty="0"/>
-          </a:p>
-          <a:p>
-            <a:r>
-              <a:rPr lang="en-US" sz="1380" dirty="0">
+              <a:t>Missed signals because some communities are underrepresented in.</a:t>
+            </a:r>
+            <a:endParaRPr lang="en-US" sz="1220" dirty="0"/>
+          </a:p>
+          <a:p>
+            <a:pPr indent="0" marL="0">
+              <a:buNone/>
+            </a:pPr>
+            <a:r>
+              <a:rPr lang="en-US" sz="1220" dirty="0">
                 <a:solidFill>
                   <a:srgbClr val="17364A"/>
                 </a:solidFill>
@@ -5084,11 +5132,14 @@
               </a:rPr>
               <a:t>Automated prioritization replacing epidemiologic judgment.</a:t>
             </a:r>
-            <a:endParaRPr lang="en-US" sz="1380" dirty="0"/>
-          </a:p>
-          <a:p>
-            <a:r>
-              <a:rPr lang="en-US" sz="1380" dirty="0">
+            <a:endParaRPr lang="en-US" sz="1220" dirty="0"/>
+          </a:p>
+          <a:p>
+            <a:pPr indent="0" marL="0">
+              <a:buNone/>
+            </a:pPr>
+            <a:r>
+              <a:rPr lang="en-US" sz="1220" dirty="0">
                 <a:solidFill>
                   <a:srgbClr val="17364A"/>
                 </a:solidFill>
@@ -5098,7 +5149,7 @@
               </a:rPr>
               <a:t>Sensitive investigation information being used in unapproved tools.</a:t>
             </a:r>
-            <a:endParaRPr lang="en-US" sz="1380" dirty="0"/>
+            <a:endParaRPr lang="en-US" sz="1220" dirty="0"/>
           </a:p>
         </p:txBody>
       </p:sp>
@@ -5176,17 +5227,17 @@
         </p:nvSpPr>
         <p:spPr>
           <a:xfrm>
-            <a:off x="7799832" y="5001768"/>
-            <a:ext cx="3145536" cy="502920"/>
-          </a:xfrm>
-          <a:prstGeom prst="rect">
-            <a:avLst/>
-          </a:prstGeom>
-          <a:noFill/>
-          <a:ln/>
-        </p:spPr>
-        <p:txBody>
-          <a:bodyPr wrap="square" lIns="0" tIns="0" rIns="0" bIns="0" rtlCol="0" anchor="t">
+            <a:off x="7799832" y="4974336"/>
+            <a:ext cx="3145536" cy="576072"/>
+          </a:xfrm>
+          <a:prstGeom prst="rect">
+            <a:avLst/>
+          </a:prstGeom>
+          <a:noFill/>
+          <a:ln/>
+        </p:spPr>
+        <p:txBody>
+          <a:bodyPr wrap="square" lIns="254" tIns="254" rIns="254" bIns="254" rtlCol="0" anchor="t">
             <a:normAutofit/>
           </a:bodyPr>
           <a:lstStyle/>
@@ -5195,7 +5246,7 @@
               <a:buNone/>
             </a:pPr>
             <a:r>
-              <a:rPr lang="en-US" sz="1550" dirty="0">
+              <a:rPr lang="en-US" sz="1320" dirty="0">
                 <a:solidFill>
                   <a:srgbClr val="17364A"/>
                 </a:solidFill>
@@ -5203,9 +5254,9 @@
                 <a:ea typeface="Aptos" pitchFamily="34" charset="-122"/>
                 <a:cs typeface="Aptos" pitchFamily="34" charset="-120"/>
               </a:rPr>
-              <a:t>Identify what could go wrong, who could be affected, what safeguards are needed, and what evidence should be reviewed before use expands.</a:t>
-            </a:r>
-            <a:endParaRPr lang="en-US" sz="1550" dirty="0"/>
+              <a:t>Identify what could go wrong, who could be affected, what safeguards are needed, and what evidence should be reviewed.</a:t>
+            </a:r>
+            <a:endParaRPr lang="en-US" sz="1320" dirty="0"/>
           </a:p>
         </p:txBody>
       </p:sp>
@@ -5506,49 +5557,58 @@
           <a:ln/>
         </p:spPr>
         <p:txBody>
-          <a:bodyPr wrap="square" lIns="635" tIns="635" rIns="635" bIns="635" rtlCol="0" anchor="t">
+          <a:bodyPr wrap="square" lIns="1016" tIns="1016" rIns="1016" bIns="1016" rtlCol="0" anchor="t">
             <a:normAutofit/>
           </a:bodyPr>
           <a:lstStyle/>
           <a:p>
+            <a:pPr indent="0" marL="0">
+              <a:buNone/>
+            </a:pPr>
             <a:r>
               <a:rPr lang="en-US" sz="2100" dirty="0">
                 <a:solidFill>
-                  <a:srgbClr val="17364A"/>
-                </a:solidFill>
-                <a:latin typeface="Aptos" pitchFamily="34" charset="0"/>
-                <a:ea typeface="Aptos" pitchFamily="34" charset="-122"/>
-                <a:cs typeface="Aptos" pitchFamily="34" charset="-120"/>
-              </a:rPr>
-              <a:t>Recommended guardrails include the following:</a:t>
+                  <a:srgbClr val="003A63"/>
+                </a:solidFill>
+                <a:latin typeface="Aptos" pitchFamily="34" charset="0"/>
+                <a:ea typeface="Aptos" pitchFamily="34" charset="-122"/>
+                <a:cs typeface="Aptos" pitchFamily="34" charset="-120"/>
+              </a:rPr>
+              <a:t>• Recommended guardrails include the following:</a:t>
             </a:r>
             <a:endParaRPr lang="en-US" sz="2100" dirty="0"/>
           </a:p>
           <a:p>
+            <a:pPr indent="0" marL="0">
+              <a:buNone/>
+            </a:pPr>
             <a:r>
               <a:rPr lang="en-US" sz="2100" dirty="0">
                 <a:solidFill>
-                  <a:srgbClr val="17364A"/>
-                </a:solidFill>
-                <a:latin typeface="Aptos" pitchFamily="34" charset="0"/>
-                <a:ea typeface="Aptos" pitchFamily="34" charset="-122"/>
-                <a:cs typeface="Aptos" pitchFamily="34" charset="-120"/>
-              </a:rPr>
-              <a:t>Require source traceability for summaries and extracted information.</a:t>
+                  <a:srgbClr val="003A63"/>
+                </a:solidFill>
+                <a:latin typeface="Aptos" pitchFamily="34" charset="0"/>
+                <a:ea typeface="Aptos" pitchFamily="34" charset="-122"/>
+                <a:cs typeface="Aptos" pitchFamily="34" charset="-120"/>
+              </a:rPr>
+              <a:t>• Require source traceability for summaries and extracted information.</a:t>
             </a:r>
             <a:endParaRPr lang="en-US" sz="2100" dirty="0"/>
           </a:p>
           <a:p>
+            <a:pPr indent="0" marL="0">
+              <a:buNone/>
+            </a:pPr>
             <a:r>
               <a:rPr lang="en-US" sz="2100" dirty="0">
                 <a:solidFill>
-                  <a:srgbClr val="17364A"/>
-                </a:solidFill>
-                <a:latin typeface="Aptos" pitchFamily="34" charset="0"/>
-                <a:ea typeface="Aptos" pitchFamily="34" charset="-122"/>
-                <a:cs typeface="Aptos" pitchFamily="34" charset="-120"/>
-              </a:rPr>
-              <a:t>Use AI outputs as prompts for review, not automatic conclusions.</a:t>
+                  <a:srgbClr val="003A63"/>
+                </a:solidFill>
+                <a:latin typeface="Aptos" pitchFamily="34" charset="0"/>
+                <a:ea typeface="Aptos" pitchFamily="34" charset="-122"/>
+                <a:cs typeface="Aptos" pitchFamily="34" charset="-120"/>
+              </a:rPr>
+              <a:t>• Use AI outputs as prompts for review, not automatic conclusions.</a:t>
             </a:r>
             <a:endParaRPr lang="en-US" sz="2100" dirty="0"/>
           </a:p>
@@ -5628,17 +5688,17 @@
         </p:nvSpPr>
         <p:spPr>
           <a:xfrm>
-            <a:off x="7799832" y="1828800"/>
-            <a:ext cx="3145536" cy="685800"/>
-          </a:xfrm>
-          <a:prstGeom prst="rect">
-            <a:avLst/>
-          </a:prstGeom>
-          <a:noFill/>
-          <a:ln/>
-        </p:spPr>
-        <p:txBody>
-          <a:bodyPr wrap="square" lIns="0" tIns="0" rIns="0" bIns="0" rtlCol="0" anchor="t">
+            <a:off x="7799832" y="1801368"/>
+            <a:ext cx="3145536" cy="758952"/>
+          </a:xfrm>
+          <a:prstGeom prst="rect">
+            <a:avLst/>
+          </a:prstGeom>
+          <a:noFill/>
+          <a:ln/>
+        </p:spPr>
+        <p:txBody>
+          <a:bodyPr wrap="square" lIns="254" tIns="254" rIns="254" bIns="254" rtlCol="0" anchor="t">
             <a:normAutofit/>
           </a:bodyPr>
           <a:lstStyle/>
@@ -5647,7 +5707,7 @@
               <a:buNone/>
             </a:pPr>
             <a:r>
-              <a:rPr lang="en-US" sz="1550" dirty="0">
+              <a:rPr lang="en-US" sz="1320" dirty="0">
                 <a:solidFill>
                   <a:srgbClr val="17364A"/>
                 </a:solidFill>
@@ -5657,7 +5717,7 @@
               </a:rPr>
               <a:t>Recommended guardrails include the following:</a:t>
             </a:r>
-            <a:endParaRPr lang="en-US" sz="1550" dirty="0"/>
+            <a:endParaRPr lang="en-US" sz="1320" dirty="0"/>
           </a:p>
         </p:txBody>
       </p:sp>
@@ -5745,13 +5805,16 @@
           <a:ln/>
         </p:spPr>
         <p:txBody>
-          <a:bodyPr wrap="square" lIns="254" tIns="254" rIns="254" bIns="254" rtlCol="0" anchor="t">
+          <a:bodyPr wrap="square" lIns="508" tIns="508" rIns="508" bIns="508" rtlCol="0" anchor="t">
             <a:normAutofit/>
           </a:bodyPr>
           <a:lstStyle/>
           <a:p>
-            <a:r>
-              <a:rPr lang="en-US" sz="1380" dirty="0">
+            <a:pPr indent="0" marL="0">
+              <a:buNone/>
+            </a:pPr>
+            <a:r>
+              <a:rPr lang="en-US" sz="1220" dirty="0">
                 <a:solidFill>
                   <a:srgbClr val="17364A"/>
                 </a:solidFill>
@@ -5761,11 +5824,14 @@
               </a:rPr>
               <a:t>Recommended guardrails include the following:</a:t>
             </a:r>
-            <a:endParaRPr lang="en-US" sz="1380" dirty="0"/>
-          </a:p>
-          <a:p>
-            <a:r>
-              <a:rPr lang="en-US" sz="1380" dirty="0">
+            <a:endParaRPr lang="en-US" sz="1220" dirty="0"/>
+          </a:p>
+          <a:p>
+            <a:pPr indent="0" marL="0">
+              <a:buNone/>
+            </a:pPr>
+            <a:r>
+              <a:rPr lang="en-US" sz="1220" dirty="0">
                 <a:solidFill>
                   <a:srgbClr val="17364A"/>
                 </a:solidFill>
@@ -5775,11 +5841,14 @@
               </a:rPr>
               <a:t>Require source traceability for summaries and extracted information.</a:t>
             </a:r>
-            <a:endParaRPr lang="en-US" sz="1380" dirty="0"/>
-          </a:p>
-          <a:p>
-            <a:r>
-              <a:rPr lang="en-US" sz="1380" dirty="0">
+            <a:endParaRPr lang="en-US" sz="1220" dirty="0"/>
+          </a:p>
+          <a:p>
+            <a:pPr indent="0" marL="0">
+              <a:buNone/>
+            </a:pPr>
+            <a:r>
+              <a:rPr lang="en-US" sz="1220" dirty="0">
                 <a:solidFill>
                   <a:srgbClr val="17364A"/>
                 </a:solidFill>
@@ -5789,7 +5858,7 @@
               </a:rPr>
               <a:t>Use AI outputs as prompts for review, not automatic conclusions.</a:t>
             </a:r>
-            <a:endParaRPr lang="en-US" sz="1380" dirty="0"/>
+            <a:endParaRPr lang="en-US" sz="1220" dirty="0"/>
           </a:p>
         </p:txBody>
       </p:sp>
@@ -5867,17 +5936,17 @@
         </p:nvSpPr>
         <p:spPr>
           <a:xfrm>
-            <a:off x="7799832" y="5001768"/>
-            <a:ext cx="3145536" cy="502920"/>
-          </a:xfrm>
-          <a:prstGeom prst="rect">
-            <a:avLst/>
-          </a:prstGeom>
-          <a:noFill/>
-          <a:ln/>
-        </p:spPr>
-        <p:txBody>
-          <a:bodyPr wrap="square" lIns="0" tIns="0" rIns="0" bIns="0" rtlCol="0" anchor="t">
+            <a:off x="7799832" y="4974336"/>
+            <a:ext cx="3145536" cy="576072"/>
+          </a:xfrm>
+          <a:prstGeom prst="rect">
+            <a:avLst/>
+          </a:prstGeom>
+          <a:noFill/>
+          <a:ln/>
+        </p:spPr>
+        <p:txBody>
+          <a:bodyPr wrap="square" lIns="254" tIns="254" rIns="254" bIns="254" rtlCol="0" anchor="t">
             <a:normAutofit/>
           </a:bodyPr>
           <a:lstStyle/>
@@ -5886,7 +5955,7 @@
               <a:buNone/>
             </a:pPr>
             <a:r>
-              <a:rPr lang="en-US" sz="1550" dirty="0">
+              <a:rPr lang="en-US" sz="1320" dirty="0">
                 <a:solidFill>
                   <a:srgbClr val="17364A"/>
                 </a:solidFill>
@@ -5894,9 +5963,9 @@
                 <a:ea typeface="Aptos" pitchFamily="34" charset="-122"/>
                 <a:cs typeface="Aptos" pitchFamily="34" charset="-120"/>
               </a:rPr>
-              <a:t>Identify what could go wrong, who could be affected, what safeguards are needed, and what evidence should be reviewed before use expands.</a:t>
-            </a:r>
-            <a:endParaRPr lang="en-US" sz="1550" dirty="0"/>
+              <a:t>Identify what could go wrong, who could be affected, what safeguards are needed, and what evidence should be reviewed.</a:t>
+            </a:r>
+            <a:endParaRPr lang="en-US" sz="1320" dirty="0"/>
           </a:p>
         </p:txBody>
       </p:sp>
@@ -6197,49 +6266,58 @@
           <a:ln/>
         </p:spPr>
         <p:txBody>
-          <a:bodyPr wrap="square" lIns="635" tIns="635" rIns="635" bIns="635" rtlCol="0" anchor="t">
+          <a:bodyPr wrap="square" lIns="1016" tIns="1016" rIns="1016" bIns="1016" rtlCol="0" anchor="t">
             <a:normAutofit/>
           </a:bodyPr>
           <a:lstStyle/>
           <a:p>
+            <a:pPr indent="0" marL="0">
+              <a:buNone/>
+            </a:pPr>
             <a:r>
               <a:rPr lang="en-US" sz="2100" dirty="0">
                 <a:solidFill>
-                  <a:srgbClr val="17364A"/>
-                </a:solidFill>
-                <a:latin typeface="Aptos" pitchFamily="34" charset="0"/>
-                <a:ea typeface="Aptos" pitchFamily="34" charset="-122"/>
-                <a:cs typeface="Aptos" pitchFamily="34" charset="-120"/>
-              </a:rPr>
-              <a:t>Document uncertainty, missing data, and preliminary status.</a:t>
+                  <a:srgbClr val="003A63"/>
+                </a:solidFill>
+                <a:latin typeface="Aptos" pitchFamily="34" charset="0"/>
+                <a:ea typeface="Aptos" pitchFamily="34" charset="-122"/>
+                <a:cs typeface="Aptos" pitchFamily="34" charset="-120"/>
+              </a:rPr>
+              <a:t>• Document uncertainty, missing data, and preliminary status.</a:t>
             </a:r>
             <a:endParaRPr lang="en-US" sz="2100" dirty="0"/>
           </a:p>
           <a:p>
+            <a:pPr indent="0" marL="0">
+              <a:buNone/>
+            </a:pPr>
             <a:r>
               <a:rPr lang="en-US" sz="2100" dirty="0">
                 <a:solidFill>
-                  <a:srgbClr val="17364A"/>
-                </a:solidFill>
-                <a:latin typeface="Aptos" pitchFamily="34" charset="0"/>
-                <a:ea typeface="Aptos" pitchFamily="34" charset="-122"/>
-                <a:cs typeface="Aptos" pitchFamily="34" charset="-120"/>
-              </a:rPr>
-              <a:t>Apply equity review to prioritization and signal detection workflows.</a:t>
+                  <a:srgbClr val="003A63"/>
+                </a:solidFill>
+                <a:latin typeface="Aptos" pitchFamily="34" charset="0"/>
+                <a:ea typeface="Aptos" pitchFamily="34" charset="-122"/>
+                <a:cs typeface="Aptos" pitchFamily="34" charset="-120"/>
+              </a:rPr>
+              <a:t>• Apply equity review to prioritization and signal detection workflows.</a:t>
             </a:r>
             <a:endParaRPr lang="en-US" sz="2100" dirty="0"/>
           </a:p>
           <a:p>
+            <a:pPr indent="0" marL="0">
+              <a:buNone/>
+            </a:pPr>
             <a:r>
               <a:rPr lang="en-US" sz="2100" dirty="0">
                 <a:solidFill>
-                  <a:srgbClr val="17364A"/>
-                </a:solidFill>
-                <a:latin typeface="Aptos" pitchFamily="34" charset="0"/>
-                <a:ea typeface="Aptos" pitchFamily="34" charset="-122"/>
-                <a:cs typeface="Aptos" pitchFamily="34" charset="-120"/>
-              </a:rPr>
-              <a:t>Define escalation to epidemiology leadership for unusual, high-risk, or public-facing outputs.</a:t>
+                  <a:srgbClr val="003A63"/>
+                </a:solidFill>
+                <a:latin typeface="Aptos" pitchFamily="34" charset="0"/>
+                <a:ea typeface="Aptos" pitchFamily="34" charset="-122"/>
+                <a:cs typeface="Aptos" pitchFamily="34" charset="-120"/>
+              </a:rPr>
+              <a:t>• Define escalation to epidemiology leadership for unusual, high-risk, or public-facing outputs.</a:t>
             </a:r>
             <a:endParaRPr lang="en-US" sz="2100" dirty="0"/>
           </a:p>
@@ -6319,17 +6397,17 @@
         </p:nvSpPr>
         <p:spPr>
           <a:xfrm>
-            <a:off x="7799832" y="1828800"/>
-            <a:ext cx="3145536" cy="685800"/>
-          </a:xfrm>
-          <a:prstGeom prst="rect">
-            <a:avLst/>
-          </a:prstGeom>
-          <a:noFill/>
-          <a:ln/>
-        </p:spPr>
-        <p:txBody>
-          <a:bodyPr wrap="square" lIns="0" tIns="0" rIns="0" bIns="0" rtlCol="0" anchor="t">
+            <a:off x="7799832" y="1801368"/>
+            <a:ext cx="3145536" cy="758952"/>
+          </a:xfrm>
+          <a:prstGeom prst="rect">
+            <a:avLst/>
+          </a:prstGeom>
+          <a:noFill/>
+          <a:ln/>
+        </p:spPr>
+        <p:txBody>
+          <a:bodyPr wrap="square" lIns="254" tIns="254" rIns="254" bIns="254" rtlCol="0" anchor="t">
             <a:normAutofit/>
           </a:bodyPr>
           <a:lstStyle/>
@@ -6338,7 +6416,7 @@
               <a:buNone/>
             </a:pPr>
             <a:r>
-              <a:rPr lang="en-US" sz="1550" dirty="0">
+              <a:rPr lang="en-US" sz="1320" dirty="0">
                 <a:solidFill>
                   <a:srgbClr val="17364A"/>
                 </a:solidFill>
@@ -6348,7 +6426,7 @@
               </a:rPr>
               <a:t>Document uncertainty, missing data, and preliminary status.</a:t>
             </a:r>
-            <a:endParaRPr lang="en-US" sz="1550" dirty="0"/>
+            <a:endParaRPr lang="en-US" sz="1320" dirty="0"/>
           </a:p>
         </p:txBody>
       </p:sp>
@@ -6436,13 +6514,16 @@
           <a:ln/>
         </p:spPr>
         <p:txBody>
-          <a:bodyPr wrap="square" lIns="254" tIns="254" rIns="254" bIns="254" rtlCol="0" anchor="t">
+          <a:bodyPr wrap="square" lIns="508" tIns="508" rIns="508" bIns="508" rtlCol="0" anchor="t">
             <a:normAutofit/>
           </a:bodyPr>
           <a:lstStyle/>
           <a:p>
-            <a:r>
-              <a:rPr lang="en-US" sz="1380" dirty="0">
+            <a:pPr indent="0" marL="0">
+              <a:buNone/>
+            </a:pPr>
+            <a:r>
+              <a:rPr lang="en-US" sz="1220" dirty="0">
                 <a:solidFill>
                   <a:srgbClr val="17364A"/>
                 </a:solidFill>
@@ -6452,11 +6533,14 @@
               </a:rPr>
               <a:t>Document uncertainty, missing data, and preliminary status.</a:t>
             </a:r>
-            <a:endParaRPr lang="en-US" sz="1380" dirty="0"/>
-          </a:p>
-          <a:p>
-            <a:r>
-              <a:rPr lang="en-US" sz="1380" dirty="0">
+            <a:endParaRPr lang="en-US" sz="1220" dirty="0"/>
+          </a:p>
+          <a:p>
+            <a:pPr indent="0" marL="0">
+              <a:buNone/>
+            </a:pPr>
+            <a:r>
+              <a:rPr lang="en-US" sz="1220" dirty="0">
                 <a:solidFill>
                   <a:srgbClr val="17364A"/>
                 </a:solidFill>
@@ -6464,13 +6548,16 @@
                 <a:ea typeface="Aptos" pitchFamily="34" charset="-122"/>
                 <a:cs typeface="Aptos" pitchFamily="34" charset="-120"/>
               </a:rPr>
-              <a:t>Apply equity review to prioritization and signal detection workflows.</a:t>
-            </a:r>
-            <a:endParaRPr lang="en-US" sz="1380" dirty="0"/>
-          </a:p>
-          <a:p>
-            <a:r>
-              <a:rPr lang="en-US" sz="1380" dirty="0">
+              <a:t>Apply equity review to prioritization and signal detection.</a:t>
+            </a:r>
+            <a:endParaRPr lang="en-US" sz="1220" dirty="0"/>
+          </a:p>
+          <a:p>
+            <a:pPr indent="0" marL="0">
+              <a:buNone/>
+            </a:pPr>
+            <a:r>
+              <a:rPr lang="en-US" sz="1220" dirty="0">
                 <a:solidFill>
                   <a:srgbClr val="17364A"/>
                 </a:solidFill>
@@ -6478,9 +6565,9 @@
                 <a:ea typeface="Aptos" pitchFamily="34" charset="-122"/>
                 <a:cs typeface="Aptos" pitchFamily="34" charset="-120"/>
               </a:rPr>
-              <a:t>Define escalation to epidemiology leadership for unusual, high-risk, or public-facing.</a:t>
-            </a:r>
-            <a:endParaRPr lang="en-US" sz="1380" dirty="0"/>
+              <a:t>Define escalation to epidemiology leadership for unusual,.</a:t>
+            </a:r>
+            <a:endParaRPr lang="en-US" sz="1220" dirty="0"/>
           </a:p>
         </p:txBody>
       </p:sp>
@@ -6558,17 +6645,17 @@
         </p:nvSpPr>
         <p:spPr>
           <a:xfrm>
-            <a:off x="7799832" y="5001768"/>
-            <a:ext cx="3145536" cy="502920"/>
-          </a:xfrm>
-          <a:prstGeom prst="rect">
-            <a:avLst/>
-          </a:prstGeom>
-          <a:noFill/>
-          <a:ln/>
-        </p:spPr>
-        <p:txBody>
-          <a:bodyPr wrap="square" lIns="0" tIns="0" rIns="0" bIns="0" rtlCol="0" anchor="t">
+            <a:off x="7799832" y="4974336"/>
+            <a:ext cx="3145536" cy="576072"/>
+          </a:xfrm>
+          <a:prstGeom prst="rect">
+            <a:avLst/>
+          </a:prstGeom>
+          <a:noFill/>
+          <a:ln/>
+        </p:spPr>
+        <p:txBody>
+          <a:bodyPr wrap="square" lIns="254" tIns="254" rIns="254" bIns="254" rtlCol="0" anchor="t">
             <a:normAutofit/>
           </a:bodyPr>
           <a:lstStyle/>
@@ -6577,7 +6664,7 @@
               <a:buNone/>
             </a:pPr>
             <a:r>
-              <a:rPr lang="en-US" sz="1550" dirty="0">
+              <a:rPr lang="en-US" sz="1320" dirty="0">
                 <a:solidFill>
                   <a:srgbClr val="17364A"/>
                 </a:solidFill>
@@ -6585,9 +6672,9 @@
                 <a:ea typeface="Aptos" pitchFamily="34" charset="-122"/>
                 <a:cs typeface="Aptos" pitchFamily="34" charset="-120"/>
               </a:rPr>
-              <a:t>Identify what could go wrong, who could be affected, what safeguards are needed, and what evidence should be reviewed before use expands.</a:t>
-            </a:r>
-            <a:endParaRPr lang="en-US" sz="1550" dirty="0"/>
+              <a:t>Identify what could go wrong, who could be affected, what safeguards are needed, and what evidence should be reviewed.</a:t>
+            </a:r>
+            <a:endParaRPr lang="en-US" sz="1320" dirty="0"/>
           </a:p>
         </p:txBody>
       </p:sp>
@@ -6888,49 +6975,58 @@
           <a:ln/>
         </p:spPr>
         <p:txBody>
-          <a:bodyPr wrap="square" lIns="635" tIns="635" rIns="635" bIns="635" rtlCol="0" anchor="t">
+          <a:bodyPr wrap="square" lIns="1016" tIns="1016" rIns="1016" bIns="1016" rtlCol="0" anchor="t">
             <a:normAutofit/>
           </a:bodyPr>
           <a:lstStyle/>
           <a:p>
+            <a:pPr indent="0" marL="0">
+              <a:buNone/>
+            </a:pPr>
             <a:r>
               <a:rPr lang="en-US" sz="2100" dirty="0">
                 <a:solidFill>
-                  <a:srgbClr val="17364A"/>
-                </a:solidFill>
-                <a:latin typeface="Aptos" pitchFamily="34" charset="0"/>
-                <a:ea typeface="Aptos" pitchFamily="34" charset="-122"/>
-                <a:cs typeface="Aptos" pitchFamily="34" charset="-120"/>
-              </a:rPr>
-              <a:t>Where does this topic appear in your agency, program, or workflow?</a:t>
+                  <a:srgbClr val="003A63"/>
+                </a:solidFill>
+                <a:latin typeface="Aptos" pitchFamily="34" charset="0"/>
+                <a:ea typeface="Aptos" pitchFamily="34" charset="-122"/>
+                <a:cs typeface="Aptos" pitchFamily="34" charset="-120"/>
+              </a:rPr>
+              <a:t>• Where does this topic appear in your agency, program, or workflow?</a:t>
             </a:r>
             <a:endParaRPr lang="en-US" sz="2100" dirty="0"/>
           </a:p>
           <a:p>
+            <a:pPr indent="0" marL="0">
+              <a:buNone/>
+            </a:pPr>
             <a:r>
               <a:rPr lang="en-US" sz="2100" dirty="0">
                 <a:solidFill>
-                  <a:srgbClr val="17364A"/>
-                </a:solidFill>
-                <a:latin typeface="Aptos" pitchFamily="34" charset="0"/>
-                <a:ea typeface="Aptos" pitchFamily="34" charset="-122"/>
-                <a:cs typeface="Aptos" pitchFamily="34" charset="-120"/>
-              </a:rPr>
-              <a:t>Which staff roles would need to understand or apply this concept before AI use is approved?</a:t>
+                  <a:srgbClr val="003A63"/>
+                </a:solidFill>
+                <a:latin typeface="Aptos" pitchFamily="34" charset="0"/>
+                <a:ea typeface="Aptos" pitchFamily="34" charset="-122"/>
+                <a:cs typeface="Aptos" pitchFamily="34" charset="-120"/>
+              </a:rPr>
+              <a:t>• Which staff roles would need to understand or apply this concept before AI use is approved?</a:t>
             </a:r>
             <a:endParaRPr lang="en-US" sz="2100" dirty="0"/>
           </a:p>
           <a:p>
+            <a:pPr indent="0" marL="0">
+              <a:buNone/>
+            </a:pPr>
             <a:r>
               <a:rPr lang="en-US" sz="2100" dirty="0">
                 <a:solidFill>
-                  <a:srgbClr val="17364A"/>
-                </a:solidFill>
-                <a:latin typeface="Aptos" pitchFamily="34" charset="0"/>
-                <a:ea typeface="Aptos" pitchFamily="34" charset="-122"/>
-                <a:cs typeface="Aptos" pitchFamily="34" charset="-120"/>
-              </a:rPr>
-              <a:t>What could go wrong if this topic is not addressed before implementation?</a:t>
+                  <a:srgbClr val="003A63"/>
+                </a:solidFill>
+                <a:latin typeface="Aptos" pitchFamily="34" charset="0"/>
+                <a:ea typeface="Aptos" pitchFamily="34" charset="-122"/>
+                <a:cs typeface="Aptos" pitchFamily="34" charset="-120"/>
+              </a:rPr>
+              <a:t>• What could go wrong if this topic is not addressed before implementation?</a:t>
             </a:r>
             <a:endParaRPr lang="en-US" sz="2100" dirty="0"/>
           </a:p>
@@ -7010,17 +7106,17 @@
         </p:nvSpPr>
         <p:spPr>
           <a:xfrm>
-            <a:off x="7799832" y="1828800"/>
-            <a:ext cx="3145536" cy="685800"/>
-          </a:xfrm>
-          <a:prstGeom prst="rect">
-            <a:avLst/>
-          </a:prstGeom>
-          <a:noFill/>
-          <a:ln/>
-        </p:spPr>
-        <p:txBody>
-          <a:bodyPr wrap="square" lIns="0" tIns="0" rIns="0" bIns="0" rtlCol="0" anchor="t">
+            <a:off x="7799832" y="1801368"/>
+            <a:ext cx="3145536" cy="758952"/>
+          </a:xfrm>
+          <a:prstGeom prst="rect">
+            <a:avLst/>
+          </a:prstGeom>
+          <a:noFill/>
+          <a:ln/>
+        </p:spPr>
+        <p:txBody>
+          <a:bodyPr wrap="square" lIns="254" tIns="254" rIns="254" bIns="254" rtlCol="0" anchor="t">
             <a:normAutofit/>
           </a:bodyPr>
           <a:lstStyle/>
@@ -7029,7 +7125,7 @@
               <a:buNone/>
             </a:pPr>
             <a:r>
-              <a:rPr lang="en-US" sz="1550" dirty="0">
+              <a:rPr lang="en-US" sz="1320" dirty="0">
                 <a:solidFill>
                   <a:srgbClr val="17364A"/>
                 </a:solidFill>
@@ -7039,7 +7135,7 @@
               </a:rPr>
               <a:t>Where does this topic appear in your agency, program, or workflow?</a:t>
             </a:r>
-            <a:endParaRPr lang="en-US" sz="1550" dirty="0"/>
+            <a:endParaRPr lang="en-US" sz="1320" dirty="0"/>
           </a:p>
         </p:txBody>
       </p:sp>
@@ -7127,13 +7223,16 @@
           <a:ln/>
         </p:spPr>
         <p:txBody>
-          <a:bodyPr wrap="square" lIns="254" tIns="254" rIns="254" bIns="254" rtlCol="0" anchor="t">
+          <a:bodyPr wrap="square" lIns="508" tIns="508" rIns="508" bIns="508" rtlCol="0" anchor="t">
             <a:normAutofit/>
           </a:bodyPr>
           <a:lstStyle/>
           <a:p>
-            <a:r>
-              <a:rPr lang="en-US" sz="1380" dirty="0">
+            <a:pPr indent="0" marL="0">
+              <a:buNone/>
+            </a:pPr>
+            <a:r>
+              <a:rPr lang="en-US" sz="1220" dirty="0">
                 <a:solidFill>
                   <a:srgbClr val="17364A"/>
                 </a:solidFill>
@@ -7143,11 +7242,14 @@
               </a:rPr>
               <a:t>Where does this topic appear in your agency, program, or workflow?</a:t>
             </a:r>
-            <a:endParaRPr lang="en-US" sz="1380" dirty="0"/>
-          </a:p>
-          <a:p>
-            <a:r>
-              <a:rPr lang="en-US" sz="1380" dirty="0">
+            <a:endParaRPr lang="en-US" sz="1220" dirty="0"/>
+          </a:p>
+          <a:p>
+            <a:pPr indent="0" marL="0">
+              <a:buNone/>
+            </a:pPr>
+            <a:r>
+              <a:rPr lang="en-US" sz="1220" dirty="0">
                 <a:solidFill>
                   <a:srgbClr val="17364A"/>
                 </a:solidFill>
@@ -7155,13 +7257,16 @@
                 <a:ea typeface="Aptos" pitchFamily="34" charset="-122"/>
                 <a:cs typeface="Aptos" pitchFamily="34" charset="-120"/>
               </a:rPr>
-              <a:t>Which staff roles would need to understand or apply this concept before AI use is approved?</a:t>
-            </a:r>
-            <a:endParaRPr lang="en-US" sz="1380" dirty="0"/>
-          </a:p>
-          <a:p>
-            <a:r>
-              <a:rPr lang="en-US" sz="1380" dirty="0">
+              <a:t>Which staff roles would need to understand or apply this concept.</a:t>
+            </a:r>
+            <a:endParaRPr lang="en-US" sz="1220" dirty="0"/>
+          </a:p>
+          <a:p>
+            <a:pPr indent="0" marL="0">
+              <a:buNone/>
+            </a:pPr>
+            <a:r>
+              <a:rPr lang="en-US" sz="1220" dirty="0">
                 <a:solidFill>
                   <a:srgbClr val="17364A"/>
                 </a:solidFill>
@@ -7169,9 +7274,9 @@
                 <a:ea typeface="Aptos" pitchFamily="34" charset="-122"/>
                 <a:cs typeface="Aptos" pitchFamily="34" charset="-120"/>
               </a:rPr>
-              <a:t>What could go wrong if this topic is not addressed before implementation?</a:t>
-            </a:r>
-            <a:endParaRPr lang="en-US" sz="1380" dirty="0"/>
+              <a:t>What could go wrong if this topic is not addressed before.</a:t>
+            </a:r>
+            <a:endParaRPr lang="en-US" sz="1220" dirty="0"/>
           </a:p>
         </p:txBody>
       </p:sp>
@@ -7249,17 +7354,17 @@
         </p:nvSpPr>
         <p:spPr>
           <a:xfrm>
-            <a:off x="7799832" y="5001768"/>
-            <a:ext cx="3145536" cy="502920"/>
-          </a:xfrm>
-          <a:prstGeom prst="rect">
-            <a:avLst/>
-          </a:prstGeom>
-          <a:noFill/>
-          <a:ln/>
-        </p:spPr>
-        <p:txBody>
-          <a:bodyPr wrap="square" lIns="0" tIns="0" rIns="0" bIns="0" rtlCol="0" anchor="t">
+            <a:off x="7799832" y="4974336"/>
+            <a:ext cx="3145536" cy="576072"/>
+          </a:xfrm>
+          <a:prstGeom prst="rect">
+            <a:avLst/>
+          </a:prstGeom>
+          <a:noFill/>
+          <a:ln/>
+        </p:spPr>
+        <p:txBody>
+          <a:bodyPr wrap="square" lIns="254" tIns="254" rIns="254" bIns="254" rtlCol="0" anchor="t">
             <a:normAutofit/>
           </a:bodyPr>
           <a:lstStyle/>
@@ -7268,7 +7373,7 @@
               <a:buNone/>
             </a:pPr>
             <a:r>
-              <a:rPr lang="en-US" sz="1550" dirty="0">
+              <a:rPr lang="en-US" sz="1320" dirty="0">
                 <a:solidFill>
                   <a:srgbClr val="17364A"/>
                 </a:solidFill>
@@ -7276,9 +7381,9 @@
                 <a:ea typeface="Aptos" pitchFamily="34" charset="-122"/>
                 <a:cs typeface="Aptos" pitchFamily="34" charset="-120"/>
               </a:rPr>
-              <a:t>Connect the concept to public health purpose, responsible use, required safeguards, documentation, and the next action a department should take.</a:t>
-            </a:r>
-            <a:endParaRPr lang="en-US" sz="1550" dirty="0"/>
+              <a:t>Connect the concept to public health purpose, responsible use, required safeguards, documentation, and the next action a.</a:t>
+            </a:r>
+            <a:endParaRPr lang="en-US" sz="1320" dirty="0"/>
           </a:p>
         </p:txBody>
       </p:sp>
@@ -7579,35 +7684,41 @@
           <a:ln/>
         </p:spPr>
         <p:txBody>
-          <a:bodyPr wrap="square" lIns="635" tIns="635" rIns="635" bIns="635" rtlCol="0" anchor="t">
+          <a:bodyPr wrap="square" lIns="1016" tIns="1016" rIns="1016" bIns="1016" rtlCol="0" anchor="t">
             <a:normAutofit/>
           </a:bodyPr>
           <a:lstStyle/>
           <a:p>
+            <a:pPr indent="0" marL="0">
+              <a:buNone/>
+            </a:pPr>
             <a:r>
               <a:rPr lang="en-US" sz="2100" dirty="0">
                 <a:solidFill>
-                  <a:srgbClr val="17364A"/>
-                </a:solidFill>
-                <a:latin typeface="Aptos" pitchFamily="34" charset="0"/>
-                <a:ea typeface="Aptos" pitchFamily="34" charset="-122"/>
-                <a:cs typeface="Aptos" pitchFamily="34" charset="-120"/>
-              </a:rPr>
-              <a:t>What evidence would governance, leadership, or operations staff need before moving forward?</a:t>
+                  <a:srgbClr val="003A63"/>
+                </a:solidFill>
+                <a:latin typeface="Aptos" pitchFamily="34" charset="0"/>
+                <a:ea typeface="Aptos" pitchFamily="34" charset="-122"/>
+                <a:cs typeface="Aptos" pitchFamily="34" charset="-120"/>
+              </a:rPr>
+              <a:t>• What evidence would governance, leadership, or operations staff need before moving forward?</a:t>
             </a:r>
             <a:endParaRPr lang="en-US" sz="2100" dirty="0"/>
           </a:p>
           <a:p>
+            <a:pPr indent="0" marL="0">
+              <a:buNone/>
+            </a:pPr>
             <a:r>
               <a:rPr lang="en-US" sz="2100" dirty="0">
                 <a:solidFill>
-                  <a:srgbClr val="17364A"/>
-                </a:solidFill>
-                <a:latin typeface="Aptos" pitchFamily="34" charset="0"/>
-                <a:ea typeface="Aptos" pitchFamily="34" charset="-122"/>
-                <a:cs typeface="Aptos" pitchFamily="34" charset="-120"/>
-              </a:rPr>
-              <a:t>Which policy, data, equity, privacy, security, or workflow questions remain unresolved?</a:t>
+                  <a:srgbClr val="003A63"/>
+                </a:solidFill>
+                <a:latin typeface="Aptos" pitchFamily="34" charset="0"/>
+                <a:ea typeface="Aptos" pitchFamily="34" charset="-122"/>
+                <a:cs typeface="Aptos" pitchFamily="34" charset="-120"/>
+              </a:rPr>
+              <a:t>• Which policy, data, equity, privacy, security, or workflow questions remain unresolved?</a:t>
             </a:r>
             <a:endParaRPr lang="en-US" sz="2100" dirty="0"/>
           </a:p>
@@ -7687,17 +7798,17 @@
         </p:nvSpPr>
         <p:spPr>
           <a:xfrm>
-            <a:off x="7799832" y="1828800"/>
-            <a:ext cx="3145536" cy="685800"/>
-          </a:xfrm>
-          <a:prstGeom prst="rect">
-            <a:avLst/>
-          </a:prstGeom>
-          <a:noFill/>
-          <a:ln/>
-        </p:spPr>
-        <p:txBody>
-          <a:bodyPr wrap="square" lIns="0" tIns="0" rIns="0" bIns="0" rtlCol="0" anchor="t">
+            <a:off x="7799832" y="1801368"/>
+            <a:ext cx="3145536" cy="758952"/>
+          </a:xfrm>
+          <a:prstGeom prst="rect">
+            <a:avLst/>
+          </a:prstGeom>
+          <a:noFill/>
+          <a:ln/>
+        </p:spPr>
+        <p:txBody>
+          <a:bodyPr wrap="square" lIns="254" tIns="254" rIns="254" bIns="254" rtlCol="0" anchor="t">
             <a:normAutofit/>
           </a:bodyPr>
           <a:lstStyle/>
@@ -7706,7 +7817,7 @@
               <a:buNone/>
             </a:pPr>
             <a:r>
-              <a:rPr lang="en-US" sz="1550" dirty="0">
+              <a:rPr lang="en-US" sz="1320" dirty="0">
                 <a:solidFill>
                   <a:srgbClr val="17364A"/>
                 </a:solidFill>
@@ -7716,7 +7827,7 @@
               </a:rPr>
               <a:t>What evidence would governance, leadership, or operations staff need before moving forward?</a:t>
             </a:r>
-            <a:endParaRPr lang="en-US" sz="1550" dirty="0"/>
+            <a:endParaRPr lang="en-US" sz="1320" dirty="0"/>
           </a:p>
         </p:txBody>
       </p:sp>
@@ -7804,13 +7915,16 @@
           <a:ln/>
         </p:spPr>
         <p:txBody>
-          <a:bodyPr wrap="square" lIns="254" tIns="254" rIns="254" bIns="254" rtlCol="0" anchor="t">
+          <a:bodyPr wrap="square" lIns="508" tIns="508" rIns="508" bIns="508" rtlCol="0" anchor="t">
             <a:normAutofit/>
           </a:bodyPr>
           <a:lstStyle/>
           <a:p>
-            <a:r>
-              <a:rPr lang="en-US" sz="1380" dirty="0">
+            <a:pPr indent="0" marL="0">
+              <a:buNone/>
+            </a:pPr>
+            <a:r>
+              <a:rPr lang="en-US" sz="1220" dirty="0">
                 <a:solidFill>
                   <a:srgbClr val="17364A"/>
                 </a:solidFill>
@@ -7818,13 +7932,16 @@
                 <a:ea typeface="Aptos" pitchFamily="34" charset="-122"/>
                 <a:cs typeface="Aptos" pitchFamily="34" charset="-120"/>
               </a:rPr>
-              <a:t>What evidence would governance, leadership, or operations staff need before moving forward?</a:t>
-            </a:r>
-            <a:endParaRPr lang="en-US" sz="1380" dirty="0"/>
-          </a:p>
-          <a:p>
-            <a:r>
-              <a:rPr lang="en-US" sz="1380" dirty="0">
+              <a:t>What evidence would governance, leadership, or operations staff.</a:t>
+            </a:r>
+            <a:endParaRPr lang="en-US" sz="1220" dirty="0"/>
+          </a:p>
+          <a:p>
+            <a:pPr indent="0" marL="0">
+              <a:buNone/>
+            </a:pPr>
+            <a:r>
+              <a:rPr lang="en-US" sz="1220" dirty="0">
                 <a:solidFill>
                   <a:srgbClr val="17364A"/>
                 </a:solidFill>
@@ -7832,9 +7949,9 @@
                 <a:ea typeface="Aptos" pitchFamily="34" charset="-122"/>
                 <a:cs typeface="Aptos" pitchFamily="34" charset="-120"/>
               </a:rPr>
-              <a:t>Which policy, data, equity, privacy, security, or workflow questions remain unresolved?</a:t>
-            </a:r>
-            <a:endParaRPr lang="en-US" sz="1380" dirty="0"/>
+              <a:t>Which policy, data, equity, privacy, security, or workflow.</a:t>
+            </a:r>
+            <a:endParaRPr lang="en-US" sz="1220" dirty="0"/>
           </a:p>
         </p:txBody>
       </p:sp>
@@ -7912,17 +8029,17 @@
         </p:nvSpPr>
         <p:spPr>
           <a:xfrm>
-            <a:off x="7799832" y="5001768"/>
-            <a:ext cx="3145536" cy="502920"/>
-          </a:xfrm>
-          <a:prstGeom prst="rect">
-            <a:avLst/>
-          </a:prstGeom>
-          <a:noFill/>
-          <a:ln/>
-        </p:spPr>
-        <p:txBody>
-          <a:bodyPr wrap="square" lIns="0" tIns="0" rIns="0" bIns="0" rtlCol="0" anchor="t">
+            <a:off x="7799832" y="4974336"/>
+            <a:ext cx="3145536" cy="576072"/>
+          </a:xfrm>
+          <a:prstGeom prst="rect">
+            <a:avLst/>
+          </a:prstGeom>
+          <a:noFill/>
+          <a:ln/>
+        </p:spPr>
+        <p:txBody>
+          <a:bodyPr wrap="square" lIns="254" tIns="254" rIns="254" bIns="254" rtlCol="0" anchor="t">
             <a:normAutofit/>
           </a:bodyPr>
           <a:lstStyle/>
@@ -7931,7 +8048,7 @@
               <a:buNone/>
             </a:pPr>
             <a:r>
-              <a:rPr lang="en-US" sz="1550" dirty="0">
+              <a:rPr lang="en-US" sz="1320" dirty="0">
                 <a:solidFill>
                   <a:srgbClr val="17364A"/>
                 </a:solidFill>
@@ -7939,9 +8056,9 @@
                 <a:ea typeface="Aptos" pitchFamily="34" charset="-122"/>
                 <a:cs typeface="Aptos" pitchFamily="34" charset="-120"/>
               </a:rPr>
-              <a:t>Connect the concept to public health purpose, responsible use, required safeguards, documentation, and the next action a department should take.</a:t>
-            </a:r>
-            <a:endParaRPr lang="en-US" sz="1550" dirty="0"/>
+              <a:t>Connect the concept to public health purpose, responsible use, required safeguards, documentation, and the next action a.</a:t>
+            </a:r>
+            <a:endParaRPr lang="en-US" sz="1320" dirty="0"/>
           </a:p>
         </p:txBody>
       </p:sp>
@@ -8242,35 +8359,41 @@
           <a:ln/>
         </p:spPr>
         <p:txBody>
-          <a:bodyPr wrap="square" lIns="635" tIns="635" rIns="635" bIns="635" rtlCol="0" anchor="t">
+          <a:bodyPr wrap="square" lIns="1016" tIns="1016" rIns="1016" bIns="1016" rtlCol="0" anchor="t">
             <a:normAutofit/>
           </a:bodyPr>
           <a:lstStyle/>
           <a:p>
+            <a:pPr indent="0" marL="0">
+              <a:buNone/>
+            </a:pPr>
             <a:r>
               <a:rPr lang="en-US" sz="2100" dirty="0">
                 <a:solidFill>
-                  <a:srgbClr val="17364A"/>
-                </a:solidFill>
-                <a:latin typeface="Aptos" pitchFamily="34" charset="0"/>
-                <a:ea typeface="Aptos" pitchFamily="34" charset="-122"/>
-                <a:cs typeface="Aptos" pitchFamily="34" charset="-120"/>
-              </a:rPr>
-              <a:t>Create an AI-supported case investigation or outbreak response workflow review.</a:t>
+                  <a:srgbClr val="003A63"/>
+                </a:solidFill>
+                <a:latin typeface="Aptos" pitchFamily="34" charset="0"/>
+                <a:ea typeface="Aptos" pitchFamily="34" charset="-122"/>
+                <a:cs typeface="Aptos" pitchFamily="34" charset="-120"/>
+              </a:rPr>
+              <a:t>• Create an AI-supported case investigation or outbreak response workflow review.</a:t>
             </a:r>
             <a:endParaRPr lang="en-US" sz="2100" dirty="0"/>
           </a:p>
           <a:p>
+            <a:pPr indent="0" marL="0">
+              <a:buNone/>
+            </a:pPr>
             <a:r>
               <a:rPr lang="en-US" sz="2100" dirty="0">
                 <a:solidFill>
-                  <a:srgbClr val="17364A"/>
-                </a:solidFill>
-                <a:latin typeface="Aptos" pitchFamily="34" charset="0"/>
-                <a:ea typeface="Aptos" pitchFamily="34" charset="-122"/>
-                <a:cs typeface="Aptos" pitchFamily="34" charset="-120"/>
-              </a:rPr>
-              <a:t>Include the supported task, data sources, AI output, source traceability, human review point,.</a:t>
+                  <a:srgbClr val="003A63"/>
+                </a:solidFill>
+                <a:latin typeface="Aptos" pitchFamily="34" charset="0"/>
+                <a:ea typeface="Aptos" pitchFamily="34" charset="-122"/>
+                <a:cs typeface="Aptos" pitchFamily="34" charset="-120"/>
+              </a:rPr>
+              <a:t>• Include the supported task, data sources, AI output, source traceability, human review point,.</a:t>
             </a:r>
             <a:endParaRPr lang="en-US" sz="2100" dirty="0"/>
           </a:p>
@@ -8350,17 +8473,17 @@
         </p:nvSpPr>
         <p:spPr>
           <a:xfrm>
-            <a:off x="7799832" y="1828800"/>
-            <a:ext cx="3145536" cy="685800"/>
-          </a:xfrm>
-          <a:prstGeom prst="rect">
-            <a:avLst/>
-          </a:prstGeom>
-          <a:noFill/>
-          <a:ln/>
-        </p:spPr>
-        <p:txBody>
-          <a:bodyPr wrap="square" lIns="0" tIns="0" rIns="0" bIns="0" rtlCol="0" anchor="t">
+            <a:off x="7799832" y="1801368"/>
+            <a:ext cx="3145536" cy="758952"/>
+          </a:xfrm>
+          <a:prstGeom prst="rect">
+            <a:avLst/>
+          </a:prstGeom>
+          <a:noFill/>
+          <a:ln/>
+        </p:spPr>
+        <p:txBody>
+          <a:bodyPr wrap="square" lIns="254" tIns="254" rIns="254" bIns="254" rtlCol="0" anchor="t">
             <a:normAutofit/>
           </a:bodyPr>
           <a:lstStyle/>
@@ -8369,7 +8492,7 @@
               <a:buNone/>
             </a:pPr>
             <a:r>
-              <a:rPr lang="en-US" sz="1550" dirty="0">
+              <a:rPr lang="en-US" sz="1320" dirty="0">
                 <a:solidFill>
                   <a:srgbClr val="17364A"/>
                 </a:solidFill>
@@ -8379,7 +8502,7 @@
               </a:rPr>
               <a:t>Create an AI-supported case investigation or outbreak response workflow review.</a:t>
             </a:r>
-            <a:endParaRPr lang="en-US" sz="1550" dirty="0"/>
+            <a:endParaRPr lang="en-US" sz="1320" dirty="0"/>
           </a:p>
         </p:txBody>
       </p:sp>
@@ -8467,13 +8590,16 @@
           <a:ln/>
         </p:spPr>
         <p:txBody>
-          <a:bodyPr wrap="square" lIns="254" tIns="254" rIns="254" bIns="254" rtlCol="0" anchor="t">
+          <a:bodyPr wrap="square" lIns="508" tIns="508" rIns="508" bIns="508" rtlCol="0" anchor="t">
             <a:normAutofit/>
           </a:bodyPr>
           <a:lstStyle/>
           <a:p>
-            <a:r>
-              <a:rPr lang="en-US" sz="1380" dirty="0">
+            <a:pPr indent="0" marL="0">
+              <a:buNone/>
+            </a:pPr>
+            <a:r>
+              <a:rPr lang="en-US" sz="1220" dirty="0">
                 <a:solidFill>
                   <a:srgbClr val="17364A"/>
                 </a:solidFill>
@@ -8481,13 +8607,16 @@
                 <a:ea typeface="Aptos" pitchFamily="34" charset="-122"/>
                 <a:cs typeface="Aptos" pitchFamily="34" charset="-120"/>
               </a:rPr>
-              <a:t>Create an AI-supported case investigation or outbreak response workflow review.</a:t>
-            </a:r>
-            <a:endParaRPr lang="en-US" sz="1380" dirty="0"/>
-          </a:p>
-          <a:p>
-            <a:r>
-              <a:rPr lang="en-US" sz="1380" dirty="0">
+              <a:t>Create an AI-supported case investigation or outbreak response.</a:t>
+            </a:r>
+            <a:endParaRPr lang="en-US" sz="1220" dirty="0"/>
+          </a:p>
+          <a:p>
+            <a:pPr indent="0" marL="0">
+              <a:buNone/>
+            </a:pPr>
+            <a:r>
+              <a:rPr lang="en-US" sz="1220" dirty="0">
                 <a:solidFill>
                   <a:srgbClr val="17364A"/>
                 </a:solidFill>
@@ -8495,9 +8624,9 @@
                 <a:ea typeface="Aptos" pitchFamily="34" charset="-122"/>
                 <a:cs typeface="Aptos" pitchFamily="34" charset="-120"/>
               </a:rPr>
-              <a:t>Include the supported task, data sources, AI output, source traceability, human review.</a:t>
-            </a:r>
-            <a:endParaRPr lang="en-US" sz="1380" dirty="0"/>
+              <a:t>Include the supported task, data sources, AI output, source.</a:t>
+            </a:r>
+            <a:endParaRPr lang="en-US" sz="1220" dirty="0"/>
           </a:p>
         </p:txBody>
       </p:sp>
@@ -8575,17 +8704,17 @@
         </p:nvSpPr>
         <p:spPr>
           <a:xfrm>
-            <a:off x="7799832" y="5001768"/>
-            <a:ext cx="3145536" cy="502920"/>
-          </a:xfrm>
-          <a:prstGeom prst="rect">
-            <a:avLst/>
-          </a:prstGeom>
-          <a:noFill/>
-          <a:ln/>
-        </p:spPr>
-        <p:txBody>
-          <a:bodyPr wrap="square" lIns="0" tIns="0" rIns="0" bIns="0" rtlCol="0" anchor="t">
+            <a:off x="7799832" y="4974336"/>
+            <a:ext cx="3145536" cy="576072"/>
+          </a:xfrm>
+          <a:prstGeom prst="rect">
+            <a:avLst/>
+          </a:prstGeom>
+          <a:noFill/>
+          <a:ln/>
+        </p:spPr>
+        <p:txBody>
+          <a:bodyPr wrap="square" lIns="254" tIns="254" rIns="254" bIns="254" rtlCol="0" anchor="t">
             <a:normAutofit/>
           </a:bodyPr>
           <a:lstStyle/>
@@ -8594,7 +8723,7 @@
               <a:buNone/>
             </a:pPr>
             <a:r>
-              <a:rPr lang="en-US" sz="1550" dirty="0">
+              <a:rPr lang="en-US" sz="1320" dirty="0">
                 <a:solidFill>
                   <a:srgbClr val="17364A"/>
                 </a:solidFill>
@@ -8602,9 +8731,9 @@
                 <a:ea typeface="Aptos" pitchFamily="34" charset="-122"/>
                 <a:cs typeface="Aptos" pitchFamily="34" charset="-120"/>
               </a:rPr>
-              <a:t>Use the assignment to test whether you can explain the concept, apply it to a realistic public health situation, and identify what would need review before the work moves forward.</a:t>
-            </a:r>
-            <a:endParaRPr lang="en-US" sz="1550" dirty="0"/>
+              <a:t>Use the assignment to test whether you can explain the concept, apply it to a realistic public health situation, and.</a:t>
+            </a:r>
+            <a:endParaRPr lang="en-US" sz="1320" dirty="0"/>
           </a:p>
         </p:txBody>
       </p:sp>
@@ -8905,49 +9034,58 @@
           <a:ln/>
         </p:spPr>
         <p:txBody>
-          <a:bodyPr wrap="square" lIns="635" tIns="635" rIns="635" bIns="635" rtlCol="0" anchor="t">
+          <a:bodyPr wrap="square" lIns="1016" tIns="1016" rIns="1016" bIns="1016" rtlCol="0" anchor="t">
             <a:normAutofit/>
           </a:bodyPr>
           <a:lstStyle/>
           <a:p>
+            <a:pPr indent="0" marL="0">
+              <a:buNone/>
+            </a:pPr>
             <a:r>
               <a:rPr lang="en-US" sz="2100" dirty="0">
                 <a:solidFill>
-                  <a:srgbClr val="17364A"/>
-                </a:solidFill>
-                <a:latin typeface="Aptos" pitchFamily="34" charset="0"/>
-                <a:ea typeface="Aptos" pitchFamily="34" charset="-122"/>
-                <a:cs typeface="Aptos" pitchFamily="34" charset="-120"/>
-              </a:rPr>
-              <a:t>Case investigation or outbreak response workflow review</a:t>
+                  <a:srgbClr val="003A63"/>
+                </a:solidFill>
+                <a:latin typeface="Aptos" pitchFamily="34" charset="0"/>
+                <a:ea typeface="Aptos" pitchFamily="34" charset="-122"/>
+                <a:cs typeface="Aptos" pitchFamily="34" charset="-120"/>
+              </a:rPr>
+              <a:t>• Case investigation or outbreak response workflow review</a:t>
             </a:r>
             <a:endParaRPr lang="en-US" sz="2100" dirty="0"/>
           </a:p>
           <a:p>
+            <a:pPr indent="0" marL="0">
+              <a:buNone/>
+            </a:pPr>
             <a:r>
               <a:rPr lang="en-US" sz="2100" dirty="0">
                 <a:solidFill>
-                  <a:srgbClr val="17364A"/>
-                </a:solidFill>
-                <a:latin typeface="Aptos" pitchFamily="34" charset="0"/>
-                <a:ea typeface="Aptos" pitchFamily="34" charset="-122"/>
-                <a:cs typeface="Aptos" pitchFamily="34" charset="-120"/>
-              </a:rPr>
-              <a:t>Source traceability checklist</a:t>
+                  <a:srgbClr val="003A63"/>
+                </a:solidFill>
+                <a:latin typeface="Aptos" pitchFamily="34" charset="0"/>
+                <a:ea typeface="Aptos" pitchFamily="34" charset="-122"/>
+                <a:cs typeface="Aptos" pitchFamily="34" charset="-120"/>
+              </a:rPr>
+              <a:t>• Source traceability checklist</a:t>
             </a:r>
             <a:endParaRPr lang="en-US" sz="2100" dirty="0"/>
           </a:p>
           <a:p>
+            <a:pPr indent="0" marL="0">
+              <a:buNone/>
+            </a:pPr>
             <a:r>
               <a:rPr lang="en-US" sz="2100" dirty="0">
                 <a:solidFill>
-                  <a:srgbClr val="17364A"/>
-                </a:solidFill>
-                <a:latin typeface="Aptos" pitchFamily="34" charset="0"/>
-                <a:ea typeface="Aptos" pitchFamily="34" charset="-122"/>
-                <a:cs typeface="Aptos" pitchFamily="34" charset="-120"/>
-              </a:rPr>
-              <a:t>Uncertainty and missing data documentation</a:t>
+                  <a:srgbClr val="003A63"/>
+                </a:solidFill>
+                <a:latin typeface="Aptos" pitchFamily="34" charset="0"/>
+                <a:ea typeface="Aptos" pitchFamily="34" charset="-122"/>
+                <a:cs typeface="Aptos" pitchFamily="34" charset="-120"/>
+              </a:rPr>
+              <a:t>• Uncertainty and missing data documentation</a:t>
             </a:r>
             <a:endParaRPr lang="en-US" sz="2100" dirty="0"/>
           </a:p>
@@ -9027,17 +9165,17 @@
         </p:nvSpPr>
         <p:spPr>
           <a:xfrm>
-            <a:off x="7799832" y="1828800"/>
-            <a:ext cx="3145536" cy="685800"/>
-          </a:xfrm>
-          <a:prstGeom prst="rect">
-            <a:avLst/>
-          </a:prstGeom>
-          <a:noFill/>
-          <a:ln/>
-        </p:spPr>
-        <p:txBody>
-          <a:bodyPr wrap="square" lIns="0" tIns="0" rIns="0" bIns="0" rtlCol="0" anchor="t">
+            <a:off x="7799832" y="1801368"/>
+            <a:ext cx="3145536" cy="758952"/>
+          </a:xfrm>
+          <a:prstGeom prst="rect">
+            <a:avLst/>
+          </a:prstGeom>
+          <a:noFill/>
+          <a:ln/>
+        </p:spPr>
+        <p:txBody>
+          <a:bodyPr wrap="square" lIns="254" tIns="254" rIns="254" bIns="254" rtlCol="0" anchor="t">
             <a:normAutofit/>
           </a:bodyPr>
           <a:lstStyle/>
@@ -9046,7 +9184,7 @@
               <a:buNone/>
             </a:pPr>
             <a:r>
-              <a:rPr lang="en-US" sz="1550" dirty="0">
+              <a:rPr lang="en-US" sz="1320" dirty="0">
                 <a:solidFill>
                   <a:srgbClr val="17364A"/>
                 </a:solidFill>
@@ -9056,7 +9194,7 @@
               </a:rPr>
               <a:t>Case investigation or outbreak response workflow review</a:t>
             </a:r>
-            <a:endParaRPr lang="en-US" sz="1550" dirty="0"/>
+            <a:endParaRPr lang="en-US" sz="1320" dirty="0"/>
           </a:p>
         </p:txBody>
       </p:sp>
@@ -9144,13 +9282,16 @@
           <a:ln/>
         </p:spPr>
         <p:txBody>
-          <a:bodyPr wrap="square" lIns="254" tIns="254" rIns="254" bIns="254" rtlCol="0" anchor="t">
+          <a:bodyPr wrap="square" lIns="508" tIns="508" rIns="508" bIns="508" rtlCol="0" anchor="t">
             <a:normAutofit/>
           </a:bodyPr>
           <a:lstStyle/>
           <a:p>
-            <a:r>
-              <a:rPr lang="en-US" sz="1380" dirty="0">
+            <a:pPr indent="0" marL="0">
+              <a:buNone/>
+            </a:pPr>
+            <a:r>
+              <a:rPr lang="en-US" sz="1220" dirty="0">
                 <a:solidFill>
                   <a:srgbClr val="17364A"/>
                 </a:solidFill>
@@ -9160,11 +9301,14 @@
               </a:rPr>
               <a:t>Case investigation or outbreak response workflow review</a:t>
             </a:r>
-            <a:endParaRPr lang="en-US" sz="1380" dirty="0"/>
-          </a:p>
-          <a:p>
-            <a:r>
-              <a:rPr lang="en-US" sz="1380" dirty="0">
+            <a:endParaRPr lang="en-US" sz="1220" dirty="0"/>
+          </a:p>
+          <a:p>
+            <a:pPr indent="0" marL="0">
+              <a:buNone/>
+            </a:pPr>
+            <a:r>
+              <a:rPr lang="en-US" sz="1220" dirty="0">
                 <a:solidFill>
                   <a:srgbClr val="17364A"/>
                 </a:solidFill>
@@ -9174,11 +9318,14 @@
               </a:rPr>
               <a:t>Source traceability checklist</a:t>
             </a:r>
-            <a:endParaRPr lang="en-US" sz="1380" dirty="0"/>
-          </a:p>
-          <a:p>
-            <a:r>
-              <a:rPr lang="en-US" sz="1380" dirty="0">
+            <a:endParaRPr lang="en-US" sz="1220" dirty="0"/>
+          </a:p>
+          <a:p>
+            <a:pPr indent="0" marL="0">
+              <a:buNone/>
+            </a:pPr>
+            <a:r>
+              <a:rPr lang="en-US" sz="1220" dirty="0">
                 <a:solidFill>
                   <a:srgbClr val="17364A"/>
                 </a:solidFill>
@@ -9188,7 +9335,7 @@
               </a:rPr>
               <a:t>Uncertainty and missing data documentation</a:t>
             </a:r>
-            <a:endParaRPr lang="en-US" sz="1380" dirty="0"/>
+            <a:endParaRPr lang="en-US" sz="1220" dirty="0"/>
           </a:p>
         </p:txBody>
       </p:sp>
@@ -9266,17 +9413,17 @@
         </p:nvSpPr>
         <p:spPr>
           <a:xfrm>
-            <a:off x="7799832" y="5001768"/>
-            <a:ext cx="3145536" cy="502920"/>
-          </a:xfrm>
-          <a:prstGeom prst="rect">
-            <a:avLst/>
-          </a:prstGeom>
-          <a:noFill/>
-          <a:ln/>
-        </p:spPr>
-        <p:txBody>
-          <a:bodyPr wrap="square" lIns="0" tIns="0" rIns="0" bIns="0" rtlCol="0" anchor="t">
+            <a:off x="7799832" y="4974336"/>
+            <a:ext cx="3145536" cy="576072"/>
+          </a:xfrm>
+          <a:prstGeom prst="rect">
+            <a:avLst/>
+          </a:prstGeom>
+          <a:noFill/>
+          <a:ln/>
+        </p:spPr>
+        <p:txBody>
+          <a:bodyPr wrap="square" lIns="254" tIns="254" rIns="254" bIns="254" rtlCol="0" anchor="t">
             <a:normAutofit/>
           </a:bodyPr>
           <a:lstStyle/>
@@ -9285,7 +9432,7 @@
               <a:buNone/>
             </a:pPr>
             <a:r>
-              <a:rPr lang="en-US" sz="1550" dirty="0">
+              <a:rPr lang="en-US" sz="1320" dirty="0">
                 <a:solidFill>
                   <a:srgbClr val="17364A"/>
                 </a:solidFill>
@@ -9293,9 +9440,9 @@
                 <a:ea typeface="Aptos" pitchFamily="34" charset="-122"/>
                 <a:cs typeface="Aptos" pitchFamily="34" charset="-120"/>
               </a:rPr>
-              <a:t>Connect the concept to public health purpose, responsible use, required safeguards, documentation, and the next action a department should take.</a:t>
-            </a:r>
-            <a:endParaRPr lang="en-US" sz="1550" dirty="0"/>
+              <a:t>Connect the concept to public health purpose, responsible use, required safeguards, documentation, and the next action a.</a:t>
+            </a:r>
+            <a:endParaRPr lang="en-US" sz="1320" dirty="0"/>
           </a:p>
         </p:txBody>
       </p:sp>
@@ -9596,35 +9743,41 @@
           <a:ln/>
         </p:spPr>
         <p:txBody>
-          <a:bodyPr wrap="square" lIns="635" tIns="635" rIns="635" bIns="635" rtlCol="0" anchor="t">
+          <a:bodyPr wrap="square" lIns="1016" tIns="1016" rIns="1016" bIns="1016" rtlCol="0" anchor="t">
             <a:normAutofit/>
           </a:bodyPr>
           <a:lstStyle/>
           <a:p>
+            <a:pPr indent="0" marL="0">
+              <a:buNone/>
+            </a:pPr>
             <a:r>
               <a:rPr lang="en-US" sz="2100" dirty="0">
                 <a:solidFill>
-                  <a:srgbClr val="17364A"/>
-                </a:solidFill>
-                <a:latin typeface="Aptos" pitchFamily="34" charset="0"/>
-                <a:ea typeface="Aptos" pitchFamily="34" charset="-122"/>
-                <a:cs typeface="Aptos" pitchFamily="34" charset="-120"/>
-              </a:rPr>
-              <a:t>Equity and escalation review</a:t>
+                  <a:srgbClr val="003A63"/>
+                </a:solidFill>
+                <a:latin typeface="Aptos" pitchFamily="34" charset="0"/>
+                <a:ea typeface="Aptos" pitchFamily="34" charset="-122"/>
+                <a:cs typeface="Aptos" pitchFamily="34" charset="-120"/>
+              </a:rPr>
+              <a:t>• Equity and escalation review</a:t>
             </a:r>
             <a:endParaRPr lang="en-US" sz="2100" dirty="0"/>
           </a:p>
           <a:p>
+            <a:pPr indent="0" marL="0">
+              <a:buNone/>
+            </a:pPr>
             <a:r>
               <a:rPr lang="en-US" sz="2100" dirty="0">
                 <a:solidFill>
-                  <a:srgbClr val="17364A"/>
-                </a:solidFill>
-                <a:latin typeface="Aptos" pitchFamily="34" charset="0"/>
-                <a:ea typeface="Aptos" pitchFamily="34" charset="-122"/>
-                <a:cs typeface="Aptos" pitchFamily="34" charset="-120"/>
-              </a:rPr>
-              <a:t>Monitoring indicators</a:t>
+                  <a:srgbClr val="003A63"/>
+                </a:solidFill>
+                <a:latin typeface="Aptos" pitchFamily="34" charset="0"/>
+                <a:ea typeface="Aptos" pitchFamily="34" charset="-122"/>
+                <a:cs typeface="Aptos" pitchFamily="34" charset="-120"/>
+              </a:rPr>
+              <a:t>• Monitoring indicators</a:t>
             </a:r>
             <a:endParaRPr lang="en-US" sz="2100" dirty="0"/>
           </a:p>
@@ -9704,17 +9857,17 @@
         </p:nvSpPr>
         <p:spPr>
           <a:xfrm>
-            <a:off x="7799832" y="1828800"/>
-            <a:ext cx="3145536" cy="685800"/>
-          </a:xfrm>
-          <a:prstGeom prst="rect">
-            <a:avLst/>
-          </a:prstGeom>
-          <a:noFill/>
-          <a:ln/>
-        </p:spPr>
-        <p:txBody>
-          <a:bodyPr wrap="square" lIns="0" tIns="0" rIns="0" bIns="0" rtlCol="0" anchor="t">
+            <a:off x="7799832" y="1801368"/>
+            <a:ext cx="3145536" cy="758952"/>
+          </a:xfrm>
+          <a:prstGeom prst="rect">
+            <a:avLst/>
+          </a:prstGeom>
+          <a:noFill/>
+          <a:ln/>
+        </p:spPr>
+        <p:txBody>
+          <a:bodyPr wrap="square" lIns="254" tIns="254" rIns="254" bIns="254" rtlCol="0" anchor="t">
             <a:normAutofit/>
           </a:bodyPr>
           <a:lstStyle/>
@@ -9723,7 +9876,7 @@
               <a:buNone/>
             </a:pPr>
             <a:r>
-              <a:rPr lang="en-US" sz="1550" dirty="0">
+              <a:rPr lang="en-US" sz="1320" dirty="0">
                 <a:solidFill>
                   <a:srgbClr val="17364A"/>
                 </a:solidFill>
@@ -9733,7 +9886,7 @@
               </a:rPr>
               <a:t>Equity and escalation review</a:t>
             </a:r>
-            <a:endParaRPr lang="en-US" sz="1550" dirty="0"/>
+            <a:endParaRPr lang="en-US" sz="1320" dirty="0"/>
           </a:p>
         </p:txBody>
       </p:sp>
@@ -9821,13 +9974,16 @@
           <a:ln/>
         </p:spPr>
         <p:txBody>
-          <a:bodyPr wrap="square" lIns="254" tIns="254" rIns="254" bIns="254" rtlCol="0" anchor="t">
+          <a:bodyPr wrap="square" lIns="508" tIns="508" rIns="508" bIns="508" rtlCol="0" anchor="t">
             <a:normAutofit/>
           </a:bodyPr>
           <a:lstStyle/>
           <a:p>
-            <a:r>
-              <a:rPr lang="en-US" sz="1380" dirty="0">
+            <a:pPr indent="0" marL="0">
+              <a:buNone/>
+            </a:pPr>
+            <a:r>
+              <a:rPr lang="en-US" sz="1220" dirty="0">
                 <a:solidFill>
                   <a:srgbClr val="17364A"/>
                 </a:solidFill>
@@ -9837,11 +9993,14 @@
               </a:rPr>
               <a:t>Equity and escalation review</a:t>
             </a:r>
-            <a:endParaRPr lang="en-US" sz="1380" dirty="0"/>
-          </a:p>
-          <a:p>
-            <a:r>
-              <a:rPr lang="en-US" sz="1380" dirty="0">
+            <a:endParaRPr lang="en-US" sz="1220" dirty="0"/>
+          </a:p>
+          <a:p>
+            <a:pPr indent="0" marL="0">
+              <a:buNone/>
+            </a:pPr>
+            <a:r>
+              <a:rPr lang="en-US" sz="1220" dirty="0">
                 <a:solidFill>
                   <a:srgbClr val="17364A"/>
                 </a:solidFill>
@@ -9851,7 +10010,7 @@
               </a:rPr>
               <a:t>Monitoring indicators</a:t>
             </a:r>
-            <a:endParaRPr lang="en-US" sz="1380" dirty="0"/>
+            <a:endParaRPr lang="en-US" sz="1220" dirty="0"/>
           </a:p>
         </p:txBody>
       </p:sp>
@@ -9929,17 +10088,17 @@
         </p:nvSpPr>
         <p:spPr>
           <a:xfrm>
-            <a:off x="7799832" y="5001768"/>
-            <a:ext cx="3145536" cy="502920"/>
-          </a:xfrm>
-          <a:prstGeom prst="rect">
-            <a:avLst/>
-          </a:prstGeom>
-          <a:noFill/>
-          <a:ln/>
-        </p:spPr>
-        <p:txBody>
-          <a:bodyPr wrap="square" lIns="0" tIns="0" rIns="0" bIns="0" rtlCol="0" anchor="t">
+            <a:off x="7799832" y="4974336"/>
+            <a:ext cx="3145536" cy="576072"/>
+          </a:xfrm>
+          <a:prstGeom prst="rect">
+            <a:avLst/>
+          </a:prstGeom>
+          <a:noFill/>
+          <a:ln/>
+        </p:spPr>
+        <p:txBody>
+          <a:bodyPr wrap="square" lIns="254" tIns="254" rIns="254" bIns="254" rtlCol="0" anchor="t">
             <a:normAutofit/>
           </a:bodyPr>
           <a:lstStyle/>
@@ -9948,7 +10107,7 @@
               <a:buNone/>
             </a:pPr>
             <a:r>
-              <a:rPr lang="en-US" sz="1550" dirty="0">
+              <a:rPr lang="en-US" sz="1320" dirty="0">
                 <a:solidFill>
                   <a:srgbClr val="17364A"/>
                 </a:solidFill>
@@ -9956,9 +10115,9 @@
                 <a:ea typeface="Aptos" pitchFamily="34" charset="-122"/>
                 <a:cs typeface="Aptos" pitchFamily="34" charset="-120"/>
               </a:rPr>
-              <a:t>Connect the concept to public health purpose, responsible use, required safeguards, documentation, and the next action a department should take.</a:t>
-            </a:r>
-            <a:endParaRPr lang="en-US" sz="1550" dirty="0"/>
+              <a:t>Connect the concept to public health purpose, responsible use, required safeguards, documentation, and the next action a.</a:t>
+            </a:r>
+            <a:endParaRPr lang="en-US" sz="1320" dirty="0"/>
           </a:p>
         </p:txBody>
       </p:sp>
@@ -10259,49 +10418,58 @@
           <a:ln/>
         </p:spPr>
         <p:txBody>
-          <a:bodyPr wrap="square" lIns="635" tIns="635" rIns="635" bIns="635" rtlCol="0" anchor="t">
+          <a:bodyPr wrap="square" lIns="1016" tIns="1016" rIns="1016" bIns="1016" rtlCol="0" anchor="t">
             <a:normAutofit/>
           </a:bodyPr>
           <a:lstStyle/>
           <a:p>
+            <a:pPr indent="0" marL="0">
+              <a:buNone/>
+            </a:pPr>
             <a:r>
               <a:rPr lang="en-US" sz="2100" dirty="0">
                 <a:solidFill>
-                  <a:srgbClr val="17364A"/>
-                </a:solidFill>
-                <a:latin typeface="Aptos" pitchFamily="34" charset="0"/>
-                <a:ea typeface="Aptos" pitchFamily="34" charset="-122"/>
-                <a:cs typeface="Aptos" pitchFamily="34" charset="-120"/>
-              </a:rPr>
-              <a:t>Case investigation and outbreak response are high-pressure public health workflows that depend on timely.</a:t>
+                  <a:srgbClr val="003A63"/>
+                </a:solidFill>
+                <a:latin typeface="Aptos" pitchFamily="34" charset="0"/>
+                <a:ea typeface="Aptos" pitchFamily="34" charset="-122"/>
+                <a:cs typeface="Aptos" pitchFamily="34" charset="-120"/>
+              </a:rPr>
+              <a:t>• Case investigation and outbreak response are high-pressure public health workflows that depend.</a:t>
             </a:r>
             <a:endParaRPr lang="en-US" sz="2100" dirty="0"/>
           </a:p>
           <a:p>
+            <a:pPr indent="0" marL="0">
+              <a:buNone/>
+            </a:pPr>
             <a:r>
               <a:rPr lang="en-US" sz="2100" dirty="0">
                 <a:solidFill>
-                  <a:srgbClr val="17364A"/>
-                </a:solidFill>
-                <a:latin typeface="Aptos" pitchFamily="34" charset="0"/>
-                <a:ea typeface="Aptos" pitchFamily="34" charset="-122"/>
-                <a:cs typeface="Aptos" pitchFamily="34" charset="-120"/>
-              </a:rPr>
-              <a:t>AI may support these workflows by summarizing case records, extracting exposures, identifying missing.</a:t>
+                  <a:srgbClr val="003A63"/>
+                </a:solidFill>
+                <a:latin typeface="Aptos" pitchFamily="34" charset="0"/>
+                <a:ea typeface="Aptos" pitchFamily="34" charset="-122"/>
+                <a:cs typeface="Aptos" pitchFamily="34" charset="-120"/>
+              </a:rPr>
+              <a:t>• AI may support these workflows by summarizing case records, extracting exposures, identifying.</a:t>
             </a:r>
             <a:endParaRPr lang="en-US" sz="2100" dirty="0"/>
           </a:p>
           <a:p>
+            <a:pPr indent="0" marL="0">
+              <a:buNone/>
+            </a:pPr>
             <a:r>
               <a:rPr lang="en-US" sz="2100" dirty="0">
                 <a:solidFill>
-                  <a:srgbClr val="17364A"/>
-                </a:solidFill>
-                <a:latin typeface="Aptos" pitchFamily="34" charset="0"/>
-                <a:ea typeface="Aptos" pitchFamily="34" charset="-122"/>
-                <a:cs typeface="Aptos" pitchFamily="34" charset="-120"/>
-              </a:rPr>
-              <a:t>At the same time, errors can affect real people, public health action, and public confidence.</a:t>
+                  <a:srgbClr val="003A63"/>
+                </a:solidFill>
+                <a:latin typeface="Aptos" pitchFamily="34" charset="0"/>
+                <a:ea typeface="Aptos" pitchFamily="34" charset="-122"/>
+                <a:cs typeface="Aptos" pitchFamily="34" charset="-120"/>
+              </a:rPr>
+              <a:t>• At the same time, errors can affect real people, public health action, and public confidence.</a:t>
             </a:r>
             <a:endParaRPr lang="en-US" sz="2100" dirty="0"/>
           </a:p>
@@ -10381,17 +10549,17 @@
         </p:nvSpPr>
         <p:spPr>
           <a:xfrm>
-            <a:off x="8074152" y="1920240"/>
-            <a:ext cx="2825496" cy="1280160"/>
-          </a:xfrm>
-          <a:prstGeom prst="rect">
-            <a:avLst/>
-          </a:prstGeom>
-          <a:noFill/>
-          <a:ln/>
-        </p:spPr>
-        <p:txBody>
-          <a:bodyPr wrap="square" lIns="0" tIns="0" rIns="0" bIns="0" rtlCol="0" anchor="t">
+            <a:off x="8074152" y="1892808"/>
+            <a:ext cx="2825496" cy="1353312"/>
+          </a:xfrm>
+          <a:prstGeom prst="rect">
+            <a:avLst/>
+          </a:prstGeom>
+          <a:noFill/>
+          <a:ln/>
+        </p:spPr>
+        <p:txBody>
+          <a:bodyPr wrap="square" lIns="254" tIns="254" rIns="254" bIns="254" rtlCol="0" anchor="t">
             <a:normAutofit/>
           </a:bodyPr>
           <a:lstStyle/>
@@ -10400,7 +10568,7 @@
               <a:buNone/>
             </a:pPr>
             <a:r>
-              <a:rPr lang="en-US" sz="1550" dirty="0">
+              <a:rPr lang="en-US" sz="1320" dirty="0">
                 <a:solidFill>
                   <a:srgbClr val="17364A"/>
                 </a:solidFill>
@@ -10408,43 +10576,9 @@
                 <a:ea typeface="Aptos" pitchFamily="34" charset="-122"/>
                 <a:cs typeface="Aptos" pitchFamily="34" charset="-120"/>
               </a:rPr>
-              <a:t>Level: intermediate/practitioner</a:t>
-            </a:r>
-            <a:endParaRPr lang="en-US" sz="1550" dirty="0"/>
-          </a:p>
-          <a:p>
-            <a:pPr indent="0" marL="0">
-              <a:buNone/>
-            </a:pPr>
-            <a:r>
-              <a:rPr lang="en-US" sz="1550" dirty="0">
-                <a:solidFill>
-                  <a:srgbClr val="17364A"/>
-                </a:solidFill>
-                <a:latin typeface="Aptos" pitchFamily="34" charset="0"/>
-                <a:ea typeface="Aptos" pitchFamily="34" charset="-122"/>
-                <a:cs typeface="Aptos" pitchFamily="34" charset="-120"/>
-              </a:rPr>
-              <a:t>Primary track: Epidemiology Role-Based Track</a:t>
-            </a:r>
-            <a:endParaRPr lang="en-US" sz="1550" dirty="0"/>
-          </a:p>
-          <a:p>
-            <a:pPr indent="0" marL="0">
-              <a:buNone/>
-            </a:pPr>
-            <a:r>
-              <a:rPr lang="en-US" sz="1550" dirty="0">
-                <a:solidFill>
-                  <a:srgbClr val="17364A"/>
-                </a:solidFill>
-                <a:latin typeface="Aptos" pitchFamily="34" charset="0"/>
-                <a:ea typeface="Aptos" pitchFamily="34" charset="-122"/>
-                <a:cs typeface="Aptos" pitchFamily="34" charset="-120"/>
-              </a:rPr>
-              <a:t>Appears in tracks: epidemiology, operations-and-data-quality, technical-architecture, public-health-executive-leadership</a:t>
-            </a:r>
-            <a:endParaRPr lang="en-US" sz="1550" dirty="0"/>
+              <a:t>Level: intermediate/practitioner Primary track: Epidemiology Role-Based Track Appears in tracks: epidemiology,.</a:t>
+            </a:r>
+            <a:endParaRPr lang="en-US" sz="1320" dirty="0"/>
           </a:p>
         </p:txBody>
       </p:sp>
@@ -10532,13 +10666,16 @@
           <a:ln/>
         </p:spPr>
         <p:txBody>
-          <a:bodyPr wrap="square" lIns="254" tIns="254" rIns="254" bIns="254" rtlCol="0" anchor="t">
+          <a:bodyPr wrap="square" lIns="508" tIns="508" rIns="508" bIns="508" rtlCol="0" anchor="t">
             <a:normAutofit/>
           </a:bodyPr>
           <a:lstStyle/>
           <a:p>
-            <a:r>
-              <a:rPr lang="en-US" sz="1380" dirty="0">
+            <a:pPr indent="0" marL="0">
+              <a:buNone/>
+            </a:pPr>
+            <a:r>
+              <a:rPr lang="en-US" sz="1220" dirty="0">
                 <a:solidFill>
                   <a:srgbClr val="17364A"/>
                 </a:solidFill>
@@ -10548,11 +10685,14 @@
               </a:rPr>
               <a:t>Read the module for shared vocabulary and context.</a:t>
             </a:r>
-            <a:endParaRPr lang="en-US" sz="1380" dirty="0"/>
-          </a:p>
-          <a:p>
-            <a:r>
-              <a:rPr lang="en-US" sz="1380" dirty="0">
+            <a:endParaRPr lang="en-US" sz="1220" dirty="0"/>
+          </a:p>
+          <a:p>
+            <a:pPr indent="0" marL="0">
+              <a:buNone/>
+            </a:pPr>
+            <a:r>
+              <a:rPr lang="en-US" sz="1220" dirty="0">
                 <a:solidFill>
                   <a:srgbClr val="17364A"/>
                 </a:solidFill>
@@ -10562,11 +10702,14 @@
               </a:rPr>
               <a:t>Complete the practical exercise to apply the concept.</a:t>
             </a:r>
-            <a:endParaRPr lang="en-US" sz="1380" dirty="0"/>
-          </a:p>
-          <a:p>
-            <a:r>
-              <a:rPr lang="en-US" sz="1380" dirty="0">
+            <a:endParaRPr lang="en-US" sz="1220" dirty="0"/>
+          </a:p>
+          <a:p>
+            <a:pPr indent="0" marL="0">
+              <a:buNone/>
+            </a:pPr>
+            <a:r>
+              <a:rPr lang="en-US" sz="1220" dirty="0">
                 <a:solidFill>
                   <a:srgbClr val="17364A"/>
                 </a:solidFill>
@@ -10576,7 +10719,7 @@
               </a:rPr>
               <a:t>Use the notes and references for deeper review.</a:t>
             </a:r>
-            <a:endParaRPr lang="en-US" sz="1380" dirty="0"/>
+            <a:endParaRPr lang="en-US" sz="1220" dirty="0"/>
           </a:p>
         </p:txBody>
       </p:sp>
@@ -10877,49 +11020,58 @@
           <a:ln/>
         </p:spPr>
         <p:txBody>
-          <a:bodyPr wrap="square" lIns="635" tIns="635" rIns="635" bIns="635" rtlCol="0" anchor="t">
+          <a:bodyPr wrap="square" lIns="1016" tIns="1016" rIns="1016" bIns="1016" rtlCol="0" anchor="t">
             <a:normAutofit/>
           </a:bodyPr>
           <a:lstStyle/>
           <a:p>
+            <a:pPr indent="0" marL="0">
+              <a:buNone/>
+            </a:pPr>
             <a:r>
               <a:rPr lang="en-US" sz="2100" dirty="0">
                 <a:solidFill>
-                  <a:srgbClr val="17364A"/>
-                </a:solidFill>
-                <a:latin typeface="Aptos" pitchFamily="34" charset="0"/>
-                <a:ea typeface="Aptos" pitchFamily="34" charset="-122"/>
-                <a:cs typeface="Aptos" pitchFamily="34" charset="-120"/>
-              </a:rPr>
-              <a:t>Case investigation or outbreak response workflow review</a:t>
+                  <a:srgbClr val="003A63"/>
+                </a:solidFill>
+                <a:latin typeface="Aptos" pitchFamily="34" charset="0"/>
+                <a:ea typeface="Aptos" pitchFamily="34" charset="-122"/>
+                <a:cs typeface="Aptos" pitchFamily="34" charset="-120"/>
+              </a:rPr>
+              <a:t>• Case investigation or outbreak response workflow review</a:t>
             </a:r>
             <a:endParaRPr lang="en-US" sz="2100" dirty="0"/>
           </a:p>
           <a:p>
+            <a:pPr indent="0" marL="0">
+              <a:buNone/>
+            </a:pPr>
             <a:r>
               <a:rPr lang="en-US" sz="2100" dirty="0">
                 <a:solidFill>
-                  <a:srgbClr val="17364A"/>
-                </a:solidFill>
-                <a:latin typeface="Aptos" pitchFamily="34" charset="0"/>
-                <a:ea typeface="Aptos" pitchFamily="34" charset="-122"/>
-                <a:cs typeface="Aptos" pitchFamily="34" charset="-120"/>
-              </a:rPr>
-              <a:t>Source traceability checklist</a:t>
+                  <a:srgbClr val="003A63"/>
+                </a:solidFill>
+                <a:latin typeface="Aptos" pitchFamily="34" charset="0"/>
+                <a:ea typeface="Aptos" pitchFamily="34" charset="-122"/>
+                <a:cs typeface="Aptos" pitchFamily="34" charset="-120"/>
+              </a:rPr>
+              <a:t>• Source traceability checklist</a:t>
             </a:r>
             <a:endParaRPr lang="en-US" sz="2100" dirty="0"/>
           </a:p>
           <a:p>
+            <a:pPr indent="0" marL="0">
+              <a:buNone/>
+            </a:pPr>
             <a:r>
               <a:rPr lang="en-US" sz="2100" dirty="0">
                 <a:solidFill>
-                  <a:srgbClr val="17364A"/>
-                </a:solidFill>
-                <a:latin typeface="Aptos" pitchFamily="34" charset="0"/>
-                <a:ea typeface="Aptos" pitchFamily="34" charset="-122"/>
-                <a:cs typeface="Aptos" pitchFamily="34" charset="-120"/>
-              </a:rPr>
-              <a:t>Uncertainty and missing data documentation</a:t>
+                  <a:srgbClr val="003A63"/>
+                </a:solidFill>
+                <a:latin typeface="Aptos" pitchFamily="34" charset="0"/>
+                <a:ea typeface="Aptos" pitchFamily="34" charset="-122"/>
+                <a:cs typeface="Aptos" pitchFamily="34" charset="-120"/>
+              </a:rPr>
+              <a:t>• Uncertainty and missing data documentation</a:t>
             </a:r>
             <a:endParaRPr lang="en-US" sz="2100" dirty="0"/>
           </a:p>
@@ -10999,17 +11151,17 @@
         </p:nvSpPr>
         <p:spPr>
           <a:xfrm>
-            <a:off x="7799832" y="1828800"/>
-            <a:ext cx="3145536" cy="685800"/>
-          </a:xfrm>
-          <a:prstGeom prst="rect">
-            <a:avLst/>
-          </a:prstGeom>
-          <a:noFill/>
-          <a:ln/>
-        </p:spPr>
-        <p:txBody>
-          <a:bodyPr wrap="square" lIns="0" tIns="0" rIns="0" bIns="0" rtlCol="0" anchor="t">
+            <a:off x="7799832" y="1801368"/>
+            <a:ext cx="3145536" cy="758952"/>
+          </a:xfrm>
+          <a:prstGeom prst="rect">
+            <a:avLst/>
+          </a:prstGeom>
+          <a:noFill/>
+          <a:ln/>
+        </p:spPr>
+        <p:txBody>
+          <a:bodyPr wrap="square" lIns="254" tIns="254" rIns="254" bIns="254" rtlCol="0" anchor="t">
             <a:normAutofit/>
           </a:bodyPr>
           <a:lstStyle/>
@@ -11018,7 +11170,7 @@
               <a:buNone/>
             </a:pPr>
             <a:r>
-              <a:rPr lang="en-US" sz="1550" dirty="0">
+              <a:rPr lang="en-US" sz="1320" dirty="0">
                 <a:solidFill>
                   <a:srgbClr val="17364A"/>
                 </a:solidFill>
@@ -11028,7 +11180,7 @@
               </a:rPr>
               <a:t>Case investigation or outbreak response workflow review</a:t>
             </a:r>
-            <a:endParaRPr lang="en-US" sz="1550" dirty="0"/>
+            <a:endParaRPr lang="en-US" sz="1320" dirty="0"/>
           </a:p>
         </p:txBody>
       </p:sp>
@@ -11116,13 +11268,16 @@
           <a:ln/>
         </p:spPr>
         <p:txBody>
-          <a:bodyPr wrap="square" lIns="254" tIns="254" rIns="254" bIns="254" rtlCol="0" anchor="t">
+          <a:bodyPr wrap="square" lIns="508" tIns="508" rIns="508" bIns="508" rtlCol="0" anchor="t">
             <a:normAutofit/>
           </a:bodyPr>
           <a:lstStyle/>
           <a:p>
-            <a:r>
-              <a:rPr lang="en-US" sz="1380" dirty="0">
+            <a:pPr indent="0" marL="0">
+              <a:buNone/>
+            </a:pPr>
+            <a:r>
+              <a:rPr lang="en-US" sz="1220" dirty="0">
                 <a:solidFill>
                   <a:srgbClr val="17364A"/>
                 </a:solidFill>
@@ -11132,11 +11287,14 @@
               </a:rPr>
               <a:t>Equity and escalation review</a:t>
             </a:r>
-            <a:endParaRPr lang="en-US" sz="1380" dirty="0"/>
-          </a:p>
-          <a:p>
-            <a:r>
-              <a:rPr lang="en-US" sz="1380" dirty="0">
+            <a:endParaRPr lang="en-US" sz="1220" dirty="0"/>
+          </a:p>
+          <a:p>
+            <a:pPr indent="0" marL="0">
+              <a:buNone/>
+            </a:pPr>
+            <a:r>
+              <a:rPr lang="en-US" sz="1220" dirty="0">
                 <a:solidFill>
                   <a:srgbClr val="17364A"/>
                 </a:solidFill>
@@ -11146,7 +11304,7 @@
               </a:rPr>
               <a:t>Monitoring indicators</a:t>
             </a:r>
-            <a:endParaRPr lang="en-US" sz="1380" dirty="0"/>
+            <a:endParaRPr lang="en-US" sz="1220" dirty="0"/>
           </a:p>
         </p:txBody>
       </p:sp>
@@ -11224,17 +11382,17 @@
         </p:nvSpPr>
         <p:spPr>
           <a:xfrm>
-            <a:off x="7799832" y="5001768"/>
-            <a:ext cx="3145536" cy="502920"/>
-          </a:xfrm>
-          <a:prstGeom prst="rect">
-            <a:avLst/>
-          </a:prstGeom>
-          <a:noFill/>
-          <a:ln/>
-        </p:spPr>
-        <p:txBody>
-          <a:bodyPr wrap="square" lIns="0" tIns="0" rIns="0" bIns="0" rtlCol="0" anchor="t">
+            <a:off x="7799832" y="4974336"/>
+            <a:ext cx="3145536" cy="576072"/>
+          </a:xfrm>
+          <a:prstGeom prst="rect">
+            <a:avLst/>
+          </a:prstGeom>
+          <a:noFill/>
+          <a:ln/>
+        </p:spPr>
+        <p:txBody>
+          <a:bodyPr wrap="square" lIns="254" tIns="254" rIns="254" bIns="254" rtlCol="0" anchor="t">
             <a:normAutofit/>
           </a:bodyPr>
           <a:lstStyle/>
@@ -11243,7 +11401,7 @@
               <a:buNone/>
             </a:pPr>
             <a:r>
-              <a:rPr lang="en-US" sz="1550" dirty="0">
+              <a:rPr lang="en-US" sz="1320" dirty="0">
                 <a:solidFill>
                   <a:srgbClr val="17364A"/>
                 </a:solidFill>
@@ -11251,9 +11409,9 @@
                 <a:ea typeface="Aptos" pitchFamily="34" charset="-122"/>
                 <a:cs typeface="Aptos" pitchFamily="34" charset="-120"/>
               </a:rPr>
-              <a:t>Use the assignment to test whether you can explain the concept, apply it to a realistic public health situation, and identify what would need review before the work moves forward.</a:t>
-            </a:r>
-            <a:endParaRPr lang="en-US" sz="1550" dirty="0"/>
+              <a:t>Use the assignment to test whether you can explain the concept, apply it to a realistic public health situation, and.</a:t>
+            </a:r>
+            <a:endParaRPr lang="en-US" sz="1320" dirty="0"/>
           </a:p>
         </p:txBody>
       </p:sp>
@@ -11554,49 +11712,58 @@
           <a:ln/>
         </p:spPr>
         <p:txBody>
-          <a:bodyPr wrap="square" lIns="635" tIns="635" rIns="635" bIns="635" rtlCol="0" anchor="t">
+          <a:bodyPr wrap="square" lIns="1016" tIns="1016" rIns="1016" bIns="1016" rtlCol="0" anchor="t">
             <a:normAutofit/>
           </a:bodyPr>
           <a:lstStyle/>
           <a:p>
+            <a:pPr indent="0" marL="0">
+              <a:buNone/>
+            </a:pPr>
             <a:r>
               <a:rPr lang="en-US" sz="2100" dirty="0">
                 <a:solidFill>
-                  <a:srgbClr val="17364A"/>
-                </a:solidFill>
-                <a:latin typeface="Aptos" pitchFamily="34" charset="0"/>
-                <a:ea typeface="Aptos" pitchFamily="34" charset="-122"/>
-                <a:cs typeface="Aptos" pitchFamily="34" charset="-120"/>
-              </a:rPr>
-              <a:t>1. What should AI outputs do in case investigation?</a:t>
+                  <a:srgbClr val="003A63"/>
+                </a:solidFill>
+                <a:latin typeface="Aptos" pitchFamily="34" charset="0"/>
+                <a:ea typeface="Aptos" pitchFamily="34" charset="-122"/>
+                <a:cs typeface="Aptos" pitchFamily="34" charset="-120"/>
+              </a:rPr>
+              <a:t>• 1. What should AI outputs do in case investigation?</a:t>
             </a:r>
             <a:endParaRPr lang="en-US" sz="2100" dirty="0"/>
           </a:p>
           <a:p>
+            <a:pPr indent="0" marL="0">
+              <a:buNone/>
+            </a:pPr>
             <a:r>
               <a:rPr lang="en-US" sz="2100" dirty="0">
                 <a:solidFill>
-                  <a:srgbClr val="17364A"/>
-                </a:solidFill>
-                <a:latin typeface="Aptos" pitchFamily="34" charset="0"/>
-                <a:ea typeface="Aptos" pitchFamily="34" charset="-122"/>
-                <a:cs typeface="Aptos" pitchFamily="34" charset="-120"/>
-              </a:rPr>
-              <a:t>2. What is an outbreak signal?</a:t>
+                  <a:srgbClr val="003A63"/>
+                </a:solidFill>
+                <a:latin typeface="Aptos" pitchFamily="34" charset="0"/>
+                <a:ea typeface="Aptos" pitchFamily="34" charset="-122"/>
+                <a:cs typeface="Aptos" pitchFamily="34" charset="-120"/>
+              </a:rPr>
+              <a:t>• 2. What is an outbreak signal?</a:t>
             </a:r>
             <a:endParaRPr lang="en-US" sz="2100" dirty="0"/>
           </a:p>
           <a:p>
+            <a:pPr indent="0" marL="0">
+              <a:buNone/>
+            </a:pPr>
             <a:r>
               <a:rPr lang="en-US" sz="2100" dirty="0">
                 <a:solidFill>
-                  <a:srgbClr val="17364A"/>
-                </a:solidFill>
-                <a:latin typeface="Aptos" pitchFamily="34" charset="0"/>
-                <a:ea typeface="Aptos" pitchFamily="34" charset="-122"/>
-                <a:cs typeface="Aptos" pitchFamily="34" charset="-120"/>
-              </a:rPr>
-              <a:t>3. Why is uncertainty documentation important during response?</a:t>
+                  <a:srgbClr val="003A63"/>
+                </a:solidFill>
+                <a:latin typeface="Aptos" pitchFamily="34" charset="0"/>
+                <a:ea typeface="Aptos" pitchFamily="34" charset="-122"/>
+                <a:cs typeface="Aptos" pitchFamily="34" charset="-120"/>
+              </a:rPr>
+              <a:t>• 3. Why is uncertainty documentation important during response?</a:t>
             </a:r>
             <a:endParaRPr lang="en-US" sz="2100" dirty="0"/>
           </a:p>
@@ -11676,17 +11843,17 @@
         </p:nvSpPr>
         <p:spPr>
           <a:xfrm>
-            <a:off x="7799832" y="1828800"/>
-            <a:ext cx="3145536" cy="685800"/>
-          </a:xfrm>
-          <a:prstGeom prst="rect">
-            <a:avLst/>
-          </a:prstGeom>
-          <a:noFill/>
-          <a:ln/>
-        </p:spPr>
-        <p:txBody>
-          <a:bodyPr wrap="square" lIns="0" tIns="0" rIns="0" bIns="0" rtlCol="0" anchor="t">
+            <a:off x="7799832" y="1801368"/>
+            <a:ext cx="3145536" cy="758952"/>
+          </a:xfrm>
+          <a:prstGeom prst="rect">
+            <a:avLst/>
+          </a:prstGeom>
+          <a:noFill/>
+          <a:ln/>
+        </p:spPr>
+        <p:txBody>
+          <a:bodyPr wrap="square" lIns="254" tIns="254" rIns="254" bIns="254" rtlCol="0" anchor="t">
             <a:normAutofit/>
           </a:bodyPr>
           <a:lstStyle/>
@@ -11695,7 +11862,7 @@
               <a:buNone/>
             </a:pPr>
             <a:r>
-              <a:rPr lang="en-US" sz="1550" dirty="0">
+              <a:rPr lang="en-US" sz="1320" dirty="0">
                 <a:solidFill>
                   <a:srgbClr val="17364A"/>
                 </a:solidFill>
@@ -11705,7 +11872,7 @@
               </a:rPr>
               <a:t>1. What should AI outputs do in case investigation?</a:t>
             </a:r>
-            <a:endParaRPr lang="en-US" sz="1550" dirty="0"/>
+            <a:endParaRPr lang="en-US" sz="1320" dirty="0"/>
           </a:p>
         </p:txBody>
       </p:sp>
@@ -11793,13 +11960,16 @@
           <a:ln/>
         </p:spPr>
         <p:txBody>
-          <a:bodyPr wrap="square" lIns="254" tIns="254" rIns="254" bIns="254" rtlCol="0" anchor="t">
+          <a:bodyPr wrap="square" lIns="508" tIns="508" rIns="508" bIns="508" rtlCol="0" anchor="t">
             <a:normAutofit/>
           </a:bodyPr>
           <a:lstStyle/>
           <a:p>
-            <a:r>
-              <a:rPr lang="en-US" sz="1380" dirty="0">
+            <a:pPr indent="0" marL="0">
+              <a:buNone/>
+            </a:pPr>
+            <a:r>
+              <a:rPr lang="en-US" sz="1220" dirty="0">
                 <a:solidFill>
                   <a:srgbClr val="17364A"/>
                 </a:solidFill>
@@ -11809,11 +11979,14 @@
               </a:rPr>
               <a:t>1.</a:t>
             </a:r>
-            <a:endParaRPr lang="en-US" sz="1380" dirty="0"/>
-          </a:p>
-          <a:p>
-            <a:r>
-              <a:rPr lang="en-US" sz="1380" dirty="0">
+            <a:endParaRPr lang="en-US" sz="1220" dirty="0"/>
+          </a:p>
+          <a:p>
+            <a:pPr indent="0" marL="0">
+              <a:buNone/>
+            </a:pPr>
+            <a:r>
+              <a:rPr lang="en-US" sz="1220" dirty="0">
                 <a:solidFill>
                   <a:srgbClr val="17364A"/>
                 </a:solidFill>
@@ -11823,11 +11996,14 @@
               </a:rPr>
               <a:t>What should AI outputs do in case investigation?</a:t>
             </a:r>
-            <a:endParaRPr lang="en-US" sz="1380" dirty="0"/>
-          </a:p>
-          <a:p>
-            <a:r>
-              <a:rPr lang="en-US" sz="1380" dirty="0">
+            <a:endParaRPr lang="en-US" sz="1220" dirty="0"/>
+          </a:p>
+          <a:p>
+            <a:pPr indent="0" marL="0">
+              <a:buNone/>
+            </a:pPr>
+            <a:r>
+              <a:rPr lang="en-US" sz="1220" dirty="0">
                 <a:solidFill>
                   <a:srgbClr val="17364A"/>
                 </a:solidFill>
@@ -11837,7 +12013,7 @@
               </a:rPr>
               <a:t>2.</a:t>
             </a:r>
-            <a:endParaRPr lang="en-US" sz="1380" dirty="0"/>
+            <a:endParaRPr lang="en-US" sz="1220" dirty="0"/>
           </a:p>
         </p:txBody>
       </p:sp>
@@ -11915,17 +12091,17 @@
         </p:nvSpPr>
         <p:spPr>
           <a:xfrm>
-            <a:off x="7799832" y="5001768"/>
-            <a:ext cx="3145536" cy="502920"/>
-          </a:xfrm>
-          <a:prstGeom prst="rect">
-            <a:avLst/>
-          </a:prstGeom>
-          <a:noFill/>
-          <a:ln/>
-        </p:spPr>
-        <p:txBody>
-          <a:bodyPr wrap="square" lIns="0" tIns="0" rIns="0" bIns="0" rtlCol="0" anchor="t">
+            <a:off x="7799832" y="4974336"/>
+            <a:ext cx="3145536" cy="576072"/>
+          </a:xfrm>
+          <a:prstGeom prst="rect">
+            <a:avLst/>
+          </a:prstGeom>
+          <a:noFill/>
+          <a:ln/>
+        </p:spPr>
+        <p:txBody>
+          <a:bodyPr wrap="square" lIns="254" tIns="254" rIns="254" bIns="254" rtlCol="0" anchor="t">
             <a:normAutofit/>
           </a:bodyPr>
           <a:lstStyle/>
@@ -11934,7 +12110,7 @@
               <a:buNone/>
             </a:pPr>
             <a:r>
-              <a:rPr lang="en-US" sz="1550" dirty="0">
+              <a:rPr lang="en-US" sz="1320" dirty="0">
                 <a:solidFill>
                   <a:srgbClr val="17364A"/>
                 </a:solidFill>
@@ -11942,9 +12118,9 @@
                 <a:ea typeface="Aptos" pitchFamily="34" charset="-122"/>
                 <a:cs typeface="Aptos" pitchFamily="34" charset="-120"/>
               </a:rPr>
-              <a:t>Use the assignment to test whether you can explain the concept, apply it to a realistic public health situation, and identify what would need review before the work moves forward.</a:t>
-            </a:r>
-            <a:endParaRPr lang="en-US" sz="1550" dirty="0"/>
+              <a:t>Use the assignment to test whether you can explain the concept, apply it to a realistic public health situation, and.</a:t>
+            </a:r>
+            <a:endParaRPr lang="en-US" sz="1320" dirty="0"/>
           </a:p>
         </p:txBody>
       </p:sp>
@@ -12245,49 +12421,58 @@
           <a:ln/>
         </p:spPr>
         <p:txBody>
-          <a:bodyPr wrap="square" lIns="635" tIns="635" rIns="635" bIns="635" rtlCol="0" anchor="t">
+          <a:bodyPr wrap="square" lIns="1016" tIns="1016" rIns="1016" bIns="1016" rtlCol="0" anchor="t">
             <a:normAutofit/>
           </a:bodyPr>
           <a:lstStyle/>
           <a:p>
+            <a:pPr indent="0" marL="0">
+              <a:buNone/>
+            </a:pPr>
             <a:r>
               <a:rPr lang="en-US" sz="2100" dirty="0">
                 <a:solidFill>
-                  <a:srgbClr val="17364A"/>
-                </a:solidFill>
-                <a:latin typeface="Aptos" pitchFamily="34" charset="0"/>
-                <a:ea typeface="Aptos" pitchFamily="34" charset="-122"/>
-                <a:cs typeface="Aptos" pitchFamily="34" charset="-120"/>
-              </a:rPr>
-              <a:t>NIST Artificial Intelligence Risk Management Framework:.</a:t>
+                  <a:srgbClr val="003A63"/>
+                </a:solidFill>
+                <a:latin typeface="Aptos" pitchFamily="34" charset="0"/>
+                <a:ea typeface="Aptos" pitchFamily="34" charset="-122"/>
+                <a:cs typeface="Aptos" pitchFamily="34" charset="-120"/>
+              </a:rPr>
+              <a:t>• NIST Artificial Intelligence Risk Management Framework:.</a:t>
             </a:r>
             <a:endParaRPr lang="en-US" sz="2100" dirty="0"/>
           </a:p>
           <a:p>
+            <a:pPr indent="0" marL="0">
+              <a:buNone/>
+            </a:pPr>
             <a:r>
               <a:rPr lang="en-US" sz="2100" dirty="0">
                 <a:solidFill>
-                  <a:srgbClr val="17364A"/>
-                </a:solidFill>
-                <a:latin typeface="Aptos" pitchFamily="34" charset="0"/>
-                <a:ea typeface="Aptos" pitchFamily="34" charset="-122"/>
-                <a:cs typeface="Aptos" pitchFamily="34" charset="-120"/>
-              </a:rPr>
-              <a:t>NIST Generative AI Profile:.</a:t>
+                  <a:srgbClr val="003A63"/>
+                </a:solidFill>
+                <a:latin typeface="Aptos" pitchFamily="34" charset="0"/>
+                <a:ea typeface="Aptos" pitchFamily="34" charset="-122"/>
+                <a:cs typeface="Aptos" pitchFamily="34" charset="-120"/>
+              </a:rPr>
+              <a:t>• NIST Generative AI Profile:.</a:t>
             </a:r>
             <a:endParaRPr lang="en-US" sz="2100" dirty="0"/>
           </a:p>
           <a:p>
+            <a:pPr indent="0" marL="0">
+              <a:buNone/>
+            </a:pPr>
             <a:r>
               <a:rPr lang="en-US" sz="2100" dirty="0">
                 <a:solidFill>
-                  <a:srgbClr val="17364A"/>
-                </a:solidFill>
-                <a:latin typeface="Aptos" pitchFamily="34" charset="0"/>
-                <a:ea typeface="Aptos" pitchFamily="34" charset="-122"/>
-                <a:cs typeface="Aptos" pitchFamily="34" charset="-120"/>
-              </a:rPr>
-              <a:t>CDC Public Health Data Strategy and Data Modernization resources:.</a:t>
+                  <a:srgbClr val="003A63"/>
+                </a:solidFill>
+                <a:latin typeface="Aptos" pitchFamily="34" charset="0"/>
+                <a:ea typeface="Aptos" pitchFamily="34" charset="-122"/>
+                <a:cs typeface="Aptos" pitchFamily="34" charset="-120"/>
+              </a:rPr>
+              <a:t>• CDC Public Health Data Strategy and Data Modernization resources:.</a:t>
             </a:r>
             <a:endParaRPr lang="en-US" sz="2100" dirty="0"/>
           </a:p>
@@ -12367,17 +12552,17 @@
         </p:nvSpPr>
         <p:spPr>
           <a:xfrm>
-            <a:off x="7799832" y="1828800"/>
-            <a:ext cx="3145536" cy="685800"/>
-          </a:xfrm>
-          <a:prstGeom prst="rect">
-            <a:avLst/>
-          </a:prstGeom>
-          <a:noFill/>
-          <a:ln/>
-        </p:spPr>
-        <p:txBody>
-          <a:bodyPr wrap="square" lIns="0" tIns="0" rIns="0" bIns="0" rtlCol="0" anchor="t">
+            <a:off x="7799832" y="1801368"/>
+            <a:ext cx="3145536" cy="758952"/>
+          </a:xfrm>
+          <a:prstGeom prst="rect">
+            <a:avLst/>
+          </a:prstGeom>
+          <a:noFill/>
+          <a:ln/>
+        </p:spPr>
+        <p:txBody>
+          <a:bodyPr wrap="square" lIns="254" tIns="254" rIns="254" bIns="254" rtlCol="0" anchor="t">
             <a:normAutofit/>
           </a:bodyPr>
           <a:lstStyle/>
@@ -12386,7 +12571,7 @@
               <a:buNone/>
             </a:pPr>
             <a:r>
-              <a:rPr lang="en-US" sz="1550" dirty="0">
+              <a:rPr lang="en-US" sz="1320" dirty="0">
                 <a:solidFill>
                   <a:srgbClr val="17364A"/>
                 </a:solidFill>
@@ -12396,7 +12581,7 @@
               </a:rPr>
               <a:t>NIST Artificial Intelligence Risk Management Framework:.</a:t>
             </a:r>
-            <a:endParaRPr lang="en-US" sz="1550" dirty="0"/>
+            <a:endParaRPr lang="en-US" sz="1320" dirty="0"/>
           </a:p>
         </p:txBody>
       </p:sp>
@@ -12484,13 +12669,16 @@
           <a:ln/>
         </p:spPr>
         <p:txBody>
-          <a:bodyPr wrap="square" lIns="254" tIns="254" rIns="254" bIns="254" rtlCol="0" anchor="t">
+          <a:bodyPr wrap="square" lIns="508" tIns="508" rIns="508" bIns="508" rtlCol="0" anchor="t">
             <a:normAutofit/>
           </a:bodyPr>
           <a:lstStyle/>
           <a:p>
-            <a:r>
-              <a:rPr lang="en-US" sz="1380" dirty="0">
+            <a:pPr indent="0" marL="0">
+              <a:buNone/>
+            </a:pPr>
+            <a:r>
+              <a:rPr lang="en-US" sz="1220" dirty="0">
                 <a:solidFill>
                   <a:srgbClr val="17364A"/>
                 </a:solidFill>
@@ -12500,11 +12688,14 @@
               </a:rPr>
               <a:t>NIST Artificial Intelligence Risk Management Framework:.</a:t>
             </a:r>
-            <a:endParaRPr lang="en-US" sz="1380" dirty="0"/>
-          </a:p>
-          <a:p>
-            <a:r>
-              <a:rPr lang="en-US" sz="1380" dirty="0">
+            <a:endParaRPr lang="en-US" sz="1220" dirty="0"/>
+          </a:p>
+          <a:p>
+            <a:pPr indent="0" marL="0">
+              <a:buNone/>
+            </a:pPr>
+            <a:r>
+              <a:rPr lang="en-US" sz="1220" dirty="0">
                 <a:solidFill>
                   <a:srgbClr val="17364A"/>
                 </a:solidFill>
@@ -12514,11 +12705,14 @@
               </a:rPr>
               <a:t>OWASP guidance for LLM application security</a:t>
             </a:r>
-            <a:endParaRPr lang="en-US" sz="1380" dirty="0"/>
-          </a:p>
-          <a:p>
-            <a:r>
-              <a:rPr lang="en-US" sz="1380" dirty="0">
+            <a:endParaRPr lang="en-US" sz="1220" dirty="0"/>
+          </a:p>
+          <a:p>
+            <a:pPr indent="0" marL="0">
+              <a:buNone/>
+            </a:pPr>
+            <a:r>
+              <a:rPr lang="en-US" sz="1220" dirty="0">
                 <a:solidFill>
                   <a:srgbClr val="17364A"/>
                 </a:solidFill>
@@ -12526,9 +12720,9 @@
                 <a:ea typeface="Aptos" pitchFamily="34" charset="-122"/>
                 <a:cs typeface="Aptos" pitchFamily="34" charset="-120"/>
               </a:rPr>
-              <a:t>Agency policies for privacy, cybersecurity, records, procurement, accessibility, and.</a:t>
-            </a:r>
-            <a:endParaRPr lang="en-US" sz="1380" dirty="0"/>
+              <a:t>Agency policies for privacy, cybersecurity, records, procurement,.</a:t>
+            </a:r>
+            <a:endParaRPr lang="en-US" sz="1220" dirty="0"/>
           </a:p>
         </p:txBody>
       </p:sp>
@@ -12606,17 +12800,17 @@
         </p:nvSpPr>
         <p:spPr>
           <a:xfrm>
-            <a:off x="7799832" y="5001768"/>
-            <a:ext cx="3145536" cy="502920"/>
-          </a:xfrm>
-          <a:prstGeom prst="rect">
-            <a:avLst/>
-          </a:prstGeom>
-          <a:noFill/>
-          <a:ln/>
-        </p:spPr>
-        <p:txBody>
-          <a:bodyPr wrap="square" lIns="0" tIns="0" rIns="0" bIns="0" rtlCol="0" anchor="t">
+            <a:off x="7799832" y="4974336"/>
+            <a:ext cx="3145536" cy="576072"/>
+          </a:xfrm>
+          <a:prstGeom prst="rect">
+            <a:avLst/>
+          </a:prstGeom>
+          <a:noFill/>
+          <a:ln/>
+        </p:spPr>
+        <p:txBody>
+          <a:bodyPr wrap="square" lIns="254" tIns="254" rIns="254" bIns="254" rtlCol="0" anchor="t">
             <a:normAutofit/>
           </a:bodyPr>
           <a:lstStyle/>
@@ -12625,7 +12819,7 @@
               <a:buNone/>
             </a:pPr>
             <a:r>
-              <a:rPr lang="en-US" sz="1550" dirty="0">
+              <a:rPr lang="en-US" sz="1320" dirty="0">
                 <a:solidFill>
                   <a:srgbClr val="17364A"/>
                 </a:solidFill>
@@ -12633,9 +12827,9 @@
                 <a:ea typeface="Aptos" pitchFamily="34" charset="-122"/>
                 <a:cs typeface="Aptos" pitchFamily="34" charset="-120"/>
               </a:rPr>
-              <a:t>Connect the concept to public health purpose, responsible use, required safeguards, documentation, and the next action a department should take.</a:t>
-            </a:r>
-            <a:endParaRPr lang="en-US" sz="1550" dirty="0"/>
+              <a:t>Connect the concept to public health purpose, responsible use, required safeguards, documentation, and the next action a.</a:t>
+            </a:r>
+            <a:endParaRPr lang="en-US" sz="1320" dirty="0"/>
           </a:p>
         </p:txBody>
       </p:sp>
@@ -12936,21 +13130,24 @@
           <a:ln/>
         </p:spPr>
         <p:txBody>
-          <a:bodyPr wrap="square" lIns="635" tIns="635" rIns="635" bIns="635" rtlCol="0" anchor="t">
+          <a:bodyPr wrap="square" lIns="1016" tIns="1016" rIns="1016" bIns="1016" rtlCol="0" anchor="t">
             <a:normAutofit/>
           </a:bodyPr>
           <a:lstStyle/>
           <a:p>
+            <a:pPr indent="0" marL="0">
+              <a:buNone/>
+            </a:pPr>
             <a:r>
               <a:rPr lang="en-US" sz="2100" dirty="0">
                 <a:solidFill>
-                  <a:srgbClr val="17364A"/>
-                </a:solidFill>
-                <a:latin typeface="Aptos" pitchFamily="34" charset="0"/>
-                <a:ea typeface="Aptos" pitchFamily="34" charset="-122"/>
-                <a:cs typeface="Aptos" pitchFamily="34" charset="-120"/>
-              </a:rPr>
-              <a:t>Relevant public health program SOPs, data governance documentation, and implementation plans</a:t>
+                  <a:srgbClr val="003A63"/>
+                </a:solidFill>
+                <a:latin typeface="Aptos" pitchFamily="34" charset="0"/>
+                <a:ea typeface="Aptos" pitchFamily="34" charset="-122"/>
+                <a:cs typeface="Aptos" pitchFamily="34" charset="-120"/>
+              </a:rPr>
+              <a:t>• Relevant public health program SOPs, data governance documentation, and implementation plans</a:t>
             </a:r>
             <a:endParaRPr lang="en-US" sz="2100" dirty="0"/>
           </a:p>
@@ -13030,17 +13227,17 @@
         </p:nvSpPr>
         <p:spPr>
           <a:xfrm>
-            <a:off x="7799832" y="1828800"/>
-            <a:ext cx="3145536" cy="685800"/>
-          </a:xfrm>
-          <a:prstGeom prst="rect">
-            <a:avLst/>
-          </a:prstGeom>
-          <a:noFill/>
-          <a:ln/>
-        </p:spPr>
-        <p:txBody>
-          <a:bodyPr wrap="square" lIns="0" tIns="0" rIns="0" bIns="0" rtlCol="0" anchor="t">
+            <a:off x="7799832" y="1801368"/>
+            <a:ext cx="3145536" cy="758952"/>
+          </a:xfrm>
+          <a:prstGeom prst="rect">
+            <a:avLst/>
+          </a:prstGeom>
+          <a:noFill/>
+          <a:ln/>
+        </p:spPr>
+        <p:txBody>
+          <a:bodyPr wrap="square" lIns="254" tIns="254" rIns="254" bIns="254" rtlCol="0" anchor="t">
             <a:normAutofit/>
           </a:bodyPr>
           <a:lstStyle/>
@@ -13049,7 +13246,7 @@
               <a:buNone/>
             </a:pPr>
             <a:r>
-              <a:rPr lang="en-US" sz="1550" dirty="0">
+              <a:rPr lang="en-US" sz="1320" dirty="0">
                 <a:solidFill>
                   <a:srgbClr val="17364A"/>
                 </a:solidFill>
@@ -13059,7 +13256,7 @@
               </a:rPr>
               <a:t>Relevant public health program SOPs, data governance documentation, and implementation plans</a:t>
             </a:r>
-            <a:endParaRPr lang="en-US" sz="1550" dirty="0"/>
+            <a:endParaRPr lang="en-US" sz="1320" dirty="0"/>
           </a:p>
         </p:txBody>
       </p:sp>
@@ -13147,13 +13344,16 @@
           <a:ln/>
         </p:spPr>
         <p:txBody>
-          <a:bodyPr wrap="square" lIns="254" tIns="254" rIns="254" bIns="254" rtlCol="0" anchor="t">
+          <a:bodyPr wrap="square" lIns="508" tIns="508" rIns="508" bIns="508" rtlCol="0" anchor="t">
             <a:normAutofit/>
           </a:bodyPr>
           <a:lstStyle/>
           <a:p>
-            <a:r>
-              <a:rPr lang="en-US" sz="1380" dirty="0">
+            <a:pPr indent="0" marL="0">
+              <a:buNone/>
+            </a:pPr>
+            <a:r>
+              <a:rPr lang="en-US" sz="1220" dirty="0">
                 <a:solidFill>
                   <a:srgbClr val="17364A"/>
                 </a:solidFill>
@@ -13161,9 +13361,9 @@
                 <a:ea typeface="Aptos" pitchFamily="34" charset="-122"/>
                 <a:cs typeface="Aptos" pitchFamily="34" charset="-120"/>
               </a:rPr>
-              <a:t>Relevant public health program SOPs, data governance documentation, and implementation plans</a:t>
-            </a:r>
-            <a:endParaRPr lang="en-US" sz="1380" dirty="0"/>
+              <a:t>Relevant public health program SOPs, data governance.</a:t>
+            </a:r>
+            <a:endParaRPr lang="en-US" sz="1220" dirty="0"/>
           </a:p>
         </p:txBody>
       </p:sp>
@@ -13241,17 +13441,17 @@
         </p:nvSpPr>
         <p:spPr>
           <a:xfrm>
-            <a:off x="7799832" y="5001768"/>
-            <a:ext cx="3145536" cy="502920"/>
-          </a:xfrm>
-          <a:prstGeom prst="rect">
-            <a:avLst/>
-          </a:prstGeom>
-          <a:noFill/>
-          <a:ln/>
-        </p:spPr>
-        <p:txBody>
-          <a:bodyPr wrap="square" lIns="0" tIns="0" rIns="0" bIns="0" rtlCol="0" anchor="t">
+            <a:off x="7799832" y="4974336"/>
+            <a:ext cx="3145536" cy="576072"/>
+          </a:xfrm>
+          <a:prstGeom prst="rect">
+            <a:avLst/>
+          </a:prstGeom>
+          <a:noFill/>
+          <a:ln/>
+        </p:spPr>
+        <p:txBody>
+          <a:bodyPr wrap="square" lIns="254" tIns="254" rIns="254" bIns="254" rtlCol="0" anchor="t">
             <a:normAutofit/>
           </a:bodyPr>
           <a:lstStyle/>
@@ -13260,7 +13460,7 @@
               <a:buNone/>
             </a:pPr>
             <a:r>
-              <a:rPr lang="en-US" sz="1550" dirty="0">
+              <a:rPr lang="en-US" sz="1320" dirty="0">
                 <a:solidFill>
                   <a:srgbClr val="17364A"/>
                 </a:solidFill>
@@ -13268,9 +13468,9 @@
                 <a:ea typeface="Aptos" pitchFamily="34" charset="-122"/>
                 <a:cs typeface="Aptos" pitchFamily="34" charset="-120"/>
               </a:rPr>
-              <a:t>Connect the concept to public health purpose, responsible use, required safeguards, documentation, and the next action a department should take.</a:t>
-            </a:r>
-            <a:endParaRPr lang="en-US" sz="1550" dirty="0"/>
+              <a:t>Connect the concept to public health purpose, responsible use, required safeguards, documentation, and the next action a.</a:t>
+            </a:r>
+            <a:endParaRPr lang="en-US" sz="1320" dirty="0"/>
           </a:p>
         </p:txBody>
       </p:sp>
@@ -13571,63 +13771,75 @@
           <a:ln/>
         </p:spPr>
         <p:txBody>
-          <a:bodyPr wrap="square" lIns="635" tIns="635" rIns="635" bIns="635" rtlCol="0" anchor="t">
+          <a:bodyPr wrap="square" lIns="1016" tIns="1016" rIns="1016" bIns="1016" rtlCol="0" anchor="t">
             <a:normAutofit/>
           </a:bodyPr>
           <a:lstStyle/>
           <a:p>
+            <a:pPr indent="0" marL="0">
+              <a:buNone/>
+            </a:pPr>
             <a:r>
               <a:rPr lang="en-US" sz="1900" dirty="0">
                 <a:solidFill>
-                  <a:srgbClr val="17364A"/>
-                </a:solidFill>
-                <a:latin typeface="Aptos" pitchFamily="34" charset="0"/>
-                <a:ea typeface="Aptos" pitchFamily="34" charset="-122"/>
-                <a:cs typeface="Aptos" pitchFamily="34" charset="-120"/>
-              </a:rPr>
-              <a:t>Play 7: Prioritize Use Cases - This lesson informs Play 7 by helping learners connect the lesson topic to.</a:t>
+                  <a:srgbClr val="003A63"/>
+                </a:solidFill>
+                <a:latin typeface="Aptos" pitchFamily="34" charset="0"/>
+                <a:ea typeface="Aptos" pitchFamily="34" charset="-122"/>
+                <a:cs typeface="Aptos" pitchFamily="34" charset="-120"/>
+              </a:rPr>
+              <a:t>• Play 7: Prioritize Use Cases - This lesson informs Play 7 by helping learners connect the.</a:t>
             </a:r>
             <a:endParaRPr lang="en-US" sz="1900" dirty="0"/>
           </a:p>
           <a:p>
+            <a:pPr indent="0" marL="0">
+              <a:buNone/>
+            </a:pPr>
             <a:r>
               <a:rPr lang="en-US" sz="1900" dirty="0">
                 <a:solidFill>
-                  <a:srgbClr val="17364A"/>
-                </a:solidFill>
-                <a:latin typeface="Aptos" pitchFamily="34" charset="0"/>
-                <a:ea typeface="Aptos" pitchFamily="34" charset="-122"/>
-                <a:cs typeface="Aptos" pitchFamily="34" charset="-120"/>
-              </a:rPr>
-              <a:t>Play 11: Build and Deploy AI Solutions - This lesson informs Play 11 by helping learners connect the lesson.</a:t>
+                  <a:srgbClr val="003A63"/>
+                </a:solidFill>
+                <a:latin typeface="Aptos" pitchFamily="34" charset="0"/>
+                <a:ea typeface="Aptos" pitchFamily="34" charset="-122"/>
+                <a:cs typeface="Aptos" pitchFamily="34" charset="-120"/>
+              </a:rPr>
+              <a:t>• Play 11: Build and Deploy AI Solutions - This lesson informs Play 11 by helping learners.</a:t>
             </a:r>
             <a:endParaRPr lang="en-US" sz="1900" dirty="0"/>
           </a:p>
           <a:p>
+            <a:pPr indent="0" marL="0">
+              <a:buNone/>
+            </a:pPr>
             <a:r>
               <a:rPr lang="en-US" sz="1900" dirty="0">
                 <a:solidFill>
-                  <a:srgbClr val="17364A"/>
-                </a:solidFill>
-                <a:latin typeface="Aptos" pitchFamily="34" charset="0"/>
-                <a:ea typeface="Aptos" pitchFamily="34" charset="-122"/>
-                <a:cs typeface="Aptos" pitchFamily="34" charset="-120"/>
-              </a:rPr>
-              <a:t>Play 1: Vision &amp; Guardrails - This lesson informs Play 1 by helping learners connect the lesson topic to.</a:t>
+                  <a:srgbClr val="003A63"/>
+                </a:solidFill>
+                <a:latin typeface="Aptos" pitchFamily="34" charset="0"/>
+                <a:ea typeface="Aptos" pitchFamily="34" charset="-122"/>
+                <a:cs typeface="Aptos" pitchFamily="34" charset="-120"/>
+              </a:rPr>
+              <a:t>• Play 1: Vision &amp; Guardrails - This lesson informs Play 1 by helping learners connect the.</a:t>
             </a:r>
             <a:endParaRPr lang="en-US" sz="1900" dirty="0"/>
           </a:p>
           <a:p>
+            <a:pPr indent="0" marL="0">
+              <a:buNone/>
+            </a:pPr>
             <a:r>
               <a:rPr lang="en-US" sz="1900" dirty="0">
                 <a:solidFill>
-                  <a:srgbClr val="17364A"/>
-                </a:solidFill>
-                <a:latin typeface="Aptos" pitchFamily="34" charset="0"/>
-                <a:ea typeface="Aptos" pitchFamily="34" charset="-122"/>
-                <a:cs typeface="Aptos" pitchFamily="34" charset="-120"/>
-              </a:rPr>
-              <a:t>Play 2: Readiness Assessment - This lesson informs Play 2 by helping learners connect the lesson topic to.</a:t>
+                  <a:srgbClr val="003A63"/>
+                </a:solidFill>
+                <a:latin typeface="Aptos" pitchFamily="34" charset="0"/>
+                <a:ea typeface="Aptos" pitchFamily="34" charset="-122"/>
+                <a:cs typeface="Aptos" pitchFamily="34" charset="-120"/>
+              </a:rPr>
+              <a:t>• Play 2: Readiness Assessment - This lesson informs Play 2 by helping learners connect the.</a:t>
             </a:r>
             <a:endParaRPr lang="en-US" sz="1900" dirty="0"/>
           </a:p>
@@ -13707,17 +13919,17 @@
         </p:nvSpPr>
         <p:spPr>
           <a:xfrm>
-            <a:off x="8211312" y="1920240"/>
-            <a:ext cx="2734056" cy="1463040"/>
-          </a:xfrm>
-          <a:prstGeom prst="rect">
-            <a:avLst/>
-          </a:prstGeom>
-          <a:noFill/>
-          <a:ln/>
-        </p:spPr>
-        <p:txBody>
-          <a:bodyPr wrap="square" lIns="0" tIns="0" rIns="0" bIns="0" rtlCol="0" anchor="t">
+            <a:off x="8211312" y="1892808"/>
+            <a:ext cx="2734056" cy="1536192"/>
+          </a:xfrm>
+          <a:prstGeom prst="rect">
+            <a:avLst/>
+          </a:prstGeom>
+          <a:noFill/>
+          <a:ln/>
+        </p:spPr>
+        <p:txBody>
+          <a:bodyPr wrap="square" lIns="254" tIns="254" rIns="254" bIns="254" rtlCol="0" anchor="t">
             <a:normAutofit/>
           </a:bodyPr>
           <a:lstStyle/>
@@ -13726,7 +13938,7 @@
               <a:buNone/>
             </a:pPr>
             <a:r>
-              <a:rPr lang="en-US" sz="1550" dirty="0">
+              <a:rPr lang="en-US" sz="1320" dirty="0">
                 <a:solidFill>
                   <a:srgbClr val="17364A"/>
                 </a:solidFill>
@@ -13734,9 +13946,9 @@
                 <a:ea typeface="Aptos" pitchFamily="34" charset="-122"/>
                 <a:cs typeface="Aptos" pitchFamily="34" charset="-120"/>
               </a:rPr>
-              <a:t>Use the related plays to identify decisions, participants, timing, approvals, and documentation needed for responsible implementation.</a:t>
-            </a:r>
-            <a:endParaRPr lang="en-US" sz="1550" dirty="0"/>
+              <a:t>Use the related plays to identify decisions, participants, timing, approvals, and documentation needed for responsible.</a:t>
+            </a:r>
+            <a:endParaRPr lang="en-US" sz="1320" dirty="0"/>
           </a:p>
         </p:txBody>
       </p:sp>
@@ -13824,13 +14036,16 @@
           <a:ln/>
         </p:spPr>
         <p:txBody>
-          <a:bodyPr wrap="square" lIns="254" tIns="254" rIns="254" bIns="254" rtlCol="0" anchor="t">
+          <a:bodyPr wrap="square" lIns="508" tIns="508" rIns="508" bIns="508" rtlCol="0" anchor="t">
             <a:normAutofit/>
           </a:bodyPr>
           <a:lstStyle/>
           <a:p>
-            <a:r>
-              <a:rPr lang="en-US" sz="1380" dirty="0">
+            <a:pPr indent="0" marL="0">
+              <a:buNone/>
+            </a:pPr>
+            <a:r>
+              <a:rPr lang="en-US" sz="1220" dirty="0">
                 <a:solidFill>
                   <a:srgbClr val="17364A"/>
                 </a:solidFill>
@@ -13840,11 +14055,14 @@
               </a:rPr>
               <a:t>Locate the decision point in the playbook sequence.</a:t>
             </a:r>
-            <a:endParaRPr lang="en-US" sz="1380" dirty="0"/>
-          </a:p>
-          <a:p>
-            <a:r>
-              <a:rPr lang="en-US" sz="1380" dirty="0">
+            <a:endParaRPr lang="en-US" sz="1220" dirty="0"/>
+          </a:p>
+          <a:p>
+            <a:pPr indent="0" marL="0">
+              <a:buNone/>
+            </a:pPr>
+            <a:r>
+              <a:rPr lang="en-US" sz="1220" dirty="0">
                 <a:solidFill>
                   <a:srgbClr val="17364A"/>
                 </a:solidFill>
@@ -13854,11 +14072,14 @@
               </a:rPr>
               <a:t>Identify who should participate in the work.</a:t>
             </a:r>
-            <a:endParaRPr lang="en-US" sz="1380" dirty="0"/>
-          </a:p>
-          <a:p>
-            <a:r>
-              <a:rPr lang="en-US" sz="1380" dirty="0">
+            <a:endParaRPr lang="en-US" sz="1220" dirty="0"/>
+          </a:p>
+          <a:p>
+            <a:pPr indent="0" marL="0">
+              <a:buNone/>
+            </a:pPr>
+            <a:r>
+              <a:rPr lang="en-US" sz="1220" dirty="0">
                 <a:solidFill>
                   <a:srgbClr val="17364A"/>
                 </a:solidFill>
@@ -13868,7 +14089,7 @@
               </a:rPr>
               <a:t>Document the review, approval, or implementation step.</a:t>
             </a:r>
-            <a:endParaRPr lang="en-US" sz="1380" dirty="0"/>
+            <a:endParaRPr lang="en-US" sz="1220" dirty="0"/>
           </a:p>
         </p:txBody>
       </p:sp>
@@ -14169,63 +14390,75 @@
           <a:ln/>
         </p:spPr>
         <p:txBody>
-          <a:bodyPr wrap="square" lIns="635" tIns="635" rIns="635" bIns="635" rtlCol="0" anchor="t">
+          <a:bodyPr wrap="square" lIns="1016" tIns="1016" rIns="1016" bIns="1016" rtlCol="0" anchor="t">
             <a:normAutofit/>
           </a:bodyPr>
           <a:lstStyle/>
           <a:p>
+            <a:pPr indent="0" marL="0">
+              <a:buNone/>
+            </a:pPr>
             <a:r>
               <a:rPr lang="en-US" sz="1850" dirty="0">
                 <a:solidFill>
-                  <a:srgbClr val="17364A"/>
-                </a:solidFill>
-                <a:latin typeface="Aptos" pitchFamily="34" charset="0"/>
-                <a:ea typeface="Aptos" pitchFamily="34" charset="-122"/>
-                <a:cs typeface="Aptos" pitchFamily="34" charset="-120"/>
-              </a:rPr>
-              <a:t>Tool 3: Equity Impact Assessment Checklist (Checklist) - Use this tool to complete or strengthen the.</a:t>
+                  <a:srgbClr val="003A63"/>
+                </a:solidFill>
+                <a:latin typeface="Aptos" pitchFamily="34" charset="0"/>
+                <a:ea typeface="Aptos" pitchFamily="34" charset="-122"/>
+                <a:cs typeface="Aptos" pitchFamily="34" charset="-120"/>
+              </a:rPr>
+              <a:t>• Tool 3: Equity Impact Assessment Checklist (Checklist) - Use this tool to complete or.</a:t>
             </a:r>
             <a:endParaRPr lang="en-US" sz="1850" dirty="0"/>
           </a:p>
           <a:p>
+            <a:pPr indent="0" marL="0">
+              <a:buNone/>
+            </a:pPr>
             <a:r>
               <a:rPr lang="en-US" sz="1850" dirty="0">
                 <a:solidFill>
-                  <a:srgbClr val="17364A"/>
-                </a:solidFill>
-                <a:latin typeface="Aptos" pitchFamily="34" charset="0"/>
-                <a:ea typeface="Aptos" pitchFamily="34" charset="-122"/>
-                <a:cs typeface="Aptos" pitchFamily="34" charset="-120"/>
-              </a:rPr>
-              <a:t>Tool 4: AI Policy Landscape Scan (Worksheet) - Use AI Policy Landscape Scan to translate this lesson into a.</a:t>
+                  <a:srgbClr val="003A63"/>
+                </a:solidFill>
+                <a:latin typeface="Aptos" pitchFamily="34" charset="0"/>
+                <a:ea typeface="Aptos" pitchFamily="34" charset="-122"/>
+                <a:cs typeface="Aptos" pitchFamily="34" charset="-120"/>
+              </a:rPr>
+              <a:t>• Tool 4: AI Policy Landscape Scan (Worksheet) - Use AI Policy Landscape Scan to translate this.</a:t>
             </a:r>
             <a:endParaRPr lang="en-US" sz="1850" dirty="0"/>
           </a:p>
           <a:p>
+            <a:pPr indent="0" marL="0">
+              <a:buNone/>
+            </a:pPr>
             <a:r>
               <a:rPr lang="en-US" sz="1850" dirty="0">
                 <a:solidFill>
-                  <a:srgbClr val="17364A"/>
-                </a:solidFill>
-                <a:latin typeface="Aptos" pitchFamily="34" charset="0"/>
-                <a:ea typeface="Aptos" pitchFamily="34" charset="-122"/>
-                <a:cs typeface="Aptos" pitchFamily="34" charset="-120"/>
-              </a:rPr>
-              <a:t>Tool 5: AI Environmental and Resource Impact Review (Checklist) - Use AI Environmental and Resource Impact.</a:t>
+                  <a:srgbClr val="003A63"/>
+                </a:solidFill>
+                <a:latin typeface="Aptos" pitchFamily="34" charset="0"/>
+                <a:ea typeface="Aptos" pitchFamily="34" charset="-122"/>
+                <a:cs typeface="Aptos" pitchFamily="34" charset="-120"/>
+              </a:rPr>
+              <a:t>• Tool 5: AI Environmental and Resource Impact Review (Checklist) - Use AI Environmental and.</a:t>
             </a:r>
             <a:endParaRPr lang="en-US" sz="1850" dirty="0"/>
           </a:p>
           <a:p>
+            <a:pPr indent="0" marL="0">
+              <a:buNone/>
+            </a:pPr>
             <a:r>
               <a:rPr lang="en-US" sz="1850" dirty="0">
                 <a:solidFill>
-                  <a:srgbClr val="17364A"/>
-                </a:solidFill>
-                <a:latin typeface="Aptos" pitchFamily="34" charset="0"/>
-                <a:ea typeface="Aptos" pitchFamily="34" charset="-122"/>
-                <a:cs typeface="Aptos" pitchFamily="34" charset="-120"/>
-              </a:rPr>
-              <a:t>Tool 6: Human-Centered AI Decision Rule Checklist (Checklist) - Use Human-Centered AI Decision Rule.</a:t>
+                  <a:srgbClr val="003A63"/>
+                </a:solidFill>
+                <a:latin typeface="Aptos" pitchFamily="34" charset="0"/>
+                <a:ea typeface="Aptos" pitchFamily="34" charset="-122"/>
+                <a:cs typeface="Aptos" pitchFamily="34" charset="-120"/>
+              </a:rPr>
+              <a:t>• Tool 6: Human-Centered AI Decision Rule Checklist (Checklist) - Use Human-Centered AI Decision.</a:t>
             </a:r>
             <a:endParaRPr lang="en-US" sz="1850" dirty="0"/>
           </a:p>
@@ -14305,17 +14538,17 @@
         </p:nvSpPr>
         <p:spPr>
           <a:xfrm>
-            <a:off x="8211312" y="1920240"/>
-            <a:ext cx="2734056" cy="1463040"/>
-          </a:xfrm>
-          <a:prstGeom prst="rect">
-            <a:avLst/>
-          </a:prstGeom>
-          <a:noFill/>
-          <a:ln/>
-        </p:spPr>
-        <p:txBody>
-          <a:bodyPr wrap="square" lIns="0" tIns="0" rIns="0" bIns="0" rtlCol="0" anchor="t">
+            <a:off x="8211312" y="1892808"/>
+            <a:ext cx="2734056" cy="1536192"/>
+          </a:xfrm>
+          <a:prstGeom prst="rect">
+            <a:avLst/>
+          </a:prstGeom>
+          <a:noFill/>
+          <a:ln/>
+        </p:spPr>
+        <p:txBody>
+          <a:bodyPr wrap="square" lIns="254" tIns="254" rIns="254" bIns="254" rtlCol="0" anchor="t">
             <a:normAutofit/>
           </a:bodyPr>
           <a:lstStyle/>
@@ -14324,7 +14557,7 @@
               <a:buNone/>
             </a:pPr>
             <a:r>
-              <a:rPr lang="en-US" sz="1550" dirty="0">
+              <a:rPr lang="en-US" sz="1320" dirty="0">
                 <a:solidFill>
                   <a:srgbClr val="17364A"/>
                 </a:solidFill>
@@ -14332,9 +14565,9 @@
                 <a:ea typeface="Aptos" pitchFamily="34" charset="-122"/>
                 <a:cs typeface="Aptos" pitchFamily="34" charset="-120"/>
               </a:rPr>
-              <a:t>Use linked tools when your department needs a structured worksheet, template, checklist, review process, or documentation artifact.</a:t>
-            </a:r>
-            <a:endParaRPr lang="en-US" sz="1550" dirty="0"/>
+              <a:t>Use linked tools when your department needs a structured worksheet, template, checklist, review process, or.</a:t>
+            </a:r>
+            <a:endParaRPr lang="en-US" sz="1320" dirty="0"/>
           </a:p>
         </p:txBody>
       </p:sp>
@@ -14422,13 +14655,16 @@
           <a:ln/>
         </p:spPr>
         <p:txBody>
-          <a:bodyPr wrap="square" lIns="254" tIns="254" rIns="254" bIns="254" rtlCol="0" anchor="t">
+          <a:bodyPr wrap="square" lIns="508" tIns="508" rIns="508" bIns="508" rtlCol="0" anchor="t">
             <a:normAutofit/>
           </a:bodyPr>
           <a:lstStyle/>
           <a:p>
-            <a:r>
-              <a:rPr lang="en-US" sz="1380" dirty="0">
+            <a:pPr indent="0" marL="0">
+              <a:buNone/>
+            </a:pPr>
+            <a:r>
+              <a:rPr lang="en-US" sz="1220" dirty="0">
                 <a:solidFill>
                   <a:srgbClr val="17364A"/>
                 </a:solidFill>
@@ -14438,11 +14674,14 @@
               </a:rPr>
               <a:t>Use a tool when no comparable local process exists.</a:t>
             </a:r>
-            <a:endParaRPr lang="en-US" sz="1380" dirty="0"/>
-          </a:p>
-          <a:p>
-            <a:r>
-              <a:rPr lang="en-US" sz="1380" dirty="0">
+            <a:endParaRPr lang="en-US" sz="1220" dirty="0"/>
+          </a:p>
+          <a:p>
+            <a:pPr indent="0" marL="0">
+              <a:buNone/>
+            </a:pPr>
+            <a:r>
+              <a:rPr lang="en-US" sz="1220" dirty="0">
                 <a:solidFill>
                   <a:srgbClr val="17364A"/>
                 </a:solidFill>
@@ -14450,13 +14689,16 @@
                 <a:ea typeface="Aptos" pitchFamily="34" charset="-122"/>
                 <a:cs typeface="Aptos" pitchFamily="34" charset="-120"/>
               </a:rPr>
-              <a:t>Adapt existing department templates when they already fit the purpose.</a:t>
-            </a:r>
-            <a:endParaRPr lang="en-US" sz="1380" dirty="0"/>
-          </a:p>
-          <a:p>
-            <a:r>
-              <a:rPr lang="en-US" sz="1380" dirty="0">
+              <a:t>Adapt existing department templates when they already fit the.</a:t>
+            </a:r>
+            <a:endParaRPr lang="en-US" sz="1220" dirty="0"/>
+          </a:p>
+          <a:p>
+            <a:pPr indent="0" marL="0">
+              <a:buNone/>
+            </a:pPr>
+            <a:r>
+              <a:rPr lang="en-US" sz="1220" dirty="0">
                 <a:solidFill>
                   <a:srgbClr val="17364A"/>
                 </a:solidFill>
@@ -14466,7 +14708,7 @@
               </a:rPr>
               <a:t>Save the completed artifact as evidence of the decision.</a:t>
             </a:r>
-            <a:endParaRPr lang="en-US" sz="1380" dirty="0"/>
+            <a:endParaRPr lang="en-US" sz="1220" dirty="0"/>
           </a:p>
         </p:txBody>
       </p:sp>
@@ -14767,49 +15009,58 @@
           <a:ln/>
         </p:spPr>
         <p:txBody>
-          <a:bodyPr wrap="square" lIns="635" tIns="635" rIns="635" bIns="635" rtlCol="0" anchor="t">
+          <a:bodyPr wrap="square" lIns="1016" tIns="1016" rIns="1016" bIns="1016" rtlCol="0" anchor="t">
             <a:normAutofit/>
           </a:bodyPr>
           <a:lstStyle/>
           <a:p>
+            <a:pPr indent="0" marL="0">
+              <a:buNone/>
+            </a:pPr>
             <a:r>
               <a:rPr lang="en-US" sz="2100" dirty="0">
                 <a:solidFill>
-                  <a:srgbClr val="17364A"/>
-                </a:solidFill>
-                <a:latin typeface="Aptos" pitchFamily="34" charset="0"/>
-                <a:ea typeface="Aptos" pitchFamily="34" charset="-122"/>
-                <a:cs typeface="Aptos" pitchFamily="34" charset="-120"/>
-              </a:rPr>
-              <a:t>Identify case investigation and outbreak response tasks that AI may support.</a:t>
+                  <a:srgbClr val="003A63"/>
+                </a:solidFill>
+                <a:latin typeface="Aptos" pitchFamily="34" charset="0"/>
+                <a:ea typeface="Aptos" pitchFamily="34" charset="-122"/>
+                <a:cs typeface="Aptos" pitchFamily="34" charset="-120"/>
+              </a:rPr>
+              <a:t>• Identify case investigation and outbreak response tasks that AI may support.</a:t>
             </a:r>
             <a:endParaRPr lang="en-US" sz="2100" dirty="0"/>
           </a:p>
           <a:p>
+            <a:pPr indent="0" marL="0">
+              <a:buNone/>
+            </a:pPr>
             <a:r>
               <a:rPr lang="en-US" sz="2100" dirty="0">
                 <a:solidFill>
-                  <a:srgbClr val="17364A"/>
-                </a:solidFill>
-                <a:latin typeface="Aptos" pitchFamily="34" charset="0"/>
-                <a:ea typeface="Aptos" pitchFamily="34" charset="-122"/>
-                <a:cs typeface="Aptos" pitchFamily="34" charset="-120"/>
-              </a:rPr>
-              <a:t>Distinguish between AI-supported triage, summarization, extraction, signal detection, and.</a:t>
+                  <a:srgbClr val="003A63"/>
+                </a:solidFill>
+                <a:latin typeface="Aptos" pitchFamily="34" charset="0"/>
+                <a:ea typeface="Aptos" pitchFamily="34" charset="-122"/>
+                <a:cs typeface="Aptos" pitchFamily="34" charset="-120"/>
+              </a:rPr>
+              <a:t>• Distinguish between AI-supported triage, summarization, extraction, signal detection, and.</a:t>
             </a:r>
             <a:endParaRPr lang="en-US" sz="2100" dirty="0"/>
           </a:p>
           <a:p>
+            <a:pPr indent="0" marL="0">
+              <a:buNone/>
+            </a:pPr>
             <a:r>
               <a:rPr lang="en-US" sz="2100" dirty="0">
                 <a:solidFill>
-                  <a:srgbClr val="17364A"/>
-                </a:solidFill>
-                <a:latin typeface="Aptos" pitchFamily="34" charset="0"/>
-                <a:ea typeface="Aptos" pitchFamily="34" charset="-122"/>
-                <a:cs typeface="Aptos" pitchFamily="34" charset="-120"/>
-              </a:rPr>
-              <a:t>Assess data quality, timeliness, source traceability, and equity risks in AI-supported response.</a:t>
+                  <a:srgbClr val="003A63"/>
+                </a:solidFill>
+                <a:latin typeface="Aptos" pitchFamily="34" charset="0"/>
+                <a:ea typeface="Aptos" pitchFamily="34" charset="-122"/>
+                <a:cs typeface="Aptos" pitchFamily="34" charset="-120"/>
+              </a:rPr>
+              <a:t>• Assess data quality, timeliness, source traceability, and equity risks in AI-supported response.</a:t>
             </a:r>
             <a:endParaRPr lang="en-US" sz="2100" dirty="0"/>
           </a:p>
@@ -14889,17 +15140,17 @@
         </p:nvSpPr>
         <p:spPr>
           <a:xfrm>
-            <a:off x="7799832" y="1828800"/>
-            <a:ext cx="3145536" cy="685800"/>
-          </a:xfrm>
-          <a:prstGeom prst="rect">
-            <a:avLst/>
-          </a:prstGeom>
-          <a:noFill/>
-          <a:ln/>
-        </p:spPr>
-        <p:txBody>
-          <a:bodyPr wrap="square" lIns="0" tIns="0" rIns="0" bIns="0" rtlCol="0" anchor="t">
+            <a:off x="7799832" y="1801368"/>
+            <a:ext cx="3145536" cy="758952"/>
+          </a:xfrm>
+          <a:prstGeom prst="rect">
+            <a:avLst/>
+          </a:prstGeom>
+          <a:noFill/>
+          <a:ln/>
+        </p:spPr>
+        <p:txBody>
+          <a:bodyPr wrap="square" lIns="254" tIns="254" rIns="254" bIns="254" rtlCol="0" anchor="t">
             <a:normAutofit/>
           </a:bodyPr>
           <a:lstStyle/>
@@ -14908,7 +15159,7 @@
               <a:buNone/>
             </a:pPr>
             <a:r>
-              <a:rPr lang="en-US" sz="1550" dirty="0">
+              <a:rPr lang="en-US" sz="1320" dirty="0">
                 <a:solidFill>
                   <a:srgbClr val="17364A"/>
                 </a:solidFill>
@@ -14918,7 +15169,7 @@
               </a:rPr>
               <a:t>Identify case investigation and outbreak response tasks that AI may support.</a:t>
             </a:r>
-            <a:endParaRPr lang="en-US" sz="1550" dirty="0"/>
+            <a:endParaRPr lang="en-US" sz="1320" dirty="0"/>
           </a:p>
         </p:txBody>
       </p:sp>
@@ -15006,13 +15257,16 @@
           <a:ln/>
         </p:spPr>
         <p:txBody>
-          <a:bodyPr wrap="square" lIns="254" tIns="254" rIns="254" bIns="254" rtlCol="0" anchor="t">
+          <a:bodyPr wrap="square" lIns="508" tIns="508" rIns="508" bIns="508" rtlCol="0" anchor="t">
             <a:normAutofit/>
           </a:bodyPr>
           <a:lstStyle/>
           <a:p>
-            <a:r>
-              <a:rPr lang="en-US" sz="1380" dirty="0">
+            <a:pPr indent="0" marL="0">
+              <a:buNone/>
+            </a:pPr>
+            <a:r>
+              <a:rPr lang="en-US" sz="1220" dirty="0">
                 <a:solidFill>
                   <a:srgbClr val="17364A"/>
                 </a:solidFill>
@@ -15020,13 +15274,16 @@
                 <a:ea typeface="Aptos" pitchFamily="34" charset="-122"/>
                 <a:cs typeface="Aptos" pitchFamily="34" charset="-120"/>
               </a:rPr>
-              <a:t>Distinguish between AI-supported triage, summarization, extraction, signal detection, and.</a:t>
-            </a:r>
-            <a:endParaRPr lang="en-US" sz="1380" dirty="0"/>
-          </a:p>
-          <a:p>
-            <a:r>
-              <a:rPr lang="en-US" sz="1380" dirty="0">
+              <a:t>Distinguish between AI-supported triage, summarization,.</a:t>
+            </a:r>
+            <a:endParaRPr lang="en-US" sz="1220" dirty="0"/>
+          </a:p>
+          <a:p>
+            <a:pPr indent="0" marL="0">
+              <a:buNone/>
+            </a:pPr>
+            <a:r>
+              <a:rPr lang="en-US" sz="1220" dirty="0">
                 <a:solidFill>
                   <a:srgbClr val="17364A"/>
                 </a:solidFill>
@@ -15034,13 +15291,16 @@
                 <a:ea typeface="Aptos" pitchFamily="34" charset="-122"/>
                 <a:cs typeface="Aptos" pitchFamily="34" charset="-120"/>
               </a:rPr>
-              <a:t>Assess data quality, timeliness, source traceability, and equity risks in AI-supported.</a:t>
-            </a:r>
-            <a:endParaRPr lang="en-US" sz="1380" dirty="0"/>
-          </a:p>
-          <a:p>
-            <a:r>
-              <a:rPr lang="en-US" sz="1380" dirty="0">
+              <a:t>Assess data quality, timeliness, source traceability, and equity.</a:t>
+            </a:r>
+            <a:endParaRPr lang="en-US" sz="1220" dirty="0"/>
+          </a:p>
+          <a:p>
+            <a:pPr indent="0" marL="0">
+              <a:buNone/>
+            </a:pPr>
+            <a:r>
+              <a:rPr lang="en-US" sz="1220" dirty="0">
                 <a:solidFill>
                   <a:srgbClr val="17364A"/>
                 </a:solidFill>
@@ -15048,9 +15308,9 @@
                 <a:ea typeface="Aptos" pitchFamily="34" charset="-122"/>
                 <a:cs typeface="Aptos" pitchFamily="34" charset="-120"/>
               </a:rPr>
-              <a:t>Define human review, escalation, and documentation expectations for AI outputs.</a:t>
-            </a:r>
-            <a:endParaRPr lang="en-US" sz="1380" dirty="0"/>
+              <a:t>Define human review, escalation, and documentation expectations.</a:t>
+            </a:r>
+            <a:endParaRPr lang="en-US" sz="1220" dirty="0"/>
           </a:p>
         </p:txBody>
       </p:sp>
@@ -15128,17 +15388,17 @@
         </p:nvSpPr>
         <p:spPr>
           <a:xfrm>
-            <a:off x="7799832" y="5001768"/>
-            <a:ext cx="3145536" cy="502920"/>
-          </a:xfrm>
-          <a:prstGeom prst="rect">
-            <a:avLst/>
-          </a:prstGeom>
-          <a:noFill/>
-          <a:ln/>
-        </p:spPr>
-        <p:txBody>
-          <a:bodyPr wrap="square" lIns="0" tIns="0" rIns="0" bIns="0" rtlCol="0" anchor="t">
+            <a:off x="7799832" y="4974336"/>
+            <a:ext cx="3145536" cy="576072"/>
+          </a:xfrm>
+          <a:prstGeom prst="rect">
+            <a:avLst/>
+          </a:prstGeom>
+          <a:noFill/>
+          <a:ln/>
+        </p:spPr>
+        <p:txBody>
+          <a:bodyPr wrap="square" lIns="254" tIns="254" rIns="254" bIns="254" rtlCol="0" anchor="t">
             <a:normAutofit/>
           </a:bodyPr>
           <a:lstStyle/>
@@ -15147,7 +15407,7 @@
               <a:buNone/>
             </a:pPr>
             <a:r>
-              <a:rPr lang="en-US" sz="1550" dirty="0">
+              <a:rPr lang="en-US" sz="1320" dirty="0">
                 <a:solidFill>
                   <a:srgbClr val="17364A"/>
                 </a:solidFill>
@@ -15155,9 +15415,9 @@
                 <a:ea typeface="Aptos" pitchFamily="34" charset="-122"/>
                 <a:cs typeface="Aptos" pitchFamily="34" charset="-120"/>
               </a:rPr>
-              <a:t>Use the assignment to test whether you can explain the concept, apply it to a realistic public health situation, and identify what would need review before the work moves forward.</a:t>
-            </a:r>
-            <a:endParaRPr lang="en-US" sz="1550" dirty="0"/>
+              <a:t>Use the assignment to test whether you can explain the concept, apply it to a realistic public health situation, and.</a:t>
+            </a:r>
+            <a:endParaRPr lang="en-US" sz="1320" dirty="0"/>
           </a:p>
         </p:txBody>
       </p:sp>
@@ -15458,49 +15718,58 @@
           <a:ln/>
         </p:spPr>
         <p:txBody>
-          <a:bodyPr wrap="square" lIns="635" tIns="635" rIns="635" bIns="635" rtlCol="0" anchor="t">
+          <a:bodyPr wrap="square" lIns="1016" tIns="1016" rIns="1016" bIns="1016" rtlCol="0" anchor="t">
             <a:normAutofit/>
           </a:bodyPr>
           <a:lstStyle/>
           <a:p>
+            <a:pPr indent="0" marL="0">
+              <a:buNone/>
+            </a:pPr>
             <a:r>
               <a:rPr lang="en-US" sz="2100" dirty="0">
                 <a:solidFill>
-                  <a:srgbClr val="17364A"/>
-                </a:solidFill>
-                <a:latin typeface="Aptos" pitchFamily="34" charset="0"/>
-                <a:ea typeface="Aptos" pitchFamily="34" charset="-122"/>
-                <a:cs typeface="Aptos" pitchFamily="34" charset="-120"/>
-              </a:rPr>
-              <a:t>Case investigation and outbreak response are high-pressure public health workflows that depend on.</a:t>
+                  <a:srgbClr val="003A63"/>
+                </a:solidFill>
+                <a:latin typeface="Aptos" pitchFamily="34" charset="0"/>
+                <a:ea typeface="Aptos" pitchFamily="34" charset="-122"/>
+                <a:cs typeface="Aptos" pitchFamily="34" charset="-120"/>
+              </a:rPr>
+              <a:t>• Case investigation and outbreak response are high-pressure public health workflows that depend.</a:t>
             </a:r>
             <a:endParaRPr lang="en-US" sz="2100" dirty="0"/>
           </a:p>
           <a:p>
+            <a:pPr indent="0" marL="0">
+              <a:buNone/>
+            </a:pPr>
             <a:r>
               <a:rPr lang="en-US" sz="2100" dirty="0">
                 <a:solidFill>
-                  <a:srgbClr val="17364A"/>
-                </a:solidFill>
-                <a:latin typeface="Aptos" pitchFamily="34" charset="0"/>
-                <a:ea typeface="Aptos" pitchFamily="34" charset="-122"/>
-                <a:cs typeface="Aptos" pitchFamily="34" charset="-120"/>
-              </a:rPr>
-              <a:t>AI may support these workflows by summarizing case records, extracting exposures, identifying missing.</a:t>
+                  <a:srgbClr val="003A63"/>
+                </a:solidFill>
+                <a:latin typeface="Aptos" pitchFamily="34" charset="0"/>
+                <a:ea typeface="Aptos" pitchFamily="34" charset="-122"/>
+                <a:cs typeface="Aptos" pitchFamily="34" charset="-120"/>
+              </a:rPr>
+              <a:t>• AI may support these workflows by summarizing case records, extracting exposures, identifying.</a:t>
             </a:r>
             <a:endParaRPr lang="en-US" sz="2100" dirty="0"/>
           </a:p>
           <a:p>
+            <a:pPr indent="0" marL="0">
+              <a:buNone/>
+            </a:pPr>
             <a:r>
               <a:rPr lang="en-US" sz="2100" dirty="0">
                 <a:solidFill>
-                  <a:srgbClr val="17364A"/>
-                </a:solidFill>
-                <a:latin typeface="Aptos" pitchFamily="34" charset="0"/>
-                <a:ea typeface="Aptos" pitchFamily="34" charset="-122"/>
-                <a:cs typeface="Aptos" pitchFamily="34" charset="-120"/>
-              </a:rPr>
-              <a:t>At the same time, errors can affect real people, public health action, and public confidence.</a:t>
+                  <a:srgbClr val="003A63"/>
+                </a:solidFill>
+                <a:latin typeface="Aptos" pitchFamily="34" charset="0"/>
+                <a:ea typeface="Aptos" pitchFamily="34" charset="-122"/>
+                <a:cs typeface="Aptos" pitchFamily="34" charset="-120"/>
+              </a:rPr>
+              <a:t>• At the same time, errors can affect real people, public health action, and public confidence.</a:t>
             </a:r>
             <a:endParaRPr lang="en-US" sz="2100" dirty="0"/>
           </a:p>
@@ -15580,17 +15849,17 @@
         </p:nvSpPr>
         <p:spPr>
           <a:xfrm>
-            <a:off x="7799832" y="1828800"/>
-            <a:ext cx="3145536" cy="685800"/>
-          </a:xfrm>
-          <a:prstGeom prst="rect">
-            <a:avLst/>
-          </a:prstGeom>
-          <a:noFill/>
-          <a:ln/>
-        </p:spPr>
-        <p:txBody>
-          <a:bodyPr wrap="square" lIns="0" tIns="0" rIns="0" bIns="0" rtlCol="0" anchor="t">
+            <a:off x="7799832" y="1801368"/>
+            <a:ext cx="3145536" cy="758952"/>
+          </a:xfrm>
+          <a:prstGeom prst="rect">
+            <a:avLst/>
+          </a:prstGeom>
+          <a:noFill/>
+          <a:ln/>
+        </p:spPr>
+        <p:txBody>
+          <a:bodyPr wrap="square" lIns="254" tIns="254" rIns="254" bIns="254" rtlCol="0" anchor="t">
             <a:normAutofit/>
           </a:bodyPr>
           <a:lstStyle/>
@@ -15599,7 +15868,7 @@
               <a:buNone/>
             </a:pPr>
             <a:r>
-              <a:rPr lang="en-US" sz="1550" dirty="0">
+              <a:rPr lang="en-US" sz="1320" dirty="0">
                 <a:solidFill>
                   <a:srgbClr val="17364A"/>
                 </a:solidFill>
@@ -15609,7 +15878,7 @@
               </a:rPr>
               <a:t>Case investigation and outbreak response are high-pressure public health workflows that depend on.</a:t>
             </a:r>
-            <a:endParaRPr lang="en-US" sz="1550" dirty="0"/>
+            <a:endParaRPr lang="en-US" sz="1320" dirty="0"/>
           </a:p>
         </p:txBody>
       </p:sp>
@@ -15697,13 +15966,16 @@
           <a:ln/>
         </p:spPr>
         <p:txBody>
-          <a:bodyPr wrap="square" lIns="254" tIns="254" rIns="254" bIns="254" rtlCol="0" anchor="t">
+          <a:bodyPr wrap="square" lIns="508" tIns="508" rIns="508" bIns="508" rtlCol="0" anchor="t">
             <a:normAutofit/>
           </a:bodyPr>
           <a:lstStyle/>
           <a:p>
-            <a:r>
-              <a:rPr lang="en-US" sz="1380" dirty="0">
+            <a:pPr indent="0" marL="0">
+              <a:buNone/>
+            </a:pPr>
+            <a:r>
+              <a:rPr lang="en-US" sz="1220" dirty="0">
                 <a:solidFill>
                   <a:srgbClr val="17364A"/>
                 </a:solidFill>
@@ -15711,13 +15983,16 @@
                 <a:ea typeface="Aptos" pitchFamily="34" charset="-122"/>
                 <a:cs typeface="Aptos" pitchFamily="34" charset="-120"/>
               </a:rPr>
-              <a:t>Case investigation and outbreak response are high-pressure public health workflows that.</a:t>
-            </a:r>
-            <a:endParaRPr lang="en-US" sz="1380" dirty="0"/>
-          </a:p>
-          <a:p>
-            <a:r>
-              <a:rPr lang="en-US" sz="1380" dirty="0">
+              <a:t>Case investigation and outbreak response are high-pressure public.</a:t>
+            </a:r>
+            <a:endParaRPr lang="en-US" sz="1220" dirty="0"/>
+          </a:p>
+          <a:p>
+            <a:pPr indent="0" marL="0">
+              <a:buNone/>
+            </a:pPr>
+            <a:r>
+              <a:rPr lang="en-US" sz="1220" dirty="0">
                 <a:solidFill>
                   <a:srgbClr val="17364A"/>
                 </a:solidFill>
@@ -15725,13 +16000,16 @@
                 <a:ea typeface="Aptos" pitchFamily="34" charset="-122"/>
                 <a:cs typeface="Aptos" pitchFamily="34" charset="-120"/>
               </a:rPr>
-              <a:t>AI may support these workflows by summarizing case records, extracting exposures,.</a:t>
-            </a:r>
-            <a:endParaRPr lang="en-US" sz="1380" dirty="0"/>
-          </a:p>
-          <a:p>
-            <a:r>
-              <a:rPr lang="en-US" sz="1380" dirty="0">
+              <a:t>AI may support these workflows by summarizing case records,.</a:t>
+            </a:r>
+            <a:endParaRPr lang="en-US" sz="1220" dirty="0"/>
+          </a:p>
+          <a:p>
+            <a:pPr indent="0" marL="0">
+              <a:buNone/>
+            </a:pPr>
+            <a:r>
+              <a:rPr lang="en-US" sz="1220" dirty="0">
                 <a:solidFill>
                   <a:srgbClr val="17364A"/>
                 </a:solidFill>
@@ -15739,9 +16017,9 @@
                 <a:ea typeface="Aptos" pitchFamily="34" charset="-122"/>
                 <a:cs typeface="Aptos" pitchFamily="34" charset="-120"/>
               </a:rPr>
-              <a:t>This module teaches epidemiologists, informaticians, and response teams how to evaluate.</a:t>
-            </a:r>
-            <a:endParaRPr lang="en-US" sz="1380" dirty="0"/>
+              <a:t>This module teaches epidemiologists, informaticians, and response.</a:t>
+            </a:r>
+            <a:endParaRPr lang="en-US" sz="1220" dirty="0"/>
           </a:p>
         </p:txBody>
       </p:sp>
@@ -15819,17 +16097,17 @@
         </p:nvSpPr>
         <p:spPr>
           <a:xfrm>
-            <a:off x="7799832" y="5001768"/>
-            <a:ext cx="3145536" cy="502920"/>
-          </a:xfrm>
-          <a:prstGeom prst="rect">
-            <a:avLst/>
-          </a:prstGeom>
-          <a:noFill/>
-          <a:ln/>
-        </p:spPr>
-        <p:txBody>
-          <a:bodyPr wrap="square" lIns="0" tIns="0" rIns="0" bIns="0" rtlCol="0" anchor="t">
+            <a:off x="7799832" y="4974336"/>
+            <a:ext cx="3145536" cy="576072"/>
+          </a:xfrm>
+          <a:prstGeom prst="rect">
+            <a:avLst/>
+          </a:prstGeom>
+          <a:noFill/>
+          <a:ln/>
+        </p:spPr>
+        <p:txBody>
+          <a:bodyPr wrap="square" lIns="254" tIns="254" rIns="254" bIns="254" rtlCol="0" anchor="t">
             <a:normAutofit/>
           </a:bodyPr>
           <a:lstStyle/>
@@ -15838,7 +16116,7 @@
               <a:buNone/>
             </a:pPr>
             <a:r>
-              <a:rPr lang="en-US" sz="1550" dirty="0">
+              <a:rPr lang="en-US" sz="1320" dirty="0">
                 <a:solidFill>
                   <a:srgbClr val="17364A"/>
                 </a:solidFill>
@@ -15846,9 +16124,9 @@
                 <a:ea typeface="Aptos" pitchFamily="34" charset="-122"/>
                 <a:cs typeface="Aptos" pitchFamily="34" charset="-120"/>
               </a:rPr>
-              <a:t>Connect the concept to public health purpose, responsible use, required safeguards, documentation, and the next action a department should take.</a:t>
-            </a:r>
-            <a:endParaRPr lang="en-US" sz="1550" dirty="0"/>
+              <a:t>Connect the concept to public health purpose, responsible use, required safeguards, documentation, and the next action a.</a:t>
+            </a:r>
+            <a:endParaRPr lang="en-US" sz="1320" dirty="0"/>
           </a:p>
         </p:txBody>
       </p:sp>
@@ -16149,49 +16427,58 @@
           <a:ln/>
         </p:spPr>
         <p:txBody>
-          <a:bodyPr wrap="square" lIns="635" tIns="635" rIns="635" bIns="635" rtlCol="0" anchor="t">
+          <a:bodyPr wrap="square" lIns="1016" tIns="1016" rIns="1016" bIns="1016" rtlCol="0" anchor="t">
             <a:normAutofit/>
           </a:bodyPr>
           <a:lstStyle/>
           <a:p>
+            <a:pPr indent="0" marL="0">
+              <a:buNone/>
+            </a:pPr>
             <a:r>
               <a:rPr lang="en-US" sz="2100" dirty="0">
                 <a:solidFill>
-                  <a:srgbClr val="17364A"/>
-                </a:solidFill>
-                <a:latin typeface="Aptos" pitchFamily="34" charset="0"/>
-                <a:ea typeface="Aptos" pitchFamily="34" charset="-122"/>
-                <a:cs typeface="Aptos" pitchFamily="34" charset="-120"/>
-              </a:rPr>
-              <a:t>This national-level module is intended for training and planning purposes.</a:t>
+                  <a:srgbClr val="003A63"/>
+                </a:solidFill>
+                <a:latin typeface="Aptos" pitchFamily="34" charset="0"/>
+                <a:ea typeface="Aptos" pitchFamily="34" charset="-122"/>
+                <a:cs typeface="Aptos" pitchFamily="34" charset="-120"/>
+              </a:rPr>
+              <a:t>• This national-level module is intended for training and planning purposes.</a:t>
             </a:r>
             <a:endParaRPr lang="en-US" sz="2100" dirty="0"/>
           </a:p>
           <a:p>
+            <a:pPr indent="0" marL="0">
+              <a:buNone/>
+            </a:pPr>
             <a:r>
               <a:rPr lang="en-US" sz="2100" dirty="0">
                 <a:solidFill>
-                  <a:srgbClr val="17364A"/>
-                </a:solidFill>
-                <a:latin typeface="Aptos" pitchFamily="34" charset="0"/>
-                <a:ea typeface="Aptos" pitchFamily="34" charset="-122"/>
-                <a:cs typeface="Aptos" pitchFamily="34" charset="-120"/>
-              </a:rPr>
-              <a:t>It does not replace legal, privacy, procurement, civil rights, records, or agency policy review.</a:t>
+                  <a:srgbClr val="003A63"/>
+                </a:solidFill>
+                <a:latin typeface="Aptos" pitchFamily="34" charset="0"/>
+                <a:ea typeface="Aptos" pitchFamily="34" charset="-122"/>
+                <a:cs typeface="Aptos" pitchFamily="34" charset="-120"/>
+              </a:rPr>
+              <a:t>• It does not replace legal, privacy, procurement, civil rights, records, or agency policy review.</a:t>
             </a:r>
             <a:endParaRPr lang="en-US" sz="2100" dirty="0"/>
           </a:p>
           <a:p>
+            <a:pPr indent="0" marL="0">
+              <a:buNone/>
+            </a:pPr>
             <a:r>
               <a:rPr lang="en-US" sz="2100" dirty="0">
                 <a:solidFill>
-                  <a:srgbClr val="17364A"/>
-                </a:solidFill>
-                <a:latin typeface="Aptos" pitchFamily="34" charset="0"/>
-                <a:ea typeface="Aptos" pitchFamily="34" charset="-122"/>
-                <a:cs typeface="Aptos" pitchFamily="34" charset="-120"/>
-              </a:rPr>
-              <a:t>Learners should confirm applicable requirements in their own jurisdiction and organization before.</a:t>
+                  <a:srgbClr val="003A63"/>
+                </a:solidFill>
+                <a:latin typeface="Aptos" pitchFamily="34" charset="0"/>
+                <a:ea typeface="Aptos" pitchFamily="34" charset="-122"/>
+                <a:cs typeface="Aptos" pitchFamily="34" charset="-120"/>
+              </a:rPr>
+              <a:t>• Learners should confirm applicable requirements in their own jurisdiction and organization.</a:t>
             </a:r>
             <a:endParaRPr lang="en-US" sz="2100" dirty="0"/>
           </a:p>
@@ -16271,17 +16558,17 @@
         </p:nvSpPr>
         <p:spPr>
           <a:xfrm>
-            <a:off x="7799832" y="1828800"/>
-            <a:ext cx="3145536" cy="685800"/>
-          </a:xfrm>
-          <a:prstGeom prst="rect">
-            <a:avLst/>
-          </a:prstGeom>
-          <a:noFill/>
-          <a:ln/>
-        </p:spPr>
-        <p:txBody>
-          <a:bodyPr wrap="square" lIns="0" tIns="0" rIns="0" bIns="0" rtlCol="0" anchor="t">
+            <a:off x="7799832" y="1801368"/>
+            <a:ext cx="3145536" cy="758952"/>
+          </a:xfrm>
+          <a:prstGeom prst="rect">
+            <a:avLst/>
+          </a:prstGeom>
+          <a:noFill/>
+          <a:ln/>
+        </p:spPr>
+        <p:txBody>
+          <a:bodyPr wrap="square" lIns="254" tIns="254" rIns="254" bIns="254" rtlCol="0" anchor="t">
             <a:normAutofit/>
           </a:bodyPr>
           <a:lstStyle/>
@@ -16290,7 +16577,7 @@
               <a:buNone/>
             </a:pPr>
             <a:r>
-              <a:rPr lang="en-US" sz="1550" dirty="0">
+              <a:rPr lang="en-US" sz="1320" dirty="0">
                 <a:solidFill>
                   <a:srgbClr val="17364A"/>
                 </a:solidFill>
@@ -16300,7 +16587,7 @@
               </a:rPr>
               <a:t>This national-level module is intended for training and planning purposes.</a:t>
             </a:r>
-            <a:endParaRPr lang="en-US" sz="1550" dirty="0"/>
+            <a:endParaRPr lang="en-US" sz="1320" dirty="0"/>
           </a:p>
         </p:txBody>
       </p:sp>
@@ -16388,13 +16675,16 @@
           <a:ln/>
         </p:spPr>
         <p:txBody>
-          <a:bodyPr wrap="square" lIns="254" tIns="254" rIns="254" bIns="254" rtlCol="0" anchor="t">
+          <a:bodyPr wrap="square" lIns="508" tIns="508" rIns="508" bIns="508" rtlCol="0" anchor="t">
             <a:normAutofit/>
           </a:bodyPr>
           <a:lstStyle/>
           <a:p>
-            <a:r>
-              <a:rPr lang="en-US" sz="1380" dirty="0">
+            <a:pPr indent="0" marL="0">
+              <a:buNone/>
+            </a:pPr>
+            <a:r>
+              <a:rPr lang="en-US" sz="1220" dirty="0">
                 <a:solidFill>
                   <a:srgbClr val="17364A"/>
                 </a:solidFill>
@@ -16402,13 +16692,16 @@
                 <a:ea typeface="Aptos" pitchFamily="34" charset="-122"/>
                 <a:cs typeface="Aptos" pitchFamily="34" charset="-120"/>
               </a:rPr>
-              <a:t>This national-level module is intended for training and planning purposes.</a:t>
-            </a:r>
-            <a:endParaRPr lang="en-US" sz="1380" dirty="0"/>
-          </a:p>
-          <a:p>
-            <a:r>
-              <a:rPr lang="en-US" sz="1380" dirty="0">
+              <a:t>This national-level module is intended for training and planning.</a:t>
+            </a:r>
+            <a:endParaRPr lang="en-US" sz="1220" dirty="0"/>
+          </a:p>
+          <a:p>
+            <a:pPr indent="0" marL="0">
+              <a:buNone/>
+            </a:pPr>
+            <a:r>
+              <a:rPr lang="en-US" sz="1220" dirty="0">
                 <a:solidFill>
                   <a:srgbClr val="17364A"/>
                 </a:solidFill>
@@ -16416,13 +16709,16 @@
                 <a:ea typeface="Aptos" pitchFamily="34" charset="-122"/>
                 <a:cs typeface="Aptos" pitchFamily="34" charset="-120"/>
               </a:rPr>
-              <a:t>It does not replace legal, privacy, procurement, civil rights, records, or agency policy.</a:t>
-            </a:r>
-            <a:endParaRPr lang="en-US" sz="1380" dirty="0"/>
-          </a:p>
-          <a:p>
-            <a:r>
-              <a:rPr lang="en-US" sz="1380" dirty="0">
+              <a:t>It does not replace legal, privacy, procurement, civil rights,.</a:t>
+            </a:r>
+            <a:endParaRPr lang="en-US" sz="1220" dirty="0"/>
+          </a:p>
+          <a:p>
+            <a:pPr indent="0" marL="0">
+              <a:buNone/>
+            </a:pPr>
+            <a:r>
+              <a:rPr lang="en-US" sz="1220" dirty="0">
                 <a:solidFill>
                   <a:srgbClr val="17364A"/>
                 </a:solidFill>
@@ -16430,9 +16726,9 @@
                 <a:ea typeface="Aptos" pitchFamily="34" charset="-122"/>
                 <a:cs typeface="Aptos" pitchFamily="34" charset="-120"/>
               </a:rPr>
-              <a:t>Learners should confirm applicable requirements in their own jurisdiction and organization.</a:t>
-            </a:r>
-            <a:endParaRPr lang="en-US" sz="1380" dirty="0"/>
+              <a:t>Learners should confirm applicable requirements in their own.</a:t>
+            </a:r>
+            <a:endParaRPr lang="en-US" sz="1220" dirty="0"/>
           </a:p>
         </p:txBody>
       </p:sp>
@@ -16510,17 +16806,17 @@
         </p:nvSpPr>
         <p:spPr>
           <a:xfrm>
-            <a:off x="7799832" y="5001768"/>
-            <a:ext cx="3145536" cy="502920"/>
-          </a:xfrm>
-          <a:prstGeom prst="rect">
-            <a:avLst/>
-          </a:prstGeom>
-          <a:noFill/>
-          <a:ln/>
-        </p:spPr>
-        <p:txBody>
-          <a:bodyPr wrap="square" lIns="0" tIns="0" rIns="0" bIns="0" rtlCol="0" anchor="t">
+            <a:off x="7799832" y="4974336"/>
+            <a:ext cx="3145536" cy="576072"/>
+          </a:xfrm>
+          <a:prstGeom prst="rect">
+            <a:avLst/>
+          </a:prstGeom>
+          <a:noFill/>
+          <a:ln/>
+        </p:spPr>
+        <p:txBody>
+          <a:bodyPr wrap="square" lIns="254" tIns="254" rIns="254" bIns="254" rtlCol="0" anchor="t">
             <a:normAutofit/>
           </a:bodyPr>
           <a:lstStyle/>
@@ -16529,7 +16825,7 @@
               <a:buNone/>
             </a:pPr>
             <a:r>
-              <a:rPr lang="en-US" sz="1550" dirty="0">
+              <a:rPr lang="en-US" sz="1320" dirty="0">
                 <a:solidFill>
                   <a:srgbClr val="17364A"/>
                 </a:solidFill>
@@ -16537,9 +16833,9 @@
                 <a:ea typeface="Aptos" pitchFamily="34" charset="-122"/>
                 <a:cs typeface="Aptos" pitchFamily="34" charset="-120"/>
               </a:rPr>
-              <a:t>Translate this concept into clear decision rights, review steps, documentation expectations, and escalation paths before an AI-supported workflow is approved.</a:t>
-            </a:r>
-            <a:endParaRPr lang="en-US" sz="1550" dirty="0"/>
+              <a:t>Translate this concept into clear decision rights, review steps, documentation expectations, and escalation paths before.</a:t>
+            </a:r>
+            <a:endParaRPr lang="en-US" sz="1320" dirty="0"/>
           </a:p>
         </p:txBody>
       </p:sp>
@@ -16840,49 +17136,58 @@
           <a:ln/>
         </p:spPr>
         <p:txBody>
-          <a:bodyPr wrap="square" lIns="635" tIns="635" rIns="635" bIns="635" rtlCol="0" anchor="t">
+          <a:bodyPr wrap="square" lIns="1016" tIns="1016" rIns="1016" bIns="1016" rtlCol="0" anchor="t">
             <a:normAutofit/>
           </a:bodyPr>
           <a:lstStyle/>
           <a:p>
+            <a:pPr indent="0" marL="0">
+              <a:buNone/>
+            </a:pPr>
             <a:r>
               <a:rPr lang="en-US" sz="2100" dirty="0">
                 <a:solidFill>
-                  <a:srgbClr val="17364A"/>
-                </a:solidFill>
-                <a:latin typeface="Aptos" pitchFamily="34" charset="0"/>
-                <a:ea typeface="Aptos" pitchFamily="34" charset="-122"/>
-                <a:cs typeface="Aptos" pitchFamily="34" charset="-120"/>
-              </a:rPr>
-              <a:t>During a foodborne illness investigation, AI is used to summarize interview notes and extract possible.</a:t>
+                  <a:srgbClr val="003A63"/>
+                </a:solidFill>
+                <a:latin typeface="Aptos" pitchFamily="34" charset="0"/>
+                <a:ea typeface="Aptos" pitchFamily="34" charset="-122"/>
+                <a:cs typeface="Aptos" pitchFamily="34" charset="-120"/>
+              </a:rPr>
+              <a:t>• During a foodborne illness investigation, AI is used to summarize interview notes and extract.</a:t>
             </a:r>
             <a:endParaRPr lang="en-US" sz="2100" dirty="0"/>
           </a:p>
           <a:p>
+            <a:pPr indent="0" marL="0">
+              <a:buNone/>
+            </a:pPr>
             <a:r>
               <a:rPr lang="en-US" sz="2100" dirty="0">
                 <a:solidFill>
-                  <a:srgbClr val="17364A"/>
-                </a:solidFill>
-                <a:latin typeface="Aptos" pitchFamily="34" charset="0"/>
-                <a:ea typeface="Aptos" pitchFamily="34" charset="-122"/>
-                <a:cs typeface="Aptos" pitchFamily="34" charset="-120"/>
-              </a:rPr>
-              <a:t>Investigators compare the extracted exposures to original notes, review uncertain or conflicting.</a:t>
+                  <a:srgbClr val="003A63"/>
+                </a:solidFill>
+                <a:latin typeface="Aptos" pitchFamily="34" charset="0"/>
+                <a:ea typeface="Aptos" pitchFamily="34" charset="-122"/>
+                <a:cs typeface="Aptos" pitchFamily="34" charset="-120"/>
+              </a:rPr>
+              <a:t>• Investigators compare the extracted exposures to original notes, review uncertain or.</a:t>
             </a:r>
             <a:endParaRPr lang="en-US" sz="2100" dirty="0"/>
           </a:p>
           <a:p>
+            <a:pPr indent="0" marL="0">
+              <a:buNone/>
+            </a:pPr>
             <a:r>
               <a:rPr lang="en-US" sz="2100" dirty="0">
                 <a:solidFill>
-                  <a:srgbClr val="17364A"/>
-                </a:solidFill>
-                <a:latin typeface="Aptos" pitchFamily="34" charset="0"/>
-                <a:ea typeface="Aptos" pitchFamily="34" charset="-122"/>
-                <a:cs typeface="Aptos" pitchFamily="34" charset="-120"/>
-              </a:rPr>
-              <a:t>The tool helps reduce manual review time, but it does not determine the outbreak source or issue public.</a:t>
+                  <a:srgbClr val="003A63"/>
+                </a:solidFill>
+                <a:latin typeface="Aptos" pitchFamily="34" charset="0"/>
+                <a:ea typeface="Aptos" pitchFamily="34" charset="-122"/>
+                <a:cs typeface="Aptos" pitchFamily="34" charset="-120"/>
+              </a:rPr>
+              <a:t>• The tool helps reduce manual review time, but it does not determine the outbreak source or.</a:t>
             </a:r>
             <a:endParaRPr lang="en-US" sz="2100" dirty="0"/>
           </a:p>
@@ -16962,17 +17267,17 @@
         </p:nvSpPr>
         <p:spPr>
           <a:xfrm>
-            <a:off x="7799832" y="1828800"/>
-            <a:ext cx="3145536" cy="685800"/>
-          </a:xfrm>
-          <a:prstGeom prst="rect">
-            <a:avLst/>
-          </a:prstGeom>
-          <a:noFill/>
-          <a:ln/>
-        </p:spPr>
-        <p:txBody>
-          <a:bodyPr wrap="square" lIns="0" tIns="0" rIns="0" bIns="0" rtlCol="0" anchor="t">
+            <a:off x="7799832" y="1801368"/>
+            <a:ext cx="3145536" cy="758952"/>
+          </a:xfrm>
+          <a:prstGeom prst="rect">
+            <a:avLst/>
+          </a:prstGeom>
+          <a:noFill/>
+          <a:ln/>
+        </p:spPr>
+        <p:txBody>
+          <a:bodyPr wrap="square" lIns="254" tIns="254" rIns="254" bIns="254" rtlCol="0" anchor="t">
             <a:normAutofit/>
           </a:bodyPr>
           <a:lstStyle/>
@@ -16981,7 +17286,7 @@
               <a:buNone/>
             </a:pPr>
             <a:r>
-              <a:rPr lang="en-US" sz="1550" dirty="0">
+              <a:rPr lang="en-US" sz="1320" dirty="0">
                 <a:solidFill>
                   <a:srgbClr val="17364A"/>
                 </a:solidFill>
@@ -16991,7 +17296,7 @@
               </a:rPr>
               <a:t>During a foodborne illness investigation, AI is used to summarize interview notes and extract possible.</a:t>
             </a:r>
-            <a:endParaRPr lang="en-US" sz="1550" dirty="0"/>
+            <a:endParaRPr lang="en-US" sz="1320" dirty="0"/>
           </a:p>
         </p:txBody>
       </p:sp>
@@ -17079,13 +17384,16 @@
           <a:ln/>
         </p:spPr>
         <p:txBody>
-          <a:bodyPr wrap="square" lIns="254" tIns="254" rIns="254" bIns="254" rtlCol="0" anchor="t">
+          <a:bodyPr wrap="square" lIns="508" tIns="508" rIns="508" bIns="508" rtlCol="0" anchor="t">
             <a:normAutofit/>
           </a:bodyPr>
           <a:lstStyle/>
           <a:p>
-            <a:r>
-              <a:rPr lang="en-US" sz="1380" dirty="0">
+            <a:pPr indent="0" marL="0">
+              <a:buNone/>
+            </a:pPr>
+            <a:r>
+              <a:rPr lang="en-US" sz="1220" dirty="0">
                 <a:solidFill>
                   <a:srgbClr val="17364A"/>
                 </a:solidFill>
@@ -17093,13 +17401,16 @@
                 <a:ea typeface="Aptos" pitchFamily="34" charset="-122"/>
                 <a:cs typeface="Aptos" pitchFamily="34" charset="-120"/>
               </a:rPr>
-              <a:t>During a foodborne illness investigation, AI is used to summarize interview notes and.</a:t>
-            </a:r>
-            <a:endParaRPr lang="en-US" sz="1380" dirty="0"/>
-          </a:p>
-          <a:p>
-            <a:r>
-              <a:rPr lang="en-US" sz="1380" dirty="0">
+              <a:t>During a foodborne illness investigation, AI is used to summarize.</a:t>
+            </a:r>
+            <a:endParaRPr lang="en-US" sz="1220" dirty="0"/>
+          </a:p>
+          <a:p>
+            <a:pPr indent="0" marL="0">
+              <a:buNone/>
+            </a:pPr>
+            <a:r>
+              <a:rPr lang="en-US" sz="1220" dirty="0">
                 <a:solidFill>
                   <a:srgbClr val="17364A"/>
                 </a:solidFill>
@@ -17107,13 +17418,16 @@
                 <a:ea typeface="Aptos" pitchFamily="34" charset="-122"/>
                 <a:cs typeface="Aptos" pitchFamily="34" charset="-120"/>
               </a:rPr>
-              <a:t>Investigators compare the extracted exposures to original notes, review uncertain or.</a:t>
-            </a:r>
-            <a:endParaRPr lang="en-US" sz="1380" dirty="0"/>
-          </a:p>
-          <a:p>
-            <a:r>
-              <a:rPr lang="en-US" sz="1380" dirty="0">
+              <a:t>Investigators compare the extracted exposures to original notes,.</a:t>
+            </a:r>
+            <a:endParaRPr lang="en-US" sz="1220" dirty="0"/>
+          </a:p>
+          <a:p>
+            <a:pPr indent="0" marL="0">
+              <a:buNone/>
+            </a:pPr>
+            <a:r>
+              <a:rPr lang="en-US" sz="1220" dirty="0">
                 <a:solidFill>
                   <a:srgbClr val="17364A"/>
                 </a:solidFill>
@@ -17121,9 +17435,9 @@
                 <a:ea typeface="Aptos" pitchFamily="34" charset="-122"/>
                 <a:cs typeface="Aptos" pitchFamily="34" charset="-120"/>
               </a:rPr>
-              <a:t>The tool helps reduce manual review time, but it does not determine the outbreak source or.</a:t>
-            </a:r>
-            <a:endParaRPr lang="en-US" sz="1380" dirty="0"/>
+              <a:t>The tool helps reduce manual review time, but it does not.</a:t>
+            </a:r>
+            <a:endParaRPr lang="en-US" sz="1220" dirty="0"/>
           </a:p>
         </p:txBody>
       </p:sp>
@@ -17201,17 +17515,17 @@
         </p:nvSpPr>
         <p:spPr>
           <a:xfrm>
-            <a:off x="7799832" y="5001768"/>
-            <a:ext cx="3145536" cy="502920"/>
-          </a:xfrm>
-          <a:prstGeom prst="rect">
-            <a:avLst/>
-          </a:prstGeom>
-          <a:noFill/>
-          <a:ln/>
-        </p:spPr>
-        <p:txBody>
-          <a:bodyPr wrap="square" lIns="0" tIns="0" rIns="0" bIns="0" rtlCol="0" anchor="t">
+            <a:off x="7799832" y="4974336"/>
+            <a:ext cx="3145536" cy="576072"/>
+          </a:xfrm>
+          <a:prstGeom prst="rect">
+            <a:avLst/>
+          </a:prstGeom>
+          <a:noFill/>
+          <a:ln/>
+        </p:spPr>
+        <p:txBody>
+          <a:bodyPr wrap="square" lIns="254" tIns="254" rIns="254" bIns="254" rtlCol="0" anchor="t">
             <a:normAutofit/>
           </a:bodyPr>
           <a:lstStyle/>
@@ -17220,7 +17534,7 @@
               <a:buNone/>
             </a:pPr>
             <a:r>
-              <a:rPr lang="en-US" sz="1550" dirty="0">
+              <a:rPr lang="en-US" sz="1320" dirty="0">
                 <a:solidFill>
                   <a:srgbClr val="17364A"/>
                 </a:solidFill>
@@ -17228,9 +17542,9 @@
                 <a:ea typeface="Aptos" pitchFamily="34" charset="-122"/>
                 <a:cs typeface="Aptos" pitchFamily="34" charset="-120"/>
               </a:rPr>
-              <a:t>Connect the concept to public health purpose, responsible use, required safeguards, documentation, and the next action a department should take.</a:t>
-            </a:r>
-            <a:endParaRPr lang="en-US" sz="1550" dirty="0"/>
+              <a:t>Connect the concept to public health purpose, responsible use, required safeguards, documentation, and the next action a.</a:t>
+            </a:r>
+            <a:endParaRPr lang="en-US" sz="1320" dirty="0"/>
           </a:p>
         </p:txBody>
       </p:sp>
@@ -17531,49 +17845,58 @@
           <a:ln/>
         </p:spPr>
         <p:txBody>
-          <a:bodyPr wrap="square" lIns="635" tIns="635" rIns="635" bIns="635" rtlCol="0" anchor="t">
+          <a:bodyPr wrap="square" lIns="1016" tIns="1016" rIns="1016" bIns="1016" rtlCol="0" anchor="t">
             <a:normAutofit/>
           </a:bodyPr>
           <a:lstStyle/>
           <a:p>
+            <a:pPr indent="0" marL="0">
+              <a:buNone/>
+            </a:pPr>
             <a:r>
               <a:rPr lang="en-US" sz="2100" dirty="0">
                 <a:solidFill>
-                  <a:srgbClr val="17364A"/>
-                </a:solidFill>
-                <a:latin typeface="Aptos" pitchFamily="34" charset="0"/>
-                <a:ea typeface="Aptos" pitchFamily="34" charset="-122"/>
-                <a:cs typeface="Aptos" pitchFamily="34" charset="-120"/>
-              </a:rPr>
-              <a:t>AI can support case investigation by reducing the burden of reviewing large volumes of information.</a:t>
+                  <a:srgbClr val="003A63"/>
+                </a:solidFill>
+                <a:latin typeface="Aptos" pitchFamily="34" charset="0"/>
+                <a:ea typeface="Aptos" pitchFamily="34" charset="-122"/>
+                <a:cs typeface="Aptos" pitchFamily="34" charset="-120"/>
+              </a:rPr>
+              <a:t>• AI can support case investigation by reducing the burden of reviewing large volumes of.</a:t>
             </a:r>
             <a:endParaRPr lang="en-US" sz="2100" dirty="0"/>
           </a:p>
           <a:p>
+            <a:pPr indent="0" marL="0">
+              <a:buNone/>
+            </a:pPr>
             <a:r>
               <a:rPr lang="en-US" sz="2100" dirty="0">
                 <a:solidFill>
-                  <a:srgbClr val="17364A"/>
-                </a:solidFill>
-                <a:latin typeface="Aptos" pitchFamily="34" charset="0"/>
-                <a:ea typeface="Aptos" pitchFamily="34" charset="-122"/>
-                <a:cs typeface="Aptos" pitchFamily="34" charset="-120"/>
-              </a:rPr>
-              <a:t>Natural language processing and generative AI may help summarize case notes, identify missing fields,.</a:t>
+                  <a:srgbClr val="003A63"/>
+                </a:solidFill>
+                <a:latin typeface="Aptos" pitchFamily="34" charset="0"/>
+                <a:ea typeface="Aptos" pitchFamily="34" charset="-122"/>
+                <a:cs typeface="Aptos" pitchFamily="34" charset="-120"/>
+              </a:rPr>
+              <a:t>• Natural language processing and generative AI may help summarize case notes, identify missing.</a:t>
             </a:r>
             <a:endParaRPr lang="en-US" sz="2100" dirty="0"/>
           </a:p>
           <a:p>
+            <a:pPr indent="0" marL="0">
+              <a:buNone/>
+            </a:pPr>
             <a:r>
               <a:rPr lang="en-US" sz="2100" dirty="0">
                 <a:solidFill>
-                  <a:srgbClr val="17364A"/>
-                </a:solidFill>
-                <a:latin typeface="Aptos" pitchFamily="34" charset="0"/>
-                <a:ea typeface="Aptos" pitchFamily="34" charset="-122"/>
-                <a:cs typeface="Aptos" pitchFamily="34" charset="-120"/>
-              </a:rPr>
-              <a:t>These tasks are appropriate only when outputs are traceable to source material and investigators can.</a:t>
+                  <a:srgbClr val="003A63"/>
+                </a:solidFill>
+                <a:latin typeface="Aptos" pitchFamily="34" charset="0"/>
+                <a:ea typeface="Aptos" pitchFamily="34" charset="-122"/>
+                <a:cs typeface="Aptos" pitchFamily="34" charset="-120"/>
+              </a:rPr>
+              <a:t>• These tasks are appropriate only when outputs are traceable to source material and.</a:t>
             </a:r>
             <a:endParaRPr lang="en-US" sz="2100" dirty="0"/>
           </a:p>
@@ -17653,17 +17976,17 @@
         </p:nvSpPr>
         <p:spPr>
           <a:xfrm>
-            <a:off x="7799832" y="1828800"/>
-            <a:ext cx="3145536" cy="685800"/>
-          </a:xfrm>
-          <a:prstGeom prst="rect">
-            <a:avLst/>
-          </a:prstGeom>
-          <a:noFill/>
-          <a:ln/>
-        </p:spPr>
-        <p:txBody>
-          <a:bodyPr wrap="square" lIns="0" tIns="0" rIns="0" bIns="0" rtlCol="0" anchor="t">
+            <a:off x="7799832" y="1801368"/>
+            <a:ext cx="3145536" cy="758952"/>
+          </a:xfrm>
+          <a:prstGeom prst="rect">
+            <a:avLst/>
+          </a:prstGeom>
+          <a:noFill/>
+          <a:ln/>
+        </p:spPr>
+        <p:txBody>
+          <a:bodyPr wrap="square" lIns="254" tIns="254" rIns="254" bIns="254" rtlCol="0" anchor="t">
             <a:normAutofit/>
           </a:bodyPr>
           <a:lstStyle/>
@@ -17672,7 +17995,7 @@
               <a:buNone/>
             </a:pPr>
             <a:r>
-              <a:rPr lang="en-US" sz="1550" dirty="0">
+              <a:rPr lang="en-US" sz="1320" dirty="0">
                 <a:solidFill>
                   <a:srgbClr val="17364A"/>
                 </a:solidFill>
@@ -17682,7 +18005,7 @@
               </a:rPr>
               <a:t>AI can support case investigation by reducing the burden of reviewing large volumes of information.</a:t>
             </a:r>
-            <a:endParaRPr lang="en-US" sz="1550" dirty="0"/>
+            <a:endParaRPr lang="en-US" sz="1320" dirty="0"/>
           </a:p>
         </p:txBody>
       </p:sp>
@@ -17770,13 +18093,16 @@
           <a:ln/>
         </p:spPr>
         <p:txBody>
-          <a:bodyPr wrap="square" lIns="254" tIns="254" rIns="254" bIns="254" rtlCol="0" anchor="t">
+          <a:bodyPr wrap="square" lIns="508" tIns="508" rIns="508" bIns="508" rtlCol="0" anchor="t">
             <a:normAutofit/>
           </a:bodyPr>
           <a:lstStyle/>
           <a:p>
-            <a:r>
-              <a:rPr lang="en-US" sz="1380" dirty="0">
+            <a:pPr indent="0" marL="0">
+              <a:buNone/>
+            </a:pPr>
+            <a:r>
+              <a:rPr lang="en-US" sz="1220" dirty="0">
                 <a:solidFill>
                   <a:srgbClr val="17364A"/>
                 </a:solidFill>
@@ -17784,13 +18110,16 @@
                 <a:ea typeface="Aptos" pitchFamily="34" charset="-122"/>
                 <a:cs typeface="Aptos" pitchFamily="34" charset="-120"/>
               </a:rPr>
-              <a:t>Natural language processing and generative AI may help summarize case notes, identify.</a:t>
-            </a:r>
-            <a:endParaRPr lang="en-US" sz="1380" dirty="0"/>
-          </a:p>
-          <a:p>
-            <a:r>
-              <a:rPr lang="en-US" sz="1380" dirty="0">
+              <a:t>Natural language processing and generative AI may help summarize.</a:t>
+            </a:r>
+            <a:endParaRPr lang="en-US" sz="1220" dirty="0"/>
+          </a:p>
+          <a:p>
+            <a:pPr indent="0" marL="0">
+              <a:buNone/>
+            </a:pPr>
+            <a:r>
+              <a:rPr lang="en-US" sz="1220" dirty="0">
                 <a:solidFill>
                   <a:srgbClr val="17364A"/>
                 </a:solidFill>
@@ -17798,13 +18127,16 @@
                 <a:ea typeface="Aptos" pitchFamily="34" charset="-122"/>
                 <a:cs typeface="Aptos" pitchFamily="34" charset="-120"/>
               </a:rPr>
-              <a:t>These tasks are appropriate only when outputs are traceable to source material and.</a:t>
-            </a:r>
-            <a:endParaRPr lang="en-US" sz="1380" dirty="0"/>
-          </a:p>
-          <a:p>
-            <a:r>
-              <a:rPr lang="en-US" sz="1380" dirty="0">
+              <a:t>These tasks are appropriate only when outputs are traceable to.</a:t>
+            </a:r>
+            <a:endParaRPr lang="en-US" sz="1220" dirty="0"/>
+          </a:p>
+          <a:p>
+            <a:pPr indent="0" marL="0">
+              <a:buNone/>
+            </a:pPr>
+            <a:r>
+              <a:rPr lang="en-US" sz="1220" dirty="0">
                 <a:solidFill>
                   <a:srgbClr val="17364A"/>
                 </a:solidFill>
@@ -17812,9 +18144,9 @@
                 <a:ea typeface="Aptos" pitchFamily="34" charset="-122"/>
                 <a:cs typeface="Aptos" pitchFamily="34" charset="-120"/>
               </a:rPr>
-              <a:t>Outbreak response may involve signal detection, anomaly review, geospatial patterns,.</a:t>
-            </a:r>
-            <a:endParaRPr lang="en-US" sz="1380" dirty="0"/>
+              <a:t>Outbreak response may involve signal detection, anomaly review,.</a:t>
+            </a:r>
+            <a:endParaRPr lang="en-US" sz="1220" dirty="0"/>
           </a:p>
         </p:txBody>
       </p:sp>
@@ -17892,17 +18224,17 @@
         </p:nvSpPr>
         <p:spPr>
           <a:xfrm>
-            <a:off x="7799832" y="5001768"/>
-            <a:ext cx="3145536" cy="502920"/>
-          </a:xfrm>
-          <a:prstGeom prst="rect">
-            <a:avLst/>
-          </a:prstGeom>
-          <a:noFill/>
-          <a:ln/>
-        </p:spPr>
-        <p:txBody>
-          <a:bodyPr wrap="square" lIns="0" tIns="0" rIns="0" bIns="0" rtlCol="0" anchor="t">
+            <a:off x="7799832" y="4974336"/>
+            <a:ext cx="3145536" cy="576072"/>
+          </a:xfrm>
+          <a:prstGeom prst="rect">
+            <a:avLst/>
+          </a:prstGeom>
+          <a:noFill/>
+          <a:ln/>
+        </p:spPr>
+        <p:txBody>
+          <a:bodyPr wrap="square" lIns="254" tIns="254" rIns="254" bIns="254" rtlCol="0" anchor="t">
             <a:normAutofit/>
           </a:bodyPr>
           <a:lstStyle/>
@@ -17911,7 +18243,7 @@
               <a:buNone/>
             </a:pPr>
             <a:r>
-              <a:rPr lang="en-US" sz="1550" dirty="0">
+              <a:rPr lang="en-US" sz="1320" dirty="0">
                 <a:solidFill>
                   <a:srgbClr val="17364A"/>
                 </a:solidFill>
@@ -17919,9 +18251,9 @@
                 <a:ea typeface="Aptos" pitchFamily="34" charset="-122"/>
                 <a:cs typeface="Aptos" pitchFamily="34" charset="-120"/>
               </a:rPr>
-              <a:t>Connect the concept to public health purpose, responsible use, required safeguards, documentation, and the next action a department should take.</a:t>
-            </a:r>
-            <a:endParaRPr lang="en-US" sz="1550" dirty="0"/>
+              <a:t>Connect the concept to public health purpose, responsible use, required safeguards, documentation, and the next action a.</a:t>
+            </a:r>
+            <a:endParaRPr lang="en-US" sz="1320" dirty="0"/>
           </a:p>
         </p:txBody>
       </p:sp>

--- a/downloads/presentations/modules/epi-300.pptx
+++ b/downloads/presentations/modules/epi-300.pptx
@@ -3513,11 +3513,11 @@
         <p:spPr>
           <a:xfrm>
             <a:off x="7635240" y="1325880"/>
-            <a:ext cx="3474720" cy="1325880"/>
+            <a:ext cx="3474720" cy="1207008"/>
           </a:xfrm>
           <a:prstGeom prst="roundRect">
             <a:avLst>
-              <a:gd name="adj" fmla="val 8276"/>
+              <a:gd name="adj" fmla="val 9091"/>
             </a:avLst>
           </a:prstGeom>
           <a:solidFill>
@@ -3579,7 +3579,7 @@
         <p:spPr>
           <a:xfrm>
             <a:off x="7799832" y="1801368"/>
-            <a:ext cx="3145536" cy="758952"/>
+            <a:ext cx="3145536" cy="640080"/>
           </a:xfrm>
           <a:prstGeom prst="rect">
             <a:avLst/>
@@ -3619,12 +3619,12 @@
         </p:nvSpPr>
         <p:spPr>
           <a:xfrm>
-            <a:off x="7635240" y="2788920"/>
-            <a:ext cx="3474720" cy="1536192"/>
+            <a:off x="7635240" y="2670048"/>
+            <a:ext cx="3474720" cy="1377086"/>
           </a:xfrm>
           <a:prstGeom prst="roundRect">
             <a:avLst>
-              <a:gd name="adj" fmla="val 7143"/>
+              <a:gd name="adj" fmla="val 7968"/>
             </a:avLst>
           </a:prstGeom>
           <a:solidFill>
@@ -3646,7 +3646,7 @@
         </p:nvSpPr>
         <p:spPr>
           <a:xfrm>
-            <a:off x="7799832" y="2935224"/>
+            <a:off x="7799832" y="2816352"/>
             <a:ext cx="3145536" cy="256032"/>
           </a:xfrm>
           <a:prstGeom prst="rect">
@@ -3685,8 +3685,8 @@
         </p:nvSpPr>
         <p:spPr>
           <a:xfrm>
-            <a:off x="7818120" y="3300984"/>
-            <a:ext cx="3090672" cy="877824"/>
+            <a:off x="7818120" y="3182112"/>
+            <a:ext cx="3090672" cy="718718"/>
           </a:xfrm>
           <a:prstGeom prst="rect">
             <a:avLst/>
@@ -3743,12 +3743,12 @@
         </p:nvSpPr>
         <p:spPr>
           <a:xfrm>
-            <a:off x="7635240" y="4498848"/>
-            <a:ext cx="3474720" cy="1143000"/>
+            <a:off x="7635240" y="4184294"/>
+            <a:ext cx="3474720" cy="1466698"/>
           </a:xfrm>
           <a:prstGeom prst="roundRect">
             <a:avLst>
-              <a:gd name="adj" fmla="val 9600"/>
+              <a:gd name="adj" fmla="val 7481"/>
             </a:avLst>
           </a:prstGeom>
           <a:solidFill>
@@ -3770,7 +3770,7 @@
         </p:nvSpPr>
         <p:spPr>
           <a:xfrm>
-            <a:off x="7799832" y="4645152"/>
+            <a:off x="7799832" y="4330598"/>
             <a:ext cx="3145536" cy="256032"/>
           </a:xfrm>
           <a:prstGeom prst="rect">
@@ -3809,8 +3809,8 @@
         </p:nvSpPr>
         <p:spPr>
           <a:xfrm>
-            <a:off x="7799832" y="4974336"/>
-            <a:ext cx="3145536" cy="576072"/>
+            <a:off x="7799832" y="4659782"/>
+            <a:ext cx="3145536" cy="899770"/>
           </a:xfrm>
           <a:prstGeom prst="rect">
             <a:avLst/>
@@ -3836,7 +3836,7 @@
                 <a:ea typeface="Aptos" pitchFamily="34" charset="-122"/>
                 <a:cs typeface="Aptos" pitchFamily="34" charset="-120"/>
               </a:rPr>
-              <a:t>Connect the concept to public health purpose, responsible use, required safeguards, documentation, and the next action a.</a:t>
+              <a:t>Connect the concept to public health purpose, responsible use, required safeguards, documentation, and the next action a department should take.</a:t>
             </a:r>
             <a:endParaRPr lang="en-US" sz="1320" dirty="0"/>
           </a:p>
@@ -4205,11 +4205,11 @@
         <p:spPr>
           <a:xfrm>
             <a:off x="7635240" y="1325880"/>
-            <a:ext cx="3474720" cy="1325880"/>
+            <a:ext cx="3474720" cy="1207008"/>
           </a:xfrm>
           <a:prstGeom prst="roundRect">
             <a:avLst>
-              <a:gd name="adj" fmla="val 8276"/>
+              <a:gd name="adj" fmla="val 9091"/>
             </a:avLst>
           </a:prstGeom>
           <a:solidFill>
@@ -4271,7 +4271,7 @@
         <p:spPr>
           <a:xfrm>
             <a:off x="7799832" y="1801368"/>
-            <a:ext cx="3145536" cy="758952"/>
+            <a:ext cx="3145536" cy="640080"/>
           </a:xfrm>
           <a:prstGeom prst="rect">
             <a:avLst/>
@@ -4311,7 +4311,7 @@
         </p:nvSpPr>
         <p:spPr>
           <a:xfrm>
-            <a:off x="7635240" y="2788920"/>
+            <a:off x="7635240" y="2670048"/>
             <a:ext cx="3474720" cy="1536192"/>
           </a:xfrm>
           <a:prstGeom prst="roundRect">
@@ -4338,8 +4338,8 @@
         </p:nvSpPr>
         <p:spPr>
           <a:xfrm>
-            <a:off x="7799832" y="2935224"/>
-            <a:ext cx="3145536" cy="256032"/>
+            <a:off x="7799832" y="2798064"/>
+            <a:ext cx="3145536" cy="237744"/>
           </a:xfrm>
           <a:prstGeom prst="rect">
             <a:avLst/>
@@ -4355,7 +4355,7 @@
               <a:buNone/>
             </a:pPr>
             <a:r>
-              <a:rPr lang="en-US" sz="1300" b="1" dirty="0">
+              <a:rPr lang="en-US" sz="1250" b="1" dirty="0">
                 <a:solidFill>
                   <a:srgbClr val="0068B7"/>
                 </a:solidFill>
@@ -4363,101 +4363,317 @@
                 <a:ea typeface="Aptos" pitchFamily="34" charset="-122"/>
                 <a:cs typeface="Aptos" pitchFamily="34" charset="-120"/>
               </a:rPr>
-              <a:t>Concept checkpoints</a:t>
-            </a:r>
-            <a:endParaRPr lang="en-US" sz="1300" dirty="0"/>
-          </a:p>
-        </p:txBody>
-      </p:sp>
-      <p:sp>
-        <p:nvSpPr>
-          <p:cNvPr id="15" name="Text 13"/>
-          <p:cNvSpPr/>
-          <p:nvPr/>
-        </p:nvSpPr>
-        <p:spPr>
-          <a:xfrm>
-            <a:off x="7818120" y="3300984"/>
-            <a:ext cx="3090672" cy="877824"/>
-          </a:xfrm>
-          <a:prstGeom prst="rect">
-            <a:avLst/>
-          </a:prstGeom>
-          <a:noFill/>
-          <a:ln/>
-        </p:spPr>
-        <p:txBody>
-          <a:bodyPr wrap="square" lIns="508" tIns="508" rIns="508" bIns="508" rtlCol="0" anchor="t">
+              <a:t>Risk control loop</a:t>
+            </a:r>
+            <a:endParaRPr lang="en-US" sz="1250" dirty="0"/>
+          </a:p>
+        </p:txBody>
+      </p:sp>
+      <p:sp>
+        <p:nvSpPr>
+          <p:cNvPr id="15" name="Shape 13"/>
+          <p:cNvSpPr/>
+          <p:nvPr/>
+        </p:nvSpPr>
+        <p:spPr>
+          <a:xfrm>
+            <a:off x="8763000" y="3351276"/>
+            <a:ext cx="164592" cy="0"/>
+          </a:xfrm>
+          <a:prstGeom prst="line">
+            <a:avLst/>
+          </a:prstGeom>
+          <a:noFill/>
+          <a:ln w="15240">
+            <a:solidFill>
+              <a:srgbClr val="8ABBD8"/>
+            </a:solidFill>
+            <a:prstDash val="solid"/>
+          </a:ln>
+        </p:spPr>
+      </p:sp>
+      <p:sp>
+        <p:nvSpPr>
+          <p:cNvPr id="16" name="Shape 14"/>
+          <p:cNvSpPr/>
+          <p:nvPr/>
+        </p:nvSpPr>
+        <p:spPr>
+          <a:xfrm>
+            <a:off x="7872984" y="3200400"/>
+            <a:ext cx="890016" cy="301752"/>
+          </a:xfrm>
+          <a:prstGeom prst="roundRect">
+            <a:avLst>
+              <a:gd name="adj" fmla="val 24242"/>
+            </a:avLst>
+          </a:prstGeom>
+          <a:solidFill>
+            <a:srgbClr val="0068B7"/>
+          </a:solidFill>
+          <a:ln w="12700">
+            <a:solidFill>
+              <a:srgbClr val="0068B7"/>
+            </a:solidFill>
+            <a:prstDash val="solid"/>
+          </a:ln>
+        </p:spPr>
+      </p:sp>
+      <p:sp>
+        <p:nvSpPr>
+          <p:cNvPr id="17" name="Text 15"/>
+          <p:cNvSpPr/>
+          <p:nvPr/>
+        </p:nvSpPr>
+        <p:spPr>
+          <a:xfrm>
+            <a:off x="7909560" y="3273552"/>
+            <a:ext cx="816864" cy="146304"/>
+          </a:xfrm>
+          <a:prstGeom prst="rect">
+            <a:avLst/>
+          </a:prstGeom>
+          <a:noFill/>
+          <a:ln/>
+        </p:spPr>
+        <p:txBody>
+          <a:bodyPr wrap="square" lIns="0" tIns="0" rIns="0" bIns="0" rtlCol="0" anchor="ctr">
             <a:normAutofit/>
           </a:bodyPr>
           <a:lstStyle/>
           <a:p>
-            <a:pPr indent="0" marL="0">
-              <a:buNone/>
-            </a:pPr>
-            <a:r>
-              <a:rPr lang="en-US" sz="1220" dirty="0">
-                <a:solidFill>
-                  <a:srgbClr val="17364A"/>
-                </a:solidFill>
-                <a:latin typeface="Aptos" pitchFamily="34" charset="0"/>
-                <a:ea typeface="Aptos" pitchFamily="34" charset="-122"/>
-                <a:cs typeface="Aptos" pitchFamily="34" charset="-120"/>
-              </a:rPr>
-              <a:t>Risks and failure modes include the following:</a:t>
-            </a:r>
-            <a:endParaRPr lang="en-US" sz="1220" dirty="0"/>
-          </a:p>
-          <a:p>
-            <a:pPr indent="0" marL="0">
-              <a:buNone/>
-            </a:pPr>
-            <a:r>
-              <a:rPr lang="en-US" sz="1220" dirty="0">
-                <a:solidFill>
-                  <a:srgbClr val="17364A"/>
-                </a:solidFill>
-                <a:latin typeface="Aptos" pitchFamily="34" charset="0"/>
-                <a:ea typeface="Aptos" pitchFamily="34" charset="-122"/>
-                <a:cs typeface="Aptos" pitchFamily="34" charset="-120"/>
-              </a:rPr>
-              <a:t>AI summaries omitting uncertainty or unsupported details.</a:t>
-            </a:r>
-            <a:endParaRPr lang="en-US" sz="1220" dirty="0"/>
-          </a:p>
-          <a:p>
-            <a:pPr indent="0" marL="0">
-              <a:buNone/>
-            </a:pPr>
-            <a:r>
-              <a:rPr lang="en-US" sz="1220" dirty="0">
-                <a:solidFill>
-                  <a:srgbClr val="17364A"/>
-                </a:solidFill>
-                <a:latin typeface="Aptos" pitchFamily="34" charset="0"/>
-                <a:ea typeface="Aptos" pitchFamily="34" charset="-122"/>
-                <a:cs typeface="Aptos" pitchFamily="34" charset="-120"/>
-              </a:rPr>
-              <a:t>False outbreak signals creating unnecessary response or public.</a:t>
-            </a:r>
-            <a:endParaRPr lang="en-US" sz="1220" dirty="0"/>
-          </a:p>
-        </p:txBody>
-      </p:sp>
-      <p:sp>
-        <p:nvSpPr>
-          <p:cNvPr id="16" name="Shape 14"/>
-          <p:cNvSpPr/>
-          <p:nvPr/>
-        </p:nvSpPr>
-        <p:spPr>
-          <a:xfrm>
-            <a:off x="7635240" y="4498848"/>
-            <a:ext cx="3474720" cy="1143000"/>
+            <a:pPr algn="ctr" indent="0" marL="0">
+              <a:buNone/>
+            </a:pPr>
+            <a:r>
+              <a:rPr lang="en-US" sz="880" b="1" dirty="0">
+                <a:solidFill>
+                  <a:srgbClr val="FFFFFF"/>
+                </a:solidFill>
+                <a:latin typeface="Aptos" pitchFamily="34" charset="0"/>
+                <a:ea typeface="Aptos" pitchFamily="34" charset="-122"/>
+                <a:cs typeface="Aptos" pitchFamily="34" charset="-120"/>
+              </a:rPr>
+              <a:t>Identify</a:t>
+            </a:r>
+            <a:endParaRPr lang="en-US" sz="880" dirty="0"/>
+          </a:p>
+        </p:txBody>
+      </p:sp>
+      <p:sp>
+        <p:nvSpPr>
+          <p:cNvPr id="18" name="Shape 16"/>
+          <p:cNvSpPr/>
+          <p:nvPr/>
+        </p:nvSpPr>
+        <p:spPr>
+          <a:xfrm>
+            <a:off x="9817608" y="3351276"/>
+            <a:ext cx="164592" cy="0"/>
+          </a:xfrm>
+          <a:prstGeom prst="line">
+            <a:avLst/>
+          </a:prstGeom>
+          <a:noFill/>
+          <a:ln w="15240">
+            <a:solidFill>
+              <a:srgbClr val="8ABBD8"/>
+            </a:solidFill>
+            <a:prstDash val="solid"/>
+          </a:ln>
+        </p:spPr>
+      </p:sp>
+      <p:sp>
+        <p:nvSpPr>
+          <p:cNvPr id="19" name="Shape 17"/>
+          <p:cNvSpPr/>
+          <p:nvPr/>
+        </p:nvSpPr>
+        <p:spPr>
+          <a:xfrm>
+            <a:off x="8927592" y="3200400"/>
+            <a:ext cx="890016" cy="301752"/>
           </a:xfrm>
           <a:prstGeom prst="roundRect">
             <a:avLst>
-              <a:gd name="adj" fmla="val 9600"/>
+              <a:gd name="adj" fmla="val 24242"/>
+            </a:avLst>
+          </a:prstGeom>
+          <a:solidFill>
+            <a:srgbClr val="2F8A28"/>
+          </a:solidFill>
+          <a:ln w="12700">
+            <a:solidFill>
+              <a:srgbClr val="2F8A28"/>
+            </a:solidFill>
+            <a:prstDash val="solid"/>
+          </a:ln>
+        </p:spPr>
+      </p:sp>
+      <p:sp>
+        <p:nvSpPr>
+          <p:cNvPr id="20" name="Text 18"/>
+          <p:cNvSpPr/>
+          <p:nvPr/>
+        </p:nvSpPr>
+        <p:spPr>
+          <a:xfrm>
+            <a:off x="8964168" y="3273552"/>
+            <a:ext cx="816864" cy="146304"/>
+          </a:xfrm>
+          <a:prstGeom prst="rect">
+            <a:avLst/>
+          </a:prstGeom>
+          <a:noFill/>
+          <a:ln/>
+        </p:spPr>
+        <p:txBody>
+          <a:bodyPr wrap="square" lIns="0" tIns="0" rIns="0" bIns="0" rtlCol="0" anchor="ctr">
+            <a:normAutofit/>
+          </a:bodyPr>
+          <a:lstStyle/>
+          <a:p>
+            <a:pPr algn="ctr" indent="0" marL="0">
+              <a:buNone/>
+            </a:pPr>
+            <a:r>
+              <a:rPr lang="en-US" sz="880" b="1" dirty="0">
+                <a:solidFill>
+                  <a:srgbClr val="FFFFFF"/>
+                </a:solidFill>
+                <a:latin typeface="Aptos" pitchFamily="34" charset="0"/>
+                <a:ea typeface="Aptos" pitchFamily="34" charset="-122"/>
+                <a:cs typeface="Aptos" pitchFamily="34" charset="-120"/>
+              </a:rPr>
+              <a:t>Control</a:t>
+            </a:r>
+            <a:endParaRPr lang="en-US" sz="880" dirty="0"/>
+          </a:p>
+        </p:txBody>
+      </p:sp>
+      <p:sp>
+        <p:nvSpPr>
+          <p:cNvPr id="21" name="Shape 19"/>
+          <p:cNvSpPr/>
+          <p:nvPr/>
+        </p:nvSpPr>
+        <p:spPr>
+          <a:xfrm>
+            <a:off x="9982200" y="3200400"/>
+            <a:ext cx="890016" cy="301752"/>
+          </a:xfrm>
+          <a:prstGeom prst="roundRect">
+            <a:avLst>
+              <a:gd name="adj" fmla="val 24242"/>
+            </a:avLst>
+          </a:prstGeom>
+          <a:solidFill>
+            <a:srgbClr val="6A4CA3"/>
+          </a:solidFill>
+          <a:ln w="12700">
+            <a:solidFill>
+              <a:srgbClr val="6A4CA3"/>
+            </a:solidFill>
+            <a:prstDash val="solid"/>
+          </a:ln>
+        </p:spPr>
+      </p:sp>
+      <p:sp>
+        <p:nvSpPr>
+          <p:cNvPr id="22" name="Text 20"/>
+          <p:cNvSpPr/>
+          <p:nvPr/>
+        </p:nvSpPr>
+        <p:spPr>
+          <a:xfrm>
+            <a:off x="10018776" y="3273552"/>
+            <a:ext cx="816864" cy="146304"/>
+          </a:xfrm>
+          <a:prstGeom prst="rect">
+            <a:avLst/>
+          </a:prstGeom>
+          <a:noFill/>
+          <a:ln/>
+        </p:spPr>
+        <p:txBody>
+          <a:bodyPr wrap="square" lIns="0" tIns="0" rIns="0" bIns="0" rtlCol="0" anchor="ctr">
+            <a:normAutofit/>
+          </a:bodyPr>
+          <a:lstStyle/>
+          <a:p>
+            <a:pPr algn="ctr" indent="0" marL="0">
+              <a:buNone/>
+            </a:pPr>
+            <a:r>
+              <a:rPr lang="en-US" sz="880" b="1" dirty="0">
+                <a:solidFill>
+                  <a:srgbClr val="FFFFFF"/>
+                </a:solidFill>
+                <a:latin typeface="Aptos" pitchFamily="34" charset="0"/>
+                <a:ea typeface="Aptos" pitchFamily="34" charset="-122"/>
+                <a:cs typeface="Aptos" pitchFamily="34" charset="-120"/>
+              </a:rPr>
+              <a:t>Monitor</a:t>
+            </a:r>
+            <a:endParaRPr lang="en-US" sz="880" dirty="0"/>
+          </a:p>
+        </p:txBody>
+      </p:sp>
+      <p:sp>
+        <p:nvSpPr>
+          <p:cNvPr id="23" name="Text 21"/>
+          <p:cNvSpPr/>
+          <p:nvPr/>
+        </p:nvSpPr>
+        <p:spPr>
+          <a:xfrm>
+            <a:off x="7854696" y="3694176"/>
+            <a:ext cx="3035808" cy="365760"/>
+          </a:xfrm>
+          <a:prstGeom prst="rect">
+            <a:avLst/>
+          </a:prstGeom>
+          <a:noFill/>
+          <a:ln/>
+        </p:spPr>
+        <p:txBody>
+          <a:bodyPr wrap="square" lIns="254" tIns="254" rIns="254" bIns="254" rtlCol="0" anchor="t">
+            <a:normAutofit/>
+          </a:bodyPr>
+          <a:lstStyle/>
+          <a:p>
+            <a:pPr indent="0" marL="0">
+              <a:buNone/>
+            </a:pPr>
+            <a:r>
+              <a:rPr lang="en-US" sz="1120" dirty="0">
+                <a:solidFill>
+                  <a:srgbClr val="17364A"/>
+                </a:solidFill>
+                <a:latin typeface="Aptos" pitchFamily="34" charset="0"/>
+                <a:ea typeface="Aptos" pitchFamily="34" charset="-122"/>
+                <a:cs typeface="Aptos" pitchFamily="34" charset="-120"/>
+              </a:rPr>
+              <a:t>Responsible use depends on finding risks early, applying safeguards, and watching for drift or harm over time.</a:t>
+            </a:r>
+            <a:endParaRPr lang="en-US" sz="1120" dirty="0"/>
+          </a:p>
+        </p:txBody>
+      </p:sp>
+      <p:sp>
+        <p:nvSpPr>
+          <p:cNvPr id="24" name="Shape 22"/>
+          <p:cNvSpPr/>
+          <p:nvPr/>
+        </p:nvSpPr>
+        <p:spPr>
+          <a:xfrm>
+            <a:off x="7635240" y="4343400"/>
+            <a:ext cx="3474720" cy="1255471"/>
+          </a:xfrm>
+          <a:prstGeom prst="roundRect">
+            <a:avLst>
+              <a:gd name="adj" fmla="val 8740"/>
             </a:avLst>
           </a:prstGeom>
           <a:solidFill>
@@ -4473,13 +4689,13 @@
       </p:sp>
       <p:sp>
         <p:nvSpPr>
-          <p:cNvPr id="17" name="Text 15"/>
-          <p:cNvSpPr/>
-          <p:nvPr/>
-        </p:nvSpPr>
-        <p:spPr>
-          <a:xfrm>
-            <a:off x="7799832" y="4645152"/>
+          <p:cNvPr id="25" name="Text 23"/>
+          <p:cNvSpPr/>
+          <p:nvPr/>
+        </p:nvSpPr>
+        <p:spPr>
+          <a:xfrm>
+            <a:off x="7799832" y="4489704"/>
             <a:ext cx="3145536" cy="256032"/>
           </a:xfrm>
           <a:prstGeom prst="rect">
@@ -4512,14 +4728,14 @@
       </p:sp>
       <p:sp>
         <p:nvSpPr>
-          <p:cNvPr id="18" name="Text 16"/>
-          <p:cNvSpPr/>
-          <p:nvPr/>
-        </p:nvSpPr>
-        <p:spPr>
-          <a:xfrm>
-            <a:off x="7799832" y="4974336"/>
-            <a:ext cx="3145536" cy="576072"/>
+          <p:cNvPr id="26" name="Text 24"/>
+          <p:cNvSpPr/>
+          <p:nvPr/>
+        </p:nvSpPr>
+        <p:spPr>
+          <a:xfrm>
+            <a:off x="7799832" y="4818888"/>
+            <a:ext cx="3145536" cy="688543"/>
           </a:xfrm>
           <a:prstGeom prst="rect">
             <a:avLst/>
@@ -4545,7 +4761,7 @@
                 <a:ea typeface="Aptos" pitchFamily="34" charset="-122"/>
                 <a:cs typeface="Aptos" pitchFamily="34" charset="-120"/>
               </a:rPr>
-              <a:t>Identify what could go wrong, who could be affected, what safeguards are needed, and what evidence should be reviewed.</a:t>
+              <a:t>Identify what could go wrong, who could be affected, what safeguards are needed, and what evidence should be reviewed before use.</a:t>
             </a:r>
             <a:endParaRPr lang="en-US" sz="1320" dirty="0"/>
           </a:p>
@@ -4914,11 +5130,11 @@
         <p:spPr>
           <a:xfrm>
             <a:off x="7635240" y="1325880"/>
-            <a:ext cx="3474720" cy="1325880"/>
+            <a:ext cx="3474720" cy="1207008"/>
           </a:xfrm>
           <a:prstGeom prst="roundRect">
             <a:avLst>
-              <a:gd name="adj" fmla="val 8276"/>
+              <a:gd name="adj" fmla="val 9091"/>
             </a:avLst>
           </a:prstGeom>
           <a:solidFill>
@@ -4980,7 +5196,7 @@
         <p:spPr>
           <a:xfrm>
             <a:off x="7799832" y="1801368"/>
-            <a:ext cx="3145536" cy="758952"/>
+            <a:ext cx="3145536" cy="640080"/>
           </a:xfrm>
           <a:prstGeom prst="rect">
             <a:avLst/>
@@ -5020,7 +5236,7 @@
         </p:nvSpPr>
         <p:spPr>
           <a:xfrm>
-            <a:off x="7635240" y="2788920"/>
+            <a:off x="7635240" y="2670048"/>
             <a:ext cx="3474720" cy="1536192"/>
           </a:xfrm>
           <a:prstGeom prst="roundRect">
@@ -5047,8 +5263,8 @@
         </p:nvSpPr>
         <p:spPr>
           <a:xfrm>
-            <a:off x="7799832" y="2935224"/>
-            <a:ext cx="3145536" cy="256032"/>
+            <a:off x="7799832" y="2798064"/>
+            <a:ext cx="3145536" cy="237744"/>
           </a:xfrm>
           <a:prstGeom prst="rect">
             <a:avLst/>
@@ -5064,7 +5280,7 @@
               <a:buNone/>
             </a:pPr>
             <a:r>
-              <a:rPr lang="en-US" sz="1300" b="1" dirty="0">
+              <a:rPr lang="en-US" sz="1250" b="1" dirty="0">
                 <a:solidFill>
                   <a:srgbClr val="0068B7"/>
                 </a:solidFill>
@@ -5072,101 +5288,317 @@
                 <a:ea typeface="Aptos" pitchFamily="34" charset="-122"/>
                 <a:cs typeface="Aptos" pitchFamily="34" charset="-120"/>
               </a:rPr>
-              <a:t>Concept checkpoints</a:t>
-            </a:r>
-            <a:endParaRPr lang="en-US" sz="1300" dirty="0"/>
-          </a:p>
-        </p:txBody>
-      </p:sp>
-      <p:sp>
-        <p:nvSpPr>
-          <p:cNvPr id="15" name="Text 13"/>
-          <p:cNvSpPr/>
-          <p:nvPr/>
-        </p:nvSpPr>
-        <p:spPr>
-          <a:xfrm>
-            <a:off x="7818120" y="3300984"/>
-            <a:ext cx="3090672" cy="877824"/>
-          </a:xfrm>
-          <a:prstGeom prst="rect">
-            <a:avLst/>
-          </a:prstGeom>
-          <a:noFill/>
-          <a:ln/>
-        </p:spPr>
-        <p:txBody>
-          <a:bodyPr wrap="square" lIns="508" tIns="508" rIns="508" bIns="508" rtlCol="0" anchor="t">
+              <a:t>Risk control loop</a:t>
+            </a:r>
+            <a:endParaRPr lang="en-US" sz="1250" dirty="0"/>
+          </a:p>
+        </p:txBody>
+      </p:sp>
+      <p:sp>
+        <p:nvSpPr>
+          <p:cNvPr id="15" name="Shape 13"/>
+          <p:cNvSpPr/>
+          <p:nvPr/>
+        </p:nvSpPr>
+        <p:spPr>
+          <a:xfrm>
+            <a:off x="8763000" y="3351276"/>
+            <a:ext cx="164592" cy="0"/>
+          </a:xfrm>
+          <a:prstGeom prst="line">
+            <a:avLst/>
+          </a:prstGeom>
+          <a:noFill/>
+          <a:ln w="15240">
+            <a:solidFill>
+              <a:srgbClr val="8ABBD8"/>
+            </a:solidFill>
+            <a:prstDash val="solid"/>
+          </a:ln>
+        </p:spPr>
+      </p:sp>
+      <p:sp>
+        <p:nvSpPr>
+          <p:cNvPr id="16" name="Shape 14"/>
+          <p:cNvSpPr/>
+          <p:nvPr/>
+        </p:nvSpPr>
+        <p:spPr>
+          <a:xfrm>
+            <a:off x="7872984" y="3200400"/>
+            <a:ext cx="890016" cy="301752"/>
+          </a:xfrm>
+          <a:prstGeom prst="roundRect">
+            <a:avLst>
+              <a:gd name="adj" fmla="val 24242"/>
+            </a:avLst>
+          </a:prstGeom>
+          <a:solidFill>
+            <a:srgbClr val="0068B7"/>
+          </a:solidFill>
+          <a:ln w="12700">
+            <a:solidFill>
+              <a:srgbClr val="0068B7"/>
+            </a:solidFill>
+            <a:prstDash val="solid"/>
+          </a:ln>
+        </p:spPr>
+      </p:sp>
+      <p:sp>
+        <p:nvSpPr>
+          <p:cNvPr id="17" name="Text 15"/>
+          <p:cNvSpPr/>
+          <p:nvPr/>
+        </p:nvSpPr>
+        <p:spPr>
+          <a:xfrm>
+            <a:off x="7909560" y="3273552"/>
+            <a:ext cx="816864" cy="146304"/>
+          </a:xfrm>
+          <a:prstGeom prst="rect">
+            <a:avLst/>
+          </a:prstGeom>
+          <a:noFill/>
+          <a:ln/>
+        </p:spPr>
+        <p:txBody>
+          <a:bodyPr wrap="square" lIns="0" tIns="0" rIns="0" bIns="0" rtlCol="0" anchor="ctr">
             <a:normAutofit/>
           </a:bodyPr>
           <a:lstStyle/>
           <a:p>
-            <a:pPr indent="0" marL="0">
-              <a:buNone/>
-            </a:pPr>
-            <a:r>
-              <a:rPr lang="en-US" sz="1220" dirty="0">
-                <a:solidFill>
-                  <a:srgbClr val="17364A"/>
-                </a:solidFill>
-                <a:latin typeface="Aptos" pitchFamily="34" charset="0"/>
-                <a:ea typeface="Aptos" pitchFamily="34" charset="-122"/>
-                <a:cs typeface="Aptos" pitchFamily="34" charset="-120"/>
-              </a:rPr>
-              <a:t>Missed signals because some communities are underrepresented in.</a:t>
-            </a:r>
-            <a:endParaRPr lang="en-US" sz="1220" dirty="0"/>
-          </a:p>
-          <a:p>
-            <a:pPr indent="0" marL="0">
-              <a:buNone/>
-            </a:pPr>
-            <a:r>
-              <a:rPr lang="en-US" sz="1220" dirty="0">
-                <a:solidFill>
-                  <a:srgbClr val="17364A"/>
-                </a:solidFill>
-                <a:latin typeface="Aptos" pitchFamily="34" charset="0"/>
-                <a:ea typeface="Aptos" pitchFamily="34" charset="-122"/>
-                <a:cs typeface="Aptos" pitchFamily="34" charset="-120"/>
-              </a:rPr>
-              <a:t>Automated prioritization replacing epidemiologic judgment.</a:t>
-            </a:r>
-            <a:endParaRPr lang="en-US" sz="1220" dirty="0"/>
-          </a:p>
-          <a:p>
-            <a:pPr indent="0" marL="0">
-              <a:buNone/>
-            </a:pPr>
-            <a:r>
-              <a:rPr lang="en-US" sz="1220" dirty="0">
-                <a:solidFill>
-                  <a:srgbClr val="17364A"/>
-                </a:solidFill>
-                <a:latin typeface="Aptos" pitchFamily="34" charset="0"/>
-                <a:ea typeface="Aptos" pitchFamily="34" charset="-122"/>
-                <a:cs typeface="Aptos" pitchFamily="34" charset="-120"/>
-              </a:rPr>
-              <a:t>Sensitive investigation information being used in unapproved tools.</a:t>
-            </a:r>
-            <a:endParaRPr lang="en-US" sz="1220" dirty="0"/>
-          </a:p>
-        </p:txBody>
-      </p:sp>
-      <p:sp>
-        <p:nvSpPr>
-          <p:cNvPr id="16" name="Shape 14"/>
-          <p:cNvSpPr/>
-          <p:nvPr/>
-        </p:nvSpPr>
-        <p:spPr>
-          <a:xfrm>
-            <a:off x="7635240" y="4498848"/>
-            <a:ext cx="3474720" cy="1143000"/>
+            <a:pPr algn="ctr" indent="0" marL="0">
+              <a:buNone/>
+            </a:pPr>
+            <a:r>
+              <a:rPr lang="en-US" sz="880" b="1" dirty="0">
+                <a:solidFill>
+                  <a:srgbClr val="FFFFFF"/>
+                </a:solidFill>
+                <a:latin typeface="Aptos" pitchFamily="34" charset="0"/>
+                <a:ea typeface="Aptos" pitchFamily="34" charset="-122"/>
+                <a:cs typeface="Aptos" pitchFamily="34" charset="-120"/>
+              </a:rPr>
+              <a:t>Identify</a:t>
+            </a:r>
+            <a:endParaRPr lang="en-US" sz="880" dirty="0"/>
+          </a:p>
+        </p:txBody>
+      </p:sp>
+      <p:sp>
+        <p:nvSpPr>
+          <p:cNvPr id="18" name="Shape 16"/>
+          <p:cNvSpPr/>
+          <p:nvPr/>
+        </p:nvSpPr>
+        <p:spPr>
+          <a:xfrm>
+            <a:off x="9817608" y="3351276"/>
+            <a:ext cx="164592" cy="0"/>
+          </a:xfrm>
+          <a:prstGeom prst="line">
+            <a:avLst/>
+          </a:prstGeom>
+          <a:noFill/>
+          <a:ln w="15240">
+            <a:solidFill>
+              <a:srgbClr val="8ABBD8"/>
+            </a:solidFill>
+            <a:prstDash val="solid"/>
+          </a:ln>
+        </p:spPr>
+      </p:sp>
+      <p:sp>
+        <p:nvSpPr>
+          <p:cNvPr id="19" name="Shape 17"/>
+          <p:cNvSpPr/>
+          <p:nvPr/>
+        </p:nvSpPr>
+        <p:spPr>
+          <a:xfrm>
+            <a:off x="8927592" y="3200400"/>
+            <a:ext cx="890016" cy="301752"/>
           </a:xfrm>
           <a:prstGeom prst="roundRect">
             <a:avLst>
-              <a:gd name="adj" fmla="val 9600"/>
+              <a:gd name="adj" fmla="val 24242"/>
+            </a:avLst>
+          </a:prstGeom>
+          <a:solidFill>
+            <a:srgbClr val="2F8A28"/>
+          </a:solidFill>
+          <a:ln w="12700">
+            <a:solidFill>
+              <a:srgbClr val="2F8A28"/>
+            </a:solidFill>
+            <a:prstDash val="solid"/>
+          </a:ln>
+        </p:spPr>
+      </p:sp>
+      <p:sp>
+        <p:nvSpPr>
+          <p:cNvPr id="20" name="Text 18"/>
+          <p:cNvSpPr/>
+          <p:nvPr/>
+        </p:nvSpPr>
+        <p:spPr>
+          <a:xfrm>
+            <a:off x="8964168" y="3273552"/>
+            <a:ext cx="816864" cy="146304"/>
+          </a:xfrm>
+          <a:prstGeom prst="rect">
+            <a:avLst/>
+          </a:prstGeom>
+          <a:noFill/>
+          <a:ln/>
+        </p:spPr>
+        <p:txBody>
+          <a:bodyPr wrap="square" lIns="0" tIns="0" rIns="0" bIns="0" rtlCol="0" anchor="ctr">
+            <a:normAutofit/>
+          </a:bodyPr>
+          <a:lstStyle/>
+          <a:p>
+            <a:pPr algn="ctr" indent="0" marL="0">
+              <a:buNone/>
+            </a:pPr>
+            <a:r>
+              <a:rPr lang="en-US" sz="880" b="1" dirty="0">
+                <a:solidFill>
+                  <a:srgbClr val="FFFFFF"/>
+                </a:solidFill>
+                <a:latin typeface="Aptos" pitchFamily="34" charset="0"/>
+                <a:ea typeface="Aptos" pitchFamily="34" charset="-122"/>
+                <a:cs typeface="Aptos" pitchFamily="34" charset="-120"/>
+              </a:rPr>
+              <a:t>Control</a:t>
+            </a:r>
+            <a:endParaRPr lang="en-US" sz="880" dirty="0"/>
+          </a:p>
+        </p:txBody>
+      </p:sp>
+      <p:sp>
+        <p:nvSpPr>
+          <p:cNvPr id="21" name="Shape 19"/>
+          <p:cNvSpPr/>
+          <p:nvPr/>
+        </p:nvSpPr>
+        <p:spPr>
+          <a:xfrm>
+            <a:off x="9982200" y="3200400"/>
+            <a:ext cx="890016" cy="301752"/>
+          </a:xfrm>
+          <a:prstGeom prst="roundRect">
+            <a:avLst>
+              <a:gd name="adj" fmla="val 24242"/>
+            </a:avLst>
+          </a:prstGeom>
+          <a:solidFill>
+            <a:srgbClr val="6A4CA3"/>
+          </a:solidFill>
+          <a:ln w="12700">
+            <a:solidFill>
+              <a:srgbClr val="6A4CA3"/>
+            </a:solidFill>
+            <a:prstDash val="solid"/>
+          </a:ln>
+        </p:spPr>
+      </p:sp>
+      <p:sp>
+        <p:nvSpPr>
+          <p:cNvPr id="22" name="Text 20"/>
+          <p:cNvSpPr/>
+          <p:nvPr/>
+        </p:nvSpPr>
+        <p:spPr>
+          <a:xfrm>
+            <a:off x="10018776" y="3273552"/>
+            <a:ext cx="816864" cy="146304"/>
+          </a:xfrm>
+          <a:prstGeom prst="rect">
+            <a:avLst/>
+          </a:prstGeom>
+          <a:noFill/>
+          <a:ln/>
+        </p:spPr>
+        <p:txBody>
+          <a:bodyPr wrap="square" lIns="0" tIns="0" rIns="0" bIns="0" rtlCol="0" anchor="ctr">
+            <a:normAutofit/>
+          </a:bodyPr>
+          <a:lstStyle/>
+          <a:p>
+            <a:pPr algn="ctr" indent="0" marL="0">
+              <a:buNone/>
+            </a:pPr>
+            <a:r>
+              <a:rPr lang="en-US" sz="880" b="1" dirty="0">
+                <a:solidFill>
+                  <a:srgbClr val="FFFFFF"/>
+                </a:solidFill>
+                <a:latin typeface="Aptos" pitchFamily="34" charset="0"/>
+                <a:ea typeface="Aptos" pitchFamily="34" charset="-122"/>
+                <a:cs typeface="Aptos" pitchFamily="34" charset="-120"/>
+              </a:rPr>
+              <a:t>Monitor</a:t>
+            </a:r>
+            <a:endParaRPr lang="en-US" sz="880" dirty="0"/>
+          </a:p>
+        </p:txBody>
+      </p:sp>
+      <p:sp>
+        <p:nvSpPr>
+          <p:cNvPr id="23" name="Text 21"/>
+          <p:cNvSpPr/>
+          <p:nvPr/>
+        </p:nvSpPr>
+        <p:spPr>
+          <a:xfrm>
+            <a:off x="7854696" y="3694176"/>
+            <a:ext cx="3035808" cy="365760"/>
+          </a:xfrm>
+          <a:prstGeom prst="rect">
+            <a:avLst/>
+          </a:prstGeom>
+          <a:noFill/>
+          <a:ln/>
+        </p:spPr>
+        <p:txBody>
+          <a:bodyPr wrap="square" lIns="254" tIns="254" rIns="254" bIns="254" rtlCol="0" anchor="t">
+            <a:normAutofit/>
+          </a:bodyPr>
+          <a:lstStyle/>
+          <a:p>
+            <a:pPr indent="0" marL="0">
+              <a:buNone/>
+            </a:pPr>
+            <a:r>
+              <a:rPr lang="en-US" sz="1120" dirty="0">
+                <a:solidFill>
+                  <a:srgbClr val="17364A"/>
+                </a:solidFill>
+                <a:latin typeface="Aptos" pitchFamily="34" charset="0"/>
+                <a:ea typeface="Aptos" pitchFamily="34" charset="-122"/>
+                <a:cs typeface="Aptos" pitchFamily="34" charset="-120"/>
+              </a:rPr>
+              <a:t>Responsible use depends on finding risks early, applying safeguards, and watching for drift or harm over time.</a:t>
+            </a:r>
+            <a:endParaRPr lang="en-US" sz="1120" dirty="0"/>
+          </a:p>
+        </p:txBody>
+      </p:sp>
+      <p:sp>
+        <p:nvSpPr>
+          <p:cNvPr id="24" name="Shape 22"/>
+          <p:cNvSpPr/>
+          <p:nvPr/>
+        </p:nvSpPr>
+        <p:spPr>
+          <a:xfrm>
+            <a:off x="7635240" y="4343400"/>
+            <a:ext cx="3474720" cy="1255471"/>
+          </a:xfrm>
+          <a:prstGeom prst="roundRect">
+            <a:avLst>
+              <a:gd name="adj" fmla="val 8740"/>
             </a:avLst>
           </a:prstGeom>
           <a:solidFill>
@@ -5182,13 +5614,13 @@
       </p:sp>
       <p:sp>
         <p:nvSpPr>
-          <p:cNvPr id="17" name="Text 15"/>
-          <p:cNvSpPr/>
-          <p:nvPr/>
-        </p:nvSpPr>
-        <p:spPr>
-          <a:xfrm>
-            <a:off x="7799832" y="4645152"/>
+          <p:cNvPr id="25" name="Text 23"/>
+          <p:cNvSpPr/>
+          <p:nvPr/>
+        </p:nvSpPr>
+        <p:spPr>
+          <a:xfrm>
+            <a:off x="7799832" y="4489704"/>
             <a:ext cx="3145536" cy="256032"/>
           </a:xfrm>
           <a:prstGeom prst="rect">
@@ -5221,14 +5653,14 @@
       </p:sp>
       <p:sp>
         <p:nvSpPr>
-          <p:cNvPr id="18" name="Text 16"/>
-          <p:cNvSpPr/>
-          <p:nvPr/>
-        </p:nvSpPr>
-        <p:spPr>
-          <a:xfrm>
-            <a:off x="7799832" y="4974336"/>
-            <a:ext cx="3145536" cy="576072"/>
+          <p:cNvPr id="26" name="Text 24"/>
+          <p:cNvSpPr/>
+          <p:nvPr/>
+        </p:nvSpPr>
+        <p:spPr>
+          <a:xfrm>
+            <a:off x="7799832" y="4818888"/>
+            <a:ext cx="3145536" cy="688543"/>
           </a:xfrm>
           <a:prstGeom prst="rect">
             <a:avLst/>
@@ -5254,7 +5686,7 @@
                 <a:ea typeface="Aptos" pitchFamily="34" charset="-122"/>
                 <a:cs typeface="Aptos" pitchFamily="34" charset="-120"/>
               </a:rPr>
-              <a:t>Identify what could go wrong, who could be affected, what safeguards are needed, and what evidence should be reviewed.</a:t>
+              <a:t>Identify what could go wrong, who could be affected, what safeguards are needed, and what evidence should be reviewed before use.</a:t>
             </a:r>
             <a:endParaRPr lang="en-US" sz="1320" dirty="0"/>
           </a:p>
@@ -5623,11 +6055,11 @@
         <p:spPr>
           <a:xfrm>
             <a:off x="7635240" y="1325880"/>
-            <a:ext cx="3474720" cy="1325880"/>
+            <a:ext cx="3474720" cy="1207008"/>
           </a:xfrm>
           <a:prstGeom prst="roundRect">
             <a:avLst>
-              <a:gd name="adj" fmla="val 8276"/>
+              <a:gd name="adj" fmla="val 9091"/>
             </a:avLst>
           </a:prstGeom>
           <a:solidFill>
@@ -5689,7 +6121,7 @@
         <p:spPr>
           <a:xfrm>
             <a:off x="7799832" y="1801368"/>
-            <a:ext cx="3145536" cy="758952"/>
+            <a:ext cx="3145536" cy="640080"/>
           </a:xfrm>
           <a:prstGeom prst="rect">
             <a:avLst/>
@@ -5729,7 +6161,7 @@
         </p:nvSpPr>
         <p:spPr>
           <a:xfrm>
-            <a:off x="7635240" y="2788920"/>
+            <a:off x="7635240" y="2670048"/>
             <a:ext cx="3474720" cy="1536192"/>
           </a:xfrm>
           <a:prstGeom prst="roundRect">
@@ -5756,7 +6188,7 @@
         </p:nvSpPr>
         <p:spPr>
           <a:xfrm>
-            <a:off x="7799832" y="2935224"/>
+            <a:off x="7799832" y="2816352"/>
             <a:ext cx="3145536" cy="256032"/>
           </a:xfrm>
           <a:prstGeom prst="rect">
@@ -5795,7 +6227,7 @@
         </p:nvSpPr>
         <p:spPr>
           <a:xfrm>
-            <a:off x="7818120" y="3300984"/>
+            <a:off x="7818120" y="3182112"/>
             <a:ext cx="3090672" cy="877824"/>
           </a:xfrm>
           <a:prstGeom prst="rect">
@@ -5870,12 +6302,12 @@
         </p:nvSpPr>
         <p:spPr>
           <a:xfrm>
-            <a:off x="7635240" y="4498848"/>
-            <a:ext cx="3474720" cy="1143000"/>
+            <a:off x="7635240" y="4343400"/>
+            <a:ext cx="3474720" cy="1255471"/>
           </a:xfrm>
           <a:prstGeom prst="roundRect">
             <a:avLst>
-              <a:gd name="adj" fmla="val 9600"/>
+              <a:gd name="adj" fmla="val 8740"/>
             </a:avLst>
           </a:prstGeom>
           <a:solidFill>
@@ -5897,7 +6329,7 @@
         </p:nvSpPr>
         <p:spPr>
           <a:xfrm>
-            <a:off x="7799832" y="4645152"/>
+            <a:off x="7799832" y="4489704"/>
             <a:ext cx="3145536" cy="256032"/>
           </a:xfrm>
           <a:prstGeom prst="rect">
@@ -5936,8 +6368,8 @@
         </p:nvSpPr>
         <p:spPr>
           <a:xfrm>
-            <a:off x="7799832" y="4974336"/>
-            <a:ext cx="3145536" cy="576072"/>
+            <a:off x="7799832" y="4818888"/>
+            <a:ext cx="3145536" cy="688543"/>
           </a:xfrm>
           <a:prstGeom prst="rect">
             <a:avLst/>
@@ -5963,7 +6395,7 @@
                 <a:ea typeface="Aptos" pitchFamily="34" charset="-122"/>
                 <a:cs typeface="Aptos" pitchFamily="34" charset="-120"/>
               </a:rPr>
-              <a:t>Identify what could go wrong, who could be affected, what safeguards are needed, and what evidence should be reviewed.</a:t>
+              <a:t>Identify what could go wrong, who could be affected, what safeguards are needed, and what evidence should be reviewed before use.</a:t>
             </a:r>
             <a:endParaRPr lang="en-US" sz="1320" dirty="0"/>
           </a:p>
@@ -6332,11 +6764,11 @@
         <p:spPr>
           <a:xfrm>
             <a:off x="7635240" y="1325880"/>
-            <a:ext cx="3474720" cy="1325880"/>
+            <a:ext cx="3474720" cy="1207008"/>
           </a:xfrm>
           <a:prstGeom prst="roundRect">
             <a:avLst>
-              <a:gd name="adj" fmla="val 8276"/>
+              <a:gd name="adj" fmla="val 9091"/>
             </a:avLst>
           </a:prstGeom>
           <a:solidFill>
@@ -6398,7 +6830,7 @@
         <p:spPr>
           <a:xfrm>
             <a:off x="7799832" y="1801368"/>
-            <a:ext cx="3145536" cy="758952"/>
+            <a:ext cx="3145536" cy="640080"/>
           </a:xfrm>
           <a:prstGeom prst="rect">
             <a:avLst/>
@@ -6438,7 +6870,7 @@
         </p:nvSpPr>
         <p:spPr>
           <a:xfrm>
-            <a:off x="7635240" y="2788920"/>
+            <a:off x="7635240" y="2670048"/>
             <a:ext cx="3474720" cy="1536192"/>
           </a:xfrm>
           <a:prstGeom prst="roundRect">
@@ -6465,7 +6897,7 @@
         </p:nvSpPr>
         <p:spPr>
           <a:xfrm>
-            <a:off x="7799832" y="2935224"/>
+            <a:off x="7799832" y="2816352"/>
             <a:ext cx="3145536" cy="256032"/>
           </a:xfrm>
           <a:prstGeom prst="rect">
@@ -6504,7 +6936,7 @@
         </p:nvSpPr>
         <p:spPr>
           <a:xfrm>
-            <a:off x="7818120" y="3300984"/>
+            <a:off x="7818120" y="3182112"/>
             <a:ext cx="3090672" cy="877824"/>
           </a:xfrm>
           <a:prstGeom prst="rect">
@@ -6579,12 +7011,12 @@
         </p:nvSpPr>
         <p:spPr>
           <a:xfrm>
-            <a:off x="7635240" y="4498848"/>
-            <a:ext cx="3474720" cy="1143000"/>
+            <a:off x="7635240" y="4343400"/>
+            <a:ext cx="3474720" cy="1255471"/>
           </a:xfrm>
           <a:prstGeom prst="roundRect">
             <a:avLst>
-              <a:gd name="adj" fmla="val 9600"/>
+              <a:gd name="adj" fmla="val 8740"/>
             </a:avLst>
           </a:prstGeom>
           <a:solidFill>
@@ -6606,7 +7038,7 @@
         </p:nvSpPr>
         <p:spPr>
           <a:xfrm>
-            <a:off x="7799832" y="4645152"/>
+            <a:off x="7799832" y="4489704"/>
             <a:ext cx="3145536" cy="256032"/>
           </a:xfrm>
           <a:prstGeom prst="rect">
@@ -6645,8 +7077,8 @@
         </p:nvSpPr>
         <p:spPr>
           <a:xfrm>
-            <a:off x="7799832" y="4974336"/>
-            <a:ext cx="3145536" cy="576072"/>
+            <a:off x="7799832" y="4818888"/>
+            <a:ext cx="3145536" cy="688543"/>
           </a:xfrm>
           <a:prstGeom prst="rect">
             <a:avLst/>
@@ -6672,7 +7104,7 @@
                 <a:ea typeface="Aptos" pitchFamily="34" charset="-122"/>
                 <a:cs typeface="Aptos" pitchFamily="34" charset="-120"/>
               </a:rPr>
-              <a:t>Identify what could go wrong, who could be affected, what safeguards are needed, and what evidence should be reviewed.</a:t>
+              <a:t>Identify what could go wrong, who could be affected, what safeguards are needed, and what evidence should be reviewed before use.</a:t>
             </a:r>
             <a:endParaRPr lang="en-US" sz="1320" dirty="0"/>
           </a:p>
@@ -7041,11 +7473,11 @@
         <p:spPr>
           <a:xfrm>
             <a:off x="7635240" y="1325880"/>
-            <a:ext cx="3474720" cy="1325880"/>
+            <a:ext cx="3474720" cy="1207008"/>
           </a:xfrm>
           <a:prstGeom prst="roundRect">
             <a:avLst>
-              <a:gd name="adj" fmla="val 8276"/>
+              <a:gd name="adj" fmla="val 9091"/>
             </a:avLst>
           </a:prstGeom>
           <a:solidFill>
@@ -7107,7 +7539,7 @@
         <p:spPr>
           <a:xfrm>
             <a:off x="7799832" y="1801368"/>
-            <a:ext cx="3145536" cy="758952"/>
+            <a:ext cx="3145536" cy="640080"/>
           </a:xfrm>
           <a:prstGeom prst="rect">
             <a:avLst/>
@@ -7147,12 +7579,12 @@
         </p:nvSpPr>
         <p:spPr>
           <a:xfrm>
-            <a:off x="7635240" y="2788920"/>
-            <a:ext cx="3474720" cy="1536192"/>
+            <a:off x="7635240" y="2670048"/>
+            <a:ext cx="3474720" cy="1377086"/>
           </a:xfrm>
           <a:prstGeom prst="roundRect">
             <a:avLst>
-              <a:gd name="adj" fmla="val 7143"/>
+              <a:gd name="adj" fmla="val 7968"/>
             </a:avLst>
           </a:prstGeom>
           <a:solidFill>
@@ -7174,7 +7606,7 @@
         </p:nvSpPr>
         <p:spPr>
           <a:xfrm>
-            <a:off x="7799832" y="2935224"/>
+            <a:off x="7799832" y="2816352"/>
             <a:ext cx="3145536" cy="256032"/>
           </a:xfrm>
           <a:prstGeom prst="rect">
@@ -7213,8 +7645,8 @@
         </p:nvSpPr>
         <p:spPr>
           <a:xfrm>
-            <a:off x="7818120" y="3300984"/>
-            <a:ext cx="3090672" cy="877824"/>
+            <a:off x="7818120" y="3182112"/>
+            <a:ext cx="3090672" cy="718718"/>
           </a:xfrm>
           <a:prstGeom prst="rect">
             <a:avLst/>
@@ -7288,12 +7720,12 @@
         </p:nvSpPr>
         <p:spPr>
           <a:xfrm>
-            <a:off x="7635240" y="4498848"/>
-            <a:ext cx="3474720" cy="1143000"/>
+            <a:off x="7635240" y="4184294"/>
+            <a:ext cx="3474720" cy="1466698"/>
           </a:xfrm>
           <a:prstGeom prst="roundRect">
             <a:avLst>
-              <a:gd name="adj" fmla="val 9600"/>
+              <a:gd name="adj" fmla="val 7481"/>
             </a:avLst>
           </a:prstGeom>
           <a:solidFill>
@@ -7315,7 +7747,7 @@
         </p:nvSpPr>
         <p:spPr>
           <a:xfrm>
-            <a:off x="7799832" y="4645152"/>
+            <a:off x="7799832" y="4330598"/>
             <a:ext cx="3145536" cy="256032"/>
           </a:xfrm>
           <a:prstGeom prst="rect">
@@ -7354,8 +7786,8 @@
         </p:nvSpPr>
         <p:spPr>
           <a:xfrm>
-            <a:off x="7799832" y="4974336"/>
-            <a:ext cx="3145536" cy="576072"/>
+            <a:off x="7799832" y="4659782"/>
+            <a:ext cx="3145536" cy="899770"/>
           </a:xfrm>
           <a:prstGeom prst="rect">
             <a:avLst/>
@@ -7381,7 +7813,7 @@
                 <a:ea typeface="Aptos" pitchFamily="34" charset="-122"/>
                 <a:cs typeface="Aptos" pitchFamily="34" charset="-120"/>
               </a:rPr>
-              <a:t>Connect the concept to public health purpose, responsible use, required safeguards, documentation, and the next action a.</a:t>
+              <a:t>Connect the concept to public health purpose, responsible use, required safeguards, documentation, and the next action a department should take.</a:t>
             </a:r>
             <a:endParaRPr lang="en-US" sz="1320" dirty="0"/>
           </a:p>
@@ -7733,11 +8165,11 @@
         <p:spPr>
           <a:xfrm>
             <a:off x="7635240" y="1325880"/>
-            <a:ext cx="3474720" cy="1325880"/>
+            <a:ext cx="3474720" cy="1207008"/>
           </a:xfrm>
           <a:prstGeom prst="roundRect">
             <a:avLst>
-              <a:gd name="adj" fmla="val 8276"/>
+              <a:gd name="adj" fmla="val 9091"/>
             </a:avLst>
           </a:prstGeom>
           <a:solidFill>
@@ -7799,7 +8231,7 @@
         <p:spPr>
           <a:xfrm>
             <a:off x="7799832" y="1801368"/>
-            <a:ext cx="3145536" cy="758952"/>
+            <a:ext cx="3145536" cy="640080"/>
           </a:xfrm>
           <a:prstGeom prst="rect">
             <a:avLst/>
@@ -7825,7 +8257,7 @@
                 <a:ea typeface="Aptos" pitchFamily="34" charset="-122"/>
                 <a:cs typeface="Aptos" pitchFamily="34" charset="-120"/>
               </a:rPr>
-              <a:t>What evidence would governance, leadership, or operations staff need before moving forward?</a:t>
+              <a:t>What evidence would governance, leadership, or operations staff need before moving.</a:t>
             </a:r>
             <a:endParaRPr lang="en-US" sz="1320" dirty="0"/>
           </a:p>
@@ -7839,12 +8271,12 @@
         </p:nvSpPr>
         <p:spPr>
           <a:xfrm>
-            <a:off x="7635240" y="2788920"/>
-            <a:ext cx="3474720" cy="1536192"/>
+            <a:off x="7635240" y="2670048"/>
+            <a:ext cx="3474720" cy="1377086"/>
           </a:xfrm>
           <a:prstGeom prst="roundRect">
             <a:avLst>
-              <a:gd name="adj" fmla="val 7143"/>
+              <a:gd name="adj" fmla="val 7968"/>
             </a:avLst>
           </a:prstGeom>
           <a:solidFill>
@@ -7866,7 +8298,7 @@
         </p:nvSpPr>
         <p:spPr>
           <a:xfrm>
-            <a:off x="7799832" y="2935224"/>
+            <a:off x="7799832" y="2816352"/>
             <a:ext cx="3145536" cy="256032"/>
           </a:xfrm>
           <a:prstGeom prst="rect">
@@ -7905,8 +8337,8 @@
         </p:nvSpPr>
         <p:spPr>
           <a:xfrm>
-            <a:off x="7818120" y="3300984"/>
-            <a:ext cx="3090672" cy="877824"/>
+            <a:off x="7818120" y="3182112"/>
+            <a:ext cx="3090672" cy="718718"/>
           </a:xfrm>
           <a:prstGeom prst="rect">
             <a:avLst/>
@@ -7963,12 +8395,12 @@
         </p:nvSpPr>
         <p:spPr>
           <a:xfrm>
-            <a:off x="7635240" y="4498848"/>
-            <a:ext cx="3474720" cy="1143000"/>
+            <a:off x="7635240" y="4184294"/>
+            <a:ext cx="3474720" cy="1466698"/>
           </a:xfrm>
           <a:prstGeom prst="roundRect">
             <a:avLst>
-              <a:gd name="adj" fmla="val 9600"/>
+              <a:gd name="adj" fmla="val 7481"/>
             </a:avLst>
           </a:prstGeom>
           <a:solidFill>
@@ -7990,7 +8422,7 @@
         </p:nvSpPr>
         <p:spPr>
           <a:xfrm>
-            <a:off x="7799832" y="4645152"/>
+            <a:off x="7799832" y="4330598"/>
             <a:ext cx="3145536" cy="256032"/>
           </a:xfrm>
           <a:prstGeom prst="rect">
@@ -8029,8 +8461,8 @@
         </p:nvSpPr>
         <p:spPr>
           <a:xfrm>
-            <a:off x="7799832" y="4974336"/>
-            <a:ext cx="3145536" cy="576072"/>
+            <a:off x="7799832" y="4659782"/>
+            <a:ext cx="3145536" cy="899770"/>
           </a:xfrm>
           <a:prstGeom prst="rect">
             <a:avLst/>
@@ -8056,7 +8488,7 @@
                 <a:ea typeface="Aptos" pitchFamily="34" charset="-122"/>
                 <a:cs typeface="Aptos" pitchFamily="34" charset="-120"/>
               </a:rPr>
-              <a:t>Connect the concept to public health purpose, responsible use, required safeguards, documentation, and the next action a.</a:t>
+              <a:t>Connect the concept to public health purpose, responsible use, required safeguards, documentation, and the next action a department should take.</a:t>
             </a:r>
             <a:endParaRPr lang="en-US" sz="1320" dirty="0"/>
           </a:p>
@@ -8408,11 +8840,11 @@
         <p:spPr>
           <a:xfrm>
             <a:off x="7635240" y="1325880"/>
-            <a:ext cx="3474720" cy="1325880"/>
+            <a:ext cx="3474720" cy="1207008"/>
           </a:xfrm>
           <a:prstGeom prst="roundRect">
             <a:avLst>
-              <a:gd name="adj" fmla="val 8276"/>
+              <a:gd name="adj" fmla="val 9091"/>
             </a:avLst>
           </a:prstGeom>
           <a:solidFill>
@@ -8474,7 +8906,7 @@
         <p:spPr>
           <a:xfrm>
             <a:off x="7799832" y="1801368"/>
-            <a:ext cx="3145536" cy="758952"/>
+            <a:ext cx="3145536" cy="640080"/>
           </a:xfrm>
           <a:prstGeom prst="rect">
             <a:avLst/>
@@ -8514,12 +8946,12 @@
         </p:nvSpPr>
         <p:spPr>
           <a:xfrm>
-            <a:off x="7635240" y="2788920"/>
-            <a:ext cx="3474720" cy="1536192"/>
+            <a:off x="7635240" y="2670048"/>
+            <a:ext cx="3474720" cy="1377086"/>
           </a:xfrm>
           <a:prstGeom prst="roundRect">
             <a:avLst>
-              <a:gd name="adj" fmla="val 7143"/>
+              <a:gd name="adj" fmla="val 7968"/>
             </a:avLst>
           </a:prstGeom>
           <a:solidFill>
@@ -8541,7 +8973,7 @@
         </p:nvSpPr>
         <p:spPr>
           <a:xfrm>
-            <a:off x="7799832" y="2935224"/>
+            <a:off x="7799832" y="2816352"/>
             <a:ext cx="3145536" cy="256032"/>
           </a:xfrm>
           <a:prstGeom prst="rect">
@@ -8580,8 +9012,8 @@
         </p:nvSpPr>
         <p:spPr>
           <a:xfrm>
-            <a:off x="7818120" y="3300984"/>
-            <a:ext cx="3090672" cy="877824"/>
+            <a:off x="7818120" y="3182112"/>
+            <a:ext cx="3090672" cy="718718"/>
           </a:xfrm>
           <a:prstGeom prst="rect">
             <a:avLst/>
@@ -8638,12 +9070,12 @@
         </p:nvSpPr>
         <p:spPr>
           <a:xfrm>
-            <a:off x="7635240" y="4498848"/>
-            <a:ext cx="3474720" cy="1143000"/>
+            <a:off x="7635240" y="4184294"/>
+            <a:ext cx="3474720" cy="1466698"/>
           </a:xfrm>
           <a:prstGeom prst="roundRect">
             <a:avLst>
-              <a:gd name="adj" fmla="val 9600"/>
+              <a:gd name="adj" fmla="val 7481"/>
             </a:avLst>
           </a:prstGeom>
           <a:solidFill>
@@ -8665,7 +9097,7 @@
         </p:nvSpPr>
         <p:spPr>
           <a:xfrm>
-            <a:off x="7799832" y="4645152"/>
+            <a:off x="7799832" y="4330598"/>
             <a:ext cx="3145536" cy="256032"/>
           </a:xfrm>
           <a:prstGeom prst="rect">
@@ -8704,8 +9136,8 @@
         </p:nvSpPr>
         <p:spPr>
           <a:xfrm>
-            <a:off x="7799832" y="4974336"/>
-            <a:ext cx="3145536" cy="576072"/>
+            <a:off x="7799832" y="4659782"/>
+            <a:ext cx="3145536" cy="899770"/>
           </a:xfrm>
           <a:prstGeom prst="rect">
             <a:avLst/>
@@ -8731,7 +9163,7 @@
                 <a:ea typeface="Aptos" pitchFamily="34" charset="-122"/>
                 <a:cs typeface="Aptos" pitchFamily="34" charset="-120"/>
               </a:rPr>
-              <a:t>Use the assignment to test whether you can explain the concept, apply it to a realistic public health situation, and.</a:t>
+              <a:t>Use the assignment to test whether you can explain the concept, apply it to a realistic public health situation, and identify what would need review before the work moves forward.</a:t>
             </a:r>
             <a:endParaRPr lang="en-US" sz="1320" dirty="0"/>
           </a:p>
@@ -9100,11 +9532,11 @@
         <p:spPr>
           <a:xfrm>
             <a:off x="7635240" y="1325880"/>
-            <a:ext cx="3474720" cy="1325880"/>
+            <a:ext cx="3474720" cy="1207008"/>
           </a:xfrm>
           <a:prstGeom prst="roundRect">
             <a:avLst>
-              <a:gd name="adj" fmla="val 8276"/>
+              <a:gd name="adj" fmla="val 9091"/>
             </a:avLst>
           </a:prstGeom>
           <a:solidFill>
@@ -9166,7 +9598,7 @@
         <p:spPr>
           <a:xfrm>
             <a:off x="7799832" y="1801368"/>
-            <a:ext cx="3145536" cy="758952"/>
+            <a:ext cx="3145536" cy="640080"/>
           </a:xfrm>
           <a:prstGeom prst="rect">
             <a:avLst/>
@@ -9206,12 +9638,12 @@
         </p:nvSpPr>
         <p:spPr>
           <a:xfrm>
-            <a:off x="7635240" y="2788920"/>
-            <a:ext cx="3474720" cy="1536192"/>
+            <a:off x="7635240" y="2670048"/>
+            <a:ext cx="3474720" cy="1377086"/>
           </a:xfrm>
           <a:prstGeom prst="roundRect">
             <a:avLst>
-              <a:gd name="adj" fmla="val 7143"/>
+              <a:gd name="adj" fmla="val 7968"/>
             </a:avLst>
           </a:prstGeom>
           <a:solidFill>
@@ -9233,7 +9665,7 @@
         </p:nvSpPr>
         <p:spPr>
           <a:xfrm>
-            <a:off x="7799832" y="2935224"/>
+            <a:off x="7799832" y="2816352"/>
             <a:ext cx="3145536" cy="256032"/>
           </a:xfrm>
           <a:prstGeom prst="rect">
@@ -9272,8 +9704,8 @@
         </p:nvSpPr>
         <p:spPr>
           <a:xfrm>
-            <a:off x="7818120" y="3300984"/>
-            <a:ext cx="3090672" cy="877824"/>
+            <a:off x="7818120" y="3182112"/>
+            <a:ext cx="3090672" cy="718718"/>
           </a:xfrm>
           <a:prstGeom prst="rect">
             <a:avLst/>
@@ -9347,12 +9779,12 @@
         </p:nvSpPr>
         <p:spPr>
           <a:xfrm>
-            <a:off x="7635240" y="4498848"/>
-            <a:ext cx="3474720" cy="1143000"/>
+            <a:off x="7635240" y="4184294"/>
+            <a:ext cx="3474720" cy="1466698"/>
           </a:xfrm>
           <a:prstGeom prst="roundRect">
             <a:avLst>
-              <a:gd name="adj" fmla="val 9600"/>
+              <a:gd name="adj" fmla="val 7481"/>
             </a:avLst>
           </a:prstGeom>
           <a:solidFill>
@@ -9374,7 +9806,7 @@
         </p:nvSpPr>
         <p:spPr>
           <a:xfrm>
-            <a:off x="7799832" y="4645152"/>
+            <a:off x="7799832" y="4330598"/>
             <a:ext cx="3145536" cy="256032"/>
           </a:xfrm>
           <a:prstGeom prst="rect">
@@ -9413,8 +9845,8 @@
         </p:nvSpPr>
         <p:spPr>
           <a:xfrm>
-            <a:off x="7799832" y="4974336"/>
-            <a:ext cx="3145536" cy="576072"/>
+            <a:off x="7799832" y="4659782"/>
+            <a:ext cx="3145536" cy="899770"/>
           </a:xfrm>
           <a:prstGeom prst="rect">
             <a:avLst/>
@@ -9440,7 +9872,7 @@
                 <a:ea typeface="Aptos" pitchFamily="34" charset="-122"/>
                 <a:cs typeface="Aptos" pitchFamily="34" charset="-120"/>
               </a:rPr>
-              <a:t>Connect the concept to public health purpose, responsible use, required safeguards, documentation, and the next action a.</a:t>
+              <a:t>Connect the concept to public health purpose, responsible use, required safeguards, documentation, and the next action a department should take.</a:t>
             </a:r>
             <a:endParaRPr lang="en-US" sz="1320" dirty="0"/>
           </a:p>
@@ -9792,11 +10224,11 @@
         <p:spPr>
           <a:xfrm>
             <a:off x="7635240" y="1325880"/>
-            <a:ext cx="3474720" cy="1325880"/>
+            <a:ext cx="3474720" cy="1207008"/>
           </a:xfrm>
           <a:prstGeom prst="roundRect">
             <a:avLst>
-              <a:gd name="adj" fmla="val 8276"/>
+              <a:gd name="adj" fmla="val 9091"/>
             </a:avLst>
           </a:prstGeom>
           <a:solidFill>
@@ -9858,7 +10290,7 @@
         <p:spPr>
           <a:xfrm>
             <a:off x="7799832" y="1801368"/>
-            <a:ext cx="3145536" cy="758952"/>
+            <a:ext cx="3145536" cy="640080"/>
           </a:xfrm>
           <a:prstGeom prst="rect">
             <a:avLst/>
@@ -9898,12 +10330,12 @@
         </p:nvSpPr>
         <p:spPr>
           <a:xfrm>
-            <a:off x="7635240" y="2788920"/>
-            <a:ext cx="3474720" cy="1536192"/>
+            <a:off x="7635240" y="2670048"/>
+            <a:ext cx="3474720" cy="1377086"/>
           </a:xfrm>
           <a:prstGeom prst="roundRect">
             <a:avLst>
-              <a:gd name="adj" fmla="val 7143"/>
+              <a:gd name="adj" fmla="val 7968"/>
             </a:avLst>
           </a:prstGeom>
           <a:solidFill>
@@ -9925,7 +10357,7 @@
         </p:nvSpPr>
         <p:spPr>
           <a:xfrm>
-            <a:off x="7799832" y="2935224"/>
+            <a:off x="7799832" y="2816352"/>
             <a:ext cx="3145536" cy="256032"/>
           </a:xfrm>
           <a:prstGeom prst="rect">
@@ -9964,8 +10396,8 @@
         </p:nvSpPr>
         <p:spPr>
           <a:xfrm>
-            <a:off x="7818120" y="3300984"/>
-            <a:ext cx="3090672" cy="877824"/>
+            <a:off x="7818120" y="3182112"/>
+            <a:ext cx="3090672" cy="718718"/>
           </a:xfrm>
           <a:prstGeom prst="rect">
             <a:avLst/>
@@ -10022,12 +10454,12 @@
         </p:nvSpPr>
         <p:spPr>
           <a:xfrm>
-            <a:off x="7635240" y="4498848"/>
-            <a:ext cx="3474720" cy="1143000"/>
+            <a:off x="7635240" y="4184294"/>
+            <a:ext cx="3474720" cy="1466698"/>
           </a:xfrm>
           <a:prstGeom prst="roundRect">
             <a:avLst>
-              <a:gd name="adj" fmla="val 9600"/>
+              <a:gd name="adj" fmla="val 7481"/>
             </a:avLst>
           </a:prstGeom>
           <a:solidFill>
@@ -10049,7 +10481,7 @@
         </p:nvSpPr>
         <p:spPr>
           <a:xfrm>
-            <a:off x="7799832" y="4645152"/>
+            <a:off x="7799832" y="4330598"/>
             <a:ext cx="3145536" cy="256032"/>
           </a:xfrm>
           <a:prstGeom prst="rect">
@@ -10088,8 +10520,8 @@
         </p:nvSpPr>
         <p:spPr>
           <a:xfrm>
-            <a:off x="7799832" y="4974336"/>
-            <a:ext cx="3145536" cy="576072"/>
+            <a:off x="7799832" y="4659782"/>
+            <a:ext cx="3145536" cy="899770"/>
           </a:xfrm>
           <a:prstGeom prst="rect">
             <a:avLst/>
@@ -10115,7 +10547,7 @@
                 <a:ea typeface="Aptos" pitchFamily="34" charset="-122"/>
                 <a:cs typeface="Aptos" pitchFamily="34" charset="-120"/>
               </a:rPr>
-              <a:t>Connect the concept to public health purpose, responsible use, required safeguards, documentation, and the next action a.</a:t>
+              <a:t>Connect the concept to public health purpose, responsible use, required safeguards, documentation, and the next action a department should take.</a:t>
             </a:r>
             <a:endParaRPr lang="en-US" sz="1320" dirty="0"/>
           </a:p>
@@ -10576,7 +11008,7 @@
                 <a:ea typeface="Aptos" pitchFamily="34" charset="-122"/>
                 <a:cs typeface="Aptos" pitchFamily="34" charset="-120"/>
               </a:rPr>
-              <a:t>Level: intermediate/practitioner Primary track: Epidemiology Role-Based Track Appears in tracks: epidemiology,.</a:t>
+              <a:t>Level: intermediate/practitioner Primary track: Epidemiology Role-Based Track Appears in tracks: epidemiology, operations-and-data-quality, technical-architecture, public-health-executive-leadership</a:t>
             </a:r>
             <a:endParaRPr lang="en-US" sz="1320" dirty="0"/>
           </a:p>
@@ -11086,11 +11518,11 @@
         <p:spPr>
           <a:xfrm>
             <a:off x="7635240" y="1325880"/>
-            <a:ext cx="3474720" cy="1325880"/>
+            <a:ext cx="3474720" cy="1207008"/>
           </a:xfrm>
           <a:prstGeom prst="roundRect">
             <a:avLst>
-              <a:gd name="adj" fmla="val 8276"/>
+              <a:gd name="adj" fmla="val 9091"/>
             </a:avLst>
           </a:prstGeom>
           <a:solidFill>
@@ -11152,7 +11584,7 @@
         <p:spPr>
           <a:xfrm>
             <a:off x="7799832" y="1801368"/>
-            <a:ext cx="3145536" cy="758952"/>
+            <a:ext cx="3145536" cy="640080"/>
           </a:xfrm>
           <a:prstGeom prst="rect">
             <a:avLst/>
@@ -11192,12 +11624,12 @@
         </p:nvSpPr>
         <p:spPr>
           <a:xfrm>
-            <a:off x="7635240" y="2788920"/>
-            <a:ext cx="3474720" cy="1536192"/>
+            <a:off x="7635240" y="2670048"/>
+            <a:ext cx="3474720" cy="1377086"/>
           </a:xfrm>
           <a:prstGeom prst="roundRect">
             <a:avLst>
-              <a:gd name="adj" fmla="val 7143"/>
+              <a:gd name="adj" fmla="val 7968"/>
             </a:avLst>
           </a:prstGeom>
           <a:solidFill>
@@ -11219,7 +11651,7 @@
         </p:nvSpPr>
         <p:spPr>
           <a:xfrm>
-            <a:off x="7799832" y="2935224"/>
+            <a:off x="7799832" y="2816352"/>
             <a:ext cx="3145536" cy="256032"/>
           </a:xfrm>
           <a:prstGeom prst="rect">
@@ -11258,8 +11690,8 @@
         </p:nvSpPr>
         <p:spPr>
           <a:xfrm>
-            <a:off x="7818120" y="3300984"/>
-            <a:ext cx="3090672" cy="877824"/>
+            <a:off x="7818120" y="3182112"/>
+            <a:ext cx="3090672" cy="718718"/>
           </a:xfrm>
           <a:prstGeom prst="rect">
             <a:avLst/>
@@ -11316,12 +11748,12 @@
         </p:nvSpPr>
         <p:spPr>
           <a:xfrm>
-            <a:off x="7635240" y="4498848"/>
-            <a:ext cx="3474720" cy="1143000"/>
+            <a:off x="7635240" y="4184294"/>
+            <a:ext cx="3474720" cy="1466698"/>
           </a:xfrm>
           <a:prstGeom prst="roundRect">
             <a:avLst>
-              <a:gd name="adj" fmla="val 9600"/>
+              <a:gd name="adj" fmla="val 7481"/>
             </a:avLst>
           </a:prstGeom>
           <a:solidFill>
@@ -11343,7 +11775,7 @@
         </p:nvSpPr>
         <p:spPr>
           <a:xfrm>
-            <a:off x="7799832" y="4645152"/>
+            <a:off x="7799832" y="4330598"/>
             <a:ext cx="3145536" cy="256032"/>
           </a:xfrm>
           <a:prstGeom prst="rect">
@@ -11382,8 +11814,8 @@
         </p:nvSpPr>
         <p:spPr>
           <a:xfrm>
-            <a:off x="7799832" y="4974336"/>
-            <a:ext cx="3145536" cy="576072"/>
+            <a:off x="7799832" y="4659782"/>
+            <a:ext cx="3145536" cy="899770"/>
           </a:xfrm>
           <a:prstGeom prst="rect">
             <a:avLst/>
@@ -11409,7 +11841,7 @@
                 <a:ea typeface="Aptos" pitchFamily="34" charset="-122"/>
                 <a:cs typeface="Aptos" pitchFamily="34" charset="-120"/>
               </a:rPr>
-              <a:t>Use the assignment to test whether you can explain the concept, apply it to a realistic public health situation, and.</a:t>
+              <a:t>Use the assignment to test whether you can explain the concept, apply it to a realistic public health situation, and identify what would need review before the work moves forward.</a:t>
             </a:r>
             <a:endParaRPr lang="en-US" sz="1320" dirty="0"/>
           </a:p>
@@ -11778,11 +12210,11 @@
         <p:spPr>
           <a:xfrm>
             <a:off x="7635240" y="1325880"/>
-            <a:ext cx="3474720" cy="1325880"/>
+            <a:ext cx="3474720" cy="1207008"/>
           </a:xfrm>
           <a:prstGeom prst="roundRect">
             <a:avLst>
-              <a:gd name="adj" fmla="val 8276"/>
+              <a:gd name="adj" fmla="val 9091"/>
             </a:avLst>
           </a:prstGeom>
           <a:solidFill>
@@ -11844,7 +12276,7 @@
         <p:spPr>
           <a:xfrm>
             <a:off x="7799832" y="1801368"/>
-            <a:ext cx="3145536" cy="758952"/>
+            <a:ext cx="3145536" cy="640080"/>
           </a:xfrm>
           <a:prstGeom prst="rect">
             <a:avLst/>
@@ -11884,12 +12316,12 @@
         </p:nvSpPr>
         <p:spPr>
           <a:xfrm>
-            <a:off x="7635240" y="2788920"/>
-            <a:ext cx="3474720" cy="1536192"/>
+            <a:off x="7635240" y="2670048"/>
+            <a:ext cx="3474720" cy="1377086"/>
           </a:xfrm>
           <a:prstGeom prst="roundRect">
             <a:avLst>
-              <a:gd name="adj" fmla="val 7143"/>
+              <a:gd name="adj" fmla="val 7968"/>
             </a:avLst>
           </a:prstGeom>
           <a:solidFill>
@@ -11911,7 +12343,7 @@
         </p:nvSpPr>
         <p:spPr>
           <a:xfrm>
-            <a:off x="7799832" y="2935224"/>
+            <a:off x="7799832" y="2816352"/>
             <a:ext cx="3145536" cy="256032"/>
           </a:xfrm>
           <a:prstGeom prst="rect">
@@ -11950,8 +12382,8 @@
         </p:nvSpPr>
         <p:spPr>
           <a:xfrm>
-            <a:off x="7818120" y="3300984"/>
-            <a:ext cx="3090672" cy="877824"/>
+            <a:off x="7818120" y="3182112"/>
+            <a:ext cx="3090672" cy="718718"/>
           </a:xfrm>
           <a:prstGeom prst="rect">
             <a:avLst/>
@@ -12025,12 +12457,12 @@
         </p:nvSpPr>
         <p:spPr>
           <a:xfrm>
-            <a:off x="7635240" y="4498848"/>
-            <a:ext cx="3474720" cy="1143000"/>
+            <a:off x="7635240" y="4184294"/>
+            <a:ext cx="3474720" cy="1466698"/>
           </a:xfrm>
           <a:prstGeom prst="roundRect">
             <a:avLst>
-              <a:gd name="adj" fmla="val 9600"/>
+              <a:gd name="adj" fmla="val 7481"/>
             </a:avLst>
           </a:prstGeom>
           <a:solidFill>
@@ -12052,7 +12484,7 @@
         </p:nvSpPr>
         <p:spPr>
           <a:xfrm>
-            <a:off x="7799832" y="4645152"/>
+            <a:off x="7799832" y="4330598"/>
             <a:ext cx="3145536" cy="256032"/>
           </a:xfrm>
           <a:prstGeom prst="rect">
@@ -12091,8 +12523,8 @@
         </p:nvSpPr>
         <p:spPr>
           <a:xfrm>
-            <a:off x="7799832" y="4974336"/>
-            <a:ext cx="3145536" cy="576072"/>
+            <a:off x="7799832" y="4659782"/>
+            <a:ext cx="3145536" cy="899770"/>
           </a:xfrm>
           <a:prstGeom prst="rect">
             <a:avLst/>
@@ -12118,7 +12550,7 @@
                 <a:ea typeface="Aptos" pitchFamily="34" charset="-122"/>
                 <a:cs typeface="Aptos" pitchFamily="34" charset="-120"/>
               </a:rPr>
-              <a:t>Use the assignment to test whether you can explain the concept, apply it to a realistic public health situation, and.</a:t>
+              <a:t>Use the assignment to test whether you can explain the concept, apply it to a realistic public health situation, and identify what would need review before the work moves forward.</a:t>
             </a:r>
             <a:endParaRPr lang="en-US" sz="1320" dirty="0"/>
           </a:p>
@@ -12487,11 +12919,11 @@
         <p:spPr>
           <a:xfrm>
             <a:off x="7635240" y="1325880"/>
-            <a:ext cx="3474720" cy="1325880"/>
+            <a:ext cx="3474720" cy="1207008"/>
           </a:xfrm>
           <a:prstGeom prst="roundRect">
             <a:avLst>
-              <a:gd name="adj" fmla="val 8276"/>
+              <a:gd name="adj" fmla="val 9091"/>
             </a:avLst>
           </a:prstGeom>
           <a:solidFill>
@@ -12553,7 +12985,7 @@
         <p:spPr>
           <a:xfrm>
             <a:off x="7799832" y="1801368"/>
-            <a:ext cx="3145536" cy="758952"/>
+            <a:ext cx="3145536" cy="640080"/>
           </a:xfrm>
           <a:prstGeom prst="rect">
             <a:avLst/>
@@ -12593,12 +13025,12 @@
         </p:nvSpPr>
         <p:spPr>
           <a:xfrm>
-            <a:off x="7635240" y="2788920"/>
-            <a:ext cx="3474720" cy="1536192"/>
+            <a:off x="7635240" y="2670048"/>
+            <a:ext cx="3474720" cy="1377086"/>
           </a:xfrm>
           <a:prstGeom prst="roundRect">
             <a:avLst>
-              <a:gd name="adj" fmla="val 7143"/>
+              <a:gd name="adj" fmla="val 7968"/>
             </a:avLst>
           </a:prstGeom>
           <a:solidFill>
@@ -12620,7 +13052,7 @@
         </p:nvSpPr>
         <p:spPr>
           <a:xfrm>
-            <a:off x="7799832" y="2935224"/>
+            <a:off x="7799832" y="2816352"/>
             <a:ext cx="3145536" cy="256032"/>
           </a:xfrm>
           <a:prstGeom prst="rect">
@@ -12659,8 +13091,8 @@
         </p:nvSpPr>
         <p:spPr>
           <a:xfrm>
-            <a:off x="7818120" y="3300984"/>
-            <a:ext cx="3090672" cy="877824"/>
+            <a:off x="7818120" y="3182112"/>
+            <a:ext cx="3090672" cy="718718"/>
           </a:xfrm>
           <a:prstGeom prst="rect">
             <a:avLst/>
@@ -12734,12 +13166,12 @@
         </p:nvSpPr>
         <p:spPr>
           <a:xfrm>
-            <a:off x="7635240" y="4498848"/>
-            <a:ext cx="3474720" cy="1143000"/>
+            <a:off x="7635240" y="4184294"/>
+            <a:ext cx="3474720" cy="1466698"/>
           </a:xfrm>
           <a:prstGeom prst="roundRect">
             <a:avLst>
-              <a:gd name="adj" fmla="val 9600"/>
+              <a:gd name="adj" fmla="val 7481"/>
             </a:avLst>
           </a:prstGeom>
           <a:solidFill>
@@ -12761,7 +13193,7 @@
         </p:nvSpPr>
         <p:spPr>
           <a:xfrm>
-            <a:off x="7799832" y="4645152"/>
+            <a:off x="7799832" y="4330598"/>
             <a:ext cx="3145536" cy="256032"/>
           </a:xfrm>
           <a:prstGeom prst="rect">
@@ -12800,8 +13232,8 @@
         </p:nvSpPr>
         <p:spPr>
           <a:xfrm>
-            <a:off x="7799832" y="4974336"/>
-            <a:ext cx="3145536" cy="576072"/>
+            <a:off x="7799832" y="4659782"/>
+            <a:ext cx="3145536" cy="899770"/>
           </a:xfrm>
           <a:prstGeom prst="rect">
             <a:avLst/>
@@ -12827,7 +13259,7 @@
                 <a:ea typeface="Aptos" pitchFamily="34" charset="-122"/>
                 <a:cs typeface="Aptos" pitchFamily="34" charset="-120"/>
               </a:rPr>
-              <a:t>Connect the concept to public health purpose, responsible use, required safeguards, documentation, and the next action a.</a:t>
+              <a:t>Connect the concept to public health purpose, responsible use, required safeguards, documentation, and the next action a department should take.</a:t>
             </a:r>
             <a:endParaRPr lang="en-US" sz="1320" dirty="0"/>
           </a:p>
@@ -13162,11 +13594,11 @@
         <p:spPr>
           <a:xfrm>
             <a:off x="7635240" y="1325880"/>
-            <a:ext cx="3474720" cy="1325880"/>
+            <a:ext cx="3474720" cy="1207008"/>
           </a:xfrm>
           <a:prstGeom prst="roundRect">
             <a:avLst>
-              <a:gd name="adj" fmla="val 8276"/>
+              <a:gd name="adj" fmla="val 9091"/>
             </a:avLst>
           </a:prstGeom>
           <a:solidFill>
@@ -13228,7 +13660,7 @@
         <p:spPr>
           <a:xfrm>
             <a:off x="7799832" y="1801368"/>
-            <a:ext cx="3145536" cy="758952"/>
+            <a:ext cx="3145536" cy="640080"/>
           </a:xfrm>
           <a:prstGeom prst="rect">
             <a:avLst/>
@@ -13254,7 +13686,7 @@
                 <a:ea typeface="Aptos" pitchFamily="34" charset="-122"/>
                 <a:cs typeface="Aptos" pitchFamily="34" charset="-120"/>
               </a:rPr>
-              <a:t>Relevant public health program SOPs, data governance documentation, and implementation plans</a:t>
+              <a:t>Relevant public health program SOPs, data governance documentation, and implementation.</a:t>
             </a:r>
             <a:endParaRPr lang="en-US" sz="1320" dirty="0"/>
           </a:p>
@@ -13268,12 +13700,12 @@
         </p:nvSpPr>
         <p:spPr>
           <a:xfrm>
-            <a:off x="7635240" y="2788920"/>
-            <a:ext cx="3474720" cy="1536192"/>
+            <a:off x="7635240" y="2670048"/>
+            <a:ext cx="3474720" cy="1377086"/>
           </a:xfrm>
           <a:prstGeom prst="roundRect">
             <a:avLst>
-              <a:gd name="adj" fmla="val 7143"/>
+              <a:gd name="adj" fmla="val 7968"/>
             </a:avLst>
           </a:prstGeom>
           <a:solidFill>
@@ -13295,7 +13727,7 @@
         </p:nvSpPr>
         <p:spPr>
           <a:xfrm>
-            <a:off x="7799832" y="2935224"/>
+            <a:off x="7799832" y="2816352"/>
             <a:ext cx="3145536" cy="256032"/>
           </a:xfrm>
           <a:prstGeom prst="rect">
@@ -13334,8 +13766,8 @@
         </p:nvSpPr>
         <p:spPr>
           <a:xfrm>
-            <a:off x="7818120" y="3300984"/>
-            <a:ext cx="3090672" cy="877824"/>
+            <a:off x="7818120" y="3182112"/>
+            <a:ext cx="3090672" cy="718718"/>
           </a:xfrm>
           <a:prstGeom prst="rect">
             <a:avLst/>
@@ -13375,12 +13807,12 @@
         </p:nvSpPr>
         <p:spPr>
           <a:xfrm>
-            <a:off x="7635240" y="4498848"/>
-            <a:ext cx="3474720" cy="1143000"/>
+            <a:off x="7635240" y="4184294"/>
+            <a:ext cx="3474720" cy="1466698"/>
           </a:xfrm>
           <a:prstGeom prst="roundRect">
             <a:avLst>
-              <a:gd name="adj" fmla="val 9600"/>
+              <a:gd name="adj" fmla="val 7481"/>
             </a:avLst>
           </a:prstGeom>
           <a:solidFill>
@@ -13402,7 +13834,7 @@
         </p:nvSpPr>
         <p:spPr>
           <a:xfrm>
-            <a:off x="7799832" y="4645152"/>
+            <a:off x="7799832" y="4330598"/>
             <a:ext cx="3145536" cy="256032"/>
           </a:xfrm>
           <a:prstGeom prst="rect">
@@ -13441,8 +13873,8 @@
         </p:nvSpPr>
         <p:spPr>
           <a:xfrm>
-            <a:off x="7799832" y="4974336"/>
-            <a:ext cx="3145536" cy="576072"/>
+            <a:off x="7799832" y="4659782"/>
+            <a:ext cx="3145536" cy="899770"/>
           </a:xfrm>
           <a:prstGeom prst="rect">
             <a:avLst/>
@@ -13468,7 +13900,7 @@
                 <a:ea typeface="Aptos" pitchFamily="34" charset="-122"/>
                 <a:cs typeface="Aptos" pitchFamily="34" charset="-120"/>
               </a:rPr>
-              <a:t>Connect the concept to public health purpose, responsible use, required safeguards, documentation, and the next action a.</a:t>
+              <a:t>Connect the concept to public health purpose, responsible use, required safeguards, documentation, and the next action a department should take.</a:t>
             </a:r>
             <a:endParaRPr lang="en-US" sz="1320" dirty="0"/>
           </a:p>
@@ -13946,7 +14378,7 @@
                 <a:ea typeface="Aptos" pitchFamily="34" charset="-122"/>
                 <a:cs typeface="Aptos" pitchFamily="34" charset="-120"/>
               </a:rPr>
-              <a:t>Use the related plays to identify decisions, participants, timing, approvals, and documentation needed for responsible.</a:t>
+              <a:t>Use the related plays to identify decisions, participants, timing, approvals, and documentation needed for responsible implementation.</a:t>
             </a:r>
             <a:endParaRPr lang="en-US" sz="1320" dirty="0"/>
           </a:p>
@@ -14565,7 +14997,7 @@
                 <a:ea typeface="Aptos" pitchFamily="34" charset="-122"/>
                 <a:cs typeface="Aptos" pitchFamily="34" charset="-120"/>
               </a:rPr>
-              <a:t>Use linked tools when your department needs a structured worksheet, template, checklist, review process, or.</a:t>
+              <a:t>Use linked tools when your department needs a structured worksheet, template, checklist, review process, or documentation artifact.</a:t>
             </a:r>
             <a:endParaRPr lang="en-US" sz="1320" dirty="0"/>
           </a:p>
@@ -15075,11 +15507,11 @@
         <p:spPr>
           <a:xfrm>
             <a:off x="7635240" y="1325880"/>
-            <a:ext cx="3474720" cy="1325880"/>
+            <a:ext cx="3474720" cy="1207008"/>
           </a:xfrm>
           <a:prstGeom prst="roundRect">
             <a:avLst>
-              <a:gd name="adj" fmla="val 8276"/>
+              <a:gd name="adj" fmla="val 9091"/>
             </a:avLst>
           </a:prstGeom>
           <a:solidFill>
@@ -15141,7 +15573,7 @@
         <p:spPr>
           <a:xfrm>
             <a:off x="7799832" y="1801368"/>
-            <a:ext cx="3145536" cy="758952"/>
+            <a:ext cx="3145536" cy="640080"/>
           </a:xfrm>
           <a:prstGeom prst="rect">
             <a:avLst/>
@@ -15181,12 +15613,12 @@
         </p:nvSpPr>
         <p:spPr>
           <a:xfrm>
-            <a:off x="7635240" y="2788920"/>
-            <a:ext cx="3474720" cy="1536192"/>
+            <a:off x="7635240" y="2670048"/>
+            <a:ext cx="3474720" cy="1377086"/>
           </a:xfrm>
           <a:prstGeom prst="roundRect">
             <a:avLst>
-              <a:gd name="adj" fmla="val 7143"/>
+              <a:gd name="adj" fmla="val 7968"/>
             </a:avLst>
           </a:prstGeom>
           <a:solidFill>
@@ -15208,7 +15640,7 @@
         </p:nvSpPr>
         <p:spPr>
           <a:xfrm>
-            <a:off x="7799832" y="2935224"/>
+            <a:off x="7799832" y="2816352"/>
             <a:ext cx="3145536" cy="256032"/>
           </a:xfrm>
           <a:prstGeom prst="rect">
@@ -15247,8 +15679,8 @@
         </p:nvSpPr>
         <p:spPr>
           <a:xfrm>
-            <a:off x="7818120" y="3300984"/>
-            <a:ext cx="3090672" cy="877824"/>
+            <a:off x="7818120" y="3182112"/>
+            <a:ext cx="3090672" cy="718718"/>
           </a:xfrm>
           <a:prstGeom prst="rect">
             <a:avLst/>
@@ -15322,12 +15754,12 @@
         </p:nvSpPr>
         <p:spPr>
           <a:xfrm>
-            <a:off x="7635240" y="4498848"/>
-            <a:ext cx="3474720" cy="1143000"/>
+            <a:off x="7635240" y="4184294"/>
+            <a:ext cx="3474720" cy="1466698"/>
           </a:xfrm>
           <a:prstGeom prst="roundRect">
             <a:avLst>
-              <a:gd name="adj" fmla="val 9600"/>
+              <a:gd name="adj" fmla="val 7481"/>
             </a:avLst>
           </a:prstGeom>
           <a:solidFill>
@@ -15349,7 +15781,7 @@
         </p:nvSpPr>
         <p:spPr>
           <a:xfrm>
-            <a:off x="7799832" y="4645152"/>
+            <a:off x="7799832" y="4330598"/>
             <a:ext cx="3145536" cy="256032"/>
           </a:xfrm>
           <a:prstGeom prst="rect">
@@ -15388,8 +15820,8 @@
         </p:nvSpPr>
         <p:spPr>
           <a:xfrm>
-            <a:off x="7799832" y="4974336"/>
-            <a:ext cx="3145536" cy="576072"/>
+            <a:off x="7799832" y="4659782"/>
+            <a:ext cx="3145536" cy="899770"/>
           </a:xfrm>
           <a:prstGeom prst="rect">
             <a:avLst/>
@@ -15415,7 +15847,7 @@
                 <a:ea typeface="Aptos" pitchFamily="34" charset="-122"/>
                 <a:cs typeface="Aptos" pitchFamily="34" charset="-120"/>
               </a:rPr>
-              <a:t>Use the assignment to test whether you can explain the concept, apply it to a realistic public health situation, and.</a:t>
+              <a:t>Use the assignment to test whether you can explain the concept, apply it to a realistic public health situation, and identify what would need review before the work moves forward.</a:t>
             </a:r>
             <a:endParaRPr lang="en-US" sz="1320" dirty="0"/>
           </a:p>
@@ -15784,11 +16216,11 @@
         <p:spPr>
           <a:xfrm>
             <a:off x="7635240" y="1325880"/>
-            <a:ext cx="3474720" cy="1325880"/>
+            <a:ext cx="3474720" cy="1255471"/>
           </a:xfrm>
           <a:prstGeom prst="roundRect">
             <a:avLst>
-              <a:gd name="adj" fmla="val 8276"/>
+              <a:gd name="adj" fmla="val 8740"/>
             </a:avLst>
           </a:prstGeom>
           <a:solidFill>
@@ -15850,7 +16282,7 @@
         <p:spPr>
           <a:xfrm>
             <a:off x="7799832" y="1801368"/>
-            <a:ext cx="3145536" cy="758952"/>
+            <a:ext cx="3145536" cy="688543"/>
           </a:xfrm>
           <a:prstGeom prst="rect">
             <a:avLst/>
@@ -15890,12 +16322,12 @@
         </p:nvSpPr>
         <p:spPr>
           <a:xfrm>
-            <a:off x="7635240" y="2788920"/>
-            <a:ext cx="3474720" cy="1536192"/>
+            <a:off x="7635240" y="2718511"/>
+            <a:ext cx="3474720" cy="1328623"/>
           </a:xfrm>
           <a:prstGeom prst="roundRect">
             <a:avLst>
-              <a:gd name="adj" fmla="val 7143"/>
+              <a:gd name="adj" fmla="val 8259"/>
             </a:avLst>
           </a:prstGeom>
           <a:solidFill>
@@ -15917,7 +16349,7 @@
         </p:nvSpPr>
         <p:spPr>
           <a:xfrm>
-            <a:off x="7799832" y="2935224"/>
+            <a:off x="7799832" y="2864815"/>
             <a:ext cx="3145536" cy="256032"/>
           </a:xfrm>
           <a:prstGeom prst="rect">
@@ -15956,8 +16388,8 @@
         </p:nvSpPr>
         <p:spPr>
           <a:xfrm>
-            <a:off x="7818120" y="3300984"/>
-            <a:ext cx="3090672" cy="877824"/>
+            <a:off x="7818120" y="3230575"/>
+            <a:ext cx="3090672" cy="670255"/>
           </a:xfrm>
           <a:prstGeom prst="rect">
             <a:avLst/>
@@ -16031,12 +16463,12 @@
         </p:nvSpPr>
         <p:spPr>
           <a:xfrm>
-            <a:off x="7635240" y="4498848"/>
-            <a:ext cx="3474720" cy="1143000"/>
+            <a:off x="7635240" y="4184294"/>
+            <a:ext cx="3474720" cy="1466698"/>
           </a:xfrm>
           <a:prstGeom prst="roundRect">
             <a:avLst>
-              <a:gd name="adj" fmla="val 9600"/>
+              <a:gd name="adj" fmla="val 7481"/>
             </a:avLst>
           </a:prstGeom>
           <a:solidFill>
@@ -16058,7 +16490,7 @@
         </p:nvSpPr>
         <p:spPr>
           <a:xfrm>
-            <a:off x="7799832" y="4645152"/>
+            <a:off x="7799832" y="4330598"/>
             <a:ext cx="3145536" cy="256032"/>
           </a:xfrm>
           <a:prstGeom prst="rect">
@@ -16097,8 +16529,8 @@
         </p:nvSpPr>
         <p:spPr>
           <a:xfrm>
-            <a:off x="7799832" y="4974336"/>
-            <a:ext cx="3145536" cy="576072"/>
+            <a:off x="7799832" y="4659782"/>
+            <a:ext cx="3145536" cy="899770"/>
           </a:xfrm>
           <a:prstGeom prst="rect">
             <a:avLst/>
@@ -16124,7 +16556,7 @@
                 <a:ea typeface="Aptos" pitchFamily="34" charset="-122"/>
                 <a:cs typeface="Aptos" pitchFamily="34" charset="-120"/>
               </a:rPr>
-              <a:t>Connect the concept to public health purpose, responsible use, required safeguards, documentation, and the next action a.</a:t>
+              <a:t>Connect the concept to public health purpose, responsible use, required safeguards, documentation, and the next action a department should take.</a:t>
             </a:r>
             <a:endParaRPr lang="en-US" sz="1320" dirty="0"/>
           </a:p>
@@ -16493,11 +16925,11 @@
         <p:spPr>
           <a:xfrm>
             <a:off x="7635240" y="1325880"/>
-            <a:ext cx="3474720" cy="1325880"/>
+            <a:ext cx="3474720" cy="1207008"/>
           </a:xfrm>
           <a:prstGeom prst="roundRect">
             <a:avLst>
-              <a:gd name="adj" fmla="val 8276"/>
+              <a:gd name="adj" fmla="val 9091"/>
             </a:avLst>
           </a:prstGeom>
           <a:solidFill>
@@ -16559,7 +16991,7 @@
         <p:spPr>
           <a:xfrm>
             <a:off x="7799832" y="1801368"/>
-            <a:ext cx="3145536" cy="758952"/>
+            <a:ext cx="3145536" cy="640080"/>
           </a:xfrm>
           <a:prstGeom prst="rect">
             <a:avLst/>
@@ -16599,12 +17031,12 @@
         </p:nvSpPr>
         <p:spPr>
           <a:xfrm>
-            <a:off x="7635240" y="2788920"/>
-            <a:ext cx="3474720" cy="1536192"/>
+            <a:off x="7635240" y="2670048"/>
+            <a:ext cx="3474720" cy="1377086"/>
           </a:xfrm>
           <a:prstGeom prst="roundRect">
             <a:avLst>
-              <a:gd name="adj" fmla="val 7143"/>
+              <a:gd name="adj" fmla="val 7968"/>
             </a:avLst>
           </a:prstGeom>
           <a:solidFill>
@@ -16626,8 +17058,8 @@
         </p:nvSpPr>
         <p:spPr>
           <a:xfrm>
-            <a:off x="7799832" y="2935224"/>
-            <a:ext cx="3145536" cy="256032"/>
+            <a:off x="7799832" y="2798064"/>
+            <a:ext cx="3145536" cy="237744"/>
           </a:xfrm>
           <a:prstGeom prst="rect">
             <a:avLst/>
@@ -16643,7 +17075,7 @@
               <a:buNone/>
             </a:pPr>
             <a:r>
-              <a:rPr lang="en-US" sz="1300" b="1" dirty="0">
+              <a:rPr lang="en-US" sz="1250" b="1" dirty="0">
                 <a:solidFill>
                   <a:srgbClr val="0068B7"/>
                 </a:solidFill>
@@ -16651,101 +17083,317 @@
                 <a:ea typeface="Aptos" pitchFamily="34" charset="-122"/>
                 <a:cs typeface="Aptos" pitchFamily="34" charset="-120"/>
               </a:rPr>
-              <a:t>Concept checkpoints</a:t>
-            </a:r>
-            <a:endParaRPr lang="en-US" sz="1300" dirty="0"/>
-          </a:p>
-        </p:txBody>
-      </p:sp>
-      <p:sp>
-        <p:nvSpPr>
-          <p:cNvPr id="15" name="Text 13"/>
-          <p:cNvSpPr/>
-          <p:nvPr/>
-        </p:nvSpPr>
-        <p:spPr>
-          <a:xfrm>
-            <a:off x="7818120" y="3300984"/>
-            <a:ext cx="3090672" cy="877824"/>
-          </a:xfrm>
-          <a:prstGeom prst="rect">
-            <a:avLst/>
-          </a:prstGeom>
-          <a:noFill/>
-          <a:ln/>
-        </p:spPr>
-        <p:txBody>
-          <a:bodyPr wrap="square" lIns="508" tIns="508" rIns="508" bIns="508" rtlCol="0" anchor="t">
+              <a:t>Governance pathway</a:t>
+            </a:r>
+            <a:endParaRPr lang="en-US" sz="1250" dirty="0"/>
+          </a:p>
+        </p:txBody>
+      </p:sp>
+      <p:sp>
+        <p:nvSpPr>
+          <p:cNvPr id="15" name="Shape 13"/>
+          <p:cNvSpPr/>
+          <p:nvPr/>
+        </p:nvSpPr>
+        <p:spPr>
+          <a:xfrm>
+            <a:off x="8763000" y="3351276"/>
+            <a:ext cx="164592" cy="0"/>
+          </a:xfrm>
+          <a:prstGeom prst="line">
+            <a:avLst/>
+          </a:prstGeom>
+          <a:noFill/>
+          <a:ln w="15240">
+            <a:solidFill>
+              <a:srgbClr val="8ABBD8"/>
+            </a:solidFill>
+            <a:prstDash val="solid"/>
+          </a:ln>
+        </p:spPr>
+      </p:sp>
+      <p:sp>
+        <p:nvSpPr>
+          <p:cNvPr id="16" name="Shape 14"/>
+          <p:cNvSpPr/>
+          <p:nvPr/>
+        </p:nvSpPr>
+        <p:spPr>
+          <a:xfrm>
+            <a:off x="7872984" y="3200400"/>
+            <a:ext cx="890016" cy="301752"/>
+          </a:xfrm>
+          <a:prstGeom prst="roundRect">
+            <a:avLst>
+              <a:gd name="adj" fmla="val 24242"/>
+            </a:avLst>
+          </a:prstGeom>
+          <a:solidFill>
+            <a:srgbClr val="0068B7"/>
+          </a:solidFill>
+          <a:ln w="12700">
+            <a:solidFill>
+              <a:srgbClr val="0068B7"/>
+            </a:solidFill>
+            <a:prstDash val="solid"/>
+          </a:ln>
+        </p:spPr>
+      </p:sp>
+      <p:sp>
+        <p:nvSpPr>
+          <p:cNvPr id="17" name="Text 15"/>
+          <p:cNvSpPr/>
+          <p:nvPr/>
+        </p:nvSpPr>
+        <p:spPr>
+          <a:xfrm>
+            <a:off x="7909560" y="3273552"/>
+            <a:ext cx="816864" cy="146304"/>
+          </a:xfrm>
+          <a:prstGeom prst="rect">
+            <a:avLst/>
+          </a:prstGeom>
+          <a:noFill/>
+          <a:ln/>
+        </p:spPr>
+        <p:txBody>
+          <a:bodyPr wrap="square" lIns="0" tIns="0" rIns="0" bIns="0" rtlCol="0" anchor="ctr">
             <a:normAutofit/>
           </a:bodyPr>
           <a:lstStyle/>
           <a:p>
-            <a:pPr indent="0" marL="0">
-              <a:buNone/>
-            </a:pPr>
-            <a:r>
-              <a:rPr lang="en-US" sz="1220" dirty="0">
-                <a:solidFill>
-                  <a:srgbClr val="17364A"/>
-                </a:solidFill>
-                <a:latin typeface="Aptos" pitchFamily="34" charset="0"/>
-                <a:ea typeface="Aptos" pitchFamily="34" charset="-122"/>
-                <a:cs typeface="Aptos" pitchFamily="34" charset="-120"/>
-              </a:rPr>
-              <a:t>This national-level module is intended for training and planning.</a:t>
-            </a:r>
-            <a:endParaRPr lang="en-US" sz="1220" dirty="0"/>
-          </a:p>
-          <a:p>
-            <a:pPr indent="0" marL="0">
-              <a:buNone/>
-            </a:pPr>
-            <a:r>
-              <a:rPr lang="en-US" sz="1220" dirty="0">
-                <a:solidFill>
-                  <a:srgbClr val="17364A"/>
-                </a:solidFill>
-                <a:latin typeface="Aptos" pitchFamily="34" charset="0"/>
-                <a:ea typeface="Aptos" pitchFamily="34" charset="-122"/>
-                <a:cs typeface="Aptos" pitchFamily="34" charset="-120"/>
-              </a:rPr>
-              <a:t>It does not replace legal, privacy, procurement, civil rights,.</a:t>
-            </a:r>
-            <a:endParaRPr lang="en-US" sz="1220" dirty="0"/>
-          </a:p>
-          <a:p>
-            <a:pPr indent="0" marL="0">
-              <a:buNone/>
-            </a:pPr>
-            <a:r>
-              <a:rPr lang="en-US" sz="1220" dirty="0">
-                <a:solidFill>
-                  <a:srgbClr val="17364A"/>
-                </a:solidFill>
-                <a:latin typeface="Aptos" pitchFamily="34" charset="0"/>
-                <a:ea typeface="Aptos" pitchFamily="34" charset="-122"/>
-                <a:cs typeface="Aptos" pitchFamily="34" charset="-120"/>
-              </a:rPr>
-              <a:t>Learners should confirm applicable requirements in their own.</a:t>
-            </a:r>
-            <a:endParaRPr lang="en-US" sz="1220" dirty="0"/>
-          </a:p>
-        </p:txBody>
-      </p:sp>
-      <p:sp>
-        <p:nvSpPr>
-          <p:cNvPr id="16" name="Shape 14"/>
-          <p:cNvSpPr/>
-          <p:nvPr/>
-        </p:nvSpPr>
-        <p:spPr>
-          <a:xfrm>
-            <a:off x="7635240" y="4498848"/>
-            <a:ext cx="3474720" cy="1143000"/>
+            <a:pPr algn="ctr" indent="0" marL="0">
+              <a:buNone/>
+            </a:pPr>
+            <a:r>
+              <a:rPr lang="en-US" sz="880" b="1" dirty="0">
+                <a:solidFill>
+                  <a:srgbClr val="FFFFFF"/>
+                </a:solidFill>
+                <a:latin typeface="Aptos" pitchFamily="34" charset="0"/>
+                <a:ea typeface="Aptos" pitchFamily="34" charset="-122"/>
+                <a:cs typeface="Aptos" pitchFamily="34" charset="-120"/>
+              </a:rPr>
+              <a:t>Submit</a:t>
+            </a:r>
+            <a:endParaRPr lang="en-US" sz="880" dirty="0"/>
+          </a:p>
+        </p:txBody>
+      </p:sp>
+      <p:sp>
+        <p:nvSpPr>
+          <p:cNvPr id="18" name="Shape 16"/>
+          <p:cNvSpPr/>
+          <p:nvPr/>
+        </p:nvSpPr>
+        <p:spPr>
+          <a:xfrm>
+            <a:off x="9817608" y="3351276"/>
+            <a:ext cx="164592" cy="0"/>
+          </a:xfrm>
+          <a:prstGeom prst="line">
+            <a:avLst/>
+          </a:prstGeom>
+          <a:noFill/>
+          <a:ln w="15240">
+            <a:solidFill>
+              <a:srgbClr val="8ABBD8"/>
+            </a:solidFill>
+            <a:prstDash val="solid"/>
+          </a:ln>
+        </p:spPr>
+      </p:sp>
+      <p:sp>
+        <p:nvSpPr>
+          <p:cNvPr id="19" name="Shape 17"/>
+          <p:cNvSpPr/>
+          <p:nvPr/>
+        </p:nvSpPr>
+        <p:spPr>
+          <a:xfrm>
+            <a:off x="8927592" y="3200400"/>
+            <a:ext cx="890016" cy="301752"/>
           </a:xfrm>
           <a:prstGeom prst="roundRect">
             <a:avLst>
-              <a:gd name="adj" fmla="val 9600"/>
+              <a:gd name="adj" fmla="val 24242"/>
+            </a:avLst>
+          </a:prstGeom>
+          <a:solidFill>
+            <a:srgbClr val="2F8A28"/>
+          </a:solidFill>
+          <a:ln w="12700">
+            <a:solidFill>
+              <a:srgbClr val="2F8A28"/>
+            </a:solidFill>
+            <a:prstDash val="solid"/>
+          </a:ln>
+        </p:spPr>
+      </p:sp>
+      <p:sp>
+        <p:nvSpPr>
+          <p:cNvPr id="20" name="Text 18"/>
+          <p:cNvSpPr/>
+          <p:nvPr/>
+        </p:nvSpPr>
+        <p:spPr>
+          <a:xfrm>
+            <a:off x="8964168" y="3273552"/>
+            <a:ext cx="816864" cy="146304"/>
+          </a:xfrm>
+          <a:prstGeom prst="rect">
+            <a:avLst/>
+          </a:prstGeom>
+          <a:noFill/>
+          <a:ln/>
+        </p:spPr>
+        <p:txBody>
+          <a:bodyPr wrap="square" lIns="0" tIns="0" rIns="0" bIns="0" rtlCol="0" anchor="ctr">
+            <a:normAutofit/>
+          </a:bodyPr>
+          <a:lstStyle/>
+          <a:p>
+            <a:pPr algn="ctr" indent="0" marL="0">
+              <a:buNone/>
+            </a:pPr>
+            <a:r>
+              <a:rPr lang="en-US" sz="880" b="1" dirty="0">
+                <a:solidFill>
+                  <a:srgbClr val="FFFFFF"/>
+                </a:solidFill>
+                <a:latin typeface="Aptos" pitchFamily="34" charset="0"/>
+                <a:ea typeface="Aptos" pitchFamily="34" charset="-122"/>
+                <a:cs typeface="Aptos" pitchFamily="34" charset="-120"/>
+              </a:rPr>
+              <a:t>Review</a:t>
+            </a:r>
+            <a:endParaRPr lang="en-US" sz="880" dirty="0"/>
+          </a:p>
+        </p:txBody>
+      </p:sp>
+      <p:sp>
+        <p:nvSpPr>
+          <p:cNvPr id="21" name="Shape 19"/>
+          <p:cNvSpPr/>
+          <p:nvPr/>
+        </p:nvSpPr>
+        <p:spPr>
+          <a:xfrm>
+            <a:off x="9982200" y="3200400"/>
+            <a:ext cx="890016" cy="301752"/>
+          </a:xfrm>
+          <a:prstGeom prst="roundRect">
+            <a:avLst>
+              <a:gd name="adj" fmla="val 24242"/>
+            </a:avLst>
+          </a:prstGeom>
+          <a:solidFill>
+            <a:srgbClr val="6A4CA3"/>
+          </a:solidFill>
+          <a:ln w="12700">
+            <a:solidFill>
+              <a:srgbClr val="6A4CA3"/>
+            </a:solidFill>
+            <a:prstDash val="solid"/>
+          </a:ln>
+        </p:spPr>
+      </p:sp>
+      <p:sp>
+        <p:nvSpPr>
+          <p:cNvPr id="22" name="Text 20"/>
+          <p:cNvSpPr/>
+          <p:nvPr/>
+        </p:nvSpPr>
+        <p:spPr>
+          <a:xfrm>
+            <a:off x="10018776" y="3273552"/>
+            <a:ext cx="816864" cy="146304"/>
+          </a:xfrm>
+          <a:prstGeom prst="rect">
+            <a:avLst/>
+          </a:prstGeom>
+          <a:noFill/>
+          <a:ln/>
+        </p:spPr>
+        <p:txBody>
+          <a:bodyPr wrap="square" lIns="0" tIns="0" rIns="0" bIns="0" rtlCol="0" anchor="ctr">
+            <a:normAutofit/>
+          </a:bodyPr>
+          <a:lstStyle/>
+          <a:p>
+            <a:pPr algn="ctr" indent="0" marL="0">
+              <a:buNone/>
+            </a:pPr>
+            <a:r>
+              <a:rPr lang="en-US" sz="880" b="1" dirty="0">
+                <a:solidFill>
+                  <a:srgbClr val="FFFFFF"/>
+                </a:solidFill>
+                <a:latin typeface="Aptos" pitchFamily="34" charset="0"/>
+                <a:ea typeface="Aptos" pitchFamily="34" charset="-122"/>
+                <a:cs typeface="Aptos" pitchFamily="34" charset="-120"/>
+              </a:rPr>
+              <a:t>Oversee</a:t>
+            </a:r>
+            <a:endParaRPr lang="en-US" sz="880" dirty="0"/>
+          </a:p>
+        </p:txBody>
+      </p:sp>
+      <p:sp>
+        <p:nvSpPr>
+          <p:cNvPr id="23" name="Text 21"/>
+          <p:cNvSpPr/>
+          <p:nvPr/>
+        </p:nvSpPr>
+        <p:spPr>
+          <a:xfrm>
+            <a:off x="7854696" y="3694176"/>
+            <a:ext cx="3035808" cy="206654"/>
+          </a:xfrm>
+          <a:prstGeom prst="rect">
+            <a:avLst/>
+          </a:prstGeom>
+          <a:noFill/>
+          <a:ln/>
+        </p:spPr>
+        <p:txBody>
+          <a:bodyPr wrap="square" lIns="254" tIns="254" rIns="254" bIns="254" rtlCol="0" anchor="t">
+            <a:normAutofit/>
+          </a:bodyPr>
+          <a:lstStyle/>
+          <a:p>
+            <a:pPr indent="0" marL="0">
+              <a:buNone/>
+            </a:pPr>
+            <a:r>
+              <a:rPr lang="en-US" sz="1120" dirty="0">
+                <a:solidFill>
+                  <a:srgbClr val="17364A"/>
+                </a:solidFill>
+                <a:latin typeface="Aptos" pitchFamily="34" charset="0"/>
+                <a:ea typeface="Aptos" pitchFamily="34" charset="-122"/>
+                <a:cs typeface="Aptos" pitchFamily="34" charset="-120"/>
+              </a:rPr>
+              <a:t>A proposed AI use should move through documented review before it becomes an operational workflow.</a:t>
+            </a:r>
+            <a:endParaRPr lang="en-US" sz="1120" dirty="0"/>
+          </a:p>
+        </p:txBody>
+      </p:sp>
+      <p:sp>
+        <p:nvSpPr>
+          <p:cNvPr id="24" name="Shape 22"/>
+          <p:cNvSpPr/>
+          <p:nvPr/>
+        </p:nvSpPr>
+        <p:spPr>
+          <a:xfrm>
+            <a:off x="7635240" y="4184294"/>
+            <a:ext cx="3474720" cy="1466698"/>
+          </a:xfrm>
+          <a:prstGeom prst="roundRect">
+            <a:avLst>
+              <a:gd name="adj" fmla="val 7481"/>
             </a:avLst>
           </a:prstGeom>
           <a:solidFill>
@@ -16761,13 +17409,13 @@
       </p:sp>
       <p:sp>
         <p:nvSpPr>
-          <p:cNvPr id="17" name="Text 15"/>
-          <p:cNvSpPr/>
-          <p:nvPr/>
-        </p:nvSpPr>
-        <p:spPr>
-          <a:xfrm>
-            <a:off x="7799832" y="4645152"/>
+          <p:cNvPr id="25" name="Text 23"/>
+          <p:cNvSpPr/>
+          <p:nvPr/>
+        </p:nvSpPr>
+        <p:spPr>
+          <a:xfrm>
+            <a:off x="7799832" y="4330598"/>
             <a:ext cx="3145536" cy="256032"/>
           </a:xfrm>
           <a:prstGeom prst="rect">
@@ -16800,14 +17448,14 @@
       </p:sp>
       <p:sp>
         <p:nvSpPr>
-          <p:cNvPr id="18" name="Text 16"/>
-          <p:cNvSpPr/>
-          <p:nvPr/>
-        </p:nvSpPr>
-        <p:spPr>
-          <a:xfrm>
-            <a:off x="7799832" y="4974336"/>
-            <a:ext cx="3145536" cy="576072"/>
+          <p:cNvPr id="26" name="Text 24"/>
+          <p:cNvSpPr/>
+          <p:nvPr/>
+        </p:nvSpPr>
+        <p:spPr>
+          <a:xfrm>
+            <a:off x="7799832" y="4659782"/>
+            <a:ext cx="3145536" cy="899770"/>
           </a:xfrm>
           <a:prstGeom prst="rect">
             <a:avLst/>
@@ -16833,7 +17481,7 @@
                 <a:ea typeface="Aptos" pitchFamily="34" charset="-122"/>
                 <a:cs typeface="Aptos" pitchFamily="34" charset="-120"/>
               </a:rPr>
-              <a:t>Translate this concept into clear decision rights, review steps, documentation expectations, and escalation paths before.</a:t>
+              <a:t>Translate this concept into clear decision rights, review steps, documentation expectations, and escalation paths before an AI-supported workflow is approved.</a:t>
             </a:r>
             <a:endParaRPr lang="en-US" sz="1320" dirty="0"/>
           </a:p>
@@ -17202,11 +17850,11 @@
         <p:spPr>
           <a:xfrm>
             <a:off x="7635240" y="1325880"/>
-            <a:ext cx="3474720" cy="1325880"/>
+            <a:ext cx="3474720" cy="1255471"/>
           </a:xfrm>
           <a:prstGeom prst="roundRect">
             <a:avLst>
-              <a:gd name="adj" fmla="val 8276"/>
+              <a:gd name="adj" fmla="val 8740"/>
             </a:avLst>
           </a:prstGeom>
           <a:solidFill>
@@ -17268,7 +17916,7 @@
         <p:spPr>
           <a:xfrm>
             <a:off x="7799832" y="1801368"/>
-            <a:ext cx="3145536" cy="758952"/>
+            <a:ext cx="3145536" cy="688543"/>
           </a:xfrm>
           <a:prstGeom prst="rect">
             <a:avLst/>
@@ -17308,12 +17956,12 @@
         </p:nvSpPr>
         <p:spPr>
           <a:xfrm>
-            <a:off x="7635240" y="2788920"/>
-            <a:ext cx="3474720" cy="1536192"/>
+            <a:off x="7635240" y="2718511"/>
+            <a:ext cx="3474720" cy="1328623"/>
           </a:xfrm>
           <a:prstGeom prst="roundRect">
             <a:avLst>
-              <a:gd name="adj" fmla="val 7143"/>
+              <a:gd name="adj" fmla="val 8259"/>
             </a:avLst>
           </a:prstGeom>
           <a:solidFill>
@@ -17335,7 +17983,7 @@
         </p:nvSpPr>
         <p:spPr>
           <a:xfrm>
-            <a:off x="7799832" y="2935224"/>
+            <a:off x="7799832" y="2864815"/>
             <a:ext cx="3145536" cy="256032"/>
           </a:xfrm>
           <a:prstGeom prst="rect">
@@ -17374,8 +18022,8 @@
         </p:nvSpPr>
         <p:spPr>
           <a:xfrm>
-            <a:off x="7818120" y="3300984"/>
-            <a:ext cx="3090672" cy="877824"/>
+            <a:off x="7818120" y="3230575"/>
+            <a:ext cx="3090672" cy="670255"/>
           </a:xfrm>
           <a:prstGeom prst="rect">
             <a:avLst/>
@@ -17449,12 +18097,12 @@
         </p:nvSpPr>
         <p:spPr>
           <a:xfrm>
-            <a:off x="7635240" y="4498848"/>
-            <a:ext cx="3474720" cy="1143000"/>
+            <a:off x="7635240" y="4184294"/>
+            <a:ext cx="3474720" cy="1466698"/>
           </a:xfrm>
           <a:prstGeom prst="roundRect">
             <a:avLst>
-              <a:gd name="adj" fmla="val 9600"/>
+              <a:gd name="adj" fmla="val 7481"/>
             </a:avLst>
           </a:prstGeom>
           <a:solidFill>
@@ -17476,7 +18124,7 @@
         </p:nvSpPr>
         <p:spPr>
           <a:xfrm>
-            <a:off x="7799832" y="4645152"/>
+            <a:off x="7799832" y="4330598"/>
             <a:ext cx="3145536" cy="256032"/>
           </a:xfrm>
           <a:prstGeom prst="rect">
@@ -17515,8 +18163,8 @@
         </p:nvSpPr>
         <p:spPr>
           <a:xfrm>
-            <a:off x="7799832" y="4974336"/>
-            <a:ext cx="3145536" cy="576072"/>
+            <a:off x="7799832" y="4659782"/>
+            <a:ext cx="3145536" cy="899770"/>
           </a:xfrm>
           <a:prstGeom prst="rect">
             <a:avLst/>
@@ -17542,7 +18190,7 @@
                 <a:ea typeface="Aptos" pitchFamily="34" charset="-122"/>
                 <a:cs typeface="Aptos" pitchFamily="34" charset="-120"/>
               </a:rPr>
-              <a:t>Connect the concept to public health purpose, responsible use, required safeguards, documentation, and the next action a.</a:t>
+              <a:t>Connect the concept to public health purpose, responsible use, required safeguards, documentation, and the next action a department should take.</a:t>
             </a:r>
             <a:endParaRPr lang="en-US" sz="1320" dirty="0"/>
           </a:p>
@@ -17911,11 +18559,11 @@
         <p:spPr>
           <a:xfrm>
             <a:off x="7635240" y="1325880"/>
-            <a:ext cx="3474720" cy="1325880"/>
+            <a:ext cx="3474720" cy="1255471"/>
           </a:xfrm>
           <a:prstGeom prst="roundRect">
             <a:avLst>
-              <a:gd name="adj" fmla="val 8276"/>
+              <a:gd name="adj" fmla="val 8740"/>
             </a:avLst>
           </a:prstGeom>
           <a:solidFill>
@@ -17977,7 +18625,7 @@
         <p:spPr>
           <a:xfrm>
             <a:off x="7799832" y="1801368"/>
-            <a:ext cx="3145536" cy="758952"/>
+            <a:ext cx="3145536" cy="688543"/>
           </a:xfrm>
           <a:prstGeom prst="rect">
             <a:avLst/>
@@ -18017,12 +18665,12 @@
         </p:nvSpPr>
         <p:spPr>
           <a:xfrm>
-            <a:off x="7635240" y="2788920"/>
-            <a:ext cx="3474720" cy="1536192"/>
+            <a:off x="7635240" y="2718511"/>
+            <a:ext cx="3474720" cy="1328623"/>
           </a:xfrm>
           <a:prstGeom prst="roundRect">
             <a:avLst>
-              <a:gd name="adj" fmla="val 7143"/>
+              <a:gd name="adj" fmla="val 8259"/>
             </a:avLst>
           </a:prstGeom>
           <a:solidFill>
@@ -18044,7 +18692,7 @@
         </p:nvSpPr>
         <p:spPr>
           <a:xfrm>
-            <a:off x="7799832" y="2935224"/>
+            <a:off x="7799832" y="2864815"/>
             <a:ext cx="3145536" cy="256032"/>
           </a:xfrm>
           <a:prstGeom prst="rect">
@@ -18083,8 +18731,8 @@
         </p:nvSpPr>
         <p:spPr>
           <a:xfrm>
-            <a:off x="7818120" y="3300984"/>
-            <a:ext cx="3090672" cy="877824"/>
+            <a:off x="7818120" y="3230575"/>
+            <a:ext cx="3090672" cy="670255"/>
           </a:xfrm>
           <a:prstGeom prst="rect">
             <a:avLst/>
@@ -18158,12 +18806,12 @@
         </p:nvSpPr>
         <p:spPr>
           <a:xfrm>
-            <a:off x="7635240" y="4498848"/>
-            <a:ext cx="3474720" cy="1143000"/>
+            <a:off x="7635240" y="4184294"/>
+            <a:ext cx="3474720" cy="1466698"/>
           </a:xfrm>
           <a:prstGeom prst="roundRect">
             <a:avLst>
-              <a:gd name="adj" fmla="val 9600"/>
+              <a:gd name="adj" fmla="val 7481"/>
             </a:avLst>
           </a:prstGeom>
           <a:solidFill>
@@ -18185,7 +18833,7 @@
         </p:nvSpPr>
         <p:spPr>
           <a:xfrm>
-            <a:off x="7799832" y="4645152"/>
+            <a:off x="7799832" y="4330598"/>
             <a:ext cx="3145536" cy="256032"/>
           </a:xfrm>
           <a:prstGeom prst="rect">
@@ -18224,8 +18872,8 @@
         </p:nvSpPr>
         <p:spPr>
           <a:xfrm>
-            <a:off x="7799832" y="4974336"/>
-            <a:ext cx="3145536" cy="576072"/>
+            <a:off x="7799832" y="4659782"/>
+            <a:ext cx="3145536" cy="899770"/>
           </a:xfrm>
           <a:prstGeom prst="rect">
             <a:avLst/>
@@ -18251,7 +18899,7 @@
                 <a:ea typeface="Aptos" pitchFamily="34" charset="-122"/>
                 <a:cs typeface="Aptos" pitchFamily="34" charset="-120"/>
               </a:rPr>
-              <a:t>Connect the concept to public health purpose, responsible use, required safeguards, documentation, and the next action a.</a:t>
+              <a:t>Connect the concept to public health purpose, responsible use, required safeguards, documentation, and the next action a department should take.</a:t>
             </a:r>
             <a:endParaRPr lang="en-US" sz="1320" dirty="0"/>
           </a:p>

--- a/downloads/presentations/modules/epi-300.pptx
+++ b/downloads/presentations/modules/epi-300.pptx
@@ -3437,8 +3437,8 @@
         </p:nvSpPr>
         <p:spPr>
           <a:xfrm>
-            <a:off x="868680" y="1508760"/>
-            <a:ext cx="6309360" cy="4160520"/>
+            <a:off x="822960" y="1463040"/>
+            <a:ext cx="6565392" cy="4343400"/>
           </a:xfrm>
           <a:prstGeom prst="rect">
             <a:avLst/>
@@ -3456,7 +3456,7 @@
               <a:buNone/>
             </a:pPr>
             <a:r>
-              <a:rPr lang="en-US" sz="2100" dirty="0">
+              <a:rPr lang="en-US" sz="1920" dirty="0">
                 <a:solidFill>
                   <a:srgbClr val="003A63"/>
                 </a:solidFill>
@@ -3466,14 +3466,14 @@
               </a:rPr>
               <a:t>• Equity considerations should be explicit.</a:t>
             </a:r>
-            <a:endParaRPr lang="en-US" sz="2100" dirty="0"/>
-          </a:p>
-          <a:p>
-            <a:pPr indent="0" marL="0">
-              <a:buNone/>
-            </a:pPr>
-            <a:r>
-              <a:rPr lang="en-US" sz="2100" dirty="0">
+            <a:endParaRPr lang="en-US" sz="1920" dirty="0"/>
+          </a:p>
+          <a:p>
+            <a:pPr indent="0" marL="0">
+              <a:buNone/>
+            </a:pPr>
+            <a:r>
+              <a:rPr lang="en-US" sz="1920" dirty="0">
                 <a:solidFill>
                   <a:srgbClr val="003A63"/>
                 </a:solidFill>
@@ -3481,16 +3481,16 @@
                 <a:ea typeface="Aptos" pitchFamily="34" charset="-122"/>
                 <a:cs typeface="Aptos" pitchFamily="34" charset="-120"/>
               </a:rPr>
-              <a:t>• Some communities may be less likely to seek care, be tested, respond to interviews, speak.</a:t>
-            </a:r>
-            <a:endParaRPr lang="en-US" sz="2100" dirty="0"/>
-          </a:p>
-          <a:p>
-            <a:pPr indent="0" marL="0">
-              <a:buNone/>
-            </a:pPr>
-            <a:r>
-              <a:rPr lang="en-US" sz="2100" dirty="0">
+              <a:t>• Some communities may be less likely to seek care, be tested, respond to.</a:t>
+            </a:r>
+            <a:endParaRPr lang="en-US" sz="1920" dirty="0"/>
+          </a:p>
+          <a:p>
+            <a:pPr indent="0" marL="0">
+              <a:buNone/>
+            </a:pPr>
+            <a:r>
+              <a:rPr lang="en-US" sz="1920" dirty="0">
                 <a:solidFill>
                   <a:srgbClr val="003A63"/>
                 </a:solidFill>
@@ -3498,9 +3498,9 @@
                 <a:ea typeface="Aptos" pitchFamily="34" charset="-122"/>
                 <a:cs typeface="Aptos" pitchFamily="34" charset="-120"/>
               </a:rPr>
-              <a:t>• AI-supported prioritization must not systematically deprioritize people or communities because.</a:t>
-            </a:r>
-            <a:endParaRPr lang="en-US" sz="2100" dirty="0"/>
+              <a:t>• AI-supported prioritization must not systematically deprioritize people or.</a:t>
+            </a:r>
+            <a:endParaRPr lang="en-US" sz="1920" dirty="0"/>
           </a:p>
         </p:txBody>
       </p:sp>
@@ -3512,12 +3512,12 @@
         </p:nvSpPr>
         <p:spPr>
           <a:xfrm>
-            <a:off x="7635240" y="1325880"/>
-            <a:ext cx="3474720" cy="1207008"/>
+            <a:off x="7543800" y="1325880"/>
+            <a:ext cx="3611880" cy="1261872"/>
           </a:xfrm>
           <a:prstGeom prst="roundRect">
             <a:avLst>
-              <a:gd name="adj" fmla="val 9091"/>
+              <a:gd name="adj" fmla="val 8696"/>
             </a:avLst>
           </a:prstGeom>
           <a:solidFill>
@@ -3539,8 +3539,8 @@
         </p:nvSpPr>
         <p:spPr>
           <a:xfrm>
-            <a:off x="7799832" y="1472184"/>
-            <a:ext cx="3145536" cy="256032"/>
+            <a:off x="7708392" y="1453896"/>
+            <a:ext cx="3282696" cy="228600"/>
           </a:xfrm>
           <a:prstGeom prst="rect">
             <a:avLst/>
@@ -3556,7 +3556,7 @@
               <a:buNone/>
             </a:pPr>
             <a:r>
-              <a:rPr lang="en-US" sz="1300" b="1" dirty="0">
+              <a:rPr lang="en-US" sz="1220" b="1" dirty="0">
                 <a:solidFill>
                   <a:srgbClr val="0068B7"/>
                 </a:solidFill>
@@ -3566,7 +3566,7 @@
               </a:rPr>
               <a:t>Core concept</a:t>
             </a:r>
-            <a:endParaRPr lang="en-US" sz="1300" dirty="0"/>
+            <a:endParaRPr lang="en-US" sz="1220" dirty="0"/>
           </a:p>
         </p:txBody>
       </p:sp>
@@ -3578,8 +3578,8 @@
         </p:nvSpPr>
         <p:spPr>
           <a:xfrm>
-            <a:off x="7799832" y="1801368"/>
-            <a:ext cx="3145536" cy="640080"/>
+            <a:off x="7708392" y="1764792"/>
+            <a:ext cx="3282696" cy="749808"/>
           </a:xfrm>
           <a:prstGeom prst="rect">
             <a:avLst/>
@@ -3597,7 +3597,7 @@
               <a:buNone/>
             </a:pPr>
             <a:r>
-              <a:rPr lang="en-US" sz="1320" dirty="0">
+              <a:rPr lang="en-US" sz="1220" dirty="0">
                 <a:solidFill>
                   <a:srgbClr val="17364A"/>
                 </a:solidFill>
@@ -3607,7 +3607,7 @@
               </a:rPr>
               <a:t>Equity considerations should be explicit.</a:t>
             </a:r>
-            <a:endParaRPr lang="en-US" sz="1320" dirty="0"/>
+            <a:endParaRPr lang="en-US" sz="1220" dirty="0"/>
           </a:p>
         </p:txBody>
       </p:sp>
@@ -3619,12 +3619,12 @@
         </p:nvSpPr>
         <p:spPr>
           <a:xfrm>
-            <a:off x="7635240" y="2670048"/>
-            <a:ext cx="3474720" cy="1377086"/>
+            <a:off x="7543800" y="2724912"/>
+            <a:ext cx="3611880" cy="1527048"/>
           </a:xfrm>
           <a:prstGeom prst="roundRect">
             <a:avLst>
-              <a:gd name="adj" fmla="val 7968"/>
+              <a:gd name="adj" fmla="val 7186"/>
             </a:avLst>
           </a:prstGeom>
           <a:solidFill>
@@ -3646,8 +3646,8 @@
         </p:nvSpPr>
         <p:spPr>
           <a:xfrm>
-            <a:off x="7799832" y="2816352"/>
-            <a:ext cx="3145536" cy="256032"/>
+            <a:off x="7708392" y="2852928"/>
+            <a:ext cx="3282696" cy="228600"/>
           </a:xfrm>
           <a:prstGeom prst="rect">
             <a:avLst/>
@@ -3663,7 +3663,7 @@
               <a:buNone/>
             </a:pPr>
             <a:r>
-              <a:rPr lang="en-US" sz="1300" b="1" dirty="0">
+              <a:rPr lang="en-US" sz="1220" b="1" dirty="0">
                 <a:solidFill>
                   <a:srgbClr val="0068B7"/>
                 </a:solidFill>
@@ -3673,7 +3673,7 @@
               </a:rPr>
               <a:t>Concept checkpoints</a:t>
             </a:r>
-            <a:endParaRPr lang="en-US" sz="1300" dirty="0"/>
+            <a:endParaRPr lang="en-US" sz="1220" dirty="0"/>
           </a:p>
         </p:txBody>
       </p:sp>
@@ -3685,8 +3685,8 @@
         </p:nvSpPr>
         <p:spPr>
           <a:xfrm>
-            <a:off x="7818120" y="3182112"/>
-            <a:ext cx="3090672" cy="718718"/>
+            <a:off x="7726680" y="3182112"/>
+            <a:ext cx="3227832" cy="960120"/>
           </a:xfrm>
           <a:prstGeom prst="rect">
             <a:avLst/>
@@ -3704,7 +3704,7 @@
               <a:buNone/>
             </a:pPr>
             <a:r>
-              <a:rPr lang="en-US" sz="1220" dirty="0">
+              <a:rPr lang="en-US" sz="1140" dirty="0">
                 <a:solidFill>
                   <a:srgbClr val="17364A"/>
                 </a:solidFill>
@@ -3712,16 +3712,16 @@
                 <a:ea typeface="Aptos" pitchFamily="34" charset="-122"/>
                 <a:cs typeface="Aptos" pitchFamily="34" charset="-120"/>
               </a:rPr>
-              <a:t>Some communities may be less likely to seek care, be tested,.</a:t>
-            </a:r>
-            <a:endParaRPr lang="en-US" sz="1220" dirty="0"/>
-          </a:p>
-          <a:p>
-            <a:pPr indent="0" marL="0">
-              <a:buNone/>
-            </a:pPr>
-            <a:r>
-              <a:rPr lang="en-US" sz="1220" dirty="0">
+              <a:t>Some communities may be less likely to seek care,.</a:t>
+            </a:r>
+            <a:endParaRPr lang="en-US" sz="1140" dirty="0"/>
+          </a:p>
+          <a:p>
+            <a:pPr indent="0" marL="0">
+              <a:buNone/>
+            </a:pPr>
+            <a:r>
+              <a:rPr lang="en-US" sz="1140" dirty="0">
                 <a:solidFill>
                   <a:srgbClr val="17364A"/>
                 </a:solidFill>
@@ -3729,9 +3729,9 @@
                 <a:ea typeface="Aptos" pitchFamily="34" charset="-122"/>
                 <a:cs typeface="Aptos" pitchFamily="34" charset="-120"/>
               </a:rPr>
-              <a:t>AI-supported prioritization must not systematically deprioritize.</a:t>
-            </a:r>
-            <a:endParaRPr lang="en-US" sz="1220" dirty="0"/>
+              <a:t>AI-supported prioritization must not.</a:t>
+            </a:r>
+            <a:endParaRPr lang="en-US" sz="1140" dirty="0"/>
           </a:p>
         </p:txBody>
       </p:sp>
@@ -3743,12 +3743,12 @@
         </p:nvSpPr>
         <p:spPr>
           <a:xfrm>
-            <a:off x="7635240" y="4184294"/>
-            <a:ext cx="3474720" cy="1466698"/>
+            <a:off x="7543800" y="4389120"/>
+            <a:ext cx="3611880" cy="1261872"/>
           </a:xfrm>
           <a:prstGeom prst="roundRect">
             <a:avLst>
-              <a:gd name="adj" fmla="val 7481"/>
+              <a:gd name="adj" fmla="val 8696"/>
             </a:avLst>
           </a:prstGeom>
           <a:solidFill>
@@ -3770,8 +3770,8 @@
         </p:nvSpPr>
         <p:spPr>
           <a:xfrm>
-            <a:off x="7799832" y="4330598"/>
-            <a:ext cx="3145536" cy="256032"/>
+            <a:off x="7708392" y="4517136"/>
+            <a:ext cx="3282696" cy="228600"/>
           </a:xfrm>
           <a:prstGeom prst="rect">
             <a:avLst/>
@@ -3787,7 +3787,7 @@
               <a:buNone/>
             </a:pPr>
             <a:r>
-              <a:rPr lang="en-US" sz="1300" b="1" dirty="0">
+              <a:rPr lang="en-US" sz="1220" b="1" dirty="0">
                 <a:solidFill>
                   <a:srgbClr val="0068B7"/>
                 </a:solidFill>
@@ -3797,7 +3797,7 @@
               </a:rPr>
               <a:t>Apply it</a:t>
             </a:r>
-            <a:endParaRPr lang="en-US" sz="1300" dirty="0"/>
+            <a:endParaRPr lang="en-US" sz="1220" dirty="0"/>
           </a:p>
         </p:txBody>
       </p:sp>
@@ -3809,8 +3809,8 @@
         </p:nvSpPr>
         <p:spPr>
           <a:xfrm>
-            <a:off x="7799832" y="4659782"/>
-            <a:ext cx="3145536" cy="899770"/>
+            <a:off x="7708392" y="4828032"/>
+            <a:ext cx="3282696" cy="749808"/>
           </a:xfrm>
           <a:prstGeom prst="rect">
             <a:avLst/>
@@ -3828,7 +3828,7 @@
               <a:buNone/>
             </a:pPr>
             <a:r>
-              <a:rPr lang="en-US" sz="1320" dirty="0">
+              <a:rPr lang="en-US" sz="1220" dirty="0">
                 <a:solidFill>
                   <a:srgbClr val="17364A"/>
                 </a:solidFill>
@@ -3836,9 +3836,9 @@
                 <a:ea typeface="Aptos" pitchFamily="34" charset="-122"/>
                 <a:cs typeface="Aptos" pitchFamily="34" charset="-120"/>
               </a:rPr>
-              <a:t>Connect the concept to public health purpose, responsible use, required safeguards, documentation, and the next action a department should take.</a:t>
-            </a:r>
-            <a:endParaRPr lang="en-US" sz="1320" dirty="0"/>
+              <a:t>Connect the concept to public health purpose, responsible use, required.</a:t>
+            </a:r>
+            <a:endParaRPr lang="en-US" sz="1220" dirty="0"/>
           </a:p>
         </p:txBody>
       </p:sp>
@@ -4129,8 +4129,8 @@
         </p:nvSpPr>
         <p:spPr>
           <a:xfrm>
-            <a:off x="868680" y="1508760"/>
-            <a:ext cx="6309360" cy="4160520"/>
+            <a:off x="822960" y="1463040"/>
+            <a:ext cx="6565392" cy="4343400"/>
           </a:xfrm>
           <a:prstGeom prst="rect">
             <a:avLst/>
@@ -4148,7 +4148,7 @@
               <a:buNone/>
             </a:pPr>
             <a:r>
-              <a:rPr lang="en-US" sz="2100" dirty="0">
+              <a:rPr lang="en-US" sz="1920" dirty="0">
                 <a:solidFill>
                   <a:srgbClr val="003A63"/>
                 </a:solidFill>
@@ -4158,14 +4158,14 @@
               </a:rPr>
               <a:t>• Risks and failure modes include the following:</a:t>
             </a:r>
-            <a:endParaRPr lang="en-US" sz="2100" dirty="0"/>
-          </a:p>
-          <a:p>
-            <a:pPr indent="0" marL="0">
-              <a:buNone/>
-            </a:pPr>
-            <a:r>
-              <a:rPr lang="en-US" sz="2100" dirty="0">
+            <a:endParaRPr lang="en-US" sz="1920" dirty="0"/>
+          </a:p>
+          <a:p>
+            <a:pPr indent="0" marL="0">
+              <a:buNone/>
+            </a:pPr>
+            <a:r>
+              <a:rPr lang="en-US" sz="1920" dirty="0">
                 <a:solidFill>
                   <a:srgbClr val="003A63"/>
                 </a:solidFill>
@@ -4175,14 +4175,14 @@
               </a:rPr>
               <a:t>• AI summaries omitting uncertainty or unsupported details.</a:t>
             </a:r>
-            <a:endParaRPr lang="en-US" sz="2100" dirty="0"/>
-          </a:p>
-          <a:p>
-            <a:pPr indent="0" marL="0">
-              <a:buNone/>
-            </a:pPr>
-            <a:r>
-              <a:rPr lang="en-US" sz="2100" dirty="0">
+            <a:endParaRPr lang="en-US" sz="1920" dirty="0"/>
+          </a:p>
+          <a:p>
+            <a:pPr indent="0" marL="0">
+              <a:buNone/>
+            </a:pPr>
+            <a:r>
+              <a:rPr lang="en-US" sz="1920" dirty="0">
                 <a:solidFill>
                   <a:srgbClr val="003A63"/>
                 </a:solidFill>
@@ -4192,7 +4192,7 @@
               </a:rPr>
               <a:t>• False outbreak signals creating unnecessary response or public concern.</a:t>
             </a:r>
-            <a:endParaRPr lang="en-US" sz="2100" dirty="0"/>
+            <a:endParaRPr lang="en-US" sz="1920" dirty="0"/>
           </a:p>
         </p:txBody>
       </p:sp>
@@ -4204,12 +4204,12 @@
         </p:nvSpPr>
         <p:spPr>
           <a:xfrm>
-            <a:off x="7635240" y="1325880"/>
-            <a:ext cx="3474720" cy="1207008"/>
+            <a:off x="7543800" y="1325880"/>
+            <a:ext cx="3611880" cy="1261872"/>
           </a:xfrm>
           <a:prstGeom prst="roundRect">
             <a:avLst>
-              <a:gd name="adj" fmla="val 9091"/>
+              <a:gd name="adj" fmla="val 8696"/>
             </a:avLst>
           </a:prstGeom>
           <a:solidFill>
@@ -4231,8 +4231,8 @@
         </p:nvSpPr>
         <p:spPr>
           <a:xfrm>
-            <a:off x="7799832" y="1472184"/>
-            <a:ext cx="3145536" cy="256032"/>
+            <a:off x="7708392" y="1453896"/>
+            <a:ext cx="3282696" cy="228600"/>
           </a:xfrm>
           <a:prstGeom prst="rect">
             <a:avLst/>
@@ -4248,7 +4248,7 @@
               <a:buNone/>
             </a:pPr>
             <a:r>
-              <a:rPr lang="en-US" sz="1300" b="1" dirty="0">
+              <a:rPr lang="en-US" sz="1220" b="1" dirty="0">
                 <a:solidFill>
                   <a:srgbClr val="0068B7"/>
                 </a:solidFill>
@@ -4258,7 +4258,7 @@
               </a:rPr>
               <a:t>Risk check</a:t>
             </a:r>
-            <a:endParaRPr lang="en-US" sz="1300" dirty="0"/>
+            <a:endParaRPr lang="en-US" sz="1220" dirty="0"/>
           </a:p>
         </p:txBody>
       </p:sp>
@@ -4270,8 +4270,8 @@
         </p:nvSpPr>
         <p:spPr>
           <a:xfrm>
-            <a:off x="7799832" y="1801368"/>
-            <a:ext cx="3145536" cy="640080"/>
+            <a:off x="7708392" y="1764792"/>
+            <a:ext cx="3282696" cy="749808"/>
           </a:xfrm>
           <a:prstGeom prst="rect">
             <a:avLst/>
@@ -4289,7 +4289,7 @@
               <a:buNone/>
             </a:pPr>
             <a:r>
-              <a:rPr lang="en-US" sz="1320" dirty="0">
+              <a:rPr lang="en-US" sz="1220" dirty="0">
                 <a:solidFill>
                   <a:srgbClr val="17364A"/>
                 </a:solidFill>
@@ -4299,7 +4299,7 @@
               </a:rPr>
               <a:t>Risks and failure modes include the following:</a:t>
             </a:r>
-            <a:endParaRPr lang="en-US" sz="1320" dirty="0"/>
+            <a:endParaRPr lang="en-US" sz="1220" dirty="0"/>
           </a:p>
         </p:txBody>
       </p:sp>
@@ -4311,12 +4311,12 @@
         </p:nvSpPr>
         <p:spPr>
           <a:xfrm>
-            <a:off x="7635240" y="2670048"/>
-            <a:ext cx="3474720" cy="1536192"/>
+            <a:off x="7543800" y="2724912"/>
+            <a:ext cx="3611880" cy="1527048"/>
           </a:xfrm>
           <a:prstGeom prst="roundRect">
             <a:avLst>
-              <a:gd name="adj" fmla="val 7143"/>
+              <a:gd name="adj" fmla="val 7186"/>
             </a:avLst>
           </a:prstGeom>
           <a:solidFill>
@@ -4338,24 +4338,26 @@
         </p:nvSpPr>
         <p:spPr>
           <a:xfrm>
-            <a:off x="7799832" y="2798064"/>
-            <a:ext cx="3145536" cy="237744"/>
-          </a:xfrm>
-          <a:prstGeom prst="rect">
-            <a:avLst/>
-          </a:prstGeom>
-          <a:noFill/>
-          <a:ln/>
-        </p:spPr>
-        <p:txBody>
-          <a:bodyPr wrap="square" lIns="0" tIns="0" rIns="0" bIns="0" rtlCol="0" anchor="ctr"/>
-          <a:lstStyle/>
-          <a:p>
-            <a:pPr indent="0" marL="0">
-              <a:buNone/>
-            </a:pPr>
-            <a:r>
-              <a:rPr lang="en-US" sz="1250" b="1" dirty="0">
+            <a:off x="7708392" y="2852928"/>
+            <a:ext cx="3282696" cy="219456"/>
+          </a:xfrm>
+          <a:prstGeom prst="rect">
+            <a:avLst/>
+          </a:prstGeom>
+          <a:noFill/>
+          <a:ln/>
+        </p:spPr>
+        <p:txBody>
+          <a:bodyPr wrap="square" lIns="0" tIns="0" rIns="0" bIns="0" rtlCol="0" anchor="ctr">
+            <a:normAutofit/>
+          </a:bodyPr>
+          <a:lstStyle/>
+          <a:p>
+            <a:pPr indent="0" marL="0">
+              <a:buNone/>
+            </a:pPr>
+            <a:r>
+              <a:rPr lang="en-US" sz="1160" b="1" dirty="0">
                 <a:solidFill>
                   <a:srgbClr val="0068B7"/>
                 </a:solidFill>
@@ -4365,7 +4367,7 @@
               </a:rPr>
               <a:t>Risk control loop</a:t>
             </a:r>
-            <a:endParaRPr lang="en-US" sz="1250" dirty="0"/>
+            <a:endParaRPr lang="en-US" sz="1160" dirty="0"/>
           </a:p>
         </p:txBody>
       </p:sp>
@@ -4377,7 +4379,7 @@
         </p:nvSpPr>
         <p:spPr>
           <a:xfrm>
-            <a:off x="8763000" y="3351276"/>
+            <a:off x="8717280" y="3406140"/>
             <a:ext cx="164592" cy="0"/>
           </a:xfrm>
           <a:prstGeom prst="line">
@@ -4400,8 +4402,8 @@
         </p:nvSpPr>
         <p:spPr>
           <a:xfrm>
-            <a:off x="7872984" y="3200400"/>
-            <a:ext cx="890016" cy="301752"/>
+            <a:off x="7781544" y="3255264"/>
+            <a:ext cx="935736" cy="301752"/>
           </a:xfrm>
           <a:prstGeom prst="roundRect">
             <a:avLst>
@@ -4427,8 +4429,8 @@
         </p:nvSpPr>
         <p:spPr>
           <a:xfrm>
-            <a:off x="7909560" y="3273552"/>
-            <a:ext cx="816864" cy="146304"/>
+            <a:off x="7818120" y="3328416"/>
+            <a:ext cx="862584" cy="146304"/>
           </a:xfrm>
           <a:prstGeom prst="rect">
             <a:avLst/>
@@ -4468,7 +4470,7 @@
         </p:nvSpPr>
         <p:spPr>
           <a:xfrm>
-            <a:off x="9817608" y="3351276"/>
+            <a:off x="9817608" y="3406140"/>
             <a:ext cx="164592" cy="0"/>
           </a:xfrm>
           <a:prstGeom prst="line">
@@ -4491,8 +4493,8 @@
         </p:nvSpPr>
         <p:spPr>
           <a:xfrm>
-            <a:off x="8927592" y="3200400"/>
-            <a:ext cx="890016" cy="301752"/>
+            <a:off x="8881872" y="3255264"/>
+            <a:ext cx="935736" cy="301752"/>
           </a:xfrm>
           <a:prstGeom prst="roundRect">
             <a:avLst>
@@ -4518,8 +4520,8 @@
         </p:nvSpPr>
         <p:spPr>
           <a:xfrm>
-            <a:off x="8964168" y="3273552"/>
-            <a:ext cx="816864" cy="146304"/>
+            <a:off x="8918448" y="3328416"/>
+            <a:ext cx="862584" cy="146304"/>
           </a:xfrm>
           <a:prstGeom prst="rect">
             <a:avLst/>
@@ -4559,8 +4561,8 @@
         </p:nvSpPr>
         <p:spPr>
           <a:xfrm>
-            <a:off x="9982200" y="3200400"/>
-            <a:ext cx="890016" cy="301752"/>
+            <a:off x="9982200" y="3255264"/>
+            <a:ext cx="935736" cy="301752"/>
           </a:xfrm>
           <a:prstGeom prst="roundRect">
             <a:avLst>
@@ -4586,8 +4588,8 @@
         </p:nvSpPr>
         <p:spPr>
           <a:xfrm>
-            <a:off x="10018776" y="3273552"/>
-            <a:ext cx="816864" cy="146304"/>
+            <a:off x="10018776" y="3328416"/>
+            <a:ext cx="862584" cy="146304"/>
           </a:xfrm>
           <a:prstGeom prst="rect">
             <a:avLst/>
@@ -4627,8 +4629,8 @@
         </p:nvSpPr>
         <p:spPr>
           <a:xfrm>
-            <a:off x="7854696" y="3694176"/>
-            <a:ext cx="3035808" cy="365760"/>
+            <a:off x="7763256" y="3749040"/>
+            <a:ext cx="3172968" cy="356616"/>
           </a:xfrm>
           <a:prstGeom prst="rect">
             <a:avLst/>
@@ -4646,7 +4648,7 @@
               <a:buNone/>
             </a:pPr>
             <a:r>
-              <a:rPr lang="en-US" sz="1120" dirty="0">
+              <a:rPr lang="en-US" sz="1040" dirty="0">
                 <a:solidFill>
                   <a:srgbClr val="17364A"/>
                 </a:solidFill>
@@ -4654,9 +4656,9 @@
                 <a:ea typeface="Aptos" pitchFamily="34" charset="-122"/>
                 <a:cs typeface="Aptos" pitchFamily="34" charset="-120"/>
               </a:rPr>
-              <a:t>Responsible use depends on finding risks early, applying safeguards, and watching for drift or harm over time.</a:t>
-            </a:r>
-            <a:endParaRPr lang="en-US" sz="1120" dirty="0"/>
+              <a:t>Responsible use depends on finding risks early, applying safeguards,.</a:t>
+            </a:r>
+            <a:endParaRPr lang="en-US" sz="1040" dirty="0"/>
           </a:p>
         </p:txBody>
       </p:sp>
@@ -4668,12 +4670,12 @@
         </p:nvSpPr>
         <p:spPr>
           <a:xfrm>
-            <a:off x="7635240" y="4343400"/>
-            <a:ext cx="3474720" cy="1255471"/>
+            <a:off x="7543800" y="4389120"/>
+            <a:ext cx="3611880" cy="1261872"/>
           </a:xfrm>
           <a:prstGeom prst="roundRect">
             <a:avLst>
-              <a:gd name="adj" fmla="val 8740"/>
+              <a:gd name="adj" fmla="val 8696"/>
             </a:avLst>
           </a:prstGeom>
           <a:solidFill>
@@ -4695,8 +4697,8 @@
         </p:nvSpPr>
         <p:spPr>
           <a:xfrm>
-            <a:off x="7799832" y="4489704"/>
-            <a:ext cx="3145536" cy="256032"/>
+            <a:off x="7708392" y="4517136"/>
+            <a:ext cx="3282696" cy="228600"/>
           </a:xfrm>
           <a:prstGeom prst="rect">
             <a:avLst/>
@@ -4712,7 +4714,7 @@
               <a:buNone/>
             </a:pPr>
             <a:r>
-              <a:rPr lang="en-US" sz="1300" b="1" dirty="0">
+              <a:rPr lang="en-US" sz="1220" b="1" dirty="0">
                 <a:solidFill>
                   <a:srgbClr val="0068B7"/>
                 </a:solidFill>
@@ -4722,7 +4724,7 @@
               </a:rPr>
               <a:t>Safeguard to plan</a:t>
             </a:r>
-            <a:endParaRPr lang="en-US" sz="1300" dirty="0"/>
+            <a:endParaRPr lang="en-US" sz="1220" dirty="0"/>
           </a:p>
         </p:txBody>
       </p:sp>
@@ -4734,8 +4736,8 @@
         </p:nvSpPr>
         <p:spPr>
           <a:xfrm>
-            <a:off x="7799832" y="4818888"/>
-            <a:ext cx="3145536" cy="688543"/>
+            <a:off x="7708392" y="4828032"/>
+            <a:ext cx="3282696" cy="749808"/>
           </a:xfrm>
           <a:prstGeom prst="rect">
             <a:avLst/>
@@ -4753,7 +4755,7 @@
               <a:buNone/>
             </a:pPr>
             <a:r>
-              <a:rPr lang="en-US" sz="1320" dirty="0">
+              <a:rPr lang="en-US" sz="1220" dirty="0">
                 <a:solidFill>
                   <a:srgbClr val="17364A"/>
                 </a:solidFill>
@@ -4761,9 +4763,9 @@
                 <a:ea typeface="Aptos" pitchFamily="34" charset="-122"/>
                 <a:cs typeface="Aptos" pitchFamily="34" charset="-120"/>
               </a:rPr>
-              <a:t>Identify what could go wrong, who could be affected, what safeguards are needed, and what evidence should be reviewed before use.</a:t>
-            </a:r>
-            <a:endParaRPr lang="en-US" sz="1320" dirty="0"/>
+              <a:t>Identify what could go wrong, who could be affected, what safeguards are needed,.</a:t>
+            </a:r>
+            <a:endParaRPr lang="en-US" sz="1220" dirty="0"/>
           </a:p>
         </p:txBody>
       </p:sp>
@@ -5054,8 +5056,8 @@
         </p:nvSpPr>
         <p:spPr>
           <a:xfrm>
-            <a:off x="868680" y="1508760"/>
-            <a:ext cx="6309360" cy="4160520"/>
+            <a:off x="822960" y="1463040"/>
+            <a:ext cx="6565392" cy="4343400"/>
           </a:xfrm>
           <a:prstGeom prst="rect">
             <a:avLst/>
@@ -5073,7 +5075,7 @@
               <a:buNone/>
             </a:pPr>
             <a:r>
-              <a:rPr lang="en-US" sz="2100" dirty="0">
+              <a:rPr lang="en-US" sz="1920" dirty="0">
                 <a:solidFill>
                   <a:srgbClr val="003A63"/>
                 </a:solidFill>
@@ -5083,14 +5085,14 @@
               </a:rPr>
               <a:t>• Missed signals because some communities are underrepresented in data.</a:t>
             </a:r>
-            <a:endParaRPr lang="en-US" sz="2100" dirty="0"/>
-          </a:p>
-          <a:p>
-            <a:pPr indent="0" marL="0">
-              <a:buNone/>
-            </a:pPr>
-            <a:r>
-              <a:rPr lang="en-US" sz="2100" dirty="0">
+            <a:endParaRPr lang="en-US" sz="1920" dirty="0"/>
+          </a:p>
+          <a:p>
+            <a:pPr indent="0" marL="0">
+              <a:buNone/>
+            </a:pPr>
+            <a:r>
+              <a:rPr lang="en-US" sz="1920" dirty="0">
                 <a:solidFill>
                   <a:srgbClr val="003A63"/>
                 </a:solidFill>
@@ -5100,14 +5102,14 @@
               </a:rPr>
               <a:t>• Automated prioritization replacing epidemiologic judgment.</a:t>
             </a:r>
-            <a:endParaRPr lang="en-US" sz="2100" dirty="0"/>
-          </a:p>
-          <a:p>
-            <a:pPr indent="0" marL="0">
-              <a:buNone/>
-            </a:pPr>
-            <a:r>
-              <a:rPr lang="en-US" sz="2100" dirty="0">
+            <a:endParaRPr lang="en-US" sz="1920" dirty="0"/>
+          </a:p>
+          <a:p>
+            <a:pPr indent="0" marL="0">
+              <a:buNone/>
+            </a:pPr>
+            <a:r>
+              <a:rPr lang="en-US" sz="1920" dirty="0">
                 <a:solidFill>
                   <a:srgbClr val="003A63"/>
                 </a:solidFill>
@@ -5117,7 +5119,7 @@
               </a:rPr>
               <a:t>• Sensitive investigation information being used in unapproved tools.</a:t>
             </a:r>
-            <a:endParaRPr lang="en-US" sz="2100" dirty="0"/>
+            <a:endParaRPr lang="en-US" sz="1920" dirty="0"/>
           </a:p>
         </p:txBody>
       </p:sp>
@@ -5129,12 +5131,12 @@
         </p:nvSpPr>
         <p:spPr>
           <a:xfrm>
-            <a:off x="7635240" y="1325880"/>
-            <a:ext cx="3474720" cy="1207008"/>
+            <a:off x="7543800" y="1325880"/>
+            <a:ext cx="3611880" cy="1261872"/>
           </a:xfrm>
           <a:prstGeom prst="roundRect">
             <a:avLst>
-              <a:gd name="adj" fmla="val 9091"/>
+              <a:gd name="adj" fmla="val 8696"/>
             </a:avLst>
           </a:prstGeom>
           <a:solidFill>
@@ -5156,8 +5158,8 @@
         </p:nvSpPr>
         <p:spPr>
           <a:xfrm>
-            <a:off x="7799832" y="1472184"/>
-            <a:ext cx="3145536" cy="256032"/>
+            <a:off x="7708392" y="1453896"/>
+            <a:ext cx="3282696" cy="228600"/>
           </a:xfrm>
           <a:prstGeom prst="rect">
             <a:avLst/>
@@ -5173,7 +5175,7 @@
               <a:buNone/>
             </a:pPr>
             <a:r>
-              <a:rPr lang="en-US" sz="1300" b="1" dirty="0">
+              <a:rPr lang="en-US" sz="1220" b="1" dirty="0">
                 <a:solidFill>
                   <a:srgbClr val="0068B7"/>
                 </a:solidFill>
@@ -5183,7 +5185,7 @@
               </a:rPr>
               <a:t>Risk check</a:t>
             </a:r>
-            <a:endParaRPr lang="en-US" sz="1300" dirty="0"/>
+            <a:endParaRPr lang="en-US" sz="1220" dirty="0"/>
           </a:p>
         </p:txBody>
       </p:sp>
@@ -5195,8 +5197,8 @@
         </p:nvSpPr>
         <p:spPr>
           <a:xfrm>
-            <a:off x="7799832" y="1801368"/>
-            <a:ext cx="3145536" cy="640080"/>
+            <a:off x="7708392" y="1764792"/>
+            <a:ext cx="3282696" cy="749808"/>
           </a:xfrm>
           <a:prstGeom prst="rect">
             <a:avLst/>
@@ -5214,7 +5216,7 @@
               <a:buNone/>
             </a:pPr>
             <a:r>
-              <a:rPr lang="en-US" sz="1320" dirty="0">
+              <a:rPr lang="en-US" sz="1220" dirty="0">
                 <a:solidFill>
                   <a:srgbClr val="17364A"/>
                 </a:solidFill>
@@ -5224,7 +5226,7 @@
               </a:rPr>
               <a:t>Missed signals because some communities are underrepresented in data.</a:t>
             </a:r>
-            <a:endParaRPr lang="en-US" sz="1320" dirty="0"/>
+            <a:endParaRPr lang="en-US" sz="1220" dirty="0"/>
           </a:p>
         </p:txBody>
       </p:sp>
@@ -5236,12 +5238,12 @@
         </p:nvSpPr>
         <p:spPr>
           <a:xfrm>
-            <a:off x="7635240" y="2670048"/>
-            <a:ext cx="3474720" cy="1536192"/>
+            <a:off x="7543800" y="2724912"/>
+            <a:ext cx="3611880" cy="1527048"/>
           </a:xfrm>
           <a:prstGeom prst="roundRect">
             <a:avLst>
-              <a:gd name="adj" fmla="val 7143"/>
+              <a:gd name="adj" fmla="val 7186"/>
             </a:avLst>
           </a:prstGeom>
           <a:solidFill>
@@ -5263,24 +5265,26 @@
         </p:nvSpPr>
         <p:spPr>
           <a:xfrm>
-            <a:off x="7799832" y="2798064"/>
-            <a:ext cx="3145536" cy="237744"/>
-          </a:xfrm>
-          <a:prstGeom prst="rect">
-            <a:avLst/>
-          </a:prstGeom>
-          <a:noFill/>
-          <a:ln/>
-        </p:spPr>
-        <p:txBody>
-          <a:bodyPr wrap="square" lIns="0" tIns="0" rIns="0" bIns="0" rtlCol="0" anchor="ctr"/>
-          <a:lstStyle/>
-          <a:p>
-            <a:pPr indent="0" marL="0">
-              <a:buNone/>
-            </a:pPr>
-            <a:r>
-              <a:rPr lang="en-US" sz="1250" b="1" dirty="0">
+            <a:off x="7708392" y="2852928"/>
+            <a:ext cx="3282696" cy="219456"/>
+          </a:xfrm>
+          <a:prstGeom prst="rect">
+            <a:avLst/>
+          </a:prstGeom>
+          <a:noFill/>
+          <a:ln/>
+        </p:spPr>
+        <p:txBody>
+          <a:bodyPr wrap="square" lIns="0" tIns="0" rIns="0" bIns="0" rtlCol="0" anchor="ctr">
+            <a:normAutofit/>
+          </a:bodyPr>
+          <a:lstStyle/>
+          <a:p>
+            <a:pPr indent="0" marL="0">
+              <a:buNone/>
+            </a:pPr>
+            <a:r>
+              <a:rPr lang="en-US" sz="1160" b="1" dirty="0">
                 <a:solidFill>
                   <a:srgbClr val="0068B7"/>
                 </a:solidFill>
@@ -5290,7 +5294,7 @@
               </a:rPr>
               <a:t>Risk control loop</a:t>
             </a:r>
-            <a:endParaRPr lang="en-US" sz="1250" dirty="0"/>
+            <a:endParaRPr lang="en-US" sz="1160" dirty="0"/>
           </a:p>
         </p:txBody>
       </p:sp>
@@ -5302,7 +5306,7 @@
         </p:nvSpPr>
         <p:spPr>
           <a:xfrm>
-            <a:off x="8763000" y="3351276"/>
+            <a:off x="8717280" y="3406140"/>
             <a:ext cx="164592" cy="0"/>
           </a:xfrm>
           <a:prstGeom prst="line">
@@ -5325,8 +5329,8 @@
         </p:nvSpPr>
         <p:spPr>
           <a:xfrm>
-            <a:off x="7872984" y="3200400"/>
-            <a:ext cx="890016" cy="301752"/>
+            <a:off x="7781544" y="3255264"/>
+            <a:ext cx="935736" cy="301752"/>
           </a:xfrm>
           <a:prstGeom prst="roundRect">
             <a:avLst>
@@ -5352,8 +5356,8 @@
         </p:nvSpPr>
         <p:spPr>
           <a:xfrm>
-            <a:off x="7909560" y="3273552"/>
-            <a:ext cx="816864" cy="146304"/>
+            <a:off x="7818120" y="3328416"/>
+            <a:ext cx="862584" cy="146304"/>
           </a:xfrm>
           <a:prstGeom prst="rect">
             <a:avLst/>
@@ -5393,7 +5397,7 @@
         </p:nvSpPr>
         <p:spPr>
           <a:xfrm>
-            <a:off x="9817608" y="3351276"/>
+            <a:off x="9817608" y="3406140"/>
             <a:ext cx="164592" cy="0"/>
           </a:xfrm>
           <a:prstGeom prst="line">
@@ -5416,8 +5420,8 @@
         </p:nvSpPr>
         <p:spPr>
           <a:xfrm>
-            <a:off x="8927592" y="3200400"/>
-            <a:ext cx="890016" cy="301752"/>
+            <a:off x="8881872" y="3255264"/>
+            <a:ext cx="935736" cy="301752"/>
           </a:xfrm>
           <a:prstGeom prst="roundRect">
             <a:avLst>
@@ -5443,8 +5447,8 @@
         </p:nvSpPr>
         <p:spPr>
           <a:xfrm>
-            <a:off x="8964168" y="3273552"/>
-            <a:ext cx="816864" cy="146304"/>
+            <a:off x="8918448" y="3328416"/>
+            <a:ext cx="862584" cy="146304"/>
           </a:xfrm>
           <a:prstGeom prst="rect">
             <a:avLst/>
@@ -5484,8 +5488,8 @@
         </p:nvSpPr>
         <p:spPr>
           <a:xfrm>
-            <a:off x="9982200" y="3200400"/>
-            <a:ext cx="890016" cy="301752"/>
+            <a:off x="9982200" y="3255264"/>
+            <a:ext cx="935736" cy="301752"/>
           </a:xfrm>
           <a:prstGeom prst="roundRect">
             <a:avLst>
@@ -5511,8 +5515,8 @@
         </p:nvSpPr>
         <p:spPr>
           <a:xfrm>
-            <a:off x="10018776" y="3273552"/>
-            <a:ext cx="816864" cy="146304"/>
+            <a:off x="10018776" y="3328416"/>
+            <a:ext cx="862584" cy="146304"/>
           </a:xfrm>
           <a:prstGeom prst="rect">
             <a:avLst/>
@@ -5552,8 +5556,8 @@
         </p:nvSpPr>
         <p:spPr>
           <a:xfrm>
-            <a:off x="7854696" y="3694176"/>
-            <a:ext cx="3035808" cy="365760"/>
+            <a:off x="7763256" y="3749040"/>
+            <a:ext cx="3172968" cy="356616"/>
           </a:xfrm>
           <a:prstGeom prst="rect">
             <a:avLst/>
@@ -5571,7 +5575,7 @@
               <a:buNone/>
             </a:pPr>
             <a:r>
-              <a:rPr lang="en-US" sz="1120" dirty="0">
+              <a:rPr lang="en-US" sz="1040" dirty="0">
                 <a:solidFill>
                   <a:srgbClr val="17364A"/>
                 </a:solidFill>
@@ -5579,9 +5583,9 @@
                 <a:ea typeface="Aptos" pitchFamily="34" charset="-122"/>
                 <a:cs typeface="Aptos" pitchFamily="34" charset="-120"/>
               </a:rPr>
-              <a:t>Responsible use depends on finding risks early, applying safeguards, and watching for drift or harm over time.</a:t>
-            </a:r>
-            <a:endParaRPr lang="en-US" sz="1120" dirty="0"/>
+              <a:t>Responsible use depends on finding risks early, applying safeguards,.</a:t>
+            </a:r>
+            <a:endParaRPr lang="en-US" sz="1040" dirty="0"/>
           </a:p>
         </p:txBody>
       </p:sp>
@@ -5593,12 +5597,12 @@
         </p:nvSpPr>
         <p:spPr>
           <a:xfrm>
-            <a:off x="7635240" y="4343400"/>
-            <a:ext cx="3474720" cy="1255471"/>
+            <a:off x="7543800" y="4389120"/>
+            <a:ext cx="3611880" cy="1261872"/>
           </a:xfrm>
           <a:prstGeom prst="roundRect">
             <a:avLst>
-              <a:gd name="adj" fmla="val 8740"/>
+              <a:gd name="adj" fmla="val 8696"/>
             </a:avLst>
           </a:prstGeom>
           <a:solidFill>
@@ -5620,8 +5624,8 @@
         </p:nvSpPr>
         <p:spPr>
           <a:xfrm>
-            <a:off x="7799832" y="4489704"/>
-            <a:ext cx="3145536" cy="256032"/>
+            <a:off x="7708392" y="4517136"/>
+            <a:ext cx="3282696" cy="228600"/>
           </a:xfrm>
           <a:prstGeom prst="rect">
             <a:avLst/>
@@ -5637,7 +5641,7 @@
               <a:buNone/>
             </a:pPr>
             <a:r>
-              <a:rPr lang="en-US" sz="1300" b="1" dirty="0">
+              <a:rPr lang="en-US" sz="1220" b="1" dirty="0">
                 <a:solidFill>
                   <a:srgbClr val="0068B7"/>
                 </a:solidFill>
@@ -5647,7 +5651,7 @@
               </a:rPr>
               <a:t>Safeguard to plan</a:t>
             </a:r>
-            <a:endParaRPr lang="en-US" sz="1300" dirty="0"/>
+            <a:endParaRPr lang="en-US" sz="1220" dirty="0"/>
           </a:p>
         </p:txBody>
       </p:sp>
@@ -5659,8 +5663,8 @@
         </p:nvSpPr>
         <p:spPr>
           <a:xfrm>
-            <a:off x="7799832" y="4818888"/>
-            <a:ext cx="3145536" cy="688543"/>
+            <a:off x="7708392" y="4828032"/>
+            <a:ext cx="3282696" cy="749808"/>
           </a:xfrm>
           <a:prstGeom prst="rect">
             <a:avLst/>
@@ -5678,7 +5682,7 @@
               <a:buNone/>
             </a:pPr>
             <a:r>
-              <a:rPr lang="en-US" sz="1320" dirty="0">
+              <a:rPr lang="en-US" sz="1220" dirty="0">
                 <a:solidFill>
                   <a:srgbClr val="17364A"/>
                 </a:solidFill>
@@ -5686,9 +5690,9 @@
                 <a:ea typeface="Aptos" pitchFamily="34" charset="-122"/>
                 <a:cs typeface="Aptos" pitchFamily="34" charset="-120"/>
               </a:rPr>
-              <a:t>Identify what could go wrong, who could be affected, what safeguards are needed, and what evidence should be reviewed before use.</a:t>
-            </a:r>
-            <a:endParaRPr lang="en-US" sz="1320" dirty="0"/>
+              <a:t>Identify what could go wrong, who could be affected, what safeguards are needed,.</a:t>
+            </a:r>
+            <a:endParaRPr lang="en-US" sz="1220" dirty="0"/>
           </a:p>
         </p:txBody>
       </p:sp>
@@ -5979,8 +5983,8 @@
         </p:nvSpPr>
         <p:spPr>
           <a:xfrm>
-            <a:off x="868680" y="1508760"/>
-            <a:ext cx="6309360" cy="4160520"/>
+            <a:off x="822960" y="1463040"/>
+            <a:ext cx="6565392" cy="4343400"/>
           </a:xfrm>
           <a:prstGeom prst="rect">
             <a:avLst/>
@@ -5998,7 +6002,7 @@
               <a:buNone/>
             </a:pPr>
             <a:r>
-              <a:rPr lang="en-US" sz="2100" dirty="0">
+              <a:rPr lang="en-US" sz="1920" dirty="0">
                 <a:solidFill>
                   <a:srgbClr val="003A63"/>
                 </a:solidFill>
@@ -6008,14 +6012,14 @@
               </a:rPr>
               <a:t>• Recommended guardrails include the following:</a:t>
             </a:r>
-            <a:endParaRPr lang="en-US" sz="2100" dirty="0"/>
-          </a:p>
-          <a:p>
-            <a:pPr indent="0" marL="0">
-              <a:buNone/>
-            </a:pPr>
-            <a:r>
-              <a:rPr lang="en-US" sz="2100" dirty="0">
+            <a:endParaRPr lang="en-US" sz="1920" dirty="0"/>
+          </a:p>
+          <a:p>
+            <a:pPr indent="0" marL="0">
+              <a:buNone/>
+            </a:pPr>
+            <a:r>
+              <a:rPr lang="en-US" sz="1920" dirty="0">
                 <a:solidFill>
                   <a:srgbClr val="003A63"/>
                 </a:solidFill>
@@ -6025,14 +6029,14 @@
               </a:rPr>
               <a:t>• Require source traceability for summaries and extracted information.</a:t>
             </a:r>
-            <a:endParaRPr lang="en-US" sz="2100" dirty="0"/>
-          </a:p>
-          <a:p>
-            <a:pPr indent="0" marL="0">
-              <a:buNone/>
-            </a:pPr>
-            <a:r>
-              <a:rPr lang="en-US" sz="2100" dirty="0">
+            <a:endParaRPr lang="en-US" sz="1920" dirty="0"/>
+          </a:p>
+          <a:p>
+            <a:pPr indent="0" marL="0">
+              <a:buNone/>
+            </a:pPr>
+            <a:r>
+              <a:rPr lang="en-US" sz="1920" dirty="0">
                 <a:solidFill>
                   <a:srgbClr val="003A63"/>
                 </a:solidFill>
@@ -6042,7 +6046,7 @@
               </a:rPr>
               <a:t>• Use AI outputs as prompts for review, not automatic conclusions.</a:t>
             </a:r>
-            <a:endParaRPr lang="en-US" sz="2100" dirty="0"/>
+            <a:endParaRPr lang="en-US" sz="1920" dirty="0"/>
           </a:p>
         </p:txBody>
       </p:sp>
@@ -6054,12 +6058,12 @@
         </p:nvSpPr>
         <p:spPr>
           <a:xfrm>
-            <a:off x="7635240" y="1325880"/>
-            <a:ext cx="3474720" cy="1207008"/>
+            <a:off x="7543800" y="1325880"/>
+            <a:ext cx="3611880" cy="1261872"/>
           </a:xfrm>
           <a:prstGeom prst="roundRect">
             <a:avLst>
-              <a:gd name="adj" fmla="val 9091"/>
+              <a:gd name="adj" fmla="val 8696"/>
             </a:avLst>
           </a:prstGeom>
           <a:solidFill>
@@ -6081,8 +6085,8 @@
         </p:nvSpPr>
         <p:spPr>
           <a:xfrm>
-            <a:off x="7799832" y="1472184"/>
-            <a:ext cx="3145536" cy="256032"/>
+            <a:off x="7708392" y="1453896"/>
+            <a:ext cx="3282696" cy="228600"/>
           </a:xfrm>
           <a:prstGeom prst="rect">
             <a:avLst/>
@@ -6098,7 +6102,7 @@
               <a:buNone/>
             </a:pPr>
             <a:r>
-              <a:rPr lang="en-US" sz="1300" b="1" dirty="0">
+              <a:rPr lang="en-US" sz="1220" b="1" dirty="0">
                 <a:solidFill>
                   <a:srgbClr val="0068B7"/>
                 </a:solidFill>
@@ -6108,7 +6112,7 @@
               </a:rPr>
               <a:t>Risk check</a:t>
             </a:r>
-            <a:endParaRPr lang="en-US" sz="1300" dirty="0"/>
+            <a:endParaRPr lang="en-US" sz="1220" dirty="0"/>
           </a:p>
         </p:txBody>
       </p:sp>
@@ -6120,8 +6124,8 @@
         </p:nvSpPr>
         <p:spPr>
           <a:xfrm>
-            <a:off x="7799832" y="1801368"/>
-            <a:ext cx="3145536" cy="640080"/>
+            <a:off x="7708392" y="1764792"/>
+            <a:ext cx="3282696" cy="749808"/>
           </a:xfrm>
           <a:prstGeom prst="rect">
             <a:avLst/>
@@ -6139,7 +6143,7 @@
               <a:buNone/>
             </a:pPr>
             <a:r>
-              <a:rPr lang="en-US" sz="1320" dirty="0">
+              <a:rPr lang="en-US" sz="1220" dirty="0">
                 <a:solidFill>
                   <a:srgbClr val="17364A"/>
                 </a:solidFill>
@@ -6149,7 +6153,7 @@
               </a:rPr>
               <a:t>Recommended guardrails include the following:</a:t>
             </a:r>
-            <a:endParaRPr lang="en-US" sz="1320" dirty="0"/>
+            <a:endParaRPr lang="en-US" sz="1220" dirty="0"/>
           </a:p>
         </p:txBody>
       </p:sp>
@@ -6161,12 +6165,12 @@
         </p:nvSpPr>
         <p:spPr>
           <a:xfrm>
-            <a:off x="7635240" y="2670048"/>
-            <a:ext cx="3474720" cy="1536192"/>
+            <a:off x="7543800" y="2724912"/>
+            <a:ext cx="3611880" cy="1527048"/>
           </a:xfrm>
           <a:prstGeom prst="roundRect">
             <a:avLst>
-              <a:gd name="adj" fmla="val 7143"/>
+              <a:gd name="adj" fmla="val 7186"/>
             </a:avLst>
           </a:prstGeom>
           <a:solidFill>
@@ -6188,8 +6192,8 @@
         </p:nvSpPr>
         <p:spPr>
           <a:xfrm>
-            <a:off x="7799832" y="2816352"/>
-            <a:ext cx="3145536" cy="256032"/>
+            <a:off x="7708392" y="2852928"/>
+            <a:ext cx="3282696" cy="228600"/>
           </a:xfrm>
           <a:prstGeom prst="rect">
             <a:avLst/>
@@ -6205,7 +6209,7 @@
               <a:buNone/>
             </a:pPr>
             <a:r>
-              <a:rPr lang="en-US" sz="1300" b="1" dirty="0">
+              <a:rPr lang="en-US" sz="1220" b="1" dirty="0">
                 <a:solidFill>
                   <a:srgbClr val="0068B7"/>
                 </a:solidFill>
@@ -6215,7 +6219,7 @@
               </a:rPr>
               <a:t>Concept checkpoints</a:t>
             </a:r>
-            <a:endParaRPr lang="en-US" sz="1300" dirty="0"/>
+            <a:endParaRPr lang="en-US" sz="1220" dirty="0"/>
           </a:p>
         </p:txBody>
       </p:sp>
@@ -6227,8 +6231,8 @@
         </p:nvSpPr>
         <p:spPr>
           <a:xfrm>
-            <a:off x="7818120" y="3182112"/>
-            <a:ext cx="3090672" cy="877824"/>
+            <a:off x="7726680" y="3182112"/>
+            <a:ext cx="3227832" cy="960120"/>
           </a:xfrm>
           <a:prstGeom prst="rect">
             <a:avLst/>
@@ -6246,7 +6250,7 @@
               <a:buNone/>
             </a:pPr>
             <a:r>
-              <a:rPr lang="en-US" sz="1220" dirty="0">
+              <a:rPr lang="en-US" sz="1140" dirty="0">
                 <a:solidFill>
                   <a:srgbClr val="17364A"/>
                 </a:solidFill>
@@ -6256,14 +6260,14 @@
               </a:rPr>
               <a:t>Recommended guardrails include the following:</a:t>
             </a:r>
-            <a:endParaRPr lang="en-US" sz="1220" dirty="0"/>
-          </a:p>
-          <a:p>
-            <a:pPr indent="0" marL="0">
-              <a:buNone/>
-            </a:pPr>
-            <a:r>
-              <a:rPr lang="en-US" sz="1220" dirty="0">
+            <a:endParaRPr lang="en-US" sz="1140" dirty="0"/>
+          </a:p>
+          <a:p>
+            <a:pPr indent="0" marL="0">
+              <a:buNone/>
+            </a:pPr>
+            <a:r>
+              <a:rPr lang="en-US" sz="1140" dirty="0">
                 <a:solidFill>
                   <a:srgbClr val="17364A"/>
                 </a:solidFill>
@@ -6271,16 +6275,16 @@
                 <a:ea typeface="Aptos" pitchFamily="34" charset="-122"/>
                 <a:cs typeface="Aptos" pitchFamily="34" charset="-120"/>
               </a:rPr>
-              <a:t>Require source traceability for summaries and extracted information.</a:t>
-            </a:r>
-            <a:endParaRPr lang="en-US" sz="1220" dirty="0"/>
-          </a:p>
-          <a:p>
-            <a:pPr indent="0" marL="0">
-              <a:buNone/>
-            </a:pPr>
-            <a:r>
-              <a:rPr lang="en-US" sz="1220" dirty="0">
+              <a:t>Require source traceability for summaries and.</a:t>
+            </a:r>
+            <a:endParaRPr lang="en-US" sz="1140" dirty="0"/>
+          </a:p>
+          <a:p>
+            <a:pPr indent="0" marL="0">
+              <a:buNone/>
+            </a:pPr>
+            <a:r>
+              <a:rPr lang="en-US" sz="1140" dirty="0">
                 <a:solidFill>
                   <a:srgbClr val="17364A"/>
                 </a:solidFill>
@@ -6288,9 +6292,9 @@
                 <a:ea typeface="Aptos" pitchFamily="34" charset="-122"/>
                 <a:cs typeface="Aptos" pitchFamily="34" charset="-120"/>
               </a:rPr>
-              <a:t>Use AI outputs as prompts for review, not automatic conclusions.</a:t>
-            </a:r>
-            <a:endParaRPr lang="en-US" sz="1220" dirty="0"/>
+              <a:t>Use AI outputs as prompts for review, not.</a:t>
+            </a:r>
+            <a:endParaRPr lang="en-US" sz="1140" dirty="0"/>
           </a:p>
         </p:txBody>
       </p:sp>
@@ -6302,12 +6306,12 @@
         </p:nvSpPr>
         <p:spPr>
           <a:xfrm>
-            <a:off x="7635240" y="4343400"/>
-            <a:ext cx="3474720" cy="1255471"/>
+            <a:off x="7543800" y="4389120"/>
+            <a:ext cx="3611880" cy="1261872"/>
           </a:xfrm>
           <a:prstGeom prst="roundRect">
             <a:avLst>
-              <a:gd name="adj" fmla="val 8740"/>
+              <a:gd name="adj" fmla="val 8696"/>
             </a:avLst>
           </a:prstGeom>
           <a:solidFill>
@@ -6329,8 +6333,8 @@
         </p:nvSpPr>
         <p:spPr>
           <a:xfrm>
-            <a:off x="7799832" y="4489704"/>
-            <a:ext cx="3145536" cy="256032"/>
+            <a:off x="7708392" y="4517136"/>
+            <a:ext cx="3282696" cy="228600"/>
           </a:xfrm>
           <a:prstGeom prst="rect">
             <a:avLst/>
@@ -6346,7 +6350,7 @@
               <a:buNone/>
             </a:pPr>
             <a:r>
-              <a:rPr lang="en-US" sz="1300" b="1" dirty="0">
+              <a:rPr lang="en-US" sz="1220" b="1" dirty="0">
                 <a:solidFill>
                   <a:srgbClr val="0068B7"/>
                 </a:solidFill>
@@ -6356,7 +6360,7 @@
               </a:rPr>
               <a:t>Safeguard to plan</a:t>
             </a:r>
-            <a:endParaRPr lang="en-US" sz="1300" dirty="0"/>
+            <a:endParaRPr lang="en-US" sz="1220" dirty="0"/>
           </a:p>
         </p:txBody>
       </p:sp>
@@ -6368,8 +6372,8 @@
         </p:nvSpPr>
         <p:spPr>
           <a:xfrm>
-            <a:off x="7799832" y="4818888"/>
-            <a:ext cx="3145536" cy="688543"/>
+            <a:off x="7708392" y="4828032"/>
+            <a:ext cx="3282696" cy="749808"/>
           </a:xfrm>
           <a:prstGeom prst="rect">
             <a:avLst/>
@@ -6387,7 +6391,7 @@
               <a:buNone/>
             </a:pPr>
             <a:r>
-              <a:rPr lang="en-US" sz="1320" dirty="0">
+              <a:rPr lang="en-US" sz="1220" dirty="0">
                 <a:solidFill>
                   <a:srgbClr val="17364A"/>
                 </a:solidFill>
@@ -6395,9 +6399,9 @@
                 <a:ea typeface="Aptos" pitchFamily="34" charset="-122"/>
                 <a:cs typeface="Aptos" pitchFamily="34" charset="-120"/>
               </a:rPr>
-              <a:t>Identify what could go wrong, who could be affected, what safeguards are needed, and what evidence should be reviewed before use.</a:t>
-            </a:r>
-            <a:endParaRPr lang="en-US" sz="1320" dirty="0"/>
+              <a:t>Identify what could go wrong, who could be affected, what safeguards are needed,.</a:t>
+            </a:r>
+            <a:endParaRPr lang="en-US" sz="1220" dirty="0"/>
           </a:p>
         </p:txBody>
       </p:sp>
@@ -6688,8 +6692,8 @@
         </p:nvSpPr>
         <p:spPr>
           <a:xfrm>
-            <a:off x="868680" y="1508760"/>
-            <a:ext cx="6309360" cy="4160520"/>
+            <a:off x="822960" y="1463040"/>
+            <a:ext cx="6565392" cy="4343400"/>
           </a:xfrm>
           <a:prstGeom prst="rect">
             <a:avLst/>
@@ -6707,7 +6711,7 @@
               <a:buNone/>
             </a:pPr>
             <a:r>
-              <a:rPr lang="en-US" sz="2100" dirty="0">
+              <a:rPr lang="en-US" sz="1920" dirty="0">
                 <a:solidFill>
                   <a:srgbClr val="003A63"/>
                 </a:solidFill>
@@ -6717,14 +6721,14 @@
               </a:rPr>
               <a:t>• Document uncertainty, missing data, and preliminary status.</a:t>
             </a:r>
-            <a:endParaRPr lang="en-US" sz="2100" dirty="0"/>
-          </a:p>
-          <a:p>
-            <a:pPr indent="0" marL="0">
-              <a:buNone/>
-            </a:pPr>
-            <a:r>
-              <a:rPr lang="en-US" sz="2100" dirty="0">
+            <a:endParaRPr lang="en-US" sz="1920" dirty="0"/>
+          </a:p>
+          <a:p>
+            <a:pPr indent="0" marL="0">
+              <a:buNone/>
+            </a:pPr>
+            <a:r>
+              <a:rPr lang="en-US" sz="1920" dirty="0">
                 <a:solidFill>
                   <a:srgbClr val="003A63"/>
                 </a:solidFill>
@@ -6734,14 +6738,14 @@
               </a:rPr>
               <a:t>• Apply equity review to prioritization and signal detection workflows.</a:t>
             </a:r>
-            <a:endParaRPr lang="en-US" sz="2100" dirty="0"/>
-          </a:p>
-          <a:p>
-            <a:pPr indent="0" marL="0">
-              <a:buNone/>
-            </a:pPr>
-            <a:r>
-              <a:rPr lang="en-US" sz="2100" dirty="0">
+            <a:endParaRPr lang="en-US" sz="1920" dirty="0"/>
+          </a:p>
+          <a:p>
+            <a:pPr indent="0" marL="0">
+              <a:buNone/>
+            </a:pPr>
+            <a:r>
+              <a:rPr lang="en-US" sz="1920" dirty="0">
                 <a:solidFill>
                   <a:srgbClr val="003A63"/>
                 </a:solidFill>
@@ -6749,9 +6753,9 @@
                 <a:ea typeface="Aptos" pitchFamily="34" charset="-122"/>
                 <a:cs typeface="Aptos" pitchFamily="34" charset="-120"/>
               </a:rPr>
-              <a:t>• Define escalation to epidemiology leadership for unusual, high-risk, or public-facing outputs.</a:t>
-            </a:r>
-            <a:endParaRPr lang="en-US" sz="2100" dirty="0"/>
+              <a:t>• Define escalation to epidemiology leadership for unusual, high-risk, or.</a:t>
+            </a:r>
+            <a:endParaRPr lang="en-US" sz="1920" dirty="0"/>
           </a:p>
         </p:txBody>
       </p:sp>
@@ -6763,12 +6767,12 @@
         </p:nvSpPr>
         <p:spPr>
           <a:xfrm>
-            <a:off x="7635240" y="1325880"/>
-            <a:ext cx="3474720" cy="1207008"/>
+            <a:off x="7543800" y="1325880"/>
+            <a:ext cx="3611880" cy="1261872"/>
           </a:xfrm>
           <a:prstGeom prst="roundRect">
             <a:avLst>
-              <a:gd name="adj" fmla="val 9091"/>
+              <a:gd name="adj" fmla="val 8696"/>
             </a:avLst>
           </a:prstGeom>
           <a:solidFill>
@@ -6790,8 +6794,8 @@
         </p:nvSpPr>
         <p:spPr>
           <a:xfrm>
-            <a:off x="7799832" y="1472184"/>
-            <a:ext cx="3145536" cy="256032"/>
+            <a:off x="7708392" y="1453896"/>
+            <a:ext cx="3282696" cy="228600"/>
           </a:xfrm>
           <a:prstGeom prst="rect">
             <a:avLst/>
@@ -6807,7 +6811,7 @@
               <a:buNone/>
             </a:pPr>
             <a:r>
-              <a:rPr lang="en-US" sz="1300" b="1" dirty="0">
+              <a:rPr lang="en-US" sz="1220" b="1" dirty="0">
                 <a:solidFill>
                   <a:srgbClr val="0068B7"/>
                 </a:solidFill>
@@ -6817,7 +6821,7 @@
               </a:rPr>
               <a:t>Risk check</a:t>
             </a:r>
-            <a:endParaRPr lang="en-US" sz="1300" dirty="0"/>
+            <a:endParaRPr lang="en-US" sz="1220" dirty="0"/>
           </a:p>
         </p:txBody>
       </p:sp>
@@ -6829,8 +6833,8 @@
         </p:nvSpPr>
         <p:spPr>
           <a:xfrm>
-            <a:off x="7799832" y="1801368"/>
-            <a:ext cx="3145536" cy="640080"/>
+            <a:off x="7708392" y="1764792"/>
+            <a:ext cx="3282696" cy="749808"/>
           </a:xfrm>
           <a:prstGeom prst="rect">
             <a:avLst/>
@@ -6848,7 +6852,7 @@
               <a:buNone/>
             </a:pPr>
             <a:r>
-              <a:rPr lang="en-US" sz="1320" dirty="0">
+              <a:rPr lang="en-US" sz="1220" dirty="0">
                 <a:solidFill>
                   <a:srgbClr val="17364A"/>
                 </a:solidFill>
@@ -6858,7 +6862,7 @@
               </a:rPr>
               <a:t>Document uncertainty, missing data, and preliminary status.</a:t>
             </a:r>
-            <a:endParaRPr lang="en-US" sz="1320" dirty="0"/>
+            <a:endParaRPr lang="en-US" sz="1220" dirty="0"/>
           </a:p>
         </p:txBody>
       </p:sp>
@@ -6870,12 +6874,12 @@
         </p:nvSpPr>
         <p:spPr>
           <a:xfrm>
-            <a:off x="7635240" y="2670048"/>
-            <a:ext cx="3474720" cy="1536192"/>
+            <a:off x="7543800" y="2724912"/>
+            <a:ext cx="3611880" cy="1527048"/>
           </a:xfrm>
           <a:prstGeom prst="roundRect">
             <a:avLst>
-              <a:gd name="adj" fmla="val 7143"/>
+              <a:gd name="adj" fmla="val 7186"/>
             </a:avLst>
           </a:prstGeom>
           <a:solidFill>
@@ -6897,8 +6901,8 @@
         </p:nvSpPr>
         <p:spPr>
           <a:xfrm>
-            <a:off x="7799832" y="2816352"/>
-            <a:ext cx="3145536" cy="256032"/>
+            <a:off x="7708392" y="2852928"/>
+            <a:ext cx="3282696" cy="228600"/>
           </a:xfrm>
           <a:prstGeom prst="rect">
             <a:avLst/>
@@ -6914,7 +6918,7 @@
               <a:buNone/>
             </a:pPr>
             <a:r>
-              <a:rPr lang="en-US" sz="1300" b="1" dirty="0">
+              <a:rPr lang="en-US" sz="1220" b="1" dirty="0">
                 <a:solidFill>
                   <a:srgbClr val="0068B7"/>
                 </a:solidFill>
@@ -6924,7 +6928,7 @@
               </a:rPr>
               <a:t>Concept checkpoints</a:t>
             </a:r>
-            <a:endParaRPr lang="en-US" sz="1300" dirty="0"/>
+            <a:endParaRPr lang="en-US" sz="1220" dirty="0"/>
           </a:p>
         </p:txBody>
       </p:sp>
@@ -6936,8 +6940,8 @@
         </p:nvSpPr>
         <p:spPr>
           <a:xfrm>
-            <a:off x="7818120" y="3182112"/>
-            <a:ext cx="3090672" cy="877824"/>
+            <a:off x="7726680" y="3182112"/>
+            <a:ext cx="3227832" cy="960120"/>
           </a:xfrm>
           <a:prstGeom prst="rect">
             <a:avLst/>
@@ -6955,7 +6959,7 @@
               <a:buNone/>
             </a:pPr>
             <a:r>
-              <a:rPr lang="en-US" sz="1220" dirty="0">
+              <a:rPr lang="en-US" sz="1140" dirty="0">
                 <a:solidFill>
                   <a:srgbClr val="17364A"/>
                 </a:solidFill>
@@ -6963,16 +6967,16 @@
                 <a:ea typeface="Aptos" pitchFamily="34" charset="-122"/>
                 <a:cs typeface="Aptos" pitchFamily="34" charset="-120"/>
               </a:rPr>
-              <a:t>Document uncertainty, missing data, and preliminary status.</a:t>
-            </a:r>
-            <a:endParaRPr lang="en-US" sz="1220" dirty="0"/>
-          </a:p>
-          <a:p>
-            <a:pPr indent="0" marL="0">
-              <a:buNone/>
-            </a:pPr>
-            <a:r>
-              <a:rPr lang="en-US" sz="1220" dirty="0">
+              <a:t>Document uncertainty, missing data, and.</a:t>
+            </a:r>
+            <a:endParaRPr lang="en-US" sz="1140" dirty="0"/>
+          </a:p>
+          <a:p>
+            <a:pPr indent="0" marL="0">
+              <a:buNone/>
+            </a:pPr>
+            <a:r>
+              <a:rPr lang="en-US" sz="1140" dirty="0">
                 <a:solidFill>
                   <a:srgbClr val="17364A"/>
                 </a:solidFill>
@@ -6980,16 +6984,16 @@
                 <a:ea typeface="Aptos" pitchFamily="34" charset="-122"/>
                 <a:cs typeface="Aptos" pitchFamily="34" charset="-120"/>
               </a:rPr>
-              <a:t>Apply equity review to prioritization and signal detection.</a:t>
-            </a:r>
-            <a:endParaRPr lang="en-US" sz="1220" dirty="0"/>
-          </a:p>
-          <a:p>
-            <a:pPr indent="0" marL="0">
-              <a:buNone/>
-            </a:pPr>
-            <a:r>
-              <a:rPr lang="en-US" sz="1220" dirty="0">
+              <a:t>Apply equity review to prioritization and signal.</a:t>
+            </a:r>
+            <a:endParaRPr lang="en-US" sz="1140" dirty="0"/>
+          </a:p>
+          <a:p>
+            <a:pPr indent="0" marL="0">
+              <a:buNone/>
+            </a:pPr>
+            <a:r>
+              <a:rPr lang="en-US" sz="1140" dirty="0">
                 <a:solidFill>
                   <a:srgbClr val="17364A"/>
                 </a:solidFill>
@@ -6997,9 +7001,9 @@
                 <a:ea typeface="Aptos" pitchFamily="34" charset="-122"/>
                 <a:cs typeface="Aptos" pitchFamily="34" charset="-120"/>
               </a:rPr>
-              <a:t>Define escalation to epidemiology leadership for unusual,.</a:t>
-            </a:r>
-            <a:endParaRPr lang="en-US" sz="1220" dirty="0"/>
+              <a:t>Define escalation to epidemiology leadership for.</a:t>
+            </a:r>
+            <a:endParaRPr lang="en-US" sz="1140" dirty="0"/>
           </a:p>
         </p:txBody>
       </p:sp>
@@ -7011,12 +7015,12 @@
         </p:nvSpPr>
         <p:spPr>
           <a:xfrm>
-            <a:off x="7635240" y="4343400"/>
-            <a:ext cx="3474720" cy="1255471"/>
+            <a:off x="7543800" y="4389120"/>
+            <a:ext cx="3611880" cy="1261872"/>
           </a:xfrm>
           <a:prstGeom prst="roundRect">
             <a:avLst>
-              <a:gd name="adj" fmla="val 8740"/>
+              <a:gd name="adj" fmla="val 8696"/>
             </a:avLst>
           </a:prstGeom>
           <a:solidFill>
@@ -7038,8 +7042,8 @@
         </p:nvSpPr>
         <p:spPr>
           <a:xfrm>
-            <a:off x="7799832" y="4489704"/>
-            <a:ext cx="3145536" cy="256032"/>
+            <a:off x="7708392" y="4517136"/>
+            <a:ext cx="3282696" cy="228600"/>
           </a:xfrm>
           <a:prstGeom prst="rect">
             <a:avLst/>
@@ -7055,7 +7059,7 @@
               <a:buNone/>
             </a:pPr>
             <a:r>
-              <a:rPr lang="en-US" sz="1300" b="1" dirty="0">
+              <a:rPr lang="en-US" sz="1220" b="1" dirty="0">
                 <a:solidFill>
                   <a:srgbClr val="0068B7"/>
                 </a:solidFill>
@@ -7065,7 +7069,7 @@
               </a:rPr>
               <a:t>Safeguard to plan</a:t>
             </a:r>
-            <a:endParaRPr lang="en-US" sz="1300" dirty="0"/>
+            <a:endParaRPr lang="en-US" sz="1220" dirty="0"/>
           </a:p>
         </p:txBody>
       </p:sp>
@@ -7077,8 +7081,8 @@
         </p:nvSpPr>
         <p:spPr>
           <a:xfrm>
-            <a:off x="7799832" y="4818888"/>
-            <a:ext cx="3145536" cy="688543"/>
+            <a:off x="7708392" y="4828032"/>
+            <a:ext cx="3282696" cy="749808"/>
           </a:xfrm>
           <a:prstGeom prst="rect">
             <a:avLst/>
@@ -7096,7 +7100,7 @@
               <a:buNone/>
             </a:pPr>
             <a:r>
-              <a:rPr lang="en-US" sz="1320" dirty="0">
+              <a:rPr lang="en-US" sz="1220" dirty="0">
                 <a:solidFill>
                   <a:srgbClr val="17364A"/>
                 </a:solidFill>
@@ -7104,9 +7108,9 @@
                 <a:ea typeface="Aptos" pitchFamily="34" charset="-122"/>
                 <a:cs typeface="Aptos" pitchFamily="34" charset="-120"/>
               </a:rPr>
-              <a:t>Identify what could go wrong, who could be affected, what safeguards are needed, and what evidence should be reviewed before use.</a:t>
-            </a:r>
-            <a:endParaRPr lang="en-US" sz="1320" dirty="0"/>
+              <a:t>Identify what could go wrong, who could be affected, what safeguards are needed,.</a:t>
+            </a:r>
+            <a:endParaRPr lang="en-US" sz="1220" dirty="0"/>
           </a:p>
         </p:txBody>
       </p:sp>
@@ -7397,8 +7401,8 @@
         </p:nvSpPr>
         <p:spPr>
           <a:xfrm>
-            <a:off x="868680" y="1508760"/>
-            <a:ext cx="6309360" cy="4160520"/>
+            <a:off x="822960" y="1463040"/>
+            <a:ext cx="6565392" cy="4343400"/>
           </a:xfrm>
           <a:prstGeom prst="rect">
             <a:avLst/>
@@ -7416,7 +7420,7 @@
               <a:buNone/>
             </a:pPr>
             <a:r>
-              <a:rPr lang="en-US" sz="2100" dirty="0">
+              <a:rPr lang="en-US" sz="1920" dirty="0">
                 <a:solidFill>
                   <a:srgbClr val="003A63"/>
                 </a:solidFill>
@@ -7426,14 +7430,14 @@
               </a:rPr>
               <a:t>• Where does this topic appear in your agency, program, or workflow?</a:t>
             </a:r>
-            <a:endParaRPr lang="en-US" sz="2100" dirty="0"/>
-          </a:p>
-          <a:p>
-            <a:pPr indent="0" marL="0">
-              <a:buNone/>
-            </a:pPr>
-            <a:r>
-              <a:rPr lang="en-US" sz="2100" dirty="0">
+            <a:endParaRPr lang="en-US" sz="1920" dirty="0"/>
+          </a:p>
+          <a:p>
+            <a:pPr indent="0" marL="0">
+              <a:buNone/>
+            </a:pPr>
+            <a:r>
+              <a:rPr lang="en-US" sz="1920" dirty="0">
                 <a:solidFill>
                   <a:srgbClr val="003A63"/>
                 </a:solidFill>
@@ -7441,16 +7445,16 @@
                 <a:ea typeface="Aptos" pitchFamily="34" charset="-122"/>
                 <a:cs typeface="Aptos" pitchFamily="34" charset="-120"/>
               </a:rPr>
-              <a:t>• Which staff roles would need to understand or apply this concept before AI use is approved?</a:t>
-            </a:r>
-            <a:endParaRPr lang="en-US" sz="2100" dirty="0"/>
-          </a:p>
-          <a:p>
-            <a:pPr indent="0" marL="0">
-              <a:buNone/>
-            </a:pPr>
-            <a:r>
-              <a:rPr lang="en-US" sz="2100" dirty="0">
+              <a:t>• Which staff roles would need to understand or apply this concept before AI.</a:t>
+            </a:r>
+            <a:endParaRPr lang="en-US" sz="1920" dirty="0"/>
+          </a:p>
+          <a:p>
+            <a:pPr indent="0" marL="0">
+              <a:buNone/>
+            </a:pPr>
+            <a:r>
+              <a:rPr lang="en-US" sz="1920" dirty="0">
                 <a:solidFill>
                   <a:srgbClr val="003A63"/>
                 </a:solidFill>
@@ -7460,7 +7464,7 @@
               </a:rPr>
               <a:t>• What could go wrong if this topic is not addressed before implementation?</a:t>
             </a:r>
-            <a:endParaRPr lang="en-US" sz="2100" dirty="0"/>
+            <a:endParaRPr lang="en-US" sz="1920" dirty="0"/>
           </a:p>
         </p:txBody>
       </p:sp>
@@ -7472,12 +7476,12 @@
         </p:nvSpPr>
         <p:spPr>
           <a:xfrm>
-            <a:off x="7635240" y="1325880"/>
-            <a:ext cx="3474720" cy="1207008"/>
+            <a:off x="7543800" y="1325880"/>
+            <a:ext cx="3611880" cy="1261872"/>
           </a:xfrm>
           <a:prstGeom prst="roundRect">
             <a:avLst>
-              <a:gd name="adj" fmla="val 9091"/>
+              <a:gd name="adj" fmla="val 8696"/>
             </a:avLst>
           </a:prstGeom>
           <a:solidFill>
@@ -7499,8 +7503,8 @@
         </p:nvSpPr>
         <p:spPr>
           <a:xfrm>
-            <a:off x="7799832" y="1472184"/>
-            <a:ext cx="3145536" cy="256032"/>
+            <a:off x="7708392" y="1453896"/>
+            <a:ext cx="3282696" cy="228600"/>
           </a:xfrm>
           <a:prstGeom prst="rect">
             <a:avLst/>
@@ -7516,7 +7520,7 @@
               <a:buNone/>
             </a:pPr>
             <a:r>
-              <a:rPr lang="en-US" sz="1300" b="1" dirty="0">
+              <a:rPr lang="en-US" sz="1220" b="1" dirty="0">
                 <a:solidFill>
                   <a:srgbClr val="0068B7"/>
                 </a:solidFill>
@@ -7526,7 +7530,7 @@
               </a:rPr>
               <a:t>Core concept</a:t>
             </a:r>
-            <a:endParaRPr lang="en-US" sz="1300" dirty="0"/>
+            <a:endParaRPr lang="en-US" sz="1220" dirty="0"/>
           </a:p>
         </p:txBody>
       </p:sp>
@@ -7538,8 +7542,8 @@
         </p:nvSpPr>
         <p:spPr>
           <a:xfrm>
-            <a:off x="7799832" y="1801368"/>
-            <a:ext cx="3145536" cy="640080"/>
+            <a:off x="7708392" y="1764792"/>
+            <a:ext cx="3282696" cy="749808"/>
           </a:xfrm>
           <a:prstGeom prst="rect">
             <a:avLst/>
@@ -7557,7 +7561,7 @@
               <a:buNone/>
             </a:pPr>
             <a:r>
-              <a:rPr lang="en-US" sz="1320" dirty="0">
+              <a:rPr lang="en-US" sz="1220" dirty="0">
                 <a:solidFill>
                   <a:srgbClr val="17364A"/>
                 </a:solidFill>
@@ -7567,7 +7571,7 @@
               </a:rPr>
               <a:t>Where does this topic appear in your agency, program, or workflow?</a:t>
             </a:r>
-            <a:endParaRPr lang="en-US" sz="1320" dirty="0"/>
+            <a:endParaRPr lang="en-US" sz="1220" dirty="0"/>
           </a:p>
         </p:txBody>
       </p:sp>
@@ -7579,12 +7583,12 @@
         </p:nvSpPr>
         <p:spPr>
           <a:xfrm>
-            <a:off x="7635240" y="2670048"/>
-            <a:ext cx="3474720" cy="1377086"/>
+            <a:off x="7543800" y="2724912"/>
+            <a:ext cx="3611880" cy="1527048"/>
           </a:xfrm>
           <a:prstGeom prst="roundRect">
             <a:avLst>
-              <a:gd name="adj" fmla="val 7968"/>
+              <a:gd name="adj" fmla="val 7186"/>
             </a:avLst>
           </a:prstGeom>
           <a:solidFill>
@@ -7606,8 +7610,8 @@
         </p:nvSpPr>
         <p:spPr>
           <a:xfrm>
-            <a:off x="7799832" y="2816352"/>
-            <a:ext cx="3145536" cy="256032"/>
+            <a:off x="7708392" y="2852928"/>
+            <a:ext cx="3282696" cy="228600"/>
           </a:xfrm>
           <a:prstGeom prst="rect">
             <a:avLst/>
@@ -7623,7 +7627,7 @@
               <a:buNone/>
             </a:pPr>
             <a:r>
-              <a:rPr lang="en-US" sz="1300" b="1" dirty="0">
+              <a:rPr lang="en-US" sz="1220" b="1" dirty="0">
                 <a:solidFill>
                   <a:srgbClr val="0068B7"/>
                 </a:solidFill>
@@ -7633,7 +7637,7 @@
               </a:rPr>
               <a:t>Concept checkpoints</a:t>
             </a:r>
-            <a:endParaRPr lang="en-US" sz="1300" dirty="0"/>
+            <a:endParaRPr lang="en-US" sz="1220" dirty="0"/>
           </a:p>
         </p:txBody>
       </p:sp>
@@ -7645,8 +7649,8 @@
         </p:nvSpPr>
         <p:spPr>
           <a:xfrm>
-            <a:off x="7818120" y="3182112"/>
-            <a:ext cx="3090672" cy="718718"/>
+            <a:off x="7726680" y="3182112"/>
+            <a:ext cx="3227832" cy="960120"/>
           </a:xfrm>
           <a:prstGeom prst="rect">
             <a:avLst/>
@@ -7664,7 +7668,7 @@
               <a:buNone/>
             </a:pPr>
             <a:r>
-              <a:rPr lang="en-US" sz="1220" dirty="0">
+              <a:rPr lang="en-US" sz="1140" dirty="0">
                 <a:solidFill>
                   <a:srgbClr val="17364A"/>
                 </a:solidFill>
@@ -7672,16 +7676,16 @@
                 <a:ea typeface="Aptos" pitchFamily="34" charset="-122"/>
                 <a:cs typeface="Aptos" pitchFamily="34" charset="-120"/>
               </a:rPr>
-              <a:t>Where does this topic appear in your agency, program, or workflow?</a:t>
-            </a:r>
-            <a:endParaRPr lang="en-US" sz="1220" dirty="0"/>
-          </a:p>
-          <a:p>
-            <a:pPr indent="0" marL="0">
-              <a:buNone/>
-            </a:pPr>
-            <a:r>
-              <a:rPr lang="en-US" sz="1220" dirty="0">
+              <a:t>Where does this topic appear in your agency,.</a:t>
+            </a:r>
+            <a:endParaRPr lang="en-US" sz="1140" dirty="0"/>
+          </a:p>
+          <a:p>
+            <a:pPr indent="0" marL="0">
+              <a:buNone/>
+            </a:pPr>
+            <a:r>
+              <a:rPr lang="en-US" sz="1140" dirty="0">
                 <a:solidFill>
                   <a:srgbClr val="17364A"/>
                 </a:solidFill>
@@ -7689,16 +7693,16 @@
                 <a:ea typeface="Aptos" pitchFamily="34" charset="-122"/>
                 <a:cs typeface="Aptos" pitchFamily="34" charset="-120"/>
               </a:rPr>
-              <a:t>Which staff roles would need to understand or apply this concept.</a:t>
-            </a:r>
-            <a:endParaRPr lang="en-US" sz="1220" dirty="0"/>
-          </a:p>
-          <a:p>
-            <a:pPr indent="0" marL="0">
-              <a:buNone/>
-            </a:pPr>
-            <a:r>
-              <a:rPr lang="en-US" sz="1220" dirty="0">
+              <a:t>Which staff roles would need to understand or.</a:t>
+            </a:r>
+            <a:endParaRPr lang="en-US" sz="1140" dirty="0"/>
+          </a:p>
+          <a:p>
+            <a:pPr indent="0" marL="0">
+              <a:buNone/>
+            </a:pPr>
+            <a:r>
+              <a:rPr lang="en-US" sz="1140" dirty="0">
                 <a:solidFill>
                   <a:srgbClr val="17364A"/>
                 </a:solidFill>
@@ -7706,9 +7710,9 @@
                 <a:ea typeface="Aptos" pitchFamily="34" charset="-122"/>
                 <a:cs typeface="Aptos" pitchFamily="34" charset="-120"/>
               </a:rPr>
-              <a:t>What could go wrong if this topic is not addressed before.</a:t>
-            </a:r>
-            <a:endParaRPr lang="en-US" sz="1220" dirty="0"/>
+              <a:t>What could go wrong if this topic is not addressed.</a:t>
+            </a:r>
+            <a:endParaRPr lang="en-US" sz="1140" dirty="0"/>
           </a:p>
         </p:txBody>
       </p:sp>
@@ -7720,12 +7724,12 @@
         </p:nvSpPr>
         <p:spPr>
           <a:xfrm>
-            <a:off x="7635240" y="4184294"/>
-            <a:ext cx="3474720" cy="1466698"/>
+            <a:off x="7543800" y="4389120"/>
+            <a:ext cx="3611880" cy="1261872"/>
           </a:xfrm>
           <a:prstGeom prst="roundRect">
             <a:avLst>
-              <a:gd name="adj" fmla="val 7481"/>
+              <a:gd name="adj" fmla="val 8696"/>
             </a:avLst>
           </a:prstGeom>
           <a:solidFill>
@@ -7747,8 +7751,8 @@
         </p:nvSpPr>
         <p:spPr>
           <a:xfrm>
-            <a:off x="7799832" y="4330598"/>
-            <a:ext cx="3145536" cy="256032"/>
+            <a:off x="7708392" y="4517136"/>
+            <a:ext cx="3282696" cy="228600"/>
           </a:xfrm>
           <a:prstGeom prst="rect">
             <a:avLst/>
@@ -7764,7 +7768,7 @@
               <a:buNone/>
             </a:pPr>
             <a:r>
-              <a:rPr lang="en-US" sz="1300" b="1" dirty="0">
+              <a:rPr lang="en-US" sz="1220" b="1" dirty="0">
                 <a:solidFill>
                   <a:srgbClr val="0068B7"/>
                 </a:solidFill>
@@ -7774,7 +7778,7 @@
               </a:rPr>
               <a:t>Apply it</a:t>
             </a:r>
-            <a:endParaRPr lang="en-US" sz="1300" dirty="0"/>
+            <a:endParaRPr lang="en-US" sz="1220" dirty="0"/>
           </a:p>
         </p:txBody>
       </p:sp>
@@ -7786,8 +7790,8 @@
         </p:nvSpPr>
         <p:spPr>
           <a:xfrm>
-            <a:off x="7799832" y="4659782"/>
-            <a:ext cx="3145536" cy="899770"/>
+            <a:off x="7708392" y="4828032"/>
+            <a:ext cx="3282696" cy="749808"/>
           </a:xfrm>
           <a:prstGeom prst="rect">
             <a:avLst/>
@@ -7805,7 +7809,7 @@
               <a:buNone/>
             </a:pPr>
             <a:r>
-              <a:rPr lang="en-US" sz="1320" dirty="0">
+              <a:rPr lang="en-US" sz="1220" dirty="0">
                 <a:solidFill>
                   <a:srgbClr val="17364A"/>
                 </a:solidFill>
@@ -7813,9 +7817,9 @@
                 <a:ea typeface="Aptos" pitchFamily="34" charset="-122"/>
                 <a:cs typeface="Aptos" pitchFamily="34" charset="-120"/>
               </a:rPr>
-              <a:t>Connect the concept to public health purpose, responsible use, required safeguards, documentation, and the next action a department should take.</a:t>
-            </a:r>
-            <a:endParaRPr lang="en-US" sz="1320" dirty="0"/>
+              <a:t>Connect the concept to public health purpose, responsible use, required.</a:t>
+            </a:r>
+            <a:endParaRPr lang="en-US" sz="1220" dirty="0"/>
           </a:p>
         </p:txBody>
       </p:sp>
@@ -8106,8 +8110,8 @@
         </p:nvSpPr>
         <p:spPr>
           <a:xfrm>
-            <a:off x="868680" y="1508760"/>
-            <a:ext cx="6309360" cy="4160520"/>
+            <a:off x="822960" y="1463040"/>
+            <a:ext cx="6565392" cy="4343400"/>
           </a:xfrm>
           <a:prstGeom prst="rect">
             <a:avLst/>
@@ -8125,7 +8129,7 @@
               <a:buNone/>
             </a:pPr>
             <a:r>
-              <a:rPr lang="en-US" sz="2100" dirty="0">
+              <a:rPr lang="en-US" sz="1920" dirty="0">
                 <a:solidFill>
                   <a:srgbClr val="003A63"/>
                 </a:solidFill>
@@ -8133,16 +8137,16 @@
                 <a:ea typeface="Aptos" pitchFamily="34" charset="-122"/>
                 <a:cs typeface="Aptos" pitchFamily="34" charset="-120"/>
               </a:rPr>
-              <a:t>• What evidence would governance, leadership, or operations staff need before moving forward?</a:t>
-            </a:r>
-            <a:endParaRPr lang="en-US" sz="2100" dirty="0"/>
-          </a:p>
-          <a:p>
-            <a:pPr indent="0" marL="0">
-              <a:buNone/>
-            </a:pPr>
-            <a:r>
-              <a:rPr lang="en-US" sz="2100" dirty="0">
+              <a:t>• What evidence would governance, leadership, or operations staff need before.</a:t>
+            </a:r>
+            <a:endParaRPr lang="en-US" sz="1920" dirty="0"/>
+          </a:p>
+          <a:p>
+            <a:pPr indent="0" marL="0">
+              <a:buNone/>
+            </a:pPr>
+            <a:r>
+              <a:rPr lang="en-US" sz="1920" dirty="0">
                 <a:solidFill>
                   <a:srgbClr val="003A63"/>
                 </a:solidFill>
@@ -8150,9 +8154,9 @@
                 <a:ea typeface="Aptos" pitchFamily="34" charset="-122"/>
                 <a:cs typeface="Aptos" pitchFamily="34" charset="-120"/>
               </a:rPr>
-              <a:t>• Which policy, data, equity, privacy, security, or workflow questions remain unresolved?</a:t>
-            </a:r>
-            <a:endParaRPr lang="en-US" sz="2100" dirty="0"/>
+              <a:t>• Which policy, data, equity, privacy, security, or workflow questions remain.</a:t>
+            </a:r>
+            <a:endParaRPr lang="en-US" sz="1920" dirty="0"/>
           </a:p>
         </p:txBody>
       </p:sp>
@@ -8164,12 +8168,12 @@
         </p:nvSpPr>
         <p:spPr>
           <a:xfrm>
-            <a:off x="7635240" y="1325880"/>
-            <a:ext cx="3474720" cy="1207008"/>
+            <a:off x="7543800" y="1325880"/>
+            <a:ext cx="3611880" cy="1261872"/>
           </a:xfrm>
           <a:prstGeom prst="roundRect">
             <a:avLst>
-              <a:gd name="adj" fmla="val 9091"/>
+              <a:gd name="adj" fmla="val 8696"/>
             </a:avLst>
           </a:prstGeom>
           <a:solidFill>
@@ -8191,8 +8195,8 @@
         </p:nvSpPr>
         <p:spPr>
           <a:xfrm>
-            <a:off x="7799832" y="1472184"/>
-            <a:ext cx="3145536" cy="256032"/>
+            <a:off x="7708392" y="1453896"/>
+            <a:ext cx="3282696" cy="228600"/>
           </a:xfrm>
           <a:prstGeom prst="rect">
             <a:avLst/>
@@ -8208,7 +8212,7 @@
               <a:buNone/>
             </a:pPr>
             <a:r>
-              <a:rPr lang="en-US" sz="1300" b="1" dirty="0">
+              <a:rPr lang="en-US" sz="1220" b="1" dirty="0">
                 <a:solidFill>
                   <a:srgbClr val="0068B7"/>
                 </a:solidFill>
@@ -8218,7 +8222,7 @@
               </a:rPr>
               <a:t>Core concept</a:t>
             </a:r>
-            <a:endParaRPr lang="en-US" sz="1300" dirty="0"/>
+            <a:endParaRPr lang="en-US" sz="1220" dirty="0"/>
           </a:p>
         </p:txBody>
       </p:sp>
@@ -8230,8 +8234,8 @@
         </p:nvSpPr>
         <p:spPr>
           <a:xfrm>
-            <a:off x="7799832" y="1801368"/>
-            <a:ext cx="3145536" cy="640080"/>
+            <a:off x="7708392" y="1764792"/>
+            <a:ext cx="3282696" cy="749808"/>
           </a:xfrm>
           <a:prstGeom prst="rect">
             <a:avLst/>
@@ -8249,7 +8253,7 @@
               <a:buNone/>
             </a:pPr>
             <a:r>
-              <a:rPr lang="en-US" sz="1320" dirty="0">
+              <a:rPr lang="en-US" sz="1220" dirty="0">
                 <a:solidFill>
                   <a:srgbClr val="17364A"/>
                 </a:solidFill>
@@ -8257,9 +8261,9 @@
                 <a:ea typeface="Aptos" pitchFamily="34" charset="-122"/>
                 <a:cs typeface="Aptos" pitchFamily="34" charset="-120"/>
               </a:rPr>
-              <a:t>What evidence would governance, leadership, or operations staff need before moving.</a:t>
-            </a:r>
-            <a:endParaRPr lang="en-US" sz="1320" dirty="0"/>
+              <a:t>What evidence would governance, leadership, or operations staff need before.</a:t>
+            </a:r>
+            <a:endParaRPr lang="en-US" sz="1220" dirty="0"/>
           </a:p>
         </p:txBody>
       </p:sp>
@@ -8271,12 +8275,12 @@
         </p:nvSpPr>
         <p:spPr>
           <a:xfrm>
-            <a:off x="7635240" y="2670048"/>
-            <a:ext cx="3474720" cy="1377086"/>
+            <a:off x="7543800" y="2724912"/>
+            <a:ext cx="3611880" cy="1527048"/>
           </a:xfrm>
           <a:prstGeom prst="roundRect">
             <a:avLst>
-              <a:gd name="adj" fmla="val 7968"/>
+              <a:gd name="adj" fmla="val 7186"/>
             </a:avLst>
           </a:prstGeom>
           <a:solidFill>
@@ -8298,8 +8302,8 @@
         </p:nvSpPr>
         <p:spPr>
           <a:xfrm>
-            <a:off x="7799832" y="2816352"/>
-            <a:ext cx="3145536" cy="256032"/>
+            <a:off x="7708392" y="2852928"/>
+            <a:ext cx="3282696" cy="228600"/>
           </a:xfrm>
           <a:prstGeom prst="rect">
             <a:avLst/>
@@ -8315,7 +8319,7 @@
               <a:buNone/>
             </a:pPr>
             <a:r>
-              <a:rPr lang="en-US" sz="1300" b="1" dirty="0">
+              <a:rPr lang="en-US" sz="1220" b="1" dirty="0">
                 <a:solidFill>
                   <a:srgbClr val="0068B7"/>
                 </a:solidFill>
@@ -8325,7 +8329,7 @@
               </a:rPr>
               <a:t>Concept checkpoints</a:t>
             </a:r>
-            <a:endParaRPr lang="en-US" sz="1300" dirty="0"/>
+            <a:endParaRPr lang="en-US" sz="1220" dirty="0"/>
           </a:p>
         </p:txBody>
       </p:sp>
@@ -8337,8 +8341,8 @@
         </p:nvSpPr>
         <p:spPr>
           <a:xfrm>
-            <a:off x="7818120" y="3182112"/>
-            <a:ext cx="3090672" cy="718718"/>
+            <a:off x="7726680" y="3182112"/>
+            <a:ext cx="3227832" cy="960120"/>
           </a:xfrm>
           <a:prstGeom prst="rect">
             <a:avLst/>
@@ -8356,7 +8360,7 @@
               <a:buNone/>
             </a:pPr>
             <a:r>
-              <a:rPr lang="en-US" sz="1220" dirty="0">
+              <a:rPr lang="en-US" sz="1140" dirty="0">
                 <a:solidFill>
                   <a:srgbClr val="17364A"/>
                 </a:solidFill>
@@ -8364,16 +8368,16 @@
                 <a:ea typeface="Aptos" pitchFamily="34" charset="-122"/>
                 <a:cs typeface="Aptos" pitchFamily="34" charset="-120"/>
               </a:rPr>
-              <a:t>What evidence would governance, leadership, or operations staff.</a:t>
-            </a:r>
-            <a:endParaRPr lang="en-US" sz="1220" dirty="0"/>
-          </a:p>
-          <a:p>
-            <a:pPr indent="0" marL="0">
-              <a:buNone/>
-            </a:pPr>
-            <a:r>
-              <a:rPr lang="en-US" sz="1220" dirty="0">
+              <a:t>What evidence would governance, leadership, or.</a:t>
+            </a:r>
+            <a:endParaRPr lang="en-US" sz="1140" dirty="0"/>
+          </a:p>
+          <a:p>
+            <a:pPr indent="0" marL="0">
+              <a:buNone/>
+            </a:pPr>
+            <a:r>
+              <a:rPr lang="en-US" sz="1140" dirty="0">
                 <a:solidFill>
                   <a:srgbClr val="17364A"/>
                 </a:solidFill>
@@ -8381,9 +8385,9 @@
                 <a:ea typeface="Aptos" pitchFamily="34" charset="-122"/>
                 <a:cs typeface="Aptos" pitchFamily="34" charset="-120"/>
               </a:rPr>
-              <a:t>Which policy, data, equity, privacy, security, or workflow.</a:t>
-            </a:r>
-            <a:endParaRPr lang="en-US" sz="1220" dirty="0"/>
+              <a:t>Which policy, data, equity, privacy, security, or.</a:t>
+            </a:r>
+            <a:endParaRPr lang="en-US" sz="1140" dirty="0"/>
           </a:p>
         </p:txBody>
       </p:sp>
@@ -8395,12 +8399,12 @@
         </p:nvSpPr>
         <p:spPr>
           <a:xfrm>
-            <a:off x="7635240" y="4184294"/>
-            <a:ext cx="3474720" cy="1466698"/>
+            <a:off x="7543800" y="4389120"/>
+            <a:ext cx="3611880" cy="1261872"/>
           </a:xfrm>
           <a:prstGeom prst="roundRect">
             <a:avLst>
-              <a:gd name="adj" fmla="val 7481"/>
+              <a:gd name="adj" fmla="val 8696"/>
             </a:avLst>
           </a:prstGeom>
           <a:solidFill>
@@ -8422,8 +8426,8 @@
         </p:nvSpPr>
         <p:spPr>
           <a:xfrm>
-            <a:off x="7799832" y="4330598"/>
-            <a:ext cx="3145536" cy="256032"/>
+            <a:off x="7708392" y="4517136"/>
+            <a:ext cx="3282696" cy="228600"/>
           </a:xfrm>
           <a:prstGeom prst="rect">
             <a:avLst/>
@@ -8439,7 +8443,7 @@
               <a:buNone/>
             </a:pPr>
             <a:r>
-              <a:rPr lang="en-US" sz="1300" b="1" dirty="0">
+              <a:rPr lang="en-US" sz="1220" b="1" dirty="0">
                 <a:solidFill>
                   <a:srgbClr val="0068B7"/>
                 </a:solidFill>
@@ -8449,7 +8453,7 @@
               </a:rPr>
               <a:t>Apply it</a:t>
             </a:r>
-            <a:endParaRPr lang="en-US" sz="1300" dirty="0"/>
+            <a:endParaRPr lang="en-US" sz="1220" dirty="0"/>
           </a:p>
         </p:txBody>
       </p:sp>
@@ -8461,8 +8465,8 @@
         </p:nvSpPr>
         <p:spPr>
           <a:xfrm>
-            <a:off x="7799832" y="4659782"/>
-            <a:ext cx="3145536" cy="899770"/>
+            <a:off x="7708392" y="4828032"/>
+            <a:ext cx="3282696" cy="749808"/>
           </a:xfrm>
           <a:prstGeom prst="rect">
             <a:avLst/>
@@ -8480,7 +8484,7 @@
               <a:buNone/>
             </a:pPr>
             <a:r>
-              <a:rPr lang="en-US" sz="1320" dirty="0">
+              <a:rPr lang="en-US" sz="1220" dirty="0">
                 <a:solidFill>
                   <a:srgbClr val="17364A"/>
                 </a:solidFill>
@@ -8488,9 +8492,9 @@
                 <a:ea typeface="Aptos" pitchFamily="34" charset="-122"/>
                 <a:cs typeface="Aptos" pitchFamily="34" charset="-120"/>
               </a:rPr>
-              <a:t>Connect the concept to public health purpose, responsible use, required safeguards, documentation, and the next action a department should take.</a:t>
-            </a:r>
-            <a:endParaRPr lang="en-US" sz="1320" dirty="0"/>
+              <a:t>Connect the concept to public health purpose, responsible use, required.</a:t>
+            </a:r>
+            <a:endParaRPr lang="en-US" sz="1220" dirty="0"/>
           </a:p>
         </p:txBody>
       </p:sp>
@@ -8781,8 +8785,8 @@
         </p:nvSpPr>
         <p:spPr>
           <a:xfrm>
-            <a:off x="868680" y="1508760"/>
-            <a:ext cx="6309360" cy="4160520"/>
+            <a:off x="822960" y="1463040"/>
+            <a:ext cx="6565392" cy="4343400"/>
           </a:xfrm>
           <a:prstGeom prst="rect">
             <a:avLst/>
@@ -8800,7 +8804,7 @@
               <a:buNone/>
             </a:pPr>
             <a:r>
-              <a:rPr lang="en-US" sz="2100" dirty="0">
+              <a:rPr lang="en-US" sz="1920" dirty="0">
                 <a:solidFill>
                   <a:srgbClr val="003A63"/>
                 </a:solidFill>
@@ -8808,16 +8812,16 @@
                 <a:ea typeface="Aptos" pitchFamily="34" charset="-122"/>
                 <a:cs typeface="Aptos" pitchFamily="34" charset="-120"/>
               </a:rPr>
-              <a:t>• Create an AI-supported case investigation or outbreak response workflow review.</a:t>
-            </a:r>
-            <a:endParaRPr lang="en-US" sz="2100" dirty="0"/>
-          </a:p>
-          <a:p>
-            <a:pPr indent="0" marL="0">
-              <a:buNone/>
-            </a:pPr>
-            <a:r>
-              <a:rPr lang="en-US" sz="2100" dirty="0">
+              <a:t>• Create an AI-supported case investigation or outbreak response workflow.</a:t>
+            </a:r>
+            <a:endParaRPr lang="en-US" sz="1920" dirty="0"/>
+          </a:p>
+          <a:p>
+            <a:pPr indent="0" marL="0">
+              <a:buNone/>
+            </a:pPr>
+            <a:r>
+              <a:rPr lang="en-US" sz="1920" dirty="0">
                 <a:solidFill>
                   <a:srgbClr val="003A63"/>
                 </a:solidFill>
@@ -8825,9 +8829,9 @@
                 <a:ea typeface="Aptos" pitchFamily="34" charset="-122"/>
                 <a:cs typeface="Aptos" pitchFamily="34" charset="-120"/>
               </a:rPr>
-              <a:t>• Include the supported task, data sources, AI output, source traceability, human review point,.</a:t>
-            </a:r>
-            <a:endParaRPr lang="en-US" sz="2100" dirty="0"/>
+              <a:t>• Include the supported task, data sources, AI output, source traceability,.</a:t>
+            </a:r>
+            <a:endParaRPr lang="en-US" sz="1920" dirty="0"/>
           </a:p>
         </p:txBody>
       </p:sp>
@@ -8839,12 +8843,12 @@
         </p:nvSpPr>
         <p:spPr>
           <a:xfrm>
-            <a:off x="7635240" y="1325880"/>
-            <a:ext cx="3474720" cy="1207008"/>
+            <a:off x="7543800" y="1325880"/>
+            <a:ext cx="3611880" cy="1261872"/>
           </a:xfrm>
           <a:prstGeom prst="roundRect">
             <a:avLst>
-              <a:gd name="adj" fmla="val 9091"/>
+              <a:gd name="adj" fmla="val 8696"/>
             </a:avLst>
           </a:prstGeom>
           <a:solidFill>
@@ -8866,8 +8870,8 @@
         </p:nvSpPr>
         <p:spPr>
           <a:xfrm>
-            <a:off x="7799832" y="1472184"/>
-            <a:ext cx="3145536" cy="256032"/>
+            <a:off x="7708392" y="1453896"/>
+            <a:ext cx="3282696" cy="228600"/>
           </a:xfrm>
           <a:prstGeom prst="rect">
             <a:avLst/>
@@ -8883,7 +8887,7 @@
               <a:buNone/>
             </a:pPr>
             <a:r>
-              <a:rPr lang="en-US" sz="1300" b="1" dirty="0">
+              <a:rPr lang="en-US" sz="1220" b="1" dirty="0">
                 <a:solidFill>
                   <a:srgbClr val="0068B7"/>
                 </a:solidFill>
@@ -8893,7 +8897,7 @@
               </a:rPr>
               <a:t>Practice focus</a:t>
             </a:r>
-            <a:endParaRPr lang="en-US" sz="1300" dirty="0"/>
+            <a:endParaRPr lang="en-US" sz="1220" dirty="0"/>
           </a:p>
         </p:txBody>
       </p:sp>
@@ -8905,8 +8909,8 @@
         </p:nvSpPr>
         <p:spPr>
           <a:xfrm>
-            <a:off x="7799832" y="1801368"/>
-            <a:ext cx="3145536" cy="640080"/>
+            <a:off x="7708392" y="1764792"/>
+            <a:ext cx="3282696" cy="749808"/>
           </a:xfrm>
           <a:prstGeom prst="rect">
             <a:avLst/>
@@ -8924,7 +8928,7 @@
               <a:buNone/>
             </a:pPr>
             <a:r>
-              <a:rPr lang="en-US" sz="1320" dirty="0">
+              <a:rPr lang="en-US" sz="1220" dirty="0">
                 <a:solidFill>
                   <a:srgbClr val="17364A"/>
                 </a:solidFill>
@@ -8934,7 +8938,7 @@
               </a:rPr>
               <a:t>Create an AI-supported case investigation or outbreak response workflow review.</a:t>
             </a:r>
-            <a:endParaRPr lang="en-US" sz="1320" dirty="0"/>
+            <a:endParaRPr lang="en-US" sz="1220" dirty="0"/>
           </a:p>
         </p:txBody>
       </p:sp>
@@ -8946,12 +8950,12 @@
         </p:nvSpPr>
         <p:spPr>
           <a:xfrm>
-            <a:off x="7635240" y="2670048"/>
-            <a:ext cx="3474720" cy="1377086"/>
+            <a:off x="7543800" y="2724912"/>
+            <a:ext cx="3611880" cy="1527048"/>
           </a:xfrm>
           <a:prstGeom prst="roundRect">
             <a:avLst>
-              <a:gd name="adj" fmla="val 7968"/>
+              <a:gd name="adj" fmla="val 7186"/>
             </a:avLst>
           </a:prstGeom>
           <a:solidFill>
@@ -8973,8 +8977,8 @@
         </p:nvSpPr>
         <p:spPr>
           <a:xfrm>
-            <a:off x="7799832" y="2816352"/>
-            <a:ext cx="3145536" cy="256032"/>
+            <a:off x="7708392" y="2852928"/>
+            <a:ext cx="3282696" cy="228600"/>
           </a:xfrm>
           <a:prstGeom prst="rect">
             <a:avLst/>
@@ -8990,7 +8994,7 @@
               <a:buNone/>
             </a:pPr>
             <a:r>
-              <a:rPr lang="en-US" sz="1300" b="1" dirty="0">
+              <a:rPr lang="en-US" sz="1220" b="1" dirty="0">
                 <a:solidFill>
                   <a:srgbClr val="0068B7"/>
                 </a:solidFill>
@@ -9000,7 +9004,7 @@
               </a:rPr>
               <a:t>Concept checkpoints</a:t>
             </a:r>
-            <a:endParaRPr lang="en-US" sz="1300" dirty="0"/>
+            <a:endParaRPr lang="en-US" sz="1220" dirty="0"/>
           </a:p>
         </p:txBody>
       </p:sp>
@@ -9012,8 +9016,8 @@
         </p:nvSpPr>
         <p:spPr>
           <a:xfrm>
-            <a:off x="7818120" y="3182112"/>
-            <a:ext cx="3090672" cy="718718"/>
+            <a:off x="7726680" y="3182112"/>
+            <a:ext cx="3227832" cy="960120"/>
           </a:xfrm>
           <a:prstGeom prst="rect">
             <a:avLst/>
@@ -9031,7 +9035,7 @@
               <a:buNone/>
             </a:pPr>
             <a:r>
-              <a:rPr lang="en-US" sz="1220" dirty="0">
+              <a:rPr lang="en-US" sz="1140" dirty="0">
                 <a:solidFill>
                   <a:srgbClr val="17364A"/>
                 </a:solidFill>
@@ -9039,16 +9043,16 @@
                 <a:ea typeface="Aptos" pitchFamily="34" charset="-122"/>
                 <a:cs typeface="Aptos" pitchFamily="34" charset="-120"/>
               </a:rPr>
-              <a:t>Create an AI-supported case investigation or outbreak response.</a:t>
-            </a:r>
-            <a:endParaRPr lang="en-US" sz="1220" dirty="0"/>
-          </a:p>
-          <a:p>
-            <a:pPr indent="0" marL="0">
-              <a:buNone/>
-            </a:pPr>
-            <a:r>
-              <a:rPr lang="en-US" sz="1220" dirty="0">
+              <a:t>Create an AI-supported case investigation or.</a:t>
+            </a:r>
+            <a:endParaRPr lang="en-US" sz="1140" dirty="0"/>
+          </a:p>
+          <a:p>
+            <a:pPr indent="0" marL="0">
+              <a:buNone/>
+            </a:pPr>
+            <a:r>
+              <a:rPr lang="en-US" sz="1140" dirty="0">
                 <a:solidFill>
                   <a:srgbClr val="17364A"/>
                 </a:solidFill>
@@ -9056,9 +9060,9 @@
                 <a:ea typeface="Aptos" pitchFamily="34" charset="-122"/>
                 <a:cs typeface="Aptos" pitchFamily="34" charset="-120"/>
               </a:rPr>
-              <a:t>Include the supported task, data sources, AI output, source.</a:t>
-            </a:r>
-            <a:endParaRPr lang="en-US" sz="1220" dirty="0"/>
+              <a:t>Include the supported task, data sources, AI.</a:t>
+            </a:r>
+            <a:endParaRPr lang="en-US" sz="1140" dirty="0"/>
           </a:p>
         </p:txBody>
       </p:sp>
@@ -9070,12 +9074,12 @@
         </p:nvSpPr>
         <p:spPr>
           <a:xfrm>
-            <a:off x="7635240" y="4184294"/>
-            <a:ext cx="3474720" cy="1466698"/>
+            <a:off x="7543800" y="4389120"/>
+            <a:ext cx="3611880" cy="1261872"/>
           </a:xfrm>
           <a:prstGeom prst="roundRect">
             <a:avLst>
-              <a:gd name="adj" fmla="val 7481"/>
+              <a:gd name="adj" fmla="val 8696"/>
             </a:avLst>
           </a:prstGeom>
           <a:solidFill>
@@ -9097,8 +9101,8 @@
         </p:nvSpPr>
         <p:spPr>
           <a:xfrm>
-            <a:off x="7799832" y="4330598"/>
-            <a:ext cx="3145536" cy="256032"/>
+            <a:off x="7708392" y="4517136"/>
+            <a:ext cx="3282696" cy="228600"/>
           </a:xfrm>
           <a:prstGeom prst="rect">
             <a:avLst/>
@@ -9114,7 +9118,7 @@
               <a:buNone/>
             </a:pPr>
             <a:r>
-              <a:rPr lang="en-US" sz="1300" b="1" dirty="0">
+              <a:rPr lang="en-US" sz="1220" b="1" dirty="0">
                 <a:solidFill>
                   <a:srgbClr val="0068B7"/>
                 </a:solidFill>
@@ -9124,7 +9128,7 @@
               </a:rPr>
               <a:t>What to produce</a:t>
             </a:r>
-            <a:endParaRPr lang="en-US" sz="1300" dirty="0"/>
+            <a:endParaRPr lang="en-US" sz="1220" dirty="0"/>
           </a:p>
         </p:txBody>
       </p:sp>
@@ -9136,8 +9140,8 @@
         </p:nvSpPr>
         <p:spPr>
           <a:xfrm>
-            <a:off x="7799832" y="4659782"/>
-            <a:ext cx="3145536" cy="899770"/>
+            <a:off x="7708392" y="4828032"/>
+            <a:ext cx="3282696" cy="749808"/>
           </a:xfrm>
           <a:prstGeom prst="rect">
             <a:avLst/>
@@ -9155,7 +9159,7 @@
               <a:buNone/>
             </a:pPr>
             <a:r>
-              <a:rPr lang="en-US" sz="1320" dirty="0">
+              <a:rPr lang="en-US" sz="1220" dirty="0">
                 <a:solidFill>
                   <a:srgbClr val="17364A"/>
                 </a:solidFill>
@@ -9163,9 +9167,9 @@
                 <a:ea typeface="Aptos" pitchFamily="34" charset="-122"/>
                 <a:cs typeface="Aptos" pitchFamily="34" charset="-120"/>
               </a:rPr>
-              <a:t>Use the assignment to test whether you can explain the concept, apply it to a realistic public health situation, and identify what would need review before the work moves forward.</a:t>
-            </a:r>
-            <a:endParaRPr lang="en-US" sz="1320" dirty="0"/>
+              <a:t>Use the assignment to test whether you can explain the concept, apply it to a.</a:t>
+            </a:r>
+            <a:endParaRPr lang="en-US" sz="1220" dirty="0"/>
           </a:p>
         </p:txBody>
       </p:sp>
@@ -9456,8 +9460,8 @@
         </p:nvSpPr>
         <p:spPr>
           <a:xfrm>
-            <a:off x="868680" y="1508760"/>
-            <a:ext cx="6309360" cy="4160520"/>
+            <a:off x="822960" y="1463040"/>
+            <a:ext cx="6565392" cy="4343400"/>
           </a:xfrm>
           <a:prstGeom prst="rect">
             <a:avLst/>
@@ -9475,7 +9479,7 @@
               <a:buNone/>
             </a:pPr>
             <a:r>
-              <a:rPr lang="en-US" sz="2100" dirty="0">
+              <a:rPr lang="en-US" sz="1920" dirty="0">
                 <a:solidFill>
                   <a:srgbClr val="003A63"/>
                 </a:solidFill>
@@ -9485,14 +9489,14 @@
               </a:rPr>
               <a:t>• Case investigation or outbreak response workflow review</a:t>
             </a:r>
-            <a:endParaRPr lang="en-US" sz="2100" dirty="0"/>
-          </a:p>
-          <a:p>
-            <a:pPr indent="0" marL="0">
-              <a:buNone/>
-            </a:pPr>
-            <a:r>
-              <a:rPr lang="en-US" sz="2100" dirty="0">
+            <a:endParaRPr lang="en-US" sz="1920" dirty="0"/>
+          </a:p>
+          <a:p>
+            <a:pPr indent="0" marL="0">
+              <a:buNone/>
+            </a:pPr>
+            <a:r>
+              <a:rPr lang="en-US" sz="1920" dirty="0">
                 <a:solidFill>
                   <a:srgbClr val="003A63"/>
                 </a:solidFill>
@@ -9502,14 +9506,14 @@
               </a:rPr>
               <a:t>• Source traceability checklist</a:t>
             </a:r>
-            <a:endParaRPr lang="en-US" sz="2100" dirty="0"/>
-          </a:p>
-          <a:p>
-            <a:pPr indent="0" marL="0">
-              <a:buNone/>
-            </a:pPr>
-            <a:r>
-              <a:rPr lang="en-US" sz="2100" dirty="0">
+            <a:endParaRPr lang="en-US" sz="1920" dirty="0"/>
+          </a:p>
+          <a:p>
+            <a:pPr indent="0" marL="0">
+              <a:buNone/>
+            </a:pPr>
+            <a:r>
+              <a:rPr lang="en-US" sz="1920" dirty="0">
                 <a:solidFill>
                   <a:srgbClr val="003A63"/>
                 </a:solidFill>
@@ -9519,7 +9523,7 @@
               </a:rPr>
               <a:t>• Uncertainty and missing data documentation</a:t>
             </a:r>
-            <a:endParaRPr lang="en-US" sz="2100" dirty="0"/>
+            <a:endParaRPr lang="en-US" sz="1920" dirty="0"/>
           </a:p>
         </p:txBody>
       </p:sp>
@@ -9531,12 +9535,12 @@
         </p:nvSpPr>
         <p:spPr>
           <a:xfrm>
-            <a:off x="7635240" y="1325880"/>
-            <a:ext cx="3474720" cy="1207008"/>
+            <a:off x="7543800" y="1325880"/>
+            <a:ext cx="3611880" cy="1261872"/>
           </a:xfrm>
           <a:prstGeom prst="roundRect">
             <a:avLst>
-              <a:gd name="adj" fmla="val 9091"/>
+              <a:gd name="adj" fmla="val 8696"/>
             </a:avLst>
           </a:prstGeom>
           <a:solidFill>
@@ -9558,8 +9562,8 @@
         </p:nvSpPr>
         <p:spPr>
           <a:xfrm>
-            <a:off x="7799832" y="1472184"/>
-            <a:ext cx="3145536" cy="256032"/>
+            <a:off x="7708392" y="1453896"/>
+            <a:ext cx="3282696" cy="228600"/>
           </a:xfrm>
           <a:prstGeom prst="rect">
             <a:avLst/>
@@ -9575,7 +9579,7 @@
               <a:buNone/>
             </a:pPr>
             <a:r>
-              <a:rPr lang="en-US" sz="1300" b="1" dirty="0">
+              <a:rPr lang="en-US" sz="1220" b="1" dirty="0">
                 <a:solidFill>
                   <a:srgbClr val="0068B7"/>
                 </a:solidFill>
@@ -9585,7 +9589,7 @@
               </a:rPr>
               <a:t>Core concept</a:t>
             </a:r>
-            <a:endParaRPr lang="en-US" sz="1300" dirty="0"/>
+            <a:endParaRPr lang="en-US" sz="1220" dirty="0"/>
           </a:p>
         </p:txBody>
       </p:sp>
@@ -9597,8 +9601,8 @@
         </p:nvSpPr>
         <p:spPr>
           <a:xfrm>
-            <a:off x="7799832" y="1801368"/>
-            <a:ext cx="3145536" cy="640080"/>
+            <a:off x="7708392" y="1764792"/>
+            <a:ext cx="3282696" cy="749808"/>
           </a:xfrm>
           <a:prstGeom prst="rect">
             <a:avLst/>
@@ -9616,7 +9620,7 @@
               <a:buNone/>
             </a:pPr>
             <a:r>
-              <a:rPr lang="en-US" sz="1320" dirty="0">
+              <a:rPr lang="en-US" sz="1220" dirty="0">
                 <a:solidFill>
                   <a:srgbClr val="17364A"/>
                 </a:solidFill>
@@ -9626,7 +9630,7 @@
               </a:rPr>
               <a:t>Case investigation or outbreak response workflow review</a:t>
             </a:r>
-            <a:endParaRPr lang="en-US" sz="1320" dirty="0"/>
+            <a:endParaRPr lang="en-US" sz="1220" dirty="0"/>
           </a:p>
         </p:txBody>
       </p:sp>
@@ -9638,12 +9642,12 @@
         </p:nvSpPr>
         <p:spPr>
           <a:xfrm>
-            <a:off x="7635240" y="2670048"/>
-            <a:ext cx="3474720" cy="1377086"/>
+            <a:off x="7543800" y="2724912"/>
+            <a:ext cx="3611880" cy="1527048"/>
           </a:xfrm>
           <a:prstGeom prst="roundRect">
             <a:avLst>
-              <a:gd name="adj" fmla="val 7968"/>
+              <a:gd name="adj" fmla="val 7186"/>
             </a:avLst>
           </a:prstGeom>
           <a:solidFill>
@@ -9665,8 +9669,8 @@
         </p:nvSpPr>
         <p:spPr>
           <a:xfrm>
-            <a:off x="7799832" y="2816352"/>
-            <a:ext cx="3145536" cy="256032"/>
+            <a:off x="7708392" y="2852928"/>
+            <a:ext cx="3282696" cy="228600"/>
           </a:xfrm>
           <a:prstGeom prst="rect">
             <a:avLst/>
@@ -9682,7 +9686,7 @@
               <a:buNone/>
             </a:pPr>
             <a:r>
-              <a:rPr lang="en-US" sz="1300" b="1" dirty="0">
+              <a:rPr lang="en-US" sz="1220" b="1" dirty="0">
                 <a:solidFill>
                   <a:srgbClr val="0068B7"/>
                 </a:solidFill>
@@ -9692,7 +9696,7 @@
               </a:rPr>
               <a:t>Concept checkpoints</a:t>
             </a:r>
-            <a:endParaRPr lang="en-US" sz="1300" dirty="0"/>
+            <a:endParaRPr lang="en-US" sz="1220" dirty="0"/>
           </a:p>
         </p:txBody>
       </p:sp>
@@ -9704,8 +9708,8 @@
         </p:nvSpPr>
         <p:spPr>
           <a:xfrm>
-            <a:off x="7818120" y="3182112"/>
-            <a:ext cx="3090672" cy="718718"/>
+            <a:off x="7726680" y="3182112"/>
+            <a:ext cx="3227832" cy="960120"/>
           </a:xfrm>
           <a:prstGeom prst="rect">
             <a:avLst/>
@@ -9723,7 +9727,7 @@
               <a:buNone/>
             </a:pPr>
             <a:r>
-              <a:rPr lang="en-US" sz="1220" dirty="0">
+              <a:rPr lang="en-US" sz="1140" dirty="0">
                 <a:solidFill>
                   <a:srgbClr val="17364A"/>
                 </a:solidFill>
@@ -9731,16 +9735,16 @@
                 <a:ea typeface="Aptos" pitchFamily="34" charset="-122"/>
                 <a:cs typeface="Aptos" pitchFamily="34" charset="-120"/>
               </a:rPr>
-              <a:t>Case investigation or outbreak response workflow review</a:t>
-            </a:r>
-            <a:endParaRPr lang="en-US" sz="1220" dirty="0"/>
-          </a:p>
-          <a:p>
-            <a:pPr indent="0" marL="0">
-              <a:buNone/>
-            </a:pPr>
-            <a:r>
-              <a:rPr lang="en-US" sz="1220" dirty="0">
+              <a:t>Case investigation or outbreak response workflow.</a:t>
+            </a:r>
+            <a:endParaRPr lang="en-US" sz="1140" dirty="0"/>
+          </a:p>
+          <a:p>
+            <a:pPr indent="0" marL="0">
+              <a:buNone/>
+            </a:pPr>
+            <a:r>
+              <a:rPr lang="en-US" sz="1140" dirty="0">
                 <a:solidFill>
                   <a:srgbClr val="17364A"/>
                 </a:solidFill>
@@ -9750,14 +9754,14 @@
               </a:rPr>
               <a:t>Source traceability checklist</a:t>
             </a:r>
-            <a:endParaRPr lang="en-US" sz="1220" dirty="0"/>
-          </a:p>
-          <a:p>
-            <a:pPr indent="0" marL="0">
-              <a:buNone/>
-            </a:pPr>
-            <a:r>
-              <a:rPr lang="en-US" sz="1220" dirty="0">
+            <a:endParaRPr lang="en-US" sz="1140" dirty="0"/>
+          </a:p>
+          <a:p>
+            <a:pPr indent="0" marL="0">
+              <a:buNone/>
+            </a:pPr>
+            <a:r>
+              <a:rPr lang="en-US" sz="1140" dirty="0">
                 <a:solidFill>
                   <a:srgbClr val="17364A"/>
                 </a:solidFill>
@@ -9767,7 +9771,7 @@
               </a:rPr>
               <a:t>Uncertainty and missing data documentation</a:t>
             </a:r>
-            <a:endParaRPr lang="en-US" sz="1220" dirty="0"/>
+            <a:endParaRPr lang="en-US" sz="1140" dirty="0"/>
           </a:p>
         </p:txBody>
       </p:sp>
@@ -9779,12 +9783,12 @@
         </p:nvSpPr>
         <p:spPr>
           <a:xfrm>
-            <a:off x="7635240" y="4184294"/>
-            <a:ext cx="3474720" cy="1466698"/>
+            <a:off x="7543800" y="4389120"/>
+            <a:ext cx="3611880" cy="1261872"/>
           </a:xfrm>
           <a:prstGeom prst="roundRect">
             <a:avLst>
-              <a:gd name="adj" fmla="val 7481"/>
+              <a:gd name="adj" fmla="val 8696"/>
             </a:avLst>
           </a:prstGeom>
           <a:solidFill>
@@ -9806,8 +9810,8 @@
         </p:nvSpPr>
         <p:spPr>
           <a:xfrm>
-            <a:off x="7799832" y="4330598"/>
-            <a:ext cx="3145536" cy="256032"/>
+            <a:off x="7708392" y="4517136"/>
+            <a:ext cx="3282696" cy="228600"/>
           </a:xfrm>
           <a:prstGeom prst="rect">
             <a:avLst/>
@@ -9823,7 +9827,7 @@
               <a:buNone/>
             </a:pPr>
             <a:r>
-              <a:rPr lang="en-US" sz="1300" b="1" dirty="0">
+              <a:rPr lang="en-US" sz="1220" b="1" dirty="0">
                 <a:solidFill>
                   <a:srgbClr val="0068B7"/>
                 </a:solidFill>
@@ -9833,7 +9837,7 @@
               </a:rPr>
               <a:t>Apply it</a:t>
             </a:r>
-            <a:endParaRPr lang="en-US" sz="1300" dirty="0"/>
+            <a:endParaRPr lang="en-US" sz="1220" dirty="0"/>
           </a:p>
         </p:txBody>
       </p:sp>
@@ -9845,8 +9849,8 @@
         </p:nvSpPr>
         <p:spPr>
           <a:xfrm>
-            <a:off x="7799832" y="4659782"/>
-            <a:ext cx="3145536" cy="899770"/>
+            <a:off x="7708392" y="4828032"/>
+            <a:ext cx="3282696" cy="749808"/>
           </a:xfrm>
           <a:prstGeom prst="rect">
             <a:avLst/>
@@ -9864,7 +9868,7 @@
               <a:buNone/>
             </a:pPr>
             <a:r>
-              <a:rPr lang="en-US" sz="1320" dirty="0">
+              <a:rPr lang="en-US" sz="1220" dirty="0">
                 <a:solidFill>
                   <a:srgbClr val="17364A"/>
                 </a:solidFill>
@@ -9872,9 +9876,9 @@
                 <a:ea typeface="Aptos" pitchFamily="34" charset="-122"/>
                 <a:cs typeface="Aptos" pitchFamily="34" charset="-120"/>
               </a:rPr>
-              <a:t>Connect the concept to public health purpose, responsible use, required safeguards, documentation, and the next action a department should take.</a:t>
-            </a:r>
-            <a:endParaRPr lang="en-US" sz="1320" dirty="0"/>
+              <a:t>Connect the concept to public health purpose, responsible use, required.</a:t>
+            </a:r>
+            <a:endParaRPr lang="en-US" sz="1220" dirty="0"/>
           </a:p>
         </p:txBody>
       </p:sp>
@@ -10165,8 +10169,8 @@
         </p:nvSpPr>
         <p:spPr>
           <a:xfrm>
-            <a:off x="868680" y="1508760"/>
-            <a:ext cx="6309360" cy="4160520"/>
+            <a:off x="822960" y="1463040"/>
+            <a:ext cx="6565392" cy="4343400"/>
           </a:xfrm>
           <a:prstGeom prst="rect">
             <a:avLst/>
@@ -10184,7 +10188,7 @@
               <a:buNone/>
             </a:pPr>
             <a:r>
-              <a:rPr lang="en-US" sz="2100" dirty="0">
+              <a:rPr lang="en-US" sz="1920" dirty="0">
                 <a:solidFill>
                   <a:srgbClr val="003A63"/>
                 </a:solidFill>
@@ -10194,14 +10198,14 @@
               </a:rPr>
               <a:t>• Equity and escalation review</a:t>
             </a:r>
-            <a:endParaRPr lang="en-US" sz="2100" dirty="0"/>
-          </a:p>
-          <a:p>
-            <a:pPr indent="0" marL="0">
-              <a:buNone/>
-            </a:pPr>
-            <a:r>
-              <a:rPr lang="en-US" sz="2100" dirty="0">
+            <a:endParaRPr lang="en-US" sz="1920" dirty="0"/>
+          </a:p>
+          <a:p>
+            <a:pPr indent="0" marL="0">
+              <a:buNone/>
+            </a:pPr>
+            <a:r>
+              <a:rPr lang="en-US" sz="1920" dirty="0">
                 <a:solidFill>
                   <a:srgbClr val="003A63"/>
                 </a:solidFill>
@@ -10211,7 +10215,7 @@
               </a:rPr>
               <a:t>• Monitoring indicators</a:t>
             </a:r>
-            <a:endParaRPr lang="en-US" sz="2100" dirty="0"/>
+            <a:endParaRPr lang="en-US" sz="1920" dirty="0"/>
           </a:p>
         </p:txBody>
       </p:sp>
@@ -10223,12 +10227,12 @@
         </p:nvSpPr>
         <p:spPr>
           <a:xfrm>
-            <a:off x="7635240" y="1325880"/>
-            <a:ext cx="3474720" cy="1207008"/>
+            <a:off x="7543800" y="1325880"/>
+            <a:ext cx="3611880" cy="1261872"/>
           </a:xfrm>
           <a:prstGeom prst="roundRect">
             <a:avLst>
-              <a:gd name="adj" fmla="val 9091"/>
+              <a:gd name="adj" fmla="val 8696"/>
             </a:avLst>
           </a:prstGeom>
           <a:solidFill>
@@ -10250,8 +10254,8 @@
         </p:nvSpPr>
         <p:spPr>
           <a:xfrm>
-            <a:off x="7799832" y="1472184"/>
-            <a:ext cx="3145536" cy="256032"/>
+            <a:off x="7708392" y="1453896"/>
+            <a:ext cx="3282696" cy="228600"/>
           </a:xfrm>
           <a:prstGeom prst="rect">
             <a:avLst/>
@@ -10267,7 +10271,7 @@
               <a:buNone/>
             </a:pPr>
             <a:r>
-              <a:rPr lang="en-US" sz="1300" b="1" dirty="0">
+              <a:rPr lang="en-US" sz="1220" b="1" dirty="0">
                 <a:solidFill>
                   <a:srgbClr val="0068B7"/>
                 </a:solidFill>
@@ -10277,7 +10281,7 @@
               </a:rPr>
               <a:t>Core concept</a:t>
             </a:r>
-            <a:endParaRPr lang="en-US" sz="1300" dirty="0"/>
+            <a:endParaRPr lang="en-US" sz="1220" dirty="0"/>
           </a:p>
         </p:txBody>
       </p:sp>
@@ -10289,8 +10293,8 @@
         </p:nvSpPr>
         <p:spPr>
           <a:xfrm>
-            <a:off x="7799832" y="1801368"/>
-            <a:ext cx="3145536" cy="640080"/>
+            <a:off x="7708392" y="1764792"/>
+            <a:ext cx="3282696" cy="749808"/>
           </a:xfrm>
           <a:prstGeom prst="rect">
             <a:avLst/>
@@ -10308,7 +10312,7 @@
               <a:buNone/>
             </a:pPr>
             <a:r>
-              <a:rPr lang="en-US" sz="1320" dirty="0">
+              <a:rPr lang="en-US" sz="1220" dirty="0">
                 <a:solidFill>
                   <a:srgbClr val="17364A"/>
                 </a:solidFill>
@@ -10318,7 +10322,7 @@
               </a:rPr>
               <a:t>Equity and escalation review</a:t>
             </a:r>
-            <a:endParaRPr lang="en-US" sz="1320" dirty="0"/>
+            <a:endParaRPr lang="en-US" sz="1220" dirty="0"/>
           </a:p>
         </p:txBody>
       </p:sp>
@@ -10330,12 +10334,12 @@
         </p:nvSpPr>
         <p:spPr>
           <a:xfrm>
-            <a:off x="7635240" y="2670048"/>
-            <a:ext cx="3474720" cy="1377086"/>
+            <a:off x="7543800" y="2724912"/>
+            <a:ext cx="3611880" cy="1527048"/>
           </a:xfrm>
           <a:prstGeom prst="roundRect">
             <a:avLst>
-              <a:gd name="adj" fmla="val 7968"/>
+              <a:gd name="adj" fmla="val 7186"/>
             </a:avLst>
           </a:prstGeom>
           <a:solidFill>
@@ -10357,8 +10361,8 @@
         </p:nvSpPr>
         <p:spPr>
           <a:xfrm>
-            <a:off x="7799832" y="2816352"/>
-            <a:ext cx="3145536" cy="256032"/>
+            <a:off x="7708392" y="2852928"/>
+            <a:ext cx="3282696" cy="228600"/>
           </a:xfrm>
           <a:prstGeom prst="rect">
             <a:avLst/>
@@ -10374,7 +10378,7 @@
               <a:buNone/>
             </a:pPr>
             <a:r>
-              <a:rPr lang="en-US" sz="1300" b="1" dirty="0">
+              <a:rPr lang="en-US" sz="1220" b="1" dirty="0">
                 <a:solidFill>
                   <a:srgbClr val="0068B7"/>
                 </a:solidFill>
@@ -10384,7 +10388,7 @@
               </a:rPr>
               <a:t>Concept checkpoints</a:t>
             </a:r>
-            <a:endParaRPr lang="en-US" sz="1300" dirty="0"/>
+            <a:endParaRPr lang="en-US" sz="1220" dirty="0"/>
           </a:p>
         </p:txBody>
       </p:sp>
@@ -10396,8 +10400,8 @@
         </p:nvSpPr>
         <p:spPr>
           <a:xfrm>
-            <a:off x="7818120" y="3182112"/>
-            <a:ext cx="3090672" cy="718718"/>
+            <a:off x="7726680" y="3182112"/>
+            <a:ext cx="3227832" cy="960120"/>
           </a:xfrm>
           <a:prstGeom prst="rect">
             <a:avLst/>
@@ -10415,7 +10419,7 @@
               <a:buNone/>
             </a:pPr>
             <a:r>
-              <a:rPr lang="en-US" sz="1220" dirty="0">
+              <a:rPr lang="en-US" sz="1140" dirty="0">
                 <a:solidFill>
                   <a:srgbClr val="17364A"/>
                 </a:solidFill>
@@ -10425,14 +10429,14 @@
               </a:rPr>
               <a:t>Equity and escalation review</a:t>
             </a:r>
-            <a:endParaRPr lang="en-US" sz="1220" dirty="0"/>
-          </a:p>
-          <a:p>
-            <a:pPr indent="0" marL="0">
-              <a:buNone/>
-            </a:pPr>
-            <a:r>
-              <a:rPr lang="en-US" sz="1220" dirty="0">
+            <a:endParaRPr lang="en-US" sz="1140" dirty="0"/>
+          </a:p>
+          <a:p>
+            <a:pPr indent="0" marL="0">
+              <a:buNone/>
+            </a:pPr>
+            <a:r>
+              <a:rPr lang="en-US" sz="1140" dirty="0">
                 <a:solidFill>
                   <a:srgbClr val="17364A"/>
                 </a:solidFill>
@@ -10442,7 +10446,7 @@
               </a:rPr>
               <a:t>Monitoring indicators</a:t>
             </a:r>
-            <a:endParaRPr lang="en-US" sz="1220" dirty="0"/>
+            <a:endParaRPr lang="en-US" sz="1140" dirty="0"/>
           </a:p>
         </p:txBody>
       </p:sp>
@@ -10454,12 +10458,12 @@
         </p:nvSpPr>
         <p:spPr>
           <a:xfrm>
-            <a:off x="7635240" y="4184294"/>
-            <a:ext cx="3474720" cy="1466698"/>
+            <a:off x="7543800" y="4389120"/>
+            <a:ext cx="3611880" cy="1261872"/>
           </a:xfrm>
           <a:prstGeom prst="roundRect">
             <a:avLst>
-              <a:gd name="adj" fmla="val 7481"/>
+              <a:gd name="adj" fmla="val 8696"/>
             </a:avLst>
           </a:prstGeom>
           <a:solidFill>
@@ -10481,8 +10485,8 @@
         </p:nvSpPr>
         <p:spPr>
           <a:xfrm>
-            <a:off x="7799832" y="4330598"/>
-            <a:ext cx="3145536" cy="256032"/>
+            <a:off x="7708392" y="4517136"/>
+            <a:ext cx="3282696" cy="228600"/>
           </a:xfrm>
           <a:prstGeom prst="rect">
             <a:avLst/>
@@ -10498,7 +10502,7 @@
               <a:buNone/>
             </a:pPr>
             <a:r>
-              <a:rPr lang="en-US" sz="1300" b="1" dirty="0">
+              <a:rPr lang="en-US" sz="1220" b="1" dirty="0">
                 <a:solidFill>
                   <a:srgbClr val="0068B7"/>
                 </a:solidFill>
@@ -10508,7 +10512,7 @@
               </a:rPr>
               <a:t>Apply it</a:t>
             </a:r>
-            <a:endParaRPr lang="en-US" sz="1300" dirty="0"/>
+            <a:endParaRPr lang="en-US" sz="1220" dirty="0"/>
           </a:p>
         </p:txBody>
       </p:sp>
@@ -10520,8 +10524,8 @@
         </p:nvSpPr>
         <p:spPr>
           <a:xfrm>
-            <a:off x="7799832" y="4659782"/>
-            <a:ext cx="3145536" cy="899770"/>
+            <a:off x="7708392" y="4828032"/>
+            <a:ext cx="3282696" cy="749808"/>
           </a:xfrm>
           <a:prstGeom prst="rect">
             <a:avLst/>
@@ -10539,7 +10543,7 @@
               <a:buNone/>
             </a:pPr>
             <a:r>
-              <a:rPr lang="en-US" sz="1320" dirty="0">
+              <a:rPr lang="en-US" sz="1220" dirty="0">
                 <a:solidFill>
                   <a:srgbClr val="17364A"/>
                 </a:solidFill>
@@ -10547,9 +10551,9 @@
                 <a:ea typeface="Aptos" pitchFamily="34" charset="-122"/>
                 <a:cs typeface="Aptos" pitchFamily="34" charset="-120"/>
               </a:rPr>
-              <a:t>Connect the concept to public health purpose, responsible use, required safeguards, documentation, and the next action a department should take.</a:t>
-            </a:r>
-            <a:endParaRPr lang="en-US" sz="1320" dirty="0"/>
+              <a:t>Connect the concept to public health purpose, responsible use, required.</a:t>
+            </a:r>
+            <a:endParaRPr lang="en-US" sz="1220" dirty="0"/>
           </a:p>
         </p:txBody>
       </p:sp>
@@ -10867,7 +10871,7 @@
                 <a:ea typeface="Aptos" pitchFamily="34" charset="-122"/>
                 <a:cs typeface="Aptos" pitchFamily="34" charset="-120"/>
               </a:rPr>
-              <a:t>• Case investigation and outbreak response are high-pressure public health workflows that depend.</a:t>
+              <a:t>• Case investigation and outbreak response are high-pressure public health.</a:t>
             </a:r>
             <a:endParaRPr lang="en-US" sz="2100" dirty="0"/>
           </a:p>
@@ -10884,7 +10888,7 @@
                 <a:ea typeface="Aptos" pitchFamily="34" charset="-122"/>
                 <a:cs typeface="Aptos" pitchFamily="34" charset="-120"/>
               </a:rPr>
-              <a:t>• AI may support these workflows by summarizing case records, extracting exposures, identifying.</a:t>
+              <a:t>• AI may support these workflows by summarizing case records, extracting.</a:t>
             </a:r>
             <a:endParaRPr lang="en-US" sz="2100" dirty="0"/>
           </a:p>
@@ -10901,7 +10905,7 @@
                 <a:ea typeface="Aptos" pitchFamily="34" charset="-122"/>
                 <a:cs typeface="Aptos" pitchFamily="34" charset="-120"/>
               </a:rPr>
-              <a:t>• At the same time, errors can affect real people, public health action, and public confidence.</a:t>
+              <a:t>• At the same time, errors can affect real people, public health action, and.</a:t>
             </a:r>
             <a:endParaRPr lang="en-US" sz="2100" dirty="0"/>
           </a:p>
@@ -10942,8 +10946,8 @@
         </p:nvSpPr>
         <p:spPr>
           <a:xfrm>
-            <a:off x="8074152" y="1563624"/>
-            <a:ext cx="2825496" cy="256032"/>
+            <a:off x="8074152" y="1545336"/>
+            <a:ext cx="2825496" cy="228600"/>
           </a:xfrm>
           <a:prstGeom prst="rect">
             <a:avLst/>
@@ -10959,7 +10963,7 @@
               <a:buNone/>
             </a:pPr>
             <a:r>
-              <a:rPr lang="en-US" sz="1300" b="1" dirty="0">
+              <a:rPr lang="en-US" sz="1220" b="1" dirty="0">
                 <a:solidFill>
                   <a:srgbClr val="0068B7"/>
                 </a:solidFill>
@@ -10969,7 +10973,7 @@
               </a:rPr>
               <a:t>Module details</a:t>
             </a:r>
-            <a:endParaRPr lang="en-US" sz="1300" dirty="0"/>
+            <a:endParaRPr lang="en-US" sz="1220" dirty="0"/>
           </a:p>
         </p:txBody>
       </p:sp>
@@ -10981,8 +10985,8 @@
         </p:nvSpPr>
         <p:spPr>
           <a:xfrm>
-            <a:off x="8074152" y="1892808"/>
-            <a:ext cx="2825496" cy="1353312"/>
+            <a:off x="8074152" y="1856232"/>
+            <a:ext cx="2825496" cy="1408176"/>
           </a:xfrm>
           <a:prstGeom prst="rect">
             <a:avLst/>
@@ -11000,7 +11004,7 @@
               <a:buNone/>
             </a:pPr>
             <a:r>
-              <a:rPr lang="en-US" sz="1320" dirty="0">
+              <a:rPr lang="en-US" sz="1220" dirty="0">
                 <a:solidFill>
                   <a:srgbClr val="17364A"/>
                 </a:solidFill>
@@ -11008,9 +11012,9 @@
                 <a:ea typeface="Aptos" pitchFamily="34" charset="-122"/>
                 <a:cs typeface="Aptos" pitchFamily="34" charset="-120"/>
               </a:rPr>
-              <a:t>Level: intermediate/practitioner Primary track: Epidemiology Role-Based Track Appears in tracks: epidemiology, operations-and-data-quality, technical-architecture, public-health-executive-leadership</a:t>
-            </a:r>
-            <a:endParaRPr lang="en-US" sz="1320" dirty="0"/>
+              <a:t>Level: intermediate/practitioner Primary track: Epidemiology Role-Based Track.</a:t>
+            </a:r>
+            <a:endParaRPr lang="en-US" sz="1220" dirty="0"/>
           </a:p>
         </p:txBody>
       </p:sp>
@@ -11049,8 +11053,8 @@
         </p:nvSpPr>
         <p:spPr>
           <a:xfrm>
-            <a:off x="8074152" y="3822192"/>
-            <a:ext cx="2825496" cy="256032"/>
+            <a:off x="8074152" y="3803904"/>
+            <a:ext cx="2825496" cy="228600"/>
           </a:xfrm>
           <a:prstGeom prst="rect">
             <a:avLst/>
@@ -11066,7 +11070,7 @@
               <a:buNone/>
             </a:pPr>
             <a:r>
-              <a:rPr lang="en-US" sz="1300" b="1" dirty="0">
+              <a:rPr lang="en-US" sz="1220" b="1" dirty="0">
                 <a:solidFill>
                   <a:srgbClr val="0068B7"/>
                 </a:solidFill>
@@ -11076,7 +11080,7 @@
               </a:rPr>
               <a:t>Learning sequence</a:t>
             </a:r>
-            <a:endParaRPr lang="en-US" sz="1300" dirty="0"/>
+            <a:endParaRPr lang="en-US" sz="1220" dirty="0"/>
           </a:p>
         </p:txBody>
       </p:sp>
@@ -11088,8 +11092,8 @@
         </p:nvSpPr>
         <p:spPr>
           <a:xfrm>
-            <a:off x="8092440" y="4187952"/>
-            <a:ext cx="2770632" cy="1033272"/>
+            <a:off x="8092440" y="4133088"/>
+            <a:ext cx="2770632" cy="1124712"/>
           </a:xfrm>
           <a:prstGeom prst="rect">
             <a:avLst/>
@@ -11107,7 +11111,7 @@
               <a:buNone/>
             </a:pPr>
             <a:r>
-              <a:rPr lang="en-US" sz="1220" dirty="0">
+              <a:rPr lang="en-US" sz="1140" dirty="0">
                 <a:solidFill>
                   <a:srgbClr val="17364A"/>
                 </a:solidFill>
@@ -11117,14 +11121,14 @@
               </a:rPr>
               <a:t>Read the module for shared vocabulary and context.</a:t>
             </a:r>
-            <a:endParaRPr lang="en-US" sz="1220" dirty="0"/>
-          </a:p>
-          <a:p>
-            <a:pPr indent="0" marL="0">
-              <a:buNone/>
-            </a:pPr>
-            <a:r>
-              <a:rPr lang="en-US" sz="1220" dirty="0">
+            <a:endParaRPr lang="en-US" sz="1140" dirty="0"/>
+          </a:p>
+          <a:p>
+            <a:pPr indent="0" marL="0">
+              <a:buNone/>
+            </a:pPr>
+            <a:r>
+              <a:rPr lang="en-US" sz="1140" dirty="0">
                 <a:solidFill>
                   <a:srgbClr val="17364A"/>
                 </a:solidFill>
@@ -11132,16 +11136,16 @@
                 <a:ea typeface="Aptos" pitchFamily="34" charset="-122"/>
                 <a:cs typeface="Aptos" pitchFamily="34" charset="-120"/>
               </a:rPr>
-              <a:t>Complete the practical exercise to apply the concept.</a:t>
-            </a:r>
-            <a:endParaRPr lang="en-US" sz="1220" dirty="0"/>
-          </a:p>
-          <a:p>
-            <a:pPr indent="0" marL="0">
-              <a:buNone/>
-            </a:pPr>
-            <a:r>
-              <a:rPr lang="en-US" sz="1220" dirty="0">
+              <a:t>Complete the practical exercise to apply the.</a:t>
+            </a:r>
+            <a:endParaRPr lang="en-US" sz="1140" dirty="0"/>
+          </a:p>
+          <a:p>
+            <a:pPr indent="0" marL="0">
+              <a:buNone/>
+            </a:pPr>
+            <a:r>
+              <a:rPr lang="en-US" sz="1140" dirty="0">
                 <a:solidFill>
                   <a:srgbClr val="17364A"/>
                 </a:solidFill>
@@ -11151,7 +11155,7 @@
               </a:rPr>
               <a:t>Use the notes and references for deeper review.</a:t>
             </a:r>
-            <a:endParaRPr lang="en-US" sz="1220" dirty="0"/>
+            <a:endParaRPr lang="en-US" sz="1140" dirty="0"/>
           </a:p>
         </p:txBody>
       </p:sp>
@@ -11442,8 +11446,8 @@
         </p:nvSpPr>
         <p:spPr>
           <a:xfrm>
-            <a:off x="868680" y="1508760"/>
-            <a:ext cx="6309360" cy="4160520"/>
+            <a:off x="822960" y="1463040"/>
+            <a:ext cx="6565392" cy="4343400"/>
           </a:xfrm>
           <a:prstGeom prst="rect">
             <a:avLst/>
@@ -11461,7 +11465,7 @@
               <a:buNone/>
             </a:pPr>
             <a:r>
-              <a:rPr lang="en-US" sz="2100" dirty="0">
+              <a:rPr lang="en-US" sz="1920" dirty="0">
                 <a:solidFill>
                   <a:srgbClr val="003A63"/>
                 </a:solidFill>
@@ -11471,14 +11475,14 @@
               </a:rPr>
               <a:t>• Case investigation or outbreak response workflow review</a:t>
             </a:r>
-            <a:endParaRPr lang="en-US" sz="2100" dirty="0"/>
-          </a:p>
-          <a:p>
-            <a:pPr indent="0" marL="0">
-              <a:buNone/>
-            </a:pPr>
-            <a:r>
-              <a:rPr lang="en-US" sz="2100" dirty="0">
+            <a:endParaRPr lang="en-US" sz="1920" dirty="0"/>
+          </a:p>
+          <a:p>
+            <a:pPr indent="0" marL="0">
+              <a:buNone/>
+            </a:pPr>
+            <a:r>
+              <a:rPr lang="en-US" sz="1920" dirty="0">
                 <a:solidFill>
                   <a:srgbClr val="003A63"/>
                 </a:solidFill>
@@ -11488,14 +11492,14 @@
               </a:rPr>
               <a:t>• Source traceability checklist</a:t>
             </a:r>
-            <a:endParaRPr lang="en-US" sz="2100" dirty="0"/>
-          </a:p>
-          <a:p>
-            <a:pPr indent="0" marL="0">
-              <a:buNone/>
-            </a:pPr>
-            <a:r>
-              <a:rPr lang="en-US" sz="2100" dirty="0">
+            <a:endParaRPr lang="en-US" sz="1920" dirty="0"/>
+          </a:p>
+          <a:p>
+            <a:pPr indent="0" marL="0">
+              <a:buNone/>
+            </a:pPr>
+            <a:r>
+              <a:rPr lang="en-US" sz="1920" dirty="0">
                 <a:solidFill>
                   <a:srgbClr val="003A63"/>
                 </a:solidFill>
@@ -11505,7 +11509,7 @@
               </a:rPr>
               <a:t>• Uncertainty and missing data documentation</a:t>
             </a:r>
-            <a:endParaRPr lang="en-US" sz="2100" dirty="0"/>
+            <a:endParaRPr lang="en-US" sz="1920" dirty="0"/>
           </a:p>
         </p:txBody>
       </p:sp>
@@ -11517,12 +11521,12 @@
         </p:nvSpPr>
         <p:spPr>
           <a:xfrm>
-            <a:off x="7635240" y="1325880"/>
-            <a:ext cx="3474720" cy="1207008"/>
+            <a:off x="7543800" y="1325880"/>
+            <a:ext cx="3611880" cy="1261872"/>
           </a:xfrm>
           <a:prstGeom prst="roundRect">
             <a:avLst>
-              <a:gd name="adj" fmla="val 9091"/>
+              <a:gd name="adj" fmla="val 8696"/>
             </a:avLst>
           </a:prstGeom>
           <a:solidFill>
@@ -11544,8 +11548,8 @@
         </p:nvSpPr>
         <p:spPr>
           <a:xfrm>
-            <a:off x="7799832" y="1472184"/>
-            <a:ext cx="3145536" cy="256032"/>
+            <a:off x="7708392" y="1453896"/>
+            <a:ext cx="3282696" cy="228600"/>
           </a:xfrm>
           <a:prstGeom prst="rect">
             <a:avLst/>
@@ -11561,7 +11565,7 @@
               <a:buNone/>
             </a:pPr>
             <a:r>
-              <a:rPr lang="en-US" sz="1300" b="1" dirty="0">
+              <a:rPr lang="en-US" sz="1220" b="1" dirty="0">
                 <a:solidFill>
                   <a:srgbClr val="0068B7"/>
                 </a:solidFill>
@@ -11571,7 +11575,7 @@
               </a:rPr>
               <a:t>Practice focus</a:t>
             </a:r>
-            <a:endParaRPr lang="en-US" sz="1300" dirty="0"/>
+            <a:endParaRPr lang="en-US" sz="1220" dirty="0"/>
           </a:p>
         </p:txBody>
       </p:sp>
@@ -11583,8 +11587,8 @@
         </p:nvSpPr>
         <p:spPr>
           <a:xfrm>
-            <a:off x="7799832" y="1801368"/>
-            <a:ext cx="3145536" cy="640080"/>
+            <a:off x="7708392" y="1764792"/>
+            <a:ext cx="3282696" cy="749808"/>
           </a:xfrm>
           <a:prstGeom prst="rect">
             <a:avLst/>
@@ -11602,7 +11606,7 @@
               <a:buNone/>
             </a:pPr>
             <a:r>
-              <a:rPr lang="en-US" sz="1320" dirty="0">
+              <a:rPr lang="en-US" sz="1220" dirty="0">
                 <a:solidFill>
                   <a:srgbClr val="17364A"/>
                 </a:solidFill>
@@ -11612,7 +11616,7 @@
               </a:rPr>
               <a:t>Case investigation or outbreak response workflow review</a:t>
             </a:r>
-            <a:endParaRPr lang="en-US" sz="1320" dirty="0"/>
+            <a:endParaRPr lang="en-US" sz="1220" dirty="0"/>
           </a:p>
         </p:txBody>
       </p:sp>
@@ -11624,12 +11628,12 @@
         </p:nvSpPr>
         <p:spPr>
           <a:xfrm>
-            <a:off x="7635240" y="2670048"/>
-            <a:ext cx="3474720" cy="1377086"/>
+            <a:off x="7543800" y="2724912"/>
+            <a:ext cx="3611880" cy="1527048"/>
           </a:xfrm>
           <a:prstGeom prst="roundRect">
             <a:avLst>
-              <a:gd name="adj" fmla="val 7968"/>
+              <a:gd name="adj" fmla="val 7186"/>
             </a:avLst>
           </a:prstGeom>
           <a:solidFill>
@@ -11651,8 +11655,8 @@
         </p:nvSpPr>
         <p:spPr>
           <a:xfrm>
-            <a:off x="7799832" y="2816352"/>
-            <a:ext cx="3145536" cy="256032"/>
+            <a:off x="7708392" y="2852928"/>
+            <a:ext cx="3282696" cy="228600"/>
           </a:xfrm>
           <a:prstGeom prst="rect">
             <a:avLst/>
@@ -11668,7 +11672,7 @@
               <a:buNone/>
             </a:pPr>
             <a:r>
-              <a:rPr lang="en-US" sz="1300" b="1" dirty="0">
+              <a:rPr lang="en-US" sz="1220" b="1" dirty="0">
                 <a:solidFill>
                   <a:srgbClr val="0068B7"/>
                 </a:solidFill>
@@ -11678,7 +11682,7 @@
               </a:rPr>
               <a:t>Concept checkpoints</a:t>
             </a:r>
-            <a:endParaRPr lang="en-US" sz="1300" dirty="0"/>
+            <a:endParaRPr lang="en-US" sz="1220" dirty="0"/>
           </a:p>
         </p:txBody>
       </p:sp>
@@ -11690,8 +11694,8 @@
         </p:nvSpPr>
         <p:spPr>
           <a:xfrm>
-            <a:off x="7818120" y="3182112"/>
-            <a:ext cx="3090672" cy="718718"/>
+            <a:off x="7726680" y="3182112"/>
+            <a:ext cx="3227832" cy="960120"/>
           </a:xfrm>
           <a:prstGeom prst="rect">
             <a:avLst/>
@@ -11709,7 +11713,7 @@
               <a:buNone/>
             </a:pPr>
             <a:r>
-              <a:rPr lang="en-US" sz="1220" dirty="0">
+              <a:rPr lang="en-US" sz="1140" dirty="0">
                 <a:solidFill>
                   <a:srgbClr val="17364A"/>
                 </a:solidFill>
@@ -11719,14 +11723,14 @@
               </a:rPr>
               <a:t>Equity and escalation review</a:t>
             </a:r>
-            <a:endParaRPr lang="en-US" sz="1220" dirty="0"/>
-          </a:p>
-          <a:p>
-            <a:pPr indent="0" marL="0">
-              <a:buNone/>
-            </a:pPr>
-            <a:r>
-              <a:rPr lang="en-US" sz="1220" dirty="0">
+            <a:endParaRPr lang="en-US" sz="1140" dirty="0"/>
+          </a:p>
+          <a:p>
+            <a:pPr indent="0" marL="0">
+              <a:buNone/>
+            </a:pPr>
+            <a:r>
+              <a:rPr lang="en-US" sz="1140" dirty="0">
                 <a:solidFill>
                   <a:srgbClr val="17364A"/>
                 </a:solidFill>
@@ -11736,7 +11740,7 @@
               </a:rPr>
               <a:t>Monitoring indicators</a:t>
             </a:r>
-            <a:endParaRPr lang="en-US" sz="1220" dirty="0"/>
+            <a:endParaRPr lang="en-US" sz="1140" dirty="0"/>
           </a:p>
         </p:txBody>
       </p:sp>
@@ -11748,12 +11752,12 @@
         </p:nvSpPr>
         <p:spPr>
           <a:xfrm>
-            <a:off x="7635240" y="4184294"/>
-            <a:ext cx="3474720" cy="1466698"/>
+            <a:off x="7543800" y="4389120"/>
+            <a:ext cx="3611880" cy="1261872"/>
           </a:xfrm>
           <a:prstGeom prst="roundRect">
             <a:avLst>
-              <a:gd name="adj" fmla="val 7481"/>
+              <a:gd name="adj" fmla="val 8696"/>
             </a:avLst>
           </a:prstGeom>
           <a:solidFill>
@@ -11775,8 +11779,8 @@
         </p:nvSpPr>
         <p:spPr>
           <a:xfrm>
-            <a:off x="7799832" y="4330598"/>
-            <a:ext cx="3145536" cy="256032"/>
+            <a:off x="7708392" y="4517136"/>
+            <a:ext cx="3282696" cy="228600"/>
           </a:xfrm>
           <a:prstGeom prst="rect">
             <a:avLst/>
@@ -11792,7 +11796,7 @@
               <a:buNone/>
             </a:pPr>
             <a:r>
-              <a:rPr lang="en-US" sz="1300" b="1" dirty="0">
+              <a:rPr lang="en-US" sz="1220" b="1" dirty="0">
                 <a:solidFill>
                   <a:srgbClr val="0068B7"/>
                 </a:solidFill>
@@ -11802,7 +11806,7 @@
               </a:rPr>
               <a:t>What to produce</a:t>
             </a:r>
-            <a:endParaRPr lang="en-US" sz="1300" dirty="0"/>
+            <a:endParaRPr lang="en-US" sz="1220" dirty="0"/>
           </a:p>
         </p:txBody>
       </p:sp>
@@ -11814,8 +11818,8 @@
         </p:nvSpPr>
         <p:spPr>
           <a:xfrm>
-            <a:off x="7799832" y="4659782"/>
-            <a:ext cx="3145536" cy="899770"/>
+            <a:off x="7708392" y="4828032"/>
+            <a:ext cx="3282696" cy="749808"/>
           </a:xfrm>
           <a:prstGeom prst="rect">
             <a:avLst/>
@@ -11833,7 +11837,7 @@
               <a:buNone/>
             </a:pPr>
             <a:r>
-              <a:rPr lang="en-US" sz="1320" dirty="0">
+              <a:rPr lang="en-US" sz="1220" dirty="0">
                 <a:solidFill>
                   <a:srgbClr val="17364A"/>
                 </a:solidFill>
@@ -11841,9 +11845,9 @@
                 <a:ea typeface="Aptos" pitchFamily="34" charset="-122"/>
                 <a:cs typeface="Aptos" pitchFamily="34" charset="-120"/>
               </a:rPr>
-              <a:t>Use the assignment to test whether you can explain the concept, apply it to a realistic public health situation, and identify what would need review before the work moves forward.</a:t>
-            </a:r>
-            <a:endParaRPr lang="en-US" sz="1320" dirty="0"/>
+              <a:t>Use the assignment to test whether you can explain the concept, apply it to a.</a:t>
+            </a:r>
+            <a:endParaRPr lang="en-US" sz="1220" dirty="0"/>
           </a:p>
         </p:txBody>
       </p:sp>
@@ -12134,8 +12138,8 @@
         </p:nvSpPr>
         <p:spPr>
           <a:xfrm>
-            <a:off x="868680" y="1508760"/>
-            <a:ext cx="6309360" cy="4160520"/>
+            <a:off x="822960" y="1463040"/>
+            <a:ext cx="6565392" cy="4343400"/>
           </a:xfrm>
           <a:prstGeom prst="rect">
             <a:avLst/>
@@ -12153,7 +12157,7 @@
               <a:buNone/>
             </a:pPr>
             <a:r>
-              <a:rPr lang="en-US" sz="2100" dirty="0">
+              <a:rPr lang="en-US" sz="1920" dirty="0">
                 <a:solidFill>
                   <a:srgbClr val="003A63"/>
                 </a:solidFill>
@@ -12163,14 +12167,14 @@
               </a:rPr>
               <a:t>• 1. What should AI outputs do in case investigation?</a:t>
             </a:r>
-            <a:endParaRPr lang="en-US" sz="2100" dirty="0"/>
-          </a:p>
-          <a:p>
-            <a:pPr indent="0" marL="0">
-              <a:buNone/>
-            </a:pPr>
-            <a:r>
-              <a:rPr lang="en-US" sz="2100" dirty="0">
+            <a:endParaRPr lang="en-US" sz="1920" dirty="0"/>
+          </a:p>
+          <a:p>
+            <a:pPr indent="0" marL="0">
+              <a:buNone/>
+            </a:pPr>
+            <a:r>
+              <a:rPr lang="en-US" sz="1920" dirty="0">
                 <a:solidFill>
                   <a:srgbClr val="003A63"/>
                 </a:solidFill>
@@ -12180,14 +12184,14 @@
               </a:rPr>
               <a:t>• 2. What is an outbreak signal?</a:t>
             </a:r>
-            <a:endParaRPr lang="en-US" sz="2100" dirty="0"/>
-          </a:p>
-          <a:p>
-            <a:pPr indent="0" marL="0">
-              <a:buNone/>
-            </a:pPr>
-            <a:r>
-              <a:rPr lang="en-US" sz="2100" dirty="0">
+            <a:endParaRPr lang="en-US" sz="1920" dirty="0"/>
+          </a:p>
+          <a:p>
+            <a:pPr indent="0" marL="0">
+              <a:buNone/>
+            </a:pPr>
+            <a:r>
+              <a:rPr lang="en-US" sz="1920" dirty="0">
                 <a:solidFill>
                   <a:srgbClr val="003A63"/>
                 </a:solidFill>
@@ -12197,7 +12201,7 @@
               </a:rPr>
               <a:t>• 3. Why is uncertainty documentation important during response?</a:t>
             </a:r>
-            <a:endParaRPr lang="en-US" sz="2100" dirty="0"/>
+            <a:endParaRPr lang="en-US" sz="1920" dirty="0"/>
           </a:p>
         </p:txBody>
       </p:sp>
@@ -12209,12 +12213,12 @@
         </p:nvSpPr>
         <p:spPr>
           <a:xfrm>
-            <a:off x="7635240" y="1325880"/>
-            <a:ext cx="3474720" cy="1207008"/>
+            <a:off x="7543800" y="1325880"/>
+            <a:ext cx="3611880" cy="1261872"/>
           </a:xfrm>
           <a:prstGeom prst="roundRect">
             <a:avLst>
-              <a:gd name="adj" fmla="val 9091"/>
+              <a:gd name="adj" fmla="val 8696"/>
             </a:avLst>
           </a:prstGeom>
           <a:solidFill>
@@ -12236,8 +12240,8 @@
         </p:nvSpPr>
         <p:spPr>
           <a:xfrm>
-            <a:off x="7799832" y="1472184"/>
-            <a:ext cx="3145536" cy="256032"/>
+            <a:off x="7708392" y="1453896"/>
+            <a:ext cx="3282696" cy="228600"/>
           </a:xfrm>
           <a:prstGeom prst="rect">
             <a:avLst/>
@@ -12253,7 +12257,7 @@
               <a:buNone/>
             </a:pPr>
             <a:r>
-              <a:rPr lang="en-US" sz="1300" b="1" dirty="0">
+              <a:rPr lang="en-US" sz="1220" b="1" dirty="0">
                 <a:solidFill>
                   <a:srgbClr val="0068B7"/>
                 </a:solidFill>
@@ -12263,7 +12267,7 @@
               </a:rPr>
               <a:t>Practice focus</a:t>
             </a:r>
-            <a:endParaRPr lang="en-US" sz="1300" dirty="0"/>
+            <a:endParaRPr lang="en-US" sz="1220" dirty="0"/>
           </a:p>
         </p:txBody>
       </p:sp>
@@ -12275,8 +12279,8 @@
         </p:nvSpPr>
         <p:spPr>
           <a:xfrm>
-            <a:off x="7799832" y="1801368"/>
-            <a:ext cx="3145536" cy="640080"/>
+            <a:off x="7708392" y="1764792"/>
+            <a:ext cx="3282696" cy="749808"/>
           </a:xfrm>
           <a:prstGeom prst="rect">
             <a:avLst/>
@@ -12294,7 +12298,7 @@
               <a:buNone/>
             </a:pPr>
             <a:r>
-              <a:rPr lang="en-US" sz="1320" dirty="0">
+              <a:rPr lang="en-US" sz="1220" dirty="0">
                 <a:solidFill>
                   <a:srgbClr val="17364A"/>
                 </a:solidFill>
@@ -12304,7 +12308,7 @@
               </a:rPr>
               <a:t>1. What should AI outputs do in case investigation?</a:t>
             </a:r>
-            <a:endParaRPr lang="en-US" sz="1320" dirty="0"/>
+            <a:endParaRPr lang="en-US" sz="1220" dirty="0"/>
           </a:p>
         </p:txBody>
       </p:sp>
@@ -12316,12 +12320,12 @@
         </p:nvSpPr>
         <p:spPr>
           <a:xfrm>
-            <a:off x="7635240" y="2670048"/>
-            <a:ext cx="3474720" cy="1377086"/>
+            <a:off x="7543800" y="2724912"/>
+            <a:ext cx="3611880" cy="1527048"/>
           </a:xfrm>
           <a:prstGeom prst="roundRect">
             <a:avLst>
-              <a:gd name="adj" fmla="val 7968"/>
+              <a:gd name="adj" fmla="val 7186"/>
             </a:avLst>
           </a:prstGeom>
           <a:solidFill>
@@ -12343,8 +12347,8 @@
         </p:nvSpPr>
         <p:spPr>
           <a:xfrm>
-            <a:off x="7799832" y="2816352"/>
-            <a:ext cx="3145536" cy="256032"/>
+            <a:off x="7708392" y="2852928"/>
+            <a:ext cx="3282696" cy="228600"/>
           </a:xfrm>
           <a:prstGeom prst="rect">
             <a:avLst/>
@@ -12360,7 +12364,7 @@
               <a:buNone/>
             </a:pPr>
             <a:r>
-              <a:rPr lang="en-US" sz="1300" b="1" dirty="0">
+              <a:rPr lang="en-US" sz="1220" b="1" dirty="0">
                 <a:solidFill>
                   <a:srgbClr val="0068B7"/>
                 </a:solidFill>
@@ -12370,7 +12374,7 @@
               </a:rPr>
               <a:t>Concept checkpoints</a:t>
             </a:r>
-            <a:endParaRPr lang="en-US" sz="1300" dirty="0"/>
+            <a:endParaRPr lang="en-US" sz="1220" dirty="0"/>
           </a:p>
         </p:txBody>
       </p:sp>
@@ -12382,8 +12386,8 @@
         </p:nvSpPr>
         <p:spPr>
           <a:xfrm>
-            <a:off x="7818120" y="3182112"/>
-            <a:ext cx="3090672" cy="718718"/>
+            <a:off x="7726680" y="3182112"/>
+            <a:ext cx="3227832" cy="960120"/>
           </a:xfrm>
           <a:prstGeom prst="rect">
             <a:avLst/>
@@ -12401,7 +12405,7 @@
               <a:buNone/>
             </a:pPr>
             <a:r>
-              <a:rPr lang="en-US" sz="1220" dirty="0">
+              <a:rPr lang="en-US" sz="1140" dirty="0">
                 <a:solidFill>
                   <a:srgbClr val="17364A"/>
                 </a:solidFill>
@@ -12411,14 +12415,14 @@
               </a:rPr>
               <a:t>1.</a:t>
             </a:r>
-            <a:endParaRPr lang="en-US" sz="1220" dirty="0"/>
-          </a:p>
-          <a:p>
-            <a:pPr indent="0" marL="0">
-              <a:buNone/>
-            </a:pPr>
-            <a:r>
-              <a:rPr lang="en-US" sz="1220" dirty="0">
+            <a:endParaRPr lang="en-US" sz="1140" dirty="0"/>
+          </a:p>
+          <a:p>
+            <a:pPr indent="0" marL="0">
+              <a:buNone/>
+            </a:pPr>
+            <a:r>
+              <a:rPr lang="en-US" sz="1140" dirty="0">
                 <a:solidFill>
                   <a:srgbClr val="17364A"/>
                 </a:solidFill>
@@ -12428,14 +12432,14 @@
               </a:rPr>
               <a:t>What should AI outputs do in case investigation?</a:t>
             </a:r>
-            <a:endParaRPr lang="en-US" sz="1220" dirty="0"/>
-          </a:p>
-          <a:p>
-            <a:pPr indent="0" marL="0">
-              <a:buNone/>
-            </a:pPr>
-            <a:r>
-              <a:rPr lang="en-US" sz="1220" dirty="0">
+            <a:endParaRPr lang="en-US" sz="1140" dirty="0"/>
+          </a:p>
+          <a:p>
+            <a:pPr indent="0" marL="0">
+              <a:buNone/>
+            </a:pPr>
+            <a:r>
+              <a:rPr lang="en-US" sz="1140" dirty="0">
                 <a:solidFill>
                   <a:srgbClr val="17364A"/>
                 </a:solidFill>
@@ -12445,7 +12449,7 @@
               </a:rPr>
               <a:t>2.</a:t>
             </a:r>
-            <a:endParaRPr lang="en-US" sz="1220" dirty="0"/>
+            <a:endParaRPr lang="en-US" sz="1140" dirty="0"/>
           </a:p>
         </p:txBody>
       </p:sp>
@@ -12457,12 +12461,12 @@
         </p:nvSpPr>
         <p:spPr>
           <a:xfrm>
-            <a:off x="7635240" y="4184294"/>
-            <a:ext cx="3474720" cy="1466698"/>
+            <a:off x="7543800" y="4389120"/>
+            <a:ext cx="3611880" cy="1261872"/>
           </a:xfrm>
           <a:prstGeom prst="roundRect">
             <a:avLst>
-              <a:gd name="adj" fmla="val 7481"/>
+              <a:gd name="adj" fmla="val 8696"/>
             </a:avLst>
           </a:prstGeom>
           <a:solidFill>
@@ -12484,8 +12488,8 @@
         </p:nvSpPr>
         <p:spPr>
           <a:xfrm>
-            <a:off x="7799832" y="4330598"/>
-            <a:ext cx="3145536" cy="256032"/>
+            <a:off x="7708392" y="4517136"/>
+            <a:ext cx="3282696" cy="228600"/>
           </a:xfrm>
           <a:prstGeom prst="rect">
             <a:avLst/>
@@ -12501,7 +12505,7 @@
               <a:buNone/>
             </a:pPr>
             <a:r>
-              <a:rPr lang="en-US" sz="1300" b="1" dirty="0">
+              <a:rPr lang="en-US" sz="1220" b="1" dirty="0">
                 <a:solidFill>
                   <a:srgbClr val="0068B7"/>
                 </a:solidFill>
@@ -12511,7 +12515,7 @@
               </a:rPr>
               <a:t>What to produce</a:t>
             </a:r>
-            <a:endParaRPr lang="en-US" sz="1300" dirty="0"/>
+            <a:endParaRPr lang="en-US" sz="1220" dirty="0"/>
           </a:p>
         </p:txBody>
       </p:sp>
@@ -12523,8 +12527,8 @@
         </p:nvSpPr>
         <p:spPr>
           <a:xfrm>
-            <a:off x="7799832" y="4659782"/>
-            <a:ext cx="3145536" cy="899770"/>
+            <a:off x="7708392" y="4828032"/>
+            <a:ext cx="3282696" cy="749808"/>
           </a:xfrm>
           <a:prstGeom prst="rect">
             <a:avLst/>
@@ -12542,7 +12546,7 @@
               <a:buNone/>
             </a:pPr>
             <a:r>
-              <a:rPr lang="en-US" sz="1320" dirty="0">
+              <a:rPr lang="en-US" sz="1220" dirty="0">
                 <a:solidFill>
                   <a:srgbClr val="17364A"/>
                 </a:solidFill>
@@ -12550,9 +12554,9 @@
                 <a:ea typeface="Aptos" pitchFamily="34" charset="-122"/>
                 <a:cs typeface="Aptos" pitchFamily="34" charset="-120"/>
               </a:rPr>
-              <a:t>Use the assignment to test whether you can explain the concept, apply it to a realistic public health situation, and identify what would need review before the work moves forward.</a:t>
-            </a:r>
-            <a:endParaRPr lang="en-US" sz="1320" dirty="0"/>
+              <a:t>Use the assignment to test whether you can explain the concept, apply it to a.</a:t>
+            </a:r>
+            <a:endParaRPr lang="en-US" sz="1220" dirty="0"/>
           </a:p>
         </p:txBody>
       </p:sp>
@@ -12843,8 +12847,8 @@
         </p:nvSpPr>
         <p:spPr>
           <a:xfrm>
-            <a:off x="868680" y="1508760"/>
-            <a:ext cx="6309360" cy="4160520"/>
+            <a:off x="822960" y="1463040"/>
+            <a:ext cx="6565392" cy="4343400"/>
           </a:xfrm>
           <a:prstGeom prst="rect">
             <a:avLst/>
@@ -12862,7 +12866,7 @@
               <a:buNone/>
             </a:pPr>
             <a:r>
-              <a:rPr lang="en-US" sz="2100" dirty="0">
+              <a:rPr lang="en-US" sz="1920" dirty="0">
                 <a:solidFill>
                   <a:srgbClr val="003A63"/>
                 </a:solidFill>
@@ -12872,14 +12876,14 @@
               </a:rPr>
               <a:t>• NIST Artificial Intelligence Risk Management Framework:.</a:t>
             </a:r>
-            <a:endParaRPr lang="en-US" sz="2100" dirty="0"/>
-          </a:p>
-          <a:p>
-            <a:pPr indent="0" marL="0">
-              <a:buNone/>
-            </a:pPr>
-            <a:r>
-              <a:rPr lang="en-US" sz="2100" dirty="0">
+            <a:endParaRPr lang="en-US" sz="1920" dirty="0"/>
+          </a:p>
+          <a:p>
+            <a:pPr indent="0" marL="0">
+              <a:buNone/>
+            </a:pPr>
+            <a:r>
+              <a:rPr lang="en-US" sz="1920" dirty="0">
                 <a:solidFill>
                   <a:srgbClr val="003A63"/>
                 </a:solidFill>
@@ -12889,14 +12893,14 @@
               </a:rPr>
               <a:t>• NIST Generative AI Profile:.</a:t>
             </a:r>
-            <a:endParaRPr lang="en-US" sz="2100" dirty="0"/>
-          </a:p>
-          <a:p>
-            <a:pPr indent="0" marL="0">
-              <a:buNone/>
-            </a:pPr>
-            <a:r>
-              <a:rPr lang="en-US" sz="2100" dirty="0">
+            <a:endParaRPr lang="en-US" sz="1920" dirty="0"/>
+          </a:p>
+          <a:p>
+            <a:pPr indent="0" marL="0">
+              <a:buNone/>
+            </a:pPr>
+            <a:r>
+              <a:rPr lang="en-US" sz="1920" dirty="0">
                 <a:solidFill>
                   <a:srgbClr val="003A63"/>
                 </a:solidFill>
@@ -12906,7 +12910,7 @@
               </a:rPr>
               <a:t>• CDC Public Health Data Strategy and Data Modernization resources:.</a:t>
             </a:r>
-            <a:endParaRPr lang="en-US" sz="2100" dirty="0"/>
+            <a:endParaRPr lang="en-US" sz="1920" dirty="0"/>
           </a:p>
         </p:txBody>
       </p:sp>
@@ -12918,12 +12922,12 @@
         </p:nvSpPr>
         <p:spPr>
           <a:xfrm>
-            <a:off x="7635240" y="1325880"/>
-            <a:ext cx="3474720" cy="1207008"/>
+            <a:off x="7543800" y="1325880"/>
+            <a:ext cx="3611880" cy="1261872"/>
           </a:xfrm>
           <a:prstGeom prst="roundRect">
             <a:avLst>
-              <a:gd name="adj" fmla="val 9091"/>
+              <a:gd name="adj" fmla="val 8696"/>
             </a:avLst>
           </a:prstGeom>
           <a:solidFill>
@@ -12945,8 +12949,8 @@
         </p:nvSpPr>
         <p:spPr>
           <a:xfrm>
-            <a:off x="7799832" y="1472184"/>
-            <a:ext cx="3145536" cy="256032"/>
+            <a:off x="7708392" y="1453896"/>
+            <a:ext cx="3282696" cy="228600"/>
           </a:xfrm>
           <a:prstGeom prst="rect">
             <a:avLst/>
@@ -12962,7 +12966,7 @@
               <a:buNone/>
             </a:pPr>
             <a:r>
-              <a:rPr lang="en-US" sz="1300" b="1" dirty="0">
+              <a:rPr lang="en-US" sz="1220" b="1" dirty="0">
                 <a:solidFill>
                   <a:srgbClr val="0068B7"/>
                 </a:solidFill>
@@ -12972,7 +12976,7 @@
               </a:rPr>
               <a:t>Core concept</a:t>
             </a:r>
-            <a:endParaRPr lang="en-US" sz="1300" dirty="0"/>
+            <a:endParaRPr lang="en-US" sz="1220" dirty="0"/>
           </a:p>
         </p:txBody>
       </p:sp>
@@ -12984,8 +12988,8 @@
         </p:nvSpPr>
         <p:spPr>
           <a:xfrm>
-            <a:off x="7799832" y="1801368"/>
-            <a:ext cx="3145536" cy="640080"/>
+            <a:off x="7708392" y="1764792"/>
+            <a:ext cx="3282696" cy="749808"/>
           </a:xfrm>
           <a:prstGeom prst="rect">
             <a:avLst/>
@@ -13003,7 +13007,7 @@
               <a:buNone/>
             </a:pPr>
             <a:r>
-              <a:rPr lang="en-US" sz="1320" dirty="0">
+              <a:rPr lang="en-US" sz="1220" dirty="0">
                 <a:solidFill>
                   <a:srgbClr val="17364A"/>
                 </a:solidFill>
@@ -13013,7 +13017,7 @@
               </a:rPr>
               <a:t>NIST Artificial Intelligence Risk Management Framework:.</a:t>
             </a:r>
-            <a:endParaRPr lang="en-US" sz="1320" dirty="0"/>
+            <a:endParaRPr lang="en-US" sz="1220" dirty="0"/>
           </a:p>
         </p:txBody>
       </p:sp>
@@ -13025,12 +13029,12 @@
         </p:nvSpPr>
         <p:spPr>
           <a:xfrm>
-            <a:off x="7635240" y="2670048"/>
-            <a:ext cx="3474720" cy="1377086"/>
+            <a:off x="7543800" y="2724912"/>
+            <a:ext cx="3611880" cy="1527048"/>
           </a:xfrm>
           <a:prstGeom prst="roundRect">
             <a:avLst>
-              <a:gd name="adj" fmla="val 7968"/>
+              <a:gd name="adj" fmla="val 7186"/>
             </a:avLst>
           </a:prstGeom>
           <a:solidFill>
@@ -13052,8 +13056,8 @@
         </p:nvSpPr>
         <p:spPr>
           <a:xfrm>
-            <a:off x="7799832" y="2816352"/>
-            <a:ext cx="3145536" cy="256032"/>
+            <a:off x="7708392" y="2852928"/>
+            <a:ext cx="3282696" cy="228600"/>
           </a:xfrm>
           <a:prstGeom prst="rect">
             <a:avLst/>
@@ -13069,7 +13073,7 @@
               <a:buNone/>
             </a:pPr>
             <a:r>
-              <a:rPr lang="en-US" sz="1300" b="1" dirty="0">
+              <a:rPr lang="en-US" sz="1220" b="1" dirty="0">
                 <a:solidFill>
                   <a:srgbClr val="0068B7"/>
                 </a:solidFill>
@@ -13079,7 +13083,7 @@
               </a:rPr>
               <a:t>Concept checkpoints</a:t>
             </a:r>
-            <a:endParaRPr lang="en-US" sz="1300" dirty="0"/>
+            <a:endParaRPr lang="en-US" sz="1220" dirty="0"/>
           </a:p>
         </p:txBody>
       </p:sp>
@@ -13091,8 +13095,8 @@
         </p:nvSpPr>
         <p:spPr>
           <a:xfrm>
-            <a:off x="7818120" y="3182112"/>
-            <a:ext cx="3090672" cy="718718"/>
+            <a:off x="7726680" y="3182112"/>
+            <a:ext cx="3227832" cy="960120"/>
           </a:xfrm>
           <a:prstGeom prst="rect">
             <a:avLst/>
@@ -13110,7 +13114,7 @@
               <a:buNone/>
             </a:pPr>
             <a:r>
-              <a:rPr lang="en-US" sz="1220" dirty="0">
+              <a:rPr lang="en-US" sz="1140" dirty="0">
                 <a:solidFill>
                   <a:srgbClr val="17364A"/>
                 </a:solidFill>
@@ -13118,16 +13122,16 @@
                 <a:ea typeface="Aptos" pitchFamily="34" charset="-122"/>
                 <a:cs typeface="Aptos" pitchFamily="34" charset="-120"/>
               </a:rPr>
-              <a:t>NIST Artificial Intelligence Risk Management Framework:.</a:t>
-            </a:r>
-            <a:endParaRPr lang="en-US" sz="1220" dirty="0"/>
-          </a:p>
-          <a:p>
-            <a:pPr indent="0" marL="0">
-              <a:buNone/>
-            </a:pPr>
-            <a:r>
-              <a:rPr lang="en-US" sz="1220" dirty="0">
+              <a:t>NIST Artificial Intelligence Risk Management.</a:t>
+            </a:r>
+            <a:endParaRPr lang="en-US" sz="1140" dirty="0"/>
+          </a:p>
+          <a:p>
+            <a:pPr indent="0" marL="0">
+              <a:buNone/>
+            </a:pPr>
+            <a:r>
+              <a:rPr lang="en-US" sz="1140" dirty="0">
                 <a:solidFill>
                   <a:srgbClr val="17364A"/>
                 </a:solidFill>
@@ -13137,14 +13141,14 @@
               </a:rPr>
               <a:t>OWASP guidance for LLM application security</a:t>
             </a:r>
-            <a:endParaRPr lang="en-US" sz="1220" dirty="0"/>
-          </a:p>
-          <a:p>
-            <a:pPr indent="0" marL="0">
-              <a:buNone/>
-            </a:pPr>
-            <a:r>
-              <a:rPr lang="en-US" sz="1220" dirty="0">
+            <a:endParaRPr lang="en-US" sz="1140" dirty="0"/>
+          </a:p>
+          <a:p>
+            <a:pPr indent="0" marL="0">
+              <a:buNone/>
+            </a:pPr>
+            <a:r>
+              <a:rPr lang="en-US" sz="1140" dirty="0">
                 <a:solidFill>
                   <a:srgbClr val="17364A"/>
                 </a:solidFill>
@@ -13152,9 +13156,9 @@
                 <a:ea typeface="Aptos" pitchFamily="34" charset="-122"/>
                 <a:cs typeface="Aptos" pitchFamily="34" charset="-120"/>
               </a:rPr>
-              <a:t>Agency policies for privacy, cybersecurity, records, procurement,.</a:t>
-            </a:r>
-            <a:endParaRPr lang="en-US" sz="1220" dirty="0"/>
+              <a:t>Agency policies for privacy, cybersecurity,.</a:t>
+            </a:r>
+            <a:endParaRPr lang="en-US" sz="1140" dirty="0"/>
           </a:p>
         </p:txBody>
       </p:sp>
@@ -13166,12 +13170,12 @@
         </p:nvSpPr>
         <p:spPr>
           <a:xfrm>
-            <a:off x="7635240" y="4184294"/>
-            <a:ext cx="3474720" cy="1466698"/>
+            <a:off x="7543800" y="4389120"/>
+            <a:ext cx="3611880" cy="1261872"/>
           </a:xfrm>
           <a:prstGeom prst="roundRect">
             <a:avLst>
-              <a:gd name="adj" fmla="val 7481"/>
+              <a:gd name="adj" fmla="val 8696"/>
             </a:avLst>
           </a:prstGeom>
           <a:solidFill>
@@ -13193,8 +13197,8 @@
         </p:nvSpPr>
         <p:spPr>
           <a:xfrm>
-            <a:off x="7799832" y="4330598"/>
-            <a:ext cx="3145536" cy="256032"/>
+            <a:off x="7708392" y="4517136"/>
+            <a:ext cx="3282696" cy="228600"/>
           </a:xfrm>
           <a:prstGeom prst="rect">
             <a:avLst/>
@@ -13210,7 +13214,7 @@
               <a:buNone/>
             </a:pPr>
             <a:r>
-              <a:rPr lang="en-US" sz="1300" b="1" dirty="0">
+              <a:rPr lang="en-US" sz="1220" b="1" dirty="0">
                 <a:solidFill>
                   <a:srgbClr val="0068B7"/>
                 </a:solidFill>
@@ -13220,7 +13224,7 @@
               </a:rPr>
               <a:t>Apply it</a:t>
             </a:r>
-            <a:endParaRPr lang="en-US" sz="1300" dirty="0"/>
+            <a:endParaRPr lang="en-US" sz="1220" dirty="0"/>
           </a:p>
         </p:txBody>
       </p:sp>
@@ -13232,8 +13236,8 @@
         </p:nvSpPr>
         <p:spPr>
           <a:xfrm>
-            <a:off x="7799832" y="4659782"/>
-            <a:ext cx="3145536" cy="899770"/>
+            <a:off x="7708392" y="4828032"/>
+            <a:ext cx="3282696" cy="749808"/>
           </a:xfrm>
           <a:prstGeom prst="rect">
             <a:avLst/>
@@ -13251,7 +13255,7 @@
               <a:buNone/>
             </a:pPr>
             <a:r>
-              <a:rPr lang="en-US" sz="1320" dirty="0">
+              <a:rPr lang="en-US" sz="1220" dirty="0">
                 <a:solidFill>
                   <a:srgbClr val="17364A"/>
                 </a:solidFill>
@@ -13259,9 +13263,9 @@
                 <a:ea typeface="Aptos" pitchFamily="34" charset="-122"/>
                 <a:cs typeface="Aptos" pitchFamily="34" charset="-120"/>
               </a:rPr>
-              <a:t>Connect the concept to public health purpose, responsible use, required safeguards, documentation, and the next action a department should take.</a:t>
-            </a:r>
-            <a:endParaRPr lang="en-US" sz="1320" dirty="0"/>
+              <a:t>Connect the concept to public health purpose, responsible use, required.</a:t>
+            </a:r>
+            <a:endParaRPr lang="en-US" sz="1220" dirty="0"/>
           </a:p>
         </p:txBody>
       </p:sp>
@@ -13552,8 +13556,8 @@
         </p:nvSpPr>
         <p:spPr>
           <a:xfrm>
-            <a:off x="868680" y="1508760"/>
-            <a:ext cx="6309360" cy="4160520"/>
+            <a:off x="822960" y="1463040"/>
+            <a:ext cx="6565392" cy="4343400"/>
           </a:xfrm>
           <a:prstGeom prst="rect">
             <a:avLst/>
@@ -13571,7 +13575,7 @@
               <a:buNone/>
             </a:pPr>
             <a:r>
-              <a:rPr lang="en-US" sz="2100" dirty="0">
+              <a:rPr lang="en-US" sz="1920" dirty="0">
                 <a:solidFill>
                   <a:srgbClr val="003A63"/>
                 </a:solidFill>
@@ -13579,9 +13583,9 @@
                 <a:ea typeface="Aptos" pitchFamily="34" charset="-122"/>
                 <a:cs typeface="Aptos" pitchFamily="34" charset="-120"/>
               </a:rPr>
-              <a:t>• Relevant public health program SOPs, data governance documentation, and implementation plans</a:t>
-            </a:r>
-            <a:endParaRPr lang="en-US" sz="2100" dirty="0"/>
+              <a:t>• Relevant public health program SOPs, data governance documentation, and.</a:t>
+            </a:r>
+            <a:endParaRPr lang="en-US" sz="1920" dirty="0"/>
           </a:p>
         </p:txBody>
       </p:sp>
@@ -13593,12 +13597,12 @@
         </p:nvSpPr>
         <p:spPr>
           <a:xfrm>
-            <a:off x="7635240" y="1325880"/>
-            <a:ext cx="3474720" cy="1207008"/>
+            <a:off x="7543800" y="1325880"/>
+            <a:ext cx="3611880" cy="1261872"/>
           </a:xfrm>
           <a:prstGeom prst="roundRect">
             <a:avLst>
-              <a:gd name="adj" fmla="val 9091"/>
+              <a:gd name="adj" fmla="val 8696"/>
             </a:avLst>
           </a:prstGeom>
           <a:solidFill>
@@ -13620,8 +13624,8 @@
         </p:nvSpPr>
         <p:spPr>
           <a:xfrm>
-            <a:off x="7799832" y="1472184"/>
-            <a:ext cx="3145536" cy="256032"/>
+            <a:off x="7708392" y="1453896"/>
+            <a:ext cx="3282696" cy="228600"/>
           </a:xfrm>
           <a:prstGeom prst="rect">
             <a:avLst/>
@@ -13637,7 +13641,7 @@
               <a:buNone/>
             </a:pPr>
             <a:r>
-              <a:rPr lang="en-US" sz="1300" b="1" dirty="0">
+              <a:rPr lang="en-US" sz="1220" b="1" dirty="0">
                 <a:solidFill>
                   <a:srgbClr val="0068B7"/>
                 </a:solidFill>
@@ -13647,7 +13651,7 @@
               </a:rPr>
               <a:t>Core concept</a:t>
             </a:r>
-            <a:endParaRPr lang="en-US" sz="1300" dirty="0"/>
+            <a:endParaRPr lang="en-US" sz="1220" dirty="0"/>
           </a:p>
         </p:txBody>
       </p:sp>
@@ -13659,8 +13663,8 @@
         </p:nvSpPr>
         <p:spPr>
           <a:xfrm>
-            <a:off x="7799832" y="1801368"/>
-            <a:ext cx="3145536" cy="640080"/>
+            <a:off x="7708392" y="1764792"/>
+            <a:ext cx="3282696" cy="749808"/>
           </a:xfrm>
           <a:prstGeom prst="rect">
             <a:avLst/>
@@ -13678,7 +13682,7 @@
               <a:buNone/>
             </a:pPr>
             <a:r>
-              <a:rPr lang="en-US" sz="1320" dirty="0">
+              <a:rPr lang="en-US" sz="1220" dirty="0">
                 <a:solidFill>
                   <a:srgbClr val="17364A"/>
                 </a:solidFill>
@@ -13686,9 +13690,9 @@
                 <a:ea typeface="Aptos" pitchFamily="34" charset="-122"/>
                 <a:cs typeface="Aptos" pitchFamily="34" charset="-120"/>
               </a:rPr>
-              <a:t>Relevant public health program SOPs, data governance documentation, and implementation.</a:t>
-            </a:r>
-            <a:endParaRPr lang="en-US" sz="1320" dirty="0"/>
+              <a:t>Relevant public health program SOPs, data governance documentation, and.</a:t>
+            </a:r>
+            <a:endParaRPr lang="en-US" sz="1220" dirty="0"/>
           </a:p>
         </p:txBody>
       </p:sp>
@@ -13700,12 +13704,12 @@
         </p:nvSpPr>
         <p:spPr>
           <a:xfrm>
-            <a:off x="7635240" y="2670048"/>
-            <a:ext cx="3474720" cy="1377086"/>
+            <a:off x="7543800" y="2724912"/>
+            <a:ext cx="3611880" cy="1527048"/>
           </a:xfrm>
           <a:prstGeom prst="roundRect">
             <a:avLst>
-              <a:gd name="adj" fmla="val 7968"/>
+              <a:gd name="adj" fmla="val 7186"/>
             </a:avLst>
           </a:prstGeom>
           <a:solidFill>
@@ -13727,8 +13731,8 @@
         </p:nvSpPr>
         <p:spPr>
           <a:xfrm>
-            <a:off x="7799832" y="2816352"/>
-            <a:ext cx="3145536" cy="256032"/>
+            <a:off x="7708392" y="2852928"/>
+            <a:ext cx="3282696" cy="228600"/>
           </a:xfrm>
           <a:prstGeom prst="rect">
             <a:avLst/>
@@ -13744,7 +13748,7 @@
               <a:buNone/>
             </a:pPr>
             <a:r>
-              <a:rPr lang="en-US" sz="1300" b="1" dirty="0">
+              <a:rPr lang="en-US" sz="1220" b="1" dirty="0">
                 <a:solidFill>
                   <a:srgbClr val="0068B7"/>
                 </a:solidFill>
@@ -13754,7 +13758,7 @@
               </a:rPr>
               <a:t>Concept checkpoints</a:t>
             </a:r>
-            <a:endParaRPr lang="en-US" sz="1300" dirty="0"/>
+            <a:endParaRPr lang="en-US" sz="1220" dirty="0"/>
           </a:p>
         </p:txBody>
       </p:sp>
@@ -13766,8 +13770,8 @@
         </p:nvSpPr>
         <p:spPr>
           <a:xfrm>
-            <a:off x="7818120" y="3182112"/>
-            <a:ext cx="3090672" cy="718718"/>
+            <a:off x="7726680" y="3182112"/>
+            <a:ext cx="3227832" cy="960120"/>
           </a:xfrm>
           <a:prstGeom prst="rect">
             <a:avLst/>
@@ -13785,7 +13789,7 @@
               <a:buNone/>
             </a:pPr>
             <a:r>
-              <a:rPr lang="en-US" sz="1220" dirty="0">
+              <a:rPr lang="en-US" sz="1140" dirty="0">
                 <a:solidFill>
                   <a:srgbClr val="17364A"/>
                 </a:solidFill>
@@ -13793,9 +13797,9 @@
                 <a:ea typeface="Aptos" pitchFamily="34" charset="-122"/>
                 <a:cs typeface="Aptos" pitchFamily="34" charset="-120"/>
               </a:rPr>
-              <a:t>Relevant public health program SOPs, data governance.</a:t>
-            </a:r>
-            <a:endParaRPr lang="en-US" sz="1220" dirty="0"/>
+              <a:t>Relevant public health program SOPs, data.</a:t>
+            </a:r>
+            <a:endParaRPr lang="en-US" sz="1140" dirty="0"/>
           </a:p>
         </p:txBody>
       </p:sp>
@@ -13807,12 +13811,12 @@
         </p:nvSpPr>
         <p:spPr>
           <a:xfrm>
-            <a:off x="7635240" y="4184294"/>
-            <a:ext cx="3474720" cy="1466698"/>
+            <a:off x="7543800" y="4389120"/>
+            <a:ext cx="3611880" cy="1261872"/>
           </a:xfrm>
           <a:prstGeom prst="roundRect">
             <a:avLst>
-              <a:gd name="adj" fmla="val 7481"/>
+              <a:gd name="adj" fmla="val 8696"/>
             </a:avLst>
           </a:prstGeom>
           <a:solidFill>
@@ -13834,8 +13838,8 @@
         </p:nvSpPr>
         <p:spPr>
           <a:xfrm>
-            <a:off x="7799832" y="4330598"/>
-            <a:ext cx="3145536" cy="256032"/>
+            <a:off x="7708392" y="4517136"/>
+            <a:ext cx="3282696" cy="228600"/>
           </a:xfrm>
           <a:prstGeom prst="rect">
             <a:avLst/>
@@ -13851,7 +13855,7 @@
               <a:buNone/>
             </a:pPr>
             <a:r>
-              <a:rPr lang="en-US" sz="1300" b="1" dirty="0">
+              <a:rPr lang="en-US" sz="1220" b="1" dirty="0">
                 <a:solidFill>
                   <a:srgbClr val="0068B7"/>
                 </a:solidFill>
@@ -13861,7 +13865,7 @@
               </a:rPr>
               <a:t>Apply it</a:t>
             </a:r>
-            <a:endParaRPr lang="en-US" sz="1300" dirty="0"/>
+            <a:endParaRPr lang="en-US" sz="1220" dirty="0"/>
           </a:p>
         </p:txBody>
       </p:sp>
@@ -13873,8 +13877,8 @@
         </p:nvSpPr>
         <p:spPr>
           <a:xfrm>
-            <a:off x="7799832" y="4659782"/>
-            <a:ext cx="3145536" cy="899770"/>
+            <a:off x="7708392" y="4828032"/>
+            <a:ext cx="3282696" cy="749808"/>
           </a:xfrm>
           <a:prstGeom prst="rect">
             <a:avLst/>
@@ -13892,7 +13896,7 @@
               <a:buNone/>
             </a:pPr>
             <a:r>
-              <a:rPr lang="en-US" sz="1320" dirty="0">
+              <a:rPr lang="en-US" sz="1220" dirty="0">
                 <a:solidFill>
                   <a:srgbClr val="17364A"/>
                 </a:solidFill>
@@ -13900,9 +13904,9 @@
                 <a:ea typeface="Aptos" pitchFamily="34" charset="-122"/>
                 <a:cs typeface="Aptos" pitchFamily="34" charset="-120"/>
               </a:rPr>
-              <a:t>Connect the concept to public health purpose, responsible use, required safeguards, documentation, and the next action a department should take.</a:t>
-            </a:r>
-            <a:endParaRPr lang="en-US" sz="1320" dirty="0"/>
+              <a:t>Connect the concept to public health purpose, responsible use, required.</a:t>
+            </a:r>
+            <a:endParaRPr lang="en-US" sz="1220" dirty="0"/>
           </a:p>
         </p:txBody>
       </p:sp>
@@ -14220,7 +14224,7 @@
                 <a:ea typeface="Aptos" pitchFamily="34" charset="-122"/>
                 <a:cs typeface="Aptos" pitchFamily="34" charset="-120"/>
               </a:rPr>
-              <a:t>• Play 7: Prioritize Use Cases - This lesson informs Play 7 by helping learners connect the.</a:t>
+              <a:t>• Play 7: Prioritize Use Cases - This lesson informs Play 7 by helping.</a:t>
             </a:r>
             <a:endParaRPr lang="en-US" sz="1900" dirty="0"/>
           </a:p>
@@ -14237,7 +14241,7 @@
                 <a:ea typeface="Aptos" pitchFamily="34" charset="-122"/>
                 <a:cs typeface="Aptos" pitchFamily="34" charset="-120"/>
               </a:rPr>
-              <a:t>• Play 11: Build and Deploy AI Solutions - This lesson informs Play 11 by helping learners.</a:t>
+              <a:t>• Play 11: Build and Deploy AI Solutions - This lesson informs Play 11 by.</a:t>
             </a:r>
             <a:endParaRPr lang="en-US" sz="1900" dirty="0"/>
           </a:p>
@@ -14254,7 +14258,7 @@
                 <a:ea typeface="Aptos" pitchFamily="34" charset="-122"/>
                 <a:cs typeface="Aptos" pitchFamily="34" charset="-120"/>
               </a:rPr>
-              <a:t>• Play 1: Vision &amp; Guardrails - This lesson informs Play 1 by helping learners connect the.</a:t>
+              <a:t>• Play 1: Vision &amp; Guardrails - This lesson informs Play 1 by helping learners.</a:t>
             </a:r>
             <a:endParaRPr lang="en-US" sz="1900" dirty="0"/>
           </a:p>
@@ -14271,7 +14275,7 @@
                 <a:ea typeface="Aptos" pitchFamily="34" charset="-122"/>
                 <a:cs typeface="Aptos" pitchFamily="34" charset="-120"/>
               </a:rPr>
-              <a:t>• Play 2: Readiness Assessment - This lesson informs Play 2 by helping learners connect the.</a:t>
+              <a:t>• Play 2: Readiness Assessment - This lesson informs Play 2 by helping.</a:t>
             </a:r>
             <a:endParaRPr lang="en-US" sz="1900" dirty="0"/>
           </a:p>
@@ -14312,8 +14316,8 @@
         </p:nvSpPr>
         <p:spPr>
           <a:xfrm>
-            <a:off x="8211312" y="1563624"/>
-            <a:ext cx="2734056" cy="256032"/>
+            <a:off x="8211312" y="1545336"/>
+            <a:ext cx="2734056" cy="228600"/>
           </a:xfrm>
           <a:prstGeom prst="rect">
             <a:avLst/>
@@ -14329,7 +14333,7 @@
               <a:buNone/>
             </a:pPr>
             <a:r>
-              <a:rPr lang="en-US" sz="1300" b="1" dirty="0">
+              <a:rPr lang="en-US" sz="1220" b="1" dirty="0">
                 <a:solidFill>
                   <a:srgbClr val="0068B7"/>
                 </a:solidFill>
@@ -14339,7 +14343,7 @@
               </a:rPr>
               <a:t>Apply the lesson</a:t>
             </a:r>
-            <a:endParaRPr lang="en-US" sz="1300" dirty="0"/>
+            <a:endParaRPr lang="en-US" sz="1220" dirty="0"/>
           </a:p>
         </p:txBody>
       </p:sp>
@@ -14351,8 +14355,8 @@
         </p:nvSpPr>
         <p:spPr>
           <a:xfrm>
-            <a:off x="8211312" y="1892808"/>
-            <a:ext cx="2734056" cy="1536192"/>
+            <a:off x="8211312" y="1856232"/>
+            <a:ext cx="2734056" cy="1591056"/>
           </a:xfrm>
           <a:prstGeom prst="rect">
             <a:avLst/>
@@ -14370,7 +14374,7 @@
               <a:buNone/>
             </a:pPr>
             <a:r>
-              <a:rPr lang="en-US" sz="1320" dirty="0">
+              <a:rPr lang="en-US" sz="1220" dirty="0">
                 <a:solidFill>
                   <a:srgbClr val="17364A"/>
                 </a:solidFill>
@@ -14378,9 +14382,9 @@
                 <a:ea typeface="Aptos" pitchFamily="34" charset="-122"/>
                 <a:cs typeface="Aptos" pitchFamily="34" charset="-120"/>
               </a:rPr>
-              <a:t>Use the related plays to identify decisions, participants, timing, approvals, and documentation needed for responsible implementation.</a:t>
-            </a:r>
-            <a:endParaRPr lang="en-US" sz="1320" dirty="0"/>
+              <a:t>Use the related plays to identify decisions, participants, timing, approvals,.</a:t>
+            </a:r>
+            <a:endParaRPr lang="en-US" sz="1220" dirty="0"/>
           </a:p>
         </p:txBody>
       </p:sp>
@@ -14419,8 +14423,8 @@
         </p:nvSpPr>
         <p:spPr>
           <a:xfrm>
-            <a:off x="8211312" y="3941064"/>
-            <a:ext cx="2734056" cy="256032"/>
+            <a:off x="8211312" y="3922776"/>
+            <a:ext cx="2734056" cy="228600"/>
           </a:xfrm>
           <a:prstGeom prst="rect">
             <a:avLst/>
@@ -14436,7 +14440,7 @@
               <a:buNone/>
             </a:pPr>
             <a:r>
-              <a:rPr lang="en-US" sz="1300" b="1" dirty="0">
+              <a:rPr lang="en-US" sz="1220" b="1" dirty="0">
                 <a:solidFill>
                   <a:srgbClr val="0068B7"/>
                 </a:solidFill>
@@ -14446,7 +14450,7 @@
               </a:rPr>
               <a:t>Use the play links to</a:t>
             </a:r>
-            <a:endParaRPr lang="en-US" sz="1300" dirty="0"/>
+            <a:endParaRPr lang="en-US" sz="1220" dirty="0"/>
           </a:p>
         </p:txBody>
       </p:sp>
@@ -14458,8 +14462,8 @@
         </p:nvSpPr>
         <p:spPr>
           <a:xfrm>
-            <a:off x="8229600" y="4306824"/>
-            <a:ext cx="2679192" cy="941832"/>
+            <a:off x="8229600" y="4251960"/>
+            <a:ext cx="2679192" cy="1033272"/>
           </a:xfrm>
           <a:prstGeom prst="rect">
             <a:avLst/>
@@ -14477,7 +14481,7 @@
               <a:buNone/>
             </a:pPr>
             <a:r>
-              <a:rPr lang="en-US" sz="1220" dirty="0">
+              <a:rPr lang="en-US" sz="1140" dirty="0">
                 <a:solidFill>
                   <a:srgbClr val="17364A"/>
                 </a:solidFill>
@@ -14487,14 +14491,14 @@
               </a:rPr>
               <a:t>Locate the decision point in the playbook sequence.</a:t>
             </a:r>
-            <a:endParaRPr lang="en-US" sz="1220" dirty="0"/>
-          </a:p>
-          <a:p>
-            <a:pPr indent="0" marL="0">
-              <a:buNone/>
-            </a:pPr>
-            <a:r>
-              <a:rPr lang="en-US" sz="1220" dirty="0">
+            <a:endParaRPr lang="en-US" sz="1140" dirty="0"/>
+          </a:p>
+          <a:p>
+            <a:pPr indent="0" marL="0">
+              <a:buNone/>
+            </a:pPr>
+            <a:r>
+              <a:rPr lang="en-US" sz="1140" dirty="0">
                 <a:solidFill>
                   <a:srgbClr val="17364A"/>
                 </a:solidFill>
@@ -14504,14 +14508,14 @@
               </a:rPr>
               <a:t>Identify who should participate in the work.</a:t>
             </a:r>
-            <a:endParaRPr lang="en-US" sz="1220" dirty="0"/>
-          </a:p>
-          <a:p>
-            <a:pPr indent="0" marL="0">
-              <a:buNone/>
-            </a:pPr>
-            <a:r>
-              <a:rPr lang="en-US" sz="1220" dirty="0">
+            <a:endParaRPr lang="en-US" sz="1140" dirty="0"/>
+          </a:p>
+          <a:p>
+            <a:pPr indent="0" marL="0">
+              <a:buNone/>
+            </a:pPr>
+            <a:r>
+              <a:rPr lang="en-US" sz="1140" dirty="0">
                 <a:solidFill>
                   <a:srgbClr val="17364A"/>
                 </a:solidFill>
@@ -14519,9 +14523,9 @@
                 <a:ea typeface="Aptos" pitchFamily="34" charset="-122"/>
                 <a:cs typeface="Aptos" pitchFamily="34" charset="-120"/>
               </a:rPr>
-              <a:t>Document the review, approval, or implementation step.</a:t>
-            </a:r>
-            <a:endParaRPr lang="en-US" sz="1220" dirty="0"/>
+              <a:t>Document the review, approval, or implementation.</a:t>
+            </a:r>
+            <a:endParaRPr lang="en-US" sz="1140" dirty="0"/>
           </a:p>
         </p:txBody>
       </p:sp>
@@ -14839,7 +14843,7 @@
                 <a:ea typeface="Aptos" pitchFamily="34" charset="-122"/>
                 <a:cs typeface="Aptos" pitchFamily="34" charset="-120"/>
               </a:rPr>
-              <a:t>• Tool 3: Equity Impact Assessment Checklist (Checklist) - Use this tool to complete or.</a:t>
+              <a:t>• Tool 3: Equity Impact Assessment Checklist (Checklist) - Use this tool to.</a:t>
             </a:r>
             <a:endParaRPr lang="en-US" sz="1850" dirty="0"/>
           </a:p>
@@ -14856,7 +14860,7 @@
                 <a:ea typeface="Aptos" pitchFamily="34" charset="-122"/>
                 <a:cs typeface="Aptos" pitchFamily="34" charset="-120"/>
               </a:rPr>
-              <a:t>• Tool 4: AI Policy Landscape Scan (Worksheet) - Use AI Policy Landscape Scan to translate this.</a:t>
+              <a:t>• Tool 4: AI Policy Landscape Scan (Worksheet) - Use AI Policy Landscape Scan.</a:t>
             </a:r>
             <a:endParaRPr lang="en-US" sz="1850" dirty="0"/>
           </a:p>
@@ -14873,7 +14877,7 @@
                 <a:ea typeface="Aptos" pitchFamily="34" charset="-122"/>
                 <a:cs typeface="Aptos" pitchFamily="34" charset="-120"/>
               </a:rPr>
-              <a:t>• Tool 5: AI Environmental and Resource Impact Review (Checklist) - Use AI Environmental and.</a:t>
+              <a:t>• Tool 5: AI Environmental and Resource Impact Review (Checklist) - Use AI.</a:t>
             </a:r>
             <a:endParaRPr lang="en-US" sz="1850" dirty="0"/>
           </a:p>
@@ -14890,7 +14894,7 @@
                 <a:ea typeface="Aptos" pitchFamily="34" charset="-122"/>
                 <a:cs typeface="Aptos" pitchFamily="34" charset="-120"/>
               </a:rPr>
-              <a:t>• Tool 6: Human-Centered AI Decision Rule Checklist (Checklist) - Use Human-Centered AI Decision.</a:t>
+              <a:t>• Tool 6: Human-Centered AI Decision Rule Checklist (Checklist) - Use.</a:t>
             </a:r>
             <a:endParaRPr lang="en-US" sz="1850" dirty="0"/>
           </a:p>
@@ -14931,8 +14935,8 @@
         </p:nvSpPr>
         <p:spPr>
           <a:xfrm>
-            <a:off x="8211312" y="1563624"/>
-            <a:ext cx="2734056" cy="256032"/>
+            <a:off x="8211312" y="1545336"/>
+            <a:ext cx="2734056" cy="228600"/>
           </a:xfrm>
           <a:prstGeom prst="rect">
             <a:avLst/>
@@ -14948,7 +14952,7 @@
               <a:buNone/>
             </a:pPr>
             <a:r>
-              <a:rPr lang="en-US" sz="1300" b="1" dirty="0">
+              <a:rPr lang="en-US" sz="1220" b="1" dirty="0">
                 <a:solidFill>
                   <a:srgbClr val="0068B7"/>
                 </a:solidFill>
@@ -14958,7 +14962,7 @@
               </a:rPr>
               <a:t>Use the tools</a:t>
             </a:r>
-            <a:endParaRPr lang="en-US" sz="1300" dirty="0"/>
+            <a:endParaRPr lang="en-US" sz="1220" dirty="0"/>
           </a:p>
         </p:txBody>
       </p:sp>
@@ -14970,8 +14974,8 @@
         </p:nvSpPr>
         <p:spPr>
           <a:xfrm>
-            <a:off x="8211312" y="1892808"/>
-            <a:ext cx="2734056" cy="1536192"/>
+            <a:off x="8211312" y="1856232"/>
+            <a:ext cx="2734056" cy="1591056"/>
           </a:xfrm>
           <a:prstGeom prst="rect">
             <a:avLst/>
@@ -14989,7 +14993,7 @@
               <a:buNone/>
             </a:pPr>
             <a:r>
-              <a:rPr lang="en-US" sz="1320" dirty="0">
+              <a:rPr lang="en-US" sz="1220" dirty="0">
                 <a:solidFill>
                   <a:srgbClr val="17364A"/>
                 </a:solidFill>
@@ -14997,9 +15001,9 @@
                 <a:ea typeface="Aptos" pitchFamily="34" charset="-122"/>
                 <a:cs typeface="Aptos" pitchFamily="34" charset="-120"/>
               </a:rPr>
-              <a:t>Use linked tools when your department needs a structured worksheet, template, checklist, review process, or documentation artifact.</a:t>
-            </a:r>
-            <a:endParaRPr lang="en-US" sz="1320" dirty="0"/>
+              <a:t>Use linked tools when your department needs a structured worksheet, template,.</a:t>
+            </a:r>
+            <a:endParaRPr lang="en-US" sz="1220" dirty="0"/>
           </a:p>
         </p:txBody>
       </p:sp>
@@ -15038,8 +15042,8 @@
         </p:nvSpPr>
         <p:spPr>
           <a:xfrm>
-            <a:off x="8211312" y="3941064"/>
-            <a:ext cx="2734056" cy="256032"/>
+            <a:off x="8211312" y="3922776"/>
+            <a:ext cx="2734056" cy="228600"/>
           </a:xfrm>
           <a:prstGeom prst="rect">
             <a:avLst/>
@@ -15055,7 +15059,7 @@
               <a:buNone/>
             </a:pPr>
             <a:r>
-              <a:rPr lang="en-US" sz="1300" b="1" dirty="0">
+              <a:rPr lang="en-US" sz="1220" b="1" dirty="0">
                 <a:solidFill>
                   <a:srgbClr val="0068B7"/>
                 </a:solidFill>
@@ -15065,7 +15069,7 @@
               </a:rPr>
               <a:t>Tool selection cues</a:t>
             </a:r>
-            <a:endParaRPr lang="en-US" sz="1300" dirty="0"/>
+            <a:endParaRPr lang="en-US" sz="1220" dirty="0"/>
           </a:p>
         </p:txBody>
       </p:sp>
@@ -15077,8 +15081,8 @@
         </p:nvSpPr>
         <p:spPr>
           <a:xfrm>
-            <a:off x="8229600" y="4306824"/>
-            <a:ext cx="2679192" cy="941832"/>
+            <a:off x="8229600" y="4251960"/>
+            <a:ext cx="2679192" cy="1033272"/>
           </a:xfrm>
           <a:prstGeom prst="rect">
             <a:avLst/>
@@ -15096,7 +15100,7 @@
               <a:buNone/>
             </a:pPr>
             <a:r>
-              <a:rPr lang="en-US" sz="1220" dirty="0">
+              <a:rPr lang="en-US" sz="1140" dirty="0">
                 <a:solidFill>
                   <a:srgbClr val="17364A"/>
                 </a:solidFill>
@@ -15106,14 +15110,14 @@
               </a:rPr>
               <a:t>Use a tool when no comparable local process exists.</a:t>
             </a:r>
-            <a:endParaRPr lang="en-US" sz="1220" dirty="0"/>
-          </a:p>
-          <a:p>
-            <a:pPr indent="0" marL="0">
-              <a:buNone/>
-            </a:pPr>
-            <a:r>
-              <a:rPr lang="en-US" sz="1220" dirty="0">
+            <a:endParaRPr lang="en-US" sz="1140" dirty="0"/>
+          </a:p>
+          <a:p>
+            <a:pPr indent="0" marL="0">
+              <a:buNone/>
+            </a:pPr>
+            <a:r>
+              <a:rPr lang="en-US" sz="1140" dirty="0">
                 <a:solidFill>
                   <a:srgbClr val="17364A"/>
                 </a:solidFill>
@@ -15121,16 +15125,16 @@
                 <a:ea typeface="Aptos" pitchFamily="34" charset="-122"/>
                 <a:cs typeface="Aptos" pitchFamily="34" charset="-120"/>
               </a:rPr>
-              <a:t>Adapt existing department templates when they already fit the.</a:t>
-            </a:r>
-            <a:endParaRPr lang="en-US" sz="1220" dirty="0"/>
-          </a:p>
-          <a:p>
-            <a:pPr indent="0" marL="0">
-              <a:buNone/>
-            </a:pPr>
-            <a:r>
-              <a:rPr lang="en-US" sz="1220" dirty="0">
+              <a:t>Adapt existing department templates when they.</a:t>
+            </a:r>
+            <a:endParaRPr lang="en-US" sz="1140" dirty="0"/>
+          </a:p>
+          <a:p>
+            <a:pPr indent="0" marL="0">
+              <a:buNone/>
+            </a:pPr>
+            <a:r>
+              <a:rPr lang="en-US" sz="1140" dirty="0">
                 <a:solidFill>
                   <a:srgbClr val="17364A"/>
                 </a:solidFill>
@@ -15138,9 +15142,9 @@
                 <a:ea typeface="Aptos" pitchFamily="34" charset="-122"/>
                 <a:cs typeface="Aptos" pitchFamily="34" charset="-120"/>
               </a:rPr>
-              <a:t>Save the completed artifact as evidence of the decision.</a:t>
-            </a:r>
-            <a:endParaRPr lang="en-US" sz="1220" dirty="0"/>
+              <a:t>Save the completed artifact as evidence of the.</a:t>
+            </a:r>
+            <a:endParaRPr lang="en-US" sz="1140" dirty="0"/>
           </a:p>
         </p:txBody>
       </p:sp>
@@ -15431,8 +15435,8 @@
         </p:nvSpPr>
         <p:spPr>
           <a:xfrm>
-            <a:off x="868680" y="1508760"/>
-            <a:ext cx="6309360" cy="4160520"/>
+            <a:off x="822960" y="1463040"/>
+            <a:ext cx="6565392" cy="4343400"/>
           </a:xfrm>
           <a:prstGeom prst="rect">
             <a:avLst/>
@@ -15450,7 +15454,7 @@
               <a:buNone/>
             </a:pPr>
             <a:r>
-              <a:rPr lang="en-US" sz="2100" dirty="0">
+              <a:rPr lang="en-US" sz="1920" dirty="0">
                 <a:solidFill>
                   <a:srgbClr val="003A63"/>
                 </a:solidFill>
@@ -15460,14 +15464,14 @@
               </a:rPr>
               <a:t>• Identify case investigation and outbreak response tasks that AI may support.</a:t>
             </a:r>
-            <a:endParaRPr lang="en-US" sz="2100" dirty="0"/>
-          </a:p>
-          <a:p>
-            <a:pPr indent="0" marL="0">
-              <a:buNone/>
-            </a:pPr>
-            <a:r>
-              <a:rPr lang="en-US" sz="2100" dirty="0">
+            <a:endParaRPr lang="en-US" sz="1920" dirty="0"/>
+          </a:p>
+          <a:p>
+            <a:pPr indent="0" marL="0">
+              <a:buNone/>
+            </a:pPr>
+            <a:r>
+              <a:rPr lang="en-US" sz="1920" dirty="0">
                 <a:solidFill>
                   <a:srgbClr val="003A63"/>
                 </a:solidFill>
@@ -15475,16 +15479,16 @@
                 <a:ea typeface="Aptos" pitchFamily="34" charset="-122"/>
                 <a:cs typeface="Aptos" pitchFamily="34" charset="-120"/>
               </a:rPr>
-              <a:t>• Distinguish between AI-supported triage, summarization, extraction, signal detection, and.</a:t>
-            </a:r>
-            <a:endParaRPr lang="en-US" sz="2100" dirty="0"/>
-          </a:p>
-          <a:p>
-            <a:pPr indent="0" marL="0">
-              <a:buNone/>
-            </a:pPr>
-            <a:r>
-              <a:rPr lang="en-US" sz="2100" dirty="0">
+              <a:t>• Distinguish between AI-supported triage, summarization, extraction, signal.</a:t>
+            </a:r>
+            <a:endParaRPr lang="en-US" sz="1920" dirty="0"/>
+          </a:p>
+          <a:p>
+            <a:pPr indent="0" marL="0">
+              <a:buNone/>
+            </a:pPr>
+            <a:r>
+              <a:rPr lang="en-US" sz="1920" dirty="0">
                 <a:solidFill>
                   <a:srgbClr val="003A63"/>
                 </a:solidFill>
@@ -15492,9 +15496,9 @@
                 <a:ea typeface="Aptos" pitchFamily="34" charset="-122"/>
                 <a:cs typeface="Aptos" pitchFamily="34" charset="-120"/>
               </a:rPr>
-              <a:t>• Assess data quality, timeliness, source traceability, and equity risks in AI-supported response.</a:t>
-            </a:r>
-            <a:endParaRPr lang="en-US" sz="2100" dirty="0"/>
+              <a:t>• Assess data quality, timeliness, source traceability, and equity risks in.</a:t>
+            </a:r>
+            <a:endParaRPr lang="en-US" sz="1920" dirty="0"/>
           </a:p>
         </p:txBody>
       </p:sp>
@@ -15506,12 +15510,12 @@
         </p:nvSpPr>
         <p:spPr>
           <a:xfrm>
-            <a:off x="7635240" y="1325880"/>
-            <a:ext cx="3474720" cy="1207008"/>
+            <a:off x="7543800" y="1325880"/>
+            <a:ext cx="3611880" cy="1261872"/>
           </a:xfrm>
           <a:prstGeom prst="roundRect">
             <a:avLst>
-              <a:gd name="adj" fmla="val 9091"/>
+              <a:gd name="adj" fmla="val 8696"/>
             </a:avLst>
           </a:prstGeom>
           <a:solidFill>
@@ -15533,8 +15537,8 @@
         </p:nvSpPr>
         <p:spPr>
           <a:xfrm>
-            <a:off x="7799832" y="1472184"/>
-            <a:ext cx="3145536" cy="256032"/>
+            <a:off x="7708392" y="1453896"/>
+            <a:ext cx="3282696" cy="228600"/>
           </a:xfrm>
           <a:prstGeom prst="rect">
             <a:avLst/>
@@ -15550,7 +15554,7 @@
               <a:buNone/>
             </a:pPr>
             <a:r>
-              <a:rPr lang="en-US" sz="1300" b="1" dirty="0">
+              <a:rPr lang="en-US" sz="1220" b="1" dirty="0">
                 <a:solidFill>
                   <a:srgbClr val="0068B7"/>
                 </a:solidFill>
@@ -15560,7 +15564,7 @@
               </a:rPr>
               <a:t>Practice focus</a:t>
             </a:r>
-            <a:endParaRPr lang="en-US" sz="1300" dirty="0"/>
+            <a:endParaRPr lang="en-US" sz="1220" dirty="0"/>
           </a:p>
         </p:txBody>
       </p:sp>
@@ -15572,8 +15576,8 @@
         </p:nvSpPr>
         <p:spPr>
           <a:xfrm>
-            <a:off x="7799832" y="1801368"/>
-            <a:ext cx="3145536" cy="640080"/>
+            <a:off x="7708392" y="1764792"/>
+            <a:ext cx="3282696" cy="749808"/>
           </a:xfrm>
           <a:prstGeom prst="rect">
             <a:avLst/>
@@ -15591,7 +15595,7 @@
               <a:buNone/>
             </a:pPr>
             <a:r>
-              <a:rPr lang="en-US" sz="1320" dirty="0">
+              <a:rPr lang="en-US" sz="1220" dirty="0">
                 <a:solidFill>
                   <a:srgbClr val="17364A"/>
                 </a:solidFill>
@@ -15601,7 +15605,7 @@
               </a:rPr>
               <a:t>Identify case investigation and outbreak response tasks that AI may support.</a:t>
             </a:r>
-            <a:endParaRPr lang="en-US" sz="1320" dirty="0"/>
+            <a:endParaRPr lang="en-US" sz="1220" dirty="0"/>
           </a:p>
         </p:txBody>
       </p:sp>
@@ -15613,12 +15617,12 @@
         </p:nvSpPr>
         <p:spPr>
           <a:xfrm>
-            <a:off x="7635240" y="2670048"/>
-            <a:ext cx="3474720" cy="1377086"/>
+            <a:off x="7543800" y="2724912"/>
+            <a:ext cx="3611880" cy="1527048"/>
           </a:xfrm>
           <a:prstGeom prst="roundRect">
             <a:avLst>
-              <a:gd name="adj" fmla="val 7968"/>
+              <a:gd name="adj" fmla="val 7186"/>
             </a:avLst>
           </a:prstGeom>
           <a:solidFill>
@@ -15640,8 +15644,8 @@
         </p:nvSpPr>
         <p:spPr>
           <a:xfrm>
-            <a:off x="7799832" y="2816352"/>
-            <a:ext cx="3145536" cy="256032"/>
+            <a:off x="7708392" y="2852928"/>
+            <a:ext cx="3282696" cy="228600"/>
           </a:xfrm>
           <a:prstGeom prst="rect">
             <a:avLst/>
@@ -15657,7 +15661,7 @@
               <a:buNone/>
             </a:pPr>
             <a:r>
-              <a:rPr lang="en-US" sz="1300" b="1" dirty="0">
+              <a:rPr lang="en-US" sz="1220" b="1" dirty="0">
                 <a:solidFill>
                   <a:srgbClr val="0068B7"/>
                 </a:solidFill>
@@ -15667,7 +15671,7 @@
               </a:rPr>
               <a:t>Concept checkpoints</a:t>
             </a:r>
-            <a:endParaRPr lang="en-US" sz="1300" dirty="0"/>
+            <a:endParaRPr lang="en-US" sz="1220" dirty="0"/>
           </a:p>
         </p:txBody>
       </p:sp>
@@ -15679,8 +15683,8 @@
         </p:nvSpPr>
         <p:spPr>
           <a:xfrm>
-            <a:off x="7818120" y="3182112"/>
-            <a:ext cx="3090672" cy="718718"/>
+            <a:off x="7726680" y="3182112"/>
+            <a:ext cx="3227832" cy="960120"/>
           </a:xfrm>
           <a:prstGeom prst="rect">
             <a:avLst/>
@@ -15698,7 +15702,7 @@
               <a:buNone/>
             </a:pPr>
             <a:r>
-              <a:rPr lang="en-US" sz="1220" dirty="0">
+              <a:rPr lang="en-US" sz="1140" dirty="0">
                 <a:solidFill>
                   <a:srgbClr val="17364A"/>
                 </a:solidFill>
@@ -15706,16 +15710,16 @@
                 <a:ea typeface="Aptos" pitchFamily="34" charset="-122"/>
                 <a:cs typeface="Aptos" pitchFamily="34" charset="-120"/>
               </a:rPr>
-              <a:t>Distinguish between AI-supported triage, summarization,.</a:t>
-            </a:r>
-            <a:endParaRPr lang="en-US" sz="1220" dirty="0"/>
-          </a:p>
-          <a:p>
-            <a:pPr indent="0" marL="0">
-              <a:buNone/>
-            </a:pPr>
-            <a:r>
-              <a:rPr lang="en-US" sz="1220" dirty="0">
+              <a:t>Distinguish between AI-supported triage,.</a:t>
+            </a:r>
+            <a:endParaRPr lang="en-US" sz="1140" dirty="0"/>
+          </a:p>
+          <a:p>
+            <a:pPr indent="0" marL="0">
+              <a:buNone/>
+            </a:pPr>
+            <a:r>
+              <a:rPr lang="en-US" sz="1140" dirty="0">
                 <a:solidFill>
                   <a:srgbClr val="17364A"/>
                 </a:solidFill>
@@ -15723,16 +15727,16 @@
                 <a:ea typeface="Aptos" pitchFamily="34" charset="-122"/>
                 <a:cs typeface="Aptos" pitchFamily="34" charset="-120"/>
               </a:rPr>
-              <a:t>Assess data quality, timeliness, source traceability, and equity.</a:t>
-            </a:r>
-            <a:endParaRPr lang="en-US" sz="1220" dirty="0"/>
-          </a:p>
-          <a:p>
-            <a:pPr indent="0" marL="0">
-              <a:buNone/>
-            </a:pPr>
-            <a:r>
-              <a:rPr lang="en-US" sz="1220" dirty="0">
+              <a:t>Assess data quality, timeliness, source.</a:t>
+            </a:r>
+            <a:endParaRPr lang="en-US" sz="1140" dirty="0"/>
+          </a:p>
+          <a:p>
+            <a:pPr indent="0" marL="0">
+              <a:buNone/>
+            </a:pPr>
+            <a:r>
+              <a:rPr lang="en-US" sz="1140" dirty="0">
                 <a:solidFill>
                   <a:srgbClr val="17364A"/>
                 </a:solidFill>
@@ -15740,9 +15744,9 @@
                 <a:ea typeface="Aptos" pitchFamily="34" charset="-122"/>
                 <a:cs typeface="Aptos" pitchFamily="34" charset="-120"/>
               </a:rPr>
-              <a:t>Define human review, escalation, and documentation expectations.</a:t>
-            </a:r>
-            <a:endParaRPr lang="en-US" sz="1220" dirty="0"/>
+              <a:t>Define human review, escalation, and documentation.</a:t>
+            </a:r>
+            <a:endParaRPr lang="en-US" sz="1140" dirty="0"/>
           </a:p>
         </p:txBody>
       </p:sp>
@@ -15754,12 +15758,12 @@
         </p:nvSpPr>
         <p:spPr>
           <a:xfrm>
-            <a:off x="7635240" y="4184294"/>
-            <a:ext cx="3474720" cy="1466698"/>
+            <a:off x="7543800" y="4389120"/>
+            <a:ext cx="3611880" cy="1261872"/>
           </a:xfrm>
           <a:prstGeom prst="roundRect">
             <a:avLst>
-              <a:gd name="adj" fmla="val 7481"/>
+              <a:gd name="adj" fmla="val 8696"/>
             </a:avLst>
           </a:prstGeom>
           <a:solidFill>
@@ -15781,8 +15785,8 @@
         </p:nvSpPr>
         <p:spPr>
           <a:xfrm>
-            <a:off x="7799832" y="4330598"/>
-            <a:ext cx="3145536" cy="256032"/>
+            <a:off x="7708392" y="4517136"/>
+            <a:ext cx="3282696" cy="228600"/>
           </a:xfrm>
           <a:prstGeom prst="rect">
             <a:avLst/>
@@ -15798,7 +15802,7 @@
               <a:buNone/>
             </a:pPr>
             <a:r>
-              <a:rPr lang="en-US" sz="1300" b="1" dirty="0">
+              <a:rPr lang="en-US" sz="1220" b="1" dirty="0">
                 <a:solidFill>
                   <a:srgbClr val="0068B7"/>
                 </a:solidFill>
@@ -15808,7 +15812,7 @@
               </a:rPr>
               <a:t>What to produce</a:t>
             </a:r>
-            <a:endParaRPr lang="en-US" sz="1300" dirty="0"/>
+            <a:endParaRPr lang="en-US" sz="1220" dirty="0"/>
           </a:p>
         </p:txBody>
       </p:sp>
@@ -15820,8 +15824,8 @@
         </p:nvSpPr>
         <p:spPr>
           <a:xfrm>
-            <a:off x="7799832" y="4659782"/>
-            <a:ext cx="3145536" cy="899770"/>
+            <a:off x="7708392" y="4828032"/>
+            <a:ext cx="3282696" cy="749808"/>
           </a:xfrm>
           <a:prstGeom prst="rect">
             <a:avLst/>
@@ -15839,7 +15843,7 @@
               <a:buNone/>
             </a:pPr>
             <a:r>
-              <a:rPr lang="en-US" sz="1320" dirty="0">
+              <a:rPr lang="en-US" sz="1220" dirty="0">
                 <a:solidFill>
                   <a:srgbClr val="17364A"/>
                 </a:solidFill>
@@ -15847,9 +15851,9 @@
                 <a:ea typeface="Aptos" pitchFamily="34" charset="-122"/>
                 <a:cs typeface="Aptos" pitchFamily="34" charset="-120"/>
               </a:rPr>
-              <a:t>Use the assignment to test whether you can explain the concept, apply it to a realistic public health situation, and identify what would need review before the work moves forward.</a:t>
-            </a:r>
-            <a:endParaRPr lang="en-US" sz="1320" dirty="0"/>
+              <a:t>Use the assignment to test whether you can explain the concept, apply it to a.</a:t>
+            </a:r>
+            <a:endParaRPr lang="en-US" sz="1220" dirty="0"/>
           </a:p>
         </p:txBody>
       </p:sp>
@@ -16140,8 +16144,8 @@
         </p:nvSpPr>
         <p:spPr>
           <a:xfrm>
-            <a:off x="868680" y="1508760"/>
-            <a:ext cx="6309360" cy="4160520"/>
+            <a:off x="822960" y="1463040"/>
+            <a:ext cx="6565392" cy="4343400"/>
           </a:xfrm>
           <a:prstGeom prst="rect">
             <a:avLst/>
@@ -16159,7 +16163,7 @@
               <a:buNone/>
             </a:pPr>
             <a:r>
-              <a:rPr lang="en-US" sz="2100" dirty="0">
+              <a:rPr lang="en-US" sz="1920" dirty="0">
                 <a:solidFill>
                   <a:srgbClr val="003A63"/>
                 </a:solidFill>
@@ -16167,16 +16171,16 @@
                 <a:ea typeface="Aptos" pitchFamily="34" charset="-122"/>
                 <a:cs typeface="Aptos" pitchFamily="34" charset="-120"/>
               </a:rPr>
-              <a:t>• Case investigation and outbreak response are high-pressure public health workflows that depend.</a:t>
-            </a:r>
-            <a:endParaRPr lang="en-US" sz="2100" dirty="0"/>
-          </a:p>
-          <a:p>
-            <a:pPr indent="0" marL="0">
-              <a:buNone/>
-            </a:pPr>
-            <a:r>
-              <a:rPr lang="en-US" sz="2100" dirty="0">
+              <a:t>• Case investigation and outbreak response are high-pressure public health.</a:t>
+            </a:r>
+            <a:endParaRPr lang="en-US" sz="1920" dirty="0"/>
+          </a:p>
+          <a:p>
+            <a:pPr indent="0" marL="0">
+              <a:buNone/>
+            </a:pPr>
+            <a:r>
+              <a:rPr lang="en-US" sz="1920" dirty="0">
                 <a:solidFill>
                   <a:srgbClr val="003A63"/>
                 </a:solidFill>
@@ -16184,16 +16188,16 @@
                 <a:ea typeface="Aptos" pitchFamily="34" charset="-122"/>
                 <a:cs typeface="Aptos" pitchFamily="34" charset="-120"/>
               </a:rPr>
-              <a:t>• AI may support these workflows by summarizing case records, extracting exposures, identifying.</a:t>
-            </a:r>
-            <a:endParaRPr lang="en-US" sz="2100" dirty="0"/>
-          </a:p>
-          <a:p>
-            <a:pPr indent="0" marL="0">
-              <a:buNone/>
-            </a:pPr>
-            <a:r>
-              <a:rPr lang="en-US" sz="2100" dirty="0">
+              <a:t>• AI may support these workflows by summarizing case records, extracting.</a:t>
+            </a:r>
+            <a:endParaRPr lang="en-US" sz="1920" dirty="0"/>
+          </a:p>
+          <a:p>
+            <a:pPr indent="0" marL="0">
+              <a:buNone/>
+            </a:pPr>
+            <a:r>
+              <a:rPr lang="en-US" sz="1920" dirty="0">
                 <a:solidFill>
                   <a:srgbClr val="003A63"/>
                 </a:solidFill>
@@ -16201,9 +16205,9 @@
                 <a:ea typeface="Aptos" pitchFamily="34" charset="-122"/>
                 <a:cs typeface="Aptos" pitchFamily="34" charset="-120"/>
               </a:rPr>
-              <a:t>• At the same time, errors can affect real people, public health action, and public confidence.</a:t>
-            </a:r>
-            <a:endParaRPr lang="en-US" sz="2100" dirty="0"/>
+              <a:t>• At the same time, errors can affect real people, public health action, and.</a:t>
+            </a:r>
+            <a:endParaRPr lang="en-US" sz="1920" dirty="0"/>
           </a:p>
         </p:txBody>
       </p:sp>
@@ -16215,12 +16219,12 @@
         </p:nvSpPr>
         <p:spPr>
           <a:xfrm>
-            <a:off x="7635240" y="1325880"/>
-            <a:ext cx="3474720" cy="1255471"/>
+            <a:off x="7543800" y="1325880"/>
+            <a:ext cx="3611880" cy="1261872"/>
           </a:xfrm>
           <a:prstGeom prst="roundRect">
             <a:avLst>
-              <a:gd name="adj" fmla="val 8740"/>
+              <a:gd name="adj" fmla="val 8696"/>
             </a:avLst>
           </a:prstGeom>
           <a:solidFill>
@@ -16242,8 +16246,8 @@
         </p:nvSpPr>
         <p:spPr>
           <a:xfrm>
-            <a:off x="7799832" y="1472184"/>
-            <a:ext cx="3145536" cy="256032"/>
+            <a:off x="7708392" y="1453896"/>
+            <a:ext cx="3282696" cy="228600"/>
           </a:xfrm>
           <a:prstGeom prst="rect">
             <a:avLst/>
@@ -16259,7 +16263,7 @@
               <a:buNone/>
             </a:pPr>
             <a:r>
-              <a:rPr lang="en-US" sz="1300" b="1" dirty="0">
+              <a:rPr lang="en-US" sz="1220" b="1" dirty="0">
                 <a:solidFill>
                   <a:srgbClr val="0068B7"/>
                 </a:solidFill>
@@ -16269,7 +16273,7 @@
               </a:rPr>
               <a:t>Core concept</a:t>
             </a:r>
-            <a:endParaRPr lang="en-US" sz="1300" dirty="0"/>
+            <a:endParaRPr lang="en-US" sz="1220" dirty="0"/>
           </a:p>
         </p:txBody>
       </p:sp>
@@ -16281,8 +16285,8 @@
         </p:nvSpPr>
         <p:spPr>
           <a:xfrm>
-            <a:off x="7799832" y="1801368"/>
-            <a:ext cx="3145536" cy="688543"/>
+            <a:off x="7708392" y="1764792"/>
+            <a:ext cx="3282696" cy="749808"/>
           </a:xfrm>
           <a:prstGeom prst="rect">
             <a:avLst/>
@@ -16300,7 +16304,7 @@
               <a:buNone/>
             </a:pPr>
             <a:r>
-              <a:rPr lang="en-US" sz="1320" dirty="0">
+              <a:rPr lang="en-US" sz="1220" dirty="0">
                 <a:solidFill>
                   <a:srgbClr val="17364A"/>
                 </a:solidFill>
@@ -16308,9 +16312,9 @@
                 <a:ea typeface="Aptos" pitchFamily="34" charset="-122"/>
                 <a:cs typeface="Aptos" pitchFamily="34" charset="-120"/>
               </a:rPr>
-              <a:t>Case investigation and outbreak response are high-pressure public health workflows that depend on.</a:t>
-            </a:r>
-            <a:endParaRPr lang="en-US" sz="1320" dirty="0"/>
+              <a:t>Case investigation and outbreak response are high-pressure public health.</a:t>
+            </a:r>
+            <a:endParaRPr lang="en-US" sz="1220" dirty="0"/>
           </a:p>
         </p:txBody>
       </p:sp>
@@ -16322,12 +16326,12 @@
         </p:nvSpPr>
         <p:spPr>
           <a:xfrm>
-            <a:off x="7635240" y="2718511"/>
-            <a:ext cx="3474720" cy="1328623"/>
+            <a:off x="7543800" y="2724912"/>
+            <a:ext cx="3611880" cy="1527048"/>
           </a:xfrm>
           <a:prstGeom prst="roundRect">
             <a:avLst>
-              <a:gd name="adj" fmla="val 8259"/>
+              <a:gd name="adj" fmla="val 7186"/>
             </a:avLst>
           </a:prstGeom>
           <a:solidFill>
@@ -16349,8 +16353,8 @@
         </p:nvSpPr>
         <p:spPr>
           <a:xfrm>
-            <a:off x="7799832" y="2864815"/>
-            <a:ext cx="3145536" cy="256032"/>
+            <a:off x="7708392" y="2852928"/>
+            <a:ext cx="3282696" cy="228600"/>
           </a:xfrm>
           <a:prstGeom prst="rect">
             <a:avLst/>
@@ -16366,7 +16370,7 @@
               <a:buNone/>
             </a:pPr>
             <a:r>
-              <a:rPr lang="en-US" sz="1300" b="1" dirty="0">
+              <a:rPr lang="en-US" sz="1220" b="1" dirty="0">
                 <a:solidFill>
                   <a:srgbClr val="0068B7"/>
                 </a:solidFill>
@@ -16376,7 +16380,7 @@
               </a:rPr>
               <a:t>Concept checkpoints</a:t>
             </a:r>
-            <a:endParaRPr lang="en-US" sz="1300" dirty="0"/>
+            <a:endParaRPr lang="en-US" sz="1220" dirty="0"/>
           </a:p>
         </p:txBody>
       </p:sp>
@@ -16388,8 +16392,8 @@
         </p:nvSpPr>
         <p:spPr>
           <a:xfrm>
-            <a:off x="7818120" y="3230575"/>
-            <a:ext cx="3090672" cy="670255"/>
+            <a:off x="7726680" y="3182112"/>
+            <a:ext cx="3227832" cy="960120"/>
           </a:xfrm>
           <a:prstGeom prst="rect">
             <a:avLst/>
@@ -16407,7 +16411,7 @@
               <a:buNone/>
             </a:pPr>
             <a:r>
-              <a:rPr lang="en-US" sz="1220" dirty="0">
+              <a:rPr lang="en-US" sz="1140" dirty="0">
                 <a:solidFill>
                   <a:srgbClr val="17364A"/>
                 </a:solidFill>
@@ -16415,16 +16419,16 @@
                 <a:ea typeface="Aptos" pitchFamily="34" charset="-122"/>
                 <a:cs typeface="Aptos" pitchFamily="34" charset="-120"/>
               </a:rPr>
-              <a:t>Case investigation and outbreak response are high-pressure public.</a:t>
-            </a:r>
-            <a:endParaRPr lang="en-US" sz="1220" dirty="0"/>
-          </a:p>
-          <a:p>
-            <a:pPr indent="0" marL="0">
-              <a:buNone/>
-            </a:pPr>
-            <a:r>
-              <a:rPr lang="en-US" sz="1220" dirty="0">
+              <a:t>Case investigation and outbreak response are.</a:t>
+            </a:r>
+            <a:endParaRPr lang="en-US" sz="1140" dirty="0"/>
+          </a:p>
+          <a:p>
+            <a:pPr indent="0" marL="0">
+              <a:buNone/>
+            </a:pPr>
+            <a:r>
+              <a:rPr lang="en-US" sz="1140" dirty="0">
                 <a:solidFill>
                   <a:srgbClr val="17364A"/>
                 </a:solidFill>
@@ -16432,16 +16436,16 @@
                 <a:ea typeface="Aptos" pitchFamily="34" charset="-122"/>
                 <a:cs typeface="Aptos" pitchFamily="34" charset="-120"/>
               </a:rPr>
-              <a:t>AI may support these workflows by summarizing case records,.</a:t>
-            </a:r>
-            <a:endParaRPr lang="en-US" sz="1220" dirty="0"/>
-          </a:p>
-          <a:p>
-            <a:pPr indent="0" marL="0">
-              <a:buNone/>
-            </a:pPr>
-            <a:r>
-              <a:rPr lang="en-US" sz="1220" dirty="0">
+              <a:t>AI may support these workflows by summarizing case.</a:t>
+            </a:r>
+            <a:endParaRPr lang="en-US" sz="1140" dirty="0"/>
+          </a:p>
+          <a:p>
+            <a:pPr indent="0" marL="0">
+              <a:buNone/>
+            </a:pPr>
+            <a:r>
+              <a:rPr lang="en-US" sz="1140" dirty="0">
                 <a:solidFill>
                   <a:srgbClr val="17364A"/>
                 </a:solidFill>
@@ -16449,9 +16453,9 @@
                 <a:ea typeface="Aptos" pitchFamily="34" charset="-122"/>
                 <a:cs typeface="Aptos" pitchFamily="34" charset="-120"/>
               </a:rPr>
-              <a:t>This module teaches epidemiologists, informaticians, and response.</a:t>
-            </a:r>
-            <a:endParaRPr lang="en-US" sz="1220" dirty="0"/>
+              <a:t>This module teaches epidemiologists,.</a:t>
+            </a:r>
+            <a:endParaRPr lang="en-US" sz="1140" dirty="0"/>
           </a:p>
         </p:txBody>
       </p:sp>
@@ -16463,12 +16467,12 @@
         </p:nvSpPr>
         <p:spPr>
           <a:xfrm>
-            <a:off x="7635240" y="4184294"/>
-            <a:ext cx="3474720" cy="1466698"/>
+            <a:off x="7543800" y="4389120"/>
+            <a:ext cx="3611880" cy="1261872"/>
           </a:xfrm>
           <a:prstGeom prst="roundRect">
             <a:avLst>
-              <a:gd name="adj" fmla="val 7481"/>
+              <a:gd name="adj" fmla="val 8696"/>
             </a:avLst>
           </a:prstGeom>
           <a:solidFill>
@@ -16490,8 +16494,8 @@
         </p:nvSpPr>
         <p:spPr>
           <a:xfrm>
-            <a:off x="7799832" y="4330598"/>
-            <a:ext cx="3145536" cy="256032"/>
+            <a:off x="7708392" y="4517136"/>
+            <a:ext cx="3282696" cy="228600"/>
           </a:xfrm>
           <a:prstGeom prst="rect">
             <a:avLst/>
@@ -16507,7 +16511,7 @@
               <a:buNone/>
             </a:pPr>
             <a:r>
-              <a:rPr lang="en-US" sz="1300" b="1" dirty="0">
+              <a:rPr lang="en-US" sz="1220" b="1" dirty="0">
                 <a:solidFill>
                   <a:srgbClr val="0068B7"/>
                 </a:solidFill>
@@ -16517,7 +16521,7 @@
               </a:rPr>
               <a:t>Apply it</a:t>
             </a:r>
-            <a:endParaRPr lang="en-US" sz="1300" dirty="0"/>
+            <a:endParaRPr lang="en-US" sz="1220" dirty="0"/>
           </a:p>
         </p:txBody>
       </p:sp>
@@ -16529,8 +16533,8 @@
         </p:nvSpPr>
         <p:spPr>
           <a:xfrm>
-            <a:off x="7799832" y="4659782"/>
-            <a:ext cx="3145536" cy="899770"/>
+            <a:off x="7708392" y="4828032"/>
+            <a:ext cx="3282696" cy="749808"/>
           </a:xfrm>
           <a:prstGeom prst="rect">
             <a:avLst/>
@@ -16548,7 +16552,7 @@
               <a:buNone/>
             </a:pPr>
             <a:r>
-              <a:rPr lang="en-US" sz="1320" dirty="0">
+              <a:rPr lang="en-US" sz="1220" dirty="0">
                 <a:solidFill>
                   <a:srgbClr val="17364A"/>
                 </a:solidFill>
@@ -16556,9 +16560,9 @@
                 <a:ea typeface="Aptos" pitchFamily="34" charset="-122"/>
                 <a:cs typeface="Aptos" pitchFamily="34" charset="-120"/>
               </a:rPr>
-              <a:t>Connect the concept to public health purpose, responsible use, required safeguards, documentation, and the next action a department should take.</a:t>
-            </a:r>
-            <a:endParaRPr lang="en-US" sz="1320" dirty="0"/>
+              <a:t>Connect the concept to public health purpose, responsible use, required.</a:t>
+            </a:r>
+            <a:endParaRPr lang="en-US" sz="1220" dirty="0"/>
           </a:p>
         </p:txBody>
       </p:sp>
@@ -16849,8 +16853,8 @@
         </p:nvSpPr>
         <p:spPr>
           <a:xfrm>
-            <a:off x="868680" y="1508760"/>
-            <a:ext cx="6309360" cy="4160520"/>
+            <a:off x="822960" y="1463040"/>
+            <a:ext cx="6565392" cy="4343400"/>
           </a:xfrm>
           <a:prstGeom prst="rect">
             <a:avLst/>
@@ -16868,7 +16872,7 @@
               <a:buNone/>
             </a:pPr>
             <a:r>
-              <a:rPr lang="en-US" sz="2100" dirty="0">
+              <a:rPr lang="en-US" sz="1920" dirty="0">
                 <a:solidFill>
                   <a:srgbClr val="003A63"/>
                 </a:solidFill>
@@ -16878,14 +16882,14 @@
               </a:rPr>
               <a:t>• This national-level module is intended for training and planning purposes.</a:t>
             </a:r>
-            <a:endParaRPr lang="en-US" sz="2100" dirty="0"/>
-          </a:p>
-          <a:p>
-            <a:pPr indent="0" marL="0">
-              <a:buNone/>
-            </a:pPr>
-            <a:r>
-              <a:rPr lang="en-US" sz="2100" dirty="0">
+            <a:endParaRPr lang="en-US" sz="1920" dirty="0"/>
+          </a:p>
+          <a:p>
+            <a:pPr indent="0" marL="0">
+              <a:buNone/>
+            </a:pPr>
+            <a:r>
+              <a:rPr lang="en-US" sz="1920" dirty="0">
                 <a:solidFill>
                   <a:srgbClr val="003A63"/>
                 </a:solidFill>
@@ -16893,16 +16897,16 @@
                 <a:ea typeface="Aptos" pitchFamily="34" charset="-122"/>
                 <a:cs typeface="Aptos" pitchFamily="34" charset="-120"/>
               </a:rPr>
-              <a:t>• It does not replace legal, privacy, procurement, civil rights, records, or agency policy review.</a:t>
-            </a:r>
-            <a:endParaRPr lang="en-US" sz="2100" dirty="0"/>
-          </a:p>
-          <a:p>
-            <a:pPr indent="0" marL="0">
-              <a:buNone/>
-            </a:pPr>
-            <a:r>
-              <a:rPr lang="en-US" sz="2100" dirty="0">
+              <a:t>• It does not replace legal, privacy, procurement, civil rights, records, or.</a:t>
+            </a:r>
+            <a:endParaRPr lang="en-US" sz="1920" dirty="0"/>
+          </a:p>
+          <a:p>
+            <a:pPr indent="0" marL="0">
+              <a:buNone/>
+            </a:pPr>
+            <a:r>
+              <a:rPr lang="en-US" sz="1920" dirty="0">
                 <a:solidFill>
                   <a:srgbClr val="003A63"/>
                 </a:solidFill>
@@ -16910,9 +16914,9 @@
                 <a:ea typeface="Aptos" pitchFamily="34" charset="-122"/>
                 <a:cs typeface="Aptos" pitchFamily="34" charset="-120"/>
               </a:rPr>
-              <a:t>• Learners should confirm applicable requirements in their own jurisdiction and organization.</a:t>
-            </a:r>
-            <a:endParaRPr lang="en-US" sz="2100" dirty="0"/>
+              <a:t>• Learners should confirm applicable requirements in their own jurisdiction.</a:t>
+            </a:r>
+            <a:endParaRPr lang="en-US" sz="1920" dirty="0"/>
           </a:p>
         </p:txBody>
       </p:sp>
@@ -16924,12 +16928,12 @@
         </p:nvSpPr>
         <p:spPr>
           <a:xfrm>
-            <a:off x="7635240" y="1325880"/>
-            <a:ext cx="3474720" cy="1207008"/>
+            <a:off x="7543800" y="1325880"/>
+            <a:ext cx="3611880" cy="1261872"/>
           </a:xfrm>
           <a:prstGeom prst="roundRect">
             <a:avLst>
-              <a:gd name="adj" fmla="val 9091"/>
+              <a:gd name="adj" fmla="val 8696"/>
             </a:avLst>
           </a:prstGeom>
           <a:solidFill>
@@ -16951,8 +16955,8 @@
         </p:nvSpPr>
         <p:spPr>
           <a:xfrm>
-            <a:off x="7799832" y="1472184"/>
-            <a:ext cx="3145536" cy="256032"/>
+            <a:off x="7708392" y="1453896"/>
+            <a:ext cx="3282696" cy="228600"/>
           </a:xfrm>
           <a:prstGeom prst="rect">
             <a:avLst/>
@@ -16968,7 +16972,7 @@
               <a:buNone/>
             </a:pPr>
             <a:r>
-              <a:rPr lang="en-US" sz="1300" b="1" dirty="0">
+              <a:rPr lang="en-US" sz="1220" b="1" dirty="0">
                 <a:solidFill>
                   <a:srgbClr val="0068B7"/>
                 </a:solidFill>
@@ -16978,7 +16982,7 @@
               </a:rPr>
               <a:t>Governance lens</a:t>
             </a:r>
-            <a:endParaRPr lang="en-US" sz="1300" dirty="0"/>
+            <a:endParaRPr lang="en-US" sz="1220" dirty="0"/>
           </a:p>
         </p:txBody>
       </p:sp>
@@ -16990,8 +16994,8 @@
         </p:nvSpPr>
         <p:spPr>
           <a:xfrm>
-            <a:off x="7799832" y="1801368"/>
-            <a:ext cx="3145536" cy="640080"/>
+            <a:off x="7708392" y="1764792"/>
+            <a:ext cx="3282696" cy="749808"/>
           </a:xfrm>
           <a:prstGeom prst="rect">
             <a:avLst/>
@@ -17009,7 +17013,7 @@
               <a:buNone/>
             </a:pPr>
             <a:r>
-              <a:rPr lang="en-US" sz="1320" dirty="0">
+              <a:rPr lang="en-US" sz="1220" dirty="0">
                 <a:solidFill>
                   <a:srgbClr val="17364A"/>
                 </a:solidFill>
@@ -17019,7 +17023,7 @@
               </a:rPr>
               <a:t>This national-level module is intended for training and planning purposes.</a:t>
             </a:r>
-            <a:endParaRPr lang="en-US" sz="1320" dirty="0"/>
+            <a:endParaRPr lang="en-US" sz="1220" dirty="0"/>
           </a:p>
         </p:txBody>
       </p:sp>
@@ -17031,12 +17035,12 @@
         </p:nvSpPr>
         <p:spPr>
           <a:xfrm>
-            <a:off x="7635240" y="2670048"/>
-            <a:ext cx="3474720" cy="1377086"/>
+            <a:off x="7543800" y="2724912"/>
+            <a:ext cx="3611880" cy="1527048"/>
           </a:xfrm>
           <a:prstGeom prst="roundRect">
             <a:avLst>
-              <a:gd name="adj" fmla="val 7968"/>
+              <a:gd name="adj" fmla="val 7186"/>
             </a:avLst>
           </a:prstGeom>
           <a:solidFill>
@@ -17058,24 +17062,26 @@
         </p:nvSpPr>
         <p:spPr>
           <a:xfrm>
-            <a:off x="7799832" y="2798064"/>
-            <a:ext cx="3145536" cy="237744"/>
-          </a:xfrm>
-          <a:prstGeom prst="rect">
-            <a:avLst/>
-          </a:prstGeom>
-          <a:noFill/>
-          <a:ln/>
-        </p:spPr>
-        <p:txBody>
-          <a:bodyPr wrap="square" lIns="0" tIns="0" rIns="0" bIns="0" rtlCol="0" anchor="ctr"/>
-          <a:lstStyle/>
-          <a:p>
-            <a:pPr indent="0" marL="0">
-              <a:buNone/>
-            </a:pPr>
-            <a:r>
-              <a:rPr lang="en-US" sz="1250" b="1" dirty="0">
+            <a:off x="7708392" y="2852928"/>
+            <a:ext cx="3282696" cy="219456"/>
+          </a:xfrm>
+          <a:prstGeom prst="rect">
+            <a:avLst/>
+          </a:prstGeom>
+          <a:noFill/>
+          <a:ln/>
+        </p:spPr>
+        <p:txBody>
+          <a:bodyPr wrap="square" lIns="0" tIns="0" rIns="0" bIns="0" rtlCol="0" anchor="ctr">
+            <a:normAutofit/>
+          </a:bodyPr>
+          <a:lstStyle/>
+          <a:p>
+            <a:pPr indent="0" marL="0">
+              <a:buNone/>
+            </a:pPr>
+            <a:r>
+              <a:rPr lang="en-US" sz="1160" b="1" dirty="0">
                 <a:solidFill>
                   <a:srgbClr val="0068B7"/>
                 </a:solidFill>
@@ -17085,7 +17091,7 @@
               </a:rPr>
               <a:t>Governance pathway</a:t>
             </a:r>
-            <a:endParaRPr lang="en-US" sz="1250" dirty="0"/>
+            <a:endParaRPr lang="en-US" sz="1160" dirty="0"/>
           </a:p>
         </p:txBody>
       </p:sp>
@@ -17097,7 +17103,7 @@
         </p:nvSpPr>
         <p:spPr>
           <a:xfrm>
-            <a:off x="8763000" y="3351276"/>
+            <a:off x="8717280" y="3406140"/>
             <a:ext cx="164592" cy="0"/>
           </a:xfrm>
           <a:prstGeom prst="line">
@@ -17120,8 +17126,8 @@
         </p:nvSpPr>
         <p:spPr>
           <a:xfrm>
-            <a:off x="7872984" y="3200400"/>
-            <a:ext cx="890016" cy="301752"/>
+            <a:off x="7781544" y="3255264"/>
+            <a:ext cx="935736" cy="301752"/>
           </a:xfrm>
           <a:prstGeom prst="roundRect">
             <a:avLst>
@@ -17147,8 +17153,8 @@
         </p:nvSpPr>
         <p:spPr>
           <a:xfrm>
-            <a:off x="7909560" y="3273552"/>
-            <a:ext cx="816864" cy="146304"/>
+            <a:off x="7818120" y="3328416"/>
+            <a:ext cx="862584" cy="146304"/>
           </a:xfrm>
           <a:prstGeom prst="rect">
             <a:avLst/>
@@ -17188,7 +17194,7 @@
         </p:nvSpPr>
         <p:spPr>
           <a:xfrm>
-            <a:off x="9817608" y="3351276"/>
+            <a:off x="9817608" y="3406140"/>
             <a:ext cx="164592" cy="0"/>
           </a:xfrm>
           <a:prstGeom prst="line">
@@ -17211,8 +17217,8 @@
         </p:nvSpPr>
         <p:spPr>
           <a:xfrm>
-            <a:off x="8927592" y="3200400"/>
-            <a:ext cx="890016" cy="301752"/>
+            <a:off x="8881872" y="3255264"/>
+            <a:ext cx="935736" cy="301752"/>
           </a:xfrm>
           <a:prstGeom prst="roundRect">
             <a:avLst>
@@ -17238,8 +17244,8 @@
         </p:nvSpPr>
         <p:spPr>
           <a:xfrm>
-            <a:off x="8964168" y="3273552"/>
-            <a:ext cx="816864" cy="146304"/>
+            <a:off x="8918448" y="3328416"/>
+            <a:ext cx="862584" cy="146304"/>
           </a:xfrm>
           <a:prstGeom prst="rect">
             <a:avLst/>
@@ -17279,8 +17285,8 @@
         </p:nvSpPr>
         <p:spPr>
           <a:xfrm>
-            <a:off x="9982200" y="3200400"/>
-            <a:ext cx="890016" cy="301752"/>
+            <a:off x="9982200" y="3255264"/>
+            <a:ext cx="935736" cy="301752"/>
           </a:xfrm>
           <a:prstGeom prst="roundRect">
             <a:avLst>
@@ -17306,8 +17312,8 @@
         </p:nvSpPr>
         <p:spPr>
           <a:xfrm>
-            <a:off x="10018776" y="3273552"/>
-            <a:ext cx="816864" cy="146304"/>
+            <a:off x="10018776" y="3328416"/>
+            <a:ext cx="862584" cy="146304"/>
           </a:xfrm>
           <a:prstGeom prst="rect">
             <a:avLst/>
@@ -17347,8 +17353,8 @@
         </p:nvSpPr>
         <p:spPr>
           <a:xfrm>
-            <a:off x="7854696" y="3694176"/>
-            <a:ext cx="3035808" cy="206654"/>
+            <a:off x="7763256" y="3749040"/>
+            <a:ext cx="3172968" cy="356616"/>
           </a:xfrm>
           <a:prstGeom prst="rect">
             <a:avLst/>
@@ -17366,7 +17372,7 @@
               <a:buNone/>
             </a:pPr>
             <a:r>
-              <a:rPr lang="en-US" sz="1120" dirty="0">
+              <a:rPr lang="en-US" sz="1040" dirty="0">
                 <a:solidFill>
                   <a:srgbClr val="17364A"/>
                 </a:solidFill>
@@ -17374,9 +17380,9 @@
                 <a:ea typeface="Aptos" pitchFamily="34" charset="-122"/>
                 <a:cs typeface="Aptos" pitchFamily="34" charset="-120"/>
               </a:rPr>
-              <a:t>A proposed AI use should move through documented review before it becomes an operational workflow.</a:t>
-            </a:r>
-            <a:endParaRPr lang="en-US" sz="1120" dirty="0"/>
+              <a:t>A proposed AI use should move through documented review before it.</a:t>
+            </a:r>
+            <a:endParaRPr lang="en-US" sz="1040" dirty="0"/>
           </a:p>
         </p:txBody>
       </p:sp>
@@ -17388,12 +17394,12 @@
         </p:nvSpPr>
         <p:spPr>
           <a:xfrm>
-            <a:off x="7635240" y="4184294"/>
-            <a:ext cx="3474720" cy="1466698"/>
+            <a:off x="7543800" y="4389120"/>
+            <a:ext cx="3611880" cy="1261872"/>
           </a:xfrm>
           <a:prstGeom prst="roundRect">
             <a:avLst>
-              <a:gd name="adj" fmla="val 7481"/>
+              <a:gd name="adj" fmla="val 8696"/>
             </a:avLst>
           </a:prstGeom>
           <a:solidFill>
@@ -17415,8 +17421,8 @@
         </p:nvSpPr>
         <p:spPr>
           <a:xfrm>
-            <a:off x="7799832" y="4330598"/>
-            <a:ext cx="3145536" cy="256032"/>
+            <a:off x="7708392" y="4517136"/>
+            <a:ext cx="3282696" cy="228600"/>
           </a:xfrm>
           <a:prstGeom prst="rect">
             <a:avLst/>
@@ -17432,7 +17438,7 @@
               <a:buNone/>
             </a:pPr>
             <a:r>
-              <a:rPr lang="en-US" sz="1300" b="1" dirty="0">
+              <a:rPr lang="en-US" sz="1220" b="1" dirty="0">
                 <a:solidFill>
                   <a:srgbClr val="0068B7"/>
                 </a:solidFill>
@@ -17442,7 +17448,7 @@
               </a:rPr>
               <a:t>What to document</a:t>
             </a:r>
-            <a:endParaRPr lang="en-US" sz="1300" dirty="0"/>
+            <a:endParaRPr lang="en-US" sz="1220" dirty="0"/>
           </a:p>
         </p:txBody>
       </p:sp>
@@ -17454,8 +17460,8 @@
         </p:nvSpPr>
         <p:spPr>
           <a:xfrm>
-            <a:off x="7799832" y="4659782"/>
-            <a:ext cx="3145536" cy="899770"/>
+            <a:off x="7708392" y="4828032"/>
+            <a:ext cx="3282696" cy="749808"/>
           </a:xfrm>
           <a:prstGeom prst="rect">
             <a:avLst/>
@@ -17473,7 +17479,7 @@
               <a:buNone/>
             </a:pPr>
             <a:r>
-              <a:rPr lang="en-US" sz="1320" dirty="0">
+              <a:rPr lang="en-US" sz="1220" dirty="0">
                 <a:solidFill>
                   <a:srgbClr val="17364A"/>
                 </a:solidFill>
@@ -17481,9 +17487,9 @@
                 <a:ea typeface="Aptos" pitchFamily="34" charset="-122"/>
                 <a:cs typeface="Aptos" pitchFamily="34" charset="-120"/>
               </a:rPr>
-              <a:t>Translate this concept into clear decision rights, review steps, documentation expectations, and escalation paths before an AI-supported workflow is approved.</a:t>
-            </a:r>
-            <a:endParaRPr lang="en-US" sz="1320" dirty="0"/>
+              <a:t>Translate this concept into clear decision rights, review steps, documentation.</a:t>
+            </a:r>
+            <a:endParaRPr lang="en-US" sz="1220" dirty="0"/>
           </a:p>
         </p:txBody>
       </p:sp>
@@ -17774,8 +17780,8 @@
         </p:nvSpPr>
         <p:spPr>
           <a:xfrm>
-            <a:off x="868680" y="1508760"/>
-            <a:ext cx="6309360" cy="4160520"/>
+            <a:off x="822960" y="1463040"/>
+            <a:ext cx="6565392" cy="4343400"/>
           </a:xfrm>
           <a:prstGeom prst="rect">
             <a:avLst/>
@@ -17793,7 +17799,7 @@
               <a:buNone/>
             </a:pPr>
             <a:r>
-              <a:rPr lang="en-US" sz="2100" dirty="0">
+              <a:rPr lang="en-US" sz="1920" dirty="0">
                 <a:solidFill>
                   <a:srgbClr val="003A63"/>
                 </a:solidFill>
@@ -17801,16 +17807,16 @@
                 <a:ea typeface="Aptos" pitchFamily="34" charset="-122"/>
                 <a:cs typeface="Aptos" pitchFamily="34" charset="-120"/>
               </a:rPr>
-              <a:t>• During a foodborne illness investigation, AI is used to summarize interview notes and extract.</a:t>
-            </a:r>
-            <a:endParaRPr lang="en-US" sz="2100" dirty="0"/>
-          </a:p>
-          <a:p>
-            <a:pPr indent="0" marL="0">
-              <a:buNone/>
-            </a:pPr>
-            <a:r>
-              <a:rPr lang="en-US" sz="2100" dirty="0">
+              <a:t>• During a foodborne illness investigation, AI is used to summarize interview.</a:t>
+            </a:r>
+            <a:endParaRPr lang="en-US" sz="1920" dirty="0"/>
+          </a:p>
+          <a:p>
+            <a:pPr indent="0" marL="0">
+              <a:buNone/>
+            </a:pPr>
+            <a:r>
+              <a:rPr lang="en-US" sz="1920" dirty="0">
                 <a:solidFill>
                   <a:srgbClr val="003A63"/>
                 </a:solidFill>
@@ -17818,16 +17824,16 @@
                 <a:ea typeface="Aptos" pitchFamily="34" charset="-122"/>
                 <a:cs typeface="Aptos" pitchFamily="34" charset="-120"/>
               </a:rPr>
-              <a:t>• Investigators compare the extracted exposures to original notes, review uncertain or.</a:t>
-            </a:r>
-            <a:endParaRPr lang="en-US" sz="2100" dirty="0"/>
-          </a:p>
-          <a:p>
-            <a:pPr indent="0" marL="0">
-              <a:buNone/>
-            </a:pPr>
-            <a:r>
-              <a:rPr lang="en-US" sz="2100" dirty="0">
+              <a:t>• Investigators compare the extracted exposures to original notes, review.</a:t>
+            </a:r>
+            <a:endParaRPr lang="en-US" sz="1920" dirty="0"/>
+          </a:p>
+          <a:p>
+            <a:pPr indent="0" marL="0">
+              <a:buNone/>
+            </a:pPr>
+            <a:r>
+              <a:rPr lang="en-US" sz="1920" dirty="0">
                 <a:solidFill>
                   <a:srgbClr val="003A63"/>
                 </a:solidFill>
@@ -17835,9 +17841,9 @@
                 <a:ea typeface="Aptos" pitchFamily="34" charset="-122"/>
                 <a:cs typeface="Aptos" pitchFamily="34" charset="-120"/>
               </a:rPr>
-              <a:t>• The tool helps reduce manual review time, but it does not determine the outbreak source or.</a:t>
-            </a:r>
-            <a:endParaRPr lang="en-US" sz="2100" dirty="0"/>
+              <a:t>• The tool helps reduce manual review time, but it does not determine the.</a:t>
+            </a:r>
+            <a:endParaRPr lang="en-US" sz="1920" dirty="0"/>
           </a:p>
         </p:txBody>
       </p:sp>
@@ -17849,12 +17855,12 @@
         </p:nvSpPr>
         <p:spPr>
           <a:xfrm>
-            <a:off x="7635240" y="1325880"/>
-            <a:ext cx="3474720" cy="1255471"/>
+            <a:off x="7543800" y="1325880"/>
+            <a:ext cx="3611880" cy="1261872"/>
           </a:xfrm>
           <a:prstGeom prst="roundRect">
             <a:avLst>
-              <a:gd name="adj" fmla="val 8740"/>
+              <a:gd name="adj" fmla="val 8696"/>
             </a:avLst>
           </a:prstGeom>
           <a:solidFill>
@@ -17876,8 +17882,8 @@
         </p:nvSpPr>
         <p:spPr>
           <a:xfrm>
-            <a:off x="7799832" y="1472184"/>
-            <a:ext cx="3145536" cy="256032"/>
+            <a:off x="7708392" y="1453896"/>
+            <a:ext cx="3282696" cy="228600"/>
           </a:xfrm>
           <a:prstGeom prst="rect">
             <a:avLst/>
@@ -17893,7 +17899,7 @@
               <a:buNone/>
             </a:pPr>
             <a:r>
-              <a:rPr lang="en-US" sz="1300" b="1" dirty="0">
+              <a:rPr lang="en-US" sz="1220" b="1" dirty="0">
                 <a:solidFill>
                   <a:srgbClr val="0068B7"/>
                 </a:solidFill>
@@ -17903,7 +17909,7 @@
               </a:rPr>
               <a:t>Core concept</a:t>
             </a:r>
-            <a:endParaRPr lang="en-US" sz="1300" dirty="0"/>
+            <a:endParaRPr lang="en-US" sz="1220" dirty="0"/>
           </a:p>
         </p:txBody>
       </p:sp>
@@ -17915,8 +17921,8 @@
         </p:nvSpPr>
         <p:spPr>
           <a:xfrm>
-            <a:off x="7799832" y="1801368"/>
-            <a:ext cx="3145536" cy="688543"/>
+            <a:off x="7708392" y="1764792"/>
+            <a:ext cx="3282696" cy="749808"/>
           </a:xfrm>
           <a:prstGeom prst="rect">
             <a:avLst/>
@@ -17934,7 +17940,7 @@
               <a:buNone/>
             </a:pPr>
             <a:r>
-              <a:rPr lang="en-US" sz="1320" dirty="0">
+              <a:rPr lang="en-US" sz="1220" dirty="0">
                 <a:solidFill>
                   <a:srgbClr val="17364A"/>
                 </a:solidFill>
@@ -17942,9 +17948,9 @@
                 <a:ea typeface="Aptos" pitchFamily="34" charset="-122"/>
                 <a:cs typeface="Aptos" pitchFamily="34" charset="-120"/>
               </a:rPr>
-              <a:t>During a foodborne illness investigation, AI is used to summarize interview notes and extract possible.</a:t>
-            </a:r>
-            <a:endParaRPr lang="en-US" sz="1320" dirty="0"/>
+              <a:t>During a foodborne illness investigation, AI is used to summarize interview.</a:t>
+            </a:r>
+            <a:endParaRPr lang="en-US" sz="1220" dirty="0"/>
           </a:p>
         </p:txBody>
       </p:sp>
@@ -17956,12 +17962,12 @@
         </p:nvSpPr>
         <p:spPr>
           <a:xfrm>
-            <a:off x="7635240" y="2718511"/>
-            <a:ext cx="3474720" cy="1328623"/>
+            <a:off x="7543800" y="2724912"/>
+            <a:ext cx="3611880" cy="1527048"/>
           </a:xfrm>
           <a:prstGeom prst="roundRect">
             <a:avLst>
-              <a:gd name="adj" fmla="val 8259"/>
+              <a:gd name="adj" fmla="val 7186"/>
             </a:avLst>
           </a:prstGeom>
           <a:solidFill>
@@ -17983,8 +17989,8 @@
         </p:nvSpPr>
         <p:spPr>
           <a:xfrm>
-            <a:off x="7799832" y="2864815"/>
-            <a:ext cx="3145536" cy="256032"/>
+            <a:off x="7708392" y="2852928"/>
+            <a:ext cx="3282696" cy="228600"/>
           </a:xfrm>
           <a:prstGeom prst="rect">
             <a:avLst/>
@@ -18000,7 +18006,7 @@
               <a:buNone/>
             </a:pPr>
             <a:r>
-              <a:rPr lang="en-US" sz="1300" b="1" dirty="0">
+              <a:rPr lang="en-US" sz="1220" b="1" dirty="0">
                 <a:solidFill>
                   <a:srgbClr val="0068B7"/>
                 </a:solidFill>
@@ -18010,7 +18016,7 @@
               </a:rPr>
               <a:t>Concept checkpoints</a:t>
             </a:r>
-            <a:endParaRPr lang="en-US" sz="1300" dirty="0"/>
+            <a:endParaRPr lang="en-US" sz="1220" dirty="0"/>
           </a:p>
         </p:txBody>
       </p:sp>
@@ -18022,8 +18028,8 @@
         </p:nvSpPr>
         <p:spPr>
           <a:xfrm>
-            <a:off x="7818120" y="3230575"/>
-            <a:ext cx="3090672" cy="670255"/>
+            <a:off x="7726680" y="3182112"/>
+            <a:ext cx="3227832" cy="960120"/>
           </a:xfrm>
           <a:prstGeom prst="rect">
             <a:avLst/>
@@ -18041,7 +18047,7 @@
               <a:buNone/>
             </a:pPr>
             <a:r>
-              <a:rPr lang="en-US" sz="1220" dirty="0">
+              <a:rPr lang="en-US" sz="1140" dirty="0">
                 <a:solidFill>
                   <a:srgbClr val="17364A"/>
                 </a:solidFill>
@@ -18049,16 +18055,16 @@
                 <a:ea typeface="Aptos" pitchFamily="34" charset="-122"/>
                 <a:cs typeface="Aptos" pitchFamily="34" charset="-120"/>
               </a:rPr>
-              <a:t>During a foodborne illness investigation, AI is used to summarize.</a:t>
-            </a:r>
-            <a:endParaRPr lang="en-US" sz="1220" dirty="0"/>
-          </a:p>
-          <a:p>
-            <a:pPr indent="0" marL="0">
-              <a:buNone/>
-            </a:pPr>
-            <a:r>
-              <a:rPr lang="en-US" sz="1220" dirty="0">
+              <a:t>During a foodborne illness investigation, AI is.</a:t>
+            </a:r>
+            <a:endParaRPr lang="en-US" sz="1140" dirty="0"/>
+          </a:p>
+          <a:p>
+            <a:pPr indent="0" marL="0">
+              <a:buNone/>
+            </a:pPr>
+            <a:r>
+              <a:rPr lang="en-US" sz="1140" dirty="0">
                 <a:solidFill>
                   <a:srgbClr val="17364A"/>
                 </a:solidFill>
@@ -18066,16 +18072,16 @@
                 <a:ea typeface="Aptos" pitchFamily="34" charset="-122"/>
                 <a:cs typeface="Aptos" pitchFamily="34" charset="-120"/>
               </a:rPr>
-              <a:t>Investigators compare the extracted exposures to original notes,.</a:t>
-            </a:r>
-            <a:endParaRPr lang="en-US" sz="1220" dirty="0"/>
-          </a:p>
-          <a:p>
-            <a:pPr indent="0" marL="0">
-              <a:buNone/>
-            </a:pPr>
-            <a:r>
-              <a:rPr lang="en-US" sz="1220" dirty="0">
+              <a:t>Investigators compare the extracted exposures to.</a:t>
+            </a:r>
+            <a:endParaRPr lang="en-US" sz="1140" dirty="0"/>
+          </a:p>
+          <a:p>
+            <a:pPr indent="0" marL="0">
+              <a:buNone/>
+            </a:pPr>
+            <a:r>
+              <a:rPr lang="en-US" sz="1140" dirty="0">
                 <a:solidFill>
                   <a:srgbClr val="17364A"/>
                 </a:solidFill>
@@ -18083,9 +18089,9 @@
                 <a:ea typeface="Aptos" pitchFamily="34" charset="-122"/>
                 <a:cs typeface="Aptos" pitchFamily="34" charset="-120"/>
               </a:rPr>
-              <a:t>The tool helps reduce manual review time, but it does not.</a:t>
-            </a:r>
-            <a:endParaRPr lang="en-US" sz="1220" dirty="0"/>
+              <a:t>The tool helps reduce manual review time, but it.</a:t>
+            </a:r>
+            <a:endParaRPr lang="en-US" sz="1140" dirty="0"/>
           </a:p>
         </p:txBody>
       </p:sp>
@@ -18097,12 +18103,12 @@
         </p:nvSpPr>
         <p:spPr>
           <a:xfrm>
-            <a:off x="7635240" y="4184294"/>
-            <a:ext cx="3474720" cy="1466698"/>
+            <a:off x="7543800" y="4389120"/>
+            <a:ext cx="3611880" cy="1261872"/>
           </a:xfrm>
           <a:prstGeom prst="roundRect">
             <a:avLst>
-              <a:gd name="adj" fmla="val 7481"/>
+              <a:gd name="adj" fmla="val 8696"/>
             </a:avLst>
           </a:prstGeom>
           <a:solidFill>
@@ -18124,8 +18130,8 @@
         </p:nvSpPr>
         <p:spPr>
           <a:xfrm>
-            <a:off x="7799832" y="4330598"/>
-            <a:ext cx="3145536" cy="256032"/>
+            <a:off x="7708392" y="4517136"/>
+            <a:ext cx="3282696" cy="228600"/>
           </a:xfrm>
           <a:prstGeom prst="rect">
             <a:avLst/>
@@ -18141,7 +18147,7 @@
               <a:buNone/>
             </a:pPr>
             <a:r>
-              <a:rPr lang="en-US" sz="1300" b="1" dirty="0">
+              <a:rPr lang="en-US" sz="1220" b="1" dirty="0">
                 <a:solidFill>
                   <a:srgbClr val="0068B7"/>
                 </a:solidFill>
@@ -18151,7 +18157,7 @@
               </a:rPr>
               <a:t>Apply it</a:t>
             </a:r>
-            <a:endParaRPr lang="en-US" sz="1300" dirty="0"/>
+            <a:endParaRPr lang="en-US" sz="1220" dirty="0"/>
           </a:p>
         </p:txBody>
       </p:sp>
@@ -18163,8 +18169,8 @@
         </p:nvSpPr>
         <p:spPr>
           <a:xfrm>
-            <a:off x="7799832" y="4659782"/>
-            <a:ext cx="3145536" cy="899770"/>
+            <a:off x="7708392" y="4828032"/>
+            <a:ext cx="3282696" cy="749808"/>
           </a:xfrm>
           <a:prstGeom prst="rect">
             <a:avLst/>
@@ -18182,7 +18188,7 @@
               <a:buNone/>
             </a:pPr>
             <a:r>
-              <a:rPr lang="en-US" sz="1320" dirty="0">
+              <a:rPr lang="en-US" sz="1220" dirty="0">
                 <a:solidFill>
                   <a:srgbClr val="17364A"/>
                 </a:solidFill>
@@ -18190,9 +18196,9 @@
                 <a:ea typeface="Aptos" pitchFamily="34" charset="-122"/>
                 <a:cs typeface="Aptos" pitchFamily="34" charset="-120"/>
               </a:rPr>
-              <a:t>Connect the concept to public health purpose, responsible use, required safeguards, documentation, and the next action a department should take.</a:t>
-            </a:r>
-            <a:endParaRPr lang="en-US" sz="1320" dirty="0"/>
+              <a:t>Connect the concept to public health purpose, responsible use, required.</a:t>
+            </a:r>
+            <a:endParaRPr lang="en-US" sz="1220" dirty="0"/>
           </a:p>
         </p:txBody>
       </p:sp>
@@ -18483,8 +18489,8 @@
         </p:nvSpPr>
         <p:spPr>
           <a:xfrm>
-            <a:off x="868680" y="1508760"/>
-            <a:ext cx="6309360" cy="4160520"/>
+            <a:off x="822960" y="1463040"/>
+            <a:ext cx="6565392" cy="4343400"/>
           </a:xfrm>
           <a:prstGeom prst="rect">
             <a:avLst/>
@@ -18502,7 +18508,7 @@
               <a:buNone/>
             </a:pPr>
             <a:r>
-              <a:rPr lang="en-US" sz="2100" dirty="0">
+              <a:rPr lang="en-US" sz="1920" dirty="0">
                 <a:solidFill>
                   <a:srgbClr val="003A63"/>
                 </a:solidFill>
@@ -18510,16 +18516,16 @@
                 <a:ea typeface="Aptos" pitchFamily="34" charset="-122"/>
                 <a:cs typeface="Aptos" pitchFamily="34" charset="-120"/>
               </a:rPr>
-              <a:t>• AI can support case investigation by reducing the burden of reviewing large volumes of.</a:t>
-            </a:r>
-            <a:endParaRPr lang="en-US" sz="2100" dirty="0"/>
-          </a:p>
-          <a:p>
-            <a:pPr indent="0" marL="0">
-              <a:buNone/>
-            </a:pPr>
-            <a:r>
-              <a:rPr lang="en-US" sz="2100" dirty="0">
+              <a:t>• AI can support case investigation by reducing the burden of reviewing large.</a:t>
+            </a:r>
+            <a:endParaRPr lang="en-US" sz="1920" dirty="0"/>
+          </a:p>
+          <a:p>
+            <a:pPr indent="0" marL="0">
+              <a:buNone/>
+            </a:pPr>
+            <a:r>
+              <a:rPr lang="en-US" sz="1920" dirty="0">
                 <a:solidFill>
                   <a:srgbClr val="003A63"/>
                 </a:solidFill>
@@ -18527,16 +18533,16 @@
                 <a:ea typeface="Aptos" pitchFamily="34" charset="-122"/>
                 <a:cs typeface="Aptos" pitchFamily="34" charset="-120"/>
               </a:rPr>
-              <a:t>• Natural language processing and generative AI may help summarize case notes, identify missing.</a:t>
-            </a:r>
-            <a:endParaRPr lang="en-US" sz="2100" dirty="0"/>
-          </a:p>
-          <a:p>
-            <a:pPr indent="0" marL="0">
-              <a:buNone/>
-            </a:pPr>
-            <a:r>
-              <a:rPr lang="en-US" sz="2100" dirty="0">
+              <a:t>• Natural language processing and generative AI may help summarize case notes,.</a:t>
+            </a:r>
+            <a:endParaRPr lang="en-US" sz="1920" dirty="0"/>
+          </a:p>
+          <a:p>
+            <a:pPr indent="0" marL="0">
+              <a:buNone/>
+            </a:pPr>
+            <a:r>
+              <a:rPr lang="en-US" sz="1920" dirty="0">
                 <a:solidFill>
                   <a:srgbClr val="003A63"/>
                 </a:solidFill>
@@ -18544,9 +18550,9 @@
                 <a:ea typeface="Aptos" pitchFamily="34" charset="-122"/>
                 <a:cs typeface="Aptos" pitchFamily="34" charset="-120"/>
               </a:rPr>
-              <a:t>• These tasks are appropriate only when outputs are traceable to source material and.</a:t>
-            </a:r>
-            <a:endParaRPr lang="en-US" sz="2100" dirty="0"/>
+              <a:t>• These tasks are appropriate only when outputs are traceable to source.</a:t>
+            </a:r>
+            <a:endParaRPr lang="en-US" sz="1920" dirty="0"/>
           </a:p>
         </p:txBody>
       </p:sp>
@@ -18558,12 +18564,12 @@
         </p:nvSpPr>
         <p:spPr>
           <a:xfrm>
-            <a:off x="7635240" y="1325880"/>
-            <a:ext cx="3474720" cy="1255471"/>
+            <a:off x="7543800" y="1325880"/>
+            <a:ext cx="3611880" cy="1261872"/>
           </a:xfrm>
           <a:prstGeom prst="roundRect">
             <a:avLst>
-              <a:gd name="adj" fmla="val 8740"/>
+              <a:gd name="adj" fmla="val 8696"/>
             </a:avLst>
           </a:prstGeom>
           <a:solidFill>
@@ -18585,8 +18591,8 @@
         </p:nvSpPr>
         <p:spPr>
           <a:xfrm>
-            <a:off x="7799832" y="1472184"/>
-            <a:ext cx="3145536" cy="256032"/>
+            <a:off x="7708392" y="1453896"/>
+            <a:ext cx="3282696" cy="228600"/>
           </a:xfrm>
           <a:prstGeom prst="rect">
             <a:avLst/>
@@ -18602,7 +18608,7 @@
               <a:buNone/>
             </a:pPr>
             <a:r>
-              <a:rPr lang="en-US" sz="1300" b="1" dirty="0">
+              <a:rPr lang="en-US" sz="1220" b="1" dirty="0">
                 <a:solidFill>
                   <a:srgbClr val="0068B7"/>
                 </a:solidFill>
@@ -18612,7 +18618,7 @@
               </a:rPr>
               <a:t>Core concept</a:t>
             </a:r>
-            <a:endParaRPr lang="en-US" sz="1300" dirty="0"/>
+            <a:endParaRPr lang="en-US" sz="1220" dirty="0"/>
           </a:p>
         </p:txBody>
       </p:sp>
@@ -18624,8 +18630,8 @@
         </p:nvSpPr>
         <p:spPr>
           <a:xfrm>
-            <a:off x="7799832" y="1801368"/>
-            <a:ext cx="3145536" cy="688543"/>
+            <a:off x="7708392" y="1764792"/>
+            <a:ext cx="3282696" cy="749808"/>
           </a:xfrm>
           <a:prstGeom prst="rect">
             <a:avLst/>
@@ -18643,7 +18649,7 @@
               <a:buNone/>
             </a:pPr>
             <a:r>
-              <a:rPr lang="en-US" sz="1320" dirty="0">
+              <a:rPr lang="en-US" sz="1220" dirty="0">
                 <a:solidFill>
                   <a:srgbClr val="17364A"/>
                 </a:solidFill>
@@ -18651,9 +18657,9 @@
                 <a:ea typeface="Aptos" pitchFamily="34" charset="-122"/>
                 <a:cs typeface="Aptos" pitchFamily="34" charset="-120"/>
               </a:rPr>
-              <a:t>AI can support case investigation by reducing the burden of reviewing large volumes of information.</a:t>
-            </a:r>
-            <a:endParaRPr lang="en-US" sz="1320" dirty="0"/>
+              <a:t>AI can support case investigation by reducing the burden of reviewing large.</a:t>
+            </a:r>
+            <a:endParaRPr lang="en-US" sz="1220" dirty="0"/>
           </a:p>
         </p:txBody>
       </p:sp>
@@ -18665,12 +18671,12 @@
         </p:nvSpPr>
         <p:spPr>
           <a:xfrm>
-            <a:off x="7635240" y="2718511"/>
-            <a:ext cx="3474720" cy="1328623"/>
+            <a:off x="7543800" y="2724912"/>
+            <a:ext cx="3611880" cy="1527048"/>
           </a:xfrm>
           <a:prstGeom prst="roundRect">
             <a:avLst>
-              <a:gd name="adj" fmla="val 8259"/>
+              <a:gd name="adj" fmla="val 7186"/>
             </a:avLst>
           </a:prstGeom>
           <a:solidFill>
@@ -18692,8 +18698,8 @@
         </p:nvSpPr>
         <p:spPr>
           <a:xfrm>
-            <a:off x="7799832" y="2864815"/>
-            <a:ext cx="3145536" cy="256032"/>
+            <a:off x="7708392" y="2852928"/>
+            <a:ext cx="3282696" cy="228600"/>
           </a:xfrm>
           <a:prstGeom prst="rect">
             <a:avLst/>
@@ -18709,7 +18715,7 @@
               <a:buNone/>
             </a:pPr>
             <a:r>
-              <a:rPr lang="en-US" sz="1300" b="1" dirty="0">
+              <a:rPr lang="en-US" sz="1220" b="1" dirty="0">
                 <a:solidFill>
                   <a:srgbClr val="0068B7"/>
                 </a:solidFill>
@@ -18719,7 +18725,7 @@
               </a:rPr>
               <a:t>Concept checkpoints</a:t>
             </a:r>
-            <a:endParaRPr lang="en-US" sz="1300" dirty="0"/>
+            <a:endParaRPr lang="en-US" sz="1220" dirty="0"/>
           </a:p>
         </p:txBody>
       </p:sp>
@@ -18731,8 +18737,8 @@
         </p:nvSpPr>
         <p:spPr>
           <a:xfrm>
-            <a:off x="7818120" y="3230575"/>
-            <a:ext cx="3090672" cy="670255"/>
+            <a:off x="7726680" y="3182112"/>
+            <a:ext cx="3227832" cy="960120"/>
           </a:xfrm>
           <a:prstGeom prst="rect">
             <a:avLst/>
@@ -18750,7 +18756,7 @@
               <a:buNone/>
             </a:pPr>
             <a:r>
-              <a:rPr lang="en-US" sz="1220" dirty="0">
+              <a:rPr lang="en-US" sz="1140" dirty="0">
                 <a:solidFill>
                   <a:srgbClr val="17364A"/>
                 </a:solidFill>
@@ -18758,16 +18764,16 @@
                 <a:ea typeface="Aptos" pitchFamily="34" charset="-122"/>
                 <a:cs typeface="Aptos" pitchFamily="34" charset="-120"/>
               </a:rPr>
-              <a:t>Natural language processing and generative AI may help summarize.</a:t>
-            </a:r>
-            <a:endParaRPr lang="en-US" sz="1220" dirty="0"/>
-          </a:p>
-          <a:p>
-            <a:pPr indent="0" marL="0">
-              <a:buNone/>
-            </a:pPr>
-            <a:r>
-              <a:rPr lang="en-US" sz="1220" dirty="0">
+              <a:t>Natural language processing and generative AI may.</a:t>
+            </a:r>
+            <a:endParaRPr lang="en-US" sz="1140" dirty="0"/>
+          </a:p>
+          <a:p>
+            <a:pPr indent="0" marL="0">
+              <a:buNone/>
+            </a:pPr>
+            <a:r>
+              <a:rPr lang="en-US" sz="1140" dirty="0">
                 <a:solidFill>
                   <a:srgbClr val="17364A"/>
                 </a:solidFill>
@@ -18775,16 +18781,16 @@
                 <a:ea typeface="Aptos" pitchFamily="34" charset="-122"/>
                 <a:cs typeface="Aptos" pitchFamily="34" charset="-120"/>
               </a:rPr>
-              <a:t>These tasks are appropriate only when outputs are traceable to.</a:t>
-            </a:r>
-            <a:endParaRPr lang="en-US" sz="1220" dirty="0"/>
-          </a:p>
-          <a:p>
-            <a:pPr indent="0" marL="0">
-              <a:buNone/>
-            </a:pPr>
-            <a:r>
-              <a:rPr lang="en-US" sz="1220" dirty="0">
+              <a:t>These tasks are appropriate only when outputs are.</a:t>
+            </a:r>
+            <a:endParaRPr lang="en-US" sz="1140" dirty="0"/>
+          </a:p>
+          <a:p>
+            <a:pPr indent="0" marL="0">
+              <a:buNone/>
+            </a:pPr>
+            <a:r>
+              <a:rPr lang="en-US" sz="1140" dirty="0">
                 <a:solidFill>
                   <a:srgbClr val="17364A"/>
                 </a:solidFill>
@@ -18792,9 +18798,9 @@
                 <a:ea typeface="Aptos" pitchFamily="34" charset="-122"/>
                 <a:cs typeface="Aptos" pitchFamily="34" charset="-120"/>
               </a:rPr>
-              <a:t>Outbreak response may involve signal detection, anomaly review,.</a:t>
-            </a:r>
-            <a:endParaRPr lang="en-US" sz="1220" dirty="0"/>
+              <a:t>Outbreak response may involve signal detection,.</a:t>
+            </a:r>
+            <a:endParaRPr lang="en-US" sz="1140" dirty="0"/>
           </a:p>
         </p:txBody>
       </p:sp>
@@ -18806,12 +18812,12 @@
         </p:nvSpPr>
         <p:spPr>
           <a:xfrm>
-            <a:off x="7635240" y="4184294"/>
-            <a:ext cx="3474720" cy="1466698"/>
+            <a:off x="7543800" y="4389120"/>
+            <a:ext cx="3611880" cy="1261872"/>
           </a:xfrm>
           <a:prstGeom prst="roundRect">
             <a:avLst>
-              <a:gd name="adj" fmla="val 7481"/>
+              <a:gd name="adj" fmla="val 8696"/>
             </a:avLst>
           </a:prstGeom>
           <a:solidFill>
@@ -18833,8 +18839,8 @@
         </p:nvSpPr>
         <p:spPr>
           <a:xfrm>
-            <a:off x="7799832" y="4330598"/>
-            <a:ext cx="3145536" cy="256032"/>
+            <a:off x="7708392" y="4517136"/>
+            <a:ext cx="3282696" cy="228600"/>
           </a:xfrm>
           <a:prstGeom prst="rect">
             <a:avLst/>
@@ -18850,7 +18856,7 @@
               <a:buNone/>
             </a:pPr>
             <a:r>
-              <a:rPr lang="en-US" sz="1300" b="1" dirty="0">
+              <a:rPr lang="en-US" sz="1220" b="1" dirty="0">
                 <a:solidFill>
                   <a:srgbClr val="0068B7"/>
                 </a:solidFill>
@@ -18860,7 +18866,7 @@
               </a:rPr>
               <a:t>Apply it</a:t>
             </a:r>
-            <a:endParaRPr lang="en-US" sz="1300" dirty="0"/>
+            <a:endParaRPr lang="en-US" sz="1220" dirty="0"/>
           </a:p>
         </p:txBody>
       </p:sp>
@@ -18872,8 +18878,8 @@
         </p:nvSpPr>
         <p:spPr>
           <a:xfrm>
-            <a:off x="7799832" y="4659782"/>
-            <a:ext cx="3145536" cy="899770"/>
+            <a:off x="7708392" y="4828032"/>
+            <a:ext cx="3282696" cy="749808"/>
           </a:xfrm>
           <a:prstGeom prst="rect">
             <a:avLst/>
@@ -18891,7 +18897,7 @@
               <a:buNone/>
             </a:pPr>
             <a:r>
-              <a:rPr lang="en-US" sz="1320" dirty="0">
+              <a:rPr lang="en-US" sz="1220" dirty="0">
                 <a:solidFill>
                   <a:srgbClr val="17364A"/>
                 </a:solidFill>
@@ -18899,9 +18905,9 @@
                 <a:ea typeface="Aptos" pitchFamily="34" charset="-122"/>
                 <a:cs typeface="Aptos" pitchFamily="34" charset="-120"/>
               </a:rPr>
-              <a:t>Connect the concept to public health purpose, responsible use, required safeguards, documentation, and the next action a department should take.</a:t>
-            </a:r>
-            <a:endParaRPr lang="en-US" sz="1320" dirty="0"/>
+              <a:t>Connect the concept to public health purpose, responsible use, required.</a:t>
+            </a:r>
+            <a:endParaRPr lang="en-US" sz="1220" dirty="0"/>
           </a:p>
         </p:txBody>
       </p:sp>

--- a/downloads/presentations/modules/epi-300.pptx
+++ b/downloads/presentations/modules/epi-300.pptx
@@ -12165,7 +12165,7 @@
                 <a:ea typeface="Aptos" pitchFamily="34" charset="-122"/>
                 <a:cs typeface="Aptos" pitchFamily="34" charset="-120"/>
               </a:rPr>
-              <a:t>• 1. What should AI outputs do in case investigation?</a:t>
+              <a:t>1. What should AI outputs do in case investigation?</a:t>
             </a:r>
             <a:endParaRPr lang="en-US" sz="1920" dirty="0"/>
           </a:p>
@@ -12182,7 +12182,7 @@
                 <a:ea typeface="Aptos" pitchFamily="34" charset="-122"/>
                 <a:cs typeface="Aptos" pitchFamily="34" charset="-120"/>
               </a:rPr>
-              <a:t>• 2. What is an outbreak signal?</a:t>
+              <a:t>2. What is an outbreak signal?</a:t>
             </a:r>
             <a:endParaRPr lang="en-US" sz="1920" dirty="0"/>
           </a:p>
@@ -12199,7 +12199,7 @@
                 <a:ea typeface="Aptos" pitchFamily="34" charset="-122"/>
                 <a:cs typeface="Aptos" pitchFamily="34" charset="-120"/>
               </a:rPr>
-              <a:t>• 3. Why is uncertainty documentation important during response?</a:t>
+              <a:t>3. Why is uncertainty documentation important during response?</a:t>
             </a:r>
             <a:endParaRPr lang="en-US" sz="1920" dirty="0"/>
           </a:p>
@@ -12306,7 +12306,7 @@
                 <a:ea typeface="Aptos" pitchFamily="34" charset="-122"/>
                 <a:cs typeface="Aptos" pitchFamily="34" charset="-120"/>
               </a:rPr>
-              <a:t>1. What should AI outputs do in case investigation?</a:t>
+              <a:t>What should AI outputs do in case investigation?</a:t>
             </a:r>
             <a:endParaRPr lang="en-US" sz="1220" dirty="0"/>
           </a:p>
@@ -12413,41 +12413,7 @@
                 <a:ea typeface="Aptos" pitchFamily="34" charset="-122"/>
                 <a:cs typeface="Aptos" pitchFamily="34" charset="-120"/>
               </a:rPr>
-              <a:t>1.</a:t>
-            </a:r>
-            <a:endParaRPr lang="en-US" sz="1140" dirty="0"/>
-          </a:p>
-          <a:p>
-            <a:pPr indent="0" marL="0">
-              <a:buNone/>
-            </a:pPr>
-            <a:r>
-              <a:rPr lang="en-US" sz="1140" dirty="0">
-                <a:solidFill>
-                  <a:srgbClr val="17364A"/>
-                </a:solidFill>
-                <a:latin typeface="Aptos" pitchFamily="34" charset="0"/>
-                <a:ea typeface="Aptos" pitchFamily="34" charset="-122"/>
-                <a:cs typeface="Aptos" pitchFamily="34" charset="-120"/>
-              </a:rPr>
               <a:t>What should AI outputs do in case investigation?</a:t>
-            </a:r>
-            <a:endParaRPr lang="en-US" sz="1140" dirty="0"/>
-          </a:p>
-          <a:p>
-            <a:pPr indent="0" marL="0">
-              <a:buNone/>
-            </a:pPr>
-            <a:r>
-              <a:rPr lang="en-US" sz="1140" dirty="0">
-                <a:solidFill>
-                  <a:srgbClr val="17364A"/>
-                </a:solidFill>
-                <a:latin typeface="Aptos" pitchFamily="34" charset="0"/>
-                <a:ea typeface="Aptos" pitchFamily="34" charset="-122"/>
-                <a:cs typeface="Aptos" pitchFamily="34" charset="-120"/>
-              </a:rPr>
-              <a:t>2.</a:t>
             </a:r>
             <a:endParaRPr lang="en-US" sz="1140" dirty="0"/>
           </a:p>
